--- a/slides/12 Vampire Survivors.pptx
+++ b/slides/12 Vampire Survivors.pptx
@@ -33,6 +33,7 @@
     <p:sldId id="280" r:id="rId30"/>
     <p:sldId id="292" r:id="rId42"/>
     <p:sldId id="293" r:id="rId52"/>
+    <p:sldId id="315" r:id="rId41"/>
     <p:sldId id="294" r:id="rId53"/>
     <p:sldId id="296" r:id="rId55"/>
   </p:sldIdLst>
@@ -831,6 +832,504 @@
 </p:notes>
 </file>
 
+<file path=ppt/notesSlides/notesSlide10.xml><?xml version="1.0" encoding="utf-8"?>
+<p:notes xmlns:a="http://schemas.openxmlformats.org/drawingml/2006/main" xmlns:p="http://schemas.openxmlformats.org/presentationml/2006/main" xmlns:r="http://schemas.openxmlformats.org/officeDocument/2006/relationships">
+  <p:cSld>
+    <p:spTree>
+      <p:nvGrpSpPr>
+        <p:cNvPr id="1" name=""/>
+        <p:cNvGrpSpPr/>
+        <p:nvPr/>
+      </p:nvGrpSpPr>
+      <p:grpSpPr>
+        <a:xfrm>
+          <a:off x="0" y="0"/>
+          <a:ext cx="0" cy="0"/>
+          <a:chOff x="0" y="0"/>
+          <a:chExt cx="0" cy="0"/>
+        </a:xfrm>
+      </p:grpSpPr>
+      <p:sp>
+        <p:nvSpPr>
+          <p:cNvPr id="2" name="Slide Image Placeholder 1"/>
+          <p:cNvSpPr>
+            <a:spLocks noGrp="1"/>
+          </p:cNvSpPr>
+          <p:nvPr>
+            <p:ph type="sldImg" idx="2"/>
+          </p:nvPr>
+        </p:nvSpPr>
+        <p:spPr/>
+      </p:sp>
+      <p:sp>
+        <p:nvSpPr>
+          <p:cNvPr id="3" name="Notes Placeholder 2"/>
+          <p:cNvSpPr>
+            <a:spLocks noGrp="1"/>
+          </p:cNvSpPr>
+          <p:nvPr>
+            <p:ph type="body" idx="1"/>
+          </p:nvPr>
+        </p:nvSpPr>
+        <p:spPr/>
+        <p:txBody>
+          <a:bodyPr/>
+          <a:lstStyle/>
+          <a:p>
+            <a:r>
+              <a:t>Talking points:</a:t>
+            </a:r>
+          </a:p>
+          <a:p>
+            <a:r>
+              <a:t>- Enemies as arrays, same grid: no difference</a:t>
+            </a:r>
+          </a:p>
+          <a:p>
+            <a:r>
+              <a:t>  - 10,000 enemies: 3.9 ms instead of 4.1 ms</a:t>
+            </a:r>
+          </a:p>
+          <a:p>
+            <a:r>
+              <a:t>- The time was in the grid</a:t>
+            </a:r>
+          </a:p>
+          <a:p>
+            <a:r>
+              <a:t>  - A dictionary lookup per cell, lists of tuples</a:t>
+            </a:r>
+          </a:p>
+          <a:p>
+            <a:r>
+              <a:t>- The layout that matters: the data in the hot loop</a:t>
+            </a:r>
+          </a:p>
+          <a:p>
+            <a:r>
+              <a:t>  - Only measuring tells you which loop that is</a:t>
+            </a:r>
+          </a:p>
+        </p:txBody>
+      </p:sp>
+    </p:spTree>
+  </p:cSld>
+  <p:clrMapOvr>
+    <a:masterClrMapping/>
+  </p:clrMapOvr>
+</p:notes>
+</file>
+
+<file path=ppt/notesSlides/notesSlide11.xml><?xml version="1.0" encoding="utf-8"?>
+<p:notes xmlns:a="http://schemas.openxmlformats.org/drawingml/2006/main" xmlns:p="http://schemas.openxmlformats.org/presentationml/2006/main" xmlns:r="http://schemas.openxmlformats.org/officeDocument/2006/relationships">
+  <p:cSld>
+    <p:spTree>
+      <p:nvGrpSpPr>
+        <p:cNvPr id="1" name=""/>
+        <p:cNvGrpSpPr/>
+        <p:nvPr/>
+      </p:nvGrpSpPr>
+      <p:grpSpPr>
+        <a:xfrm>
+          <a:off x="0" y="0"/>
+          <a:ext cx="0" cy="0"/>
+          <a:chOff x="0" y="0"/>
+          <a:chExt cx="0" cy="0"/>
+        </a:xfrm>
+      </p:grpSpPr>
+      <p:sp>
+        <p:nvSpPr>
+          <p:cNvPr id="2" name="Slide Image Placeholder 1"/>
+          <p:cNvSpPr>
+            <a:spLocks noGrp="1"/>
+          </p:cNvSpPr>
+          <p:nvPr>
+            <p:ph type="sldImg" idx="2"/>
+          </p:nvPr>
+        </p:nvSpPr>
+        <p:spPr/>
+      </p:sp>
+      <p:sp>
+        <p:nvSpPr>
+          <p:cNvPr id="3" name="Notes Placeholder 2"/>
+          <p:cNvSpPr>
+            <a:spLocks noGrp="1"/>
+          </p:cNvSpPr>
+          <p:nvPr>
+            <p:ph type="body" idx="1"/>
+          </p:nvPr>
+        </p:nvSpPr>
+        <p:spPr/>
+        <p:txBody>
+          <a:bodyPr/>
+          <a:lstStyle/>
+          <a:p>
+            <a:r>
+              <a:t>Talking points:</a:t>
+            </a:r>
+          </a:p>
+          <a:p>
+            <a:r>
+              <a:t>- Every pair → grid → arrays + flat grid</a:t>
+            </a:r>
+          </a:p>
+          <a:p>
+            <a:r>
+              <a:t>  - 1,000 enemies: 1.2 → 1.3 → 0.24 ms</a:t>
+            </a:r>
+          </a:p>
+          <a:p>
+            <a:r>
+              <a:t>  - 5,000 enemies: 27 → 1.9 → 0.64 ms</a:t>
+            </a:r>
+          </a:p>
+          <a:p>
+            <a:r>
+              <a:t>  - 10,000 enemies: 107 → 4.1 → 1.3 ms</a:t>
+            </a:r>
+          </a:p>
+          <a:p>
+            <a:r>
+              <a:t>  - 20,000 enemies: — → 14.5 → 4.9 ms</a:t>
+            </a:r>
+          </a:p>
+          <a:p>
+            <a:r>
+              <a:t>- 3–5× faster than the object grid</a:t>
+            </a:r>
+          </a:p>
+          <a:p>
+            <a:r>
+              <a:t>- About 80× faster than where we started</a:t>
+            </a:r>
+          </a:p>
+        </p:txBody>
+      </p:sp>
+    </p:spTree>
+  </p:cSld>
+  <p:clrMapOvr>
+    <a:masterClrMapping/>
+  </p:clrMapOvr>
+</p:notes>
+</file>
+
+<file path=ppt/notesSlides/notesSlide12.xml><?xml version="1.0" encoding="utf-8"?>
+<p:notes xmlns:a="http://schemas.openxmlformats.org/drawingml/2006/main" xmlns:p="http://schemas.openxmlformats.org/presentationml/2006/main" xmlns:r="http://schemas.openxmlformats.org/officeDocument/2006/relationships">
+  <p:cSld>
+    <p:spTree>
+      <p:nvGrpSpPr>
+        <p:cNvPr id="1" name=""/>
+        <p:cNvGrpSpPr/>
+        <p:nvPr/>
+      </p:nvGrpSpPr>
+      <p:grpSpPr>
+        <a:xfrm>
+          <a:off x="0" y="0"/>
+          <a:ext cx="0" cy="0"/>
+          <a:chOff x="0" y="0"/>
+          <a:chExt cx="0" cy="0"/>
+        </a:xfrm>
+      </p:grpSpPr>
+      <p:sp>
+        <p:nvSpPr>
+          <p:cNvPr id="2" name="Slide Image Placeholder 1"/>
+          <p:cNvSpPr>
+            <a:spLocks noGrp="1"/>
+          </p:cNvSpPr>
+          <p:nvPr>
+            <p:ph type="sldImg" idx="2"/>
+          </p:nvPr>
+        </p:nvSpPr>
+        <p:spPr/>
+      </p:sp>
+      <p:sp>
+        <p:nvSpPr>
+          <p:cNvPr id="3" name="Notes Placeholder 2"/>
+          <p:cNvSpPr>
+            <a:spLocks noGrp="1"/>
+          </p:cNvSpPr>
+          <p:nvPr>
+            <p:ph type="body" idx="1"/>
+          </p:nvPr>
+        </p:nvSpPr>
+        <p:spPr/>
+        <p:txBody>
+          <a:bodyPr/>
+          <a:lstStyle/>
+          <a:p>
+            <a:r>
+              <a:t>Talking points:</a:t>
+            </a:r>
+          </a:p>
+          <a:p>
+            <a:r>
+              <a:t>- An enemy is an index, and indexes change</a:t>
+            </a:r>
+          </a:p>
+          <a:p>
+            <a:r>
+              <a:t>  - Don’t hold on to one across frames</a:t>
+            </a:r>
+          </a:p>
+          <a:p>
+            <a:r>
+              <a:t>- Harder to read, harder to change</a:t>
+            </a:r>
+          </a:p>
+          <a:p>
+            <a:r>
+              <a:t>- So only for what there are thousands of</a:t>
+            </a:r>
+          </a:p>
+          <a:p>
+            <a:r>
+              <a:t>  - The swarm and the gems; not the player or the bolts</a:t>
+            </a:r>
+          </a:p>
+          <a:p>
+            <a:r>
+              <a:t>- Geometry Wars: components for hundreds; its particles as data</a:t>
+            </a:r>
+          </a:p>
+        </p:txBody>
+      </p:sp>
+    </p:spTree>
+  </p:cSld>
+  <p:clrMapOvr>
+    <a:masterClrMapping/>
+  </p:clrMapOvr>
+</p:notes>
+</file>
+
+<file path=ppt/notesSlides/notesSlide13.xml><?xml version="1.0" encoding="utf-8"?>
+<p:notes xmlns:a="http://schemas.openxmlformats.org/drawingml/2006/main" xmlns:p="http://schemas.openxmlformats.org/presentationml/2006/main" xmlns:r="http://schemas.openxmlformats.org/officeDocument/2006/relationships">
+  <p:cSld>
+    <p:spTree>
+      <p:nvGrpSpPr>
+        <p:cNvPr id="1" name=""/>
+        <p:cNvGrpSpPr/>
+        <p:nvPr/>
+      </p:nvGrpSpPr>
+      <p:grpSpPr>
+        <a:xfrm>
+          <a:off x="0" y="0"/>
+          <a:ext cx="0" cy="0"/>
+          <a:chOff x="0" y="0"/>
+          <a:chExt cx="0" cy="0"/>
+        </a:xfrm>
+      </p:grpSpPr>
+      <p:sp>
+        <p:nvSpPr>
+          <p:cNvPr id="2" name="Slide Image Placeholder 1"/>
+          <p:cNvSpPr>
+            <a:spLocks noGrp="1"/>
+          </p:cNvSpPr>
+          <p:nvPr>
+            <p:ph type="sldImg" idx="2"/>
+          </p:nvPr>
+        </p:nvSpPr>
+        <p:spPr/>
+      </p:sp>
+      <p:sp>
+        <p:nvSpPr>
+          <p:cNvPr id="3" name="Notes Placeholder 2"/>
+          <p:cNvSpPr>
+            <a:spLocks noGrp="1"/>
+          </p:cNvSpPr>
+          <p:nvPr>
+            <p:ph type="body" idx="1"/>
+          </p:nvPr>
+        </p:nvSpPr>
+        <p:spPr/>
+        <p:txBody>
+          <a:bodyPr/>
+          <a:lstStyle/>
+          <a:p>
+            <a:r>
+              <a:t>Talking points:</a:t>
+            </a:r>
+          </a:p>
+          <a:p>
+            <a:r>
+              <a:t>- Gems: thousands, so arrays too</a:t>
+            </a:r>
+          </a:p>
+          <a:p>
+            <a:r>
+              <a:t>- Level up: a state pushed on the state stack (Pokemon)</a:t>
+            </a:r>
+          </a:p>
+          <a:p>
+            <a:r>
+              <a:t>- Enemy kinds: type objects (Plants vs. Zombies)</a:t>
+            </a:r>
+          </a:p>
+          <a:p>
+            <a:r>
+              <a:t>- A fixed timestep (GMDCore’s Core)</a:t>
+            </a:r>
+          </a:p>
+          <a:p>
+            <a:r>
+              <a:t>- Survive five minutes</a:t>
+            </a:r>
+          </a:p>
+        </p:txBody>
+      </p:sp>
+    </p:spTree>
+  </p:cSld>
+  <p:clrMapOvr>
+    <a:masterClrMapping/>
+  </p:clrMapOvr>
+</p:notes>
+</file>
+
+<file path=ppt/notesSlides/notesSlide14.xml><?xml version="1.0" encoding="utf-8"?>
+<p:notes xmlns:a="http://schemas.openxmlformats.org/drawingml/2006/main" xmlns:p="http://schemas.openxmlformats.org/presentationml/2006/main" xmlns:r="http://schemas.openxmlformats.org/officeDocument/2006/relationships">
+  <p:cSld>
+    <p:spTree>
+      <p:nvGrpSpPr>
+        <p:cNvPr id="1" name=""/>
+        <p:cNvGrpSpPr/>
+        <p:nvPr/>
+      </p:nvGrpSpPr>
+      <p:grpSpPr>
+        <a:xfrm>
+          <a:off x="0" y="0"/>
+          <a:ext cx="0" cy="0"/>
+          <a:chOff x="0" y="0"/>
+          <a:chExt cx="0" cy="0"/>
+        </a:xfrm>
+      </p:grpSpPr>
+      <p:sp>
+        <p:nvSpPr>
+          <p:cNvPr id="2" name="Slide Image Placeholder 1"/>
+          <p:cNvSpPr>
+            <a:spLocks noGrp="1"/>
+          </p:cNvSpPr>
+          <p:nvPr>
+            <p:ph type="sldImg" idx="2"/>
+          </p:nvPr>
+        </p:nvSpPr>
+        <p:spPr/>
+      </p:sp>
+      <p:sp>
+        <p:nvSpPr>
+          <p:cNvPr id="3" name="Notes Placeholder 2"/>
+          <p:cNvSpPr>
+            <a:spLocks noGrp="1"/>
+          </p:cNvSpPr>
+          <p:nvPr>
+            <p:ph type="body" idx="1"/>
+          </p:nvPr>
+        </p:nvSpPr>
+        <p:spPr/>
+        <p:txBody>
+          <a:bodyPr/>
+          <a:lstStyle/>
+          <a:p>
+            <a:r>
+              <a:t>Talking points:</a:t>
+            </a:r>
+          </a:p>
+          <a:p>
+            <a:r>
+              <a:t>- “Premature optimization is the root of all evil. Yet we should not pass up our opportunities in that critical 3%.” (Knuth)</a:t>
+            </a:r>
+          </a:p>
+          <a:p>
+            <a:r>
+              <a:t>- 1. Measure</a:t>
+            </a:r>
+          </a:p>
+          <a:p>
+            <a:r>
+              <a:t>- 2. Fix the algorithm</a:t>
+            </a:r>
+          </a:p>
+          <a:p>
+            <a:r>
+              <a:t>- 3. Fix the data, where it’s hot</a:t>
+            </a:r>
+          </a:p>
+          <a:p>
+            <a:r>
+              <a:t>- 4. Measure again</a:t>
+            </a:r>
+          </a:p>
+          <a:p>
+            <a:r>
+              <a:t>- 5. Keep a test against the simple code</a:t>
+            </a:r>
+          </a:p>
+        </p:txBody>
+      </p:sp>
+    </p:spTree>
+  </p:cSld>
+  <p:clrMapOvr>
+    <a:masterClrMapping/>
+  </p:clrMapOvr>
+</p:notes>
+</file>
+
+<file path=ppt/notesSlides/notesSlide15.xml><?xml version="1.0" encoding="utf-8"?>
+<p:notes xmlns:a="http://schemas.openxmlformats.org/drawingml/2006/main" xmlns:p="http://schemas.openxmlformats.org/presentationml/2006/main" xmlns:r="http://schemas.openxmlformats.org/officeDocument/2006/relationships">
+  <p:cSld>
+    <p:spTree>
+      <p:nvGrpSpPr>
+        <p:cNvPr id="1" name=""/>
+        <p:cNvGrpSpPr/>
+        <p:nvPr/>
+      </p:nvGrpSpPr>
+      <p:grpSpPr>
+        <a:xfrm>
+          <a:off x="0" y="0"/>
+          <a:ext cx="0" cy="0"/>
+          <a:chOff x="0" y="0"/>
+          <a:chExt cx="0" cy="0"/>
+        </a:xfrm>
+      </p:grpSpPr>
+      <p:sp>
+        <p:nvSpPr>
+          <p:cNvPr id="2" name="Slide Image Placeholder 1"/>
+          <p:cNvSpPr>
+            <a:spLocks noGrp="1"/>
+          </p:cNvSpPr>
+          <p:nvPr>
+            <p:ph type="sldImg" idx="2"/>
+          </p:nvPr>
+        </p:nvSpPr>
+        <p:spPr/>
+      </p:sp>
+      <p:sp>
+        <p:nvSpPr>
+          <p:cNvPr id="3" name="Notes Placeholder 2"/>
+          <p:cNvSpPr>
+            <a:spLocks noGrp="1"/>
+          </p:cNvSpPr>
+          <p:nvPr>
+            <p:ph type="body" idx="1"/>
+          </p:nvPr>
+        </p:nvSpPr>
+        <p:spPr/>
+        <p:txBody>
+          <a:bodyPr/>
+          <a:lstStyle/>
+          <a:p>
+            <a:r>
+              <a:t>Ask, let them answer in pairs for a minute, then take a few answers. These are the site’s Check yourself questions.</a:t>
+            </a:r>
+          </a:p>
+        </p:txBody>
+      </p:sp>
+    </p:spTree>
+  </p:cSld>
+  <p:clrMapOvr>
+    <a:masterClrMapping/>
+  </p:clrMapOvr>
+</p:notes>
+</file>
+
 <file path=ppt/notesSlides/notesSlide2.xml><?xml version="1.0" encoding="utf-8"?>
 <p:notes xmlns:a="http://schemas.openxmlformats.org/drawingml/2006/main" xmlns:r="http://schemas.openxmlformats.org/officeDocument/2006/relationships" xmlns:mc="http://schemas.openxmlformats.org/markup-compatibility/2006" xmlns:mv="urn:schemas-microsoft-com:mac:vml" xmlns:p="http://schemas.openxmlformats.org/presentationml/2006/main" xmlns:c="http://schemas.openxmlformats.org/drawingml/2006/chart" xmlns:dgm="http://schemas.openxmlformats.org/drawingml/2006/diagram" xmlns:o="urn:schemas-microsoft-com:office:office" xmlns:v="urn:schemas-microsoft-com:vml" xmlns:pvml="urn:schemas-microsoft-com:office:powerpoint" xmlns:com="http://schemas.openxmlformats.org/drawingml/2006/compatibility" xmlns:p14="http://schemas.microsoft.com/office/powerpoint/2010/main" xmlns:p15="http://schemas.microsoft.com/office/powerpoint/2012/main" xmlns:ahyp="http://schemas.microsoft.com/office/drawing/2018/hyperlinkcolor" showMasterPhAnim="0" showMasterSp="0">
   <p:cSld>
@@ -1302,19 +1801,318 @@
           </a:bodyPr>
           <a:lstStyle/>
           <a:p>
-            <a:pPr indent="0" lvl="0" marL="0" rtl="0" algn="l">
-              <a:spcBef>
-                <a:spcPts val="0"/>
-              </a:spcBef>
-              <a:spcAft>
-                <a:spcPts val="0"/>
-              </a:spcAft>
-              <a:buNone/>
-            </a:pPr>
-            <a:r>
-              <a:t/>
-            </a:r>
-            <a:endParaRPr/>
+            <a:r>
+              <a:t>Talking points:</a:t>
+            </a:r>
+          </a:p>
+          <a:p>
+            <a:r>
+              <a:t>- All Source code for today’s game can be found here:</a:t>
+            </a:r>
+          </a:p>
+          <a:p>
+            <a:r>
+              <a:t>  - github.com/Metamate/gar-games (folder 12-vampire-survivors)</a:t>
+            </a:r>
+          </a:p>
+          <a:p>
+            <a:r>
+              <a:t>- The game is built up in steps: Survivors0 → Survivors4, and tests in Survivors.Tests</a:t>
+            </a:r>
+          </a:p>
+          <a:p>
+            <a:r>
+              <a:t>  - Each step is a separate project that adds one concept</a:t>
+            </a:r>
+          </a:p>
+          <a:p>
+            <a:r>
+              <a:t>  - Compare neighbouring steps to see exactly what changed</a:t>
+            </a:r>
+          </a:p>
+          <a:p>
+            <a:r>
+              <a:t>- Survivors4 is the finished game, and the starting point for the exercises</a:t>
+            </a:r>
+          </a:p>
+        </p:txBody>
+      </p:sp>
+    </p:spTree>
+  </p:cSld>
+  <p:clrMapOvr>
+    <a:masterClrMapping/>
+  </p:clrMapOvr>
+</p:notes>
+</file>
+
+<file path=ppt/notesSlides/notesSlide7.xml><?xml version="1.0" encoding="utf-8"?>
+<p:notes xmlns:a="http://schemas.openxmlformats.org/drawingml/2006/main" xmlns:p="http://schemas.openxmlformats.org/presentationml/2006/main" xmlns:r="http://schemas.openxmlformats.org/officeDocument/2006/relationships">
+  <p:cSld>
+    <p:spTree>
+      <p:nvGrpSpPr>
+        <p:cNvPr id="1" name=""/>
+        <p:cNvGrpSpPr/>
+        <p:nvPr/>
+      </p:nvGrpSpPr>
+      <p:grpSpPr>
+        <a:xfrm>
+          <a:off x="0" y="0"/>
+          <a:ext cx="0" cy="0"/>
+          <a:chOff x="0" y="0"/>
+          <a:chExt cx="0" cy="0"/>
+        </a:xfrm>
+      </p:grpSpPr>
+      <p:sp>
+        <p:nvSpPr>
+          <p:cNvPr id="2" name="Slide Image Placeholder 1"/>
+          <p:cNvSpPr>
+            <a:spLocks noGrp="1"/>
+          </p:cNvSpPr>
+          <p:nvPr>
+            <p:ph type="sldImg" idx="2"/>
+          </p:nvPr>
+        </p:nvSpPr>
+        <p:spPr/>
+      </p:sp>
+      <p:sp>
+        <p:nvSpPr>
+          <p:cNvPr id="3" name="Notes Placeholder 2"/>
+          <p:cNvSpPr>
+            <a:spLocks noGrp="1"/>
+          </p:cNvSpPr>
+          <p:nvPr>
+            <p:ph type="body" idx="1"/>
+          </p:nvPr>
+        </p:nvSpPr>
+        <p:spPr/>
+        <p:txBody>
+          <a:bodyPr/>
+          <a:lstStyle/>
+          <a:p>
+            <a:r>
+              <a:t>Talking points:</a:t>
+            </a:r>
+          </a:p>
+          <a:p>
+            <a:r>
+              <a:t>- Separate: almost all of it</a:t>
+            </a:r>
+          </a:p>
+          <a:p>
+            <a:r>
+              <a:t>- Move + separate, per step (one laptop)</a:t>
+            </a:r>
+          </a:p>
+          <a:p>
+            <a:r>
+              <a:t>  - 1,000 enemies: 1.2 ms</a:t>
+            </a:r>
+          </a:p>
+          <a:p>
+            <a:r>
+              <a:t>  - 2,000 enemies: 4.5 ms</a:t>
+            </a:r>
+          </a:p>
+          <a:p>
+            <a:r>
+              <a:t>  - 5,000 enemies: 27 ms</a:t>
+            </a:r>
+          </a:p>
+          <a:p>
+            <a:r>
+              <a:t>  - 10,000 enemies: 107 ms</a:t>
+            </a:r>
+          </a:p>
+          <a:p>
+            <a:r>
+              <a:t>- Twice the enemies, four times the work: O(n²)</a:t>
+            </a:r>
+          </a:p>
+          <a:p>
+            <a:r>
+              <a:t>- A frame at 60 FPS has 16.7 ms</a:t>
+            </a:r>
+          </a:p>
+        </p:txBody>
+      </p:sp>
+    </p:spTree>
+  </p:cSld>
+  <p:clrMapOvr>
+    <a:masterClrMapping/>
+  </p:clrMapOvr>
+</p:notes>
+</file>
+
+<file path=ppt/notesSlides/notesSlide8.xml><?xml version="1.0" encoding="utf-8"?>
+<p:notes xmlns:a="http://schemas.openxmlformats.org/drawingml/2006/main" xmlns:p="http://schemas.openxmlformats.org/presentationml/2006/main" xmlns:r="http://schemas.openxmlformats.org/officeDocument/2006/relationships">
+  <p:cSld>
+    <p:spTree>
+      <p:nvGrpSpPr>
+        <p:cNvPr id="1" name=""/>
+        <p:cNvGrpSpPr/>
+        <p:nvPr/>
+      </p:nvGrpSpPr>
+      <p:grpSpPr>
+        <a:xfrm>
+          <a:off x="0" y="0"/>
+          <a:ext cx="0" cy="0"/>
+          <a:chOff x="0" y="0"/>
+          <a:chExt cx="0" cy="0"/>
+        </a:xfrm>
+      </p:grpSpPr>
+      <p:sp>
+        <p:nvSpPr>
+          <p:cNvPr id="2" name="Slide Image Placeholder 1"/>
+          <p:cNvSpPr>
+            <a:spLocks noGrp="1"/>
+          </p:cNvSpPr>
+          <p:nvPr>
+            <p:ph type="sldImg" idx="2"/>
+          </p:nvPr>
+        </p:nvSpPr>
+        <p:spPr/>
+      </p:sp>
+      <p:sp>
+        <p:nvSpPr>
+          <p:cNvPr id="3" name="Notes Placeholder 2"/>
+          <p:cNvSpPr>
+            <a:spLocks noGrp="1"/>
+          </p:cNvSpPr>
+          <p:nvPr>
+            <p:ph type="body" idx="1"/>
+          </p:nvPr>
+        </p:nvSpPr>
+        <p:spPr/>
+        <p:txBody>
+          <a:bodyPr/>
+          <a:lstStyle/>
+          <a:p>
+            <a:r>
+              <a:t>Talking points:</a:t>
+            </a:r>
+          </a:p>
+          <a:p>
+            <a:r>
+              <a:t>- 1,000 enemies: 1.2 ms vs. 1.3 ms</a:t>
+            </a:r>
+          </a:p>
+          <a:p>
+            <a:r>
+              <a:t>  - For few objects, the grid isn’t faster</a:t>
+            </a:r>
+          </a:p>
+          <a:p>
+            <a:r>
+              <a:t>- 5,000: 27 ms vs. 1.9 ms</a:t>
+            </a:r>
+          </a:p>
+          <a:p>
+            <a:r>
+              <a:t>- 10,000: 107 ms vs. 4.1 ms</a:t>
+            </a:r>
+          </a:p>
+          <a:p>
+            <a:r>
+              <a:t>- The work grows with n, not n²</a:t>
+            </a:r>
+          </a:p>
+          <a:p>
+            <a:r>
+              <a:t>- Other structures: quadtrees, BVHs, sweep and prune</a:t>
+            </a:r>
+          </a:p>
+          <a:p>
+            <a:r>
+              <a:t>  - For many similar objects in a limited area, a grid is hard to beat</a:t>
+            </a:r>
+          </a:p>
+        </p:txBody>
+      </p:sp>
+    </p:spTree>
+  </p:cSld>
+  <p:clrMapOvr>
+    <a:masterClrMapping/>
+  </p:clrMapOvr>
+</p:notes>
+</file>
+
+<file path=ppt/notesSlides/notesSlide9.xml><?xml version="1.0" encoding="utf-8"?>
+<p:notes xmlns:a="http://schemas.openxmlformats.org/drawingml/2006/main" xmlns:p="http://schemas.openxmlformats.org/presentationml/2006/main" xmlns:r="http://schemas.openxmlformats.org/officeDocument/2006/relationships">
+  <p:cSld>
+    <p:spTree>
+      <p:nvGrpSpPr>
+        <p:cNvPr id="1" name=""/>
+        <p:cNvGrpSpPr/>
+        <p:nvPr/>
+      </p:nvGrpSpPr>
+      <p:grpSpPr>
+        <a:xfrm>
+          <a:off x="0" y="0"/>
+          <a:ext cx="0" cy="0"/>
+          <a:chOff x="0" y="0"/>
+          <a:chExt cx="0" cy="0"/>
+        </a:xfrm>
+      </p:grpSpPr>
+      <p:sp>
+        <p:nvSpPr>
+          <p:cNvPr id="2" name="Slide Image Placeholder 1"/>
+          <p:cNvSpPr>
+            <a:spLocks noGrp="1"/>
+          </p:cNvSpPr>
+          <p:nvPr>
+            <p:ph type="sldImg" idx="2"/>
+          </p:nvPr>
+        </p:nvSpPr>
+        <p:spPr/>
+      </p:sp>
+      <p:sp>
+        <p:nvSpPr>
+          <p:cNvPr id="3" name="Notes Placeholder 2"/>
+          <p:cNvSpPr>
+            <a:spLocks noGrp="1"/>
+          </p:cNvSpPr>
+          <p:nvPr>
+            <p:ph type="body" idx="1"/>
+          </p:nvPr>
+        </p:nvSpPr>
+        <p:spPr/>
+        <p:txBody>
+          <a:bodyPr/>
+          <a:lstStyle/>
+          <a:p>
+            <a:r>
+              <a:t>Talking points:</a:t>
+            </a:r>
+          </a:p>
+          <a:p>
+            <a:r>
+              <a:t>- The CPU is much faster than memory</a:t>
+            </a:r>
+          </a:p>
+          <a:p>
+            <a:r>
+              <a:t>  - It reads memory in cache lines (64 bytes), and keeps them in its cache</a:t>
+            </a:r>
+          </a:p>
+          <a:p>
+            <a:r>
+              <a:t>  - Data next to data you just read: almost free</a:t>
+            </a:r>
+          </a:p>
+          <a:p>
+            <a:r>
+              <a:t>  - Data elsewhere: a cache miss, and a wait</a:t>
+            </a:r>
+          </a:p>
+          <a:p>
+            <a:r>
+              <a:t>- List&lt;Enemy&gt;: references to objects all over the heap</a:t>
+            </a:r>
+          </a:p>
+          <a:p>
+            <a:r>
+              <a:t>- Data-oriented design: start from the data, and the loops that read it</a:t>
+            </a:r>
           </a:p>
         </p:txBody>
       </p:sp>
@@ -5738,7 +6536,7 @@
         <p:spPr>
           <a:xfrm>
             <a:off x="311700" y="885950"/>
-            <a:ext cx="8520600" cy="4023300"/>
+            <a:ext cx="8520600" cy="521208"/>
           </a:xfrm>
           <a:prstGeom prst="rect">
             <a:avLst/>
@@ -5762,111 +6560,774 @@
             </a:pPr>
             <a:r>
               <a:rPr lang="en"/>
-              <a:t>1,000 enemies: 1.2 ms vs. 1.3 ms</a:t>
+              <a:t>With few enemies the grid doesn’t help. With many, it changes everything.</a:t>
             </a:r>
             <a:endParaRPr/>
           </a:p>
-          <a:p>
-            <a:pPr indent="-317500" lvl="1" marL="914400" rtl="0" algn="l">
-              <a:spcBef>
-                <a:spcPts val="0"/>
-              </a:spcBef>
-              <a:spcAft>
-                <a:spcPts val="0"/>
-              </a:spcAft>
-              <a:buSzPts val="1400"/>
-              <a:buChar char="○"/>
-            </a:pPr>
-            <a:r>
-              <a:rPr lang="en"/>
-              <a:t>For few objects, the grid isn’t faster</a:t>
-            </a:r>
-            <a:endParaRPr/>
-          </a:p>
-          <a:p>
-            <a:pPr indent="-330200" lvl="0" marL="457200" rtl="0" algn="l">
-              <a:spcBef>
-                <a:spcPts val="0"/>
-              </a:spcBef>
-              <a:spcAft>
-                <a:spcPts val="0"/>
-              </a:spcAft>
-              <a:buSzPts val="1600"/>
-              <a:buChar char="●"/>
-            </a:pPr>
-            <a:r>
-              <a:rPr lang="en"/>
-              <a:t>5,000: 27 ms vs. 1.9 ms</a:t>
-            </a:r>
-            <a:endParaRPr/>
-          </a:p>
-          <a:p>
-            <a:pPr indent="-330200" lvl="0" marL="457200" rtl="0" algn="l">
-              <a:spcBef>
-                <a:spcPts val="0"/>
-              </a:spcBef>
-              <a:spcAft>
-                <a:spcPts val="0"/>
-              </a:spcAft>
-              <a:buSzPts val="1600"/>
-              <a:buChar char="●"/>
-            </a:pPr>
-            <a:r>
-              <a:rPr lang="en"/>
-              <a:t>10,000: 107 ms vs. 4.1 ms</a:t>
-            </a:r>
-            <a:endParaRPr/>
-          </a:p>
-          <a:p>
-            <a:pPr indent="-330200" lvl="0" marL="457200" rtl="0" algn="l">
-              <a:spcBef>
-                <a:spcPts val="0"/>
-              </a:spcBef>
-              <a:spcAft>
-                <a:spcPts val="0"/>
-              </a:spcAft>
-              <a:buSzPts val="1600"/>
-              <a:buChar char="●"/>
-            </a:pPr>
-            <a:r>
-              <a:rPr lang="en"/>
-              <a:t>The work grows with n, not n²</a:t>
-            </a:r>
-            <a:endParaRPr/>
-          </a:p>
-          <a:p>
-            <a:pPr indent="-330200" lvl="0" marL="457200" rtl="0" algn="l">
-              <a:spcBef>
-                <a:spcPts val="0"/>
-              </a:spcBef>
-              <a:spcAft>
-                <a:spcPts val="0"/>
-              </a:spcAft>
-              <a:buSzPts val="1600"/>
-              <a:buChar char="●"/>
-            </a:pPr>
-            <a:r>
-              <a:rPr lang="en"/>
-              <a:t>Other structures: quadtrees, BVHs, sweep and prune</a:t>
-            </a:r>
-            <a:endParaRPr/>
-          </a:p>
-          <a:p>
-            <a:pPr indent="-317500" lvl="1" marL="914400" rtl="0" algn="l">
-              <a:spcBef>
-                <a:spcPts val="0"/>
-              </a:spcBef>
-              <a:spcAft>
-                <a:spcPts val="0"/>
-              </a:spcAft>
-              <a:buSzPts val="1400"/>
-              <a:buChar char="○"/>
-            </a:pPr>
-            <a:r>
-              <a:rPr lang="en"/>
-              <a:t>For many similar objects in a limited area, a grid is hard to beat</a:t>
-            </a:r>
-            <a:endParaRPr/>
+        </p:txBody>
+      </p:sp>
+      <p:sp>
+        <p:nvSpPr>
+          <p:cNvPr id="295" name="TextBox 294"/>
+          <p:cNvSpPr txBox="1"/>
+          <p:nvPr/>
+        </p:nvSpPr>
+        <p:spPr>
+          <a:xfrm>
+            <a:off x="274320" y="1371600"/>
+            <a:ext cx="1645920" cy="274320"/>
+          </a:xfrm>
+          <a:prstGeom prst="rect">
+            <a:avLst/>
+          </a:prstGeom>
+          <a:noFill/>
+        </p:spPr>
+        <p:txBody>
+          <a:bodyPr wrap="square">
+            <a:spAutoFit/>
+          </a:bodyPr>
+          <a:lstStyle/>
+          <a:p>
+            <a:pPr algn="r"/>
+            <a:r>
+              <a:rPr sz="1300" b="1" i="0">
+                <a:solidFill>
+                  <a:srgbClr val="DEE2E6"/>
+                </a:solidFill>
+              </a:rPr>
+              <a:t>1,000: every pair</a:t>
+            </a:r>
+          </a:p>
+        </p:txBody>
+      </p:sp>
+      <p:sp>
+        <p:nvSpPr>
+          <p:cNvPr id="296" name="Rectangle 295"/>
+          <p:cNvSpPr/>
+          <p:nvPr/>
+        </p:nvSpPr>
+        <p:spPr>
+          <a:xfrm>
+            <a:off x="2011680" y="1371600"/>
+            <a:ext cx="64545" cy="274320"/>
+          </a:xfrm>
+          <a:prstGeom prst="rect">
+            <a:avLst/>
+          </a:prstGeom>
+          <a:solidFill>
+            <a:srgbClr val="2E3338"/>
+          </a:solidFill>
+          <a:ln>
+            <a:noFill/>
+          </a:ln>
+          <a:effectLst/>
+        </p:spPr>
+        <p:style>
+          <a:lnRef idx="1">
+            <a:schemeClr val="accent1"/>
+          </a:lnRef>
+          <a:fillRef idx="3">
+            <a:schemeClr val="accent1"/>
+          </a:fillRef>
+          <a:effectRef idx="2">
+            <a:schemeClr val="accent1"/>
+          </a:effectRef>
+          <a:fontRef idx="minor">
+            <a:schemeClr val="lt1"/>
+          </a:fontRef>
+        </p:style>
+        <p:txBody>
+          <a:bodyPr rtlCol="0" anchor="ctr" wrap="square" lIns="73152" rIns="73152"/>
+          <a:lstStyle/>
+          <a:p>
+            <a:pPr algn="ctr"/>
+            <a:r>
+              <a:rPr sz="1400" b="0">
+                <a:solidFill>
+                  <a:srgbClr val="DEE2E6"/>
+                </a:solidFill>
+              </a:rPr>
+              <a:t/>
+            </a:r>
+          </a:p>
+        </p:txBody>
+      </p:sp>
+      <p:sp>
+        <p:nvSpPr>
+          <p:cNvPr id="297" name="TextBox 296"/>
+          <p:cNvSpPr txBox="1"/>
+          <p:nvPr/>
+        </p:nvSpPr>
+        <p:spPr>
+          <a:xfrm>
+            <a:off x="2149377" y="1371600"/>
+            <a:ext cx="1280160" cy="274320"/>
+          </a:xfrm>
+          <a:prstGeom prst="rect">
+            <a:avLst/>
+          </a:prstGeom>
+          <a:noFill/>
+        </p:spPr>
+        <p:txBody>
+          <a:bodyPr wrap="square">
+            <a:spAutoFit/>
+          </a:bodyPr>
+          <a:lstStyle/>
+          <a:p>
+            <a:pPr algn="l"/>
+            <a:r>
+              <a:rPr sz="1300" b="0" i="0">
+                <a:solidFill>
+                  <a:srgbClr val="9AA3AB"/>
+                </a:solidFill>
+              </a:rPr>
+              <a:t>1.2 ms</a:t>
+            </a:r>
+          </a:p>
+        </p:txBody>
+      </p:sp>
+      <p:sp>
+        <p:nvSpPr>
+          <p:cNvPr id="298" name="TextBox 297"/>
+          <p:cNvSpPr txBox="1"/>
+          <p:nvPr/>
+        </p:nvSpPr>
+        <p:spPr>
+          <a:xfrm>
+            <a:off x="274320" y="1719072"/>
+            <a:ext cx="1645920" cy="274320"/>
+          </a:xfrm>
+          <a:prstGeom prst="rect">
+            <a:avLst/>
+          </a:prstGeom>
+          <a:noFill/>
+        </p:spPr>
+        <p:txBody>
+          <a:bodyPr wrap="square">
+            <a:spAutoFit/>
+          </a:bodyPr>
+          <a:lstStyle/>
+          <a:p>
+            <a:pPr algn="r"/>
+            <a:r>
+              <a:rPr sz="1300" b="1" i="0">
+                <a:solidFill>
+                  <a:srgbClr val="DEE2E6"/>
+                </a:solidFill>
+              </a:rPr>
+              <a:t>grid</a:t>
+            </a:r>
+          </a:p>
+        </p:txBody>
+      </p:sp>
+      <p:sp>
+        <p:nvSpPr>
+          <p:cNvPr id="299" name="Rectangle 298"/>
+          <p:cNvSpPr/>
+          <p:nvPr/>
+        </p:nvSpPr>
+        <p:spPr>
+          <a:xfrm>
+            <a:off x="2011680" y="1719072"/>
+            <a:ext cx="69924" cy="274320"/>
+          </a:xfrm>
+          <a:prstGeom prst="rect">
+            <a:avLst/>
+          </a:prstGeom>
+          <a:solidFill>
+            <a:srgbClr val="D45D35"/>
+          </a:solidFill>
+          <a:ln>
+            <a:noFill/>
+          </a:ln>
+          <a:effectLst/>
+        </p:spPr>
+        <p:style>
+          <a:lnRef idx="1">
+            <a:schemeClr val="accent1"/>
+          </a:lnRef>
+          <a:fillRef idx="3">
+            <a:schemeClr val="accent1"/>
+          </a:fillRef>
+          <a:effectRef idx="2">
+            <a:schemeClr val="accent1"/>
+          </a:effectRef>
+          <a:fontRef idx="minor">
+            <a:schemeClr val="lt1"/>
+          </a:fontRef>
+        </p:style>
+        <p:txBody>
+          <a:bodyPr rtlCol="0" anchor="ctr" wrap="square" lIns="73152" rIns="73152"/>
+          <a:lstStyle/>
+          <a:p>
+            <a:pPr algn="ctr"/>
+            <a:r>
+              <a:rPr sz="1400" b="0">
+                <a:solidFill>
+                  <a:srgbClr val="DEE2E6"/>
+                </a:solidFill>
+              </a:rPr>
+              <a:t/>
+            </a:r>
+          </a:p>
+        </p:txBody>
+      </p:sp>
+      <p:sp>
+        <p:nvSpPr>
+          <p:cNvPr id="300" name="TextBox 299"/>
+          <p:cNvSpPr txBox="1"/>
+          <p:nvPr/>
+        </p:nvSpPr>
+        <p:spPr>
+          <a:xfrm>
+            <a:off x="2154756" y="1719072"/>
+            <a:ext cx="1280160" cy="274320"/>
+          </a:xfrm>
+          <a:prstGeom prst="rect">
+            <a:avLst/>
+          </a:prstGeom>
+          <a:noFill/>
+        </p:spPr>
+        <p:txBody>
+          <a:bodyPr wrap="square">
+            <a:spAutoFit/>
+          </a:bodyPr>
+          <a:lstStyle/>
+          <a:p>
+            <a:pPr algn="l"/>
+            <a:r>
+              <a:rPr sz="1300" b="0" i="0">
+                <a:solidFill>
+                  <a:srgbClr val="9AA3AB"/>
+                </a:solidFill>
+              </a:rPr>
+              <a:t>1.3 ms</a:t>
+            </a:r>
+          </a:p>
+        </p:txBody>
+      </p:sp>
+      <p:sp>
+        <p:nvSpPr>
+          <p:cNvPr id="301" name="TextBox 300"/>
+          <p:cNvSpPr txBox="1"/>
+          <p:nvPr/>
+        </p:nvSpPr>
+        <p:spPr>
+          <a:xfrm>
+            <a:off x="274320" y="2066543"/>
+            <a:ext cx="1645920" cy="274320"/>
+          </a:xfrm>
+          <a:prstGeom prst="rect">
+            <a:avLst/>
+          </a:prstGeom>
+          <a:noFill/>
+        </p:spPr>
+        <p:txBody>
+          <a:bodyPr wrap="square">
+            <a:spAutoFit/>
+          </a:bodyPr>
+          <a:lstStyle/>
+          <a:p>
+            <a:pPr algn="r"/>
+            <a:r>
+              <a:rPr sz="1300" b="1" i="0">
+                <a:solidFill>
+                  <a:srgbClr val="DEE2E6"/>
+                </a:solidFill>
+              </a:rPr>
+              <a:t>5,000: every pair</a:t>
+            </a:r>
+          </a:p>
+        </p:txBody>
+      </p:sp>
+      <p:sp>
+        <p:nvSpPr>
+          <p:cNvPr id="302" name="Rectangle 301"/>
+          <p:cNvSpPr/>
+          <p:nvPr/>
+        </p:nvSpPr>
+        <p:spPr>
+          <a:xfrm>
+            <a:off x="2011680" y="2066543"/>
+            <a:ext cx="1452282" cy="274320"/>
+          </a:xfrm>
+          <a:prstGeom prst="rect">
+            <a:avLst/>
+          </a:prstGeom>
+          <a:solidFill>
+            <a:srgbClr val="2E3338"/>
+          </a:solidFill>
+          <a:ln>
+            <a:noFill/>
+          </a:ln>
+          <a:effectLst/>
+        </p:spPr>
+        <p:style>
+          <a:lnRef idx="1">
+            <a:schemeClr val="accent1"/>
+          </a:lnRef>
+          <a:fillRef idx="3">
+            <a:schemeClr val="accent1"/>
+          </a:fillRef>
+          <a:effectRef idx="2">
+            <a:schemeClr val="accent1"/>
+          </a:effectRef>
+          <a:fontRef idx="minor">
+            <a:schemeClr val="lt1"/>
+          </a:fontRef>
+        </p:style>
+        <p:txBody>
+          <a:bodyPr rtlCol="0" anchor="ctr" wrap="square" lIns="73152" rIns="73152"/>
+          <a:lstStyle/>
+          <a:p>
+            <a:pPr algn="ctr"/>
+            <a:r>
+              <a:rPr sz="1400" b="0">
+                <a:solidFill>
+                  <a:srgbClr val="DEE2E6"/>
+                </a:solidFill>
+              </a:rPr>
+              <a:t/>
+            </a:r>
+          </a:p>
+        </p:txBody>
+      </p:sp>
+      <p:sp>
+        <p:nvSpPr>
+          <p:cNvPr id="303" name="TextBox 302"/>
+          <p:cNvSpPr txBox="1"/>
+          <p:nvPr/>
+        </p:nvSpPr>
+        <p:spPr>
+          <a:xfrm>
+            <a:off x="3537114" y="2066543"/>
+            <a:ext cx="1280160" cy="274320"/>
+          </a:xfrm>
+          <a:prstGeom prst="rect">
+            <a:avLst/>
+          </a:prstGeom>
+          <a:noFill/>
+        </p:spPr>
+        <p:txBody>
+          <a:bodyPr wrap="square">
+            <a:spAutoFit/>
+          </a:bodyPr>
+          <a:lstStyle/>
+          <a:p>
+            <a:pPr algn="l"/>
+            <a:r>
+              <a:rPr sz="1300" b="0" i="0">
+                <a:solidFill>
+                  <a:srgbClr val="9AA3AB"/>
+                </a:solidFill>
+              </a:rPr>
+              <a:t>27 ms</a:t>
+            </a:r>
+          </a:p>
+        </p:txBody>
+      </p:sp>
+      <p:sp>
+        <p:nvSpPr>
+          <p:cNvPr id="304" name="TextBox 303"/>
+          <p:cNvSpPr txBox="1"/>
+          <p:nvPr/>
+        </p:nvSpPr>
+        <p:spPr>
+          <a:xfrm>
+            <a:off x="274320" y="2414016"/>
+            <a:ext cx="1645920" cy="274320"/>
+          </a:xfrm>
+          <a:prstGeom prst="rect">
+            <a:avLst/>
+          </a:prstGeom>
+          <a:noFill/>
+        </p:spPr>
+        <p:txBody>
+          <a:bodyPr wrap="square">
+            <a:spAutoFit/>
+          </a:bodyPr>
+          <a:lstStyle/>
+          <a:p>
+            <a:pPr algn="r"/>
+            <a:r>
+              <a:rPr sz="1300" b="1" i="0">
+                <a:solidFill>
+                  <a:srgbClr val="DEE2E6"/>
+                </a:solidFill>
+              </a:rPr>
+              <a:t>grid</a:t>
+            </a:r>
+          </a:p>
+        </p:txBody>
+      </p:sp>
+      <p:sp>
+        <p:nvSpPr>
+          <p:cNvPr id="305" name="Rectangle 304"/>
+          <p:cNvSpPr/>
+          <p:nvPr/>
+        </p:nvSpPr>
+        <p:spPr>
+          <a:xfrm>
+            <a:off x="2011680" y="2414016"/>
+            <a:ext cx="102197" cy="274320"/>
+          </a:xfrm>
+          <a:prstGeom prst="rect">
+            <a:avLst/>
+          </a:prstGeom>
+          <a:solidFill>
+            <a:srgbClr val="D45D35"/>
+          </a:solidFill>
+          <a:ln>
+            <a:noFill/>
+          </a:ln>
+          <a:effectLst/>
+        </p:spPr>
+        <p:style>
+          <a:lnRef idx="1">
+            <a:schemeClr val="accent1"/>
+          </a:lnRef>
+          <a:fillRef idx="3">
+            <a:schemeClr val="accent1"/>
+          </a:fillRef>
+          <a:effectRef idx="2">
+            <a:schemeClr val="accent1"/>
+          </a:effectRef>
+          <a:fontRef idx="minor">
+            <a:schemeClr val="lt1"/>
+          </a:fontRef>
+        </p:style>
+        <p:txBody>
+          <a:bodyPr rtlCol="0" anchor="ctr" wrap="square" lIns="73152" rIns="73152"/>
+          <a:lstStyle/>
+          <a:p>
+            <a:pPr algn="ctr"/>
+            <a:r>
+              <a:rPr sz="1400" b="0">
+                <a:solidFill>
+                  <a:srgbClr val="DEE2E6"/>
+                </a:solidFill>
+              </a:rPr>
+              <a:t/>
+            </a:r>
+          </a:p>
+        </p:txBody>
+      </p:sp>
+      <p:sp>
+        <p:nvSpPr>
+          <p:cNvPr id="306" name="TextBox 305"/>
+          <p:cNvSpPr txBox="1"/>
+          <p:nvPr/>
+        </p:nvSpPr>
+        <p:spPr>
+          <a:xfrm>
+            <a:off x="2187029" y="2414016"/>
+            <a:ext cx="1280160" cy="274320"/>
+          </a:xfrm>
+          <a:prstGeom prst="rect">
+            <a:avLst/>
+          </a:prstGeom>
+          <a:noFill/>
+        </p:spPr>
+        <p:txBody>
+          <a:bodyPr wrap="square">
+            <a:spAutoFit/>
+          </a:bodyPr>
+          <a:lstStyle/>
+          <a:p>
+            <a:pPr algn="l"/>
+            <a:r>
+              <a:rPr sz="1300" b="0" i="0">
+                <a:solidFill>
+                  <a:srgbClr val="9AA3AB"/>
+                </a:solidFill>
+              </a:rPr>
+              <a:t>1.9 ms</a:t>
+            </a:r>
+          </a:p>
+        </p:txBody>
+      </p:sp>
+      <p:sp>
+        <p:nvSpPr>
+          <p:cNvPr id="307" name="TextBox 306"/>
+          <p:cNvSpPr txBox="1"/>
+          <p:nvPr/>
+        </p:nvSpPr>
+        <p:spPr>
+          <a:xfrm>
+            <a:off x="274320" y="2761488"/>
+            <a:ext cx="1645920" cy="274320"/>
+          </a:xfrm>
+          <a:prstGeom prst="rect">
+            <a:avLst/>
+          </a:prstGeom>
+          <a:noFill/>
+        </p:spPr>
+        <p:txBody>
+          <a:bodyPr wrap="square">
+            <a:spAutoFit/>
+          </a:bodyPr>
+          <a:lstStyle/>
+          <a:p>
+            <a:pPr algn="r"/>
+            <a:r>
+              <a:rPr sz="1300" b="1" i="0">
+                <a:solidFill>
+                  <a:srgbClr val="DEE2E6"/>
+                </a:solidFill>
+              </a:rPr>
+              <a:t>10,000: every pair</a:t>
+            </a:r>
+          </a:p>
+        </p:txBody>
+      </p:sp>
+      <p:sp>
+        <p:nvSpPr>
+          <p:cNvPr id="308" name="Rectangle 307"/>
+          <p:cNvSpPr/>
+          <p:nvPr/>
+        </p:nvSpPr>
+        <p:spPr>
+          <a:xfrm>
+            <a:off x="2011680" y="2761488"/>
+            <a:ext cx="5755341" cy="274320"/>
+          </a:xfrm>
+          <a:prstGeom prst="rect">
+            <a:avLst/>
+          </a:prstGeom>
+          <a:solidFill>
+            <a:srgbClr val="2E3338"/>
+          </a:solidFill>
+          <a:ln>
+            <a:noFill/>
+          </a:ln>
+          <a:effectLst/>
+        </p:spPr>
+        <p:style>
+          <a:lnRef idx="1">
+            <a:schemeClr val="accent1"/>
+          </a:lnRef>
+          <a:fillRef idx="3">
+            <a:schemeClr val="accent1"/>
+          </a:fillRef>
+          <a:effectRef idx="2">
+            <a:schemeClr val="accent1"/>
+          </a:effectRef>
+          <a:fontRef idx="minor">
+            <a:schemeClr val="lt1"/>
+          </a:fontRef>
+        </p:style>
+        <p:txBody>
+          <a:bodyPr rtlCol="0" anchor="ctr" wrap="square" lIns="73152" rIns="73152"/>
+          <a:lstStyle/>
+          <a:p>
+            <a:pPr algn="ctr"/>
+            <a:r>
+              <a:rPr sz="1400" b="0">
+                <a:solidFill>
+                  <a:srgbClr val="DEE2E6"/>
+                </a:solidFill>
+              </a:rPr>
+              <a:t/>
+            </a:r>
+          </a:p>
+        </p:txBody>
+      </p:sp>
+      <p:sp>
+        <p:nvSpPr>
+          <p:cNvPr id="309" name="TextBox 308"/>
+          <p:cNvSpPr txBox="1"/>
+          <p:nvPr/>
+        </p:nvSpPr>
+        <p:spPr>
+          <a:xfrm>
+            <a:off x="7840173" y="2761488"/>
+            <a:ext cx="1280160" cy="274320"/>
+          </a:xfrm>
+          <a:prstGeom prst="rect">
+            <a:avLst/>
+          </a:prstGeom>
+          <a:noFill/>
+        </p:spPr>
+        <p:txBody>
+          <a:bodyPr wrap="square">
+            <a:spAutoFit/>
+          </a:bodyPr>
+          <a:lstStyle/>
+          <a:p>
+            <a:pPr algn="l"/>
+            <a:r>
+              <a:rPr sz="1300" b="0" i="0">
+                <a:solidFill>
+                  <a:srgbClr val="9AA3AB"/>
+                </a:solidFill>
+              </a:rPr>
+              <a:t>107 ms</a:t>
+            </a:r>
+          </a:p>
+        </p:txBody>
+      </p:sp>
+      <p:sp>
+        <p:nvSpPr>
+          <p:cNvPr id="310" name="TextBox 309"/>
+          <p:cNvSpPr txBox="1"/>
+          <p:nvPr/>
+        </p:nvSpPr>
+        <p:spPr>
+          <a:xfrm>
+            <a:off x="274320" y="3108960"/>
+            <a:ext cx="1645920" cy="274320"/>
+          </a:xfrm>
+          <a:prstGeom prst="rect">
+            <a:avLst/>
+          </a:prstGeom>
+          <a:noFill/>
+        </p:spPr>
+        <p:txBody>
+          <a:bodyPr wrap="square">
+            <a:spAutoFit/>
+          </a:bodyPr>
+          <a:lstStyle/>
+          <a:p>
+            <a:pPr algn="r"/>
+            <a:r>
+              <a:rPr sz="1300" b="1" i="0">
+                <a:solidFill>
+                  <a:srgbClr val="DEE2E6"/>
+                </a:solidFill>
+              </a:rPr>
+              <a:t>grid</a:t>
+            </a:r>
+          </a:p>
+        </p:txBody>
+      </p:sp>
+      <p:sp>
+        <p:nvSpPr>
+          <p:cNvPr id="311" name="Rectangle 310"/>
+          <p:cNvSpPr/>
+          <p:nvPr/>
+        </p:nvSpPr>
+        <p:spPr>
+          <a:xfrm>
+            <a:off x="2011680" y="3108960"/>
+            <a:ext cx="220531" cy="274320"/>
+          </a:xfrm>
+          <a:prstGeom prst="rect">
+            <a:avLst/>
+          </a:prstGeom>
+          <a:solidFill>
+            <a:srgbClr val="D45D35"/>
+          </a:solidFill>
+          <a:ln>
+            <a:noFill/>
+          </a:ln>
+          <a:effectLst/>
+        </p:spPr>
+        <p:style>
+          <a:lnRef idx="1">
+            <a:schemeClr val="accent1"/>
+          </a:lnRef>
+          <a:fillRef idx="3">
+            <a:schemeClr val="accent1"/>
+          </a:fillRef>
+          <a:effectRef idx="2">
+            <a:schemeClr val="accent1"/>
+          </a:effectRef>
+          <a:fontRef idx="minor">
+            <a:schemeClr val="lt1"/>
+          </a:fontRef>
+        </p:style>
+        <p:txBody>
+          <a:bodyPr rtlCol="0" anchor="ctr" wrap="square" lIns="73152" rIns="73152"/>
+          <a:lstStyle/>
+          <a:p>
+            <a:pPr algn="ctr"/>
+            <a:r>
+              <a:rPr sz="1400" b="0">
+                <a:solidFill>
+                  <a:srgbClr val="DEE2E6"/>
+                </a:solidFill>
+              </a:rPr>
+              <a:t/>
+            </a:r>
+          </a:p>
+        </p:txBody>
+      </p:sp>
+      <p:sp>
+        <p:nvSpPr>
+          <p:cNvPr id="312" name="TextBox 311"/>
+          <p:cNvSpPr txBox="1"/>
+          <p:nvPr/>
+        </p:nvSpPr>
+        <p:spPr>
+          <a:xfrm>
+            <a:off x="2305363" y="3108960"/>
+            <a:ext cx="1280160" cy="274320"/>
+          </a:xfrm>
+          <a:prstGeom prst="rect">
+            <a:avLst/>
+          </a:prstGeom>
+          <a:noFill/>
+        </p:spPr>
+        <p:txBody>
+          <a:bodyPr wrap="square">
+            <a:spAutoFit/>
+          </a:bodyPr>
+          <a:lstStyle/>
+          <a:p>
+            <a:pPr algn="l"/>
+            <a:r>
+              <a:rPr sz="1300" b="0" i="0">
+                <a:solidFill>
+                  <a:srgbClr val="9AA3AB"/>
+                </a:solidFill>
+              </a:rPr>
+              <a:t>4.1 ms</a:t>
+            </a:r>
+          </a:p>
+        </p:txBody>
+      </p:sp>
+      <p:sp>
+        <p:nvSpPr>
+          <p:cNvPr id="313" name="TextBox 312"/>
+          <p:cNvSpPr txBox="1"/>
+          <p:nvPr/>
+        </p:nvSpPr>
+        <p:spPr>
+          <a:xfrm>
+            <a:off x="274320" y="3657600"/>
+            <a:ext cx="8595360" cy="457200"/>
+          </a:xfrm>
+          <a:prstGeom prst="rect">
+            <a:avLst/>
+          </a:prstGeom>
+          <a:noFill/>
+        </p:spPr>
+        <p:txBody>
+          <a:bodyPr wrap="square">
+            <a:spAutoFit/>
+          </a:bodyPr>
+          <a:lstStyle/>
+          <a:p>
+            <a:pPr algn="ctr"/>
+            <a:r>
+              <a:rPr sz="1200" b="0" i="0">
+                <a:solidFill>
+                  <a:srgbClr val="9AA3AB"/>
+                </a:solidFill>
+              </a:rPr>
+              <a:t>The work grows with n, not n². Quadtrees, BVHs and sweep-and-prune exist too;</a:t>
+            </a:r>
+          </a:p>
+          <a:p>
+            <a:pPr algn="ctr"/>
+            <a:r>
+              <a:rPr sz="1200" b="0" i="0">
+                <a:solidFill>
+                  <a:srgbClr val="9AA3AB"/>
+                </a:solidFill>
+              </a:rPr>
+              <a:t>for many similar objects in a limited area, a grid is hard to beat.</a:t>
+            </a:r>
           </a:p>
         </p:txBody>
       </p:sp>
@@ -6794,7 +8255,7 @@
         <p:spPr>
           <a:xfrm>
             <a:off x="311700" y="885950"/>
-            <a:ext cx="8520600" cy="4023300"/>
+            <a:ext cx="8520600" cy="521208"/>
           </a:xfrm>
           <a:prstGeom prst="rect">
             <a:avLst/>
@@ -6818,94 +8279,1473 @@
             </a:pPr>
             <a:r>
               <a:rPr lang="en"/>
-              <a:t>The CPU is much faster than memory</a:t>
+              <a:t>The CPU is much faster than memory. What’s next to what you just read is almost free.</a:t>
             </a:r>
             <a:endParaRPr/>
           </a:p>
-          <a:p>
-            <a:pPr indent="-317500" lvl="1" marL="914400" rtl="0" algn="l">
-              <a:spcBef>
-                <a:spcPts val="0"/>
-              </a:spcBef>
-              <a:spcAft>
-                <a:spcPts val="0"/>
-              </a:spcAft>
-              <a:buSzPts val="1400"/>
-              <a:buChar char="○"/>
-            </a:pPr>
-            <a:r>
-              <a:rPr lang="en"/>
-              <a:t>It reads memory in cache lines (64 bytes), and keeps them in its cache</a:t>
-            </a:r>
-            <a:endParaRPr/>
-          </a:p>
-          <a:p>
-            <a:pPr indent="-317500" lvl="1" marL="914400" rtl="0" algn="l">
-              <a:spcBef>
-                <a:spcPts val="0"/>
-              </a:spcBef>
-              <a:spcAft>
-                <a:spcPts val="0"/>
-              </a:spcAft>
-              <a:buSzPts val="1400"/>
-              <a:buChar char="○"/>
-            </a:pPr>
-            <a:r>
-              <a:rPr lang="en"/>
-              <a:t>Data next to data you just read: almost free</a:t>
-            </a:r>
-            <a:endParaRPr/>
-          </a:p>
-          <a:p>
-            <a:pPr indent="-317500" lvl="1" marL="914400" rtl="0" algn="l">
-              <a:spcBef>
-                <a:spcPts val="0"/>
-              </a:spcBef>
-              <a:spcAft>
-                <a:spcPts val="0"/>
-              </a:spcAft>
-              <a:buSzPts val="1400"/>
-              <a:buChar char="○"/>
-            </a:pPr>
-            <a:r>
-              <a:rPr lang="en"/>
-              <a:t>Data elsewhere: a cache miss, and a wait</a:t>
-            </a:r>
-            <a:endParaRPr/>
-          </a:p>
-          <a:p>
-            <a:pPr indent="-330200" lvl="0" marL="457200" rtl="0" algn="l">
-              <a:spcBef>
-                <a:spcPts val="0"/>
-              </a:spcBef>
-              <a:spcAft>
-                <a:spcPts val="0"/>
-              </a:spcAft>
-              <a:buSzPts val="1600"/>
-              <a:buChar char="●"/>
-            </a:pPr>
-            <a:r>
-              <a:rPr lang="en"/>
+        </p:txBody>
+      </p:sp>
+      <p:sp>
+        <p:nvSpPr>
+          <p:cNvPr id="295" name="TextBox 294"/>
+          <p:cNvSpPr txBox="1"/>
+          <p:nvPr/>
+        </p:nvSpPr>
+        <p:spPr>
+          <a:xfrm>
+            <a:off x="548640" y="1371600"/>
+            <a:ext cx="3657600" cy="274320"/>
+          </a:xfrm>
+          <a:prstGeom prst="rect">
+            <a:avLst/>
+          </a:prstGeom>
+          <a:noFill/>
+        </p:spPr>
+        <p:txBody>
+          <a:bodyPr wrap="square">
+            <a:spAutoFit/>
+          </a:bodyPr>
+          <a:lstStyle/>
+          <a:p>
+            <a:pPr algn="l"/>
+            <a:r>
+              <a:rPr sz="1300" b="1" i="0">
+                <a:solidFill>
+                  <a:srgbClr val="DEE2E6"/>
+                </a:solidFill>
+              </a:rPr>
               <a:t>List&lt;Enemy&gt;: references to objects all over the heap</a:t>
             </a:r>
-            <a:endParaRPr/>
-          </a:p>
-          <a:p>
-            <a:pPr indent="-330200" lvl="0" marL="457200" rtl="0" algn="l">
-              <a:spcBef>
-                <a:spcPts val="0"/>
-              </a:spcBef>
-              <a:spcAft>
-                <a:spcPts val="0"/>
-              </a:spcAft>
-              <a:buSzPts val="1600"/>
-              <a:buChar char="●"/>
-            </a:pPr>
-            <a:r>
-              <a:rPr lang="en"/>
-              <a:t>Data-oriented design: start from the data, and the loops that read it</a:t>
-            </a:r>
-            <a:endParaRPr/>
+          </a:p>
+        </p:txBody>
+      </p:sp>
+      <p:sp>
+        <p:nvSpPr>
+          <p:cNvPr id="296" name="Rounded Rectangle 295"/>
+          <p:cNvSpPr/>
+          <p:nvPr/>
+        </p:nvSpPr>
+        <p:spPr>
+          <a:xfrm>
+            <a:off x="640080" y="1828800"/>
+            <a:ext cx="822960" cy="365760"/>
+          </a:xfrm>
+          <a:prstGeom prst="roundRect">
+            <a:avLst>
+              <a:gd name="adj" fmla="val 12000"/>
+            </a:avLst>
+          </a:prstGeom>
+          <a:solidFill>
+            <a:srgbClr val="2E3338"/>
+          </a:solidFill>
+          <a:ln>
+            <a:noFill/>
+          </a:ln>
+          <a:effectLst/>
+        </p:spPr>
+        <p:style>
+          <a:lnRef idx="1">
+            <a:schemeClr val="accent1"/>
+          </a:lnRef>
+          <a:fillRef idx="3">
+            <a:schemeClr val="accent1"/>
+          </a:fillRef>
+          <a:effectRef idx="2">
+            <a:schemeClr val="accent1"/>
+          </a:effectRef>
+          <a:fontRef idx="minor">
+            <a:schemeClr val="lt1"/>
+          </a:fontRef>
+        </p:style>
+        <p:txBody>
+          <a:bodyPr rtlCol="0" anchor="ctr" wrap="square" lIns="73152" rIns="73152"/>
+          <a:lstStyle/>
+          <a:p>
+            <a:pPr algn="ctr"/>
+            <a:r>
+              <a:rPr sz="1100" b="0">
+                <a:solidFill>
+                  <a:srgbClr val="DEE2E6"/>
+                </a:solidFill>
+              </a:rPr>
+              <a:t>enemy</a:t>
+            </a:r>
+          </a:p>
+        </p:txBody>
+      </p:sp>
+      <p:sp>
+        <p:nvSpPr>
+          <p:cNvPr id="297" name="Rounded Rectangle 296"/>
+          <p:cNvSpPr/>
+          <p:nvPr/>
+        </p:nvSpPr>
+        <p:spPr>
+          <a:xfrm>
+            <a:off x="2377440" y="2377440"/>
+            <a:ext cx="822960" cy="365760"/>
+          </a:xfrm>
+          <a:prstGeom prst="roundRect">
+            <a:avLst>
+              <a:gd name="adj" fmla="val 12000"/>
+            </a:avLst>
+          </a:prstGeom>
+          <a:solidFill>
+            <a:srgbClr val="2E3338"/>
+          </a:solidFill>
+          <a:ln>
+            <a:noFill/>
+          </a:ln>
+          <a:effectLst/>
+        </p:spPr>
+        <p:style>
+          <a:lnRef idx="1">
+            <a:schemeClr val="accent1"/>
+          </a:lnRef>
+          <a:fillRef idx="3">
+            <a:schemeClr val="accent1"/>
+          </a:fillRef>
+          <a:effectRef idx="2">
+            <a:schemeClr val="accent1"/>
+          </a:effectRef>
+          <a:fontRef idx="minor">
+            <a:schemeClr val="lt1"/>
+          </a:fontRef>
+        </p:style>
+        <p:txBody>
+          <a:bodyPr rtlCol="0" anchor="ctr" wrap="square" lIns="73152" rIns="73152"/>
+          <a:lstStyle/>
+          <a:p>
+            <a:pPr algn="ctr"/>
+            <a:r>
+              <a:rPr sz="1100" b="0">
+                <a:solidFill>
+                  <a:srgbClr val="DEE2E6"/>
+                </a:solidFill>
+              </a:rPr>
+              <a:t>enemy</a:t>
+            </a:r>
+          </a:p>
+        </p:txBody>
+      </p:sp>
+      <p:sp>
+        <p:nvSpPr>
+          <p:cNvPr id="298" name="Rounded Rectangle 297"/>
+          <p:cNvSpPr/>
+          <p:nvPr/>
+        </p:nvSpPr>
+        <p:spPr>
+          <a:xfrm>
+            <a:off x="1280160" y="2926080"/>
+            <a:ext cx="822960" cy="365760"/>
+          </a:xfrm>
+          <a:prstGeom prst="roundRect">
+            <a:avLst>
+              <a:gd name="adj" fmla="val 12000"/>
+            </a:avLst>
+          </a:prstGeom>
+          <a:solidFill>
+            <a:srgbClr val="2E3338"/>
+          </a:solidFill>
+          <a:ln>
+            <a:noFill/>
+          </a:ln>
+          <a:effectLst/>
+        </p:spPr>
+        <p:style>
+          <a:lnRef idx="1">
+            <a:schemeClr val="accent1"/>
+          </a:lnRef>
+          <a:fillRef idx="3">
+            <a:schemeClr val="accent1"/>
+          </a:fillRef>
+          <a:effectRef idx="2">
+            <a:schemeClr val="accent1"/>
+          </a:effectRef>
+          <a:fontRef idx="minor">
+            <a:schemeClr val="lt1"/>
+          </a:fontRef>
+        </p:style>
+        <p:txBody>
+          <a:bodyPr rtlCol="0" anchor="ctr" wrap="square" lIns="73152" rIns="73152"/>
+          <a:lstStyle/>
+          <a:p>
+            <a:pPr algn="ctr"/>
+            <a:r>
+              <a:rPr sz="1100" b="0">
+                <a:solidFill>
+                  <a:srgbClr val="DEE2E6"/>
+                </a:solidFill>
+              </a:rPr>
+              <a:t>enemy</a:t>
+            </a:r>
+          </a:p>
+        </p:txBody>
+      </p:sp>
+      <p:sp>
+        <p:nvSpPr>
+          <p:cNvPr id="299" name="Rounded Rectangle 298"/>
+          <p:cNvSpPr/>
+          <p:nvPr/>
+        </p:nvSpPr>
+        <p:spPr>
+          <a:xfrm>
+            <a:off x="3108960" y="1828800"/>
+            <a:ext cx="822960" cy="365760"/>
+          </a:xfrm>
+          <a:prstGeom prst="roundRect">
+            <a:avLst>
+              <a:gd name="adj" fmla="val 12000"/>
+            </a:avLst>
+          </a:prstGeom>
+          <a:solidFill>
+            <a:srgbClr val="2E3338"/>
+          </a:solidFill>
+          <a:ln>
+            <a:noFill/>
+          </a:ln>
+          <a:effectLst/>
+        </p:spPr>
+        <p:style>
+          <a:lnRef idx="1">
+            <a:schemeClr val="accent1"/>
+          </a:lnRef>
+          <a:fillRef idx="3">
+            <a:schemeClr val="accent1"/>
+          </a:fillRef>
+          <a:effectRef idx="2">
+            <a:schemeClr val="accent1"/>
+          </a:effectRef>
+          <a:fontRef idx="minor">
+            <a:schemeClr val="lt1"/>
+          </a:fontRef>
+        </p:style>
+        <p:txBody>
+          <a:bodyPr rtlCol="0" anchor="ctr" wrap="square" lIns="73152" rIns="73152"/>
+          <a:lstStyle/>
+          <a:p>
+            <a:pPr algn="ctr"/>
+            <a:r>
+              <a:rPr sz="1100" b="0">
+                <a:solidFill>
+                  <a:srgbClr val="DEE2E6"/>
+                </a:solidFill>
+              </a:rPr>
+              <a:t>enemy</a:t>
+            </a:r>
+          </a:p>
+        </p:txBody>
+      </p:sp>
+      <p:sp>
+        <p:nvSpPr>
+          <p:cNvPr id="300" name="Rounded Rectangle 299"/>
+          <p:cNvSpPr/>
+          <p:nvPr/>
+        </p:nvSpPr>
+        <p:spPr>
+          <a:xfrm>
+            <a:off x="822960" y="3474720"/>
+            <a:ext cx="822960" cy="365760"/>
+          </a:xfrm>
+          <a:prstGeom prst="roundRect">
+            <a:avLst>
+              <a:gd name="adj" fmla="val 12000"/>
+            </a:avLst>
+          </a:prstGeom>
+          <a:solidFill>
+            <a:srgbClr val="2E3338"/>
+          </a:solidFill>
+          <a:ln>
+            <a:noFill/>
+          </a:ln>
+          <a:effectLst/>
+        </p:spPr>
+        <p:style>
+          <a:lnRef idx="1">
+            <a:schemeClr val="accent1"/>
+          </a:lnRef>
+          <a:fillRef idx="3">
+            <a:schemeClr val="accent1"/>
+          </a:fillRef>
+          <a:effectRef idx="2">
+            <a:schemeClr val="accent1"/>
+          </a:effectRef>
+          <a:fontRef idx="minor">
+            <a:schemeClr val="lt1"/>
+          </a:fontRef>
+        </p:style>
+        <p:txBody>
+          <a:bodyPr rtlCol="0" anchor="ctr" wrap="square" lIns="73152" rIns="73152"/>
+          <a:lstStyle/>
+          <a:p>
+            <a:pPr algn="ctr"/>
+            <a:r>
+              <a:rPr sz="1100" b="0">
+                <a:solidFill>
+                  <a:srgbClr val="DEE2E6"/>
+                </a:solidFill>
+              </a:rPr>
+              <a:t>enemy</a:t>
+            </a:r>
+          </a:p>
+        </p:txBody>
+      </p:sp>
+      <p:sp>
+        <p:nvSpPr>
+          <p:cNvPr id="301" name="Rounded Rectangle 300"/>
+          <p:cNvSpPr/>
+          <p:nvPr/>
+        </p:nvSpPr>
+        <p:spPr>
+          <a:xfrm>
+            <a:off x="2834640" y="3291840"/>
+            <a:ext cx="822960" cy="365760"/>
+          </a:xfrm>
+          <a:prstGeom prst="roundRect">
+            <a:avLst>
+              <a:gd name="adj" fmla="val 12000"/>
+            </a:avLst>
+          </a:prstGeom>
+          <a:solidFill>
+            <a:srgbClr val="2E3338"/>
+          </a:solidFill>
+          <a:ln>
+            <a:noFill/>
+          </a:ln>
+          <a:effectLst/>
+        </p:spPr>
+        <p:style>
+          <a:lnRef idx="1">
+            <a:schemeClr val="accent1"/>
+          </a:lnRef>
+          <a:fillRef idx="3">
+            <a:schemeClr val="accent1"/>
+          </a:fillRef>
+          <a:effectRef idx="2">
+            <a:schemeClr val="accent1"/>
+          </a:effectRef>
+          <a:fontRef idx="minor">
+            <a:schemeClr val="lt1"/>
+          </a:fontRef>
+        </p:style>
+        <p:txBody>
+          <a:bodyPr rtlCol="0" anchor="ctr" wrap="square" lIns="73152" rIns="73152"/>
+          <a:lstStyle/>
+          <a:p>
+            <a:pPr algn="ctr"/>
+            <a:r>
+              <a:rPr sz="1100" b="0">
+                <a:solidFill>
+                  <a:srgbClr val="DEE2E6"/>
+                </a:solidFill>
+              </a:rPr>
+              <a:t>enemy</a:t>
+            </a:r>
+          </a:p>
+        </p:txBody>
+      </p:sp>
+      <p:sp>
+        <p:nvSpPr>
+          <p:cNvPr id="302" name="TextBox 301"/>
+          <p:cNvSpPr txBox="1"/>
+          <p:nvPr/>
+        </p:nvSpPr>
+        <p:spPr>
+          <a:xfrm>
+            <a:off x="4846320" y="1371600"/>
+            <a:ext cx="3840480" cy="274320"/>
+          </a:xfrm>
+          <a:prstGeom prst="rect">
+            <a:avLst/>
+          </a:prstGeom>
+          <a:noFill/>
+        </p:spPr>
+        <p:txBody>
+          <a:bodyPr wrap="square">
+            <a:spAutoFit/>
+          </a:bodyPr>
+          <a:lstStyle/>
+          <a:p>
+            <a:pPr algn="l"/>
+            <a:r>
+              <a:rPr sz="1300" b="1" i="0">
+                <a:solidFill>
+                  <a:srgbClr val="DEE2E6"/>
+                </a:solidFill>
+              </a:rPr>
+              <a:t>A struct of arrays: each field packed together</a:t>
+            </a:r>
+          </a:p>
+        </p:txBody>
+      </p:sp>
+      <p:sp>
+        <p:nvSpPr>
+          <p:cNvPr id="303" name="TextBox 302"/>
+          <p:cNvSpPr txBox="1"/>
+          <p:nvPr/>
+        </p:nvSpPr>
+        <p:spPr>
+          <a:xfrm>
+            <a:off x="4846320" y="1828800"/>
+            <a:ext cx="914400" cy="365760"/>
+          </a:xfrm>
+          <a:prstGeom prst="rect">
+            <a:avLst/>
+          </a:prstGeom>
+          <a:noFill/>
+        </p:spPr>
+        <p:txBody>
+          <a:bodyPr wrap="square">
+            <a:spAutoFit/>
+          </a:bodyPr>
+          <a:lstStyle/>
+          <a:p>
+            <a:pPr algn="l"/>
+            <a:r>
+              <a:rPr sz="1100" b="0" i="0">
+                <a:solidFill>
+                  <a:srgbClr val="9AA3AB"/>
+                </a:solidFill>
+              </a:rPr>
+              <a:t>Position</a:t>
+            </a:r>
+          </a:p>
+        </p:txBody>
+      </p:sp>
+      <p:sp>
+        <p:nvSpPr>
+          <p:cNvPr id="304" name="Rectangle 303"/>
+          <p:cNvSpPr/>
+          <p:nvPr/>
+        </p:nvSpPr>
+        <p:spPr>
+          <a:xfrm>
+            <a:off x="5760720" y="1828800"/>
+            <a:ext cx="438912" cy="365760"/>
+          </a:xfrm>
+          <a:prstGeom prst="rect">
+            <a:avLst/>
+          </a:prstGeom>
+          <a:solidFill>
+            <a:srgbClr val="D45D35"/>
+          </a:solidFill>
+          <a:ln>
+            <a:noFill/>
+          </a:ln>
+          <a:effectLst/>
+        </p:spPr>
+        <p:style>
+          <a:lnRef idx="1">
+            <a:schemeClr val="accent1"/>
+          </a:lnRef>
+          <a:fillRef idx="3">
+            <a:schemeClr val="accent1"/>
+          </a:fillRef>
+          <a:effectRef idx="2">
+            <a:schemeClr val="accent1"/>
+          </a:effectRef>
+          <a:fontRef idx="minor">
+            <a:schemeClr val="lt1"/>
+          </a:fontRef>
+        </p:style>
+        <p:txBody>
+          <a:bodyPr rtlCol="0" anchor="ctr" wrap="square" lIns="73152" rIns="73152"/>
+          <a:lstStyle/>
+          <a:p>
+            <a:pPr algn="ctr"/>
+            <a:r>
+              <a:rPr sz="1400" b="0">
+                <a:solidFill>
+                  <a:srgbClr val="DEE2E6"/>
+                </a:solidFill>
+              </a:rPr>
+              <a:t/>
+            </a:r>
+          </a:p>
+        </p:txBody>
+      </p:sp>
+      <p:sp>
+        <p:nvSpPr>
+          <p:cNvPr id="305" name="Rectangle 304"/>
+          <p:cNvSpPr/>
+          <p:nvPr/>
+        </p:nvSpPr>
+        <p:spPr>
+          <a:xfrm>
+            <a:off x="6236208" y="1828800"/>
+            <a:ext cx="438912" cy="365760"/>
+          </a:xfrm>
+          <a:prstGeom prst="rect">
+            <a:avLst/>
+          </a:prstGeom>
+          <a:solidFill>
+            <a:srgbClr val="D45D35"/>
+          </a:solidFill>
+          <a:ln>
+            <a:noFill/>
+          </a:ln>
+          <a:effectLst/>
+        </p:spPr>
+        <p:style>
+          <a:lnRef idx="1">
+            <a:schemeClr val="accent1"/>
+          </a:lnRef>
+          <a:fillRef idx="3">
+            <a:schemeClr val="accent1"/>
+          </a:fillRef>
+          <a:effectRef idx="2">
+            <a:schemeClr val="accent1"/>
+          </a:effectRef>
+          <a:fontRef idx="minor">
+            <a:schemeClr val="lt1"/>
+          </a:fontRef>
+        </p:style>
+        <p:txBody>
+          <a:bodyPr rtlCol="0" anchor="ctr" wrap="square" lIns="73152" rIns="73152"/>
+          <a:lstStyle/>
+          <a:p>
+            <a:pPr algn="ctr"/>
+            <a:r>
+              <a:rPr sz="1400" b="0">
+                <a:solidFill>
+                  <a:srgbClr val="DEE2E6"/>
+                </a:solidFill>
+              </a:rPr>
+              <a:t/>
+            </a:r>
+          </a:p>
+        </p:txBody>
+      </p:sp>
+      <p:sp>
+        <p:nvSpPr>
+          <p:cNvPr id="306" name="Rectangle 305"/>
+          <p:cNvSpPr/>
+          <p:nvPr/>
+        </p:nvSpPr>
+        <p:spPr>
+          <a:xfrm>
+            <a:off x="6711696" y="1828800"/>
+            <a:ext cx="438912" cy="365760"/>
+          </a:xfrm>
+          <a:prstGeom prst="rect">
+            <a:avLst/>
+          </a:prstGeom>
+          <a:solidFill>
+            <a:srgbClr val="D45D35"/>
+          </a:solidFill>
+          <a:ln>
+            <a:noFill/>
+          </a:ln>
+          <a:effectLst/>
+        </p:spPr>
+        <p:style>
+          <a:lnRef idx="1">
+            <a:schemeClr val="accent1"/>
+          </a:lnRef>
+          <a:fillRef idx="3">
+            <a:schemeClr val="accent1"/>
+          </a:fillRef>
+          <a:effectRef idx="2">
+            <a:schemeClr val="accent1"/>
+          </a:effectRef>
+          <a:fontRef idx="minor">
+            <a:schemeClr val="lt1"/>
+          </a:fontRef>
+        </p:style>
+        <p:txBody>
+          <a:bodyPr rtlCol="0" anchor="ctr" wrap="square" lIns="73152" rIns="73152"/>
+          <a:lstStyle/>
+          <a:p>
+            <a:pPr algn="ctr"/>
+            <a:r>
+              <a:rPr sz="1400" b="0">
+                <a:solidFill>
+                  <a:srgbClr val="DEE2E6"/>
+                </a:solidFill>
+              </a:rPr>
+              <a:t/>
+            </a:r>
+          </a:p>
+        </p:txBody>
+      </p:sp>
+      <p:sp>
+        <p:nvSpPr>
+          <p:cNvPr id="307" name="Rectangle 306"/>
+          <p:cNvSpPr/>
+          <p:nvPr/>
+        </p:nvSpPr>
+        <p:spPr>
+          <a:xfrm>
+            <a:off x="7187183" y="1828800"/>
+            <a:ext cx="438912" cy="365760"/>
+          </a:xfrm>
+          <a:prstGeom prst="rect">
+            <a:avLst/>
+          </a:prstGeom>
+          <a:solidFill>
+            <a:srgbClr val="D45D35"/>
+          </a:solidFill>
+          <a:ln>
+            <a:noFill/>
+          </a:ln>
+          <a:effectLst/>
+        </p:spPr>
+        <p:style>
+          <a:lnRef idx="1">
+            <a:schemeClr val="accent1"/>
+          </a:lnRef>
+          <a:fillRef idx="3">
+            <a:schemeClr val="accent1"/>
+          </a:fillRef>
+          <a:effectRef idx="2">
+            <a:schemeClr val="accent1"/>
+          </a:effectRef>
+          <a:fontRef idx="minor">
+            <a:schemeClr val="lt1"/>
+          </a:fontRef>
+        </p:style>
+        <p:txBody>
+          <a:bodyPr rtlCol="0" anchor="ctr" wrap="square" lIns="73152" rIns="73152"/>
+          <a:lstStyle/>
+          <a:p>
+            <a:pPr algn="ctr"/>
+            <a:r>
+              <a:rPr sz="1400" b="0">
+                <a:solidFill>
+                  <a:srgbClr val="DEE2E6"/>
+                </a:solidFill>
+              </a:rPr>
+              <a:t/>
+            </a:r>
+          </a:p>
+        </p:txBody>
+      </p:sp>
+      <p:sp>
+        <p:nvSpPr>
+          <p:cNvPr id="308" name="Rectangle 307"/>
+          <p:cNvSpPr/>
+          <p:nvPr/>
+        </p:nvSpPr>
+        <p:spPr>
+          <a:xfrm>
+            <a:off x="7662671" y="1828800"/>
+            <a:ext cx="438912" cy="365760"/>
+          </a:xfrm>
+          <a:prstGeom prst="rect">
+            <a:avLst/>
+          </a:prstGeom>
+          <a:solidFill>
+            <a:srgbClr val="D45D35"/>
+          </a:solidFill>
+          <a:ln>
+            <a:noFill/>
+          </a:ln>
+          <a:effectLst/>
+        </p:spPr>
+        <p:style>
+          <a:lnRef idx="1">
+            <a:schemeClr val="accent1"/>
+          </a:lnRef>
+          <a:fillRef idx="3">
+            <a:schemeClr val="accent1"/>
+          </a:fillRef>
+          <a:effectRef idx="2">
+            <a:schemeClr val="accent1"/>
+          </a:effectRef>
+          <a:fontRef idx="minor">
+            <a:schemeClr val="lt1"/>
+          </a:fontRef>
+        </p:style>
+        <p:txBody>
+          <a:bodyPr rtlCol="0" anchor="ctr" wrap="square" lIns="73152" rIns="73152"/>
+          <a:lstStyle/>
+          <a:p>
+            <a:pPr algn="ctr"/>
+            <a:r>
+              <a:rPr sz="1400" b="0">
+                <a:solidFill>
+                  <a:srgbClr val="DEE2E6"/>
+                </a:solidFill>
+              </a:rPr>
+              <a:t/>
+            </a:r>
+          </a:p>
+        </p:txBody>
+      </p:sp>
+      <p:sp>
+        <p:nvSpPr>
+          <p:cNvPr id="309" name="Rectangle 308"/>
+          <p:cNvSpPr/>
+          <p:nvPr/>
+        </p:nvSpPr>
+        <p:spPr>
+          <a:xfrm>
+            <a:off x="8138160" y="1828800"/>
+            <a:ext cx="438912" cy="365760"/>
+          </a:xfrm>
+          <a:prstGeom prst="rect">
+            <a:avLst/>
+          </a:prstGeom>
+          <a:solidFill>
+            <a:srgbClr val="D45D35"/>
+          </a:solidFill>
+          <a:ln>
+            <a:noFill/>
+          </a:ln>
+          <a:effectLst/>
+        </p:spPr>
+        <p:style>
+          <a:lnRef idx="1">
+            <a:schemeClr val="accent1"/>
+          </a:lnRef>
+          <a:fillRef idx="3">
+            <a:schemeClr val="accent1"/>
+          </a:fillRef>
+          <a:effectRef idx="2">
+            <a:schemeClr val="accent1"/>
+          </a:effectRef>
+          <a:fontRef idx="minor">
+            <a:schemeClr val="lt1"/>
+          </a:fontRef>
+        </p:style>
+        <p:txBody>
+          <a:bodyPr rtlCol="0" anchor="ctr" wrap="square" lIns="73152" rIns="73152"/>
+          <a:lstStyle/>
+          <a:p>
+            <a:pPr algn="ctr"/>
+            <a:r>
+              <a:rPr sz="1400" b="0">
+                <a:solidFill>
+                  <a:srgbClr val="DEE2E6"/>
+                </a:solidFill>
+              </a:rPr>
+              <a:t/>
+            </a:r>
+          </a:p>
+        </p:txBody>
+      </p:sp>
+      <p:sp>
+        <p:nvSpPr>
+          <p:cNvPr id="310" name="TextBox 309"/>
+          <p:cNvSpPr txBox="1"/>
+          <p:nvPr/>
+        </p:nvSpPr>
+        <p:spPr>
+          <a:xfrm>
+            <a:off x="4846320" y="2377440"/>
+            <a:ext cx="914400" cy="365760"/>
+          </a:xfrm>
+          <a:prstGeom prst="rect">
+            <a:avLst/>
+          </a:prstGeom>
+          <a:noFill/>
+        </p:spPr>
+        <p:txBody>
+          <a:bodyPr wrap="square">
+            <a:spAutoFit/>
+          </a:bodyPr>
+          <a:lstStyle/>
+          <a:p>
+            <a:pPr algn="l"/>
+            <a:r>
+              <a:rPr sz="1100" b="0" i="0">
+                <a:solidFill>
+                  <a:srgbClr val="9AA3AB"/>
+                </a:solidFill>
+              </a:rPr>
+              <a:t>Health</a:t>
+            </a:r>
+          </a:p>
+        </p:txBody>
+      </p:sp>
+      <p:sp>
+        <p:nvSpPr>
+          <p:cNvPr id="311" name="Rectangle 310"/>
+          <p:cNvSpPr/>
+          <p:nvPr/>
+        </p:nvSpPr>
+        <p:spPr>
+          <a:xfrm>
+            <a:off x="5760720" y="2377440"/>
+            <a:ext cx="438912" cy="365760"/>
+          </a:xfrm>
+          <a:prstGeom prst="rect">
+            <a:avLst/>
+          </a:prstGeom>
+          <a:solidFill>
+            <a:srgbClr val="2E3338"/>
+          </a:solidFill>
+          <a:ln>
+            <a:noFill/>
+          </a:ln>
+          <a:effectLst/>
+        </p:spPr>
+        <p:style>
+          <a:lnRef idx="1">
+            <a:schemeClr val="accent1"/>
+          </a:lnRef>
+          <a:fillRef idx="3">
+            <a:schemeClr val="accent1"/>
+          </a:fillRef>
+          <a:effectRef idx="2">
+            <a:schemeClr val="accent1"/>
+          </a:effectRef>
+          <a:fontRef idx="minor">
+            <a:schemeClr val="lt1"/>
+          </a:fontRef>
+        </p:style>
+        <p:txBody>
+          <a:bodyPr rtlCol="0" anchor="ctr" wrap="square" lIns="73152" rIns="73152"/>
+          <a:lstStyle/>
+          <a:p>
+            <a:pPr algn="ctr"/>
+            <a:r>
+              <a:rPr sz="1400" b="0">
+                <a:solidFill>
+                  <a:srgbClr val="DEE2E6"/>
+                </a:solidFill>
+              </a:rPr>
+              <a:t/>
+            </a:r>
+          </a:p>
+        </p:txBody>
+      </p:sp>
+      <p:sp>
+        <p:nvSpPr>
+          <p:cNvPr id="312" name="Rectangle 311"/>
+          <p:cNvSpPr/>
+          <p:nvPr/>
+        </p:nvSpPr>
+        <p:spPr>
+          <a:xfrm>
+            <a:off x="6236208" y="2377440"/>
+            <a:ext cx="438912" cy="365760"/>
+          </a:xfrm>
+          <a:prstGeom prst="rect">
+            <a:avLst/>
+          </a:prstGeom>
+          <a:solidFill>
+            <a:srgbClr val="2E3338"/>
+          </a:solidFill>
+          <a:ln>
+            <a:noFill/>
+          </a:ln>
+          <a:effectLst/>
+        </p:spPr>
+        <p:style>
+          <a:lnRef idx="1">
+            <a:schemeClr val="accent1"/>
+          </a:lnRef>
+          <a:fillRef idx="3">
+            <a:schemeClr val="accent1"/>
+          </a:fillRef>
+          <a:effectRef idx="2">
+            <a:schemeClr val="accent1"/>
+          </a:effectRef>
+          <a:fontRef idx="minor">
+            <a:schemeClr val="lt1"/>
+          </a:fontRef>
+        </p:style>
+        <p:txBody>
+          <a:bodyPr rtlCol="0" anchor="ctr" wrap="square" lIns="73152" rIns="73152"/>
+          <a:lstStyle/>
+          <a:p>
+            <a:pPr algn="ctr"/>
+            <a:r>
+              <a:rPr sz="1400" b="0">
+                <a:solidFill>
+                  <a:srgbClr val="DEE2E6"/>
+                </a:solidFill>
+              </a:rPr>
+              <a:t/>
+            </a:r>
+          </a:p>
+        </p:txBody>
+      </p:sp>
+      <p:sp>
+        <p:nvSpPr>
+          <p:cNvPr id="313" name="Rectangle 312"/>
+          <p:cNvSpPr/>
+          <p:nvPr/>
+        </p:nvSpPr>
+        <p:spPr>
+          <a:xfrm>
+            <a:off x="6711696" y="2377440"/>
+            <a:ext cx="438912" cy="365760"/>
+          </a:xfrm>
+          <a:prstGeom prst="rect">
+            <a:avLst/>
+          </a:prstGeom>
+          <a:solidFill>
+            <a:srgbClr val="2E3338"/>
+          </a:solidFill>
+          <a:ln>
+            <a:noFill/>
+          </a:ln>
+          <a:effectLst/>
+        </p:spPr>
+        <p:style>
+          <a:lnRef idx="1">
+            <a:schemeClr val="accent1"/>
+          </a:lnRef>
+          <a:fillRef idx="3">
+            <a:schemeClr val="accent1"/>
+          </a:fillRef>
+          <a:effectRef idx="2">
+            <a:schemeClr val="accent1"/>
+          </a:effectRef>
+          <a:fontRef idx="minor">
+            <a:schemeClr val="lt1"/>
+          </a:fontRef>
+        </p:style>
+        <p:txBody>
+          <a:bodyPr rtlCol="0" anchor="ctr" wrap="square" lIns="73152" rIns="73152"/>
+          <a:lstStyle/>
+          <a:p>
+            <a:pPr algn="ctr"/>
+            <a:r>
+              <a:rPr sz="1400" b="0">
+                <a:solidFill>
+                  <a:srgbClr val="DEE2E6"/>
+                </a:solidFill>
+              </a:rPr>
+              <a:t/>
+            </a:r>
+          </a:p>
+        </p:txBody>
+      </p:sp>
+      <p:sp>
+        <p:nvSpPr>
+          <p:cNvPr id="314" name="Rectangle 313"/>
+          <p:cNvSpPr/>
+          <p:nvPr/>
+        </p:nvSpPr>
+        <p:spPr>
+          <a:xfrm>
+            <a:off x="7187183" y="2377440"/>
+            <a:ext cx="438912" cy="365760"/>
+          </a:xfrm>
+          <a:prstGeom prst="rect">
+            <a:avLst/>
+          </a:prstGeom>
+          <a:solidFill>
+            <a:srgbClr val="2E3338"/>
+          </a:solidFill>
+          <a:ln>
+            <a:noFill/>
+          </a:ln>
+          <a:effectLst/>
+        </p:spPr>
+        <p:style>
+          <a:lnRef idx="1">
+            <a:schemeClr val="accent1"/>
+          </a:lnRef>
+          <a:fillRef idx="3">
+            <a:schemeClr val="accent1"/>
+          </a:fillRef>
+          <a:effectRef idx="2">
+            <a:schemeClr val="accent1"/>
+          </a:effectRef>
+          <a:fontRef idx="minor">
+            <a:schemeClr val="lt1"/>
+          </a:fontRef>
+        </p:style>
+        <p:txBody>
+          <a:bodyPr rtlCol="0" anchor="ctr" wrap="square" lIns="73152" rIns="73152"/>
+          <a:lstStyle/>
+          <a:p>
+            <a:pPr algn="ctr"/>
+            <a:r>
+              <a:rPr sz="1400" b="0">
+                <a:solidFill>
+                  <a:srgbClr val="DEE2E6"/>
+                </a:solidFill>
+              </a:rPr>
+              <a:t/>
+            </a:r>
+          </a:p>
+        </p:txBody>
+      </p:sp>
+      <p:sp>
+        <p:nvSpPr>
+          <p:cNvPr id="315" name="Rectangle 314"/>
+          <p:cNvSpPr/>
+          <p:nvPr/>
+        </p:nvSpPr>
+        <p:spPr>
+          <a:xfrm>
+            <a:off x="7662671" y="2377440"/>
+            <a:ext cx="438912" cy="365760"/>
+          </a:xfrm>
+          <a:prstGeom prst="rect">
+            <a:avLst/>
+          </a:prstGeom>
+          <a:solidFill>
+            <a:srgbClr val="2E3338"/>
+          </a:solidFill>
+          <a:ln>
+            <a:noFill/>
+          </a:ln>
+          <a:effectLst/>
+        </p:spPr>
+        <p:style>
+          <a:lnRef idx="1">
+            <a:schemeClr val="accent1"/>
+          </a:lnRef>
+          <a:fillRef idx="3">
+            <a:schemeClr val="accent1"/>
+          </a:fillRef>
+          <a:effectRef idx="2">
+            <a:schemeClr val="accent1"/>
+          </a:effectRef>
+          <a:fontRef idx="minor">
+            <a:schemeClr val="lt1"/>
+          </a:fontRef>
+        </p:style>
+        <p:txBody>
+          <a:bodyPr rtlCol="0" anchor="ctr" wrap="square" lIns="73152" rIns="73152"/>
+          <a:lstStyle/>
+          <a:p>
+            <a:pPr algn="ctr"/>
+            <a:r>
+              <a:rPr sz="1400" b="0">
+                <a:solidFill>
+                  <a:srgbClr val="DEE2E6"/>
+                </a:solidFill>
+              </a:rPr>
+              <a:t/>
+            </a:r>
+          </a:p>
+        </p:txBody>
+      </p:sp>
+      <p:sp>
+        <p:nvSpPr>
+          <p:cNvPr id="316" name="Rectangle 315"/>
+          <p:cNvSpPr/>
+          <p:nvPr/>
+        </p:nvSpPr>
+        <p:spPr>
+          <a:xfrm>
+            <a:off x="8138160" y="2377440"/>
+            <a:ext cx="438912" cy="365760"/>
+          </a:xfrm>
+          <a:prstGeom prst="rect">
+            <a:avLst/>
+          </a:prstGeom>
+          <a:solidFill>
+            <a:srgbClr val="2E3338"/>
+          </a:solidFill>
+          <a:ln>
+            <a:noFill/>
+          </a:ln>
+          <a:effectLst/>
+        </p:spPr>
+        <p:style>
+          <a:lnRef idx="1">
+            <a:schemeClr val="accent1"/>
+          </a:lnRef>
+          <a:fillRef idx="3">
+            <a:schemeClr val="accent1"/>
+          </a:fillRef>
+          <a:effectRef idx="2">
+            <a:schemeClr val="accent1"/>
+          </a:effectRef>
+          <a:fontRef idx="minor">
+            <a:schemeClr val="lt1"/>
+          </a:fontRef>
+        </p:style>
+        <p:txBody>
+          <a:bodyPr rtlCol="0" anchor="ctr" wrap="square" lIns="73152" rIns="73152"/>
+          <a:lstStyle/>
+          <a:p>
+            <a:pPr algn="ctr"/>
+            <a:r>
+              <a:rPr sz="1400" b="0">
+                <a:solidFill>
+                  <a:srgbClr val="DEE2E6"/>
+                </a:solidFill>
+              </a:rPr>
+              <a:t/>
+            </a:r>
+          </a:p>
+        </p:txBody>
+      </p:sp>
+      <p:sp>
+        <p:nvSpPr>
+          <p:cNvPr id="317" name="TextBox 316"/>
+          <p:cNvSpPr txBox="1"/>
+          <p:nvPr/>
+        </p:nvSpPr>
+        <p:spPr>
+          <a:xfrm>
+            <a:off x="4846320" y="2926080"/>
+            <a:ext cx="914400" cy="365760"/>
+          </a:xfrm>
+          <a:prstGeom prst="rect">
+            <a:avLst/>
+          </a:prstGeom>
+          <a:noFill/>
+        </p:spPr>
+        <p:txBody>
+          <a:bodyPr wrap="square">
+            <a:spAutoFit/>
+          </a:bodyPr>
+          <a:lstStyle/>
+          <a:p>
+            <a:pPr algn="l"/>
+            <a:r>
+              <a:rPr sz="1100" b="0" i="0">
+                <a:solidFill>
+                  <a:srgbClr val="9AA3AB"/>
+                </a:solidFill>
+              </a:rPr>
+              <a:t>Speed</a:t>
+            </a:r>
+          </a:p>
+        </p:txBody>
+      </p:sp>
+      <p:sp>
+        <p:nvSpPr>
+          <p:cNvPr id="318" name="Rectangle 317"/>
+          <p:cNvSpPr/>
+          <p:nvPr/>
+        </p:nvSpPr>
+        <p:spPr>
+          <a:xfrm>
+            <a:off x="5760720" y="2926080"/>
+            <a:ext cx="438912" cy="365760"/>
+          </a:xfrm>
+          <a:prstGeom prst="rect">
+            <a:avLst/>
+          </a:prstGeom>
+          <a:solidFill>
+            <a:srgbClr val="2E3338"/>
+          </a:solidFill>
+          <a:ln>
+            <a:noFill/>
+          </a:ln>
+          <a:effectLst/>
+        </p:spPr>
+        <p:style>
+          <a:lnRef idx="1">
+            <a:schemeClr val="accent1"/>
+          </a:lnRef>
+          <a:fillRef idx="3">
+            <a:schemeClr val="accent1"/>
+          </a:fillRef>
+          <a:effectRef idx="2">
+            <a:schemeClr val="accent1"/>
+          </a:effectRef>
+          <a:fontRef idx="minor">
+            <a:schemeClr val="lt1"/>
+          </a:fontRef>
+        </p:style>
+        <p:txBody>
+          <a:bodyPr rtlCol="0" anchor="ctr" wrap="square" lIns="73152" rIns="73152"/>
+          <a:lstStyle/>
+          <a:p>
+            <a:pPr algn="ctr"/>
+            <a:r>
+              <a:rPr sz="1400" b="0">
+                <a:solidFill>
+                  <a:srgbClr val="DEE2E6"/>
+                </a:solidFill>
+              </a:rPr>
+              <a:t/>
+            </a:r>
+          </a:p>
+        </p:txBody>
+      </p:sp>
+      <p:sp>
+        <p:nvSpPr>
+          <p:cNvPr id="319" name="Rectangle 318"/>
+          <p:cNvSpPr/>
+          <p:nvPr/>
+        </p:nvSpPr>
+        <p:spPr>
+          <a:xfrm>
+            <a:off x="6236208" y="2926080"/>
+            <a:ext cx="438912" cy="365760"/>
+          </a:xfrm>
+          <a:prstGeom prst="rect">
+            <a:avLst/>
+          </a:prstGeom>
+          <a:solidFill>
+            <a:srgbClr val="2E3338"/>
+          </a:solidFill>
+          <a:ln>
+            <a:noFill/>
+          </a:ln>
+          <a:effectLst/>
+        </p:spPr>
+        <p:style>
+          <a:lnRef idx="1">
+            <a:schemeClr val="accent1"/>
+          </a:lnRef>
+          <a:fillRef idx="3">
+            <a:schemeClr val="accent1"/>
+          </a:fillRef>
+          <a:effectRef idx="2">
+            <a:schemeClr val="accent1"/>
+          </a:effectRef>
+          <a:fontRef idx="minor">
+            <a:schemeClr val="lt1"/>
+          </a:fontRef>
+        </p:style>
+        <p:txBody>
+          <a:bodyPr rtlCol="0" anchor="ctr" wrap="square" lIns="73152" rIns="73152"/>
+          <a:lstStyle/>
+          <a:p>
+            <a:pPr algn="ctr"/>
+            <a:r>
+              <a:rPr sz="1400" b="0">
+                <a:solidFill>
+                  <a:srgbClr val="DEE2E6"/>
+                </a:solidFill>
+              </a:rPr>
+              <a:t/>
+            </a:r>
+          </a:p>
+        </p:txBody>
+      </p:sp>
+      <p:sp>
+        <p:nvSpPr>
+          <p:cNvPr id="320" name="Rectangle 319"/>
+          <p:cNvSpPr/>
+          <p:nvPr/>
+        </p:nvSpPr>
+        <p:spPr>
+          <a:xfrm>
+            <a:off x="6711696" y="2926080"/>
+            <a:ext cx="438912" cy="365760"/>
+          </a:xfrm>
+          <a:prstGeom prst="rect">
+            <a:avLst/>
+          </a:prstGeom>
+          <a:solidFill>
+            <a:srgbClr val="2E3338"/>
+          </a:solidFill>
+          <a:ln>
+            <a:noFill/>
+          </a:ln>
+          <a:effectLst/>
+        </p:spPr>
+        <p:style>
+          <a:lnRef idx="1">
+            <a:schemeClr val="accent1"/>
+          </a:lnRef>
+          <a:fillRef idx="3">
+            <a:schemeClr val="accent1"/>
+          </a:fillRef>
+          <a:effectRef idx="2">
+            <a:schemeClr val="accent1"/>
+          </a:effectRef>
+          <a:fontRef idx="minor">
+            <a:schemeClr val="lt1"/>
+          </a:fontRef>
+        </p:style>
+        <p:txBody>
+          <a:bodyPr rtlCol="0" anchor="ctr" wrap="square" lIns="73152" rIns="73152"/>
+          <a:lstStyle/>
+          <a:p>
+            <a:pPr algn="ctr"/>
+            <a:r>
+              <a:rPr sz="1400" b="0">
+                <a:solidFill>
+                  <a:srgbClr val="DEE2E6"/>
+                </a:solidFill>
+              </a:rPr>
+              <a:t/>
+            </a:r>
+          </a:p>
+        </p:txBody>
+      </p:sp>
+      <p:sp>
+        <p:nvSpPr>
+          <p:cNvPr id="321" name="Rectangle 320"/>
+          <p:cNvSpPr/>
+          <p:nvPr/>
+        </p:nvSpPr>
+        <p:spPr>
+          <a:xfrm>
+            <a:off x="7187183" y="2926080"/>
+            <a:ext cx="438912" cy="365760"/>
+          </a:xfrm>
+          <a:prstGeom prst="rect">
+            <a:avLst/>
+          </a:prstGeom>
+          <a:solidFill>
+            <a:srgbClr val="2E3338"/>
+          </a:solidFill>
+          <a:ln>
+            <a:noFill/>
+          </a:ln>
+          <a:effectLst/>
+        </p:spPr>
+        <p:style>
+          <a:lnRef idx="1">
+            <a:schemeClr val="accent1"/>
+          </a:lnRef>
+          <a:fillRef idx="3">
+            <a:schemeClr val="accent1"/>
+          </a:fillRef>
+          <a:effectRef idx="2">
+            <a:schemeClr val="accent1"/>
+          </a:effectRef>
+          <a:fontRef idx="minor">
+            <a:schemeClr val="lt1"/>
+          </a:fontRef>
+        </p:style>
+        <p:txBody>
+          <a:bodyPr rtlCol="0" anchor="ctr" wrap="square" lIns="73152" rIns="73152"/>
+          <a:lstStyle/>
+          <a:p>
+            <a:pPr algn="ctr"/>
+            <a:r>
+              <a:rPr sz="1400" b="0">
+                <a:solidFill>
+                  <a:srgbClr val="DEE2E6"/>
+                </a:solidFill>
+              </a:rPr>
+              <a:t/>
+            </a:r>
+          </a:p>
+        </p:txBody>
+      </p:sp>
+      <p:sp>
+        <p:nvSpPr>
+          <p:cNvPr id="322" name="Rectangle 321"/>
+          <p:cNvSpPr/>
+          <p:nvPr/>
+        </p:nvSpPr>
+        <p:spPr>
+          <a:xfrm>
+            <a:off x="7662671" y="2926080"/>
+            <a:ext cx="438912" cy="365760"/>
+          </a:xfrm>
+          <a:prstGeom prst="rect">
+            <a:avLst/>
+          </a:prstGeom>
+          <a:solidFill>
+            <a:srgbClr val="2E3338"/>
+          </a:solidFill>
+          <a:ln>
+            <a:noFill/>
+          </a:ln>
+          <a:effectLst/>
+        </p:spPr>
+        <p:style>
+          <a:lnRef idx="1">
+            <a:schemeClr val="accent1"/>
+          </a:lnRef>
+          <a:fillRef idx="3">
+            <a:schemeClr val="accent1"/>
+          </a:fillRef>
+          <a:effectRef idx="2">
+            <a:schemeClr val="accent1"/>
+          </a:effectRef>
+          <a:fontRef idx="minor">
+            <a:schemeClr val="lt1"/>
+          </a:fontRef>
+        </p:style>
+        <p:txBody>
+          <a:bodyPr rtlCol="0" anchor="ctr" wrap="square" lIns="73152" rIns="73152"/>
+          <a:lstStyle/>
+          <a:p>
+            <a:pPr algn="ctr"/>
+            <a:r>
+              <a:rPr sz="1400" b="0">
+                <a:solidFill>
+                  <a:srgbClr val="DEE2E6"/>
+                </a:solidFill>
+              </a:rPr>
+              <a:t/>
+            </a:r>
+          </a:p>
+        </p:txBody>
+      </p:sp>
+      <p:sp>
+        <p:nvSpPr>
+          <p:cNvPr id="323" name="Rectangle 322"/>
+          <p:cNvSpPr/>
+          <p:nvPr/>
+        </p:nvSpPr>
+        <p:spPr>
+          <a:xfrm>
+            <a:off x="8138160" y="2926080"/>
+            <a:ext cx="438912" cy="365760"/>
+          </a:xfrm>
+          <a:prstGeom prst="rect">
+            <a:avLst/>
+          </a:prstGeom>
+          <a:solidFill>
+            <a:srgbClr val="2E3338"/>
+          </a:solidFill>
+          <a:ln>
+            <a:noFill/>
+          </a:ln>
+          <a:effectLst/>
+        </p:spPr>
+        <p:style>
+          <a:lnRef idx="1">
+            <a:schemeClr val="accent1"/>
+          </a:lnRef>
+          <a:fillRef idx="3">
+            <a:schemeClr val="accent1"/>
+          </a:fillRef>
+          <a:effectRef idx="2">
+            <a:schemeClr val="accent1"/>
+          </a:effectRef>
+          <a:fontRef idx="minor">
+            <a:schemeClr val="lt1"/>
+          </a:fontRef>
+        </p:style>
+        <p:txBody>
+          <a:bodyPr rtlCol="0" anchor="ctr" wrap="square" lIns="73152" rIns="73152"/>
+          <a:lstStyle/>
+          <a:p>
+            <a:pPr algn="ctr"/>
+            <a:r>
+              <a:rPr sz="1400" b="0">
+                <a:solidFill>
+                  <a:srgbClr val="DEE2E6"/>
+                </a:solidFill>
+              </a:rPr>
+              <a:t/>
+            </a:r>
+          </a:p>
+        </p:txBody>
+      </p:sp>
+      <p:sp>
+        <p:nvSpPr>
+          <p:cNvPr id="324" name="TextBox 323"/>
+          <p:cNvSpPr txBox="1"/>
+          <p:nvPr/>
+        </p:nvSpPr>
+        <p:spPr>
+          <a:xfrm>
+            <a:off x="4846320" y="3566160"/>
+            <a:ext cx="3840480" cy="457200"/>
+          </a:xfrm>
+          <a:prstGeom prst="rect">
+            <a:avLst/>
+          </a:prstGeom>
+          <a:noFill/>
+        </p:spPr>
+        <p:txBody>
+          <a:bodyPr wrap="square">
+            <a:spAutoFit/>
+          </a:bodyPr>
+          <a:lstStyle/>
+          <a:p>
+            <a:pPr algn="l"/>
+            <a:r>
+              <a:rPr sz="1200" b="0" i="0">
+                <a:solidFill>
+                  <a:srgbClr val="9AA3AB"/>
+                </a:solidFill>
+              </a:rPr>
+              <a:t>The CPU reads 64 bytes at a time: one read, several enemies.</a:t>
+            </a:r>
           </a:p>
         </p:txBody>
       </p:sp>
@@ -7768,7 +10608,7 @@
         <p:spPr>
           <a:xfrm>
             <a:off x="311700" y="885950"/>
-            <a:ext cx="8520600" cy="4023300"/>
+            <a:ext cx="8520600" cy="521208"/>
           </a:xfrm>
           <a:prstGeom prst="rect">
             <a:avLst/>
@@ -7792,94 +10632,110 @@
             </a:pPr>
             <a:r>
               <a:rPr lang="en"/>
-              <a:t>Enemies as arrays, same grid: no difference</a:t>
+              <a:t>Enemies as arrays, same grid: 4.1 ms became 3.9 ms. Hardly anything.</a:t>
             </a:r>
             <a:endParaRPr/>
           </a:p>
-          <a:p>
-            <a:pPr indent="-317500" lvl="1" marL="914400" rtl="0" algn="l">
-              <a:spcBef>
-                <a:spcPts val="0"/>
-              </a:spcBef>
-              <a:spcAft>
-                <a:spcPts val="0"/>
-              </a:spcAft>
-              <a:buSzPts val="1400"/>
-              <a:buChar char="○"/>
-            </a:pPr>
-            <a:r>
-              <a:rPr lang="en"/>
-              <a:t>10,000 enemies: 3.9 ms instead of 4.1 ms</a:t>
-            </a:r>
-            <a:endParaRPr/>
-          </a:p>
-          <a:p>
-            <a:pPr indent="-330200" lvl="0" marL="457200" rtl="0" algn="l">
-              <a:spcBef>
-                <a:spcPts val="0"/>
-              </a:spcBef>
-              <a:spcAft>
-                <a:spcPts val="0"/>
-              </a:spcAft>
-              <a:buSzPts val="1600"/>
-              <a:buChar char="●"/>
-            </a:pPr>
-            <a:r>
-              <a:rPr lang="en"/>
+        </p:txBody>
+      </p:sp>
+      <p:sp>
+        <p:nvSpPr>
+          <p:cNvPr id="295" name="Rounded Rectangle 294"/>
+          <p:cNvSpPr/>
+          <p:nvPr/>
+        </p:nvSpPr>
+        <p:spPr>
+          <a:xfrm>
+            <a:off x="1097280" y="1463040"/>
+            <a:ext cx="6949440" cy="914400"/>
+          </a:xfrm>
+          <a:prstGeom prst="roundRect">
+            <a:avLst>
+              <a:gd name="adj" fmla="val 12000"/>
+            </a:avLst>
+          </a:prstGeom>
+          <a:solidFill>
+            <a:srgbClr val="2E3338"/>
+          </a:solidFill>
+          <a:ln w="25400">
+            <a:solidFill>
+              <a:srgbClr val="D45D35"/>
+            </a:solidFill>
+          </a:ln>
+          <a:effectLst/>
+        </p:spPr>
+        <p:style>
+          <a:lnRef idx="1">
+            <a:schemeClr val="accent1"/>
+          </a:lnRef>
+          <a:fillRef idx="3">
+            <a:schemeClr val="accent1"/>
+          </a:fillRef>
+          <a:effectRef idx="2">
+            <a:schemeClr val="accent1"/>
+          </a:effectRef>
+          <a:fontRef idx="minor">
+            <a:schemeClr val="lt1"/>
+          </a:fontRef>
+        </p:style>
+        <p:txBody>
+          <a:bodyPr rtlCol="0" anchor="ctr" wrap="square" lIns="73152" rIns="73152"/>
+          <a:lstStyle/>
+          <a:p>
+            <a:pPr algn="ctr"/>
+            <a:r>
+              <a:rPr sz="1700" b="1">
+                <a:solidFill>
+                  <a:srgbClr val="DEE2E6"/>
+                </a:solidFill>
+              </a:rPr>
               <a:t>The time was in the grid</a:t>
             </a:r>
-            <a:endParaRPr/>
-          </a:p>
-          <a:p>
-            <a:pPr indent="-317500" lvl="1" marL="914400" rtl="0" algn="l">
-              <a:spcBef>
-                <a:spcPts val="0"/>
-              </a:spcBef>
-              <a:spcAft>
-                <a:spcPts val="0"/>
-              </a:spcAft>
-              <a:buSzPts val="1400"/>
-              <a:buChar char="○"/>
-            </a:pPr>
-            <a:r>
-              <a:rPr lang="en"/>
-              <a:t>A dictionary lookup per cell, lists of tuples</a:t>
-            </a:r>
-            <a:endParaRPr/>
-          </a:p>
-          <a:p>
-            <a:pPr indent="-330200" lvl="0" marL="457200" rtl="0" algn="l">
-              <a:spcBef>
-                <a:spcPts val="0"/>
-              </a:spcBef>
-              <a:spcAft>
-                <a:spcPts val="0"/>
-              </a:spcAft>
-              <a:buSzPts val="1600"/>
-              <a:buChar char="●"/>
-            </a:pPr>
-            <a:r>
-              <a:rPr lang="en"/>
-              <a:t>The layout that matters: the data in the hot loop</a:t>
-            </a:r>
-            <a:endParaRPr/>
-          </a:p>
-          <a:p>
-            <a:pPr indent="-317500" lvl="1" marL="914400" rtl="0" algn="l">
-              <a:spcBef>
-                <a:spcPts val="0"/>
-              </a:spcBef>
-              <a:spcAft>
-                <a:spcPts val="0"/>
-              </a:spcAft>
-              <a:buSzPts val="1400"/>
-              <a:buChar char="○"/>
-            </a:pPr>
-            <a:r>
-              <a:rPr lang="en"/>
-              <a:t>Only measuring tells you which loop that is</a:t>
-            </a:r>
-            <a:endParaRPr/>
+          </a:p>
+          <a:p>
+            <a:pPr algn="ctr"/>
+            <a:r>
+              <a:rPr sz="1500" b="0">
+                <a:solidFill>
+                  <a:srgbClr val="9AA3AB"/>
+                </a:solidFill>
+              </a:rPr>
+              <a:t>a dictionary lookup per cell, and lists of tuples</a:t>
+            </a:r>
+          </a:p>
+        </p:txBody>
+      </p:sp>
+      <p:sp>
+        <p:nvSpPr>
+          <p:cNvPr id="296" name="TextBox 295"/>
+          <p:cNvSpPr txBox="1"/>
+          <p:nvPr/>
+        </p:nvSpPr>
+        <p:spPr>
+          <a:xfrm>
+            <a:off x="457200" y="2743200"/>
+            <a:ext cx="8229600" cy="731520"/>
+          </a:xfrm>
+          <a:prstGeom prst="rect">
+            <a:avLst/>
+          </a:prstGeom>
+          <a:noFill/>
+        </p:spPr>
+        <p:txBody>
+          <a:bodyPr wrap="square">
+            <a:spAutoFit/>
+          </a:bodyPr>
+          <a:lstStyle/>
+          <a:p>
+            <a:pPr algn="ctr"/>
+            <a:r>
+              <a:rPr sz="1600" b="1" i="0">
+                <a:solidFill>
+                  <a:srgbClr val="DEE2E6"/>
+                </a:solidFill>
+              </a:rPr>
+              <a:t>The layout that matters is the data in the hot loop. How do you find that loop?</a:t>
+            </a:r>
           </a:p>
         </p:txBody>
       </p:sp>
@@ -8756,7 +11612,7 @@
         <p:spPr>
           <a:xfrm>
             <a:off x="311700" y="885950"/>
-            <a:ext cx="8520600" cy="4023300"/>
+            <a:ext cx="8520600" cy="521208"/>
           </a:xfrm>
           <a:prstGeom prst="rect">
             <a:avLst/>
@@ -8780,111 +11636,473 @@
             </a:pPr>
             <a:r>
               <a:rPr lang="en"/>
-              <a:t>Every pair → grid → arrays + flat grid</a:t>
+              <a:t>About 80× faster than where we started.</a:t>
             </a:r>
             <a:endParaRPr/>
           </a:p>
-          <a:p>
-            <a:pPr indent="-317500" lvl="1" marL="914400" rtl="0" algn="l">
-              <a:spcBef>
-                <a:spcPts val="0"/>
-              </a:spcBef>
-              <a:spcAft>
-                <a:spcPts val="0"/>
-              </a:spcAft>
-              <a:buSzPts val="1400"/>
-              <a:buChar char="○"/>
-            </a:pPr>
-            <a:r>
-              <a:rPr lang="en"/>
-              <a:t>1,000 enemies: 1.2 → 1.3 → 0.24 ms</a:t>
-            </a:r>
-            <a:endParaRPr/>
-          </a:p>
-          <a:p>
-            <a:pPr indent="-317500" lvl="1" marL="914400" rtl="0" algn="l">
-              <a:spcBef>
-                <a:spcPts val="0"/>
-              </a:spcBef>
-              <a:spcAft>
-                <a:spcPts val="0"/>
-              </a:spcAft>
-              <a:buSzPts val="1400"/>
-              <a:buChar char="○"/>
-            </a:pPr>
-            <a:r>
-              <a:rPr lang="en"/>
-              <a:t>5,000 enemies: 27 → 1.9 → 0.64 ms</a:t>
-            </a:r>
-            <a:endParaRPr/>
-          </a:p>
-          <a:p>
-            <a:pPr indent="-317500" lvl="1" marL="914400" rtl="0" algn="l">
-              <a:spcBef>
-                <a:spcPts val="0"/>
-              </a:spcBef>
-              <a:spcAft>
-                <a:spcPts val="0"/>
-              </a:spcAft>
-              <a:buSzPts val="1400"/>
-              <a:buChar char="○"/>
-            </a:pPr>
-            <a:r>
-              <a:rPr lang="en"/>
-              <a:t>10,000 enemies: 107 → 4.1 → 1.3 ms</a:t>
-            </a:r>
-            <a:endParaRPr/>
-          </a:p>
-          <a:p>
-            <a:pPr indent="-317500" lvl="1" marL="914400" rtl="0" algn="l">
-              <a:spcBef>
-                <a:spcPts val="0"/>
-              </a:spcBef>
-              <a:spcAft>
-                <a:spcPts val="0"/>
-              </a:spcAft>
-              <a:buSzPts val="1400"/>
-              <a:buChar char="○"/>
-            </a:pPr>
-            <a:r>
-              <a:rPr lang="en"/>
-              <a:t>20,000 enemies: — → 14.5 → 4.9 ms</a:t>
-            </a:r>
-            <a:endParaRPr/>
-          </a:p>
-          <a:p>
-            <a:pPr indent="-330200" lvl="0" marL="457200" rtl="0" algn="l">
-              <a:spcBef>
-                <a:spcPts val="0"/>
-              </a:spcBef>
-              <a:spcAft>
-                <a:spcPts val="0"/>
-              </a:spcAft>
-              <a:buSzPts val="1600"/>
-              <a:buChar char="●"/>
-            </a:pPr>
-            <a:r>
-              <a:rPr lang="en"/>
-              <a:t>3–5× faster than the object grid</a:t>
-            </a:r>
-            <a:endParaRPr/>
-          </a:p>
-          <a:p>
-            <a:pPr indent="-330200" lvl="0" marL="457200" rtl="0" algn="l">
-              <a:spcBef>
-                <a:spcPts val="0"/>
-              </a:spcBef>
-              <a:spcAft>
-                <a:spcPts val="0"/>
-              </a:spcAft>
-              <a:buSzPts val="1600"/>
-              <a:buChar char="●"/>
-            </a:pPr>
-            <a:r>
-              <a:rPr lang="en"/>
-              <a:t>About 80× faster than where we started</a:t>
-            </a:r>
-            <a:endParaRPr/>
+        </p:txBody>
+      </p:sp>
+      <p:sp>
+        <p:nvSpPr>
+          <p:cNvPr id="295" name="TextBox 294"/>
+          <p:cNvSpPr txBox="1"/>
+          <p:nvPr/>
+        </p:nvSpPr>
+        <p:spPr>
+          <a:xfrm>
+            <a:off x="274320" y="1463040"/>
+            <a:ext cx="1645920" cy="411480"/>
+          </a:xfrm>
+          <a:prstGeom prst="rect">
+            <a:avLst/>
+          </a:prstGeom>
+          <a:noFill/>
+        </p:spPr>
+        <p:txBody>
+          <a:bodyPr wrap="square">
+            <a:spAutoFit/>
+          </a:bodyPr>
+          <a:lstStyle/>
+          <a:p>
+            <a:pPr algn="r"/>
+            <a:r>
+              <a:rPr sz="1300" b="1" i="0">
+                <a:solidFill>
+                  <a:srgbClr val="DEE2E6"/>
+                </a:solidFill>
+              </a:rPr>
+              <a:t>Every pair</a:t>
+            </a:r>
+          </a:p>
+        </p:txBody>
+      </p:sp>
+      <p:sp>
+        <p:nvSpPr>
+          <p:cNvPr id="296" name="Rectangle 295"/>
+          <p:cNvSpPr/>
+          <p:nvPr/>
+        </p:nvSpPr>
+        <p:spPr>
+          <a:xfrm>
+            <a:off x="2011680" y="1463040"/>
+            <a:ext cx="5755341" cy="411480"/>
+          </a:xfrm>
+          <a:prstGeom prst="rect">
+            <a:avLst/>
+          </a:prstGeom>
+          <a:solidFill>
+            <a:srgbClr val="2E3338"/>
+          </a:solidFill>
+          <a:ln>
+            <a:noFill/>
+          </a:ln>
+          <a:effectLst/>
+        </p:spPr>
+        <p:style>
+          <a:lnRef idx="1">
+            <a:schemeClr val="accent1"/>
+          </a:lnRef>
+          <a:fillRef idx="3">
+            <a:schemeClr val="accent1"/>
+          </a:fillRef>
+          <a:effectRef idx="2">
+            <a:schemeClr val="accent1"/>
+          </a:effectRef>
+          <a:fontRef idx="minor">
+            <a:schemeClr val="lt1"/>
+          </a:fontRef>
+        </p:style>
+        <p:txBody>
+          <a:bodyPr rtlCol="0" anchor="ctr" wrap="square" lIns="73152" rIns="73152"/>
+          <a:lstStyle/>
+          <a:p>
+            <a:pPr algn="ctr"/>
+            <a:r>
+              <a:rPr sz="1400" b="0">
+                <a:solidFill>
+                  <a:srgbClr val="DEE2E6"/>
+                </a:solidFill>
+              </a:rPr>
+              <a:t/>
+            </a:r>
+          </a:p>
+        </p:txBody>
+      </p:sp>
+      <p:sp>
+        <p:nvSpPr>
+          <p:cNvPr id="297" name="TextBox 296"/>
+          <p:cNvSpPr txBox="1"/>
+          <p:nvPr/>
+        </p:nvSpPr>
+        <p:spPr>
+          <a:xfrm>
+            <a:off x="7840173" y="1463040"/>
+            <a:ext cx="1280160" cy="411480"/>
+          </a:xfrm>
+          <a:prstGeom prst="rect">
+            <a:avLst/>
+          </a:prstGeom>
+          <a:noFill/>
+        </p:spPr>
+        <p:txBody>
+          <a:bodyPr wrap="square">
+            <a:spAutoFit/>
+          </a:bodyPr>
+          <a:lstStyle/>
+          <a:p>
+            <a:pPr algn="l"/>
+            <a:r>
+              <a:rPr sz="1300" b="0" i="0">
+                <a:solidFill>
+                  <a:srgbClr val="9AA3AB"/>
+                </a:solidFill>
+              </a:rPr>
+              <a:t>107 ms</a:t>
+            </a:r>
+          </a:p>
+        </p:txBody>
+      </p:sp>
+      <p:sp>
+        <p:nvSpPr>
+          <p:cNvPr id="298" name="TextBox 297"/>
+          <p:cNvSpPr txBox="1"/>
+          <p:nvPr/>
+        </p:nvSpPr>
+        <p:spPr>
+          <a:xfrm>
+            <a:off x="274320" y="2057400"/>
+            <a:ext cx="1645920" cy="411480"/>
+          </a:xfrm>
+          <a:prstGeom prst="rect">
+            <a:avLst/>
+          </a:prstGeom>
+          <a:noFill/>
+        </p:spPr>
+        <p:txBody>
+          <a:bodyPr wrap="square">
+            <a:spAutoFit/>
+          </a:bodyPr>
+          <a:lstStyle/>
+          <a:p>
+            <a:pPr algn="r"/>
+            <a:r>
+              <a:rPr sz="1300" b="1" i="0">
+                <a:solidFill>
+                  <a:srgbClr val="DEE2E6"/>
+                </a:solidFill>
+              </a:rPr>
+              <a:t>Objects + grid</a:t>
+            </a:r>
+          </a:p>
+        </p:txBody>
+      </p:sp>
+      <p:sp>
+        <p:nvSpPr>
+          <p:cNvPr id="299" name="Rectangle 298"/>
+          <p:cNvSpPr/>
+          <p:nvPr/>
+        </p:nvSpPr>
+        <p:spPr>
+          <a:xfrm>
+            <a:off x="2011680" y="2057400"/>
+            <a:ext cx="220531" cy="411480"/>
+          </a:xfrm>
+          <a:prstGeom prst="rect">
+            <a:avLst/>
+          </a:prstGeom>
+          <a:solidFill>
+            <a:srgbClr val="2E3338"/>
+          </a:solidFill>
+          <a:ln>
+            <a:noFill/>
+          </a:ln>
+          <a:effectLst/>
+        </p:spPr>
+        <p:style>
+          <a:lnRef idx="1">
+            <a:schemeClr val="accent1"/>
+          </a:lnRef>
+          <a:fillRef idx="3">
+            <a:schemeClr val="accent1"/>
+          </a:fillRef>
+          <a:effectRef idx="2">
+            <a:schemeClr val="accent1"/>
+          </a:effectRef>
+          <a:fontRef idx="minor">
+            <a:schemeClr val="lt1"/>
+          </a:fontRef>
+        </p:style>
+        <p:txBody>
+          <a:bodyPr rtlCol="0" anchor="ctr" wrap="square" lIns="73152" rIns="73152"/>
+          <a:lstStyle/>
+          <a:p>
+            <a:pPr algn="ctr"/>
+            <a:r>
+              <a:rPr sz="1400" b="0">
+                <a:solidFill>
+                  <a:srgbClr val="DEE2E6"/>
+                </a:solidFill>
+              </a:rPr>
+              <a:t/>
+            </a:r>
+          </a:p>
+        </p:txBody>
+      </p:sp>
+      <p:sp>
+        <p:nvSpPr>
+          <p:cNvPr id="300" name="TextBox 299"/>
+          <p:cNvSpPr txBox="1"/>
+          <p:nvPr/>
+        </p:nvSpPr>
+        <p:spPr>
+          <a:xfrm>
+            <a:off x="2305363" y="2057400"/>
+            <a:ext cx="1280160" cy="411480"/>
+          </a:xfrm>
+          <a:prstGeom prst="rect">
+            <a:avLst/>
+          </a:prstGeom>
+          <a:noFill/>
+        </p:spPr>
+        <p:txBody>
+          <a:bodyPr wrap="square">
+            <a:spAutoFit/>
+          </a:bodyPr>
+          <a:lstStyle/>
+          <a:p>
+            <a:pPr algn="l"/>
+            <a:r>
+              <a:rPr sz="1300" b="0" i="0">
+                <a:solidFill>
+                  <a:srgbClr val="9AA3AB"/>
+                </a:solidFill>
+              </a:rPr>
+              <a:t>4.1 ms</a:t>
+            </a:r>
+          </a:p>
+        </p:txBody>
+      </p:sp>
+      <p:sp>
+        <p:nvSpPr>
+          <p:cNvPr id="301" name="TextBox 300"/>
+          <p:cNvSpPr txBox="1"/>
+          <p:nvPr/>
+        </p:nvSpPr>
+        <p:spPr>
+          <a:xfrm>
+            <a:off x="274320" y="2651760"/>
+            <a:ext cx="1645920" cy="411480"/>
+          </a:xfrm>
+          <a:prstGeom prst="rect">
+            <a:avLst/>
+          </a:prstGeom>
+          <a:noFill/>
+        </p:spPr>
+        <p:txBody>
+          <a:bodyPr wrap="square">
+            <a:spAutoFit/>
+          </a:bodyPr>
+          <a:lstStyle/>
+          <a:p>
+            <a:pPr algn="r"/>
+            <a:r>
+              <a:rPr sz="1300" b="1" i="0">
+                <a:solidFill>
+                  <a:srgbClr val="DEE2E6"/>
+                </a:solidFill>
+              </a:rPr>
+              <a:t>Arrays + flat grid</a:t>
+            </a:r>
+          </a:p>
+        </p:txBody>
+      </p:sp>
+      <p:sp>
+        <p:nvSpPr>
+          <p:cNvPr id="302" name="Rectangle 301"/>
+          <p:cNvSpPr/>
+          <p:nvPr/>
+        </p:nvSpPr>
+        <p:spPr>
+          <a:xfrm>
+            <a:off x="2011680" y="2651760"/>
+            <a:ext cx="69924" cy="411480"/>
+          </a:xfrm>
+          <a:prstGeom prst="rect">
+            <a:avLst/>
+          </a:prstGeom>
+          <a:solidFill>
+            <a:srgbClr val="D45D35"/>
+          </a:solidFill>
+          <a:ln>
+            <a:noFill/>
+          </a:ln>
+          <a:effectLst/>
+        </p:spPr>
+        <p:style>
+          <a:lnRef idx="1">
+            <a:schemeClr val="accent1"/>
+          </a:lnRef>
+          <a:fillRef idx="3">
+            <a:schemeClr val="accent1"/>
+          </a:fillRef>
+          <a:effectRef idx="2">
+            <a:schemeClr val="accent1"/>
+          </a:effectRef>
+          <a:fontRef idx="minor">
+            <a:schemeClr val="lt1"/>
+          </a:fontRef>
+        </p:style>
+        <p:txBody>
+          <a:bodyPr rtlCol="0" anchor="ctr" wrap="square" lIns="73152" rIns="73152"/>
+          <a:lstStyle/>
+          <a:p>
+            <a:pPr algn="ctr"/>
+            <a:r>
+              <a:rPr sz="1400" b="0">
+                <a:solidFill>
+                  <a:srgbClr val="DEE2E6"/>
+                </a:solidFill>
+              </a:rPr>
+              <a:t/>
+            </a:r>
+          </a:p>
+        </p:txBody>
+      </p:sp>
+      <p:sp>
+        <p:nvSpPr>
+          <p:cNvPr id="303" name="TextBox 302"/>
+          <p:cNvSpPr txBox="1"/>
+          <p:nvPr/>
+        </p:nvSpPr>
+        <p:spPr>
+          <a:xfrm>
+            <a:off x="2154756" y="2651760"/>
+            <a:ext cx="1280160" cy="411480"/>
+          </a:xfrm>
+          <a:prstGeom prst="rect">
+            <a:avLst/>
+          </a:prstGeom>
+          <a:noFill/>
+        </p:spPr>
+        <p:txBody>
+          <a:bodyPr wrap="square">
+            <a:spAutoFit/>
+          </a:bodyPr>
+          <a:lstStyle/>
+          <a:p>
+            <a:pPr algn="l"/>
+            <a:r>
+              <a:rPr sz="1300" b="0" i="0">
+                <a:solidFill>
+                  <a:srgbClr val="9AA3AB"/>
+                </a:solidFill>
+              </a:rPr>
+              <a:t>1.3 ms</a:t>
+            </a:r>
+          </a:p>
+        </p:txBody>
+      </p:sp>
+      <p:cxnSp>
+        <p:nvCxnSpPr>
+          <p:cNvPr id="304" name="Connector 303"/>
+          <p:cNvCxnSpPr/>
+          <p:nvPr/>
+        </p:nvCxnSpPr>
+        <p:spPr>
+          <a:xfrm>
+            <a:off x="2909943" y="1325880"/>
+            <a:ext cx="0" cy="1920240"/>
+          </a:xfrm>
+          <a:prstGeom prst="line">
+            <a:avLst/>
+          </a:prstGeom>
+          <a:ln>
+            <a:solidFill>
+              <a:srgbClr val="9AA3AB"/>
+            </a:solidFill>
+            <a:prstDash val="dash"/>
+          </a:ln>
+        </p:spPr>
+        <p:style>
+          <a:lnRef idx="2">
+            <a:schemeClr val="accent1"/>
+          </a:lnRef>
+          <a:fillRef idx="0">
+            <a:schemeClr val="accent1"/>
+          </a:fillRef>
+          <a:effectRef idx="1">
+            <a:schemeClr val="accent1"/>
+          </a:effectRef>
+          <a:fontRef idx="minor">
+            <a:schemeClr val="tx1"/>
+          </a:fontRef>
+        </p:style>
+      </p:cxnSp>
+      <p:sp>
+        <p:nvSpPr>
+          <p:cNvPr id="305" name="TextBox 304"/>
+          <p:cNvSpPr txBox="1"/>
+          <p:nvPr/>
+        </p:nvSpPr>
+        <p:spPr>
+          <a:xfrm>
+            <a:off x="2178423" y="3246120"/>
+            <a:ext cx="1463040" cy="274320"/>
+          </a:xfrm>
+          <a:prstGeom prst="rect">
+            <a:avLst/>
+          </a:prstGeom>
+          <a:noFill/>
+        </p:spPr>
+        <p:txBody>
+          <a:bodyPr wrap="square">
+            <a:spAutoFit/>
+          </a:bodyPr>
+          <a:lstStyle/>
+          <a:p>
+            <a:pPr algn="ctr"/>
+            <a:r>
+              <a:rPr sz="1100" b="0" i="0">
+                <a:solidFill>
+                  <a:srgbClr val="9AA3AB"/>
+                </a:solidFill>
+              </a:rPr>
+              <a:t>one frame: 16.7 ms</a:t>
+            </a:r>
+          </a:p>
+        </p:txBody>
+      </p:sp>
+      <p:sp>
+        <p:nvSpPr>
+          <p:cNvPr id="306" name="TextBox 305"/>
+          <p:cNvSpPr txBox="1"/>
+          <p:nvPr/>
+        </p:nvSpPr>
+        <p:spPr>
+          <a:xfrm>
+            <a:off x="274320" y="3429000"/>
+            <a:ext cx="8595360" cy="365760"/>
+          </a:xfrm>
+          <a:prstGeom prst="rect">
+            <a:avLst/>
+          </a:prstGeom>
+          <a:noFill/>
+        </p:spPr>
+        <p:txBody>
+          <a:bodyPr wrap="square">
+            <a:spAutoFit/>
+          </a:bodyPr>
+          <a:lstStyle/>
+          <a:p>
+            <a:pPr algn="ctr"/>
+            <a:r>
+              <a:rPr sz="1300" b="0" i="0">
+                <a:solidFill>
+                  <a:srgbClr val="9AA3AB"/>
+                </a:solidFill>
+              </a:rPr>
+              <a:t>10,000 enemies, move and separate, per step. At 20,000: 14.5 ms with the grid, 4.9 ms flat.</a:t>
+            </a:r>
           </a:p>
         </p:txBody>
       </p:sp>
@@ -8965,7 +12183,7 @@
         <p:spPr>
           <a:xfrm>
             <a:off x="311700" y="885950"/>
-            <a:ext cx="8520600" cy="4023300"/>
+            <a:ext cx="8520600" cy="521208"/>
           </a:xfrm>
           <a:prstGeom prst="rect">
             <a:avLst/>
@@ -8989,94 +12207,262 @@
             </a:pPr>
             <a:r>
               <a:rPr lang="en"/>
-              <a:t>An enemy is an index, and indexes change</a:t>
+              <a:t>Data-oriented code is faster, and harder. Use it only where there are thousands.</a:t>
             </a:r>
             <a:endParaRPr/>
           </a:p>
-          <a:p>
-            <a:pPr indent="-317500" lvl="1" marL="914400" rtl="0" algn="l">
-              <a:spcBef>
-                <a:spcPts val="0"/>
-              </a:spcBef>
-              <a:spcAft>
-                <a:spcPts val="0"/>
-              </a:spcAft>
-              <a:buSzPts val="1400"/>
-              <a:buChar char="○"/>
-            </a:pPr>
-            <a:r>
-              <a:rPr lang="en"/>
-              <a:t>Don’t hold on to one across frames</a:t>
-            </a:r>
-            <a:endParaRPr/>
-          </a:p>
-          <a:p>
-            <a:pPr indent="-330200" lvl="0" marL="457200" rtl="0" algn="l">
-              <a:spcBef>
-                <a:spcPts val="0"/>
-              </a:spcBef>
-              <a:spcAft>
-                <a:spcPts val="0"/>
-              </a:spcAft>
-              <a:buSzPts val="1600"/>
-              <a:buChar char="●"/>
-            </a:pPr>
-            <a:r>
-              <a:rPr lang="en"/>
-              <a:t>Harder to read, harder to change</a:t>
-            </a:r>
-            <a:endParaRPr/>
-          </a:p>
-          <a:p>
-            <a:pPr indent="-330200" lvl="0" marL="457200" rtl="0" algn="l">
-              <a:spcBef>
-                <a:spcPts val="0"/>
-              </a:spcBef>
-              <a:spcAft>
-                <a:spcPts val="0"/>
-              </a:spcAft>
-              <a:buSzPts val="1600"/>
-              <a:buChar char="●"/>
-            </a:pPr>
-            <a:r>
-              <a:rPr lang="en"/>
-              <a:t>So only for what there are thousands of</a:t>
-            </a:r>
-            <a:endParaRPr/>
-          </a:p>
-          <a:p>
-            <a:pPr indent="-317500" lvl="1" marL="914400" rtl="0" algn="l">
-              <a:spcBef>
-                <a:spcPts val="0"/>
-              </a:spcBef>
-              <a:spcAft>
-                <a:spcPts val="0"/>
-              </a:spcAft>
-              <a:buSzPts val="1400"/>
-              <a:buChar char="○"/>
-            </a:pPr>
-            <a:r>
-              <a:rPr lang="en"/>
-              <a:t>The swarm and the gems; not the player or the bolts</a:t>
-            </a:r>
-            <a:endParaRPr/>
-          </a:p>
-          <a:p>
-            <a:pPr indent="-330200" lvl="0" marL="457200" rtl="0" algn="l">
-              <a:spcBef>
-                <a:spcPts val="0"/>
-              </a:spcBef>
-              <a:spcAft>
-                <a:spcPts val="0"/>
-              </a:spcAft>
-              <a:buSzPts val="1600"/>
-              <a:buChar char="●"/>
-            </a:pPr>
-            <a:r>
-              <a:rPr lang="en"/>
-              <a:t>Geometry Wars: components for hundreds; its particles as data</a:t>
-            </a:r>
-            <a:endParaRPr/>
+        </p:txBody>
+      </p:sp>
+      <p:sp>
+        <p:nvSpPr>
+          <p:cNvPr id="295" name="Rounded Rectangle 294"/>
+          <p:cNvSpPr/>
+          <p:nvPr/>
+        </p:nvSpPr>
+        <p:spPr>
+          <a:xfrm>
+            <a:off x="411480" y="1463040"/>
+            <a:ext cx="2651760" cy="1188720"/>
+          </a:xfrm>
+          <a:prstGeom prst="roundRect">
+            <a:avLst>
+              <a:gd name="adj" fmla="val 12000"/>
+            </a:avLst>
+          </a:prstGeom>
+          <a:solidFill>
+            <a:srgbClr val="2E3338"/>
+          </a:solidFill>
+          <a:ln>
+            <a:noFill/>
+          </a:ln>
+          <a:effectLst/>
+        </p:spPr>
+        <p:style>
+          <a:lnRef idx="1">
+            <a:schemeClr val="accent1"/>
+          </a:lnRef>
+          <a:fillRef idx="3">
+            <a:schemeClr val="accent1"/>
+          </a:fillRef>
+          <a:effectRef idx="2">
+            <a:schemeClr val="accent1"/>
+          </a:effectRef>
+          <a:fontRef idx="minor">
+            <a:schemeClr val="lt1"/>
+          </a:fontRef>
+        </p:style>
+        <p:txBody>
+          <a:bodyPr rtlCol="0" anchor="ctr" wrap="square" lIns="73152" rIns="73152"/>
+          <a:lstStyle/>
+          <a:p>
+            <a:pPr algn="ctr"/>
+            <a:r>
+              <a:rPr sz="1500" b="1">
+                <a:solidFill>
+                  <a:srgbClr val="DEE2E6"/>
+                </a:solidFill>
+              </a:rPr>
+              <a:t>An enemy is an index</a:t>
+            </a:r>
+          </a:p>
+          <a:p>
+            <a:pPr algn="ctr"/>
+            <a:r>
+              <a:rPr sz="1300" b="0">
+                <a:solidFill>
+                  <a:srgbClr val="9AA3AB"/>
+                </a:solidFill>
+              </a:rPr>
+              <a:t>and indexes change:</a:t>
+            </a:r>
+          </a:p>
+          <a:p>
+            <a:pPr algn="ctr"/>
+            <a:r>
+              <a:rPr sz="1300" b="0">
+                <a:solidFill>
+                  <a:srgbClr val="9AA3AB"/>
+                </a:solidFill>
+              </a:rPr>
+              <a:t>don’t keep one across frames</a:t>
+            </a:r>
+          </a:p>
+        </p:txBody>
+      </p:sp>
+      <p:sp>
+        <p:nvSpPr>
+          <p:cNvPr id="296" name="Rounded Rectangle 295"/>
+          <p:cNvSpPr/>
+          <p:nvPr/>
+        </p:nvSpPr>
+        <p:spPr>
+          <a:xfrm>
+            <a:off x="3246120" y="1463040"/>
+            <a:ext cx="2651760" cy="1188720"/>
+          </a:xfrm>
+          <a:prstGeom prst="roundRect">
+            <a:avLst>
+              <a:gd name="adj" fmla="val 12000"/>
+            </a:avLst>
+          </a:prstGeom>
+          <a:solidFill>
+            <a:srgbClr val="2E3338"/>
+          </a:solidFill>
+          <a:ln>
+            <a:noFill/>
+          </a:ln>
+          <a:effectLst/>
+        </p:spPr>
+        <p:style>
+          <a:lnRef idx="1">
+            <a:schemeClr val="accent1"/>
+          </a:lnRef>
+          <a:fillRef idx="3">
+            <a:schemeClr val="accent1"/>
+          </a:fillRef>
+          <a:effectRef idx="2">
+            <a:schemeClr val="accent1"/>
+          </a:effectRef>
+          <a:fontRef idx="minor">
+            <a:schemeClr val="lt1"/>
+          </a:fontRef>
+        </p:style>
+        <p:txBody>
+          <a:bodyPr rtlCol="0" anchor="ctr" wrap="square" lIns="73152" rIns="73152"/>
+          <a:lstStyle/>
+          <a:p>
+            <a:pPr algn="ctr"/>
+            <a:r>
+              <a:rPr sz="1500" b="1">
+                <a:solidFill>
+                  <a:srgbClr val="DEE2E6"/>
+                </a:solidFill>
+              </a:rPr>
+              <a:t>Harder to read</a:t>
+            </a:r>
+          </a:p>
+          <a:p>
+            <a:pPr algn="ctr"/>
+            <a:r>
+              <a:rPr sz="1300" b="0">
+                <a:solidFill>
+                  <a:srgbClr val="9AA3AB"/>
+                </a:solidFill>
+              </a:rPr>
+              <a:t>and harder to change</a:t>
+            </a:r>
+          </a:p>
+        </p:txBody>
+      </p:sp>
+      <p:sp>
+        <p:nvSpPr>
+          <p:cNvPr id="297" name="Rounded Rectangle 296"/>
+          <p:cNvSpPr/>
+          <p:nvPr/>
+        </p:nvSpPr>
+        <p:spPr>
+          <a:xfrm>
+            <a:off x="6080760" y="1463040"/>
+            <a:ext cx="2651760" cy="1188720"/>
+          </a:xfrm>
+          <a:prstGeom prst="roundRect">
+            <a:avLst>
+              <a:gd name="adj" fmla="val 12000"/>
+            </a:avLst>
+          </a:prstGeom>
+          <a:solidFill>
+            <a:srgbClr val="2E3338"/>
+          </a:solidFill>
+          <a:ln w="25400">
+            <a:solidFill>
+              <a:srgbClr val="D45D35"/>
+            </a:solidFill>
+          </a:ln>
+          <a:effectLst/>
+        </p:spPr>
+        <p:style>
+          <a:lnRef idx="1">
+            <a:schemeClr val="accent1"/>
+          </a:lnRef>
+          <a:fillRef idx="3">
+            <a:schemeClr val="accent1"/>
+          </a:fillRef>
+          <a:effectRef idx="2">
+            <a:schemeClr val="accent1"/>
+          </a:effectRef>
+          <a:fontRef idx="minor">
+            <a:schemeClr val="lt1"/>
+          </a:fontRef>
+        </p:style>
+        <p:txBody>
+          <a:bodyPr rtlCol="0" anchor="ctr" wrap="square" lIns="73152" rIns="73152"/>
+          <a:lstStyle/>
+          <a:p>
+            <a:pPr algn="ctr"/>
+            <a:r>
+              <a:rPr sz="1500" b="1">
+                <a:solidFill>
+                  <a:srgbClr val="DEE2E6"/>
+                </a:solidFill>
+              </a:rPr>
+              <a:t>Only for the swarm and the gems</a:t>
+            </a:r>
+          </a:p>
+          <a:p>
+            <a:pPr algn="ctr"/>
+            <a:r>
+              <a:rPr sz="1300" b="0">
+                <a:solidFill>
+                  <a:srgbClr val="9AA3AB"/>
+                </a:solidFill>
+              </a:rPr>
+              <a:t>not the player,</a:t>
+            </a:r>
+          </a:p>
+          <a:p>
+            <a:pPr algn="ctr"/>
+            <a:r>
+              <a:rPr sz="1300" b="0">
+                <a:solidFill>
+                  <a:srgbClr val="9AA3AB"/>
+                </a:solidFill>
+              </a:rPr>
+              <a:t>not the bolts</a:t>
+            </a:r>
+          </a:p>
+        </p:txBody>
+      </p:sp>
+      <p:sp>
+        <p:nvSpPr>
+          <p:cNvPr id="298" name="TextBox 297"/>
+          <p:cNvSpPr txBox="1"/>
+          <p:nvPr/>
+        </p:nvSpPr>
+        <p:spPr>
+          <a:xfrm>
+            <a:off x="411480" y="2926080"/>
+            <a:ext cx="8321040" cy="365760"/>
+          </a:xfrm>
+          <a:prstGeom prst="rect">
+            <a:avLst/>
+          </a:prstGeom>
+          <a:noFill/>
+        </p:spPr>
+        <p:txBody>
+          <a:bodyPr wrap="square">
+            <a:spAutoFit/>
+          </a:bodyPr>
+          <a:lstStyle/>
+          <a:p>
+            <a:pPr algn="ctr"/>
+            <a:r>
+              <a:rPr sz="1400" b="0" i="0">
+                <a:solidFill>
+                  <a:srgbClr val="9AA3AB"/>
+                </a:solidFill>
+              </a:rPr>
+              <a:t>Geometry Wars: components for its hundreds of entities, plain data for its particles.</a:t>
+            </a:r>
           </a:p>
         </p:txBody>
       </p:sp>
@@ -9373,7 +12759,7 @@
         <p:spPr>
           <a:xfrm>
             <a:off x="311700" y="885950"/>
-            <a:ext cx="8520600" cy="4023300"/>
+            <a:ext cx="8520600" cy="521208"/>
           </a:xfrm>
           <a:prstGeom prst="rect">
             <a:avLst/>
@@ -9397,77 +12783,336 @@
             </a:pPr>
             <a:r>
               <a:rPr lang="en"/>
-              <a:t>Gems: thousands, so arrays too</a:t>
+              <a:t>The whole game is patterns you already know.</a:t>
             </a:r>
             <a:endParaRPr/>
           </a:p>
-          <a:p>
-            <a:pPr indent="-330200" lvl="0" marL="457200" rtl="0" algn="l">
-              <a:spcBef>
-                <a:spcPts val="0"/>
-              </a:spcBef>
-              <a:spcAft>
-                <a:spcPts val="0"/>
-              </a:spcAft>
-              <a:buSzPts val="1600"/>
-              <a:buChar char="●"/>
-            </a:pPr>
-            <a:r>
-              <a:rPr lang="en"/>
-              <a:t>Level up: a state pushed on the state stack (Pokemon)</a:t>
-            </a:r>
-            <a:endParaRPr/>
-          </a:p>
-          <a:p>
-            <a:pPr indent="-330200" lvl="0" marL="457200" rtl="0" algn="l">
-              <a:spcBef>
-                <a:spcPts val="0"/>
-              </a:spcBef>
-              <a:spcAft>
-                <a:spcPts val="0"/>
-              </a:spcAft>
-              <a:buSzPts val="1600"/>
-              <a:buChar char="●"/>
-            </a:pPr>
-            <a:r>
-              <a:rPr lang="en"/>
-              <a:t>Enemy kinds: type objects (Plants vs. Zombies)</a:t>
-            </a:r>
-            <a:endParaRPr/>
-          </a:p>
-          <a:p>
-            <a:pPr indent="-330200" lvl="0" marL="457200" rtl="0" algn="l">
-              <a:spcBef>
-                <a:spcPts val="0"/>
-              </a:spcBef>
-              <a:spcAft>
-                <a:spcPts val="0"/>
-              </a:spcAft>
-              <a:buSzPts val="1600"/>
-              <a:buChar char="●"/>
-            </a:pPr>
-            <a:r>
-              <a:rPr lang="en"/>
-              <a:t>A fixed timestep (GMDCore’s Core)</a:t>
-            </a:r>
-            <a:endParaRPr/>
-          </a:p>
-          <a:p>
-            <a:pPr indent="-330200" lvl="0" marL="457200" rtl="0" algn="l">
-              <a:spcBef>
-                <a:spcPts val="0"/>
-              </a:spcBef>
-              <a:spcAft>
-                <a:spcPts val="0"/>
-              </a:spcAft>
-              <a:buSzPts val="1600"/>
-              <a:buChar char="●"/>
-            </a:pPr>
-            <a:r>
-              <a:rPr lang="en"/>
-              <a:t>Survive five minutes</a:t>
-            </a:r>
-            <a:endParaRPr/>
+        </p:txBody>
+      </p:sp>
+      <p:sp>
+        <p:nvSpPr>
+          <p:cNvPr id="295" name="Rounded Rectangle 294"/>
+          <p:cNvSpPr/>
+          <p:nvPr/>
+        </p:nvSpPr>
+        <p:spPr>
+          <a:xfrm>
+            <a:off x="411480" y="1463040"/>
+            <a:ext cx="1965960" cy="1097280"/>
+          </a:xfrm>
+          <a:prstGeom prst="roundRect">
+            <a:avLst>
+              <a:gd name="adj" fmla="val 12000"/>
+            </a:avLst>
+          </a:prstGeom>
+          <a:solidFill>
+            <a:srgbClr val="2E3338"/>
+          </a:solidFill>
+          <a:ln>
+            <a:noFill/>
+          </a:ln>
+          <a:effectLst/>
+        </p:spPr>
+        <p:style>
+          <a:lnRef idx="1">
+            <a:schemeClr val="accent1"/>
+          </a:lnRef>
+          <a:fillRef idx="3">
+            <a:schemeClr val="accent1"/>
+          </a:fillRef>
+          <a:effectRef idx="2">
+            <a:schemeClr val="accent1"/>
+          </a:effectRef>
+          <a:fontRef idx="minor">
+            <a:schemeClr val="lt1"/>
+          </a:fontRef>
+        </p:style>
+        <p:txBody>
+          <a:bodyPr rtlCol="0" anchor="ctr" wrap="square" lIns="73152" rIns="73152"/>
+          <a:lstStyle/>
+          <a:p>
+            <a:pPr algn="ctr"/>
+            <a:r>
+              <a:rPr sz="1500" b="1">
+                <a:solidFill>
+                  <a:srgbClr val="DEE2E6"/>
+                </a:solidFill>
+              </a:rPr>
+              <a:t>Gems</a:t>
+            </a:r>
+          </a:p>
+          <a:p>
+            <a:pPr algn="ctr"/>
+            <a:r>
+              <a:rPr sz="1300" b="0">
+                <a:solidFill>
+                  <a:srgbClr val="9AA3AB"/>
+                </a:solidFill>
+              </a:rPr>
+              <a:t>thousands: arrays too</a:t>
+            </a:r>
+          </a:p>
+        </p:txBody>
+      </p:sp>
+      <p:sp>
+        <p:nvSpPr>
+          <p:cNvPr id="296" name="Rounded Rectangle 295"/>
+          <p:cNvSpPr/>
+          <p:nvPr/>
+        </p:nvSpPr>
+        <p:spPr>
+          <a:xfrm>
+            <a:off x="2514600" y="1463040"/>
+            <a:ext cx="1965960" cy="1097280"/>
+          </a:xfrm>
+          <a:prstGeom prst="roundRect">
+            <a:avLst>
+              <a:gd name="adj" fmla="val 12000"/>
+            </a:avLst>
+          </a:prstGeom>
+          <a:solidFill>
+            <a:srgbClr val="2E3338"/>
+          </a:solidFill>
+          <a:ln>
+            <a:noFill/>
+          </a:ln>
+          <a:effectLst/>
+        </p:spPr>
+        <p:style>
+          <a:lnRef idx="1">
+            <a:schemeClr val="accent1"/>
+          </a:lnRef>
+          <a:fillRef idx="3">
+            <a:schemeClr val="accent1"/>
+          </a:fillRef>
+          <a:effectRef idx="2">
+            <a:schemeClr val="accent1"/>
+          </a:effectRef>
+          <a:fontRef idx="minor">
+            <a:schemeClr val="lt1"/>
+          </a:fontRef>
+        </p:style>
+        <p:txBody>
+          <a:bodyPr rtlCol="0" anchor="ctr" wrap="square" lIns="73152" rIns="73152"/>
+          <a:lstStyle/>
+          <a:p>
+            <a:pPr algn="ctr"/>
+            <a:r>
+              <a:rPr sz="1500" b="1">
+                <a:solidFill>
+                  <a:srgbClr val="DEE2E6"/>
+                </a:solidFill>
+              </a:rPr>
+              <a:t>Level up</a:t>
+            </a:r>
+          </a:p>
+          <a:p>
+            <a:pPr algn="ctr"/>
+            <a:r>
+              <a:rPr sz="1300" b="0">
+                <a:solidFill>
+                  <a:srgbClr val="9AA3AB"/>
+                </a:solidFill>
+              </a:rPr>
+              <a:t>a state pushed on the stack</a:t>
+            </a:r>
+          </a:p>
+          <a:p>
+            <a:pPr algn="ctr"/>
+            <a:r>
+              <a:rPr sz="1300" b="0">
+                <a:solidFill>
+                  <a:srgbClr val="9AA3AB"/>
+                </a:solidFill>
+              </a:rPr>
+              <a:t>(Pokemon)</a:t>
+            </a:r>
+          </a:p>
+        </p:txBody>
+      </p:sp>
+      <p:sp>
+        <p:nvSpPr>
+          <p:cNvPr id="297" name="Rounded Rectangle 296"/>
+          <p:cNvSpPr/>
+          <p:nvPr/>
+        </p:nvSpPr>
+        <p:spPr>
+          <a:xfrm>
+            <a:off x="4617720" y="1463040"/>
+            <a:ext cx="1965960" cy="1097280"/>
+          </a:xfrm>
+          <a:prstGeom prst="roundRect">
+            <a:avLst>
+              <a:gd name="adj" fmla="val 12000"/>
+            </a:avLst>
+          </a:prstGeom>
+          <a:solidFill>
+            <a:srgbClr val="2E3338"/>
+          </a:solidFill>
+          <a:ln>
+            <a:noFill/>
+          </a:ln>
+          <a:effectLst/>
+        </p:spPr>
+        <p:style>
+          <a:lnRef idx="1">
+            <a:schemeClr val="accent1"/>
+          </a:lnRef>
+          <a:fillRef idx="3">
+            <a:schemeClr val="accent1"/>
+          </a:fillRef>
+          <a:effectRef idx="2">
+            <a:schemeClr val="accent1"/>
+          </a:effectRef>
+          <a:fontRef idx="minor">
+            <a:schemeClr val="lt1"/>
+          </a:fontRef>
+        </p:style>
+        <p:txBody>
+          <a:bodyPr rtlCol="0" anchor="ctr" wrap="square" lIns="73152" rIns="73152"/>
+          <a:lstStyle/>
+          <a:p>
+            <a:pPr algn="ctr"/>
+            <a:r>
+              <a:rPr sz="1500" b="1">
+                <a:solidFill>
+                  <a:srgbClr val="DEE2E6"/>
+                </a:solidFill>
+              </a:rPr>
+              <a:t>Enemy kinds</a:t>
+            </a:r>
+          </a:p>
+          <a:p>
+            <a:pPr algn="ctr"/>
+            <a:r>
+              <a:rPr sz="1300" b="0">
+                <a:solidFill>
+                  <a:srgbClr val="9AA3AB"/>
+                </a:solidFill>
+              </a:rPr>
+              <a:t>type objects</a:t>
+            </a:r>
+          </a:p>
+          <a:p>
+            <a:pPr algn="ctr"/>
+            <a:r>
+              <a:rPr sz="1300" b="0">
+                <a:solidFill>
+                  <a:srgbClr val="9AA3AB"/>
+                </a:solidFill>
+              </a:rPr>
+              <a:t>(Plants vs. Zombies)</a:t>
+            </a:r>
+          </a:p>
+        </p:txBody>
+      </p:sp>
+      <p:sp>
+        <p:nvSpPr>
+          <p:cNvPr id="298" name="Rounded Rectangle 297"/>
+          <p:cNvSpPr/>
+          <p:nvPr/>
+        </p:nvSpPr>
+        <p:spPr>
+          <a:xfrm>
+            <a:off x="6720840" y="1463040"/>
+            <a:ext cx="1965960" cy="1097280"/>
+          </a:xfrm>
+          <a:prstGeom prst="roundRect">
+            <a:avLst>
+              <a:gd name="adj" fmla="val 12000"/>
+            </a:avLst>
+          </a:prstGeom>
+          <a:solidFill>
+            <a:srgbClr val="2E3338"/>
+          </a:solidFill>
+          <a:ln>
+            <a:noFill/>
+          </a:ln>
+          <a:effectLst/>
+        </p:spPr>
+        <p:style>
+          <a:lnRef idx="1">
+            <a:schemeClr val="accent1"/>
+          </a:lnRef>
+          <a:fillRef idx="3">
+            <a:schemeClr val="accent1"/>
+          </a:fillRef>
+          <a:effectRef idx="2">
+            <a:schemeClr val="accent1"/>
+          </a:effectRef>
+          <a:fontRef idx="minor">
+            <a:schemeClr val="lt1"/>
+          </a:fontRef>
+        </p:style>
+        <p:txBody>
+          <a:bodyPr rtlCol="0" anchor="ctr" wrap="square" lIns="73152" rIns="73152"/>
+          <a:lstStyle/>
+          <a:p>
+            <a:pPr algn="ctr"/>
+            <a:r>
+              <a:rPr sz="1500" b="1">
+                <a:solidFill>
+                  <a:srgbClr val="DEE2E6"/>
+                </a:solidFill>
+              </a:rPr>
+              <a:t>The step</a:t>
+            </a:r>
+          </a:p>
+          <a:p>
+            <a:pPr algn="ctr"/>
+            <a:r>
+              <a:rPr sz="1300" b="0">
+                <a:solidFill>
+                  <a:srgbClr val="9AA3AB"/>
+                </a:solidFill>
+              </a:rPr>
+              <a:t>a fixed timestep</a:t>
+            </a:r>
+          </a:p>
+          <a:p>
+            <a:pPr algn="ctr"/>
+            <a:r>
+              <a:rPr sz="1300" b="0">
+                <a:solidFill>
+                  <a:srgbClr val="9AA3AB"/>
+                </a:solidFill>
+              </a:rPr>
+              <a:t>(Pong, Snake)</a:t>
+            </a:r>
+          </a:p>
+        </p:txBody>
+      </p:sp>
+      <p:sp>
+        <p:nvSpPr>
+          <p:cNvPr id="299" name="TextBox 298"/>
+          <p:cNvSpPr txBox="1"/>
+          <p:nvPr/>
+        </p:nvSpPr>
+        <p:spPr>
+          <a:xfrm>
+            <a:off x="457200" y="2834640"/>
+            <a:ext cx="8229600" cy="731520"/>
+          </a:xfrm>
+          <a:prstGeom prst="rect">
+            <a:avLst/>
+          </a:prstGeom>
+          <a:noFill/>
+        </p:spPr>
+        <p:txBody>
+          <a:bodyPr wrap="square">
+            <a:spAutoFit/>
+          </a:bodyPr>
+          <a:lstStyle/>
+          <a:p>
+            <a:pPr algn="ctr"/>
+            <a:r>
+              <a:rPr sz="1800" b="1" i="0">
+                <a:solidFill>
+                  <a:srgbClr val="DEE2E6"/>
+                </a:solidFill>
+              </a:rPr>
+              <a:t>Survive five minutes.</a:t>
+            </a:r>
           </a:p>
         </p:txBody>
       </p:sp>
@@ -9548,7 +13193,7 @@
         <p:spPr>
           <a:xfrm>
             <a:off x="311700" y="885950"/>
-            <a:ext cx="8520600" cy="4023300"/>
+            <a:ext cx="8520600" cy="822960"/>
           </a:xfrm>
           <a:prstGeom prst="rect">
             <a:avLst/>
@@ -9572,94 +13217,425 @@
             </a:pPr>
             <a:r>
               <a:rPr lang="en"/>
-              <a:t>“Premature optimization is the root of all evil. Yet we should not pass up our opportunities in that critical 3%.” (Knuth)</a:t>
+              <a:t>“Premature optimization is the root of all evil. Yet we should not pass up our opportunities in that critical 3%.” Knuth</a:t>
             </a:r>
             <a:endParaRPr/>
           </a:p>
-          <a:p>
-            <a:pPr indent="-330200" lvl="0" marL="457200" rtl="0" algn="l">
-              <a:spcBef>
-                <a:spcPts val="0"/>
-              </a:spcBef>
-              <a:spcAft>
-                <a:spcPts val="0"/>
-              </a:spcAft>
-              <a:buSzPts val="1600"/>
-              <a:buChar char="●"/>
-            </a:pPr>
-            <a:r>
-              <a:rPr lang="en"/>
-              <a:t>1. Measure</a:t>
-            </a:r>
-            <a:endParaRPr/>
-          </a:p>
-          <a:p>
-            <a:pPr indent="-330200" lvl="0" marL="457200" rtl="0" algn="l">
-              <a:spcBef>
-                <a:spcPts val="0"/>
-              </a:spcBef>
-              <a:spcAft>
-                <a:spcPts val="0"/>
-              </a:spcAft>
-              <a:buSzPts val="1600"/>
-              <a:buChar char="●"/>
-            </a:pPr>
-            <a:r>
-              <a:rPr lang="en"/>
-              <a:t>2. Fix the algorithm</a:t>
-            </a:r>
-            <a:endParaRPr/>
-          </a:p>
-          <a:p>
-            <a:pPr indent="-330200" lvl="0" marL="457200" rtl="0" algn="l">
-              <a:spcBef>
-                <a:spcPts val="0"/>
-              </a:spcBef>
-              <a:spcAft>
-                <a:spcPts val="0"/>
-              </a:spcAft>
-              <a:buSzPts val="1600"/>
-              <a:buChar char="●"/>
-            </a:pPr>
-            <a:r>
-              <a:rPr lang="en"/>
-              <a:t>3. Fix the data, where it’s hot</a:t>
-            </a:r>
-            <a:endParaRPr/>
-          </a:p>
-          <a:p>
-            <a:pPr indent="-330200" lvl="0" marL="457200" rtl="0" algn="l">
-              <a:spcBef>
-                <a:spcPts val="0"/>
-              </a:spcBef>
-              <a:spcAft>
-                <a:spcPts val="0"/>
-              </a:spcAft>
-              <a:buSzPts val="1600"/>
-              <a:buChar char="●"/>
-            </a:pPr>
-            <a:r>
-              <a:rPr lang="en"/>
-              <a:t>4. Measure again</a:t>
-            </a:r>
-            <a:endParaRPr/>
-          </a:p>
-          <a:p>
-            <a:pPr indent="-330200" lvl="0" marL="457200" rtl="0" algn="l">
-              <a:spcBef>
-                <a:spcPts val="0"/>
-              </a:spcBef>
-              <a:spcAft>
-                <a:spcPts val="0"/>
-              </a:spcAft>
-              <a:buSzPts val="1600"/>
-              <a:buChar char="●"/>
-            </a:pPr>
-            <a:r>
-              <a:rPr lang="en"/>
-              <a:t>5. Keep a test against the simple code</a:t>
-            </a:r>
-            <a:endParaRPr/>
+        </p:txBody>
+      </p:sp>
+      <p:sp>
+        <p:nvSpPr>
+          <p:cNvPr id="295" name="Rounded Rectangle 294"/>
+          <p:cNvSpPr/>
+          <p:nvPr/>
+        </p:nvSpPr>
+        <p:spPr>
+          <a:xfrm>
+            <a:off x="411480" y="1920240"/>
+            <a:ext cx="1444751" cy="868680"/>
+          </a:xfrm>
+          <a:prstGeom prst="roundRect">
+            <a:avLst>
+              <a:gd name="adj" fmla="val 12000"/>
+            </a:avLst>
+          </a:prstGeom>
+          <a:solidFill>
+            <a:srgbClr val="2E3338"/>
+          </a:solidFill>
+          <a:ln w="25400">
+            <a:solidFill>
+              <a:srgbClr val="D45D35"/>
+            </a:solidFill>
+          </a:ln>
+          <a:effectLst/>
+        </p:spPr>
+        <p:style>
+          <a:lnRef idx="1">
+            <a:schemeClr val="accent1"/>
+          </a:lnRef>
+          <a:fillRef idx="3">
+            <a:schemeClr val="accent1"/>
+          </a:fillRef>
+          <a:effectRef idx="2">
+            <a:schemeClr val="accent1"/>
+          </a:effectRef>
+          <a:fontRef idx="minor">
+            <a:schemeClr val="lt1"/>
+          </a:fontRef>
+        </p:style>
+        <p:txBody>
+          <a:bodyPr rtlCol="0" anchor="ctr" wrap="square" lIns="73152" rIns="73152"/>
+          <a:lstStyle/>
+          <a:p>
+            <a:pPr algn="ctr"/>
+            <a:r>
+              <a:rPr sz="1300" b="1">
+                <a:solidFill>
+                  <a:srgbClr val="DEE2E6"/>
+                </a:solidFill>
+              </a:rPr>
+              <a:t>Measure</a:t>
+            </a:r>
+          </a:p>
+        </p:txBody>
+      </p:sp>
+      <p:cxnSp>
+        <p:nvCxnSpPr>
+          <p:cNvPr id="296" name="Connector 295"/>
+          <p:cNvCxnSpPr/>
+          <p:nvPr/>
+        </p:nvCxnSpPr>
+        <p:spPr>
+          <a:xfrm>
+            <a:off x="1874519" y="2354580"/>
+            <a:ext cx="237744" cy="0"/>
+          </a:xfrm>
+          <a:prstGeom prst="line">
+            <a:avLst/>
+          </a:prstGeom>
+          <a:ln w="25400">
+            <a:solidFill>
+              <a:srgbClr val="9AA3AB"/>
+            </a:solidFill>
+            <a:tailEnd type="triangle"/>
+          </a:ln>
+        </p:spPr>
+        <p:style>
+          <a:lnRef idx="2">
+            <a:schemeClr val="accent1"/>
+          </a:lnRef>
+          <a:fillRef idx="0">
+            <a:schemeClr val="accent1"/>
+          </a:fillRef>
+          <a:effectRef idx="1">
+            <a:schemeClr val="accent1"/>
+          </a:effectRef>
+          <a:fontRef idx="minor">
+            <a:schemeClr val="tx1"/>
+          </a:fontRef>
+        </p:style>
+      </p:cxnSp>
+      <p:sp>
+        <p:nvSpPr>
+          <p:cNvPr id="297" name="Rounded Rectangle 296"/>
+          <p:cNvSpPr/>
+          <p:nvPr/>
+        </p:nvSpPr>
+        <p:spPr>
+          <a:xfrm>
+            <a:off x="2130552" y="1920240"/>
+            <a:ext cx="1444751" cy="868680"/>
+          </a:xfrm>
+          <a:prstGeom prst="roundRect">
+            <a:avLst>
+              <a:gd name="adj" fmla="val 12000"/>
+            </a:avLst>
+          </a:prstGeom>
+          <a:solidFill>
+            <a:srgbClr val="2E3338"/>
+          </a:solidFill>
+          <a:ln>
+            <a:noFill/>
+          </a:ln>
+          <a:effectLst/>
+        </p:spPr>
+        <p:style>
+          <a:lnRef idx="1">
+            <a:schemeClr val="accent1"/>
+          </a:lnRef>
+          <a:fillRef idx="3">
+            <a:schemeClr val="accent1"/>
+          </a:fillRef>
+          <a:effectRef idx="2">
+            <a:schemeClr val="accent1"/>
+          </a:effectRef>
+          <a:fontRef idx="minor">
+            <a:schemeClr val="lt1"/>
+          </a:fontRef>
+        </p:style>
+        <p:txBody>
+          <a:bodyPr rtlCol="0" anchor="ctr" wrap="square" lIns="73152" rIns="73152"/>
+          <a:lstStyle/>
+          <a:p>
+            <a:pPr algn="ctr"/>
+            <a:r>
+              <a:rPr sz="1300" b="1">
+                <a:solidFill>
+                  <a:srgbClr val="DEE2E6"/>
+                </a:solidFill>
+              </a:rPr>
+              <a:t>Fix the algorithm</a:t>
+            </a:r>
+          </a:p>
+        </p:txBody>
+      </p:sp>
+      <p:cxnSp>
+        <p:nvCxnSpPr>
+          <p:cNvPr id="298" name="Connector 297"/>
+          <p:cNvCxnSpPr/>
+          <p:nvPr/>
+        </p:nvCxnSpPr>
+        <p:spPr>
+          <a:xfrm>
+            <a:off x="3593592" y="2354580"/>
+            <a:ext cx="237744" cy="0"/>
+          </a:xfrm>
+          <a:prstGeom prst="line">
+            <a:avLst/>
+          </a:prstGeom>
+          <a:ln w="25400">
+            <a:solidFill>
+              <a:srgbClr val="9AA3AB"/>
+            </a:solidFill>
+            <a:tailEnd type="triangle"/>
+          </a:ln>
+        </p:spPr>
+        <p:style>
+          <a:lnRef idx="2">
+            <a:schemeClr val="accent1"/>
+          </a:lnRef>
+          <a:fillRef idx="0">
+            <a:schemeClr val="accent1"/>
+          </a:fillRef>
+          <a:effectRef idx="1">
+            <a:schemeClr val="accent1"/>
+          </a:effectRef>
+          <a:fontRef idx="minor">
+            <a:schemeClr val="tx1"/>
+          </a:fontRef>
+        </p:style>
+      </p:cxnSp>
+      <p:sp>
+        <p:nvSpPr>
+          <p:cNvPr id="299" name="Rounded Rectangle 298"/>
+          <p:cNvSpPr/>
+          <p:nvPr/>
+        </p:nvSpPr>
+        <p:spPr>
+          <a:xfrm>
+            <a:off x="3849624" y="1920240"/>
+            <a:ext cx="1444751" cy="868680"/>
+          </a:xfrm>
+          <a:prstGeom prst="roundRect">
+            <a:avLst>
+              <a:gd name="adj" fmla="val 12000"/>
+            </a:avLst>
+          </a:prstGeom>
+          <a:solidFill>
+            <a:srgbClr val="2E3338"/>
+          </a:solidFill>
+          <a:ln>
+            <a:noFill/>
+          </a:ln>
+          <a:effectLst/>
+        </p:spPr>
+        <p:style>
+          <a:lnRef idx="1">
+            <a:schemeClr val="accent1"/>
+          </a:lnRef>
+          <a:fillRef idx="3">
+            <a:schemeClr val="accent1"/>
+          </a:fillRef>
+          <a:effectRef idx="2">
+            <a:schemeClr val="accent1"/>
+          </a:effectRef>
+          <a:fontRef idx="minor">
+            <a:schemeClr val="lt1"/>
+          </a:fontRef>
+        </p:style>
+        <p:txBody>
+          <a:bodyPr rtlCol="0" anchor="ctr" wrap="square" lIns="73152" rIns="73152"/>
+          <a:lstStyle/>
+          <a:p>
+            <a:pPr algn="ctr"/>
+            <a:r>
+              <a:rPr sz="1300" b="1">
+                <a:solidFill>
+                  <a:srgbClr val="DEE2E6"/>
+                </a:solidFill>
+              </a:rPr>
+              <a:t>Fix the data, where it’s hot</a:t>
+            </a:r>
+          </a:p>
+        </p:txBody>
+      </p:sp>
+      <p:cxnSp>
+        <p:nvCxnSpPr>
+          <p:cNvPr id="300" name="Connector 299"/>
+          <p:cNvCxnSpPr/>
+          <p:nvPr/>
+        </p:nvCxnSpPr>
+        <p:spPr>
+          <a:xfrm>
+            <a:off x="5312664" y="2354580"/>
+            <a:ext cx="237744" cy="0"/>
+          </a:xfrm>
+          <a:prstGeom prst="line">
+            <a:avLst/>
+          </a:prstGeom>
+          <a:ln w="25400">
+            <a:solidFill>
+              <a:srgbClr val="9AA3AB"/>
+            </a:solidFill>
+            <a:tailEnd type="triangle"/>
+          </a:ln>
+        </p:spPr>
+        <p:style>
+          <a:lnRef idx="2">
+            <a:schemeClr val="accent1"/>
+          </a:lnRef>
+          <a:fillRef idx="0">
+            <a:schemeClr val="accent1"/>
+          </a:fillRef>
+          <a:effectRef idx="1">
+            <a:schemeClr val="accent1"/>
+          </a:effectRef>
+          <a:fontRef idx="minor">
+            <a:schemeClr val="tx1"/>
+          </a:fontRef>
+        </p:style>
+      </p:cxnSp>
+      <p:sp>
+        <p:nvSpPr>
+          <p:cNvPr id="301" name="Rounded Rectangle 300"/>
+          <p:cNvSpPr/>
+          <p:nvPr/>
+        </p:nvSpPr>
+        <p:spPr>
+          <a:xfrm>
+            <a:off x="5568696" y="1920240"/>
+            <a:ext cx="1444751" cy="868680"/>
+          </a:xfrm>
+          <a:prstGeom prst="roundRect">
+            <a:avLst>
+              <a:gd name="adj" fmla="val 12000"/>
+            </a:avLst>
+          </a:prstGeom>
+          <a:solidFill>
+            <a:srgbClr val="2E3338"/>
+          </a:solidFill>
+          <a:ln>
+            <a:noFill/>
+          </a:ln>
+          <a:effectLst/>
+        </p:spPr>
+        <p:style>
+          <a:lnRef idx="1">
+            <a:schemeClr val="accent1"/>
+          </a:lnRef>
+          <a:fillRef idx="3">
+            <a:schemeClr val="accent1"/>
+          </a:fillRef>
+          <a:effectRef idx="2">
+            <a:schemeClr val="accent1"/>
+          </a:effectRef>
+          <a:fontRef idx="minor">
+            <a:schemeClr val="lt1"/>
+          </a:fontRef>
+        </p:style>
+        <p:txBody>
+          <a:bodyPr rtlCol="0" anchor="ctr" wrap="square" lIns="73152" rIns="73152"/>
+          <a:lstStyle/>
+          <a:p>
+            <a:pPr algn="ctr"/>
+            <a:r>
+              <a:rPr sz="1300" b="1">
+                <a:solidFill>
+                  <a:srgbClr val="DEE2E6"/>
+                </a:solidFill>
+              </a:rPr>
+              <a:t>Measure again</a:t>
+            </a:r>
+          </a:p>
+        </p:txBody>
+      </p:sp>
+      <p:cxnSp>
+        <p:nvCxnSpPr>
+          <p:cNvPr id="302" name="Connector 301"/>
+          <p:cNvCxnSpPr/>
+          <p:nvPr/>
+        </p:nvCxnSpPr>
+        <p:spPr>
+          <a:xfrm>
+            <a:off x="7031736" y="2354580"/>
+            <a:ext cx="237744" cy="0"/>
+          </a:xfrm>
+          <a:prstGeom prst="line">
+            <a:avLst/>
+          </a:prstGeom>
+          <a:ln w="25400">
+            <a:solidFill>
+              <a:srgbClr val="9AA3AB"/>
+            </a:solidFill>
+            <a:tailEnd type="triangle"/>
+          </a:ln>
+        </p:spPr>
+        <p:style>
+          <a:lnRef idx="2">
+            <a:schemeClr val="accent1"/>
+          </a:lnRef>
+          <a:fillRef idx="0">
+            <a:schemeClr val="accent1"/>
+          </a:fillRef>
+          <a:effectRef idx="1">
+            <a:schemeClr val="accent1"/>
+          </a:effectRef>
+          <a:fontRef idx="minor">
+            <a:schemeClr val="tx1"/>
+          </a:fontRef>
+        </p:style>
+      </p:cxnSp>
+      <p:sp>
+        <p:nvSpPr>
+          <p:cNvPr id="303" name="Rounded Rectangle 302"/>
+          <p:cNvSpPr/>
+          <p:nvPr/>
+        </p:nvSpPr>
+        <p:spPr>
+          <a:xfrm>
+            <a:off x="7287768" y="1920240"/>
+            <a:ext cx="1444751" cy="868680"/>
+          </a:xfrm>
+          <a:prstGeom prst="roundRect">
+            <a:avLst>
+              <a:gd name="adj" fmla="val 12000"/>
+            </a:avLst>
+          </a:prstGeom>
+          <a:solidFill>
+            <a:srgbClr val="2E3338"/>
+          </a:solidFill>
+          <a:ln>
+            <a:noFill/>
+          </a:ln>
+          <a:effectLst/>
+        </p:spPr>
+        <p:style>
+          <a:lnRef idx="1">
+            <a:schemeClr val="accent1"/>
+          </a:lnRef>
+          <a:fillRef idx="3">
+            <a:schemeClr val="accent1"/>
+          </a:fillRef>
+          <a:effectRef idx="2">
+            <a:schemeClr val="accent1"/>
+          </a:effectRef>
+          <a:fontRef idx="minor">
+            <a:schemeClr val="lt1"/>
+          </a:fontRef>
+        </p:style>
+        <p:txBody>
+          <a:bodyPr rtlCol="0" anchor="ctr" wrap="square" lIns="73152" rIns="73152"/>
+          <a:lstStyle/>
+          <a:p>
+            <a:pPr algn="ctr"/>
+            <a:r>
+              <a:rPr sz="1300" b="1">
+                <a:solidFill>
+                  <a:srgbClr val="DEE2E6"/>
+                </a:solidFill>
+              </a:rPr>
+              <a:t>Keep a test against the simple code</a:t>
+            </a:r>
           </a:p>
         </p:txBody>
       </p:sp>
@@ -12492,6 +16468,179 @@
 </p:sld>
 </file>
 
+<file path=ppt/slides/slide28.xml><?xml version="1.0" encoding="utf-8"?>
+<p:sld xmlns:a="http://schemas.openxmlformats.org/drawingml/2006/main" xmlns:p="http://schemas.openxmlformats.org/presentationml/2006/main" xmlns:r="http://schemas.openxmlformats.org/officeDocument/2006/relationships">
+  <p:cSld>
+    <p:spTree>
+      <p:nvGrpSpPr>
+        <p:cNvPr id="1" name=""/>
+        <p:cNvGrpSpPr/>
+        <p:nvPr/>
+      </p:nvGrpSpPr>
+      <p:grpSpPr/>
+      <p:sp>
+        <p:nvSpPr>
+          <p:cNvPr id="2" name="Title 1"/>
+          <p:cNvSpPr>
+            <a:spLocks noGrp="1"/>
+          </p:cNvSpPr>
+          <p:nvPr>
+            <p:ph type="title"/>
+          </p:nvPr>
+        </p:nvSpPr>
+        <p:spPr/>
+        <p:txBody>
+          <a:bodyPr/>
+          <a:lstStyle/>
+          <a:p>
+            <a:pPr indent="0" lvl="0" marL="0" rtl="0" algn="l">
+              <a:spcBef>
+                <a:spcPts val="0"/>
+              </a:spcBef>
+              <a:spcAft>
+                <a:spcPts val="0"/>
+              </a:spcAft>
+              <a:buNone/>
+            </a:pPr>
+            <a:r>
+              <a:rPr lang="en"/>
+              <a:t>Check Yourself</a:t>
+            </a:r>
+            <a:endParaRPr/>
+          </a:p>
+        </p:txBody>
+      </p:sp>
+      <p:sp>
+        <p:nvSpPr>
+          <p:cNvPr id="3" name="Text Placeholder 2"/>
+          <p:cNvSpPr>
+            <a:spLocks noGrp="1"/>
+          </p:cNvSpPr>
+          <p:nvPr>
+            <p:ph type="body" idx="1"/>
+          </p:nvPr>
+        </p:nvSpPr>
+        <p:spPr>
+          <a:xfrm>
+            <a:off x="311700" y="885950"/>
+            <a:ext cx="8520600" cy="1719072"/>
+          </a:xfrm>
+        </p:spPr>
+        <p:txBody>
+          <a:bodyPr/>
+          <a:lstStyle/>
+          <a:p>
+            <a:pPr indent="-330200" lvl="0" marL="457200" rtl="0" algn="l">
+              <a:spcBef>
+                <a:spcPts val="0"/>
+              </a:spcBef>
+              <a:spcAft>
+                <a:spcPts val="0"/>
+              </a:spcAft>
+              <a:buSzPts val="1600"/>
+              <a:buChar char="●"/>
+            </a:pPr>
+            <a:r>
+              <a:rPr lang="en"/>
+              <a:t>Why profile before optimizing?</a:t>
+            </a:r>
+            <a:endParaRPr/>
+          </a:p>
+          <a:p>
+            <a:pPr indent="-330200" lvl="0" marL="457200" rtl="0" algn="l">
+              <a:spcBef>
+                <a:spcPts val="0"/>
+              </a:spcBef>
+              <a:spcAft>
+                <a:spcPts val="0"/>
+              </a:spcAft>
+              <a:buSzPts val="1600"/>
+              <a:buChar char="●"/>
+            </a:pPr>
+            <a:r>
+              <a:rPr lang="en"/>
+              <a:t>How does a uniform grid make separation cheaper?</a:t>
+            </a:r>
+            <a:endParaRPr/>
+          </a:p>
+          <a:p>
+            <a:pPr indent="-330200" lvl="0" marL="457200" rtl="0" algn="l">
+              <a:spcBef>
+                <a:spcPts val="0"/>
+              </a:spcBef>
+              <a:spcAft>
+                <a:spcPts val="0"/>
+              </a:spcAft>
+              <a:buSzPts val="1600"/>
+              <a:buChar char="●"/>
+            </a:pPr>
+            <a:r>
+              <a:rPr lang="en"/>
+              <a:t>What is the difference between an array of objects and a struct of arrays?</a:t>
+            </a:r>
+            <a:endParaRPr/>
+          </a:p>
+          <a:p>
+            <a:pPr indent="-330200" lvl="0" marL="457200" rtl="0" algn="l">
+              <a:spcBef>
+                <a:spcPts val="0"/>
+              </a:spcBef>
+              <a:spcAft>
+                <a:spcPts val="0"/>
+              </a:spcAft>
+              <a:buSzPts val="1600"/>
+              <a:buChar char="●"/>
+            </a:pPr>
+            <a:r>
+              <a:rPr lang="en"/>
+              <a:t>What do you give up with data-oriented design?</a:t>
+            </a:r>
+            <a:endParaRPr/>
+          </a:p>
+        </p:txBody>
+      </p:sp>
+      <p:sp>
+        <p:nvSpPr>
+          <p:cNvPr id="4" name="TextBox 3"/>
+          <p:cNvSpPr txBox="1"/>
+          <p:nvPr/>
+        </p:nvSpPr>
+        <p:spPr>
+          <a:xfrm>
+            <a:off x="457200" y="3182112"/>
+            <a:ext cx="8229600" cy="457200"/>
+          </a:xfrm>
+          <a:prstGeom prst="rect">
+            <a:avLst/>
+          </a:prstGeom>
+          <a:noFill/>
+        </p:spPr>
+        <p:txBody>
+          <a:bodyPr wrap="square">
+            <a:spAutoFit/>
+          </a:bodyPr>
+          <a:lstStyle/>
+          <a:p>
+            <a:pPr algn="ctr"/>
+            <a:r>
+              <a:rPr sz="1400" b="0" i="0">
+                <a:solidFill>
+                  <a:srgbClr val="9AA3AB"/>
+                </a:solidFill>
+              </a:rPr>
+              <a:t>The answers, and more questions, are on the course site.</a:t>
+            </a:r>
+          </a:p>
+        </p:txBody>
+      </p:sp>
+    </p:spTree>
+  </p:cSld>
+  <p:clrMapOvr>
+    <a:masterClrMapping/>
+  </p:clrMapOvr>
+</p:sld>
+</file>
+
 <file path=ppt/slides/slide3.xml><?xml version="1.0" encoding="utf-8"?>
 <p:sld xmlns:a="http://schemas.openxmlformats.org/drawingml/2006/main" xmlns:r="http://schemas.openxmlformats.org/officeDocument/2006/relationships" xmlns:mc="http://schemas.openxmlformats.org/markup-compatibility/2006" xmlns:mv="urn:schemas-microsoft-com:mac:vml" xmlns:p="http://schemas.openxmlformats.org/presentationml/2006/main" xmlns:c="http://schemas.openxmlformats.org/drawingml/2006/chart" xmlns:dgm="http://schemas.openxmlformats.org/drawingml/2006/diagram" xmlns:o="urn:schemas-microsoft-com:office:office" xmlns:v="urn:schemas-microsoft-com:vml" xmlns:pvml="urn:schemas-microsoft-com:office:powerpoint" xmlns:com="http://schemas.openxmlformats.org/drawingml/2006/compatibility" xmlns:p14="http://schemas.microsoft.com/office/powerpoint/2010/main" xmlns:p15="http://schemas.microsoft.com/office/powerpoint/2012/main" xmlns:ahyp="http://schemas.microsoft.com/office/drawing/2018/hyperlinkcolor">
   <p:cSld>
@@ -13026,7 +17175,7 @@
         <p:spPr>
           <a:xfrm>
             <a:off x="311700" y="885950"/>
-            <a:ext cx="8520600" cy="4023300"/>
+            <a:ext cx="8520600" cy="1289304"/>
           </a:xfrm>
           <a:prstGeom prst="rect">
             <a:avLst/>
@@ -13050,29 +17199,7 @@
             </a:pPr>
             <a:r>
               <a:rPr lang="en"/>
-              <a:t>All Source code for today’s game can be found here:</a:t>
-            </a:r>
-            <a:endParaRPr/>
-          </a:p>
-          <a:p>
-            <a:pPr indent="-317500" lvl="1" marL="914400" rtl="0" algn="l">
-              <a:spcBef>
-                <a:spcPts val="0"/>
-              </a:spcBef>
-              <a:spcAft>
-                <a:spcPts val="0"/>
-              </a:spcAft>
-              <a:buSzPts val="1400"/>
-              <a:buChar char="○"/>
-            </a:pPr>
-            <a:r>
-              <a:rPr lang="en" u="sng">
-                <a:solidFill>
-                  <a:schemeClr val="hlink"/>
-                </a:solidFill>
-                <a:hlinkClick r:id="rId3"/>
-              </a:rPr>
-              <a:t>github.com/Metamate/gar-games (folder 12-vampire-survivors)</a:t>
+              <a:t>github.com/Metamate/gar-games, folder 12-vampire-survivors</a:t>
             </a:r>
             <a:endParaRPr/>
           </a:p>
@@ -13089,41 +17216,7 @@
             </a:pPr>
             <a:r>
               <a:rPr lang="en"/>
-              <a:t>The game is built up in steps: Survivors0 → Survivors4, and tests in Survivors.Tests</a:t>
-            </a:r>
-            <a:endParaRPr/>
-          </a:p>
-          <a:p>
-            <a:pPr indent="-317500" lvl="1" marL="914400" rtl="0" algn="l">
-              <a:spcBef>
-                <a:spcPts val="0"/>
-              </a:spcBef>
-              <a:spcAft>
-                <a:spcPts val="0"/>
-              </a:spcAft>
-              <a:buSzPts val="1400"/>
-              <a:buChar char="○"/>
-            </a:pPr>
-            <a:r>
-              <a:rPr lang="en"/>
-              <a:t>Each step is a separate project that adds one concept</a:t>
-            </a:r>
-            <a:endParaRPr/>
-          </a:p>
-          <a:p>
-            <a:pPr indent="-317500" lvl="1" marL="914400" rtl="0" algn="l">
-              <a:spcBef>
-                <a:spcPts val="0"/>
-              </a:spcBef>
-              <a:spcAft>
-                <a:spcPts val="0"/>
-              </a:spcAft>
-              <a:buSzPts val="1400"/>
-              <a:buChar char="○"/>
-            </a:pPr>
-            <a:r>
-              <a:rPr lang="en"/>
-              <a:t>Compare neighbouring steps to see exactly what changed</a:t>
+              <a:t>Its README: the steps (Survivors0 to Survivors4, and Survivors.Tests), a map of the code, how to run it</a:t>
             </a:r>
             <a:endParaRPr/>
           </a:p>
@@ -13140,7 +17233,7 @@
             </a:pPr>
             <a:r>
               <a:rPr lang="en"/>
-              <a:t>Survivors4 is the finished game, and the starting point for the exercises</a:t>
+              <a:t>The course site: today’s concepts in full, the exercises, and questions to check yourself</a:t>
             </a:r>
             <a:endParaRPr/>
           </a:p>
@@ -14558,7 +18651,7 @@
         <p:spPr>
           <a:xfrm>
             <a:off x="311700" y="885950"/>
-            <a:ext cx="8520600" cy="4023300"/>
+            <a:ext cx="8520600" cy="521208"/>
           </a:xfrm>
           <a:prstGeom prst="rect">
             <a:avLst/>
@@ -14582,128 +18675,593 @@
             </a:pPr>
             <a:r>
               <a:rPr lang="en"/>
-              <a:t>Separate: almost all of it</a:t>
+              <a:t>Separating the enemies takes almost all of it. Twice the enemies, four times the work.</a:t>
             </a:r>
             <a:endParaRPr/>
           </a:p>
-          <a:p>
-            <a:pPr indent="-330200" lvl="0" marL="457200" rtl="0" algn="l">
-              <a:spcBef>
-                <a:spcPts val="0"/>
-              </a:spcBef>
-              <a:spcAft>
-                <a:spcPts val="0"/>
-              </a:spcAft>
-              <a:buSzPts val="1600"/>
-              <a:buChar char="●"/>
-            </a:pPr>
-            <a:r>
-              <a:rPr lang="en"/>
-              <a:t>Move + separate, per step (one laptop)</a:t>
-            </a:r>
-            <a:endParaRPr/>
-          </a:p>
-          <a:p>
-            <a:pPr indent="-317500" lvl="1" marL="914400" rtl="0" algn="l">
-              <a:spcBef>
-                <a:spcPts val="0"/>
-              </a:spcBef>
-              <a:spcAft>
-                <a:spcPts val="0"/>
-              </a:spcAft>
-              <a:buSzPts val="1400"/>
-              <a:buChar char="○"/>
-            </a:pPr>
-            <a:r>
-              <a:rPr lang="en"/>
-              <a:t>1,000 enemies: 1.2 ms</a:t>
-            </a:r>
-            <a:endParaRPr/>
-          </a:p>
-          <a:p>
-            <a:pPr indent="-317500" lvl="1" marL="914400" rtl="0" algn="l">
-              <a:spcBef>
-                <a:spcPts val="0"/>
-              </a:spcBef>
-              <a:spcAft>
-                <a:spcPts val="0"/>
-              </a:spcAft>
-              <a:buSzPts val="1400"/>
-              <a:buChar char="○"/>
-            </a:pPr>
-            <a:r>
-              <a:rPr lang="en"/>
-              <a:t>2,000 enemies: 4.5 ms</a:t>
-            </a:r>
-            <a:endParaRPr/>
-          </a:p>
-          <a:p>
-            <a:pPr indent="-317500" lvl="1" marL="914400" rtl="0" algn="l">
-              <a:spcBef>
-                <a:spcPts val="0"/>
-              </a:spcBef>
-              <a:spcAft>
-                <a:spcPts val="0"/>
-              </a:spcAft>
-              <a:buSzPts val="1400"/>
-              <a:buChar char="○"/>
-            </a:pPr>
-            <a:r>
-              <a:rPr lang="en"/>
-              <a:t>5,000 enemies: 27 ms</a:t>
-            </a:r>
-            <a:endParaRPr/>
-          </a:p>
-          <a:p>
-            <a:pPr indent="-317500" lvl="1" marL="914400" rtl="0" algn="l">
-              <a:spcBef>
-                <a:spcPts val="0"/>
-              </a:spcBef>
-              <a:spcAft>
-                <a:spcPts val="0"/>
-              </a:spcAft>
-              <a:buSzPts val="1400"/>
-              <a:buChar char="○"/>
-            </a:pPr>
-            <a:r>
-              <a:rPr lang="en"/>
-              <a:t>10,000 enemies: 107 ms</a:t>
-            </a:r>
-            <a:endParaRPr/>
-          </a:p>
-          <a:p>
-            <a:pPr indent="-330200" lvl="0" marL="457200" rtl="0" algn="l">
-              <a:spcBef>
-                <a:spcPts val="0"/>
-              </a:spcBef>
-              <a:spcAft>
-                <a:spcPts val="0"/>
-              </a:spcAft>
-              <a:buSzPts val="1600"/>
-              <a:buChar char="●"/>
-            </a:pPr>
-            <a:r>
-              <a:rPr lang="en"/>
-              <a:t>Twice the enemies, four times the work: O(n²)</a:t>
-            </a:r>
-            <a:endParaRPr/>
-          </a:p>
-          <a:p>
-            <a:pPr indent="-330200" lvl="0" marL="457200" rtl="0" algn="l">
-              <a:spcBef>
-                <a:spcPts val="0"/>
-              </a:spcBef>
-              <a:spcAft>
-                <a:spcPts val="0"/>
-              </a:spcAft>
-              <a:buSzPts val="1600"/>
-              <a:buChar char="●"/>
-            </a:pPr>
-            <a:r>
-              <a:rPr lang="en"/>
-              <a:t>A frame at 60 FPS has 16.7 ms</a:t>
-            </a:r>
-            <a:endParaRPr/>
+        </p:txBody>
+      </p:sp>
+      <p:sp>
+        <p:nvSpPr>
+          <p:cNvPr id="295" name="TextBox 294"/>
+          <p:cNvSpPr txBox="1"/>
+          <p:nvPr/>
+        </p:nvSpPr>
+        <p:spPr>
+          <a:xfrm>
+            <a:off x="274320" y="1463040"/>
+            <a:ext cx="1645920" cy="329184"/>
+          </a:xfrm>
+          <a:prstGeom prst="rect">
+            <a:avLst/>
+          </a:prstGeom>
+          <a:noFill/>
+        </p:spPr>
+        <p:txBody>
+          <a:bodyPr wrap="square">
+            <a:spAutoFit/>
+          </a:bodyPr>
+          <a:lstStyle/>
+          <a:p>
+            <a:pPr algn="r"/>
+            <a:r>
+              <a:rPr sz="1300" b="1" i="0">
+                <a:solidFill>
+                  <a:srgbClr val="DEE2E6"/>
+                </a:solidFill>
+              </a:rPr>
+              <a:t>1,000 enemies</a:t>
+            </a:r>
+          </a:p>
+        </p:txBody>
+      </p:sp>
+      <p:sp>
+        <p:nvSpPr>
+          <p:cNvPr id="296" name="Rectangle 295"/>
+          <p:cNvSpPr/>
+          <p:nvPr/>
+        </p:nvSpPr>
+        <p:spPr>
+          <a:xfrm>
+            <a:off x="2011680" y="1463040"/>
+            <a:ext cx="64545" cy="329184"/>
+          </a:xfrm>
+          <a:prstGeom prst="rect">
+            <a:avLst/>
+          </a:prstGeom>
+          <a:solidFill>
+            <a:srgbClr val="2E3338"/>
+          </a:solidFill>
+          <a:ln>
+            <a:noFill/>
+          </a:ln>
+          <a:effectLst/>
+        </p:spPr>
+        <p:style>
+          <a:lnRef idx="1">
+            <a:schemeClr val="accent1"/>
+          </a:lnRef>
+          <a:fillRef idx="3">
+            <a:schemeClr val="accent1"/>
+          </a:fillRef>
+          <a:effectRef idx="2">
+            <a:schemeClr val="accent1"/>
+          </a:effectRef>
+          <a:fontRef idx="minor">
+            <a:schemeClr val="lt1"/>
+          </a:fontRef>
+        </p:style>
+        <p:txBody>
+          <a:bodyPr rtlCol="0" anchor="ctr" wrap="square" lIns="73152" rIns="73152"/>
+          <a:lstStyle/>
+          <a:p>
+            <a:pPr algn="ctr"/>
+            <a:r>
+              <a:rPr sz="1400" b="0">
+                <a:solidFill>
+                  <a:srgbClr val="DEE2E6"/>
+                </a:solidFill>
+              </a:rPr>
+              <a:t/>
+            </a:r>
+          </a:p>
+        </p:txBody>
+      </p:sp>
+      <p:sp>
+        <p:nvSpPr>
+          <p:cNvPr id="297" name="TextBox 296"/>
+          <p:cNvSpPr txBox="1"/>
+          <p:nvPr/>
+        </p:nvSpPr>
+        <p:spPr>
+          <a:xfrm>
+            <a:off x="2149377" y="1463040"/>
+            <a:ext cx="1280160" cy="329184"/>
+          </a:xfrm>
+          <a:prstGeom prst="rect">
+            <a:avLst/>
+          </a:prstGeom>
+          <a:noFill/>
+        </p:spPr>
+        <p:txBody>
+          <a:bodyPr wrap="square">
+            <a:spAutoFit/>
+          </a:bodyPr>
+          <a:lstStyle/>
+          <a:p>
+            <a:pPr algn="l"/>
+            <a:r>
+              <a:rPr sz="1300" b="0" i="0">
+                <a:solidFill>
+                  <a:srgbClr val="9AA3AB"/>
+                </a:solidFill>
+              </a:rPr>
+              <a:t>1.2 ms</a:t>
+            </a:r>
+          </a:p>
+        </p:txBody>
+      </p:sp>
+      <p:sp>
+        <p:nvSpPr>
+          <p:cNvPr id="298" name="TextBox 297"/>
+          <p:cNvSpPr txBox="1"/>
+          <p:nvPr/>
+        </p:nvSpPr>
+        <p:spPr>
+          <a:xfrm>
+            <a:off x="274320" y="1920240"/>
+            <a:ext cx="1645920" cy="329184"/>
+          </a:xfrm>
+          <a:prstGeom prst="rect">
+            <a:avLst/>
+          </a:prstGeom>
+          <a:noFill/>
+        </p:spPr>
+        <p:txBody>
+          <a:bodyPr wrap="square">
+            <a:spAutoFit/>
+          </a:bodyPr>
+          <a:lstStyle/>
+          <a:p>
+            <a:pPr algn="r"/>
+            <a:r>
+              <a:rPr sz="1300" b="1" i="0">
+                <a:solidFill>
+                  <a:srgbClr val="DEE2E6"/>
+                </a:solidFill>
+              </a:rPr>
+              <a:t>2,000</a:t>
+            </a:r>
+          </a:p>
+        </p:txBody>
+      </p:sp>
+      <p:sp>
+        <p:nvSpPr>
+          <p:cNvPr id="299" name="Rectangle 298"/>
+          <p:cNvSpPr/>
+          <p:nvPr/>
+        </p:nvSpPr>
+        <p:spPr>
+          <a:xfrm>
+            <a:off x="2011680" y="1920240"/>
+            <a:ext cx="242047" cy="329184"/>
+          </a:xfrm>
+          <a:prstGeom prst="rect">
+            <a:avLst/>
+          </a:prstGeom>
+          <a:solidFill>
+            <a:srgbClr val="2E3338"/>
+          </a:solidFill>
+          <a:ln>
+            <a:noFill/>
+          </a:ln>
+          <a:effectLst/>
+        </p:spPr>
+        <p:style>
+          <a:lnRef idx="1">
+            <a:schemeClr val="accent1"/>
+          </a:lnRef>
+          <a:fillRef idx="3">
+            <a:schemeClr val="accent1"/>
+          </a:fillRef>
+          <a:effectRef idx="2">
+            <a:schemeClr val="accent1"/>
+          </a:effectRef>
+          <a:fontRef idx="minor">
+            <a:schemeClr val="lt1"/>
+          </a:fontRef>
+        </p:style>
+        <p:txBody>
+          <a:bodyPr rtlCol="0" anchor="ctr" wrap="square" lIns="73152" rIns="73152"/>
+          <a:lstStyle/>
+          <a:p>
+            <a:pPr algn="ctr"/>
+            <a:r>
+              <a:rPr sz="1400" b="0">
+                <a:solidFill>
+                  <a:srgbClr val="DEE2E6"/>
+                </a:solidFill>
+              </a:rPr>
+              <a:t/>
+            </a:r>
+          </a:p>
+        </p:txBody>
+      </p:sp>
+      <p:sp>
+        <p:nvSpPr>
+          <p:cNvPr id="300" name="TextBox 299"/>
+          <p:cNvSpPr txBox="1"/>
+          <p:nvPr/>
+        </p:nvSpPr>
+        <p:spPr>
+          <a:xfrm>
+            <a:off x="2326879" y="1920240"/>
+            <a:ext cx="1280160" cy="329184"/>
+          </a:xfrm>
+          <a:prstGeom prst="rect">
+            <a:avLst/>
+          </a:prstGeom>
+          <a:noFill/>
+        </p:spPr>
+        <p:txBody>
+          <a:bodyPr wrap="square">
+            <a:spAutoFit/>
+          </a:bodyPr>
+          <a:lstStyle/>
+          <a:p>
+            <a:pPr algn="l"/>
+            <a:r>
+              <a:rPr sz="1300" b="0" i="0">
+                <a:solidFill>
+                  <a:srgbClr val="9AA3AB"/>
+                </a:solidFill>
+              </a:rPr>
+              <a:t>4.5 ms</a:t>
+            </a:r>
+          </a:p>
+        </p:txBody>
+      </p:sp>
+      <p:sp>
+        <p:nvSpPr>
+          <p:cNvPr id="301" name="TextBox 300"/>
+          <p:cNvSpPr txBox="1"/>
+          <p:nvPr/>
+        </p:nvSpPr>
+        <p:spPr>
+          <a:xfrm>
+            <a:off x="274320" y="2377440"/>
+            <a:ext cx="1645920" cy="329184"/>
+          </a:xfrm>
+          <a:prstGeom prst="rect">
+            <a:avLst/>
+          </a:prstGeom>
+          <a:noFill/>
+        </p:spPr>
+        <p:txBody>
+          <a:bodyPr wrap="square">
+            <a:spAutoFit/>
+          </a:bodyPr>
+          <a:lstStyle/>
+          <a:p>
+            <a:pPr algn="r"/>
+            <a:r>
+              <a:rPr sz="1300" b="1" i="0">
+                <a:solidFill>
+                  <a:srgbClr val="DEE2E6"/>
+                </a:solidFill>
+              </a:rPr>
+              <a:t>5,000</a:t>
+            </a:r>
+          </a:p>
+        </p:txBody>
+      </p:sp>
+      <p:sp>
+        <p:nvSpPr>
+          <p:cNvPr id="302" name="Rectangle 301"/>
+          <p:cNvSpPr/>
+          <p:nvPr/>
+        </p:nvSpPr>
+        <p:spPr>
+          <a:xfrm>
+            <a:off x="2011680" y="2377440"/>
+            <a:ext cx="1452282" cy="329184"/>
+          </a:xfrm>
+          <a:prstGeom prst="rect">
+            <a:avLst/>
+          </a:prstGeom>
+          <a:solidFill>
+            <a:srgbClr val="2E3338"/>
+          </a:solidFill>
+          <a:ln>
+            <a:noFill/>
+          </a:ln>
+          <a:effectLst/>
+        </p:spPr>
+        <p:style>
+          <a:lnRef idx="1">
+            <a:schemeClr val="accent1"/>
+          </a:lnRef>
+          <a:fillRef idx="3">
+            <a:schemeClr val="accent1"/>
+          </a:fillRef>
+          <a:effectRef idx="2">
+            <a:schemeClr val="accent1"/>
+          </a:effectRef>
+          <a:fontRef idx="minor">
+            <a:schemeClr val="lt1"/>
+          </a:fontRef>
+        </p:style>
+        <p:txBody>
+          <a:bodyPr rtlCol="0" anchor="ctr" wrap="square" lIns="73152" rIns="73152"/>
+          <a:lstStyle/>
+          <a:p>
+            <a:pPr algn="ctr"/>
+            <a:r>
+              <a:rPr sz="1400" b="0">
+                <a:solidFill>
+                  <a:srgbClr val="DEE2E6"/>
+                </a:solidFill>
+              </a:rPr>
+              <a:t/>
+            </a:r>
+          </a:p>
+        </p:txBody>
+      </p:sp>
+      <p:sp>
+        <p:nvSpPr>
+          <p:cNvPr id="303" name="TextBox 302"/>
+          <p:cNvSpPr txBox="1"/>
+          <p:nvPr/>
+        </p:nvSpPr>
+        <p:spPr>
+          <a:xfrm>
+            <a:off x="3537114" y="2377440"/>
+            <a:ext cx="1280160" cy="329184"/>
+          </a:xfrm>
+          <a:prstGeom prst="rect">
+            <a:avLst/>
+          </a:prstGeom>
+          <a:noFill/>
+        </p:spPr>
+        <p:txBody>
+          <a:bodyPr wrap="square">
+            <a:spAutoFit/>
+          </a:bodyPr>
+          <a:lstStyle/>
+          <a:p>
+            <a:pPr algn="l"/>
+            <a:r>
+              <a:rPr sz="1300" b="0" i="0">
+                <a:solidFill>
+                  <a:srgbClr val="9AA3AB"/>
+                </a:solidFill>
+              </a:rPr>
+              <a:t>27 ms</a:t>
+            </a:r>
+          </a:p>
+        </p:txBody>
+      </p:sp>
+      <p:sp>
+        <p:nvSpPr>
+          <p:cNvPr id="304" name="TextBox 303"/>
+          <p:cNvSpPr txBox="1"/>
+          <p:nvPr/>
+        </p:nvSpPr>
+        <p:spPr>
+          <a:xfrm>
+            <a:off x="274320" y="2834640"/>
+            <a:ext cx="1645920" cy="329184"/>
+          </a:xfrm>
+          <a:prstGeom prst="rect">
+            <a:avLst/>
+          </a:prstGeom>
+          <a:noFill/>
+        </p:spPr>
+        <p:txBody>
+          <a:bodyPr wrap="square">
+            <a:spAutoFit/>
+          </a:bodyPr>
+          <a:lstStyle/>
+          <a:p>
+            <a:pPr algn="r"/>
+            <a:r>
+              <a:rPr sz="1300" b="1" i="0">
+                <a:solidFill>
+                  <a:srgbClr val="DEE2E6"/>
+                </a:solidFill>
+              </a:rPr>
+              <a:t>10,000</a:t>
+            </a:r>
+          </a:p>
+        </p:txBody>
+      </p:sp>
+      <p:sp>
+        <p:nvSpPr>
+          <p:cNvPr id="305" name="Rectangle 304"/>
+          <p:cNvSpPr/>
+          <p:nvPr/>
+        </p:nvSpPr>
+        <p:spPr>
+          <a:xfrm>
+            <a:off x="2011680" y="2834640"/>
+            <a:ext cx="5755341" cy="329184"/>
+          </a:xfrm>
+          <a:prstGeom prst="rect">
+            <a:avLst/>
+          </a:prstGeom>
+          <a:solidFill>
+            <a:srgbClr val="D45D35"/>
+          </a:solidFill>
+          <a:ln>
+            <a:noFill/>
+          </a:ln>
+          <a:effectLst/>
+        </p:spPr>
+        <p:style>
+          <a:lnRef idx="1">
+            <a:schemeClr val="accent1"/>
+          </a:lnRef>
+          <a:fillRef idx="3">
+            <a:schemeClr val="accent1"/>
+          </a:fillRef>
+          <a:effectRef idx="2">
+            <a:schemeClr val="accent1"/>
+          </a:effectRef>
+          <a:fontRef idx="minor">
+            <a:schemeClr val="lt1"/>
+          </a:fontRef>
+        </p:style>
+        <p:txBody>
+          <a:bodyPr rtlCol="0" anchor="ctr" wrap="square" lIns="73152" rIns="73152"/>
+          <a:lstStyle/>
+          <a:p>
+            <a:pPr algn="ctr"/>
+            <a:r>
+              <a:rPr sz="1400" b="0">
+                <a:solidFill>
+                  <a:srgbClr val="DEE2E6"/>
+                </a:solidFill>
+              </a:rPr>
+              <a:t/>
+            </a:r>
+          </a:p>
+        </p:txBody>
+      </p:sp>
+      <p:sp>
+        <p:nvSpPr>
+          <p:cNvPr id="306" name="TextBox 305"/>
+          <p:cNvSpPr txBox="1"/>
+          <p:nvPr/>
+        </p:nvSpPr>
+        <p:spPr>
+          <a:xfrm>
+            <a:off x="7840173" y="2834640"/>
+            <a:ext cx="1280160" cy="329184"/>
+          </a:xfrm>
+          <a:prstGeom prst="rect">
+            <a:avLst/>
+          </a:prstGeom>
+          <a:noFill/>
+        </p:spPr>
+        <p:txBody>
+          <a:bodyPr wrap="square">
+            <a:spAutoFit/>
+          </a:bodyPr>
+          <a:lstStyle/>
+          <a:p>
+            <a:pPr algn="l"/>
+            <a:r>
+              <a:rPr sz="1300" b="0" i="0">
+                <a:solidFill>
+                  <a:srgbClr val="9AA3AB"/>
+                </a:solidFill>
+              </a:rPr>
+              <a:t>107 ms</a:t>
+            </a:r>
+          </a:p>
+        </p:txBody>
+      </p:sp>
+      <p:cxnSp>
+        <p:nvCxnSpPr>
+          <p:cNvPr id="307" name="Connector 306"/>
+          <p:cNvCxnSpPr/>
+          <p:nvPr/>
+        </p:nvCxnSpPr>
+        <p:spPr>
+          <a:xfrm>
+            <a:off x="2909943" y="1325880"/>
+            <a:ext cx="0" cy="1965960"/>
+          </a:xfrm>
+          <a:prstGeom prst="line">
+            <a:avLst/>
+          </a:prstGeom>
+          <a:ln>
+            <a:solidFill>
+              <a:srgbClr val="9AA3AB"/>
+            </a:solidFill>
+            <a:prstDash val="dash"/>
+          </a:ln>
+        </p:spPr>
+        <p:style>
+          <a:lnRef idx="2">
+            <a:schemeClr val="accent1"/>
+          </a:lnRef>
+          <a:fillRef idx="0">
+            <a:schemeClr val="accent1"/>
+          </a:fillRef>
+          <a:effectRef idx="1">
+            <a:schemeClr val="accent1"/>
+          </a:effectRef>
+          <a:fontRef idx="minor">
+            <a:schemeClr val="tx1"/>
+          </a:fontRef>
+        </p:style>
+      </p:cxnSp>
+      <p:sp>
+        <p:nvSpPr>
+          <p:cNvPr id="308" name="TextBox 307"/>
+          <p:cNvSpPr txBox="1"/>
+          <p:nvPr/>
+        </p:nvSpPr>
+        <p:spPr>
+          <a:xfrm>
+            <a:off x="2178423" y="3291840"/>
+            <a:ext cx="1463040" cy="274320"/>
+          </a:xfrm>
+          <a:prstGeom prst="rect">
+            <a:avLst/>
+          </a:prstGeom>
+          <a:noFill/>
+        </p:spPr>
+        <p:txBody>
+          <a:bodyPr wrap="square">
+            <a:spAutoFit/>
+          </a:bodyPr>
+          <a:lstStyle/>
+          <a:p>
+            <a:pPr algn="ctr"/>
+            <a:r>
+              <a:rPr sz="1100" b="0" i="0">
+                <a:solidFill>
+                  <a:srgbClr val="9AA3AB"/>
+                </a:solidFill>
+              </a:rPr>
+              <a:t>one frame: 16.7 ms</a:t>
+            </a:r>
+          </a:p>
+        </p:txBody>
+      </p:sp>
+      <p:sp>
+        <p:nvSpPr>
+          <p:cNvPr id="309" name="TextBox 308"/>
+          <p:cNvSpPr txBox="1"/>
+          <p:nvPr/>
+        </p:nvSpPr>
+        <p:spPr>
+          <a:xfrm>
+            <a:off x="274320" y="3703320"/>
+            <a:ext cx="8595360" cy="365760"/>
+          </a:xfrm>
+          <a:prstGeom prst="rect">
+            <a:avLst/>
+          </a:prstGeom>
+          <a:noFill/>
+        </p:spPr>
+        <p:txBody>
+          <a:bodyPr wrap="square">
+            <a:spAutoFit/>
+          </a:bodyPr>
+          <a:lstStyle/>
+          <a:p>
+            <a:pPr algn="ctr"/>
+            <a:r>
+              <a:rPr sz="1300" b="0" i="0">
+                <a:solidFill>
+                  <a:srgbClr val="9AA3AB"/>
+                </a:solidFill>
+              </a:rPr>
+              <a:t>Move and separate, per step, on one laptop. That’s O(n²).</a:t>
+            </a:r>
           </a:p>
         </p:txBody>
       </p:sp>

--- a/slides/12 Vampire Survivors.pptx
+++ b/slides/12 Vampire Survivors.pptx
@@ -808,19 +808,14 @@
           </a:bodyPr>
           <a:lstStyle/>
           <a:p>
-            <a:pPr indent="0" lvl="0" marL="0" rtl="0" algn="l">
-              <a:spcBef>
-                <a:spcPts val="0"/>
-              </a:spcBef>
-              <a:spcAft>
-                <a:spcPts val="0"/>
-              </a:spcAft>
-              <a:buNone/>
-            </a:pPr>
-            <a:r>
-              <a:t/>
-            </a:r>
-            <a:endParaRPr/>
+            <a:r>
+              <a:t>Welcome. Today we build Vampire Survivors. The main topic: performance.</a:t>
+            </a:r>
+          </a:p>
+          <a:p>
+            <a:r>
+              <a:t>Start by playing the finished game, Survivors4, before any code.</a:t>
+            </a:r>
           </a:p>
         </p:txBody>
       </p:sp>
@@ -877,37 +872,12 @@
           <a:lstStyle/>
           <a:p>
             <a:r>
-              <a:t>Talking points:</a:t>
-            </a:r>
-          </a:p>
-          <a:p>
-            <a:r>
-              <a:t>- Enemies as arrays, same grid: no difference</a:t>
-            </a:r>
-          </a:p>
-          <a:p>
-            <a:r>
-              <a:t>  - 10,000 enemies: 3.9 ms instead of 4.1 ms</a:t>
-            </a:r>
-          </a:p>
-          <a:p>
-            <a:r>
-              <a:t>- The time was in the grid</a:t>
-            </a:r>
-          </a:p>
-          <a:p>
-            <a:r>
-              <a:t>  - A dictionary lookup per cell, lists of tuples</a:t>
-            </a:r>
-          </a:p>
-          <a:p>
-            <a:r>
-              <a:t>- The layout that matters: the data in the hot loop</a:t>
-            </a:r>
-          </a:p>
-          <a:p>
-            <a:r>
-              <a:t>  - Only measuring tells you which loop that is</a:t>
+              <a:t>The surprise: arrays alone changed almost nothing. The time was in the grid’s dictionary and lists.</a:t>
+            </a:r>
+          </a:p>
+          <a:p>
+            <a:r>
+              <a:t>Ask the question: how do you find the hot loop? You measure. Always.</a:t>
             </a:r>
           </a:p>
         </p:txBody>
@@ -965,42 +935,7 @@
           <a:lstStyle/>
           <a:p>
             <a:r>
-              <a:t>Talking points:</a:t>
-            </a:r>
-          </a:p>
-          <a:p>
-            <a:r>
-              <a:t>- Every pair → grid → arrays + flat grid</a:t>
-            </a:r>
-          </a:p>
-          <a:p>
-            <a:r>
-              <a:t>  - 1,000 enemies: 1.2 → 1.3 → 0.24 ms</a:t>
-            </a:r>
-          </a:p>
-          <a:p>
-            <a:r>
-              <a:t>  - 5,000 enemies: 27 → 1.9 → 0.64 ms</a:t>
-            </a:r>
-          </a:p>
-          <a:p>
-            <a:r>
-              <a:t>  - 10,000 enemies: 107 → 4.1 → 1.3 ms</a:t>
-            </a:r>
-          </a:p>
-          <a:p>
-            <a:r>
-              <a:t>  - 20,000 enemies: — → 14.5 → 4.9 ms</a:t>
-            </a:r>
-          </a:p>
-          <a:p>
-            <a:r>
-              <a:t>- 3–5× faster than the object grid</a:t>
-            </a:r>
-          </a:p>
-          <a:p>
-            <a:r>
-              <a:t>- About 80× faster than where we started</a:t>
+              <a:t>From 107 ms to 1.3 ms: about 80 times faster, in three steps. Each step was measured before and after.</a:t>
             </a:r>
           </a:p>
         </p:txBody>
@@ -1058,37 +993,7 @@
           <a:lstStyle/>
           <a:p>
             <a:r>
-              <a:t>Talking points:</a:t>
-            </a:r>
-          </a:p>
-          <a:p>
-            <a:r>
-              <a:t>- An enemy is an index, and indexes change</a:t>
-            </a:r>
-          </a:p>
-          <a:p>
-            <a:r>
-              <a:t>  - Don’t hold on to one across frames</a:t>
-            </a:r>
-          </a:p>
-          <a:p>
-            <a:r>
-              <a:t>- Harder to read, harder to change</a:t>
-            </a:r>
-          </a:p>
-          <a:p>
-            <a:r>
-              <a:t>- So only for what there are thousands of</a:t>
-            </a:r>
-          </a:p>
-          <a:p>
-            <a:r>
-              <a:t>  - The swarm and the gems; not the player or the bolts</a:t>
-            </a:r>
-          </a:p>
-          <a:p>
-            <a:r>
-              <a:t>- Geometry Wars: components for hundreds; its particles as data</a:t>
+              <a:t>Indexes change, so nobody can hold on to an enemy. Harder to read and change. So only for the thousands: the swarm and the gems, not the player.</a:t>
             </a:r>
           </a:p>
         </p:txBody>
@@ -1146,32 +1051,7 @@
           <a:lstStyle/>
           <a:p>
             <a:r>
-              <a:t>Talking points:</a:t>
-            </a:r>
-          </a:p>
-          <a:p>
-            <a:r>
-              <a:t>- Gems: thousands, so arrays too</a:t>
-            </a:r>
-          </a:p>
-          <a:p>
-            <a:r>
-              <a:t>- Level up: a state pushed on the state stack (Pokemon)</a:t>
-            </a:r>
-          </a:p>
-          <a:p>
-            <a:r>
-              <a:t>- Enemy kinds: type objects (Plants vs. Zombies)</a:t>
-            </a:r>
-          </a:p>
-          <a:p>
-            <a:r>
-              <a:t>- A fixed timestep (GMDCore’s Core)</a:t>
-            </a:r>
-          </a:p>
-          <a:p>
-            <a:r>
-              <a:t>- Survive five minutes</a:t>
+              <a:t>The finished game is built from patterns the class already knows: point at each box and ask which session it came from.</a:t>
             </a:r>
           </a:p>
         </p:txBody>
@@ -1229,37 +1109,7 @@
           <a:lstStyle/>
           <a:p>
             <a:r>
-              <a:t>Talking points:</a:t>
-            </a:r>
-          </a:p>
-          <a:p>
-            <a:r>
-              <a:t>- “Premature optimization is the root of all evil. Yet we should not pass up our opportunities in that critical 3%.” (Knuth)</a:t>
-            </a:r>
-          </a:p>
-          <a:p>
-            <a:r>
-              <a:t>- 1. Measure</a:t>
-            </a:r>
-          </a:p>
-          <a:p>
-            <a:r>
-              <a:t>- 2. Fix the algorithm</a:t>
-            </a:r>
-          </a:p>
-          <a:p>
-            <a:r>
-              <a:t>- 3. Fix the data, where it’s hot</a:t>
-            </a:r>
-          </a:p>
-          <a:p>
-            <a:r>
-              <a:t>- 4. Measure again</a:t>
-            </a:r>
-          </a:p>
-          <a:p>
-            <a:r>
-              <a:t>- 5. Keep a test against the simple code</a:t>
+              <a:t>Knuth: don’t optimize early, but don’t skip the critical 3%. The five steps are today’s session in order.</a:t>
             </a:r>
           </a:p>
         </p:txBody>
@@ -1317,7 +1167,313 @@
           <a:lstStyle/>
           <a:p>
             <a:r>
-              <a:t>Ask, let them answer in pairs for a minute, then take a few answers. These are the site’s Check yourself questions.</a:t>
+              <a:t>Ask one question at a time. Pairs discuss for a minute, then take two or three answers.</a:t>
+            </a:r>
+          </a:p>
+          <a:p>
+            <a:r>
+              <a:t>Expected answers (from the course site):</a:t>
+            </a:r>
+          </a:p>
+          <a:p/>
+          <a:p>
+            <a:r>
+              <a:t>Q: Why profile before optimizing?</a:t>
+            </a:r>
+          </a:p>
+          <a:p>
+            <a:r>
+              <a:t>A: Because the slow part is rarely where you expect it. You might guess that drawing thousands of sprites is the problem, but separation was almost all of the time. And after converting the enemies to arrays, only measuring showed that the time was in the grid.</a:t>
+            </a:r>
+          </a:p>
+          <a:p/>
+          <a:p>
+            <a:r>
+              <a:t>Q: How does a uniform grid make separation cheaper?</a:t>
+            </a:r>
+          </a:p>
+          <a:p>
+            <a:r>
+              <a:t>A: Each enemy is only compared with the enemies in its own and neighbouring cells, instead of with every other enemy. The work grows with the number of enemies, not with its square.</a:t>
+            </a:r>
+          </a:p>
+          <a:p/>
+          <a:p>
+            <a:r>
+              <a:t>Q: What is the difference between an array of objects and a struct of arrays, and why does it matter?</a:t>
+            </a:r>
+          </a:p>
+          <a:p>
+            <a:r>
+              <a:t>A: An array of objects holds references to objects spread over the heap; reading a field of each means jumping around memory. A struct of arrays keeps each field in its own contiguous array, so a loop over one field reads memory in order, which the CPU's cache makes fast.</a:t>
+            </a:r>
+          </a:p>
+          <a:p/>
+          <a:p>
+            <a:r>
+              <a:t>Q: What do you give up with data-oriented design?</a:t>
+            </a:r>
+          </a:p>
+          <a:p>
+            <a:r>
+              <a:t>A: Readable objects and stable references. An entity is an index that can change, fields are spread over arrays, and adding a field touches more code. It's worth it where there are very many things and the loops over them are hot.</a:t>
+            </a:r>
+          </a:p>
+        </p:txBody>
+      </p:sp>
+    </p:spTree>
+  </p:cSld>
+  <p:clrMapOvr>
+    <a:masterClrMapping/>
+  </p:clrMapOvr>
+</p:notes>
+</file>
+
+<file path=ppt/notesSlides/notesSlide16.xml><?xml version="1.0" encoding="utf-8"?>
+<p:notes xmlns:a="http://schemas.openxmlformats.org/drawingml/2006/main" xmlns:p="http://schemas.openxmlformats.org/presentationml/2006/main" xmlns:r="http://schemas.openxmlformats.org/officeDocument/2006/relationships">
+  <p:cSld>
+    <p:spTree>
+      <p:nvGrpSpPr>
+        <p:cNvPr id="1" name=""/>
+        <p:cNvGrpSpPr/>
+        <p:nvPr/>
+      </p:nvGrpSpPr>
+      <p:grpSpPr>
+        <a:xfrm>
+          <a:off x="0" y="0"/>
+          <a:ext cx="0" cy="0"/>
+          <a:chOff x="0" y="0"/>
+          <a:chExt cx="0" cy="0"/>
+        </a:xfrm>
+      </p:grpSpPr>
+      <p:sp>
+        <p:nvSpPr>
+          <p:cNvPr id="2" name="Slide Image Placeholder 1"/>
+          <p:cNvSpPr>
+            <a:spLocks noGrp="1"/>
+          </p:cNvSpPr>
+          <p:nvPr>
+            <p:ph type="sldImg" idx="2"/>
+          </p:nvPr>
+        </p:nvSpPr>
+        <p:spPr/>
+      </p:sp>
+      <p:sp>
+        <p:nvSpPr>
+          <p:cNvPr id="3" name="Notes Placeholder 2"/>
+          <p:cNvSpPr>
+            <a:spLocks noGrp="1"/>
+          </p:cNvSpPr>
+          <p:nvPr>
+            <p:ph type="body" idx="1"/>
+          </p:nvPr>
+        </p:nvSpPr>
+        <p:spPr/>
+        <p:txBody>
+          <a:bodyPr/>
+          <a:lstStyle/>
+          <a:p>
+            <a:r>
+              <a:t>A List&lt;Enemy&gt;, as always. Separating checks every enemy against every other.</a:t>
+            </a:r>
+          </a:p>
+          <a:p>
+            <a:r>
+              <a:t>Ask the question on the slide before the demo: it crawls at a few thousand; why?</a:t>
+            </a:r>
+          </a:p>
+        </p:txBody>
+      </p:sp>
+    </p:spTree>
+  </p:cSld>
+  <p:clrMapOvr>
+    <a:masterClrMapping/>
+  </p:clrMapOvr>
+</p:notes>
+</file>
+
+<file path=ppt/notesSlides/notesSlide17.xml><?xml version="1.0" encoding="utf-8"?>
+<p:notes xmlns:a="http://schemas.openxmlformats.org/drawingml/2006/main" xmlns:p="http://schemas.openxmlformats.org/presentationml/2006/main" xmlns:r="http://schemas.openxmlformats.org/officeDocument/2006/relationships">
+  <p:cSld>
+    <p:spTree>
+      <p:nvGrpSpPr>
+        <p:cNvPr id="1" name=""/>
+        <p:cNvGrpSpPr/>
+        <p:nvPr/>
+      </p:nvGrpSpPr>
+      <p:grpSpPr>
+        <a:xfrm>
+          <a:off x="0" y="0"/>
+          <a:ext cx="0" cy="0"/>
+          <a:chOff x="0" y="0"/>
+          <a:chExt cx="0" cy="0"/>
+        </a:xfrm>
+      </p:grpSpPr>
+      <p:sp>
+        <p:nvSpPr>
+          <p:cNvPr id="2" name="Slide Image Placeholder 1"/>
+          <p:cNvSpPr>
+            <a:spLocks noGrp="1"/>
+          </p:cNvSpPr>
+          <p:nvPr>
+            <p:ph type="sldImg" idx="2"/>
+          </p:nvPr>
+        </p:nvSpPr>
+        <p:spPr/>
+      </p:sp>
+      <p:sp>
+        <p:nvSpPr>
+          <p:cNvPr id="3" name="Notes Placeholder 2"/>
+          <p:cNvSpPr>
+            <a:spLocks noGrp="1"/>
+          </p:cNvSpPr>
+          <p:nvPr>
+            <p:ph type="body" idx="1"/>
+          </p:nvPr>
+        </p:nvSpPr>
+        <p:spPr/>
+        <p:txBody>
+          <a:bodyPr/>
+          <a:lstStyle/>
+          <a:p>
+            <a:r>
+              <a:t>Demo: run Survivors0.</a:t>
+            </a:r>
+          </a:p>
+          <a:p>
+            <a:r>
+              <a:t>- press Space a few times until it slows down</a:t>
+            </a:r>
+          </a:p>
+          <a:p>
+            <a:r>
+              <a:t>- ask for guesses about where the time goes</a:t>
+            </a:r>
+          </a:p>
+        </p:txBody>
+      </p:sp>
+    </p:spTree>
+  </p:cSld>
+  <p:clrMapOvr>
+    <a:masterClrMapping/>
+  </p:clrMapOvr>
+</p:notes>
+</file>
+
+<file path=ppt/notesSlides/notesSlide18.xml><?xml version="1.0" encoding="utf-8"?>
+<p:notes xmlns:a="http://schemas.openxmlformats.org/drawingml/2006/main" xmlns:p="http://schemas.openxmlformats.org/presentationml/2006/main" xmlns:r="http://schemas.openxmlformats.org/officeDocument/2006/relationships">
+  <p:cSld>
+    <p:spTree>
+      <p:nvGrpSpPr>
+        <p:cNvPr id="1" name=""/>
+        <p:cNvGrpSpPr/>
+        <p:nvPr/>
+      </p:nvGrpSpPr>
+      <p:grpSpPr>
+        <a:xfrm>
+          <a:off x="0" y="0"/>
+          <a:ext cx="0" cy="0"/>
+          <a:chOff x="0" y="0"/>
+          <a:chExt cx="0" cy="0"/>
+        </a:xfrm>
+      </p:grpSpPr>
+      <p:sp>
+        <p:nvSpPr>
+          <p:cNvPr id="2" name="Slide Image Placeholder 1"/>
+          <p:cNvSpPr>
+            <a:spLocks noGrp="1"/>
+          </p:cNvSpPr>
+          <p:nvPr>
+            <p:ph type="sldImg" idx="2"/>
+          </p:nvPr>
+        </p:nvSpPr>
+        <p:spPr/>
+      </p:sp>
+      <p:sp>
+        <p:nvSpPr>
+          <p:cNvPr id="3" name="Notes Placeholder 2"/>
+          <p:cNvSpPr>
+            <a:spLocks noGrp="1"/>
+          </p:cNvSpPr>
+          <p:nvPr>
+            <p:ph type="body" idx="1"/>
+          </p:nvPr>
+        </p:nvSpPr>
+        <p:spPr/>
+        <p:txBody>
+          <a:bodyPr/>
+          <a:lstStyle/>
+          <a:p>
+            <a:r>
+              <a:t>Measure before changing anything. The profiler times each part of a step, and counts allocations. Measure a Release build.</a:t>
+            </a:r>
+          </a:p>
+        </p:txBody>
+      </p:sp>
+    </p:spTree>
+  </p:cSld>
+  <p:clrMapOvr>
+    <a:masterClrMapping/>
+  </p:clrMapOvr>
+</p:notes>
+</file>
+
+<file path=ppt/notesSlides/notesSlide19.xml><?xml version="1.0" encoding="utf-8"?>
+<p:notes xmlns:a="http://schemas.openxmlformats.org/drawingml/2006/main" xmlns:p="http://schemas.openxmlformats.org/presentationml/2006/main" xmlns:r="http://schemas.openxmlformats.org/officeDocument/2006/relationships">
+  <p:cSld>
+    <p:spTree>
+      <p:nvGrpSpPr>
+        <p:cNvPr id="1" name=""/>
+        <p:cNvGrpSpPr/>
+        <p:nvPr/>
+      </p:nvGrpSpPr>
+      <p:grpSpPr>
+        <a:xfrm>
+          <a:off x="0" y="0"/>
+          <a:ext cx="0" cy="0"/>
+          <a:chOff x="0" y="0"/>
+          <a:chExt cx="0" cy="0"/>
+        </a:xfrm>
+      </p:grpSpPr>
+      <p:sp>
+        <p:nvSpPr>
+          <p:cNvPr id="2" name="Slide Image Placeholder 1"/>
+          <p:cNvSpPr>
+            <a:spLocks noGrp="1"/>
+          </p:cNvSpPr>
+          <p:nvPr>
+            <p:ph type="sldImg" idx="2"/>
+          </p:nvPr>
+        </p:nvSpPr>
+        <p:spPr/>
+      </p:sp>
+      <p:sp>
+        <p:nvSpPr>
+          <p:cNvPr id="3" name="Notes Placeholder 2"/>
+          <p:cNvSpPr>
+            <a:spLocks noGrp="1"/>
+          </p:cNvSpPr>
+          <p:nvPr>
+            <p:ph type="body" idx="1"/>
+          </p:nvPr>
+        </p:nvSpPr>
+        <p:spPr/>
+        <p:txBody>
+          <a:bodyPr/>
+          <a:lstStyle/>
+          <a:p>
+            <a:r>
+              <a:t>Demo: run Survivors1.</a:t>
+            </a:r>
+          </a:p>
+          <a:p>
+            <a:r>
+              <a:t>- build in Release: dotnet run -c Release</a:t>
+            </a:r>
+          </a:p>
+          <a:p>
+            <a:r>
+              <a:t>- F3 for the profiler, then Space: watch Separate grow</a:t>
             </a:r>
           </a:p>
         </p:txBody>
@@ -1405,19 +1561,319 @@
           </a:bodyPr>
           <a:lstStyle/>
           <a:p>
-            <a:pPr indent="0" lvl="0" marL="0" rtl="0" algn="l">
-              <a:spcBef>
-                <a:spcPts val="0"/>
-              </a:spcBef>
-              <a:spcAft>
-                <a:spcPts val="0"/>
-              </a:spcAft>
-              <a:buNone/>
-            </a:pPr>
-            <a:r>
-              <a:t/>
-            </a:r>
-            <a:endParaRPr/>
+            <a:r>
+              <a:t>Run Survivors4 and play it for a minute.</a:t>
+            </a:r>
+          </a:p>
+          <a:p>
+            <a:r>
+              <a:t>Ask: what would you need to build this? Collect answers on the board, and come back to them at the end.</a:t>
+            </a:r>
+          </a:p>
+        </p:txBody>
+      </p:sp>
+    </p:spTree>
+  </p:cSld>
+  <p:clrMapOvr>
+    <a:masterClrMapping/>
+  </p:clrMapOvr>
+</p:notes>
+</file>
+
+<file path=ppt/notesSlides/notesSlide20.xml><?xml version="1.0" encoding="utf-8"?>
+<p:notes xmlns:a="http://schemas.openxmlformats.org/drawingml/2006/main" xmlns:p="http://schemas.openxmlformats.org/presentationml/2006/main" xmlns:r="http://schemas.openxmlformats.org/officeDocument/2006/relationships">
+  <p:cSld>
+    <p:spTree>
+      <p:nvGrpSpPr>
+        <p:cNvPr id="1" name=""/>
+        <p:cNvGrpSpPr/>
+        <p:nvPr/>
+      </p:nvGrpSpPr>
+      <p:grpSpPr>
+        <a:xfrm>
+          <a:off x="0" y="0"/>
+          <a:ext cx="0" cy="0"/>
+          <a:chOff x="0" y="0"/>
+          <a:chExt cx="0" cy="0"/>
+        </a:xfrm>
+      </p:grpSpPr>
+      <p:sp>
+        <p:nvSpPr>
+          <p:cNvPr id="2" name="Slide Image Placeholder 1"/>
+          <p:cNvSpPr>
+            <a:spLocks noGrp="1"/>
+          </p:cNvSpPr>
+          <p:nvPr>
+            <p:ph type="sldImg" idx="2"/>
+          </p:nvPr>
+        </p:nvSpPr>
+        <p:spPr/>
+      </p:sp>
+      <p:sp>
+        <p:nvSpPr>
+          <p:cNvPr id="3" name="Notes Placeholder 2"/>
+          <p:cNvSpPr>
+            <a:spLocks noGrp="1"/>
+          </p:cNvSpPr>
+          <p:nvPr>
+            <p:ph type="body" idx="1"/>
+          </p:nvPr>
+        </p:nvSpPr>
+        <p:spPr/>
+        <p:txBody>
+          <a:bodyPr/>
+          <a:lstStyle/>
+          <a:p>
+            <a:r>
+              <a:t>An enemy only overlaps its neighbours. A grid of square cells; each enemy asks only the cells it touches.</a:t>
+            </a:r>
+          </a:p>
+        </p:txBody>
+      </p:sp>
+    </p:spTree>
+  </p:cSld>
+  <p:clrMapOvr>
+    <a:masterClrMapping/>
+  </p:clrMapOvr>
+</p:notes>
+</file>
+
+<file path=ppt/notesSlides/notesSlide21.xml><?xml version="1.0" encoding="utf-8"?>
+<p:notes xmlns:a="http://schemas.openxmlformats.org/drawingml/2006/main" xmlns:p="http://schemas.openxmlformats.org/presentationml/2006/main" xmlns:r="http://schemas.openxmlformats.org/officeDocument/2006/relationships">
+  <p:cSld>
+    <p:spTree>
+      <p:nvGrpSpPr>
+        <p:cNvPr id="1" name=""/>
+        <p:cNvGrpSpPr/>
+        <p:nvPr/>
+      </p:nvGrpSpPr>
+      <p:grpSpPr>
+        <a:xfrm>
+          <a:off x="0" y="0"/>
+          <a:ext cx="0" cy="0"/>
+          <a:chOff x="0" y="0"/>
+          <a:chExt cx="0" cy="0"/>
+        </a:xfrm>
+      </p:grpSpPr>
+      <p:sp>
+        <p:nvSpPr>
+          <p:cNvPr id="2" name="Slide Image Placeholder 1"/>
+          <p:cNvSpPr>
+            <a:spLocks noGrp="1"/>
+          </p:cNvSpPr>
+          <p:nvPr>
+            <p:ph type="sldImg" idx="2"/>
+          </p:nvPr>
+        </p:nvSpPr>
+        <p:spPr/>
+      </p:sp>
+      <p:sp>
+        <p:nvSpPr>
+          <p:cNvPr id="3" name="Notes Placeholder 2"/>
+          <p:cNvSpPr>
+            <a:spLocks noGrp="1"/>
+          </p:cNvSpPr>
+          <p:nvPr>
+            <p:ph type="body" idx="1"/>
+          </p:nvPr>
+        </p:nvSpPr>
+        <p:spPr/>
+        <p:txBody>
+          <a:bodyPr/>
+          <a:lstStyle/>
+          <a:p>
+            <a:r>
+              <a:t>The fast code must give the same answers as the simple code. The test compares them on thousands of random points. [Theory] runs it for several radii.</a:t>
+            </a:r>
+          </a:p>
+        </p:txBody>
+      </p:sp>
+    </p:spTree>
+  </p:cSld>
+  <p:clrMapOvr>
+    <a:masterClrMapping/>
+  </p:clrMapOvr>
+</p:notes>
+</file>
+
+<file path=ppt/notesSlides/notesSlide22.xml><?xml version="1.0" encoding="utf-8"?>
+<p:notes xmlns:a="http://schemas.openxmlformats.org/drawingml/2006/main" xmlns:p="http://schemas.openxmlformats.org/presentationml/2006/main" xmlns:r="http://schemas.openxmlformats.org/officeDocument/2006/relationships">
+  <p:cSld>
+    <p:spTree>
+      <p:nvGrpSpPr>
+        <p:cNvPr id="1" name=""/>
+        <p:cNvGrpSpPr/>
+        <p:nvPr/>
+      </p:nvGrpSpPr>
+      <p:grpSpPr>
+        <a:xfrm>
+          <a:off x="0" y="0"/>
+          <a:ext cx="0" cy="0"/>
+          <a:chOff x="0" y="0"/>
+          <a:chExt cx="0" cy="0"/>
+        </a:xfrm>
+      </p:grpSpPr>
+      <p:sp>
+        <p:nvSpPr>
+          <p:cNvPr id="2" name="Slide Image Placeholder 1"/>
+          <p:cNvSpPr>
+            <a:spLocks noGrp="1"/>
+          </p:cNvSpPr>
+          <p:nvPr>
+            <p:ph type="sldImg" idx="2"/>
+          </p:nvPr>
+        </p:nvSpPr>
+        <p:spPr/>
+      </p:sp>
+      <p:sp>
+        <p:nvSpPr>
+          <p:cNvPr id="3" name="Notes Placeholder 2"/>
+          <p:cNvSpPr>
+            <a:spLocks noGrp="1"/>
+          </p:cNvSpPr>
+          <p:nvPr>
+            <p:ph type="body" idx="1"/>
+          </p:nvPr>
+        </p:nvSpPr>
+        <p:spPr/>
+        <p:txBody>
+          <a:bodyPr/>
+          <a:lstStyle/>
+          <a:p>
+            <a:r>
+              <a:t>Demo: open Survivors1 and Survivors2 side by side (a diff tool, or two editor panes), then run Survivors2.</a:t>
+            </a:r>
+          </a:p>
+          <a:p>
+            <a:r>
+              <a:t>- SpatialGrid.cs</a:t>
+            </a:r>
+          </a:p>
+          <a:p>
+            <a:r>
+              <a:t>- the same F3 numbers, now flat</a:t>
+            </a:r>
+          </a:p>
+          <a:p>
+            <a:r>
+              <a:t>- dotnet test in 12-vampire-survivors</a:t>
+            </a:r>
+          </a:p>
+        </p:txBody>
+      </p:sp>
+    </p:spTree>
+  </p:cSld>
+  <p:clrMapOvr>
+    <a:masterClrMapping/>
+  </p:clrMapOvr>
+</p:notes>
+</file>
+
+<file path=ppt/notesSlides/notesSlide23.xml><?xml version="1.0" encoding="utf-8"?>
+<p:notes xmlns:a="http://schemas.openxmlformats.org/drawingml/2006/main" xmlns:p="http://schemas.openxmlformats.org/presentationml/2006/main" xmlns:r="http://schemas.openxmlformats.org/officeDocument/2006/relationships">
+  <p:cSld>
+    <p:spTree>
+      <p:nvGrpSpPr>
+        <p:cNvPr id="1" name=""/>
+        <p:cNvGrpSpPr/>
+        <p:nvPr/>
+      </p:nvGrpSpPr>
+      <p:grpSpPr>
+        <a:xfrm>
+          <a:off x="0" y="0"/>
+          <a:ext cx="0" cy="0"/>
+          <a:chOff x="0" y="0"/>
+          <a:chExt cx="0" cy="0"/>
+        </a:xfrm>
+      </p:grpSpPr>
+      <p:sp>
+        <p:nvSpPr>
+          <p:cNvPr id="2" name="Slide Image Placeholder 1"/>
+          <p:cNvSpPr>
+            <a:spLocks noGrp="1"/>
+          </p:cNvSpPr>
+          <p:nvPr>
+            <p:ph type="sldImg" idx="2"/>
+          </p:nvPr>
+        </p:nvSpPr>
+        <p:spPr/>
+      </p:sp>
+      <p:sp>
+        <p:nvSpPr>
+          <p:cNvPr id="3" name="Notes Placeholder 2"/>
+          <p:cNvSpPr>
+            <a:spLocks noGrp="1"/>
+          </p:cNvSpPr>
+          <p:nvPr>
+            <p:ph type="body" idx="1"/>
+          </p:nvPr>
+        </p:nvSpPr>
+        <p:spPr/>
+        <p:txBody>
+          <a:bodyPr/>
+          <a:lstStyle/>
+          <a:p>
+            <a:r>
+              <a:t>No Enemy objects: an enemy is an index into these arrays. Removing one moves the last into the hole.</a:t>
+            </a:r>
+          </a:p>
+        </p:txBody>
+      </p:sp>
+    </p:spTree>
+  </p:cSld>
+  <p:clrMapOvr>
+    <a:masterClrMapping/>
+  </p:clrMapOvr>
+</p:notes>
+</file>
+
+<file path=ppt/notesSlides/notesSlide24.xml><?xml version="1.0" encoding="utf-8"?>
+<p:notes xmlns:a="http://schemas.openxmlformats.org/drawingml/2006/main" xmlns:p="http://schemas.openxmlformats.org/presentationml/2006/main" xmlns:r="http://schemas.openxmlformats.org/officeDocument/2006/relationships">
+  <p:cSld>
+    <p:spTree>
+      <p:nvGrpSpPr>
+        <p:cNvPr id="1" name=""/>
+        <p:cNvGrpSpPr/>
+        <p:nvPr/>
+      </p:nvGrpSpPr>
+      <p:grpSpPr>
+        <a:xfrm>
+          <a:off x="0" y="0"/>
+          <a:ext cx="0" cy="0"/>
+          <a:chOff x="0" y="0"/>
+          <a:chExt cx="0" cy="0"/>
+        </a:xfrm>
+      </p:grpSpPr>
+      <p:sp>
+        <p:nvSpPr>
+          <p:cNvPr id="2" name="Slide Image Placeholder 1"/>
+          <p:cNvSpPr>
+            <a:spLocks noGrp="1"/>
+          </p:cNvSpPr>
+          <p:nvPr>
+            <p:ph type="sldImg" idx="2"/>
+          </p:nvPr>
+        </p:nvSpPr>
+        <p:spPr/>
+      </p:sp>
+      <p:sp>
+        <p:nvSpPr>
+          <p:cNvPr id="3" name="Notes Placeholder 2"/>
+          <p:cNvSpPr>
+            <a:spLocks noGrp="1"/>
+          </p:cNvSpPr>
+          <p:nvPr>
+            <p:ph type="body" idx="1"/>
+          </p:nvPr>
+        </p:nvSpPr>
+        <p:spPr/>
+        <p:txBody>
+          <a:bodyPr/>
+          <a:lstStyle/>
+          <a:p>
+            <a:r>
+              <a:t>A counting sort every step: count per cell, work out where each cell starts, copy each enemy into place. A cell’s enemies end up next to each other.</a:t>
+            </a:r>
           </a:p>
         </p:txBody>
       </p:sp>
@@ -1504,19 +1960,188 @@
           </a:bodyPr>
           <a:lstStyle/>
           <a:p>
-            <a:pPr indent="0" lvl="0" marL="0" rtl="0" algn="l">
-              <a:spcBef>
-                <a:spcPts val="0"/>
-              </a:spcBef>
-              <a:spcAft>
-                <a:spcPts val="0"/>
-              </a:spcAft>
-              <a:buNone/>
-            </a:pPr>
-            <a:r>
-              <a:t/>
-            </a:r>
-            <a:endParaRPr/>
+            <a:r>
+              <a:t>Demo: play Survivors4 for a minute: level up, choose an upgrade, and watch the swarm grow.</a:t>
+            </a:r>
+          </a:p>
+        </p:txBody>
+      </p:sp>
+    </p:spTree>
+  </p:cSld>
+  <p:clrMapOvr>
+    <a:masterClrMapping/>
+  </p:clrMapOvr>
+</p:notes>
+</file>
+
+<file path=ppt/notesSlides/notesSlide26.xml><?xml version="1.0" encoding="utf-8"?>
+<p:notes xmlns:a="http://schemas.openxmlformats.org/drawingml/2006/main" xmlns:p="http://schemas.openxmlformats.org/presentationml/2006/main" xmlns:r="http://schemas.openxmlformats.org/officeDocument/2006/relationships">
+  <p:cSld>
+    <p:spTree>
+      <p:nvGrpSpPr>
+        <p:cNvPr id="1" name=""/>
+        <p:cNvGrpSpPr/>
+        <p:nvPr/>
+      </p:nvGrpSpPr>
+      <p:grpSpPr>
+        <a:xfrm>
+          <a:off x="0" y="0"/>
+          <a:ext cx="0" cy="0"/>
+          <a:chOff x="0" y="0"/>
+          <a:chExt cx="0" cy="0"/>
+        </a:xfrm>
+      </p:grpSpPr>
+      <p:sp>
+        <p:nvSpPr>
+          <p:cNvPr id="2" name="Slide Image Placeholder 1"/>
+          <p:cNvSpPr>
+            <a:spLocks noGrp="1"/>
+          </p:cNvSpPr>
+          <p:nvPr>
+            <p:ph type="sldImg" idx="2"/>
+          </p:nvPr>
+        </p:nvSpPr>
+        <p:spPr/>
+      </p:sp>
+      <p:sp>
+        <p:nvSpPr>
+          <p:cNvPr id="3" name="Notes Placeholder 2"/>
+          <p:cNvSpPr>
+            <a:spLocks noGrp="1"/>
+          </p:cNvSpPr>
+          <p:nvPr>
+            <p:ph type="body" idx="1"/>
+          </p:nvPr>
+        </p:nvSpPr>
+        <p:spPr/>
+        <p:txBody>
+          <a:bodyPr/>
+          <a:lstStyle/>
+          <a:p>
+            <a:r>
+              <a:t>Several cores: ask what goes wrong when two threads push the same enemy, before anyone writes code.</a:t>
+            </a:r>
+          </a:p>
+        </p:txBody>
+      </p:sp>
+    </p:spTree>
+  </p:cSld>
+  <p:clrMapOvr>
+    <a:masterClrMapping/>
+  </p:clrMapOvr>
+</p:notes>
+</file>
+
+<file path=ppt/notesSlides/notesSlide27.xml><?xml version="1.0" encoding="utf-8"?>
+<p:notes xmlns:a="http://schemas.openxmlformats.org/drawingml/2006/main" xmlns:p="http://schemas.openxmlformats.org/presentationml/2006/main" xmlns:r="http://schemas.openxmlformats.org/officeDocument/2006/relationships">
+  <p:cSld>
+    <p:spTree>
+      <p:nvGrpSpPr>
+        <p:cNvPr id="1" name=""/>
+        <p:cNvGrpSpPr/>
+        <p:nvPr/>
+      </p:nvGrpSpPr>
+      <p:grpSpPr>
+        <a:xfrm>
+          <a:off x="0" y="0"/>
+          <a:ext cx="0" cy="0"/>
+          <a:chOff x="0" y="0"/>
+          <a:chExt cx="0" cy="0"/>
+        </a:xfrm>
+      </p:grpSpPr>
+      <p:sp>
+        <p:nvSpPr>
+          <p:cNvPr id="2" name="Slide Image Placeholder 1"/>
+          <p:cNvSpPr>
+            <a:spLocks noGrp="1"/>
+          </p:cNvSpPr>
+          <p:nvPr>
+            <p:ph type="sldImg" idx="2"/>
+          </p:nvPr>
+        </p:nvSpPr>
+        <p:spPr/>
+      </p:sp>
+      <p:sp>
+        <p:nvSpPr>
+          <p:cNvPr id="3" name="Notes Placeholder 2"/>
+          <p:cNvSpPr>
+            <a:spLocks noGrp="1"/>
+          </p:cNvSpPr>
+          <p:nvPr>
+            <p:ph type="body" idx="1"/>
+          </p:nvPr>
+        </p:nvSpPr>
+        <p:spPr/>
+        <p:txBody>
+          <a:bodyPr/>
+          <a:lstStyle/>
+          <a:p>
+            <a:r>
+              <a:t>Final milestone today: the README complete, the link on itslearning. Next time: the recap, with your projects.</a:t>
+            </a:r>
+          </a:p>
+        </p:txBody>
+      </p:sp>
+    </p:spTree>
+  </p:cSld>
+  <p:clrMapOvr>
+    <a:masterClrMapping/>
+  </p:clrMapOvr>
+</p:notes>
+</file>
+
+<file path=ppt/notesSlides/notesSlide28.xml><?xml version="1.0" encoding="utf-8"?>
+<p:notes xmlns:a="http://schemas.openxmlformats.org/drawingml/2006/main" xmlns:p="http://schemas.openxmlformats.org/presentationml/2006/main" xmlns:r="http://schemas.openxmlformats.org/officeDocument/2006/relationships">
+  <p:cSld>
+    <p:spTree>
+      <p:nvGrpSpPr>
+        <p:cNvPr id="1" name=""/>
+        <p:cNvGrpSpPr/>
+        <p:nvPr/>
+      </p:nvGrpSpPr>
+      <p:grpSpPr>
+        <a:xfrm>
+          <a:off x="0" y="0"/>
+          <a:ext cx="0" cy="0"/>
+          <a:chOff x="0" y="0"/>
+          <a:chExt cx="0" cy="0"/>
+        </a:xfrm>
+      </p:grpSpPr>
+      <p:sp>
+        <p:nvSpPr>
+          <p:cNvPr id="2" name="Slide Image Placeholder 1"/>
+          <p:cNvSpPr>
+            <a:spLocks noGrp="1"/>
+          </p:cNvSpPr>
+          <p:nvPr>
+            <p:ph type="sldImg" idx="2"/>
+          </p:nvPr>
+        </p:nvSpPr>
+        <p:spPr/>
+      </p:sp>
+      <p:sp>
+        <p:nvSpPr>
+          <p:cNvPr id="3" name="Notes Placeholder 2"/>
+          <p:cNvSpPr>
+            <a:spLocks noGrp="1"/>
+          </p:cNvSpPr>
+          <p:nvPr>
+            <p:ph type="body" idx="1"/>
+          </p:nvPr>
+        </p:nvSpPr>
+        <p:spPr/>
+        <p:txBody>
+          <a:bodyPr/>
+          <a:lstStyle/>
+          <a:p>
+            <a:r>
+              <a:t>Give the project groups five minutes with these questions.</a:t>
+            </a:r>
+          </a:p>
+          <a:p>
+            <a:r>
+              <a:t>Ask two groups to share one answer each. Push for concrete classes and files, not intentions.</a:t>
+            </a:r>
           </a:p>
         </p:txBody>
       </p:sp>
@@ -1603,19 +2228,9 @@
           </a:bodyPr>
           <a:lstStyle/>
           <a:p>
-            <a:pPr indent="0" lvl="0" marL="0" rtl="0" algn="l">
-              <a:spcBef>
-                <a:spcPts val="0"/>
-              </a:spcBef>
-              <a:spcAft>
-                <a:spcPts val="0"/>
-              </a:spcAft>
-              <a:buNone/>
-            </a:pPr>
-            <a:r>
-              <a:t/>
-            </a:r>
-            <a:endParaRPr/>
+            <a:r>
+              <a:t>The main topic: performance with thousands of enemies. Measure first, then fix the algorithm, then the data. The last lesson is the course recap.</a:t>
+            </a:r>
           </a:p>
         </p:txBody>
       </p:sp>
@@ -1702,19 +2317,14 @@
           </a:bodyPr>
           <a:lstStyle/>
           <a:p>
-            <a:pPr indent="0" lvl="0" marL="0" rtl="0" algn="l">
-              <a:spcBef>
-                <a:spcPts val="0"/>
-              </a:spcBef>
-              <a:spcAft>
-                <a:spcPts val="0"/>
-              </a:spcAft>
-              <a:buNone/>
-            </a:pPr>
-            <a:r>
-              <a:t/>
-            </a:r>
-            <a:endParaRPr/>
+            <a:r>
+              <a:t>Start from Survivors3 or Survivors4, in Release. Every exercise starts with a measurement.</a:t>
+            </a:r>
+          </a:p>
+          <a:p>
+            <a:r>
+              <a:t>Full instructions are on the course site; students work from there. Walk round while they work.</a:t>
+            </a:r>
           </a:p>
         </p:txBody>
       </p:sp>
@@ -1802,37 +2412,80 @@
           <a:lstStyle/>
           <a:p>
             <a:r>
-              <a:t>Talking points:</a:t>
-            </a:r>
-          </a:p>
-          <a:p>
-            <a:r>
-              <a:t>- All Source code for today’s game can be found here:</a:t>
-            </a:r>
-          </a:p>
-          <a:p>
-            <a:r>
-              <a:t>  - github.com/Metamate/gar-games (folder 12-vampire-survivors)</a:t>
-            </a:r>
-          </a:p>
-          <a:p>
-            <a:r>
-              <a:t>- The game is built up in steps: Survivors0 → Survivors4, and tests in Survivors.Tests</a:t>
-            </a:r>
-          </a:p>
-          <a:p>
-            <a:r>
-              <a:t>  - Each step is a separate project that adds one concept</a:t>
-            </a:r>
-          </a:p>
-          <a:p>
-            <a:r>
-              <a:t>  - Compare neighbouring steps to see exactly what changed</a:t>
-            </a:r>
-          </a:p>
-          <a:p>
-            <a:r>
-              <a:t>- Survivors4 is the finished game, and the starting point for the exercises</a:t>
+              <a:t>Open gar-games/12-vampire-survivors live. Show the README: the step table, the code map, how to run a step.</a:t>
+            </a:r>
+          </a:p>
+          <a:p>
+            <a:r>
+              <a:t>Say: the site explains the ideas, the README helps you find them in the code, the slides are for today.</a:t>
+            </a:r>
+          </a:p>
+        </p:txBody>
+      </p:sp>
+    </p:spTree>
+  </p:cSld>
+  <p:clrMapOvr>
+    <a:masterClrMapping/>
+  </p:clrMapOvr>
+</p:notes>
+</file>
+
+<file path=ppt/notesSlides/notesSlide6.xml><?xml version="1.0" encoding="utf-8"?>
+<p:notes xmlns:a="http://schemas.openxmlformats.org/drawingml/2006/main" xmlns:p="http://schemas.openxmlformats.org/presentationml/2006/main" xmlns:r="http://schemas.openxmlformats.org/officeDocument/2006/relationships">
+  <p:cSld>
+    <p:spTree>
+      <p:nvGrpSpPr>
+        <p:cNvPr id="1" name=""/>
+        <p:cNvGrpSpPr/>
+        <p:nvPr/>
+      </p:nvGrpSpPr>
+      <p:grpSpPr>
+        <a:xfrm>
+          <a:off x="0" y="0"/>
+          <a:ext cx="0" cy="0"/>
+          <a:chOff x="0" y="0"/>
+          <a:chExt cx="0" cy="0"/>
+        </a:xfrm>
+      </p:grpSpPr>
+      <p:sp>
+        <p:nvSpPr>
+          <p:cNvPr id="2" name="Slide Image Placeholder 1"/>
+          <p:cNvSpPr>
+            <a:spLocks noGrp="1"/>
+          </p:cNvSpPr>
+          <p:nvPr>
+            <p:ph type="sldImg" idx="2"/>
+          </p:nvPr>
+        </p:nvSpPr>
+        <p:spPr/>
+      </p:sp>
+      <p:sp>
+        <p:nvSpPr>
+          <p:cNvPr id="3" name="Notes Placeholder 2"/>
+          <p:cNvSpPr>
+            <a:spLocks noGrp="1"/>
+          </p:cNvSpPr>
+          <p:nvPr>
+            <p:ph type="body" idx="1"/>
+          </p:nvPr>
+        </p:nvSpPr>
+        <p:spPr/>
+        <p:txBody>
+          <a:bodyPr/>
+          <a:lstStyle/>
+          <a:p>
+            <a:r>
+              <a:t>Demo: open Survivors2 and Survivors3 side by side (a diff tool, or two editor panes), then run Survivors3.</a:t>
+            </a:r>
+          </a:p>
+          <a:p>
+            <a:r>
+              <a:t>- Enemies.cs and FlatGrid.cs</a:t>
+            </a:r>
+          </a:p>
+          <a:p>
+            <a:r>
+              <a:t>- the profiler with 20,000 enemies</a:t>
             </a:r>
           </a:p>
         </p:txBody>
@@ -1890,47 +2543,7 @@
           <a:lstStyle/>
           <a:p>
             <a:r>
-              <a:t>Talking points:</a:t>
-            </a:r>
-          </a:p>
-          <a:p>
-            <a:r>
-              <a:t>- Separate: almost all of it</a:t>
-            </a:r>
-          </a:p>
-          <a:p>
-            <a:r>
-              <a:t>- Move + separate, per step (one laptop)</a:t>
-            </a:r>
-          </a:p>
-          <a:p>
-            <a:r>
-              <a:t>  - 1,000 enemies: 1.2 ms</a:t>
-            </a:r>
-          </a:p>
-          <a:p>
-            <a:r>
-              <a:t>  - 2,000 enemies: 4.5 ms</a:t>
-            </a:r>
-          </a:p>
-          <a:p>
-            <a:r>
-              <a:t>  - 5,000 enemies: 27 ms</a:t>
-            </a:r>
-          </a:p>
-          <a:p>
-            <a:r>
-              <a:t>  - 10,000 enemies: 107 ms</a:t>
-            </a:r>
-          </a:p>
-          <a:p>
-            <a:r>
-              <a:t>- Twice the enemies, four times the work: O(n²)</a:t>
-            </a:r>
-          </a:p>
-          <a:p>
-            <a:r>
-              <a:t>- A frame at 60 FPS has 16.7 ms</a:t>
+              <a:t>Read the chart: 1,000 enemies is nothing, 10,000 is six frames’ worth. Twice the enemies, four times the work: O(n²).</a:t>
             </a:r>
           </a:p>
         </p:txBody>
@@ -1988,42 +2601,7 @@
           <a:lstStyle/>
           <a:p>
             <a:r>
-              <a:t>Talking points:</a:t>
-            </a:r>
-          </a:p>
-          <a:p>
-            <a:r>
-              <a:t>- 1,000 enemies: 1.2 ms vs. 1.3 ms</a:t>
-            </a:r>
-          </a:p>
-          <a:p>
-            <a:r>
-              <a:t>  - For few objects, the grid isn’t faster</a:t>
-            </a:r>
-          </a:p>
-          <a:p>
-            <a:r>
-              <a:t>- 5,000: 27 ms vs. 1.9 ms</a:t>
-            </a:r>
-          </a:p>
-          <a:p>
-            <a:r>
-              <a:t>- 10,000: 107 ms vs. 4.1 ms</a:t>
-            </a:r>
-          </a:p>
-          <a:p>
-            <a:r>
-              <a:t>- The work grows with n, not n²</a:t>
-            </a:r>
-          </a:p>
-          <a:p>
-            <a:r>
-              <a:t>- Other structures: quadtrees, BVHs, sweep and prune</a:t>
-            </a:r>
-          </a:p>
-          <a:p>
-            <a:r>
-              <a:t>  - For many similar objects in a limited area, a grid is hard to beat</a:t>
+              <a:t>With 1,000 enemies the grid is no faster: it has its own cost. With 10,000 it’s 25 times faster. The work grows with n.</a:t>
             </a:r>
           </a:p>
         </p:txBody>
@@ -2081,37 +2659,7 @@
           <a:lstStyle/>
           <a:p>
             <a:r>
-              <a:t>Talking points:</a:t>
-            </a:r>
-          </a:p>
-          <a:p>
-            <a:r>
-              <a:t>- The CPU is much faster than memory</a:t>
-            </a:r>
-          </a:p>
-          <a:p>
-            <a:r>
-              <a:t>  - It reads memory in cache lines (64 bytes), and keeps them in its cache</a:t>
-            </a:r>
-          </a:p>
-          <a:p>
-            <a:r>
-              <a:t>  - Data next to data you just read: almost free</a:t>
-            </a:r>
-          </a:p>
-          <a:p>
-            <a:r>
-              <a:t>  - Data elsewhere: a cache miss, and a wait</a:t>
-            </a:r>
-          </a:p>
-          <a:p>
-            <a:r>
-              <a:t>- List&lt;Enemy&gt;: references to objects all over the heap</a:t>
-            </a:r>
-          </a:p>
-          <a:p>
-            <a:r>
-              <a:t>- Data-oriented design: start from the data, and the loops that read it</a:t>
+              <a:t>The CPU reads 64 bytes at a time. A list of objects scatters them over memory; arrays pack each field together, so one read brings several enemies.</a:t>
             </a:r>
           </a:p>
         </p:txBody>
@@ -15463,6 +16011,179 @@
 </file>
 
 <file path=ppt/slides/slide26.xml><?xml version="1.0" encoding="utf-8"?>
+<p:sld xmlns:a="http://schemas.openxmlformats.org/drawingml/2006/main" xmlns:p="http://schemas.openxmlformats.org/presentationml/2006/main" xmlns:r="http://schemas.openxmlformats.org/officeDocument/2006/relationships">
+  <p:cSld>
+    <p:spTree>
+      <p:nvGrpSpPr>
+        <p:cNvPr id="1" name=""/>
+        <p:cNvGrpSpPr/>
+        <p:nvPr/>
+      </p:nvGrpSpPr>
+      <p:grpSpPr/>
+      <p:sp>
+        <p:nvSpPr>
+          <p:cNvPr id="2" name="Title 1"/>
+          <p:cNvSpPr>
+            <a:spLocks noGrp="1"/>
+          </p:cNvSpPr>
+          <p:nvPr>
+            <p:ph type="title"/>
+          </p:nvPr>
+        </p:nvSpPr>
+        <p:spPr/>
+        <p:txBody>
+          <a:bodyPr/>
+          <a:lstStyle/>
+          <a:p>
+            <a:pPr indent="0" lvl="0" marL="0" rtl="0" algn="l">
+              <a:spcBef>
+                <a:spcPts val="0"/>
+              </a:spcBef>
+              <a:spcAft>
+                <a:spcPts val="0"/>
+              </a:spcAft>
+              <a:buNone/>
+            </a:pPr>
+            <a:r>
+              <a:rPr lang="en"/>
+              <a:t>Check Yourself</a:t>
+            </a:r>
+            <a:endParaRPr/>
+          </a:p>
+        </p:txBody>
+      </p:sp>
+      <p:sp>
+        <p:nvSpPr>
+          <p:cNvPr id="3" name="Text Placeholder 2"/>
+          <p:cNvSpPr>
+            <a:spLocks noGrp="1"/>
+          </p:cNvSpPr>
+          <p:nvPr>
+            <p:ph type="body" idx="1"/>
+          </p:nvPr>
+        </p:nvSpPr>
+        <p:spPr>
+          <a:xfrm>
+            <a:off x="311700" y="885950"/>
+            <a:ext cx="8520600" cy="1719072"/>
+          </a:xfrm>
+        </p:spPr>
+        <p:txBody>
+          <a:bodyPr/>
+          <a:lstStyle/>
+          <a:p>
+            <a:pPr indent="-330200" lvl="0" marL="457200" rtl="0" algn="l">
+              <a:spcBef>
+                <a:spcPts val="0"/>
+              </a:spcBef>
+              <a:spcAft>
+                <a:spcPts val="0"/>
+              </a:spcAft>
+              <a:buSzPts val="1600"/>
+              <a:buChar char="●"/>
+            </a:pPr>
+            <a:r>
+              <a:rPr lang="en"/>
+              <a:t>Why profile before optimizing?</a:t>
+            </a:r>
+            <a:endParaRPr/>
+          </a:p>
+          <a:p>
+            <a:pPr indent="-330200" lvl="0" marL="457200" rtl="0" algn="l">
+              <a:spcBef>
+                <a:spcPts val="0"/>
+              </a:spcBef>
+              <a:spcAft>
+                <a:spcPts val="0"/>
+              </a:spcAft>
+              <a:buSzPts val="1600"/>
+              <a:buChar char="●"/>
+            </a:pPr>
+            <a:r>
+              <a:rPr lang="en"/>
+              <a:t>How does a uniform grid make separation cheaper?</a:t>
+            </a:r>
+            <a:endParaRPr/>
+          </a:p>
+          <a:p>
+            <a:pPr indent="-330200" lvl="0" marL="457200" rtl="0" algn="l">
+              <a:spcBef>
+                <a:spcPts val="0"/>
+              </a:spcBef>
+              <a:spcAft>
+                <a:spcPts val="0"/>
+              </a:spcAft>
+              <a:buSzPts val="1600"/>
+              <a:buChar char="●"/>
+            </a:pPr>
+            <a:r>
+              <a:rPr lang="en"/>
+              <a:t>What is the difference between an array of objects and a struct of arrays?</a:t>
+            </a:r>
+            <a:endParaRPr/>
+          </a:p>
+          <a:p>
+            <a:pPr indent="-330200" lvl="0" marL="457200" rtl="0" algn="l">
+              <a:spcBef>
+                <a:spcPts val="0"/>
+              </a:spcBef>
+              <a:spcAft>
+                <a:spcPts val="0"/>
+              </a:spcAft>
+              <a:buSzPts val="1600"/>
+              <a:buChar char="●"/>
+            </a:pPr>
+            <a:r>
+              <a:rPr lang="en"/>
+              <a:t>What do you give up with data-oriented design?</a:t>
+            </a:r>
+            <a:endParaRPr/>
+          </a:p>
+        </p:txBody>
+      </p:sp>
+      <p:sp>
+        <p:nvSpPr>
+          <p:cNvPr id="4" name="TextBox 3"/>
+          <p:cNvSpPr txBox="1"/>
+          <p:nvPr/>
+        </p:nvSpPr>
+        <p:spPr>
+          <a:xfrm>
+            <a:off x="457200" y="3182112"/>
+            <a:ext cx="8229600" cy="457200"/>
+          </a:xfrm>
+          <a:prstGeom prst="rect">
+            <a:avLst/>
+          </a:prstGeom>
+          <a:noFill/>
+        </p:spPr>
+        <p:txBody>
+          <a:bodyPr wrap="square">
+            <a:spAutoFit/>
+          </a:bodyPr>
+          <a:lstStyle/>
+          <a:p>
+            <a:pPr algn="ctr"/>
+            <a:r>
+              <a:rPr sz="1400" b="0" i="0">
+                <a:solidFill>
+                  <a:srgbClr val="9AA3AB"/>
+                </a:solidFill>
+              </a:rPr>
+              <a:t>The answers, and more questions, are on the course site.</a:t>
+            </a:r>
+          </a:p>
+        </p:txBody>
+      </p:sp>
+    </p:spTree>
+  </p:cSld>
+  <p:clrMapOvr>
+    <a:masterClrMapping/>
+  </p:clrMapOvr>
+</p:sld>
+</file>
+
+<file path=ppt/slides/slide27.xml><?xml version="1.0" encoding="utf-8"?>
 <p:sld xmlns:a="http://schemas.openxmlformats.org/drawingml/2006/main" xmlns:r="http://schemas.openxmlformats.org/officeDocument/2006/relationships" xmlns:mc="http://schemas.openxmlformats.org/markup-compatibility/2006" xmlns:mv="urn:schemas-microsoft-com:mac:vml" xmlns:p="http://schemas.openxmlformats.org/presentationml/2006/main" xmlns:c="http://schemas.openxmlformats.org/drawingml/2006/chart" xmlns:dgm="http://schemas.openxmlformats.org/drawingml/2006/diagram" xmlns:o="urn:schemas-microsoft-com:office:office" xmlns:v="urn:schemas-microsoft-com:vml" xmlns:pvml="urn:schemas-microsoft-com:office:powerpoint" xmlns:com="http://schemas.openxmlformats.org/drawingml/2006/compatibility" xmlns:p14="http://schemas.microsoft.com/office/powerpoint/2010/main" xmlns:p15="http://schemas.microsoft.com/office/powerpoint/2012/main" xmlns:ahyp="http://schemas.microsoft.com/office/drawing/2018/hyperlinkcolor">
   <p:cSld>
     <p:spTree>
@@ -16294,7 +17015,7 @@
 </p:sld>
 </file>
 
-<file path=ppt/slides/slide27.xml><?xml version="1.0" encoding="utf-8"?>
+<file path=ppt/slides/slide28.xml><?xml version="1.0" encoding="utf-8"?>
 <p:sld xmlns:a="http://schemas.openxmlformats.org/drawingml/2006/main" xmlns:r="http://schemas.openxmlformats.org/officeDocument/2006/relationships" xmlns:mc="http://schemas.openxmlformats.org/markup-compatibility/2006" xmlns:mv="urn:schemas-microsoft-com:mac:vml" xmlns:p="http://schemas.openxmlformats.org/presentationml/2006/main" xmlns:c="http://schemas.openxmlformats.org/drawingml/2006/chart" xmlns:dgm="http://schemas.openxmlformats.org/drawingml/2006/diagram" xmlns:o="urn:schemas-microsoft-com:office:office" xmlns:v="urn:schemas-microsoft-com:vml" xmlns:pvml="urn:schemas-microsoft-com:office:powerpoint" xmlns:com="http://schemas.openxmlformats.org/drawingml/2006/compatibility" xmlns:p14="http://schemas.microsoft.com/office/powerpoint/2010/main" xmlns:p15="http://schemas.microsoft.com/office/powerpoint/2012/main" xmlns:ahyp="http://schemas.microsoft.com/office/drawing/2018/hyperlinkcolor">
   <p:cSld>
     <p:spTree>
@@ -16457,179 +17178,6 @@
               <a:t>Bring your project: find each thread in your own game</a:t>
             </a:r>
             <a:endParaRPr/>
-          </a:p>
-        </p:txBody>
-      </p:sp>
-    </p:spTree>
-  </p:cSld>
-  <p:clrMapOvr>
-    <a:masterClrMapping/>
-  </p:clrMapOvr>
-</p:sld>
-</file>
-
-<file path=ppt/slides/slide28.xml><?xml version="1.0" encoding="utf-8"?>
-<p:sld xmlns:a="http://schemas.openxmlformats.org/drawingml/2006/main" xmlns:p="http://schemas.openxmlformats.org/presentationml/2006/main" xmlns:r="http://schemas.openxmlformats.org/officeDocument/2006/relationships">
-  <p:cSld>
-    <p:spTree>
-      <p:nvGrpSpPr>
-        <p:cNvPr id="1" name=""/>
-        <p:cNvGrpSpPr/>
-        <p:nvPr/>
-      </p:nvGrpSpPr>
-      <p:grpSpPr/>
-      <p:sp>
-        <p:nvSpPr>
-          <p:cNvPr id="2" name="Title 1"/>
-          <p:cNvSpPr>
-            <a:spLocks noGrp="1"/>
-          </p:cNvSpPr>
-          <p:nvPr>
-            <p:ph type="title"/>
-          </p:nvPr>
-        </p:nvSpPr>
-        <p:spPr/>
-        <p:txBody>
-          <a:bodyPr/>
-          <a:lstStyle/>
-          <a:p>
-            <a:pPr indent="0" lvl="0" marL="0" rtl="0" algn="l">
-              <a:spcBef>
-                <a:spcPts val="0"/>
-              </a:spcBef>
-              <a:spcAft>
-                <a:spcPts val="0"/>
-              </a:spcAft>
-              <a:buNone/>
-            </a:pPr>
-            <a:r>
-              <a:rPr lang="en"/>
-              <a:t>Check Yourself</a:t>
-            </a:r>
-            <a:endParaRPr/>
-          </a:p>
-        </p:txBody>
-      </p:sp>
-      <p:sp>
-        <p:nvSpPr>
-          <p:cNvPr id="3" name="Text Placeholder 2"/>
-          <p:cNvSpPr>
-            <a:spLocks noGrp="1"/>
-          </p:cNvSpPr>
-          <p:nvPr>
-            <p:ph type="body" idx="1"/>
-          </p:nvPr>
-        </p:nvSpPr>
-        <p:spPr>
-          <a:xfrm>
-            <a:off x="311700" y="885950"/>
-            <a:ext cx="8520600" cy="1719072"/>
-          </a:xfrm>
-        </p:spPr>
-        <p:txBody>
-          <a:bodyPr/>
-          <a:lstStyle/>
-          <a:p>
-            <a:pPr indent="-330200" lvl="0" marL="457200" rtl="0" algn="l">
-              <a:spcBef>
-                <a:spcPts val="0"/>
-              </a:spcBef>
-              <a:spcAft>
-                <a:spcPts val="0"/>
-              </a:spcAft>
-              <a:buSzPts val="1600"/>
-              <a:buChar char="●"/>
-            </a:pPr>
-            <a:r>
-              <a:rPr lang="en"/>
-              <a:t>Why profile before optimizing?</a:t>
-            </a:r>
-            <a:endParaRPr/>
-          </a:p>
-          <a:p>
-            <a:pPr indent="-330200" lvl="0" marL="457200" rtl="0" algn="l">
-              <a:spcBef>
-                <a:spcPts val="0"/>
-              </a:spcBef>
-              <a:spcAft>
-                <a:spcPts val="0"/>
-              </a:spcAft>
-              <a:buSzPts val="1600"/>
-              <a:buChar char="●"/>
-            </a:pPr>
-            <a:r>
-              <a:rPr lang="en"/>
-              <a:t>How does a uniform grid make separation cheaper?</a:t>
-            </a:r>
-            <a:endParaRPr/>
-          </a:p>
-          <a:p>
-            <a:pPr indent="-330200" lvl="0" marL="457200" rtl="0" algn="l">
-              <a:spcBef>
-                <a:spcPts val="0"/>
-              </a:spcBef>
-              <a:spcAft>
-                <a:spcPts val="0"/>
-              </a:spcAft>
-              <a:buSzPts val="1600"/>
-              <a:buChar char="●"/>
-            </a:pPr>
-            <a:r>
-              <a:rPr lang="en"/>
-              <a:t>What is the difference between an array of objects and a struct of arrays?</a:t>
-            </a:r>
-            <a:endParaRPr/>
-          </a:p>
-          <a:p>
-            <a:pPr indent="-330200" lvl="0" marL="457200" rtl="0" algn="l">
-              <a:spcBef>
-                <a:spcPts val="0"/>
-              </a:spcBef>
-              <a:spcAft>
-                <a:spcPts val="0"/>
-              </a:spcAft>
-              <a:buSzPts val="1600"/>
-              <a:buChar char="●"/>
-            </a:pPr>
-            <a:r>
-              <a:rPr lang="en"/>
-              <a:t>What do you give up with data-oriented design?</a:t>
-            </a:r>
-            <a:endParaRPr/>
-          </a:p>
-        </p:txBody>
-      </p:sp>
-      <p:sp>
-        <p:nvSpPr>
-          <p:cNvPr id="4" name="TextBox 3"/>
-          <p:cNvSpPr txBox="1"/>
-          <p:nvPr/>
-        </p:nvSpPr>
-        <p:spPr>
-          <a:xfrm>
-            <a:off x="457200" y="3182112"/>
-            <a:ext cx="8229600" cy="457200"/>
-          </a:xfrm>
-          <a:prstGeom prst="rect">
-            <a:avLst/>
-          </a:prstGeom>
-          <a:noFill/>
-        </p:spPr>
-        <p:txBody>
-          <a:bodyPr wrap="square">
-            <a:spAutoFit/>
-          </a:bodyPr>
-          <a:lstStyle/>
-          <a:p>
-            <a:pPr algn="ctr"/>
-            <a:r>
-              <a:rPr sz="1400" b="0" i="0">
-                <a:solidFill>
-                  <a:srgbClr val="9AA3AB"/>
-                </a:solidFill>
-              </a:rPr>
-              <a:t>The answers, and more questions, are on the course site.</a:t>
-            </a:r>
           </a:p>
         </p:txBody>
       </p:sp>

--- a/slides/12 Vampire Survivors.pptx
+++ b/slides/12 Vampire Survivors.pptx
@@ -2140,7 +2140,7 @@
           </a:p>
           <a:p>
             <a:r>
-              <a:t>Ask two groups to share one answer each. Push for concrete classes and files, not intentions.</a:t>
+              <a:t>Ask two groups to share one answer each, and push them to name actual classes and files.</a:t>
             </a:r>
           </a:p>
         </p:txBody>
@@ -7108,7 +7108,7 @@
             </a:pPr>
             <a:r>
               <a:rPr lang="en"/>
-              <a:t>With few enemies the grid doesn’t help. With many, it changes everything.</a:t>
+              <a:t>With few enemies the grid doesn’t help. At 10,000 it is 26 times faster.</a:t>
             </a:r>
             <a:endParaRPr/>
           </a:p>
@@ -11483,7 +11483,7 @@
                   <a:srgbClr val="6C757D"/>
                 </a:solidFill>
               </a:rPr>
-              <a:t>No queries, no lists, no dictionary</a:t>
+              <a:t>Without queries, lists or a dictionary</a:t>
             </a:r>
             <a:endParaRPr/>
           </a:p>
@@ -17764,7 +17764,7 @@
             </a:pPr>
             <a:r>
               <a:rPr lang="en"/>
-              <a:t>Its README: the steps (Survivors0 to Survivors4, and Survivors.Tests), a map of the code, how to run it</a:t>
+              <a:t>Its README: the steps (Survivors0 to Survivors4, and Survivors.Tests), where things are in the code, how to run it</a:t>
             </a:r>
             <a:endParaRPr/>
           </a:p>

--- a/slides/12 Vampire Survivors.pptx
+++ b/slides/12 Vampire Survivors.pptx
@@ -9,6 +9,7 @@
   </p:notesMasterIdLst>
   <p:sldIdLst>
     <p:sldId id="256" r:id="rId6"/>
+    <p:sldId id="316" r:id="rId40"/>
     <p:sldId id="257" r:id="rId7"/>
     <p:sldId id="258" r:id="rId8"/>
     <p:sldId id="259" r:id="rId9"/>
@@ -2141,6 +2142,69 @@
           <a:p>
             <a:r>
               <a:t>Ask two groups to share one answer each, and push them to name actual classes and files.</a:t>
+            </a:r>
+          </a:p>
+        </p:txBody>
+      </p:sp>
+    </p:spTree>
+  </p:cSld>
+  <p:clrMapOvr>
+    <a:masterClrMapping/>
+  </p:clrMapOvr>
+</p:notes>
+</file>
+
+<file path=ppt/notesSlides/notesSlide29.xml><?xml version="1.0" encoding="utf-8"?>
+<p:notes xmlns:a="http://schemas.openxmlformats.org/drawingml/2006/main" xmlns:p="http://schemas.openxmlformats.org/presentationml/2006/main" xmlns:r="http://schemas.openxmlformats.org/officeDocument/2006/relationships">
+  <p:cSld>
+    <p:spTree>
+      <p:nvGrpSpPr>
+        <p:cNvPr id="1" name=""/>
+        <p:cNvGrpSpPr/>
+        <p:nvPr/>
+      </p:nvGrpSpPr>
+      <p:grpSpPr>
+        <a:xfrm>
+          <a:off x="0" y="0"/>
+          <a:ext cx="0" cy="0"/>
+          <a:chOff x="0" y="0"/>
+          <a:chExt cx="0" cy="0"/>
+        </a:xfrm>
+      </p:grpSpPr>
+      <p:sp>
+        <p:nvSpPr>
+          <p:cNvPr id="2" name="Slide Image Placeholder 1"/>
+          <p:cNvSpPr>
+            <a:spLocks noGrp="1"/>
+          </p:cNvSpPr>
+          <p:nvPr>
+            <p:ph type="sldImg" idx="2"/>
+          </p:nvPr>
+        </p:nvSpPr>
+        <p:spPr/>
+      </p:sp>
+      <p:sp>
+        <p:nvSpPr>
+          <p:cNvPr id="3" name="Notes Placeholder 2"/>
+          <p:cNvSpPr>
+            <a:spLocks noGrp="1"/>
+          </p:cNvSpPr>
+          <p:nvPr>
+            <p:ph type="body" idx="1"/>
+          </p:nvPr>
+        </p:nvSpPr>
+        <p:spPr/>
+        <p:txBody>
+          <a:bodyPr/>
+          <a:lstStyle/>
+          <a:p>
+            <a:r>
+              <a:t>The original: Vampire Survivors. Ask who has played it, and what they remember of how it plays.</a:t>
+            </a:r>
+          </a:p>
+          <a:p>
+            <a:r>
+              <a:t>Today we build the parts that matter for the architecture, not the whole game.</a:t>
             </a:r>
           </a:p>
         </p:txBody>
@@ -6345,7 +6409,7 @@
       <p:grpSpPr/>
       <p:sp>
         <p:nvSpPr>
-          <p:cNvPr id="140" name="Google Shape;140;p23"/>
+          <p:cNvPr id="128" name="Google Shape;128;p21"/>
           <p:cNvSpPr txBox="1"/>
           <p:nvPr>
             <p:ph type="title"/>
@@ -6376,6 +6440,133 @@
               <a:buNone/>
             </a:pPr>
             <a:r>
+              <a:rPr lang="en">
+                <a:solidFill>
+                  <a:schemeClr val="accent5"/>
+                </a:solidFill>
+              </a:rPr>
+              <a:t>Profiling Implementation</a:t>
+            </a:r>
+            <a:endParaRPr>
+              <a:solidFill>
+                <a:schemeClr val="accent5"/>
+              </a:solidFill>
+            </a:endParaRPr>
+          </a:p>
+        </p:txBody>
+      </p:sp>
+      <p:sp>
+        <p:nvSpPr>
+          <p:cNvPr id="129" name="Google Shape;129;p21"/>
+          <p:cNvSpPr txBox="1"/>
+          <p:nvPr>
+            <p:ph idx="1" type="body"/>
+          </p:nvPr>
+        </p:nvSpPr>
+        <p:spPr>
+          <a:xfrm>
+            <a:off x="311700" y="885950"/>
+            <a:ext cx="8520600" cy="4023300"/>
+          </a:xfrm>
+          <a:prstGeom prst="rect">
+            <a:avLst/>
+          </a:prstGeom>
+        </p:spPr>
+        <p:txBody>
+          <a:bodyPr anchorCtr="0" anchor="ctr" bIns="91425" lIns="91425" spcFirstLastPara="1" rIns="91425" wrap="square" tIns="91425">
+            <a:normAutofit/>
+          </a:bodyPr>
+          <a:lstStyle/>
+          <a:p>
+            <a:pPr indent="0" lvl="0" marL="0" rtl="0" algn="ctr">
+              <a:spcBef>
+                <a:spcPts val="0"/>
+              </a:spcBef>
+              <a:spcAft>
+                <a:spcPts val="1200"/>
+              </a:spcAft>
+              <a:buNone/>
+            </a:pPr>
+            <a:r>
+              <a:rPr lang="en" sz="2900">
+                <a:latin typeface="VT323"/>
+                <a:ea typeface="VT323"/>
+                <a:cs typeface="VT323"/>
+                <a:sym typeface="VT323"/>
+              </a:rPr>
+              <a:t>DEMO!</a:t>
+            </a:r>
+            <a:endParaRPr/>
+          </a:p>
+          <a:p>
+            <a:pPr indent="0" lvl="0" marL="0" rtl="0" algn="ctr">
+              <a:spcBef>
+                <a:spcPts val="0"/>
+              </a:spcBef>
+              <a:spcAft>
+                <a:spcPts val="0"/>
+              </a:spcAft>
+              <a:buNone/>
+            </a:pPr>
+            <a:r>
+              <a:rPr lang="en" sz="1800"/>
+              <a:t>Survivors1: F3, then Space</a:t>
+            </a:r>
+            <a:endParaRPr sz="1800"/>
+          </a:p>
+        </p:txBody>
+      </p:sp>
+    </p:spTree>
+  </p:cSld>
+  <p:clrMapOvr>
+    <a:masterClrMapping/>
+  </p:clrMapOvr>
+</p:sld>
+</file>
+
+<file path=ppt/slides/slide11.xml><?xml version="1.0" encoding="utf-8"?>
+<p:sld xmlns:a="http://schemas.openxmlformats.org/drawingml/2006/main" xmlns:p="http://schemas.openxmlformats.org/presentationml/2006/main" xmlns:r="http://schemas.openxmlformats.org/officeDocument/2006/relationships">
+  <p:cSld>
+    <p:spTree>
+      <p:nvGrpSpPr>
+        <p:cNvPr id="1" name=""/>
+        <p:cNvGrpSpPr/>
+        <p:nvPr/>
+      </p:nvGrpSpPr>
+      <p:grpSpPr/>
+      <p:sp>
+        <p:nvSpPr>
+          <p:cNvPr id="140" name="Google Shape;140;p23"/>
+          <p:cNvSpPr txBox="1"/>
+          <p:nvPr>
+            <p:ph type="title"/>
+          </p:nvPr>
+        </p:nvSpPr>
+        <p:spPr>
+          <a:xfrm>
+            <a:off x="311700" y="195615"/>
+            <a:ext cx="8520600" cy="572700"/>
+          </a:xfrm>
+          <a:prstGeom prst="rect">
+            <a:avLst/>
+          </a:prstGeom>
+        </p:spPr>
+        <p:txBody>
+          <a:bodyPr anchorCtr="0" anchor="t" bIns="91425" lIns="91425" spcFirstLastPara="1" rIns="91425" wrap="square" tIns="91425">
+            <a:normAutofit fontScale="90000"/>
+          </a:bodyPr>
+          <a:lstStyle/>
+          <a:p>
+            <a:pPr indent="0" lvl="0" marL="0" rtl="0" algn="l">
+              <a:spcBef>
+                <a:spcPts val="0"/>
+              </a:spcBef>
+              <a:spcAft>
+                <a:spcPts val="0"/>
+              </a:spcAft>
+              <a:buNone/>
+            </a:pPr>
+            <a:r>
               <a:rPr lang="en"/>
               <a:t>Spatial Partitioning</a:t>
             </a:r>
@@ -7015,7 +7206,7 @@
 </p:sld>
 </file>
 
-<file path=ppt/slides/slide11.xml><?xml version="1.0" encoding="utf-8"?>
+<file path=ppt/slides/slide12.xml><?xml version="1.0" encoding="utf-8"?>
 <p:sld xmlns:a="http://schemas.openxmlformats.org/drawingml/2006/main" xmlns:p="http://schemas.openxmlformats.org/presentationml/2006/main" xmlns:r="http://schemas.openxmlformats.org/officeDocument/2006/relationships">
   <p:cSld>
     <p:spTree>
@@ -7887,7 +8078,7 @@
 </p:sld>
 </file>
 
-<file path=ppt/slides/slide12.xml><?xml version="1.0" encoding="utf-8"?>
+<file path=ppt/slides/slide13.xml><?xml version="1.0" encoding="utf-8"?>
 <p:sld xmlns:a="http://schemas.openxmlformats.org/drawingml/2006/main" xmlns:p="http://schemas.openxmlformats.org/presentationml/2006/main" xmlns:r="http://schemas.openxmlformats.org/officeDocument/2006/relationships">
   <p:cSld>
     <p:spTree>
@@ -8607,7 +8798,7 @@
 </p:sld>
 </file>
 
-<file path=ppt/slides/slide13.xml><?xml version="1.0" encoding="utf-8"?>
+<file path=ppt/slides/slide14.xml><?xml version="1.0" encoding="utf-8"?>
 <p:sld xmlns:a="http://schemas.openxmlformats.org/drawingml/2006/main" xmlns:p="http://schemas.openxmlformats.org/presentationml/2006/main" xmlns:r="http://schemas.openxmlformats.org/officeDocument/2006/relationships">
   <p:cSld>
     <p:spTree>
@@ -8734,7 +8925,7 @@
 </p:sld>
 </file>
 
-<file path=ppt/slides/slide14.xml><?xml version="1.0" encoding="utf-8"?>
+<file path=ppt/slides/slide15.xml><?xml version="1.0" encoding="utf-8"?>
 <p:sld xmlns:a="http://schemas.openxmlformats.org/drawingml/2006/main" xmlns:p="http://schemas.openxmlformats.org/presentationml/2006/main" xmlns:r="http://schemas.openxmlformats.org/officeDocument/2006/relationships">
   <p:cSld>
     <p:spTree>
@@ -10305,7 +10496,7 @@
 </p:sld>
 </file>
 
-<file path=ppt/slides/slide15.xml><?xml version="1.0" encoding="utf-8"?>
+<file path=ppt/slides/slide16.xml><?xml version="1.0" encoding="utf-8"?>
 <p:sld xmlns:a="http://schemas.openxmlformats.org/drawingml/2006/main" xmlns:p="http://schemas.openxmlformats.org/presentationml/2006/main" xmlns:r="http://schemas.openxmlformats.org/officeDocument/2006/relationships">
   <p:cSld>
     <p:spTree>
@@ -11087,7 +11278,7 @@
 </p:sld>
 </file>
 
-<file path=ppt/slides/slide16.xml><?xml version="1.0" encoding="utf-8"?>
+<file path=ppt/slides/slide17.xml><?xml version="1.0" encoding="utf-8"?>
 <p:sld xmlns:a="http://schemas.openxmlformats.org/drawingml/2006/main" xmlns:p="http://schemas.openxmlformats.org/presentationml/2006/main" xmlns:r="http://schemas.openxmlformats.org/officeDocument/2006/relationships">
   <p:cSld>
     <p:spTree>
@@ -11295,7 +11486,7 @@
 </p:sld>
 </file>
 
-<file path=ppt/slides/slide17.xml><?xml version="1.0" encoding="utf-8"?>
+<file path=ppt/slides/slide18.xml><?xml version="1.0" encoding="utf-8"?>
 <p:sld xmlns:a="http://schemas.openxmlformats.org/drawingml/2006/main" xmlns:p="http://schemas.openxmlformats.org/presentationml/2006/main" xmlns:r="http://schemas.openxmlformats.org/officeDocument/2006/relationships">
   <p:cSld>
     <p:spTree>
@@ -12091,7 +12282,7 @@
 </p:sld>
 </file>
 
-<file path=ppt/slides/slide18.xml><?xml version="1.0" encoding="utf-8"?>
+<file path=ppt/slides/slide19.xml><?xml version="1.0" encoding="utf-8"?>
 <p:sld xmlns:a="http://schemas.openxmlformats.org/drawingml/2006/main" xmlns:p="http://schemas.openxmlformats.org/presentationml/2006/main" xmlns:r="http://schemas.openxmlformats.org/officeDocument/2006/relationships">
   <p:cSld>
     <p:spTree>
@@ -12662,7 +12853,120 @@
 </p:sld>
 </file>
 
-<file path=ppt/slides/slide19.xml><?xml version="1.0" encoding="utf-8"?>
+<file path=ppt/slides/slide2.xml><?xml version="1.0" encoding="utf-8"?>
+<p:sld xmlns:a="http://schemas.openxmlformats.org/drawingml/2006/main" xmlns:p="http://schemas.openxmlformats.org/presentationml/2006/main" xmlns:r="http://schemas.openxmlformats.org/officeDocument/2006/relationships">
+  <p:cSld>
+    <p:spTree>
+      <p:nvGrpSpPr>
+        <p:cNvPr id="1" name=""/>
+        <p:cNvGrpSpPr/>
+        <p:nvPr/>
+      </p:nvGrpSpPr>
+      <p:grpSpPr/>
+      <p:sp>
+        <p:nvSpPr>
+          <p:cNvPr id="2" name="Title 1"/>
+          <p:cNvSpPr>
+            <a:spLocks noGrp="1"/>
+          </p:cNvSpPr>
+          <p:nvPr>
+            <p:ph type="title"/>
+          </p:nvPr>
+        </p:nvSpPr>
+        <p:spPr>
+          <a:xfrm>
+            <a:off x="311700" y="195615"/>
+            <a:ext cx="8520600" cy="572700"/>
+          </a:xfrm>
+        </p:spPr>
+        <p:txBody>
+          <a:bodyPr/>
+          <a:lstStyle/>
+          <a:p>
+            <a:pPr indent="0" lvl="0" marL="0" rtl="0" algn="l">
+              <a:spcBef>
+                <a:spcPts val="0"/>
+              </a:spcBef>
+              <a:spcAft>
+                <a:spcPts val="0"/>
+              </a:spcAft>
+              <a:buNone/>
+            </a:pPr>
+            <a:r>
+              <a:rPr lang="en"/>
+              <a:t>Vampire Survivors</a:t>
+            </a:r>
+            <a:endParaRPr/>
+          </a:p>
+        </p:txBody>
+      </p:sp>
+      <p:pic>
+        <p:nvPicPr>
+          <p:cNvPr id="3" name="Picture 2" descr="vampire-survivors.png"/>
+          <p:cNvPicPr>
+            <a:picLocks noChangeAspect="1"/>
+          </p:cNvPicPr>
+          <p:nvPr/>
+        </p:nvPicPr>
+        <p:blipFill>
+          <a:blip r:embed="rId2"/>
+          <a:stretch>
+            <a:fillRect/>
+          </a:stretch>
+        </p:blipFill>
+        <p:spPr>
+          <a:xfrm>
+            <a:off x="1671700" y="960120"/>
+            <a:ext cx="5800599" cy="3657600"/>
+          </a:xfrm>
+          <a:prstGeom prst="rect">
+            <a:avLst/>
+          </a:prstGeom>
+        </p:spPr>
+      </p:pic>
+      <p:sp>
+        <p:nvSpPr>
+          <p:cNvPr id="4" name="TextBox 3"/>
+          <p:cNvSpPr txBox="1"/>
+          <p:nvPr/>
+        </p:nvSpPr>
+        <p:spPr>
+          <a:xfrm>
+            <a:off x="457200" y="4736592"/>
+            <a:ext cx="8229600" cy="274320"/>
+          </a:xfrm>
+          <a:prstGeom prst="rect">
+            <a:avLst/>
+          </a:prstGeom>
+          <a:noFill/>
+        </p:spPr>
+        <p:txBody>
+          <a:bodyPr wrap="square">
+            <a:spAutoFit/>
+          </a:bodyPr>
+          <a:lstStyle/>
+          <a:p>
+            <a:pPr algn="ctr"/>
+            <a:r>
+              <a:rPr sz="900" b="0" i="0">
+                <a:solidFill>
+                  <a:srgbClr val="9AA3AB"/>
+                </a:solidFill>
+              </a:rPr>
+              <a:t>Vampire Survivors (poncle, 2022). Screenshot © poncle.</a:t>
+            </a:r>
+          </a:p>
+        </p:txBody>
+      </p:sp>
+    </p:spTree>
+  </p:cSld>
+  <p:clrMapOvr>
+    <a:masterClrMapping/>
+  </p:clrMapOvr>
+</p:sld>
+</file>
+
+<file path=ppt/slides/slide20.xml><?xml version="1.0" encoding="utf-8"?>
 <p:sld xmlns:a="http://schemas.openxmlformats.org/drawingml/2006/main" xmlns:p="http://schemas.openxmlformats.org/presentationml/2006/main" xmlns:r="http://schemas.openxmlformats.org/officeDocument/2006/relationships">
   <p:cSld>
     <p:spTree>
@@ -13022,26 +13326,19 @@
 </p:sld>
 </file>
 
-<file path=ppt/slides/slide2.xml><?xml version="1.0" encoding="utf-8"?>
-<p:sld xmlns:a="http://schemas.openxmlformats.org/drawingml/2006/main" xmlns:r="http://schemas.openxmlformats.org/officeDocument/2006/relationships" xmlns:mc="http://schemas.openxmlformats.org/markup-compatibility/2006" xmlns:mv="urn:schemas-microsoft-com:mac:vml" xmlns:p="http://schemas.openxmlformats.org/presentationml/2006/main" xmlns:c="http://schemas.openxmlformats.org/drawingml/2006/chart" xmlns:dgm="http://schemas.openxmlformats.org/drawingml/2006/diagram" xmlns:o="urn:schemas-microsoft-com:office:office" xmlns:v="urn:schemas-microsoft-com:vml" xmlns:pvml="urn:schemas-microsoft-com:office:powerpoint" xmlns:com="http://schemas.openxmlformats.org/drawingml/2006/compatibility" xmlns:p14="http://schemas.microsoft.com/office/powerpoint/2010/main" xmlns:p15="http://schemas.microsoft.com/office/powerpoint/2012/main" xmlns:ahyp="http://schemas.microsoft.com/office/drawing/2018/hyperlinkcolor">
+<file path=ppt/slides/slide21.xml><?xml version="1.0" encoding="utf-8"?>
+<p:sld xmlns:a="http://schemas.openxmlformats.org/drawingml/2006/main" xmlns:p="http://schemas.openxmlformats.org/presentationml/2006/main" xmlns:r="http://schemas.openxmlformats.org/officeDocument/2006/relationships">
   <p:cSld>
     <p:spTree>
       <p:nvGrpSpPr>
-        <p:cNvPr id="44" name="Shape 44"/>
+        <p:cNvPr id="1" name=""/>
         <p:cNvGrpSpPr/>
         <p:nvPr/>
       </p:nvGrpSpPr>
-      <p:grpSpPr>
-        <a:xfrm>
-          <a:off x="0" y="0"/>
-          <a:ext cx="0" cy="0"/>
-          <a:chOff x="0" y="0"/>
-          <a:chExt cx="0" cy="0"/>
-        </a:xfrm>
-      </p:grpSpPr>
-      <p:sp>
-        <p:nvSpPr>
-          <p:cNvPr id="45" name="Google Shape;45;p10"/>
+      <p:grpSpPr/>
+      <p:sp>
+        <p:nvSpPr>
+          <p:cNvPr id="128" name="Google Shape;128;p21"/>
           <p:cNvSpPr txBox="1"/>
           <p:nvPr>
             <p:ph type="title"/>
@@ -13072,88 +13369,6 @@
               <a:buNone/>
             </a:pPr>
             <a:r>
-              <a:rPr lang="en"/>
-              <a:t>Today’s Goal</a:t>
-            </a:r>
-            <a:endParaRPr/>
-          </a:p>
-        </p:txBody>
-      </p:sp>
-      <p:pic>
-        <p:nvPicPr>
-          <p:cNvPr id="46" name="Picture 46" descr="vs-play.png"/>
-          <p:cNvPicPr>
-            <a:picLocks noChangeAspect="1"/>
-          </p:cNvPicPr>
-          <p:nvPr/>
-        </p:nvPicPr>
-        <p:blipFill>
-          <a:blip r:embed="rId4"/>
-          <a:stretch>
-            <a:fillRect/>
-          </a:stretch>
-        </p:blipFill>
-        <p:spPr>
-          <a:xfrm>
-            <a:off x="1677201" y="1531275"/>
-            <a:ext cx="5789598" cy="3256648"/>
-          </a:xfrm>
-          <a:prstGeom prst="rect">
-            <a:avLst/>
-          </a:prstGeom>
-        </p:spPr>
-      </p:pic>
-    </p:spTree>
-  </p:cSld>
-  <p:clrMapOvr>
-    <a:masterClrMapping/>
-  </p:clrMapOvr>
-</p:sld>
-</file>
-
-<file path=ppt/slides/slide20.xml><?xml version="1.0" encoding="utf-8"?>
-<p:sld xmlns:a="http://schemas.openxmlformats.org/drawingml/2006/main" xmlns:p="http://schemas.openxmlformats.org/presentationml/2006/main" xmlns:r="http://schemas.openxmlformats.org/officeDocument/2006/relationships">
-  <p:cSld>
-    <p:spTree>
-      <p:nvGrpSpPr>
-        <p:cNvPr id="1" name=""/>
-        <p:cNvGrpSpPr/>
-        <p:nvPr/>
-      </p:nvGrpSpPr>
-      <p:grpSpPr/>
-      <p:sp>
-        <p:nvSpPr>
-          <p:cNvPr id="128" name="Google Shape;128;p21"/>
-          <p:cNvSpPr txBox="1"/>
-          <p:nvPr>
-            <p:ph type="title"/>
-          </p:nvPr>
-        </p:nvSpPr>
-        <p:spPr>
-          <a:xfrm>
-            <a:off x="311700" y="195615"/>
-            <a:ext cx="8520600" cy="572700"/>
-          </a:xfrm>
-          <a:prstGeom prst="rect">
-            <a:avLst/>
-          </a:prstGeom>
-        </p:spPr>
-        <p:txBody>
-          <a:bodyPr anchorCtr="0" anchor="t" bIns="91425" lIns="91425" spcFirstLastPara="1" rIns="91425" wrap="square" tIns="91425">
-            <a:normAutofit fontScale="90000"/>
-          </a:bodyPr>
-          <a:lstStyle/>
-          <a:p>
-            <a:pPr indent="0" lvl="0" marL="0" rtl="0" algn="l">
-              <a:spcBef>
-                <a:spcPts val="0"/>
-              </a:spcBef>
-              <a:spcAft>
-                <a:spcPts val="0"/>
-              </a:spcAft>
-              <a:buNone/>
-            </a:pPr>
-            <a:r>
               <a:rPr lang="en">
                 <a:solidFill>
                   <a:schemeClr val="accent5"/>
@@ -13238,7 +13453,7 @@
 </p:sld>
 </file>
 
-<file path=ppt/slides/slide21.xml><?xml version="1.0" encoding="utf-8"?>
+<file path=ppt/slides/slide22.xml><?xml version="1.0" encoding="utf-8"?>
 <p:sld xmlns:a="http://schemas.openxmlformats.org/drawingml/2006/main" xmlns:p="http://schemas.openxmlformats.org/presentationml/2006/main" xmlns:r="http://schemas.openxmlformats.org/officeDocument/2006/relationships">
   <p:cSld>
     <p:spTree>
@@ -13672,7 +13887,7 @@
 </p:sld>
 </file>
 
-<file path=ppt/slides/slide22.xml><?xml version="1.0" encoding="utf-8"?>
+<file path=ppt/slides/slide23.xml><?xml version="1.0" encoding="utf-8"?>
 <p:sld xmlns:a="http://schemas.openxmlformats.org/drawingml/2006/main" xmlns:p="http://schemas.openxmlformats.org/presentationml/2006/main" xmlns:r="http://schemas.openxmlformats.org/officeDocument/2006/relationships">
   <p:cSld>
     <p:spTree>
@@ -14195,7 +14410,7 @@
 </p:sld>
 </file>
 
-<file path=ppt/slides/slide23.xml><?xml version="1.0" encoding="utf-8"?>
+<file path=ppt/slides/slide24.xml><?xml version="1.0" encoding="utf-8"?>
 <p:sld xmlns:a="http://schemas.openxmlformats.org/drawingml/2006/main" xmlns:r="http://schemas.openxmlformats.org/officeDocument/2006/relationships" xmlns:mc="http://schemas.openxmlformats.org/markup-compatibility/2006" xmlns:mv="urn:schemas-microsoft-com:mac:vml" xmlns:p="http://schemas.openxmlformats.org/presentationml/2006/main" xmlns:c="http://schemas.openxmlformats.org/drawingml/2006/chart" xmlns:dgm="http://schemas.openxmlformats.org/drawingml/2006/diagram" xmlns:o="urn:schemas-microsoft-com:office:office" xmlns:v="urn:schemas-microsoft-com:vml" xmlns:pvml="urn:schemas-microsoft-com:office:powerpoint" xmlns:com="http://schemas.openxmlformats.org/drawingml/2006/compatibility" xmlns:p14="http://schemas.microsoft.com/office/powerpoint/2010/main" xmlns:p15="http://schemas.microsoft.com/office/powerpoint/2012/main" xmlns:ahyp="http://schemas.microsoft.com/office/drawing/2018/hyperlinkcolor">
   <p:cSld>
     <p:spTree>
@@ -14326,872 +14541,6 @@
   <p:clrMapOvr>
     <a:masterClrMapping/>
   </p:clrMapOvr>
-</p:sld>
-</file>
-
-<file path=ppt/slides/slide24.xml><?xml version="1.0" encoding="utf-8"?>
-<p:sld xmlns:a="http://schemas.openxmlformats.org/drawingml/2006/main" xmlns:r="http://schemas.openxmlformats.org/officeDocument/2006/relationships" xmlns:mc="http://schemas.openxmlformats.org/markup-compatibility/2006" xmlns:mv="urn:schemas-microsoft-com:mac:vml" xmlns:p="http://schemas.openxmlformats.org/presentationml/2006/main" xmlns:c="http://schemas.openxmlformats.org/drawingml/2006/chart" xmlns:dgm="http://schemas.openxmlformats.org/drawingml/2006/diagram" xmlns:o="urn:schemas-microsoft-com:office:office" xmlns:v="urn:schemas-microsoft-com:vml" xmlns:pvml="urn:schemas-microsoft-com:office:powerpoint" xmlns:com="http://schemas.openxmlformats.org/drawingml/2006/compatibility" xmlns:p14="http://schemas.microsoft.com/office/powerpoint/2010/main" xmlns:p15="http://schemas.microsoft.com/office/powerpoint/2012/main" xmlns:ahyp="http://schemas.microsoft.com/office/drawing/2018/hyperlinkcolor">
-  <p:cSld>
-    <p:spTree>
-      <p:nvGrpSpPr>
-        <p:cNvPr id="292" name="Shape 292"/>
-        <p:cNvGrpSpPr/>
-        <p:nvPr/>
-      </p:nvGrpSpPr>
-      <p:grpSpPr>
-        <a:xfrm>
-          <a:off x="0" y="0"/>
-          <a:ext cx="0" cy="0"/>
-          <a:chOff x="0" y="0"/>
-          <a:chExt cx="0" cy="0"/>
-        </a:xfrm>
-      </p:grpSpPr>
-      <p:sp>
-        <p:nvSpPr>
-          <p:cNvPr id="293" name="Google Shape;293;p45"/>
-          <p:cNvSpPr txBox="1"/>
-          <p:nvPr>
-            <p:ph type="title"/>
-          </p:nvPr>
-        </p:nvSpPr>
-        <p:spPr>
-          <a:xfrm>
-            <a:off x="311700" y="195615"/>
-            <a:ext cx="8520600" cy="572700"/>
-          </a:xfrm>
-          <a:prstGeom prst="rect">
-            <a:avLst/>
-          </a:prstGeom>
-        </p:spPr>
-        <p:txBody>
-          <a:bodyPr anchorCtr="0" anchor="t" bIns="91425" lIns="91425" spcFirstLastPara="1" rIns="91425" wrap="square" tIns="91425">
-            <a:normAutofit fontScale="90000"/>
-          </a:bodyPr>
-          <a:lstStyle/>
-          <a:p>
-            <a:pPr indent="0" lvl="0" marL="0" rtl="0" algn="l">
-              <a:spcBef>
-                <a:spcPts val="0"/>
-              </a:spcBef>
-              <a:spcAft>
-                <a:spcPts val="0"/>
-              </a:spcAft>
-              <a:buNone/>
-            </a:pPr>
-            <a:r>
-              <a:rPr lang="en">
-                <a:solidFill>
-                  <a:schemeClr val="accent5"/>
-                </a:solidFill>
-              </a:rPr>
-              <a:t>Exercises</a:t>
-            </a:r>
-            <a:endParaRPr>
-              <a:solidFill>
-                <a:schemeClr val="accent5"/>
-              </a:solidFill>
-            </a:endParaRPr>
-          </a:p>
-        </p:txBody>
-      </p:sp>
-      <p:sp>
-        <p:nvSpPr>
-          <p:cNvPr id="294" name="Google Shape;294;p45"/>
-          <p:cNvSpPr txBox="1"/>
-          <p:nvPr>
-            <p:ph idx="1" type="body"/>
-          </p:nvPr>
-        </p:nvSpPr>
-        <p:spPr>
-          <a:xfrm>
-            <a:off x="311700" y="885950"/>
-            <a:ext cx="8520600" cy="4023300"/>
-          </a:xfrm>
-          <a:prstGeom prst="rect">
-            <a:avLst/>
-          </a:prstGeom>
-        </p:spPr>
-        <p:txBody>
-          <a:bodyPr anchorCtr="0" anchor="t" bIns="91425" lIns="91425" spcFirstLastPara="1" rIns="91425" wrap="square" tIns="91425">
-            <a:normAutofit/>
-          </a:bodyPr>
-          <a:lstStyle/>
-          <a:p>
-            <a:pPr indent="-330200" lvl="0" marL="457200" rtl="0" algn="l">
-              <a:spcBef>
-                <a:spcPts val="0"/>
-              </a:spcBef>
-              <a:spcAft>
-                <a:spcPts val="0"/>
-              </a:spcAft>
-              <a:buSzPts val="1600"/>
-              <a:buChar char="●"/>
-            </a:pPr>
-            <a:r>
-              <a:rPr lang="en"/>
-              <a:t>Start from Survivors3 or Survivors4, in Release</a:t>
-            </a:r>
-            <a:endParaRPr/>
-          </a:p>
-          <a:p>
-            <a:pPr indent="-330200" lvl="0" marL="457200" rtl="0" algn="l">
-              <a:spcBef>
-                <a:spcPts val="0"/>
-              </a:spcBef>
-              <a:spcAft>
-                <a:spcPts val="0"/>
-              </a:spcAft>
-              <a:buSzPts val="1600"/>
-              <a:buChar char="●"/>
-            </a:pPr>
-            <a:r>
-              <a:rPr lang="en"/>
-              <a:t>Tune the grid: cells half and twice as big. Measure</a:t>
-            </a:r>
-            <a:endParaRPr/>
-          </a:p>
-          <a:p>
-            <a:pPr indent="-317500" lvl="1" marL="914400" rtl="0" algn="l">
-              <a:spcBef>
-                <a:spcPts val="0"/>
-              </a:spcBef>
-              <a:spcAft>
-                <a:spcPts val="0"/>
-              </a:spcAft>
-              <a:buSzPts val="1400"/>
-              <a:buChar char="○"/>
-            </a:pPr>
-            <a:r>
-              <a:rPr lang="en"/>
-              <a:t>Why can’t cells be smaller than the biggest overlap?</a:t>
-            </a:r>
-            <a:endParaRPr/>
-          </a:p>
-          <a:p>
-            <a:pPr indent="-330200" lvl="0" marL="457200" rtl="0" algn="l">
-              <a:spcBef>
-                <a:spcPts val="0"/>
-              </a:spcBef>
-              <a:spcAft>
-                <a:spcPts val="0"/>
-              </a:spcAft>
-              <a:buSzPts val="1600"/>
-              <a:buChar char="●"/>
-            </a:pPr>
-            <a:r>
-              <a:rPr lang="en"/>
-              <a:t>Bolts as arrays: was it worth it?</a:t>
-            </a:r>
-            <a:endParaRPr/>
-          </a:p>
-          <a:p>
-            <a:pPr indent="-330200" lvl="0" marL="457200" rtl="0" algn="l">
-              <a:spcBef>
-                <a:spcPts val="0"/>
-              </a:spcBef>
-              <a:spcAft>
-                <a:spcPts val="0"/>
-              </a:spcAft>
-              <a:buSzPts val="1600"/>
-              <a:buChar char="●"/>
-            </a:pPr>
-            <a:r>
-              <a:rPr lang="en"/>
-              <a:t>With 20,000 enemies: what’s the next bottleneck?</a:t>
-            </a:r>
-            <a:endParaRPr/>
-          </a:p>
-          <a:p>
-            <a:pPr indent="-330200" lvl="0" marL="457200" rtl="0" algn="l">
-              <a:spcBef>
-                <a:spcPts val="0"/>
-              </a:spcBef>
-              <a:spcAft>
-                <a:spcPts val="0"/>
-              </a:spcAft>
-              <a:buSzPts val="1600"/>
-              <a:buChar char="●"/>
-            </a:pPr>
-            <a:r>
-              <a:rPr lang="en"/>
-              <a:t>A new enemy kind: what changes?</a:t>
-            </a:r>
-            <a:endParaRPr/>
-          </a:p>
-        </p:txBody>
-      </p:sp>
-    </p:spTree>
-  </p:cSld>
-  <p:clrMapOvr>
-    <a:masterClrMapping/>
-  </p:clrMapOvr>
-  <p:timing>
-    <p:tnLst>
-      <p:par>
-        <p:cTn dur="indefinite" nodeType="tmRoot" restart="never">
-          <p:childTnLst>
-            <p:seq concurrent="1" nextAc="seek">
-              <p:cTn dur="indefinite" id="2" nodeType="mainSeq">
-                <p:childTnLst>
-                  <p:par>
-                    <p:cTn fill="hold">
-                      <p:stCondLst>
-                        <p:cond delay="indefinite"/>
-                      </p:stCondLst>
-                      <p:childTnLst>
-                        <p:par>
-                          <p:cTn fill="hold">
-                            <p:stCondLst>
-                              <p:cond delay="0"/>
-                            </p:stCondLst>
-                            <p:childTnLst>
-                              <p:par>
-                                <p:cTn fill="hold" nodeType="clickEffect" presetClass="entr" presetID="1" presetSubtype="0">
-                                  <p:stCondLst>
-                                    <p:cond delay="0"/>
-                                  </p:stCondLst>
-                                  <p:childTnLst>
-                                    <p:set>
-                                      <p:cBhvr>
-                                        <p:cTn dur="1" fill="hold">
-                                          <p:stCondLst>
-                                            <p:cond delay="0"/>
-                                          </p:stCondLst>
-                                        </p:cTn>
-                                        <p:tgtEl>
-                                          <p:spTgt spid="294">
-                                            <p:txEl>
-                                              <p:pRg end="0" st="0"/>
-                                            </p:txEl>
-                                          </p:spTgt>
-                                        </p:tgtEl>
-                                        <p:attrNameLst>
-                                          <p:attrName>style.visibility</p:attrName>
-                                        </p:attrNameLst>
-                                      </p:cBhvr>
-                                      <p:to>
-                                        <p:strVal val="visible"/>
-                                      </p:to>
-                                    </p:set>
-                                  </p:childTnLst>
-                                </p:cTn>
-                              </p:par>
-                            </p:childTnLst>
-                          </p:cTn>
-                        </p:par>
-                      </p:childTnLst>
-                    </p:cTn>
-                  </p:par>
-                  <p:par>
-                    <p:cTn fill="hold">
-                      <p:stCondLst>
-                        <p:cond delay="indefinite"/>
-                      </p:stCondLst>
-                      <p:childTnLst>
-                        <p:par>
-                          <p:cTn fill="hold">
-                            <p:stCondLst>
-                              <p:cond delay="0"/>
-                            </p:stCondLst>
-                            <p:childTnLst>
-                              <p:par>
-                                <p:cTn fill="hold" nodeType="clickEffect" presetClass="entr" presetID="1" presetSubtype="0">
-                                  <p:stCondLst>
-                                    <p:cond delay="0"/>
-                                  </p:stCondLst>
-                                  <p:childTnLst>
-                                    <p:set>
-                                      <p:cBhvr>
-                                        <p:cTn dur="1" fill="hold">
-                                          <p:stCondLst>
-                                            <p:cond delay="0"/>
-                                          </p:stCondLst>
-                                        </p:cTn>
-                                        <p:tgtEl>
-                                          <p:spTgt spid="294">
-                                            <p:txEl>
-                                              <p:pRg end="1" st="1"/>
-                                            </p:txEl>
-                                          </p:spTgt>
-                                        </p:tgtEl>
-                                        <p:attrNameLst>
-                                          <p:attrName>style.visibility</p:attrName>
-                                        </p:attrNameLst>
-                                      </p:cBhvr>
-                                      <p:to>
-                                        <p:strVal val="visible"/>
-                                      </p:to>
-                                    </p:set>
-                                  </p:childTnLst>
-                                </p:cTn>
-                              </p:par>
-                            </p:childTnLst>
-                          </p:cTn>
-                        </p:par>
-                      </p:childTnLst>
-                    </p:cTn>
-                  </p:par>
-                  <p:par>
-                    <p:cTn fill="hold">
-                      <p:stCondLst>
-                        <p:cond delay="indefinite"/>
-                      </p:stCondLst>
-                      <p:childTnLst>
-                        <p:par>
-                          <p:cTn fill="hold">
-                            <p:stCondLst>
-                              <p:cond delay="0"/>
-                            </p:stCondLst>
-                            <p:childTnLst>
-                              <p:par>
-                                <p:cTn fill="hold" nodeType="clickEffect" presetClass="entr" presetID="1" presetSubtype="0">
-                                  <p:stCondLst>
-                                    <p:cond delay="0"/>
-                                  </p:stCondLst>
-                                  <p:childTnLst>
-                                    <p:set>
-                                      <p:cBhvr>
-                                        <p:cTn dur="1" fill="hold">
-                                          <p:stCondLst>
-                                            <p:cond delay="0"/>
-                                          </p:stCondLst>
-                                        </p:cTn>
-                                        <p:tgtEl>
-                                          <p:spTgt spid="294">
-                                            <p:txEl>
-                                              <p:pRg end="2" st="2"/>
-                                            </p:txEl>
-                                          </p:spTgt>
-                                        </p:tgtEl>
-                                        <p:attrNameLst>
-                                          <p:attrName>style.visibility</p:attrName>
-                                        </p:attrNameLst>
-                                      </p:cBhvr>
-                                      <p:to>
-                                        <p:strVal val="visible"/>
-                                      </p:to>
-                                    </p:set>
-                                  </p:childTnLst>
-                                </p:cTn>
-                              </p:par>
-                            </p:childTnLst>
-                          </p:cTn>
-                        </p:par>
-                      </p:childTnLst>
-                    </p:cTn>
-                  </p:par>
-                  <p:par>
-                    <p:cTn fill="hold">
-                      <p:stCondLst>
-                        <p:cond delay="indefinite"/>
-                      </p:stCondLst>
-                      <p:childTnLst>
-                        <p:par>
-                          <p:cTn fill="hold">
-                            <p:stCondLst>
-                              <p:cond delay="0"/>
-                            </p:stCondLst>
-                            <p:childTnLst>
-                              <p:par>
-                                <p:cTn fill="hold" nodeType="clickEffect" presetClass="entr" presetID="1" presetSubtype="0">
-                                  <p:stCondLst>
-                                    <p:cond delay="0"/>
-                                  </p:stCondLst>
-                                  <p:childTnLst>
-                                    <p:set>
-                                      <p:cBhvr>
-                                        <p:cTn dur="1" fill="hold">
-                                          <p:stCondLst>
-                                            <p:cond delay="0"/>
-                                          </p:stCondLst>
-                                        </p:cTn>
-                                        <p:tgtEl>
-                                          <p:spTgt spid="294">
-                                            <p:txEl>
-                                              <p:pRg end="3" st="3"/>
-                                            </p:txEl>
-                                          </p:spTgt>
-                                        </p:tgtEl>
-                                        <p:attrNameLst>
-                                          <p:attrName>style.visibility</p:attrName>
-                                        </p:attrNameLst>
-                                      </p:cBhvr>
-                                      <p:to>
-                                        <p:strVal val="visible"/>
-                                      </p:to>
-                                    </p:set>
-                                  </p:childTnLst>
-                                </p:cTn>
-                              </p:par>
-                            </p:childTnLst>
-                          </p:cTn>
-                        </p:par>
-                      </p:childTnLst>
-                    </p:cTn>
-                  </p:par>
-                  <p:par>
-                    <p:cTn fill="hold">
-                      <p:stCondLst>
-                        <p:cond delay="indefinite"/>
-                      </p:stCondLst>
-                      <p:childTnLst>
-                        <p:par>
-                          <p:cTn fill="hold">
-                            <p:stCondLst>
-                              <p:cond delay="0"/>
-                            </p:stCondLst>
-                            <p:childTnLst>
-                              <p:par>
-                                <p:cTn fill="hold" nodeType="clickEffect" presetClass="entr" presetID="1" presetSubtype="0">
-                                  <p:stCondLst>
-                                    <p:cond delay="0"/>
-                                  </p:stCondLst>
-                                  <p:childTnLst>
-                                    <p:set>
-                                      <p:cBhvr>
-                                        <p:cTn dur="1" fill="hold">
-                                          <p:stCondLst>
-                                            <p:cond delay="0"/>
-                                          </p:stCondLst>
-                                        </p:cTn>
-                                        <p:tgtEl>
-                                          <p:spTgt spid="294">
-                                            <p:txEl>
-                                              <p:pRg end="4" st="4"/>
-                                            </p:txEl>
-                                          </p:spTgt>
-                                        </p:tgtEl>
-                                        <p:attrNameLst>
-                                          <p:attrName>style.visibility</p:attrName>
-                                        </p:attrNameLst>
-                                      </p:cBhvr>
-                                      <p:to>
-                                        <p:strVal val="visible"/>
-                                      </p:to>
-                                    </p:set>
-                                  </p:childTnLst>
-                                </p:cTn>
-                              </p:par>
-                            </p:childTnLst>
-                          </p:cTn>
-                        </p:par>
-                      </p:childTnLst>
-                    </p:cTn>
-                  </p:par>
-                  <p:par>
-                    <p:cTn fill="hold">
-                      <p:stCondLst>
-                        <p:cond delay="indefinite"/>
-                      </p:stCondLst>
-                      <p:childTnLst>
-                        <p:par>
-                          <p:cTn fill="hold">
-                            <p:stCondLst>
-                              <p:cond delay="0"/>
-                            </p:stCondLst>
-                            <p:childTnLst>
-                              <p:par>
-                                <p:cTn fill="hold" nodeType="clickEffect" presetClass="entr" presetID="1" presetSubtype="0">
-                                  <p:stCondLst>
-                                    <p:cond delay="0"/>
-                                  </p:stCondLst>
-                                  <p:childTnLst>
-                                    <p:set>
-                                      <p:cBhvr>
-                                        <p:cTn dur="1" fill="hold">
-                                          <p:stCondLst>
-                                            <p:cond delay="0"/>
-                                          </p:stCondLst>
-                                        </p:cTn>
-                                        <p:tgtEl>
-                                          <p:spTgt spid="294">
-                                            <p:txEl>
-                                              <p:pRg end="5" st="5"/>
-                                            </p:txEl>
-                                          </p:spTgt>
-                                        </p:tgtEl>
-                                        <p:attrNameLst>
-                                          <p:attrName>style.visibility</p:attrName>
-                                        </p:attrNameLst>
-                                      </p:cBhvr>
-                                      <p:to>
-                                        <p:strVal val="visible"/>
-                                      </p:to>
-                                    </p:set>
-                                  </p:childTnLst>
-                                </p:cTn>
-                              </p:par>
-                            </p:childTnLst>
-                          </p:cTn>
-                        </p:par>
-                      </p:childTnLst>
-                    </p:cTn>
-                  </p:par>
-                  <p:par>
-                    <p:cTn fill="hold">
-                      <p:stCondLst>
-                        <p:cond delay="indefinite"/>
-                      </p:stCondLst>
-                      <p:childTnLst>
-                        <p:par>
-                          <p:cTn fill="hold">
-                            <p:stCondLst>
-                              <p:cond delay="0"/>
-                            </p:stCondLst>
-                            <p:childTnLst>
-                              <p:par>
-                                <p:cTn fill="hold" nodeType="clickEffect" presetClass="entr" presetID="1" presetSubtype="0">
-                                  <p:stCondLst>
-                                    <p:cond delay="0"/>
-                                  </p:stCondLst>
-                                  <p:childTnLst>
-                                    <p:set>
-                                      <p:cBhvr>
-                                        <p:cTn dur="1" fill="hold">
-                                          <p:stCondLst>
-                                            <p:cond delay="0"/>
-                                          </p:stCondLst>
-                                        </p:cTn>
-                                        <p:tgtEl>
-                                          <p:spTgt spid="294">
-                                            <p:txEl>
-                                              <p:pRg end="6" st="6"/>
-                                            </p:txEl>
-                                          </p:spTgt>
-                                        </p:tgtEl>
-                                        <p:attrNameLst>
-                                          <p:attrName>style.visibility</p:attrName>
-                                        </p:attrNameLst>
-                                      </p:cBhvr>
-                                      <p:to>
-                                        <p:strVal val="visible"/>
-                                      </p:to>
-                                    </p:set>
-                                  </p:childTnLst>
-                                </p:cTn>
-                              </p:par>
-                            </p:childTnLst>
-                          </p:cTn>
-                        </p:par>
-                      </p:childTnLst>
-                    </p:cTn>
-                  </p:par>
-                  <p:par>
-                    <p:cTn fill="hold">
-                      <p:stCondLst>
-                        <p:cond delay="indefinite"/>
-                      </p:stCondLst>
-                      <p:childTnLst>
-                        <p:par>
-                          <p:cTn fill="hold">
-                            <p:stCondLst>
-                              <p:cond delay="0"/>
-                            </p:stCondLst>
-                            <p:childTnLst>
-                              <p:par>
-                                <p:cTn fill="hold" nodeType="clickEffect" presetClass="entr" presetID="1" presetSubtype="0">
-                                  <p:stCondLst>
-                                    <p:cond delay="0"/>
-                                  </p:stCondLst>
-                                  <p:childTnLst>
-                                    <p:set>
-                                      <p:cBhvr>
-                                        <p:cTn dur="1" fill="hold">
-                                          <p:stCondLst>
-                                            <p:cond delay="0"/>
-                                          </p:stCondLst>
-                                        </p:cTn>
-                                        <p:tgtEl>
-                                          <p:spTgt spid="294">
-                                            <p:txEl>
-                                              <p:pRg end="7" st="7"/>
-                                            </p:txEl>
-                                          </p:spTgt>
-                                        </p:tgtEl>
-                                        <p:attrNameLst>
-                                          <p:attrName>style.visibility</p:attrName>
-                                        </p:attrNameLst>
-                                      </p:cBhvr>
-                                      <p:to>
-                                        <p:strVal val="visible"/>
-                                      </p:to>
-                                    </p:set>
-                                  </p:childTnLst>
-                                </p:cTn>
-                              </p:par>
-                            </p:childTnLst>
-                          </p:cTn>
-                        </p:par>
-                      </p:childTnLst>
-                    </p:cTn>
-                  </p:par>
-                  <p:par>
-                    <p:cTn fill="hold">
-                      <p:stCondLst>
-                        <p:cond delay="indefinite"/>
-                      </p:stCondLst>
-                      <p:childTnLst>
-                        <p:par>
-                          <p:cTn fill="hold">
-                            <p:stCondLst>
-                              <p:cond delay="0"/>
-                            </p:stCondLst>
-                            <p:childTnLst>
-                              <p:par>
-                                <p:cTn fill="hold" nodeType="clickEffect" presetClass="entr" presetID="1" presetSubtype="0">
-                                  <p:stCondLst>
-                                    <p:cond delay="0"/>
-                                  </p:stCondLst>
-                                  <p:childTnLst>
-                                    <p:set>
-                                      <p:cBhvr>
-                                        <p:cTn dur="1" fill="hold">
-                                          <p:stCondLst>
-                                            <p:cond delay="0"/>
-                                          </p:stCondLst>
-                                        </p:cTn>
-                                        <p:tgtEl>
-                                          <p:spTgt spid="294">
-                                            <p:txEl>
-                                              <p:pRg end="8" st="8"/>
-                                            </p:txEl>
-                                          </p:spTgt>
-                                        </p:tgtEl>
-                                        <p:attrNameLst>
-                                          <p:attrName>style.visibility</p:attrName>
-                                        </p:attrNameLst>
-                                      </p:cBhvr>
-                                      <p:to>
-                                        <p:strVal val="visible"/>
-                                      </p:to>
-                                    </p:set>
-                                  </p:childTnLst>
-                                </p:cTn>
-                              </p:par>
-                            </p:childTnLst>
-                          </p:cTn>
-                        </p:par>
-                      </p:childTnLst>
-                    </p:cTn>
-                  </p:par>
-                  <p:par>
-                    <p:cTn fill="hold">
-                      <p:stCondLst>
-                        <p:cond delay="indefinite"/>
-                      </p:stCondLst>
-                      <p:childTnLst>
-                        <p:par>
-                          <p:cTn fill="hold">
-                            <p:stCondLst>
-                              <p:cond delay="0"/>
-                            </p:stCondLst>
-                            <p:childTnLst>
-                              <p:par>
-                                <p:cTn fill="hold" nodeType="clickEffect" presetClass="entr" presetID="1" presetSubtype="0">
-                                  <p:stCondLst>
-                                    <p:cond delay="0"/>
-                                  </p:stCondLst>
-                                  <p:childTnLst>
-                                    <p:set>
-                                      <p:cBhvr>
-                                        <p:cTn dur="1" fill="hold">
-                                          <p:stCondLst>
-                                            <p:cond delay="0"/>
-                                          </p:stCondLst>
-                                        </p:cTn>
-                                        <p:tgtEl>
-                                          <p:spTgt spid="294">
-                                            <p:txEl>
-                                              <p:pRg end="9" st="9"/>
-                                            </p:txEl>
-                                          </p:spTgt>
-                                        </p:tgtEl>
-                                        <p:attrNameLst>
-                                          <p:attrName>style.visibility</p:attrName>
-                                        </p:attrNameLst>
-                                      </p:cBhvr>
-                                      <p:to>
-                                        <p:strVal val="visible"/>
-                                      </p:to>
-                                    </p:set>
-                                  </p:childTnLst>
-                                </p:cTn>
-                              </p:par>
-                            </p:childTnLst>
-                          </p:cTn>
-                        </p:par>
-                      </p:childTnLst>
-                    </p:cTn>
-                  </p:par>
-                  <p:par>
-                    <p:cTn fill="hold">
-                      <p:stCondLst>
-                        <p:cond delay="indefinite"/>
-                      </p:stCondLst>
-                      <p:childTnLst>
-                        <p:par>
-                          <p:cTn fill="hold">
-                            <p:stCondLst>
-                              <p:cond delay="0"/>
-                            </p:stCondLst>
-                            <p:childTnLst>
-                              <p:par>
-                                <p:cTn fill="hold" nodeType="clickEffect" presetClass="entr" presetID="1" presetSubtype="0">
-                                  <p:stCondLst>
-                                    <p:cond delay="0"/>
-                                  </p:stCondLst>
-                                  <p:childTnLst>
-                                    <p:set>
-                                      <p:cBhvr>
-                                        <p:cTn dur="1" fill="hold">
-                                          <p:stCondLst>
-                                            <p:cond delay="0"/>
-                                          </p:stCondLst>
-                                        </p:cTn>
-                                        <p:tgtEl>
-                                          <p:spTgt spid="294">
-                                            <p:txEl>
-                                              <p:pRg end="10" st="10"/>
-                                            </p:txEl>
-                                          </p:spTgt>
-                                        </p:tgtEl>
-                                        <p:attrNameLst>
-                                          <p:attrName>style.visibility</p:attrName>
-                                        </p:attrNameLst>
-                                      </p:cBhvr>
-                                      <p:to>
-                                        <p:strVal val="visible"/>
-                                      </p:to>
-                                    </p:set>
-                                  </p:childTnLst>
-                                </p:cTn>
-                              </p:par>
-                            </p:childTnLst>
-                          </p:cTn>
-                        </p:par>
-                      </p:childTnLst>
-                    </p:cTn>
-                  </p:par>
-                  <p:par>
-                    <p:cTn fill="hold">
-                      <p:stCondLst>
-                        <p:cond delay="indefinite"/>
-                      </p:stCondLst>
-                      <p:childTnLst>
-                        <p:par>
-                          <p:cTn fill="hold">
-                            <p:stCondLst>
-                              <p:cond delay="0"/>
-                            </p:stCondLst>
-                            <p:childTnLst>
-                              <p:par>
-                                <p:cTn fill="hold" nodeType="clickEffect" presetClass="entr" presetID="1" presetSubtype="0">
-                                  <p:stCondLst>
-                                    <p:cond delay="0"/>
-                                  </p:stCondLst>
-                                  <p:childTnLst>
-                                    <p:set>
-                                      <p:cBhvr>
-                                        <p:cTn dur="1" fill="hold">
-                                          <p:stCondLst>
-                                            <p:cond delay="0"/>
-                                          </p:stCondLst>
-                                        </p:cTn>
-                                        <p:tgtEl>
-                                          <p:spTgt spid="294">
-                                            <p:txEl>
-                                              <p:pRg end="11" st="11"/>
-                                            </p:txEl>
-                                          </p:spTgt>
-                                        </p:tgtEl>
-                                        <p:attrNameLst>
-                                          <p:attrName>style.visibility</p:attrName>
-                                        </p:attrNameLst>
-                                      </p:cBhvr>
-                                      <p:to>
-                                        <p:strVal val="visible"/>
-                                      </p:to>
-                                    </p:set>
-                                  </p:childTnLst>
-                                </p:cTn>
-                              </p:par>
-                            </p:childTnLst>
-                          </p:cTn>
-                        </p:par>
-                      </p:childTnLst>
-                    </p:cTn>
-                  </p:par>
-                  <p:par>
-                    <p:cTn fill="hold">
-                      <p:stCondLst>
-                        <p:cond delay="indefinite"/>
-                      </p:stCondLst>
-                      <p:childTnLst>
-                        <p:par>
-                          <p:cTn fill="hold">
-                            <p:stCondLst>
-                              <p:cond delay="0"/>
-                            </p:stCondLst>
-                            <p:childTnLst>
-                              <p:par>
-                                <p:cTn fill="hold" nodeType="clickEffect" presetClass="entr" presetID="1" presetSubtype="0">
-                                  <p:stCondLst>
-                                    <p:cond delay="0"/>
-                                  </p:stCondLst>
-                                  <p:childTnLst>
-                                    <p:set>
-                                      <p:cBhvr>
-                                        <p:cTn dur="1" fill="hold">
-                                          <p:stCondLst>
-                                            <p:cond delay="0"/>
-                                          </p:stCondLst>
-                                        </p:cTn>
-                                        <p:tgtEl>
-                                          <p:spTgt spid="294">
-                                            <p:txEl>
-                                              <p:pRg end="12" st="12"/>
-                                            </p:txEl>
-                                          </p:spTgt>
-                                        </p:tgtEl>
-                                        <p:attrNameLst>
-                                          <p:attrName>style.visibility</p:attrName>
-                                        </p:attrNameLst>
-                                      </p:cBhvr>
-                                      <p:to>
-                                        <p:strVal val="visible"/>
-                                      </p:to>
-                                    </p:set>
-                                  </p:childTnLst>
-                                </p:cTn>
-                              </p:par>
-                            </p:childTnLst>
-                          </p:cTn>
-                        </p:par>
-                      </p:childTnLst>
-                    </p:cTn>
-                  </p:par>
-                </p:childTnLst>
-              </p:cTn>
-              <p:prevCondLst>
-                <p:cond evt="onPrev">
-                  <p:tgtEl>
-                    <p:sldTgt/>
-                  </p:tgtEl>
-                </p:cond>
-              </p:prevCondLst>
-              <p:nextCondLst>
-                <p:cond evt="onNext">
-                  <p:tgtEl>
-                    <p:sldTgt/>
-                  </p:tgtEl>
-                </p:cond>
-              </p:nextCondLst>
-            </p:seq>
-          </p:childTnLst>
-        </p:cTn>
-      </p:par>
-    </p:tnLst>
-  </p:timing>
 </p:sld>
 </file>
 
@@ -15250,7 +14599,7 @@
                   <a:schemeClr val="accent5"/>
                 </a:solidFill>
               </a:rPr>
-              <a:t>Exercise: Stretch</a:t>
+              <a:t>Exercises</a:t>
             </a:r>
             <a:endParaRPr>
               <a:solidFill>
@@ -15295,7 +14644,7 @@
             </a:pPr>
             <a:r>
               <a:rPr lang="en"/>
-              <a:t>Separate on several cores: Parallel.For over rows of cells</a:t>
+              <a:t>Start from Survivors3 or Survivors4, in Release</a:t>
             </a:r>
             <a:endParaRPr/>
           </a:p>
@@ -15312,7 +14661,24 @@
             </a:pPr>
             <a:r>
               <a:rPr lang="en"/>
-              <a:t>What goes wrong when two threads push the same enemy?</a:t>
+              <a:t>Tune the grid: cells half and twice as big. Measure</a:t>
+            </a:r>
+            <a:endParaRPr/>
+          </a:p>
+          <a:p>
+            <a:pPr indent="-317500" lvl="1" marL="914400" rtl="0" algn="l">
+              <a:spcBef>
+                <a:spcPts val="0"/>
+              </a:spcBef>
+              <a:spcAft>
+                <a:spcPts val="0"/>
+              </a:spcAft>
+              <a:buSzPts val="1400"/>
+              <a:buChar char="○"/>
+            </a:pPr>
+            <a:r>
+              <a:rPr lang="en"/>
+              <a:t>Why can’t cells be smaller than the biggest overlap?</a:t>
             </a:r>
             <a:endParaRPr/>
           </a:p>
@@ -15329,7 +14695,41 @@
             </a:pPr>
             <a:r>
               <a:rPr lang="en"/>
-              <a:t>How could you avoid it?</a:t>
+              <a:t>Bolts as arrays: was it worth it?</a:t>
+            </a:r>
+            <a:endParaRPr/>
+          </a:p>
+          <a:p>
+            <a:pPr indent="-330200" lvl="0" marL="457200" rtl="0" algn="l">
+              <a:spcBef>
+                <a:spcPts val="0"/>
+              </a:spcBef>
+              <a:spcAft>
+                <a:spcPts val="0"/>
+              </a:spcAft>
+              <a:buSzPts val="1600"/>
+              <a:buChar char="●"/>
+            </a:pPr>
+            <a:r>
+              <a:rPr lang="en"/>
+              <a:t>With 20,000 enemies: what’s the next bottleneck?</a:t>
+            </a:r>
+            <a:endParaRPr/>
+          </a:p>
+          <a:p>
+            <a:pPr indent="-330200" lvl="0" marL="457200" rtl="0" algn="l">
+              <a:spcBef>
+                <a:spcPts val="0"/>
+              </a:spcBef>
+              <a:spcAft>
+                <a:spcPts val="0"/>
+              </a:spcAft>
+              <a:buSzPts val="1600"/>
+              <a:buChar char="●"/>
+            </a:pPr>
+            <a:r>
+              <a:rPr lang="en"/>
+              <a:t>A new enemy kind: what changes?</a:t>
             </a:r>
             <a:endParaRPr/>
           </a:p>
@@ -16011,179 +15411,6 @@
 </file>
 
 <file path=ppt/slides/slide26.xml><?xml version="1.0" encoding="utf-8"?>
-<p:sld xmlns:a="http://schemas.openxmlformats.org/drawingml/2006/main" xmlns:p="http://schemas.openxmlformats.org/presentationml/2006/main" xmlns:r="http://schemas.openxmlformats.org/officeDocument/2006/relationships">
-  <p:cSld>
-    <p:spTree>
-      <p:nvGrpSpPr>
-        <p:cNvPr id="1" name=""/>
-        <p:cNvGrpSpPr/>
-        <p:nvPr/>
-      </p:nvGrpSpPr>
-      <p:grpSpPr/>
-      <p:sp>
-        <p:nvSpPr>
-          <p:cNvPr id="2" name="Title 1"/>
-          <p:cNvSpPr>
-            <a:spLocks noGrp="1"/>
-          </p:cNvSpPr>
-          <p:nvPr>
-            <p:ph type="title"/>
-          </p:nvPr>
-        </p:nvSpPr>
-        <p:spPr/>
-        <p:txBody>
-          <a:bodyPr/>
-          <a:lstStyle/>
-          <a:p>
-            <a:pPr indent="0" lvl="0" marL="0" rtl="0" algn="l">
-              <a:spcBef>
-                <a:spcPts val="0"/>
-              </a:spcBef>
-              <a:spcAft>
-                <a:spcPts val="0"/>
-              </a:spcAft>
-              <a:buNone/>
-            </a:pPr>
-            <a:r>
-              <a:rPr lang="en"/>
-              <a:t>Check Yourself</a:t>
-            </a:r>
-            <a:endParaRPr/>
-          </a:p>
-        </p:txBody>
-      </p:sp>
-      <p:sp>
-        <p:nvSpPr>
-          <p:cNvPr id="3" name="Text Placeholder 2"/>
-          <p:cNvSpPr>
-            <a:spLocks noGrp="1"/>
-          </p:cNvSpPr>
-          <p:nvPr>
-            <p:ph type="body" idx="1"/>
-          </p:nvPr>
-        </p:nvSpPr>
-        <p:spPr>
-          <a:xfrm>
-            <a:off x="311700" y="885950"/>
-            <a:ext cx="8520600" cy="1719072"/>
-          </a:xfrm>
-        </p:spPr>
-        <p:txBody>
-          <a:bodyPr/>
-          <a:lstStyle/>
-          <a:p>
-            <a:pPr indent="-330200" lvl="0" marL="457200" rtl="0" algn="l">
-              <a:spcBef>
-                <a:spcPts val="0"/>
-              </a:spcBef>
-              <a:spcAft>
-                <a:spcPts val="0"/>
-              </a:spcAft>
-              <a:buSzPts val="1600"/>
-              <a:buChar char="●"/>
-            </a:pPr>
-            <a:r>
-              <a:rPr lang="en"/>
-              <a:t>Why profile before optimizing?</a:t>
-            </a:r>
-            <a:endParaRPr/>
-          </a:p>
-          <a:p>
-            <a:pPr indent="-330200" lvl="0" marL="457200" rtl="0" algn="l">
-              <a:spcBef>
-                <a:spcPts val="0"/>
-              </a:spcBef>
-              <a:spcAft>
-                <a:spcPts val="0"/>
-              </a:spcAft>
-              <a:buSzPts val="1600"/>
-              <a:buChar char="●"/>
-            </a:pPr>
-            <a:r>
-              <a:rPr lang="en"/>
-              <a:t>How does a uniform grid make separation cheaper?</a:t>
-            </a:r>
-            <a:endParaRPr/>
-          </a:p>
-          <a:p>
-            <a:pPr indent="-330200" lvl="0" marL="457200" rtl="0" algn="l">
-              <a:spcBef>
-                <a:spcPts val="0"/>
-              </a:spcBef>
-              <a:spcAft>
-                <a:spcPts val="0"/>
-              </a:spcAft>
-              <a:buSzPts val="1600"/>
-              <a:buChar char="●"/>
-            </a:pPr>
-            <a:r>
-              <a:rPr lang="en"/>
-              <a:t>What is the difference between an array of objects and a struct of arrays?</a:t>
-            </a:r>
-            <a:endParaRPr/>
-          </a:p>
-          <a:p>
-            <a:pPr indent="-330200" lvl="0" marL="457200" rtl="0" algn="l">
-              <a:spcBef>
-                <a:spcPts val="0"/>
-              </a:spcBef>
-              <a:spcAft>
-                <a:spcPts val="0"/>
-              </a:spcAft>
-              <a:buSzPts val="1600"/>
-              <a:buChar char="●"/>
-            </a:pPr>
-            <a:r>
-              <a:rPr lang="en"/>
-              <a:t>What do you give up with data-oriented design?</a:t>
-            </a:r>
-            <a:endParaRPr/>
-          </a:p>
-        </p:txBody>
-      </p:sp>
-      <p:sp>
-        <p:nvSpPr>
-          <p:cNvPr id="4" name="TextBox 3"/>
-          <p:cNvSpPr txBox="1"/>
-          <p:nvPr/>
-        </p:nvSpPr>
-        <p:spPr>
-          <a:xfrm>
-            <a:off x="457200" y="3182112"/>
-            <a:ext cx="8229600" cy="457200"/>
-          </a:xfrm>
-          <a:prstGeom prst="rect">
-            <a:avLst/>
-          </a:prstGeom>
-          <a:noFill/>
-        </p:spPr>
-        <p:txBody>
-          <a:bodyPr wrap="square">
-            <a:spAutoFit/>
-          </a:bodyPr>
-          <a:lstStyle/>
-          <a:p>
-            <a:pPr algn="ctr"/>
-            <a:r>
-              <a:rPr sz="1400" b="0" i="0">
-                <a:solidFill>
-                  <a:srgbClr val="9AA3AB"/>
-                </a:solidFill>
-              </a:rPr>
-              <a:t>The answers, and more questions, are on the course site.</a:t>
-            </a:r>
-          </a:p>
-        </p:txBody>
-      </p:sp>
-    </p:spTree>
-  </p:cSld>
-  <p:clrMapOvr>
-    <a:masterClrMapping/>
-  </p:clrMapOvr>
-</p:sld>
-</file>
-
-<file path=ppt/slides/slide27.xml><?xml version="1.0" encoding="utf-8"?>
 <p:sld xmlns:a="http://schemas.openxmlformats.org/drawingml/2006/main" xmlns:r="http://schemas.openxmlformats.org/officeDocument/2006/relationships" xmlns:mc="http://schemas.openxmlformats.org/markup-compatibility/2006" xmlns:mv="urn:schemas-microsoft-com:mac:vml" xmlns:p="http://schemas.openxmlformats.org/presentationml/2006/main" xmlns:c="http://schemas.openxmlformats.org/drawingml/2006/chart" xmlns:dgm="http://schemas.openxmlformats.org/drawingml/2006/diagram" xmlns:o="urn:schemas-microsoft-com:office:office" xmlns:v="urn:schemas-microsoft-com:vml" xmlns:pvml="urn:schemas-microsoft-com:office:powerpoint" xmlns:com="http://schemas.openxmlformats.org/drawingml/2006/compatibility" xmlns:p14="http://schemas.microsoft.com/office/powerpoint/2010/main" xmlns:p15="http://schemas.microsoft.com/office/powerpoint/2012/main" xmlns:ahyp="http://schemas.microsoft.com/office/drawing/2018/hyperlinkcolor">
   <p:cSld>
     <p:spTree>
@@ -16238,7 +15465,7 @@
                   <a:schemeClr val="accent5"/>
                 </a:solidFill>
               </a:rPr>
-              <a:t>Apply It to Your Project</a:t>
+              <a:t>Exercise: Stretch</a:t>
             </a:r>
             <a:endParaRPr>
               <a:solidFill>
@@ -16283,7 +15510,7 @@
             </a:pPr>
             <a:r>
               <a:rPr lang="en"/>
-              <a:t>Profile your game with many more entities. Where does the time go?</a:t>
+              <a:t>Separate on several cores: Parallel.For over rows of cells</a:t>
             </a:r>
             <a:endParaRPr/>
           </a:p>
@@ -16300,7 +15527,7 @@
             </a:pPr>
             <a:r>
               <a:rPr lang="en"/>
-              <a:t>Does anything check every pair, or search every entity?</a:t>
+              <a:t>What goes wrong when two threads push the same enemy?</a:t>
             </a:r>
             <a:endParaRPr/>
           </a:p>
@@ -16317,24 +15544,7 @@
             </a:pPr>
             <a:r>
               <a:rPr lang="en"/>
-              <a:t>Does your game allocate every frame? Where?</a:t>
-            </a:r>
-            <a:endParaRPr/>
-          </a:p>
-          <a:p>
-            <a:pPr indent="-330200" lvl="0" marL="457200" rtl="0" algn="l">
-              <a:spcBef>
-                <a:spcPts val="0"/>
-              </a:spcBef>
-              <a:spcAft>
-                <a:spcPts val="0"/>
-              </a:spcAft>
-              <a:buSzPts val="1600"/>
-              <a:buChar char="●"/>
-            </a:pPr>
-            <a:r>
-              <a:rPr lang="en"/>
-              <a:t>Is there anything there are thousands of?</a:t>
+              <a:t>How could you avoid it?</a:t>
             </a:r>
             <a:endParaRPr/>
           </a:p>
@@ -17015,7 +16225,1012 @@
 </p:sld>
 </file>
 
+<file path=ppt/slides/slide27.xml><?xml version="1.0" encoding="utf-8"?>
+<p:sld xmlns:a="http://schemas.openxmlformats.org/drawingml/2006/main" xmlns:p="http://schemas.openxmlformats.org/presentationml/2006/main" xmlns:r="http://schemas.openxmlformats.org/officeDocument/2006/relationships">
+  <p:cSld>
+    <p:spTree>
+      <p:nvGrpSpPr>
+        <p:cNvPr id="1" name=""/>
+        <p:cNvGrpSpPr/>
+        <p:nvPr/>
+      </p:nvGrpSpPr>
+      <p:grpSpPr/>
+      <p:sp>
+        <p:nvSpPr>
+          <p:cNvPr id="2" name="Title 1"/>
+          <p:cNvSpPr>
+            <a:spLocks noGrp="1"/>
+          </p:cNvSpPr>
+          <p:nvPr>
+            <p:ph type="title"/>
+          </p:nvPr>
+        </p:nvSpPr>
+        <p:spPr/>
+        <p:txBody>
+          <a:bodyPr/>
+          <a:lstStyle/>
+          <a:p>
+            <a:pPr indent="0" lvl="0" marL="0" rtl="0" algn="l">
+              <a:spcBef>
+                <a:spcPts val="0"/>
+              </a:spcBef>
+              <a:spcAft>
+                <a:spcPts val="0"/>
+              </a:spcAft>
+              <a:buNone/>
+            </a:pPr>
+            <a:r>
+              <a:rPr lang="en"/>
+              <a:t>Check Yourself</a:t>
+            </a:r>
+            <a:endParaRPr/>
+          </a:p>
+        </p:txBody>
+      </p:sp>
+      <p:sp>
+        <p:nvSpPr>
+          <p:cNvPr id="3" name="Text Placeholder 2"/>
+          <p:cNvSpPr>
+            <a:spLocks noGrp="1"/>
+          </p:cNvSpPr>
+          <p:nvPr>
+            <p:ph type="body" idx="1"/>
+          </p:nvPr>
+        </p:nvSpPr>
+        <p:spPr>
+          <a:xfrm>
+            <a:off x="311700" y="885950"/>
+            <a:ext cx="8520600" cy="1719072"/>
+          </a:xfrm>
+        </p:spPr>
+        <p:txBody>
+          <a:bodyPr/>
+          <a:lstStyle/>
+          <a:p>
+            <a:pPr indent="-330200" lvl="0" marL="457200" rtl="0" algn="l">
+              <a:spcBef>
+                <a:spcPts val="0"/>
+              </a:spcBef>
+              <a:spcAft>
+                <a:spcPts val="0"/>
+              </a:spcAft>
+              <a:buSzPts val="1600"/>
+              <a:buChar char="●"/>
+            </a:pPr>
+            <a:r>
+              <a:rPr lang="en"/>
+              <a:t>Why profile before optimizing?</a:t>
+            </a:r>
+            <a:endParaRPr/>
+          </a:p>
+          <a:p>
+            <a:pPr indent="-330200" lvl="0" marL="457200" rtl="0" algn="l">
+              <a:spcBef>
+                <a:spcPts val="0"/>
+              </a:spcBef>
+              <a:spcAft>
+                <a:spcPts val="0"/>
+              </a:spcAft>
+              <a:buSzPts val="1600"/>
+              <a:buChar char="●"/>
+            </a:pPr>
+            <a:r>
+              <a:rPr lang="en"/>
+              <a:t>How does a uniform grid make separation cheaper?</a:t>
+            </a:r>
+            <a:endParaRPr/>
+          </a:p>
+          <a:p>
+            <a:pPr indent="-330200" lvl="0" marL="457200" rtl="0" algn="l">
+              <a:spcBef>
+                <a:spcPts val="0"/>
+              </a:spcBef>
+              <a:spcAft>
+                <a:spcPts val="0"/>
+              </a:spcAft>
+              <a:buSzPts val="1600"/>
+              <a:buChar char="●"/>
+            </a:pPr>
+            <a:r>
+              <a:rPr lang="en"/>
+              <a:t>What is the difference between an array of objects and a struct of arrays?</a:t>
+            </a:r>
+            <a:endParaRPr/>
+          </a:p>
+          <a:p>
+            <a:pPr indent="-330200" lvl="0" marL="457200" rtl="0" algn="l">
+              <a:spcBef>
+                <a:spcPts val="0"/>
+              </a:spcBef>
+              <a:spcAft>
+                <a:spcPts val="0"/>
+              </a:spcAft>
+              <a:buSzPts val="1600"/>
+              <a:buChar char="●"/>
+            </a:pPr>
+            <a:r>
+              <a:rPr lang="en"/>
+              <a:t>What do you give up with data-oriented design?</a:t>
+            </a:r>
+            <a:endParaRPr/>
+          </a:p>
+        </p:txBody>
+      </p:sp>
+      <p:sp>
+        <p:nvSpPr>
+          <p:cNvPr id="4" name="TextBox 3"/>
+          <p:cNvSpPr txBox="1"/>
+          <p:nvPr/>
+        </p:nvSpPr>
+        <p:spPr>
+          <a:xfrm>
+            <a:off x="457200" y="3182112"/>
+            <a:ext cx="8229600" cy="457200"/>
+          </a:xfrm>
+          <a:prstGeom prst="rect">
+            <a:avLst/>
+          </a:prstGeom>
+          <a:noFill/>
+        </p:spPr>
+        <p:txBody>
+          <a:bodyPr wrap="square">
+            <a:spAutoFit/>
+          </a:bodyPr>
+          <a:lstStyle/>
+          <a:p>
+            <a:pPr algn="ctr"/>
+            <a:r>
+              <a:rPr sz="1400" b="0" i="0">
+                <a:solidFill>
+                  <a:srgbClr val="9AA3AB"/>
+                </a:solidFill>
+              </a:rPr>
+              <a:t>The answers, and more questions, are on the course site.</a:t>
+            </a:r>
+          </a:p>
+        </p:txBody>
+      </p:sp>
+    </p:spTree>
+  </p:cSld>
+  <p:clrMapOvr>
+    <a:masterClrMapping/>
+  </p:clrMapOvr>
+</p:sld>
+</file>
+
 <file path=ppt/slides/slide28.xml><?xml version="1.0" encoding="utf-8"?>
+<p:sld xmlns:a="http://schemas.openxmlformats.org/drawingml/2006/main" xmlns:r="http://schemas.openxmlformats.org/officeDocument/2006/relationships" xmlns:mc="http://schemas.openxmlformats.org/markup-compatibility/2006" xmlns:mv="urn:schemas-microsoft-com:mac:vml" xmlns:p="http://schemas.openxmlformats.org/presentationml/2006/main" xmlns:c="http://schemas.openxmlformats.org/drawingml/2006/chart" xmlns:dgm="http://schemas.openxmlformats.org/drawingml/2006/diagram" xmlns:o="urn:schemas-microsoft-com:office:office" xmlns:v="urn:schemas-microsoft-com:vml" xmlns:pvml="urn:schemas-microsoft-com:office:powerpoint" xmlns:com="http://schemas.openxmlformats.org/drawingml/2006/compatibility" xmlns:p14="http://schemas.microsoft.com/office/powerpoint/2010/main" xmlns:p15="http://schemas.microsoft.com/office/powerpoint/2012/main" xmlns:ahyp="http://schemas.microsoft.com/office/drawing/2018/hyperlinkcolor">
+  <p:cSld>
+    <p:spTree>
+      <p:nvGrpSpPr>
+        <p:cNvPr id="292" name="Shape 292"/>
+        <p:cNvGrpSpPr/>
+        <p:nvPr/>
+      </p:nvGrpSpPr>
+      <p:grpSpPr>
+        <a:xfrm>
+          <a:off x="0" y="0"/>
+          <a:ext cx="0" cy="0"/>
+          <a:chOff x="0" y="0"/>
+          <a:chExt cx="0" cy="0"/>
+        </a:xfrm>
+      </p:grpSpPr>
+      <p:sp>
+        <p:nvSpPr>
+          <p:cNvPr id="293" name="Google Shape;293;p45"/>
+          <p:cNvSpPr txBox="1"/>
+          <p:nvPr>
+            <p:ph type="title"/>
+          </p:nvPr>
+        </p:nvSpPr>
+        <p:spPr>
+          <a:xfrm>
+            <a:off x="311700" y="195615"/>
+            <a:ext cx="8520600" cy="572700"/>
+          </a:xfrm>
+          <a:prstGeom prst="rect">
+            <a:avLst/>
+          </a:prstGeom>
+        </p:spPr>
+        <p:txBody>
+          <a:bodyPr anchorCtr="0" anchor="t" bIns="91425" lIns="91425" spcFirstLastPara="1" rIns="91425" wrap="square" tIns="91425">
+            <a:normAutofit fontScale="90000"/>
+          </a:bodyPr>
+          <a:lstStyle/>
+          <a:p>
+            <a:pPr indent="0" lvl="0" marL="0" rtl="0" algn="l">
+              <a:spcBef>
+                <a:spcPts val="0"/>
+              </a:spcBef>
+              <a:spcAft>
+                <a:spcPts val="0"/>
+              </a:spcAft>
+              <a:buNone/>
+            </a:pPr>
+            <a:r>
+              <a:rPr lang="en">
+                <a:solidFill>
+                  <a:schemeClr val="accent5"/>
+                </a:solidFill>
+              </a:rPr>
+              <a:t>Apply It to Your Project</a:t>
+            </a:r>
+            <a:endParaRPr>
+              <a:solidFill>
+                <a:schemeClr val="accent5"/>
+              </a:solidFill>
+            </a:endParaRPr>
+          </a:p>
+        </p:txBody>
+      </p:sp>
+      <p:sp>
+        <p:nvSpPr>
+          <p:cNvPr id="294" name="Google Shape;294;p45"/>
+          <p:cNvSpPr txBox="1"/>
+          <p:nvPr>
+            <p:ph idx="1" type="body"/>
+          </p:nvPr>
+        </p:nvSpPr>
+        <p:spPr>
+          <a:xfrm>
+            <a:off x="311700" y="885950"/>
+            <a:ext cx="8520600" cy="4023300"/>
+          </a:xfrm>
+          <a:prstGeom prst="rect">
+            <a:avLst/>
+          </a:prstGeom>
+        </p:spPr>
+        <p:txBody>
+          <a:bodyPr anchorCtr="0" anchor="t" bIns="91425" lIns="91425" spcFirstLastPara="1" rIns="91425" wrap="square" tIns="91425">
+            <a:normAutofit/>
+          </a:bodyPr>
+          <a:lstStyle/>
+          <a:p>
+            <a:pPr indent="-330200" lvl="0" marL="457200" rtl="0" algn="l">
+              <a:spcBef>
+                <a:spcPts val="0"/>
+              </a:spcBef>
+              <a:spcAft>
+                <a:spcPts val="0"/>
+              </a:spcAft>
+              <a:buSzPts val="1600"/>
+              <a:buChar char="●"/>
+            </a:pPr>
+            <a:r>
+              <a:rPr lang="en"/>
+              <a:t>Profile your game with many more entities. Where does the time go?</a:t>
+            </a:r>
+            <a:endParaRPr/>
+          </a:p>
+          <a:p>
+            <a:pPr indent="-330200" lvl="0" marL="457200" rtl="0" algn="l">
+              <a:spcBef>
+                <a:spcPts val="0"/>
+              </a:spcBef>
+              <a:spcAft>
+                <a:spcPts val="0"/>
+              </a:spcAft>
+              <a:buSzPts val="1600"/>
+              <a:buChar char="●"/>
+            </a:pPr>
+            <a:r>
+              <a:rPr lang="en"/>
+              <a:t>Does anything check every pair, or search every entity?</a:t>
+            </a:r>
+            <a:endParaRPr/>
+          </a:p>
+          <a:p>
+            <a:pPr indent="-330200" lvl="0" marL="457200" rtl="0" algn="l">
+              <a:spcBef>
+                <a:spcPts val="0"/>
+              </a:spcBef>
+              <a:spcAft>
+                <a:spcPts val="0"/>
+              </a:spcAft>
+              <a:buSzPts val="1600"/>
+              <a:buChar char="●"/>
+            </a:pPr>
+            <a:r>
+              <a:rPr lang="en"/>
+              <a:t>Does your game allocate every frame? Where?</a:t>
+            </a:r>
+            <a:endParaRPr/>
+          </a:p>
+          <a:p>
+            <a:pPr indent="-330200" lvl="0" marL="457200" rtl="0" algn="l">
+              <a:spcBef>
+                <a:spcPts val="0"/>
+              </a:spcBef>
+              <a:spcAft>
+                <a:spcPts val="0"/>
+              </a:spcAft>
+              <a:buSzPts val="1600"/>
+              <a:buChar char="●"/>
+            </a:pPr>
+            <a:r>
+              <a:rPr lang="en"/>
+              <a:t>Is there anything there are thousands of?</a:t>
+            </a:r>
+            <a:endParaRPr/>
+          </a:p>
+        </p:txBody>
+      </p:sp>
+    </p:spTree>
+  </p:cSld>
+  <p:clrMapOvr>
+    <a:masterClrMapping/>
+  </p:clrMapOvr>
+  <p:timing>
+    <p:tnLst>
+      <p:par>
+        <p:cTn dur="indefinite" nodeType="tmRoot" restart="never">
+          <p:childTnLst>
+            <p:seq concurrent="1" nextAc="seek">
+              <p:cTn dur="indefinite" id="2" nodeType="mainSeq">
+                <p:childTnLst>
+                  <p:par>
+                    <p:cTn fill="hold">
+                      <p:stCondLst>
+                        <p:cond delay="indefinite"/>
+                      </p:stCondLst>
+                      <p:childTnLst>
+                        <p:par>
+                          <p:cTn fill="hold">
+                            <p:stCondLst>
+                              <p:cond delay="0"/>
+                            </p:stCondLst>
+                            <p:childTnLst>
+                              <p:par>
+                                <p:cTn fill="hold" nodeType="clickEffect" presetClass="entr" presetID="1" presetSubtype="0">
+                                  <p:stCondLst>
+                                    <p:cond delay="0"/>
+                                  </p:stCondLst>
+                                  <p:childTnLst>
+                                    <p:set>
+                                      <p:cBhvr>
+                                        <p:cTn dur="1" fill="hold">
+                                          <p:stCondLst>
+                                            <p:cond delay="0"/>
+                                          </p:stCondLst>
+                                        </p:cTn>
+                                        <p:tgtEl>
+                                          <p:spTgt spid="294">
+                                            <p:txEl>
+                                              <p:pRg end="0" st="0"/>
+                                            </p:txEl>
+                                          </p:spTgt>
+                                        </p:tgtEl>
+                                        <p:attrNameLst>
+                                          <p:attrName>style.visibility</p:attrName>
+                                        </p:attrNameLst>
+                                      </p:cBhvr>
+                                      <p:to>
+                                        <p:strVal val="visible"/>
+                                      </p:to>
+                                    </p:set>
+                                  </p:childTnLst>
+                                </p:cTn>
+                              </p:par>
+                            </p:childTnLst>
+                          </p:cTn>
+                        </p:par>
+                      </p:childTnLst>
+                    </p:cTn>
+                  </p:par>
+                  <p:par>
+                    <p:cTn fill="hold">
+                      <p:stCondLst>
+                        <p:cond delay="indefinite"/>
+                      </p:stCondLst>
+                      <p:childTnLst>
+                        <p:par>
+                          <p:cTn fill="hold">
+                            <p:stCondLst>
+                              <p:cond delay="0"/>
+                            </p:stCondLst>
+                            <p:childTnLst>
+                              <p:par>
+                                <p:cTn fill="hold" nodeType="clickEffect" presetClass="entr" presetID="1" presetSubtype="0">
+                                  <p:stCondLst>
+                                    <p:cond delay="0"/>
+                                  </p:stCondLst>
+                                  <p:childTnLst>
+                                    <p:set>
+                                      <p:cBhvr>
+                                        <p:cTn dur="1" fill="hold">
+                                          <p:stCondLst>
+                                            <p:cond delay="0"/>
+                                          </p:stCondLst>
+                                        </p:cTn>
+                                        <p:tgtEl>
+                                          <p:spTgt spid="294">
+                                            <p:txEl>
+                                              <p:pRg end="1" st="1"/>
+                                            </p:txEl>
+                                          </p:spTgt>
+                                        </p:tgtEl>
+                                        <p:attrNameLst>
+                                          <p:attrName>style.visibility</p:attrName>
+                                        </p:attrNameLst>
+                                      </p:cBhvr>
+                                      <p:to>
+                                        <p:strVal val="visible"/>
+                                      </p:to>
+                                    </p:set>
+                                  </p:childTnLst>
+                                </p:cTn>
+                              </p:par>
+                            </p:childTnLst>
+                          </p:cTn>
+                        </p:par>
+                      </p:childTnLst>
+                    </p:cTn>
+                  </p:par>
+                  <p:par>
+                    <p:cTn fill="hold">
+                      <p:stCondLst>
+                        <p:cond delay="indefinite"/>
+                      </p:stCondLst>
+                      <p:childTnLst>
+                        <p:par>
+                          <p:cTn fill="hold">
+                            <p:stCondLst>
+                              <p:cond delay="0"/>
+                            </p:stCondLst>
+                            <p:childTnLst>
+                              <p:par>
+                                <p:cTn fill="hold" nodeType="clickEffect" presetClass="entr" presetID="1" presetSubtype="0">
+                                  <p:stCondLst>
+                                    <p:cond delay="0"/>
+                                  </p:stCondLst>
+                                  <p:childTnLst>
+                                    <p:set>
+                                      <p:cBhvr>
+                                        <p:cTn dur="1" fill="hold">
+                                          <p:stCondLst>
+                                            <p:cond delay="0"/>
+                                          </p:stCondLst>
+                                        </p:cTn>
+                                        <p:tgtEl>
+                                          <p:spTgt spid="294">
+                                            <p:txEl>
+                                              <p:pRg end="2" st="2"/>
+                                            </p:txEl>
+                                          </p:spTgt>
+                                        </p:tgtEl>
+                                        <p:attrNameLst>
+                                          <p:attrName>style.visibility</p:attrName>
+                                        </p:attrNameLst>
+                                      </p:cBhvr>
+                                      <p:to>
+                                        <p:strVal val="visible"/>
+                                      </p:to>
+                                    </p:set>
+                                  </p:childTnLst>
+                                </p:cTn>
+                              </p:par>
+                            </p:childTnLst>
+                          </p:cTn>
+                        </p:par>
+                      </p:childTnLst>
+                    </p:cTn>
+                  </p:par>
+                  <p:par>
+                    <p:cTn fill="hold">
+                      <p:stCondLst>
+                        <p:cond delay="indefinite"/>
+                      </p:stCondLst>
+                      <p:childTnLst>
+                        <p:par>
+                          <p:cTn fill="hold">
+                            <p:stCondLst>
+                              <p:cond delay="0"/>
+                            </p:stCondLst>
+                            <p:childTnLst>
+                              <p:par>
+                                <p:cTn fill="hold" nodeType="clickEffect" presetClass="entr" presetID="1" presetSubtype="0">
+                                  <p:stCondLst>
+                                    <p:cond delay="0"/>
+                                  </p:stCondLst>
+                                  <p:childTnLst>
+                                    <p:set>
+                                      <p:cBhvr>
+                                        <p:cTn dur="1" fill="hold">
+                                          <p:stCondLst>
+                                            <p:cond delay="0"/>
+                                          </p:stCondLst>
+                                        </p:cTn>
+                                        <p:tgtEl>
+                                          <p:spTgt spid="294">
+                                            <p:txEl>
+                                              <p:pRg end="3" st="3"/>
+                                            </p:txEl>
+                                          </p:spTgt>
+                                        </p:tgtEl>
+                                        <p:attrNameLst>
+                                          <p:attrName>style.visibility</p:attrName>
+                                        </p:attrNameLst>
+                                      </p:cBhvr>
+                                      <p:to>
+                                        <p:strVal val="visible"/>
+                                      </p:to>
+                                    </p:set>
+                                  </p:childTnLst>
+                                </p:cTn>
+                              </p:par>
+                            </p:childTnLst>
+                          </p:cTn>
+                        </p:par>
+                      </p:childTnLst>
+                    </p:cTn>
+                  </p:par>
+                  <p:par>
+                    <p:cTn fill="hold">
+                      <p:stCondLst>
+                        <p:cond delay="indefinite"/>
+                      </p:stCondLst>
+                      <p:childTnLst>
+                        <p:par>
+                          <p:cTn fill="hold">
+                            <p:stCondLst>
+                              <p:cond delay="0"/>
+                            </p:stCondLst>
+                            <p:childTnLst>
+                              <p:par>
+                                <p:cTn fill="hold" nodeType="clickEffect" presetClass="entr" presetID="1" presetSubtype="0">
+                                  <p:stCondLst>
+                                    <p:cond delay="0"/>
+                                  </p:stCondLst>
+                                  <p:childTnLst>
+                                    <p:set>
+                                      <p:cBhvr>
+                                        <p:cTn dur="1" fill="hold">
+                                          <p:stCondLst>
+                                            <p:cond delay="0"/>
+                                          </p:stCondLst>
+                                        </p:cTn>
+                                        <p:tgtEl>
+                                          <p:spTgt spid="294">
+                                            <p:txEl>
+                                              <p:pRg end="4" st="4"/>
+                                            </p:txEl>
+                                          </p:spTgt>
+                                        </p:tgtEl>
+                                        <p:attrNameLst>
+                                          <p:attrName>style.visibility</p:attrName>
+                                        </p:attrNameLst>
+                                      </p:cBhvr>
+                                      <p:to>
+                                        <p:strVal val="visible"/>
+                                      </p:to>
+                                    </p:set>
+                                  </p:childTnLst>
+                                </p:cTn>
+                              </p:par>
+                            </p:childTnLst>
+                          </p:cTn>
+                        </p:par>
+                      </p:childTnLst>
+                    </p:cTn>
+                  </p:par>
+                  <p:par>
+                    <p:cTn fill="hold">
+                      <p:stCondLst>
+                        <p:cond delay="indefinite"/>
+                      </p:stCondLst>
+                      <p:childTnLst>
+                        <p:par>
+                          <p:cTn fill="hold">
+                            <p:stCondLst>
+                              <p:cond delay="0"/>
+                            </p:stCondLst>
+                            <p:childTnLst>
+                              <p:par>
+                                <p:cTn fill="hold" nodeType="clickEffect" presetClass="entr" presetID="1" presetSubtype="0">
+                                  <p:stCondLst>
+                                    <p:cond delay="0"/>
+                                  </p:stCondLst>
+                                  <p:childTnLst>
+                                    <p:set>
+                                      <p:cBhvr>
+                                        <p:cTn dur="1" fill="hold">
+                                          <p:stCondLst>
+                                            <p:cond delay="0"/>
+                                          </p:stCondLst>
+                                        </p:cTn>
+                                        <p:tgtEl>
+                                          <p:spTgt spid="294">
+                                            <p:txEl>
+                                              <p:pRg end="5" st="5"/>
+                                            </p:txEl>
+                                          </p:spTgt>
+                                        </p:tgtEl>
+                                        <p:attrNameLst>
+                                          <p:attrName>style.visibility</p:attrName>
+                                        </p:attrNameLst>
+                                      </p:cBhvr>
+                                      <p:to>
+                                        <p:strVal val="visible"/>
+                                      </p:to>
+                                    </p:set>
+                                  </p:childTnLst>
+                                </p:cTn>
+                              </p:par>
+                            </p:childTnLst>
+                          </p:cTn>
+                        </p:par>
+                      </p:childTnLst>
+                    </p:cTn>
+                  </p:par>
+                  <p:par>
+                    <p:cTn fill="hold">
+                      <p:stCondLst>
+                        <p:cond delay="indefinite"/>
+                      </p:stCondLst>
+                      <p:childTnLst>
+                        <p:par>
+                          <p:cTn fill="hold">
+                            <p:stCondLst>
+                              <p:cond delay="0"/>
+                            </p:stCondLst>
+                            <p:childTnLst>
+                              <p:par>
+                                <p:cTn fill="hold" nodeType="clickEffect" presetClass="entr" presetID="1" presetSubtype="0">
+                                  <p:stCondLst>
+                                    <p:cond delay="0"/>
+                                  </p:stCondLst>
+                                  <p:childTnLst>
+                                    <p:set>
+                                      <p:cBhvr>
+                                        <p:cTn dur="1" fill="hold">
+                                          <p:stCondLst>
+                                            <p:cond delay="0"/>
+                                          </p:stCondLst>
+                                        </p:cTn>
+                                        <p:tgtEl>
+                                          <p:spTgt spid="294">
+                                            <p:txEl>
+                                              <p:pRg end="6" st="6"/>
+                                            </p:txEl>
+                                          </p:spTgt>
+                                        </p:tgtEl>
+                                        <p:attrNameLst>
+                                          <p:attrName>style.visibility</p:attrName>
+                                        </p:attrNameLst>
+                                      </p:cBhvr>
+                                      <p:to>
+                                        <p:strVal val="visible"/>
+                                      </p:to>
+                                    </p:set>
+                                  </p:childTnLst>
+                                </p:cTn>
+                              </p:par>
+                            </p:childTnLst>
+                          </p:cTn>
+                        </p:par>
+                      </p:childTnLst>
+                    </p:cTn>
+                  </p:par>
+                  <p:par>
+                    <p:cTn fill="hold">
+                      <p:stCondLst>
+                        <p:cond delay="indefinite"/>
+                      </p:stCondLst>
+                      <p:childTnLst>
+                        <p:par>
+                          <p:cTn fill="hold">
+                            <p:stCondLst>
+                              <p:cond delay="0"/>
+                            </p:stCondLst>
+                            <p:childTnLst>
+                              <p:par>
+                                <p:cTn fill="hold" nodeType="clickEffect" presetClass="entr" presetID="1" presetSubtype="0">
+                                  <p:stCondLst>
+                                    <p:cond delay="0"/>
+                                  </p:stCondLst>
+                                  <p:childTnLst>
+                                    <p:set>
+                                      <p:cBhvr>
+                                        <p:cTn dur="1" fill="hold">
+                                          <p:stCondLst>
+                                            <p:cond delay="0"/>
+                                          </p:stCondLst>
+                                        </p:cTn>
+                                        <p:tgtEl>
+                                          <p:spTgt spid="294">
+                                            <p:txEl>
+                                              <p:pRg end="7" st="7"/>
+                                            </p:txEl>
+                                          </p:spTgt>
+                                        </p:tgtEl>
+                                        <p:attrNameLst>
+                                          <p:attrName>style.visibility</p:attrName>
+                                        </p:attrNameLst>
+                                      </p:cBhvr>
+                                      <p:to>
+                                        <p:strVal val="visible"/>
+                                      </p:to>
+                                    </p:set>
+                                  </p:childTnLst>
+                                </p:cTn>
+                              </p:par>
+                            </p:childTnLst>
+                          </p:cTn>
+                        </p:par>
+                      </p:childTnLst>
+                    </p:cTn>
+                  </p:par>
+                  <p:par>
+                    <p:cTn fill="hold">
+                      <p:stCondLst>
+                        <p:cond delay="indefinite"/>
+                      </p:stCondLst>
+                      <p:childTnLst>
+                        <p:par>
+                          <p:cTn fill="hold">
+                            <p:stCondLst>
+                              <p:cond delay="0"/>
+                            </p:stCondLst>
+                            <p:childTnLst>
+                              <p:par>
+                                <p:cTn fill="hold" nodeType="clickEffect" presetClass="entr" presetID="1" presetSubtype="0">
+                                  <p:stCondLst>
+                                    <p:cond delay="0"/>
+                                  </p:stCondLst>
+                                  <p:childTnLst>
+                                    <p:set>
+                                      <p:cBhvr>
+                                        <p:cTn dur="1" fill="hold">
+                                          <p:stCondLst>
+                                            <p:cond delay="0"/>
+                                          </p:stCondLst>
+                                        </p:cTn>
+                                        <p:tgtEl>
+                                          <p:spTgt spid="294">
+                                            <p:txEl>
+                                              <p:pRg end="8" st="8"/>
+                                            </p:txEl>
+                                          </p:spTgt>
+                                        </p:tgtEl>
+                                        <p:attrNameLst>
+                                          <p:attrName>style.visibility</p:attrName>
+                                        </p:attrNameLst>
+                                      </p:cBhvr>
+                                      <p:to>
+                                        <p:strVal val="visible"/>
+                                      </p:to>
+                                    </p:set>
+                                  </p:childTnLst>
+                                </p:cTn>
+                              </p:par>
+                            </p:childTnLst>
+                          </p:cTn>
+                        </p:par>
+                      </p:childTnLst>
+                    </p:cTn>
+                  </p:par>
+                  <p:par>
+                    <p:cTn fill="hold">
+                      <p:stCondLst>
+                        <p:cond delay="indefinite"/>
+                      </p:stCondLst>
+                      <p:childTnLst>
+                        <p:par>
+                          <p:cTn fill="hold">
+                            <p:stCondLst>
+                              <p:cond delay="0"/>
+                            </p:stCondLst>
+                            <p:childTnLst>
+                              <p:par>
+                                <p:cTn fill="hold" nodeType="clickEffect" presetClass="entr" presetID="1" presetSubtype="0">
+                                  <p:stCondLst>
+                                    <p:cond delay="0"/>
+                                  </p:stCondLst>
+                                  <p:childTnLst>
+                                    <p:set>
+                                      <p:cBhvr>
+                                        <p:cTn dur="1" fill="hold">
+                                          <p:stCondLst>
+                                            <p:cond delay="0"/>
+                                          </p:stCondLst>
+                                        </p:cTn>
+                                        <p:tgtEl>
+                                          <p:spTgt spid="294">
+                                            <p:txEl>
+                                              <p:pRg end="9" st="9"/>
+                                            </p:txEl>
+                                          </p:spTgt>
+                                        </p:tgtEl>
+                                        <p:attrNameLst>
+                                          <p:attrName>style.visibility</p:attrName>
+                                        </p:attrNameLst>
+                                      </p:cBhvr>
+                                      <p:to>
+                                        <p:strVal val="visible"/>
+                                      </p:to>
+                                    </p:set>
+                                  </p:childTnLst>
+                                </p:cTn>
+                              </p:par>
+                            </p:childTnLst>
+                          </p:cTn>
+                        </p:par>
+                      </p:childTnLst>
+                    </p:cTn>
+                  </p:par>
+                  <p:par>
+                    <p:cTn fill="hold">
+                      <p:stCondLst>
+                        <p:cond delay="indefinite"/>
+                      </p:stCondLst>
+                      <p:childTnLst>
+                        <p:par>
+                          <p:cTn fill="hold">
+                            <p:stCondLst>
+                              <p:cond delay="0"/>
+                            </p:stCondLst>
+                            <p:childTnLst>
+                              <p:par>
+                                <p:cTn fill="hold" nodeType="clickEffect" presetClass="entr" presetID="1" presetSubtype="0">
+                                  <p:stCondLst>
+                                    <p:cond delay="0"/>
+                                  </p:stCondLst>
+                                  <p:childTnLst>
+                                    <p:set>
+                                      <p:cBhvr>
+                                        <p:cTn dur="1" fill="hold">
+                                          <p:stCondLst>
+                                            <p:cond delay="0"/>
+                                          </p:stCondLst>
+                                        </p:cTn>
+                                        <p:tgtEl>
+                                          <p:spTgt spid="294">
+                                            <p:txEl>
+                                              <p:pRg end="10" st="10"/>
+                                            </p:txEl>
+                                          </p:spTgt>
+                                        </p:tgtEl>
+                                        <p:attrNameLst>
+                                          <p:attrName>style.visibility</p:attrName>
+                                        </p:attrNameLst>
+                                      </p:cBhvr>
+                                      <p:to>
+                                        <p:strVal val="visible"/>
+                                      </p:to>
+                                    </p:set>
+                                  </p:childTnLst>
+                                </p:cTn>
+                              </p:par>
+                            </p:childTnLst>
+                          </p:cTn>
+                        </p:par>
+                      </p:childTnLst>
+                    </p:cTn>
+                  </p:par>
+                  <p:par>
+                    <p:cTn fill="hold">
+                      <p:stCondLst>
+                        <p:cond delay="indefinite"/>
+                      </p:stCondLst>
+                      <p:childTnLst>
+                        <p:par>
+                          <p:cTn fill="hold">
+                            <p:stCondLst>
+                              <p:cond delay="0"/>
+                            </p:stCondLst>
+                            <p:childTnLst>
+                              <p:par>
+                                <p:cTn fill="hold" nodeType="clickEffect" presetClass="entr" presetID="1" presetSubtype="0">
+                                  <p:stCondLst>
+                                    <p:cond delay="0"/>
+                                  </p:stCondLst>
+                                  <p:childTnLst>
+                                    <p:set>
+                                      <p:cBhvr>
+                                        <p:cTn dur="1" fill="hold">
+                                          <p:stCondLst>
+                                            <p:cond delay="0"/>
+                                          </p:stCondLst>
+                                        </p:cTn>
+                                        <p:tgtEl>
+                                          <p:spTgt spid="294">
+                                            <p:txEl>
+                                              <p:pRg end="11" st="11"/>
+                                            </p:txEl>
+                                          </p:spTgt>
+                                        </p:tgtEl>
+                                        <p:attrNameLst>
+                                          <p:attrName>style.visibility</p:attrName>
+                                        </p:attrNameLst>
+                                      </p:cBhvr>
+                                      <p:to>
+                                        <p:strVal val="visible"/>
+                                      </p:to>
+                                    </p:set>
+                                  </p:childTnLst>
+                                </p:cTn>
+                              </p:par>
+                            </p:childTnLst>
+                          </p:cTn>
+                        </p:par>
+                      </p:childTnLst>
+                    </p:cTn>
+                  </p:par>
+                  <p:par>
+                    <p:cTn fill="hold">
+                      <p:stCondLst>
+                        <p:cond delay="indefinite"/>
+                      </p:stCondLst>
+                      <p:childTnLst>
+                        <p:par>
+                          <p:cTn fill="hold">
+                            <p:stCondLst>
+                              <p:cond delay="0"/>
+                            </p:stCondLst>
+                            <p:childTnLst>
+                              <p:par>
+                                <p:cTn fill="hold" nodeType="clickEffect" presetClass="entr" presetID="1" presetSubtype="0">
+                                  <p:stCondLst>
+                                    <p:cond delay="0"/>
+                                  </p:stCondLst>
+                                  <p:childTnLst>
+                                    <p:set>
+                                      <p:cBhvr>
+                                        <p:cTn dur="1" fill="hold">
+                                          <p:stCondLst>
+                                            <p:cond delay="0"/>
+                                          </p:stCondLst>
+                                        </p:cTn>
+                                        <p:tgtEl>
+                                          <p:spTgt spid="294">
+                                            <p:txEl>
+                                              <p:pRg end="12" st="12"/>
+                                            </p:txEl>
+                                          </p:spTgt>
+                                        </p:tgtEl>
+                                        <p:attrNameLst>
+                                          <p:attrName>style.visibility</p:attrName>
+                                        </p:attrNameLst>
+                                      </p:cBhvr>
+                                      <p:to>
+                                        <p:strVal val="visible"/>
+                                      </p:to>
+                                    </p:set>
+                                  </p:childTnLst>
+                                </p:cTn>
+                              </p:par>
+                            </p:childTnLst>
+                          </p:cTn>
+                        </p:par>
+                      </p:childTnLst>
+                    </p:cTn>
+                  </p:par>
+                </p:childTnLst>
+              </p:cTn>
+              <p:prevCondLst>
+                <p:cond evt="onPrev">
+                  <p:tgtEl>
+                    <p:sldTgt/>
+                  </p:tgtEl>
+                </p:cond>
+              </p:prevCondLst>
+              <p:nextCondLst>
+                <p:cond evt="onNext">
+                  <p:tgtEl>
+                    <p:sldTgt/>
+                  </p:tgtEl>
+                </p:cond>
+              </p:nextCondLst>
+            </p:seq>
+          </p:childTnLst>
+        </p:cTn>
+      </p:par>
+    </p:tnLst>
+  </p:timing>
+</p:sld>
+</file>
+
+<file path=ppt/slides/slide29.xml><?xml version="1.0" encoding="utf-8"?>
 <p:sld xmlns:a="http://schemas.openxmlformats.org/drawingml/2006/main" xmlns:r="http://schemas.openxmlformats.org/officeDocument/2006/relationships" xmlns:mc="http://schemas.openxmlformats.org/markup-compatibility/2006" xmlns:mv="urn:schemas-microsoft-com:mac:vml" xmlns:p="http://schemas.openxmlformats.org/presentationml/2006/main" xmlns:c="http://schemas.openxmlformats.org/drawingml/2006/chart" xmlns:dgm="http://schemas.openxmlformats.org/drawingml/2006/diagram" xmlns:o="urn:schemas-microsoft-com:office:office" xmlns:v="urn:schemas-microsoft-com:vml" xmlns:pvml="urn:schemas-microsoft-com:office:powerpoint" xmlns:com="http://schemas.openxmlformats.org/drawingml/2006/compatibility" xmlns:p14="http://schemas.microsoft.com/office/powerpoint/2010/main" xmlns:p15="http://schemas.microsoft.com/office/powerpoint/2012/main" xmlns:ahyp="http://schemas.microsoft.com/office/drawing/2018/hyperlinkcolor">
   <p:cSld>
     <p:spTree>
@@ -17190,6 +17405,95 @@
 </file>
 
 <file path=ppt/slides/slide3.xml><?xml version="1.0" encoding="utf-8"?>
+<p:sld xmlns:a="http://schemas.openxmlformats.org/drawingml/2006/main" xmlns:r="http://schemas.openxmlformats.org/officeDocument/2006/relationships" xmlns:mc="http://schemas.openxmlformats.org/markup-compatibility/2006" xmlns:mv="urn:schemas-microsoft-com:mac:vml" xmlns:p="http://schemas.openxmlformats.org/presentationml/2006/main" xmlns:c="http://schemas.openxmlformats.org/drawingml/2006/chart" xmlns:dgm="http://schemas.openxmlformats.org/drawingml/2006/diagram" xmlns:o="urn:schemas-microsoft-com:office:office" xmlns:v="urn:schemas-microsoft-com:vml" xmlns:pvml="urn:schemas-microsoft-com:office:powerpoint" xmlns:com="http://schemas.openxmlformats.org/drawingml/2006/compatibility" xmlns:p14="http://schemas.microsoft.com/office/powerpoint/2010/main" xmlns:p15="http://schemas.microsoft.com/office/powerpoint/2012/main" xmlns:ahyp="http://schemas.microsoft.com/office/drawing/2018/hyperlinkcolor">
+  <p:cSld>
+    <p:spTree>
+      <p:nvGrpSpPr>
+        <p:cNvPr id="44" name="Shape 44"/>
+        <p:cNvGrpSpPr/>
+        <p:nvPr/>
+      </p:nvGrpSpPr>
+      <p:grpSpPr>
+        <a:xfrm>
+          <a:off x="0" y="0"/>
+          <a:ext cx="0" cy="0"/>
+          <a:chOff x="0" y="0"/>
+          <a:chExt cx="0" cy="0"/>
+        </a:xfrm>
+      </p:grpSpPr>
+      <p:sp>
+        <p:nvSpPr>
+          <p:cNvPr id="45" name="Google Shape;45;p10"/>
+          <p:cNvSpPr txBox="1"/>
+          <p:nvPr>
+            <p:ph type="title"/>
+          </p:nvPr>
+        </p:nvSpPr>
+        <p:spPr>
+          <a:xfrm>
+            <a:off x="311700" y="195615"/>
+            <a:ext cx="8520600" cy="572700"/>
+          </a:xfrm>
+          <a:prstGeom prst="rect">
+            <a:avLst/>
+          </a:prstGeom>
+        </p:spPr>
+        <p:txBody>
+          <a:bodyPr anchorCtr="0" anchor="t" bIns="91425" lIns="91425" spcFirstLastPara="1" rIns="91425" wrap="square" tIns="91425">
+            <a:normAutofit fontScale="90000"/>
+          </a:bodyPr>
+          <a:lstStyle/>
+          <a:p>
+            <a:pPr indent="0" lvl="0" marL="0" rtl="0" algn="l">
+              <a:spcBef>
+                <a:spcPts val="0"/>
+              </a:spcBef>
+              <a:spcAft>
+                <a:spcPts val="0"/>
+              </a:spcAft>
+              <a:buNone/>
+            </a:pPr>
+            <a:r>
+              <a:rPr lang="en"/>
+              <a:t>Today’s Goal</a:t>
+            </a:r>
+            <a:endParaRPr/>
+          </a:p>
+        </p:txBody>
+      </p:sp>
+      <p:pic>
+        <p:nvPicPr>
+          <p:cNvPr id="46" name="Picture 46" descr="vs-play.png"/>
+          <p:cNvPicPr>
+            <a:picLocks noChangeAspect="1"/>
+          </p:cNvPicPr>
+          <p:nvPr/>
+        </p:nvPicPr>
+        <p:blipFill>
+          <a:blip r:embed="rId4"/>
+          <a:stretch>
+            <a:fillRect/>
+          </a:stretch>
+        </p:blipFill>
+        <p:spPr>
+          <a:xfrm>
+            <a:off x="1677201" y="1531275"/>
+            <a:ext cx="5789598" cy="3256648"/>
+          </a:xfrm>
+          <a:prstGeom prst="rect">
+            <a:avLst/>
+          </a:prstGeom>
+        </p:spPr>
+      </p:pic>
+    </p:spTree>
+  </p:cSld>
+  <p:clrMapOvr>
+    <a:masterClrMapping/>
+  </p:clrMapOvr>
+</p:sld>
+</file>
+
+<file path=ppt/slides/slide4.xml><?xml version="1.0" encoding="utf-8"?>
 <p:sld xmlns:a="http://schemas.openxmlformats.org/drawingml/2006/main" xmlns:r="http://schemas.openxmlformats.org/officeDocument/2006/relationships" xmlns:mc="http://schemas.openxmlformats.org/markup-compatibility/2006" xmlns:mv="urn:schemas-microsoft-com:mac:vml" xmlns:p="http://schemas.openxmlformats.org/presentationml/2006/main" xmlns:c="http://schemas.openxmlformats.org/drawingml/2006/chart" xmlns:dgm="http://schemas.openxmlformats.org/drawingml/2006/diagram" xmlns:o="urn:schemas-microsoft-com:office:office" xmlns:v="urn:schemas-microsoft-com:vml" xmlns:pvml="urn:schemas-microsoft-com:office:powerpoint" xmlns:com="http://schemas.openxmlformats.org/drawingml/2006/compatibility" xmlns:p14="http://schemas.microsoft.com/office/powerpoint/2010/main" xmlns:p15="http://schemas.microsoft.com/office/powerpoint/2012/main" xmlns:ahyp="http://schemas.microsoft.com/office/drawing/2018/hyperlinkcolor">
   <p:cSld>
     <p:spTree>
@@ -17655,7 +17959,7 @@
 </p:sld>
 </file>
 
-<file path=ppt/slides/slide4.xml><?xml version="1.0" encoding="utf-8"?>
+<file path=ppt/slides/slide5.xml><?xml version="1.0" encoding="utf-8"?>
 <p:sld xmlns:a="http://schemas.openxmlformats.org/drawingml/2006/main" xmlns:r="http://schemas.openxmlformats.org/officeDocument/2006/relationships" xmlns:mc="http://schemas.openxmlformats.org/markup-compatibility/2006" xmlns:mv="urn:schemas-microsoft-com:mac:vml" xmlns:p="http://schemas.openxmlformats.org/presentationml/2006/main" xmlns:c="http://schemas.openxmlformats.org/drawingml/2006/chart" xmlns:dgm="http://schemas.openxmlformats.org/drawingml/2006/diagram" xmlns:o="urn:schemas-microsoft-com:office:office" xmlns:v="urn:schemas-microsoft-com:vml" xmlns:pvml="urn:schemas-microsoft-com:office:powerpoint" xmlns:com="http://schemas.openxmlformats.org/drawingml/2006/compatibility" xmlns:p14="http://schemas.microsoft.com/office/powerpoint/2010/main" xmlns:p15="http://schemas.microsoft.com/office/powerpoint/2012/main" xmlns:ahyp="http://schemas.microsoft.com/office/drawing/2018/hyperlinkcolor">
   <p:cSld>
     <p:spTree>
@@ -17784,598 +18088,6 @@
               <a:t>The course site: today’s concepts in full, the exercises, and questions to check yourself</a:t>
             </a:r>
             <a:endParaRPr/>
-          </a:p>
-        </p:txBody>
-      </p:sp>
-    </p:spTree>
-  </p:cSld>
-  <p:clrMapOvr>
-    <a:masterClrMapping/>
-  </p:clrMapOvr>
-</p:sld>
-</file>
-
-<file path=ppt/slides/slide5.xml><?xml version="1.0" encoding="utf-8"?>
-<p:sld xmlns:a="http://schemas.openxmlformats.org/drawingml/2006/main" xmlns:p="http://schemas.openxmlformats.org/presentationml/2006/main" xmlns:r="http://schemas.openxmlformats.org/officeDocument/2006/relationships">
-  <p:cSld>
-    <p:spTree>
-      <p:nvGrpSpPr>
-        <p:cNvPr id="1" name=""/>
-        <p:cNvGrpSpPr/>
-        <p:nvPr/>
-      </p:nvGrpSpPr>
-      <p:grpSpPr/>
-      <p:sp>
-        <p:nvSpPr>
-          <p:cNvPr id="140" name="Google Shape;140;p23"/>
-          <p:cNvSpPr txBox="1"/>
-          <p:nvPr>
-            <p:ph type="title"/>
-          </p:nvPr>
-        </p:nvSpPr>
-        <p:spPr>
-          <a:xfrm>
-            <a:off x="311700" y="195615"/>
-            <a:ext cx="8520600" cy="572700"/>
-          </a:xfrm>
-          <a:prstGeom prst="rect">
-            <a:avLst/>
-          </a:prstGeom>
-        </p:spPr>
-        <p:txBody>
-          <a:bodyPr anchorCtr="0" anchor="t" bIns="91425" lIns="91425" spcFirstLastPara="1" rIns="91425" wrap="square" tIns="91425">
-            <a:normAutofit fontScale="90000"/>
-          </a:bodyPr>
-          <a:lstStyle/>
-          <a:p>
-            <a:pPr indent="0" lvl="0" marL="0" rtl="0" algn="l">
-              <a:spcBef>
-                <a:spcPts val="0"/>
-              </a:spcBef>
-              <a:spcAft>
-                <a:spcPts val="0"/>
-              </a:spcAft>
-              <a:buNone/>
-            </a:pPr>
-            <a:r>
-              <a:rPr lang="en"/>
-              <a:t>Enemies as Objects</a:t>
-            </a:r>
-            <a:endParaRPr/>
-          </a:p>
-        </p:txBody>
-      </p:sp>
-      <p:sp>
-        <p:nvSpPr>
-          <p:cNvPr id="293" name="Google Shape;293;p45"/>
-          <p:cNvSpPr txBox="1"/>
-          <p:nvPr>
-            <p:ph type="title"/>
-          </p:nvPr>
-        </p:nvSpPr>
-        <p:spPr>
-          <a:xfrm>
-            <a:off x="311700" y="1152475"/>
-            <a:ext cx="3700000" cy="3500000"/>
-          </a:xfrm>
-          <a:prstGeom prst="rect">
-            <a:avLst/>
-          </a:prstGeom>
-        </p:spPr>
-        <p:txBody>
-          <a:bodyPr anchorCtr="0" anchor="t" bIns="91425" lIns="91425" spcFirstLastPara="1" rIns="91425" wrap="square" tIns="91425">
-            <a:normAutofit fontScale="90000"/>
-          </a:bodyPr>
-          <a:lstStyle/>
-          <a:p>
-            <a:pPr indent="-330200" lvl="0" marL="457200" rtl="0" algn="l">
-              <a:buClr>
-                <a:srgbClr val="DEE2E6"/>
-              </a:buClr>
-              <a:spcBef>
-                <a:spcPts val="0"/>
-              </a:spcBef>
-              <a:spcAft>
-                <a:spcPts val="0"/>
-              </a:spcAft>
-              <a:buSzPts val="1600"/>
-              <a:buChar char="●"/>
-            </a:pPr>
-            <a:r>
-              <a:rPr lang="en" sz="1600">
-                <a:solidFill>
-                  <a:srgbClr val="DEE2E6"/>
-                </a:solidFill>
-              </a:rPr>
-              <a:t>A List&lt;Enemy&gt;, as we’ve always done</a:t>
-            </a:r>
-            <a:endParaRPr/>
-          </a:p>
-          <a:p>
-            <a:pPr indent="-330200" lvl="0" marL="457200" rtl="0" algn="l">
-              <a:buClr>
-                <a:srgbClr val="DEE2E6"/>
-              </a:buClr>
-              <a:spcBef>
-                <a:spcPts val="0"/>
-              </a:spcBef>
-              <a:spcAft>
-                <a:spcPts val="0"/>
-              </a:spcAft>
-              <a:buSzPts val="1600"/>
-              <a:buChar char="●"/>
-            </a:pPr>
-            <a:r>
-              <a:rPr lang="en" sz="1600">
-                <a:solidFill>
-                  <a:srgbClr val="DEE2E6"/>
-                </a:solidFill>
-              </a:rPr>
-              <a:t>Enemies push each other apart</a:t>
-            </a:r>
-            <a:endParaRPr/>
-          </a:p>
-          <a:p>
-            <a:pPr indent="-317500" lvl="1" marL="914400" rtl="0" algn="l">
-              <a:buClr>
-                <a:srgbClr val="6C757D"/>
-              </a:buClr>
-              <a:spcBef>
-                <a:spcPts val="0"/>
-              </a:spcBef>
-              <a:spcAft>
-                <a:spcPts val="0"/>
-              </a:spcAft>
-              <a:buSzPts val="1400"/>
-              <a:buChar char="○"/>
-            </a:pPr>
-            <a:r>
-              <a:rPr lang="en" sz="1400">
-                <a:solidFill>
-                  <a:srgbClr val="6C757D"/>
-                </a:solidFill>
-              </a:rPr>
-              <a:t>Every enemy against every other</a:t>
-            </a:r>
-            <a:endParaRPr/>
-          </a:p>
-          <a:p>
-            <a:pPr indent="-330200" lvl="0" marL="457200" rtl="0" algn="l">
-              <a:buClr>
-                <a:srgbClr val="DEE2E6"/>
-              </a:buClr>
-              <a:spcBef>
-                <a:spcPts val="0"/>
-              </a:spcBef>
-              <a:spcAft>
-                <a:spcPts val="0"/>
-              </a:spcAft>
-              <a:buSzPts val="1600"/>
-              <a:buChar char="●"/>
-            </a:pPr>
-            <a:r>
-              <a:rPr lang="en" sz="1600">
-                <a:solidFill>
-                  <a:srgbClr val="DEE2E6"/>
-                </a:solidFill>
-              </a:rPr>
-              <a:t>Weapons ask: nearest? inside the aura?</a:t>
-            </a:r>
-            <a:endParaRPr/>
-          </a:p>
-          <a:p>
-            <a:pPr indent="-317500" lvl="1" marL="914400" rtl="0" algn="l">
-              <a:buClr>
-                <a:srgbClr val="6C757D"/>
-              </a:buClr>
-              <a:spcBef>
-                <a:spcPts val="0"/>
-              </a:spcBef>
-              <a:spcAft>
-                <a:spcPts val="0"/>
-              </a:spcAft>
-              <a:buSzPts val="1400"/>
-              <a:buChar char="○"/>
-            </a:pPr>
-            <a:r>
-              <a:rPr lang="en" sz="1400">
-                <a:solidFill>
-                  <a:srgbClr val="6C757D"/>
-                </a:solidFill>
-              </a:rPr>
-              <a:t>Each question looks at every enemy</a:t>
-            </a:r>
-            <a:endParaRPr/>
-          </a:p>
-          <a:p>
-            <a:pPr indent="-330200" lvl="0" marL="457200" rtl="0" algn="l">
-              <a:buClr>
-                <a:srgbClr val="DEE2E6"/>
-              </a:buClr>
-              <a:spcBef>
-                <a:spcPts val="0"/>
-              </a:spcBef>
-              <a:spcAft>
-                <a:spcPts val="0"/>
-              </a:spcAft>
-              <a:buSzPts val="1600"/>
-              <a:buChar char="●"/>
-            </a:pPr>
-            <a:r>
-              <a:rPr lang="en" sz="1600">
-                <a:solidFill>
-                  <a:srgbClr val="DEE2E6"/>
-                </a:solidFill>
-              </a:rPr>
-              <a:t>Space: a thousand more. It crawls. Why?</a:t>
-            </a:r>
-            <a:endParaRPr/>
-          </a:p>
-        </p:txBody>
-      </p:sp>
-      <p:sp>
-        <p:nvSpPr>
-          <p:cNvPr id="141" name="Google Shape;141;p23"/>
-          <p:cNvSpPr txBox="1"/>
-          <p:nvPr>
-            <p:ph idx="2" type="body"/>
-          </p:nvPr>
-        </p:nvSpPr>
-        <p:spPr>
-          <a:xfrm>
-            <a:off x="4150000" y="1152475"/>
-            <a:ext cx="4750000" cy="3600000"/>
-          </a:xfrm>
-          <a:prstGeom prst="rect">
-            <a:avLst/>
-          </a:prstGeom>
-        </p:spPr>
-        <p:txBody>
-          <a:bodyPr anchorCtr="0" anchor="t" bIns="91425" lIns="91425" spcFirstLastPara="1" rIns="91425" wrap="square" tIns="91425">
-            <a:noAutofit/>
-          </a:bodyPr>
-          <a:lstStyle/>
-          <a:p>
-            <a:pPr indent="0" lvl="0" marL="0" rtl="0" algn="l">
-              <a:lnSpc>
-                <a:spcPct val="115000"/>
-              </a:lnSpc>
-              <a:spcBef>
-                <a:spcPts val="0"/>
-              </a:spcBef>
-              <a:spcAft>
-                <a:spcPts val="0"/>
-              </a:spcAft>
-              <a:buNone/>
-            </a:pPr>
-            <a:r>
-              <a:rPr lang="en" sz="1000">
-                <a:highlight>
-                  <a:schemeClr val="dk2"/>
-                </a:highlight>
-                <a:latin typeface="Consolas"/>
-                <a:ea typeface="Consolas"/>
-                <a:cs typeface="Consolas"/>
-                <a:sym typeface="Consolas"/>
-              </a:rPr>
-              <a:t>public void Separate()</a:t>
-            </a:r>
-            <a:endParaRPr sz="1000">
-              <a:solidFill>
-                <a:srgbClr val="CCCCCC"/>
-              </a:solidFill>
-              <a:highlight>
-                <a:schemeClr val="dk2"/>
-              </a:highlight>
-              <a:latin typeface="Consolas"/>
-              <a:ea typeface="Consolas"/>
-              <a:cs typeface="Consolas"/>
-              <a:sym typeface="Consolas"/>
-            </a:endParaRPr>
-          </a:p>
-          <a:p>
-            <a:pPr indent="0" lvl="0" marL="0" rtl="0" algn="l">
-              <a:lnSpc>
-                <a:spcPct val="115000"/>
-              </a:lnSpc>
-              <a:spcBef>
-                <a:spcPts val="0"/>
-              </a:spcBef>
-              <a:spcAft>
-                <a:spcPts val="0"/>
-              </a:spcAft>
-              <a:buNone/>
-            </a:pPr>
-            <a:r>
-              <a:rPr lang="en" sz="1000">
-                <a:highlight>
-                  <a:schemeClr val="dk2"/>
-                </a:highlight>
-                <a:latin typeface="Consolas"/>
-                <a:ea typeface="Consolas"/>
-                <a:cs typeface="Consolas"/>
-                <a:sym typeface="Consolas"/>
-              </a:rPr>
-              <a:t>{</a:t>
-            </a:r>
-            <a:endParaRPr sz="1000">
-              <a:solidFill>
-                <a:srgbClr val="CCCCCC"/>
-              </a:solidFill>
-              <a:highlight>
-                <a:schemeClr val="dk2"/>
-              </a:highlight>
-              <a:latin typeface="Consolas"/>
-              <a:ea typeface="Consolas"/>
-              <a:cs typeface="Consolas"/>
-              <a:sym typeface="Consolas"/>
-            </a:endParaRPr>
-          </a:p>
-          <a:p>
-            <a:pPr indent="0" lvl="0" marL="0" rtl="0" algn="l">
-              <a:lnSpc>
-                <a:spcPct val="115000"/>
-              </a:lnSpc>
-              <a:spcBef>
-                <a:spcPts val="0"/>
-              </a:spcBef>
-              <a:spcAft>
-                <a:spcPts val="0"/>
-              </a:spcAft>
-              <a:buNone/>
-            </a:pPr>
-            <a:r>
-              <a:rPr lang="en" sz="1000">
-                <a:highlight>
-                  <a:schemeClr val="dk2"/>
-                </a:highlight>
-                <a:latin typeface="Consolas"/>
-                <a:ea typeface="Consolas"/>
-                <a:cs typeface="Consolas"/>
-                <a:sym typeface="Consolas"/>
-              </a:rPr>
-              <a:t>    for (int i = 0; i &lt; _enemies.Count; i++)</a:t>
-            </a:r>
-            <a:endParaRPr sz="1000">
-              <a:solidFill>
-                <a:srgbClr val="CCCCCC"/>
-              </a:solidFill>
-              <a:highlight>
-                <a:schemeClr val="dk2"/>
-              </a:highlight>
-              <a:latin typeface="Consolas"/>
-              <a:ea typeface="Consolas"/>
-              <a:cs typeface="Consolas"/>
-              <a:sym typeface="Consolas"/>
-            </a:endParaRPr>
-          </a:p>
-          <a:p>
-            <a:pPr indent="0" lvl="0" marL="0" rtl="0" algn="l">
-              <a:lnSpc>
-                <a:spcPct val="115000"/>
-              </a:lnSpc>
-              <a:spcBef>
-                <a:spcPts val="0"/>
-              </a:spcBef>
-              <a:spcAft>
-                <a:spcPts val="0"/>
-              </a:spcAft>
-              <a:buNone/>
-            </a:pPr>
-            <a:r>
-              <a:rPr lang="en" sz="1000">
-                <a:highlight>
-                  <a:schemeClr val="dk2"/>
-                </a:highlight>
-                <a:latin typeface="Consolas"/>
-                <a:ea typeface="Consolas"/>
-                <a:cs typeface="Consolas"/>
-                <a:sym typeface="Consolas"/>
-              </a:rPr>
-              <a:t>    {</a:t>
-            </a:r>
-            <a:endParaRPr sz="1000">
-              <a:solidFill>
-                <a:srgbClr val="CCCCCC"/>
-              </a:solidFill>
-              <a:highlight>
-                <a:schemeClr val="dk2"/>
-              </a:highlight>
-              <a:latin typeface="Consolas"/>
-              <a:ea typeface="Consolas"/>
-              <a:cs typeface="Consolas"/>
-              <a:sym typeface="Consolas"/>
-            </a:endParaRPr>
-          </a:p>
-          <a:p>
-            <a:pPr indent="0" lvl="0" marL="0" rtl="0" algn="l">
-              <a:lnSpc>
-                <a:spcPct val="115000"/>
-              </a:lnSpc>
-              <a:spcBef>
-                <a:spcPts val="0"/>
-              </a:spcBef>
-              <a:spcAft>
-                <a:spcPts val="0"/>
-              </a:spcAft>
-              <a:buNone/>
-            </a:pPr>
-            <a:r>
-              <a:rPr lang="en" sz="1000">
-                <a:highlight>
-                  <a:schemeClr val="dk2"/>
-                </a:highlight>
-                <a:latin typeface="Consolas"/>
-                <a:ea typeface="Consolas"/>
-                <a:cs typeface="Consolas"/>
-                <a:sym typeface="Consolas"/>
-              </a:rPr>
-              <a:t>        for (int j = i + 1;</a:t>
-            </a:r>
-            <a:endParaRPr sz="1000">
-              <a:solidFill>
-                <a:srgbClr val="CCCCCC"/>
-              </a:solidFill>
-              <a:highlight>
-                <a:schemeClr val="dk2"/>
-              </a:highlight>
-              <a:latin typeface="Consolas"/>
-              <a:ea typeface="Consolas"/>
-              <a:cs typeface="Consolas"/>
-              <a:sym typeface="Consolas"/>
-            </a:endParaRPr>
-          </a:p>
-          <a:p>
-            <a:pPr indent="0" lvl="0" marL="0" rtl="0" algn="l">
-              <a:lnSpc>
-                <a:spcPct val="115000"/>
-              </a:lnSpc>
-              <a:spcBef>
-                <a:spcPts val="0"/>
-              </a:spcBef>
-              <a:spcAft>
-                <a:spcPts val="0"/>
-              </a:spcAft>
-              <a:buNone/>
-            </a:pPr>
-            <a:r>
-              <a:rPr lang="en" sz="1000">
-                <a:highlight>
-                  <a:schemeClr val="dk2"/>
-                </a:highlight>
-                <a:latin typeface="Consolas"/>
-                <a:ea typeface="Consolas"/>
-                <a:cs typeface="Consolas"/>
-                <a:sym typeface="Consolas"/>
-              </a:rPr>
-              <a:t>             j &lt; _enemies.Count; j++)</a:t>
-            </a:r>
-            <a:endParaRPr sz="1000">
-              <a:solidFill>
-                <a:srgbClr val="CCCCCC"/>
-              </a:solidFill>
-              <a:highlight>
-                <a:schemeClr val="dk2"/>
-              </a:highlight>
-              <a:latin typeface="Consolas"/>
-              <a:ea typeface="Consolas"/>
-              <a:cs typeface="Consolas"/>
-              <a:sym typeface="Consolas"/>
-            </a:endParaRPr>
-          </a:p>
-          <a:p>
-            <a:pPr indent="0" lvl="0" marL="0" rtl="0" algn="l">
-              <a:lnSpc>
-                <a:spcPct val="115000"/>
-              </a:lnSpc>
-              <a:spcBef>
-                <a:spcPts val="0"/>
-              </a:spcBef>
-              <a:spcAft>
-                <a:spcPts val="0"/>
-              </a:spcAft>
-              <a:buNone/>
-            </a:pPr>
-            <a:r>
-              <a:rPr lang="en" sz="1000">
-                <a:highlight>
-                  <a:schemeClr val="dk2"/>
-                </a:highlight>
-                <a:latin typeface="Consolas"/>
-                <a:ea typeface="Consolas"/>
-                <a:cs typeface="Consolas"/>
-                <a:sym typeface="Consolas"/>
-              </a:rPr>
-              <a:t>            Push(_enemies[i], _enemies[j]);</a:t>
-            </a:r>
-            <a:endParaRPr sz="1000">
-              <a:solidFill>
-                <a:srgbClr val="CCCCCC"/>
-              </a:solidFill>
-              <a:highlight>
-                <a:schemeClr val="dk2"/>
-              </a:highlight>
-              <a:latin typeface="Consolas"/>
-              <a:ea typeface="Consolas"/>
-              <a:cs typeface="Consolas"/>
-              <a:sym typeface="Consolas"/>
-            </a:endParaRPr>
-          </a:p>
-          <a:p>
-            <a:pPr indent="0" lvl="0" marL="0" rtl="0" algn="l">
-              <a:lnSpc>
-                <a:spcPct val="115000"/>
-              </a:lnSpc>
-              <a:spcBef>
-                <a:spcPts val="0"/>
-              </a:spcBef>
-              <a:spcAft>
-                <a:spcPts val="0"/>
-              </a:spcAft>
-              <a:buNone/>
-            </a:pPr>
-            <a:r>
-              <a:rPr lang="en" sz="1000">
-                <a:highlight>
-                  <a:schemeClr val="dk2"/>
-                </a:highlight>
-                <a:latin typeface="Consolas"/>
-                <a:ea typeface="Consolas"/>
-                <a:cs typeface="Consolas"/>
-                <a:sym typeface="Consolas"/>
-              </a:rPr>
-              <a:t>    }</a:t>
-            </a:r>
-            <a:endParaRPr sz="1000">
-              <a:solidFill>
-                <a:srgbClr val="CCCCCC"/>
-              </a:solidFill>
-              <a:highlight>
-                <a:schemeClr val="dk2"/>
-              </a:highlight>
-              <a:latin typeface="Consolas"/>
-              <a:ea typeface="Consolas"/>
-              <a:cs typeface="Consolas"/>
-              <a:sym typeface="Consolas"/>
-            </a:endParaRPr>
-          </a:p>
-          <a:p>
-            <a:pPr indent="0" lvl="0" marL="0" rtl="0" algn="l">
-              <a:lnSpc>
-                <a:spcPct val="115000"/>
-              </a:lnSpc>
-              <a:spcBef>
-                <a:spcPts val="0"/>
-              </a:spcBef>
-              <a:spcAft>
-                <a:spcPts val="0"/>
-              </a:spcAft>
-              <a:buNone/>
-            </a:pPr>
-            <a:r>
-              <a:rPr lang="en" sz="1000">
-                <a:highlight>
-                  <a:schemeClr val="dk2"/>
-                </a:highlight>
-                <a:latin typeface="Consolas"/>
-                <a:ea typeface="Consolas"/>
-                <a:cs typeface="Consolas"/>
-                <a:sym typeface="Consolas"/>
-              </a:rPr>
-              <a:t>}</a:t>
-            </a:r>
-            <a:endParaRPr sz="1000">
-              <a:solidFill>
-                <a:srgbClr val="CCCCCC"/>
-              </a:solidFill>
-              <a:highlight>
-                <a:schemeClr val="dk2"/>
-              </a:highlight>
-              <a:latin typeface="Consolas"/>
-              <a:ea typeface="Consolas"/>
-              <a:cs typeface="Consolas"/>
-              <a:sym typeface="Consolas"/>
-            </a:endParaRPr>
           </a:p>
         </p:txBody>
       </p:sp>
@@ -18399,7 +18111,7 @@
       <p:grpSpPr/>
       <p:sp>
         <p:nvSpPr>
-          <p:cNvPr id="128" name="Google Shape;128;p21"/>
+          <p:cNvPr id="140" name="Google Shape;140;p23"/>
           <p:cNvSpPr txBox="1"/>
           <p:nvPr>
             <p:ph type="title"/>
@@ -18430,79 +18142,544 @@
               <a:buNone/>
             </a:pPr>
             <a:r>
-              <a:rPr lang="en">
-                <a:solidFill>
-                  <a:schemeClr val="accent5"/>
-                </a:solidFill>
-              </a:rPr>
-              <a:t>Objects Implementation</a:t>
-            </a:r>
-            <a:endParaRPr>
-              <a:solidFill>
-                <a:schemeClr val="accent5"/>
-              </a:solidFill>
-            </a:endParaRPr>
+              <a:rPr lang="en"/>
+              <a:t>Enemies as Objects</a:t>
+            </a:r>
+            <a:endParaRPr/>
           </a:p>
         </p:txBody>
       </p:sp>
       <p:sp>
         <p:nvSpPr>
-          <p:cNvPr id="129" name="Google Shape;129;p21"/>
+          <p:cNvPr id="293" name="Google Shape;293;p45"/>
           <p:cNvSpPr txBox="1"/>
           <p:nvPr>
-            <p:ph idx="1" type="body"/>
+            <p:ph type="title"/>
           </p:nvPr>
         </p:nvSpPr>
         <p:spPr>
           <a:xfrm>
-            <a:off x="311700" y="885950"/>
-            <a:ext cx="8520600" cy="4023300"/>
+            <a:off x="311700" y="1152475"/>
+            <a:ext cx="3700000" cy="3500000"/>
           </a:xfrm>
           <a:prstGeom prst="rect">
             <a:avLst/>
           </a:prstGeom>
         </p:spPr>
         <p:txBody>
-          <a:bodyPr anchorCtr="0" anchor="ctr" bIns="91425" lIns="91425" spcFirstLastPara="1" rIns="91425" wrap="square" tIns="91425">
-            <a:normAutofit/>
+          <a:bodyPr anchorCtr="0" anchor="t" bIns="91425" lIns="91425" spcFirstLastPara="1" rIns="91425" wrap="square" tIns="91425">
+            <a:normAutofit fontScale="90000"/>
           </a:bodyPr>
           <a:lstStyle/>
           <a:p>
-            <a:pPr indent="0" lvl="0" marL="0" rtl="0" algn="ctr">
-              <a:spcBef>
-                <a:spcPts val="0"/>
-              </a:spcBef>
-              <a:spcAft>
-                <a:spcPts val="1200"/>
-              </a:spcAft>
-              <a:buNone/>
+            <a:pPr indent="-330200" lvl="0" marL="457200" rtl="0" algn="l">
+              <a:buClr>
+                <a:srgbClr val="DEE2E6"/>
+              </a:buClr>
+              <a:spcBef>
+                <a:spcPts val="0"/>
+              </a:spcBef>
+              <a:spcAft>
+                <a:spcPts val="0"/>
+              </a:spcAft>
+              <a:buSzPts val="1600"/>
+              <a:buChar char="●"/>
             </a:pPr>
             <a:r>
-              <a:rPr lang="en" sz="2900">
-                <a:latin typeface="VT323"/>
-                <a:ea typeface="VT323"/>
-                <a:cs typeface="VT323"/>
-                <a:sym typeface="VT323"/>
-              </a:rPr>
-              <a:t>DEMO!</a:t>
+              <a:rPr lang="en" sz="1600">
+                <a:solidFill>
+                  <a:srgbClr val="DEE2E6"/>
+                </a:solidFill>
+              </a:rPr>
+              <a:t>A List&lt;Enemy&gt;, as we’ve always done</a:t>
             </a:r>
             <a:endParaRPr/>
           </a:p>
           <a:p>
-            <a:pPr indent="0" lvl="0" marL="0" rtl="0" algn="ctr">
-              <a:spcBef>
-                <a:spcPts val="0"/>
-              </a:spcBef>
-              <a:spcAft>
-                <a:spcPts val="0"/>
-              </a:spcAft>
-              <a:buNone/>
+            <a:pPr indent="-330200" lvl="0" marL="457200" rtl="0" algn="l">
+              <a:buClr>
+                <a:srgbClr val="DEE2E6"/>
+              </a:buClr>
+              <a:spcBef>
+                <a:spcPts val="0"/>
+              </a:spcBef>
+              <a:spcAft>
+                <a:spcPts val="0"/>
+              </a:spcAft>
+              <a:buSzPts val="1600"/>
+              <a:buChar char="●"/>
             </a:pPr>
             <a:r>
-              <a:rPr lang="en" sz="1800"/>
-              <a:t>Survivors0: press Space until it slows down</a:t>
-            </a:r>
-            <a:endParaRPr sz="1800"/>
+              <a:rPr lang="en" sz="1600">
+                <a:solidFill>
+                  <a:srgbClr val="DEE2E6"/>
+                </a:solidFill>
+              </a:rPr>
+              <a:t>Enemies push each other apart</a:t>
+            </a:r>
+            <a:endParaRPr/>
+          </a:p>
+          <a:p>
+            <a:pPr indent="-317500" lvl="1" marL="914400" rtl="0" algn="l">
+              <a:buClr>
+                <a:srgbClr val="6C757D"/>
+              </a:buClr>
+              <a:spcBef>
+                <a:spcPts val="0"/>
+              </a:spcBef>
+              <a:spcAft>
+                <a:spcPts val="0"/>
+              </a:spcAft>
+              <a:buSzPts val="1400"/>
+              <a:buChar char="○"/>
+            </a:pPr>
+            <a:r>
+              <a:rPr lang="en" sz="1400">
+                <a:solidFill>
+                  <a:srgbClr val="6C757D"/>
+                </a:solidFill>
+              </a:rPr>
+              <a:t>Every enemy against every other</a:t>
+            </a:r>
+            <a:endParaRPr/>
+          </a:p>
+          <a:p>
+            <a:pPr indent="-330200" lvl="0" marL="457200" rtl="0" algn="l">
+              <a:buClr>
+                <a:srgbClr val="DEE2E6"/>
+              </a:buClr>
+              <a:spcBef>
+                <a:spcPts val="0"/>
+              </a:spcBef>
+              <a:spcAft>
+                <a:spcPts val="0"/>
+              </a:spcAft>
+              <a:buSzPts val="1600"/>
+              <a:buChar char="●"/>
+            </a:pPr>
+            <a:r>
+              <a:rPr lang="en" sz="1600">
+                <a:solidFill>
+                  <a:srgbClr val="DEE2E6"/>
+                </a:solidFill>
+              </a:rPr>
+              <a:t>Weapons ask: nearest? inside the aura?</a:t>
+            </a:r>
+            <a:endParaRPr/>
+          </a:p>
+          <a:p>
+            <a:pPr indent="-317500" lvl="1" marL="914400" rtl="0" algn="l">
+              <a:buClr>
+                <a:srgbClr val="6C757D"/>
+              </a:buClr>
+              <a:spcBef>
+                <a:spcPts val="0"/>
+              </a:spcBef>
+              <a:spcAft>
+                <a:spcPts val="0"/>
+              </a:spcAft>
+              <a:buSzPts val="1400"/>
+              <a:buChar char="○"/>
+            </a:pPr>
+            <a:r>
+              <a:rPr lang="en" sz="1400">
+                <a:solidFill>
+                  <a:srgbClr val="6C757D"/>
+                </a:solidFill>
+              </a:rPr>
+              <a:t>Each question looks at every enemy</a:t>
+            </a:r>
+            <a:endParaRPr/>
+          </a:p>
+          <a:p>
+            <a:pPr indent="-330200" lvl="0" marL="457200" rtl="0" algn="l">
+              <a:buClr>
+                <a:srgbClr val="DEE2E6"/>
+              </a:buClr>
+              <a:spcBef>
+                <a:spcPts val="0"/>
+              </a:spcBef>
+              <a:spcAft>
+                <a:spcPts val="0"/>
+              </a:spcAft>
+              <a:buSzPts val="1600"/>
+              <a:buChar char="●"/>
+            </a:pPr>
+            <a:r>
+              <a:rPr lang="en" sz="1600">
+                <a:solidFill>
+                  <a:srgbClr val="DEE2E6"/>
+                </a:solidFill>
+              </a:rPr>
+              <a:t>Space: a thousand more. It crawls. Why?</a:t>
+            </a:r>
+            <a:endParaRPr/>
+          </a:p>
+        </p:txBody>
+      </p:sp>
+      <p:sp>
+        <p:nvSpPr>
+          <p:cNvPr id="141" name="Google Shape;141;p23"/>
+          <p:cNvSpPr txBox="1"/>
+          <p:nvPr>
+            <p:ph idx="2" type="body"/>
+          </p:nvPr>
+        </p:nvSpPr>
+        <p:spPr>
+          <a:xfrm>
+            <a:off x="4150000" y="1152475"/>
+            <a:ext cx="4750000" cy="3600000"/>
+          </a:xfrm>
+          <a:prstGeom prst="rect">
+            <a:avLst/>
+          </a:prstGeom>
+        </p:spPr>
+        <p:txBody>
+          <a:bodyPr anchorCtr="0" anchor="t" bIns="91425" lIns="91425" spcFirstLastPara="1" rIns="91425" wrap="square" tIns="91425">
+            <a:noAutofit/>
+          </a:bodyPr>
+          <a:lstStyle/>
+          <a:p>
+            <a:pPr indent="0" lvl="0" marL="0" rtl="0" algn="l">
+              <a:lnSpc>
+                <a:spcPct val="115000"/>
+              </a:lnSpc>
+              <a:spcBef>
+                <a:spcPts val="0"/>
+              </a:spcBef>
+              <a:spcAft>
+                <a:spcPts val="0"/>
+              </a:spcAft>
+              <a:buNone/>
+            </a:pPr>
+            <a:r>
+              <a:rPr lang="en" sz="1000">
+                <a:highlight>
+                  <a:schemeClr val="dk2"/>
+                </a:highlight>
+                <a:latin typeface="Consolas"/>
+                <a:ea typeface="Consolas"/>
+                <a:cs typeface="Consolas"/>
+                <a:sym typeface="Consolas"/>
+              </a:rPr>
+              <a:t>public void Separate()</a:t>
+            </a:r>
+            <a:endParaRPr sz="1000">
+              <a:solidFill>
+                <a:srgbClr val="CCCCCC"/>
+              </a:solidFill>
+              <a:highlight>
+                <a:schemeClr val="dk2"/>
+              </a:highlight>
+              <a:latin typeface="Consolas"/>
+              <a:ea typeface="Consolas"/>
+              <a:cs typeface="Consolas"/>
+              <a:sym typeface="Consolas"/>
+            </a:endParaRPr>
+          </a:p>
+          <a:p>
+            <a:pPr indent="0" lvl="0" marL="0" rtl="0" algn="l">
+              <a:lnSpc>
+                <a:spcPct val="115000"/>
+              </a:lnSpc>
+              <a:spcBef>
+                <a:spcPts val="0"/>
+              </a:spcBef>
+              <a:spcAft>
+                <a:spcPts val="0"/>
+              </a:spcAft>
+              <a:buNone/>
+            </a:pPr>
+            <a:r>
+              <a:rPr lang="en" sz="1000">
+                <a:highlight>
+                  <a:schemeClr val="dk2"/>
+                </a:highlight>
+                <a:latin typeface="Consolas"/>
+                <a:ea typeface="Consolas"/>
+                <a:cs typeface="Consolas"/>
+                <a:sym typeface="Consolas"/>
+              </a:rPr>
+              <a:t>{</a:t>
+            </a:r>
+            <a:endParaRPr sz="1000">
+              <a:solidFill>
+                <a:srgbClr val="CCCCCC"/>
+              </a:solidFill>
+              <a:highlight>
+                <a:schemeClr val="dk2"/>
+              </a:highlight>
+              <a:latin typeface="Consolas"/>
+              <a:ea typeface="Consolas"/>
+              <a:cs typeface="Consolas"/>
+              <a:sym typeface="Consolas"/>
+            </a:endParaRPr>
+          </a:p>
+          <a:p>
+            <a:pPr indent="0" lvl="0" marL="0" rtl="0" algn="l">
+              <a:lnSpc>
+                <a:spcPct val="115000"/>
+              </a:lnSpc>
+              <a:spcBef>
+                <a:spcPts val="0"/>
+              </a:spcBef>
+              <a:spcAft>
+                <a:spcPts val="0"/>
+              </a:spcAft>
+              <a:buNone/>
+            </a:pPr>
+            <a:r>
+              <a:rPr lang="en" sz="1000">
+                <a:highlight>
+                  <a:schemeClr val="dk2"/>
+                </a:highlight>
+                <a:latin typeface="Consolas"/>
+                <a:ea typeface="Consolas"/>
+                <a:cs typeface="Consolas"/>
+                <a:sym typeface="Consolas"/>
+              </a:rPr>
+              <a:t>    for (int i = 0; i &lt; _enemies.Count; i++)</a:t>
+            </a:r>
+            <a:endParaRPr sz="1000">
+              <a:solidFill>
+                <a:srgbClr val="CCCCCC"/>
+              </a:solidFill>
+              <a:highlight>
+                <a:schemeClr val="dk2"/>
+              </a:highlight>
+              <a:latin typeface="Consolas"/>
+              <a:ea typeface="Consolas"/>
+              <a:cs typeface="Consolas"/>
+              <a:sym typeface="Consolas"/>
+            </a:endParaRPr>
+          </a:p>
+          <a:p>
+            <a:pPr indent="0" lvl="0" marL="0" rtl="0" algn="l">
+              <a:lnSpc>
+                <a:spcPct val="115000"/>
+              </a:lnSpc>
+              <a:spcBef>
+                <a:spcPts val="0"/>
+              </a:spcBef>
+              <a:spcAft>
+                <a:spcPts val="0"/>
+              </a:spcAft>
+              <a:buNone/>
+            </a:pPr>
+            <a:r>
+              <a:rPr lang="en" sz="1000">
+                <a:highlight>
+                  <a:schemeClr val="dk2"/>
+                </a:highlight>
+                <a:latin typeface="Consolas"/>
+                <a:ea typeface="Consolas"/>
+                <a:cs typeface="Consolas"/>
+                <a:sym typeface="Consolas"/>
+              </a:rPr>
+              <a:t>    {</a:t>
+            </a:r>
+            <a:endParaRPr sz="1000">
+              <a:solidFill>
+                <a:srgbClr val="CCCCCC"/>
+              </a:solidFill>
+              <a:highlight>
+                <a:schemeClr val="dk2"/>
+              </a:highlight>
+              <a:latin typeface="Consolas"/>
+              <a:ea typeface="Consolas"/>
+              <a:cs typeface="Consolas"/>
+              <a:sym typeface="Consolas"/>
+            </a:endParaRPr>
+          </a:p>
+          <a:p>
+            <a:pPr indent="0" lvl="0" marL="0" rtl="0" algn="l">
+              <a:lnSpc>
+                <a:spcPct val="115000"/>
+              </a:lnSpc>
+              <a:spcBef>
+                <a:spcPts val="0"/>
+              </a:spcBef>
+              <a:spcAft>
+                <a:spcPts val="0"/>
+              </a:spcAft>
+              <a:buNone/>
+            </a:pPr>
+            <a:r>
+              <a:rPr lang="en" sz="1000">
+                <a:highlight>
+                  <a:schemeClr val="dk2"/>
+                </a:highlight>
+                <a:latin typeface="Consolas"/>
+                <a:ea typeface="Consolas"/>
+                <a:cs typeface="Consolas"/>
+                <a:sym typeface="Consolas"/>
+              </a:rPr>
+              <a:t>        for (int j = i + 1;</a:t>
+            </a:r>
+            <a:endParaRPr sz="1000">
+              <a:solidFill>
+                <a:srgbClr val="CCCCCC"/>
+              </a:solidFill>
+              <a:highlight>
+                <a:schemeClr val="dk2"/>
+              </a:highlight>
+              <a:latin typeface="Consolas"/>
+              <a:ea typeface="Consolas"/>
+              <a:cs typeface="Consolas"/>
+              <a:sym typeface="Consolas"/>
+            </a:endParaRPr>
+          </a:p>
+          <a:p>
+            <a:pPr indent="0" lvl="0" marL="0" rtl="0" algn="l">
+              <a:lnSpc>
+                <a:spcPct val="115000"/>
+              </a:lnSpc>
+              <a:spcBef>
+                <a:spcPts val="0"/>
+              </a:spcBef>
+              <a:spcAft>
+                <a:spcPts val="0"/>
+              </a:spcAft>
+              <a:buNone/>
+            </a:pPr>
+            <a:r>
+              <a:rPr lang="en" sz="1000">
+                <a:highlight>
+                  <a:schemeClr val="dk2"/>
+                </a:highlight>
+                <a:latin typeface="Consolas"/>
+                <a:ea typeface="Consolas"/>
+                <a:cs typeface="Consolas"/>
+                <a:sym typeface="Consolas"/>
+              </a:rPr>
+              <a:t>             j &lt; _enemies.Count; j++)</a:t>
+            </a:r>
+            <a:endParaRPr sz="1000">
+              <a:solidFill>
+                <a:srgbClr val="CCCCCC"/>
+              </a:solidFill>
+              <a:highlight>
+                <a:schemeClr val="dk2"/>
+              </a:highlight>
+              <a:latin typeface="Consolas"/>
+              <a:ea typeface="Consolas"/>
+              <a:cs typeface="Consolas"/>
+              <a:sym typeface="Consolas"/>
+            </a:endParaRPr>
+          </a:p>
+          <a:p>
+            <a:pPr indent="0" lvl="0" marL="0" rtl="0" algn="l">
+              <a:lnSpc>
+                <a:spcPct val="115000"/>
+              </a:lnSpc>
+              <a:spcBef>
+                <a:spcPts val="0"/>
+              </a:spcBef>
+              <a:spcAft>
+                <a:spcPts val="0"/>
+              </a:spcAft>
+              <a:buNone/>
+            </a:pPr>
+            <a:r>
+              <a:rPr lang="en" sz="1000">
+                <a:highlight>
+                  <a:schemeClr val="dk2"/>
+                </a:highlight>
+                <a:latin typeface="Consolas"/>
+                <a:ea typeface="Consolas"/>
+                <a:cs typeface="Consolas"/>
+                <a:sym typeface="Consolas"/>
+              </a:rPr>
+              <a:t>            Push(_enemies[i], _enemies[j]);</a:t>
+            </a:r>
+            <a:endParaRPr sz="1000">
+              <a:solidFill>
+                <a:srgbClr val="CCCCCC"/>
+              </a:solidFill>
+              <a:highlight>
+                <a:schemeClr val="dk2"/>
+              </a:highlight>
+              <a:latin typeface="Consolas"/>
+              <a:ea typeface="Consolas"/>
+              <a:cs typeface="Consolas"/>
+              <a:sym typeface="Consolas"/>
+            </a:endParaRPr>
+          </a:p>
+          <a:p>
+            <a:pPr indent="0" lvl="0" marL="0" rtl="0" algn="l">
+              <a:lnSpc>
+                <a:spcPct val="115000"/>
+              </a:lnSpc>
+              <a:spcBef>
+                <a:spcPts val="0"/>
+              </a:spcBef>
+              <a:spcAft>
+                <a:spcPts val="0"/>
+              </a:spcAft>
+              <a:buNone/>
+            </a:pPr>
+            <a:r>
+              <a:rPr lang="en" sz="1000">
+                <a:highlight>
+                  <a:schemeClr val="dk2"/>
+                </a:highlight>
+                <a:latin typeface="Consolas"/>
+                <a:ea typeface="Consolas"/>
+                <a:cs typeface="Consolas"/>
+                <a:sym typeface="Consolas"/>
+              </a:rPr>
+              <a:t>    }</a:t>
+            </a:r>
+            <a:endParaRPr sz="1000">
+              <a:solidFill>
+                <a:srgbClr val="CCCCCC"/>
+              </a:solidFill>
+              <a:highlight>
+                <a:schemeClr val="dk2"/>
+              </a:highlight>
+              <a:latin typeface="Consolas"/>
+              <a:ea typeface="Consolas"/>
+              <a:cs typeface="Consolas"/>
+              <a:sym typeface="Consolas"/>
+            </a:endParaRPr>
+          </a:p>
+          <a:p>
+            <a:pPr indent="0" lvl="0" marL="0" rtl="0" algn="l">
+              <a:lnSpc>
+                <a:spcPct val="115000"/>
+              </a:lnSpc>
+              <a:spcBef>
+                <a:spcPts val="0"/>
+              </a:spcBef>
+              <a:spcAft>
+                <a:spcPts val="0"/>
+              </a:spcAft>
+              <a:buNone/>
+            </a:pPr>
+            <a:r>
+              <a:rPr lang="en" sz="1000">
+                <a:highlight>
+                  <a:schemeClr val="dk2"/>
+                </a:highlight>
+                <a:latin typeface="Consolas"/>
+                <a:ea typeface="Consolas"/>
+                <a:cs typeface="Consolas"/>
+                <a:sym typeface="Consolas"/>
+              </a:rPr>
+              <a:t>}</a:t>
+            </a:r>
+            <a:endParaRPr sz="1000">
+              <a:solidFill>
+                <a:srgbClr val="CCCCCC"/>
+              </a:solidFill>
+              <a:highlight>
+                <a:schemeClr val="dk2"/>
+              </a:highlight>
+              <a:latin typeface="Consolas"/>
+              <a:ea typeface="Consolas"/>
+              <a:cs typeface="Consolas"/>
+              <a:sym typeface="Consolas"/>
+            </a:endParaRPr>
           </a:p>
         </p:txBody>
       </p:sp>
@@ -18526,7 +18703,7 @@
       <p:grpSpPr/>
       <p:sp>
         <p:nvSpPr>
-          <p:cNvPr id="140" name="Google Shape;140;p23"/>
+          <p:cNvPr id="128" name="Google Shape;128;p21"/>
           <p:cNvSpPr txBox="1"/>
           <p:nvPr>
             <p:ph type="title"/>
@@ -18557,6 +18734,133 @@
               <a:buNone/>
             </a:pPr>
             <a:r>
+              <a:rPr lang="en">
+                <a:solidFill>
+                  <a:schemeClr val="accent5"/>
+                </a:solidFill>
+              </a:rPr>
+              <a:t>Objects Implementation</a:t>
+            </a:r>
+            <a:endParaRPr>
+              <a:solidFill>
+                <a:schemeClr val="accent5"/>
+              </a:solidFill>
+            </a:endParaRPr>
+          </a:p>
+        </p:txBody>
+      </p:sp>
+      <p:sp>
+        <p:nvSpPr>
+          <p:cNvPr id="129" name="Google Shape;129;p21"/>
+          <p:cNvSpPr txBox="1"/>
+          <p:nvPr>
+            <p:ph idx="1" type="body"/>
+          </p:nvPr>
+        </p:nvSpPr>
+        <p:spPr>
+          <a:xfrm>
+            <a:off x="311700" y="885950"/>
+            <a:ext cx="8520600" cy="4023300"/>
+          </a:xfrm>
+          <a:prstGeom prst="rect">
+            <a:avLst/>
+          </a:prstGeom>
+        </p:spPr>
+        <p:txBody>
+          <a:bodyPr anchorCtr="0" anchor="ctr" bIns="91425" lIns="91425" spcFirstLastPara="1" rIns="91425" wrap="square" tIns="91425">
+            <a:normAutofit/>
+          </a:bodyPr>
+          <a:lstStyle/>
+          <a:p>
+            <a:pPr indent="0" lvl="0" marL="0" rtl="0" algn="ctr">
+              <a:spcBef>
+                <a:spcPts val="0"/>
+              </a:spcBef>
+              <a:spcAft>
+                <a:spcPts val="1200"/>
+              </a:spcAft>
+              <a:buNone/>
+            </a:pPr>
+            <a:r>
+              <a:rPr lang="en" sz="2900">
+                <a:latin typeface="VT323"/>
+                <a:ea typeface="VT323"/>
+                <a:cs typeface="VT323"/>
+                <a:sym typeface="VT323"/>
+              </a:rPr>
+              <a:t>DEMO!</a:t>
+            </a:r>
+            <a:endParaRPr/>
+          </a:p>
+          <a:p>
+            <a:pPr indent="0" lvl="0" marL="0" rtl="0" algn="ctr">
+              <a:spcBef>
+                <a:spcPts val="0"/>
+              </a:spcBef>
+              <a:spcAft>
+                <a:spcPts val="0"/>
+              </a:spcAft>
+              <a:buNone/>
+            </a:pPr>
+            <a:r>
+              <a:rPr lang="en" sz="1800"/>
+              <a:t>Survivors0: press Space until it slows down</a:t>
+            </a:r>
+            <a:endParaRPr sz="1800"/>
+          </a:p>
+        </p:txBody>
+      </p:sp>
+    </p:spTree>
+  </p:cSld>
+  <p:clrMapOvr>
+    <a:masterClrMapping/>
+  </p:clrMapOvr>
+</p:sld>
+</file>
+
+<file path=ppt/slides/slide8.xml><?xml version="1.0" encoding="utf-8"?>
+<p:sld xmlns:a="http://schemas.openxmlformats.org/drawingml/2006/main" xmlns:p="http://schemas.openxmlformats.org/presentationml/2006/main" xmlns:r="http://schemas.openxmlformats.org/officeDocument/2006/relationships">
+  <p:cSld>
+    <p:spTree>
+      <p:nvGrpSpPr>
+        <p:cNvPr id="1" name=""/>
+        <p:cNvGrpSpPr/>
+        <p:nvPr/>
+      </p:nvGrpSpPr>
+      <p:grpSpPr/>
+      <p:sp>
+        <p:nvSpPr>
+          <p:cNvPr id="140" name="Google Shape;140;p23"/>
+          <p:cNvSpPr txBox="1"/>
+          <p:nvPr>
+            <p:ph type="title"/>
+          </p:nvPr>
+        </p:nvSpPr>
+        <p:spPr>
+          <a:xfrm>
+            <a:off x="311700" y="195615"/>
+            <a:ext cx="8520600" cy="572700"/>
+          </a:xfrm>
+          <a:prstGeom prst="rect">
+            <a:avLst/>
+          </a:prstGeom>
+        </p:spPr>
+        <p:txBody>
+          <a:bodyPr anchorCtr="0" anchor="t" bIns="91425" lIns="91425" spcFirstLastPara="1" rIns="91425" wrap="square" tIns="91425">
+            <a:normAutofit fontScale="90000"/>
+          </a:bodyPr>
+          <a:lstStyle/>
+          <a:p>
+            <a:pPr indent="0" lvl="0" marL="0" rtl="0" algn="l">
+              <a:spcBef>
+                <a:spcPts val="0"/>
+              </a:spcBef>
+              <a:spcAft>
+                <a:spcPts val="0"/>
+              </a:spcAft>
+              <a:buNone/>
+            </a:pPr>
+            <a:r>
               <a:rPr lang="en"/>
               <a:t>Profiling</a:t>
             </a:r>
@@ -19130,7 +19434,7 @@
 </p:sld>
 </file>
 
-<file path=ppt/slides/slide8.xml><?xml version="1.0" encoding="utf-8"?>
+<file path=ppt/slides/slide9.xml><?xml version="1.0" encoding="utf-8"?>
 <p:sld xmlns:a="http://schemas.openxmlformats.org/drawingml/2006/main" xmlns:p="http://schemas.openxmlformats.org/presentationml/2006/main" xmlns:r="http://schemas.openxmlformats.org/officeDocument/2006/relationships">
   <p:cSld>
     <p:spTree>
@@ -19810,133 +20114,6 @@
               </a:rPr>
               <a:t>Move and separate, per step, on one laptop. That’s O(n²).</a:t>
             </a:r>
-          </a:p>
-        </p:txBody>
-      </p:sp>
-    </p:spTree>
-  </p:cSld>
-  <p:clrMapOvr>
-    <a:masterClrMapping/>
-  </p:clrMapOvr>
-</p:sld>
-</file>
-
-<file path=ppt/slides/slide9.xml><?xml version="1.0" encoding="utf-8"?>
-<p:sld xmlns:a="http://schemas.openxmlformats.org/drawingml/2006/main" xmlns:p="http://schemas.openxmlformats.org/presentationml/2006/main" xmlns:r="http://schemas.openxmlformats.org/officeDocument/2006/relationships">
-  <p:cSld>
-    <p:spTree>
-      <p:nvGrpSpPr>
-        <p:cNvPr id="1" name=""/>
-        <p:cNvGrpSpPr/>
-        <p:nvPr/>
-      </p:nvGrpSpPr>
-      <p:grpSpPr/>
-      <p:sp>
-        <p:nvSpPr>
-          <p:cNvPr id="128" name="Google Shape;128;p21"/>
-          <p:cNvSpPr txBox="1"/>
-          <p:nvPr>
-            <p:ph type="title"/>
-          </p:nvPr>
-        </p:nvSpPr>
-        <p:spPr>
-          <a:xfrm>
-            <a:off x="311700" y="195615"/>
-            <a:ext cx="8520600" cy="572700"/>
-          </a:xfrm>
-          <a:prstGeom prst="rect">
-            <a:avLst/>
-          </a:prstGeom>
-        </p:spPr>
-        <p:txBody>
-          <a:bodyPr anchorCtr="0" anchor="t" bIns="91425" lIns="91425" spcFirstLastPara="1" rIns="91425" wrap="square" tIns="91425">
-            <a:normAutofit fontScale="90000"/>
-          </a:bodyPr>
-          <a:lstStyle/>
-          <a:p>
-            <a:pPr indent="0" lvl="0" marL="0" rtl="0" algn="l">
-              <a:spcBef>
-                <a:spcPts val="0"/>
-              </a:spcBef>
-              <a:spcAft>
-                <a:spcPts val="0"/>
-              </a:spcAft>
-              <a:buNone/>
-            </a:pPr>
-            <a:r>
-              <a:rPr lang="en">
-                <a:solidFill>
-                  <a:schemeClr val="accent5"/>
-                </a:solidFill>
-              </a:rPr>
-              <a:t>Profiling Implementation</a:t>
-            </a:r>
-            <a:endParaRPr>
-              <a:solidFill>
-                <a:schemeClr val="accent5"/>
-              </a:solidFill>
-            </a:endParaRPr>
-          </a:p>
-        </p:txBody>
-      </p:sp>
-      <p:sp>
-        <p:nvSpPr>
-          <p:cNvPr id="129" name="Google Shape;129;p21"/>
-          <p:cNvSpPr txBox="1"/>
-          <p:nvPr>
-            <p:ph idx="1" type="body"/>
-          </p:nvPr>
-        </p:nvSpPr>
-        <p:spPr>
-          <a:xfrm>
-            <a:off x="311700" y="885950"/>
-            <a:ext cx="8520600" cy="4023300"/>
-          </a:xfrm>
-          <a:prstGeom prst="rect">
-            <a:avLst/>
-          </a:prstGeom>
-        </p:spPr>
-        <p:txBody>
-          <a:bodyPr anchorCtr="0" anchor="ctr" bIns="91425" lIns="91425" spcFirstLastPara="1" rIns="91425" wrap="square" tIns="91425">
-            <a:normAutofit/>
-          </a:bodyPr>
-          <a:lstStyle/>
-          <a:p>
-            <a:pPr indent="0" lvl="0" marL="0" rtl="0" algn="ctr">
-              <a:spcBef>
-                <a:spcPts val="0"/>
-              </a:spcBef>
-              <a:spcAft>
-                <a:spcPts val="1200"/>
-              </a:spcAft>
-              <a:buNone/>
-            </a:pPr>
-            <a:r>
-              <a:rPr lang="en" sz="2900">
-                <a:latin typeface="VT323"/>
-                <a:ea typeface="VT323"/>
-                <a:cs typeface="VT323"/>
-                <a:sym typeface="VT323"/>
-              </a:rPr>
-              <a:t>DEMO!</a:t>
-            </a:r>
-            <a:endParaRPr/>
-          </a:p>
-          <a:p>
-            <a:pPr indent="0" lvl="0" marL="0" rtl="0" algn="ctr">
-              <a:spcBef>
-                <a:spcPts val="0"/>
-              </a:spcBef>
-              <a:spcAft>
-                <a:spcPts val="0"/>
-              </a:spcAft>
-              <a:buNone/>
-            </a:pPr>
-            <a:r>
-              <a:rPr lang="en" sz="1800"/>
-              <a:t>Survivors1: F3, then Space</a:t>
-            </a:r>
-            <a:endParaRPr sz="1800"/>
           </a:p>
         </p:txBody>
       </p:sp>

--- a/slides/12 Vampire Survivors.pptx
+++ b/slides/12 Vampire Survivors.pptx
@@ -15,13 +15,16 @@
     <p:sldId id="259" r:id="rId9"/>
     <p:sldId id="297" r:id="rId56"/>
     <p:sldId id="298" r:id="rId57"/>
+    <p:sldId id="320" r:id="rId36"/>
     <p:sldId id="299" r:id="rId58"/>
     <p:sldId id="300" r:id="rId59"/>
     <p:sldId id="301" r:id="rId60"/>
+    <p:sldId id="319" r:id="rId37"/>
     <p:sldId id="302" r:id="rId61"/>
     <p:sldId id="303" r:id="rId62"/>
     <p:sldId id="304" r:id="rId63"/>
     <p:sldId id="305" r:id="rId64"/>
+    <p:sldId id="318" r:id="rId38"/>
     <p:sldId id="306" r:id="rId65"/>
     <p:sldId id="307" r:id="rId66"/>
     <p:sldId id="308" r:id="rId67"/>
@@ -29,6 +32,7 @@
     <p:sldId id="310" r:id="rId69"/>
     <p:sldId id="311" r:id="rId70"/>
     <p:sldId id="312" r:id="rId71"/>
+    <p:sldId id="317" r:id="rId39"/>
     <p:sldId id="313" r:id="rId72"/>
     <p:sldId id="314" r:id="rId73"/>
     <p:sldId id="280" r:id="rId30"/>
@@ -2294,6 +2298,238 @@
           <a:p>
             <a:r>
               <a:t>The main topic: performance with thousands of enemies. Measure first, then fix the algorithm, then the data. The last lesson is the course recap.</a:t>
+            </a:r>
+          </a:p>
+        </p:txBody>
+      </p:sp>
+    </p:spTree>
+  </p:cSld>
+  <p:clrMapOvr>
+    <a:masterClrMapping/>
+  </p:clrMapOvr>
+</p:notes>
+</file>
+
+<file path=ppt/notesSlides/notesSlide30.xml><?xml version="1.0" encoding="utf-8"?>
+<p:notes xmlns:a="http://schemas.openxmlformats.org/drawingml/2006/main" xmlns:p="http://schemas.openxmlformats.org/presentationml/2006/main" xmlns:r="http://schemas.openxmlformats.org/officeDocument/2006/relationships">
+  <p:cSld>
+    <p:spTree>
+      <p:nvGrpSpPr>
+        <p:cNvPr id="1" name=""/>
+        <p:cNvGrpSpPr/>
+        <p:nvPr/>
+      </p:nvGrpSpPr>
+      <p:grpSpPr>
+        <a:xfrm>
+          <a:off x="0" y="0"/>
+          <a:ext cx="0" cy="0"/>
+          <a:chOff x="0" y="0"/>
+          <a:chExt cx="0" cy="0"/>
+        </a:xfrm>
+      </p:grpSpPr>
+      <p:sp>
+        <p:nvSpPr>
+          <p:cNvPr id="2" name="Slide Image Placeholder 1"/>
+          <p:cNvSpPr>
+            <a:spLocks noGrp="1"/>
+          </p:cNvSpPr>
+          <p:nvPr>
+            <p:ph type="sldImg" idx="2"/>
+          </p:nvPr>
+        </p:nvSpPr>
+        <p:spPr/>
+      </p:sp>
+      <p:sp>
+        <p:nvSpPr>
+          <p:cNvPr id="3" name="Notes Placeholder 2"/>
+          <p:cNvSpPr>
+            <a:spLocks noGrp="1"/>
+          </p:cNvSpPr>
+          <p:nvPr>
+            <p:ph type="body" idx="1"/>
+          </p:nvPr>
+        </p:nvSpPr>
+        <p:spPr/>
+        <p:txBody>
+          <a:bodyPr/>
+          <a:lstStyle/>
+          <a:p>
+            <a:r>
+              <a:t>Pairs, about 5 minutes. Separate drops to about 1.3 ms at 10,000. Moving hardly changes: it was never the problem.</a:t>
+            </a:r>
+          </a:p>
+        </p:txBody>
+      </p:sp>
+    </p:spTree>
+  </p:cSld>
+  <p:clrMapOvr>
+    <a:masterClrMapping/>
+  </p:clrMapOvr>
+</p:notes>
+</file>
+
+<file path=ppt/notesSlides/notesSlide31.xml><?xml version="1.0" encoding="utf-8"?>
+<p:notes xmlns:a="http://schemas.openxmlformats.org/drawingml/2006/main" xmlns:p="http://schemas.openxmlformats.org/presentationml/2006/main" xmlns:r="http://schemas.openxmlformats.org/officeDocument/2006/relationships">
+  <p:cSld>
+    <p:spTree>
+      <p:nvGrpSpPr>
+        <p:cNvPr id="1" name=""/>
+        <p:cNvGrpSpPr/>
+        <p:nvPr/>
+      </p:nvGrpSpPr>
+      <p:grpSpPr>
+        <a:xfrm>
+          <a:off x="0" y="0"/>
+          <a:ext cx="0" cy="0"/>
+          <a:chOff x="0" y="0"/>
+          <a:chExt cx="0" cy="0"/>
+        </a:xfrm>
+      </p:grpSpPr>
+      <p:sp>
+        <p:nvSpPr>
+          <p:cNvPr id="2" name="Slide Image Placeholder 1"/>
+          <p:cNvSpPr>
+            <a:spLocks noGrp="1"/>
+          </p:cNvSpPr>
+          <p:nvPr>
+            <p:ph type="sldImg" idx="2"/>
+          </p:nvPr>
+        </p:nvSpPr>
+        <p:spPr/>
+      </p:sp>
+      <p:sp>
+        <p:nvSpPr>
+          <p:cNvPr id="3" name="Notes Placeholder 2"/>
+          <p:cNvSpPr>
+            <a:spLocks noGrp="1"/>
+          </p:cNvSpPr>
+          <p:nvPr>
+            <p:ph type="body" idx="1"/>
+          </p:nvPr>
+        </p:nvSpPr>
+        <p:spPr/>
+        <p:txBody>
+          <a:bodyPr/>
+          <a:lstStyle/>
+          <a:p>
+            <a:r>
+              <a:t>Pairs, about 5 minutes. About 4 ms instead of over 100. The tests compare the grid with checking every pair.</a:t>
+            </a:r>
+          </a:p>
+        </p:txBody>
+      </p:sp>
+    </p:spTree>
+  </p:cSld>
+  <p:clrMapOvr>
+    <a:masterClrMapping/>
+  </p:clrMapOvr>
+</p:notes>
+</file>
+
+<file path=ppt/notesSlides/notesSlide32.xml><?xml version="1.0" encoding="utf-8"?>
+<p:notes xmlns:a="http://schemas.openxmlformats.org/drawingml/2006/main" xmlns:p="http://schemas.openxmlformats.org/presentationml/2006/main" xmlns:r="http://schemas.openxmlformats.org/officeDocument/2006/relationships">
+  <p:cSld>
+    <p:spTree>
+      <p:nvGrpSpPr>
+        <p:cNvPr id="1" name=""/>
+        <p:cNvGrpSpPr/>
+        <p:nvPr/>
+      </p:nvGrpSpPr>
+      <p:grpSpPr>
+        <a:xfrm>
+          <a:off x="0" y="0"/>
+          <a:ext cx="0" cy="0"/>
+          <a:chOff x="0" y="0"/>
+          <a:chExt cx="0" cy="0"/>
+        </a:xfrm>
+      </p:grpSpPr>
+      <p:sp>
+        <p:nvSpPr>
+          <p:cNvPr id="2" name="Slide Image Placeholder 1"/>
+          <p:cNvSpPr>
+            <a:spLocks noGrp="1"/>
+          </p:cNvSpPr>
+          <p:nvPr>
+            <p:ph type="sldImg" idx="2"/>
+          </p:nvPr>
+        </p:nvSpPr>
+        <p:spPr/>
+      </p:sp>
+      <p:sp>
+        <p:nvSpPr>
+          <p:cNvPr id="3" name="Notes Placeholder 2"/>
+          <p:cNvSpPr>
+            <a:spLocks noGrp="1"/>
+          </p:cNvSpPr>
+          <p:nvPr>
+            <p:ph type="body" idx="1"/>
+          </p:nvPr>
+        </p:nvSpPr>
+        <p:spPr/>
+        <p:txBody>
+          <a:bodyPr/>
+          <a:lstStyle/>
+          <a:p>
+            <a:r>
+              <a:t>Pairs, about 5 minutes. Around 2,000 enemies on a laptop, and Separate takes almost all of it.</a:t>
+            </a:r>
+          </a:p>
+        </p:txBody>
+      </p:sp>
+    </p:spTree>
+  </p:cSld>
+  <p:clrMapOvr>
+    <a:masterClrMapping/>
+  </p:clrMapOvr>
+</p:notes>
+</file>
+
+<file path=ppt/notesSlides/notesSlide33.xml><?xml version="1.0" encoding="utf-8"?>
+<p:notes xmlns:a="http://schemas.openxmlformats.org/drawingml/2006/main" xmlns:p="http://schemas.openxmlformats.org/presentationml/2006/main" xmlns:r="http://schemas.openxmlformats.org/officeDocument/2006/relationships">
+  <p:cSld>
+    <p:spTree>
+      <p:nvGrpSpPr>
+        <p:cNvPr id="1" name=""/>
+        <p:cNvGrpSpPr/>
+        <p:nvPr/>
+      </p:nvGrpSpPr>
+      <p:grpSpPr>
+        <a:xfrm>
+          <a:off x="0" y="0"/>
+          <a:ext cx="0" cy="0"/>
+          <a:chOff x="0" y="0"/>
+          <a:chExt cx="0" cy="0"/>
+        </a:xfrm>
+      </p:grpSpPr>
+      <p:sp>
+        <p:nvSpPr>
+          <p:cNvPr id="2" name="Slide Image Placeholder 1"/>
+          <p:cNvSpPr>
+            <a:spLocks noGrp="1"/>
+          </p:cNvSpPr>
+          <p:nvPr>
+            <p:ph type="sldImg" idx="2"/>
+          </p:nvPr>
+        </p:nvSpPr>
+        <p:spPr/>
+      </p:sp>
+      <p:sp>
+        <p:nvSpPr>
+          <p:cNvPr id="3" name="Notes Placeholder 2"/>
+          <p:cNvSpPr>
+            <a:spLocks noGrp="1"/>
+          </p:cNvSpPr>
+          <p:nvPr>
+            <p:ph type="body" idx="1"/>
+          </p:nvPr>
+        </p:nvSpPr>
+        <p:spPr/>
+        <p:txBody>
+          <a:bodyPr/>
+          <a:lstStyle/>
+          <a:p>
+            <a:r>
+              <a:t>Pairs, about 3 minutes. n(n−1)/2: about 2 million, and about 50 million. Keep the numbers for the profiler.</a:t>
             </a:r>
           </a:p>
         </p:txBody>
@@ -6409,7 +6645,7 @@
       <p:grpSpPr/>
       <p:sp>
         <p:nvSpPr>
-          <p:cNvPr id="128" name="Google Shape;128;p21"/>
+          <p:cNvPr id="293" name="Google Shape;293;p45"/>
           <p:cNvSpPr txBox="1"/>
           <p:nvPr>
             <p:ph type="title"/>
@@ -6445,7 +6681,7 @@
                   <a:schemeClr val="accent5"/>
                 </a:solidFill>
               </a:rPr>
-              <a:t>Profiling Implementation</a:t>
+              <a:t>Where the Time Goes</a:t>
             </a:r>
             <a:endParaRPr>
               <a:solidFill>
@@ -6457,7 +6693,7 @@
       </p:sp>
       <p:sp>
         <p:nvSpPr>
-          <p:cNvPr id="129" name="Google Shape;129;p21"/>
+          <p:cNvPr id="294" name="Google Shape;294;p45"/>
           <p:cNvSpPr txBox="1"/>
           <p:nvPr>
             <p:ph idx="1" type="body"/>
@@ -6466,53 +6702,617 @@
         <p:spPr>
           <a:xfrm>
             <a:off x="311700" y="885950"/>
-            <a:ext cx="8520600" cy="4023300"/>
+            <a:ext cx="8520600" cy="521208"/>
           </a:xfrm>
           <a:prstGeom prst="rect">
             <a:avLst/>
           </a:prstGeom>
         </p:spPr>
         <p:txBody>
-          <a:bodyPr anchorCtr="0" anchor="ctr" bIns="91425" lIns="91425" spcFirstLastPara="1" rIns="91425" wrap="square" tIns="91425">
+          <a:bodyPr anchorCtr="0" anchor="t" bIns="91425" lIns="91425" spcFirstLastPara="1" rIns="91425" wrap="square" tIns="91425">
             <a:normAutofit/>
           </a:bodyPr>
           <a:lstStyle/>
           <a:p>
-            <a:pPr indent="0" lvl="0" marL="0" rtl="0" algn="ctr">
-              <a:spcBef>
-                <a:spcPts val="0"/>
-              </a:spcBef>
-              <a:spcAft>
-                <a:spcPts val="1200"/>
-              </a:spcAft>
-              <a:buNone/>
+            <a:pPr indent="-330200" lvl="0" marL="457200" rtl="0" algn="l">
+              <a:spcBef>
+                <a:spcPts val="0"/>
+              </a:spcBef>
+              <a:spcAft>
+                <a:spcPts val="0"/>
+              </a:spcAft>
+              <a:buSzPts val="1600"/>
+              <a:buChar char="●"/>
             </a:pPr>
             <a:r>
-              <a:rPr lang="en" sz="2900">
-                <a:latin typeface="VT323"/>
-                <a:ea typeface="VT323"/>
-                <a:cs typeface="VT323"/>
-                <a:sym typeface="VT323"/>
-              </a:rPr>
-              <a:t>DEMO!</a:t>
+              <a:rPr lang="en"/>
+              <a:t>Separating the enemies takes almost all of it. Twice the enemies, four times the work.</a:t>
             </a:r>
             <a:endParaRPr/>
           </a:p>
-          <a:p>
-            <a:pPr indent="0" lvl="0" marL="0" rtl="0" algn="ctr">
-              <a:spcBef>
-                <a:spcPts val="0"/>
-              </a:spcBef>
-              <a:spcAft>
-                <a:spcPts val="0"/>
-              </a:spcAft>
-              <a:buNone/>
-            </a:pPr>
-            <a:r>
-              <a:rPr lang="en" sz="1800"/>
-              <a:t>Survivors1: F3, then Space</a:t>
-            </a:r>
-            <a:endParaRPr sz="1800"/>
+        </p:txBody>
+      </p:sp>
+      <p:sp>
+        <p:nvSpPr>
+          <p:cNvPr id="295" name="TextBox 294"/>
+          <p:cNvSpPr txBox="1"/>
+          <p:nvPr/>
+        </p:nvSpPr>
+        <p:spPr>
+          <a:xfrm>
+            <a:off x="274320" y="1463040"/>
+            <a:ext cx="1645920" cy="329184"/>
+          </a:xfrm>
+          <a:prstGeom prst="rect">
+            <a:avLst/>
+          </a:prstGeom>
+          <a:noFill/>
+        </p:spPr>
+        <p:txBody>
+          <a:bodyPr wrap="square">
+            <a:spAutoFit/>
+          </a:bodyPr>
+          <a:lstStyle/>
+          <a:p>
+            <a:pPr algn="r"/>
+            <a:r>
+              <a:rPr sz="1300" b="1" i="0">
+                <a:solidFill>
+                  <a:srgbClr val="DEE2E6"/>
+                </a:solidFill>
+              </a:rPr>
+              <a:t>1,000 enemies</a:t>
+            </a:r>
+          </a:p>
+        </p:txBody>
+      </p:sp>
+      <p:sp>
+        <p:nvSpPr>
+          <p:cNvPr id="296" name="Rectangle 295"/>
+          <p:cNvSpPr/>
+          <p:nvPr/>
+        </p:nvSpPr>
+        <p:spPr>
+          <a:xfrm>
+            <a:off x="2011680" y="1463040"/>
+            <a:ext cx="64545" cy="329184"/>
+          </a:xfrm>
+          <a:prstGeom prst="rect">
+            <a:avLst/>
+          </a:prstGeom>
+          <a:solidFill>
+            <a:srgbClr val="2E3338"/>
+          </a:solidFill>
+          <a:ln>
+            <a:noFill/>
+          </a:ln>
+          <a:effectLst/>
+        </p:spPr>
+        <p:style>
+          <a:lnRef idx="1">
+            <a:schemeClr val="accent1"/>
+          </a:lnRef>
+          <a:fillRef idx="3">
+            <a:schemeClr val="accent1"/>
+          </a:fillRef>
+          <a:effectRef idx="2">
+            <a:schemeClr val="accent1"/>
+          </a:effectRef>
+          <a:fontRef idx="minor">
+            <a:schemeClr val="lt1"/>
+          </a:fontRef>
+        </p:style>
+        <p:txBody>
+          <a:bodyPr rtlCol="0" anchor="ctr" wrap="square" lIns="73152" rIns="73152"/>
+          <a:lstStyle/>
+          <a:p>
+            <a:pPr algn="ctr"/>
+            <a:r>
+              <a:rPr sz="1400" b="0">
+                <a:solidFill>
+                  <a:srgbClr val="DEE2E6"/>
+                </a:solidFill>
+              </a:rPr>
+              <a:t/>
+            </a:r>
+          </a:p>
+        </p:txBody>
+      </p:sp>
+      <p:sp>
+        <p:nvSpPr>
+          <p:cNvPr id="297" name="TextBox 296"/>
+          <p:cNvSpPr txBox="1"/>
+          <p:nvPr/>
+        </p:nvSpPr>
+        <p:spPr>
+          <a:xfrm>
+            <a:off x="2149377" y="1463040"/>
+            <a:ext cx="1280160" cy="329184"/>
+          </a:xfrm>
+          <a:prstGeom prst="rect">
+            <a:avLst/>
+          </a:prstGeom>
+          <a:noFill/>
+        </p:spPr>
+        <p:txBody>
+          <a:bodyPr wrap="square">
+            <a:spAutoFit/>
+          </a:bodyPr>
+          <a:lstStyle/>
+          <a:p>
+            <a:pPr algn="l"/>
+            <a:r>
+              <a:rPr sz="1300" b="0" i="0">
+                <a:solidFill>
+                  <a:srgbClr val="9AA3AB"/>
+                </a:solidFill>
+              </a:rPr>
+              <a:t>1.2 ms</a:t>
+            </a:r>
+          </a:p>
+        </p:txBody>
+      </p:sp>
+      <p:sp>
+        <p:nvSpPr>
+          <p:cNvPr id="298" name="TextBox 297"/>
+          <p:cNvSpPr txBox="1"/>
+          <p:nvPr/>
+        </p:nvSpPr>
+        <p:spPr>
+          <a:xfrm>
+            <a:off x="274320" y="1920240"/>
+            <a:ext cx="1645920" cy="329184"/>
+          </a:xfrm>
+          <a:prstGeom prst="rect">
+            <a:avLst/>
+          </a:prstGeom>
+          <a:noFill/>
+        </p:spPr>
+        <p:txBody>
+          <a:bodyPr wrap="square">
+            <a:spAutoFit/>
+          </a:bodyPr>
+          <a:lstStyle/>
+          <a:p>
+            <a:pPr algn="r"/>
+            <a:r>
+              <a:rPr sz="1300" b="1" i="0">
+                <a:solidFill>
+                  <a:srgbClr val="DEE2E6"/>
+                </a:solidFill>
+              </a:rPr>
+              <a:t>2,000</a:t>
+            </a:r>
+          </a:p>
+        </p:txBody>
+      </p:sp>
+      <p:sp>
+        <p:nvSpPr>
+          <p:cNvPr id="299" name="Rectangle 298"/>
+          <p:cNvSpPr/>
+          <p:nvPr/>
+        </p:nvSpPr>
+        <p:spPr>
+          <a:xfrm>
+            <a:off x="2011680" y="1920240"/>
+            <a:ext cx="242047" cy="329184"/>
+          </a:xfrm>
+          <a:prstGeom prst="rect">
+            <a:avLst/>
+          </a:prstGeom>
+          <a:solidFill>
+            <a:srgbClr val="2E3338"/>
+          </a:solidFill>
+          <a:ln>
+            <a:noFill/>
+          </a:ln>
+          <a:effectLst/>
+        </p:spPr>
+        <p:style>
+          <a:lnRef idx="1">
+            <a:schemeClr val="accent1"/>
+          </a:lnRef>
+          <a:fillRef idx="3">
+            <a:schemeClr val="accent1"/>
+          </a:fillRef>
+          <a:effectRef idx="2">
+            <a:schemeClr val="accent1"/>
+          </a:effectRef>
+          <a:fontRef idx="minor">
+            <a:schemeClr val="lt1"/>
+          </a:fontRef>
+        </p:style>
+        <p:txBody>
+          <a:bodyPr rtlCol="0" anchor="ctr" wrap="square" lIns="73152" rIns="73152"/>
+          <a:lstStyle/>
+          <a:p>
+            <a:pPr algn="ctr"/>
+            <a:r>
+              <a:rPr sz="1400" b="0">
+                <a:solidFill>
+                  <a:srgbClr val="DEE2E6"/>
+                </a:solidFill>
+              </a:rPr>
+              <a:t/>
+            </a:r>
+          </a:p>
+        </p:txBody>
+      </p:sp>
+      <p:sp>
+        <p:nvSpPr>
+          <p:cNvPr id="300" name="TextBox 299"/>
+          <p:cNvSpPr txBox="1"/>
+          <p:nvPr/>
+        </p:nvSpPr>
+        <p:spPr>
+          <a:xfrm>
+            <a:off x="2326879" y="1920240"/>
+            <a:ext cx="1280160" cy="329184"/>
+          </a:xfrm>
+          <a:prstGeom prst="rect">
+            <a:avLst/>
+          </a:prstGeom>
+          <a:noFill/>
+        </p:spPr>
+        <p:txBody>
+          <a:bodyPr wrap="square">
+            <a:spAutoFit/>
+          </a:bodyPr>
+          <a:lstStyle/>
+          <a:p>
+            <a:pPr algn="l"/>
+            <a:r>
+              <a:rPr sz="1300" b="0" i="0">
+                <a:solidFill>
+                  <a:srgbClr val="9AA3AB"/>
+                </a:solidFill>
+              </a:rPr>
+              <a:t>4.5 ms</a:t>
+            </a:r>
+          </a:p>
+        </p:txBody>
+      </p:sp>
+      <p:sp>
+        <p:nvSpPr>
+          <p:cNvPr id="301" name="TextBox 300"/>
+          <p:cNvSpPr txBox="1"/>
+          <p:nvPr/>
+        </p:nvSpPr>
+        <p:spPr>
+          <a:xfrm>
+            <a:off x="274320" y="2377440"/>
+            <a:ext cx="1645920" cy="329184"/>
+          </a:xfrm>
+          <a:prstGeom prst="rect">
+            <a:avLst/>
+          </a:prstGeom>
+          <a:noFill/>
+        </p:spPr>
+        <p:txBody>
+          <a:bodyPr wrap="square">
+            <a:spAutoFit/>
+          </a:bodyPr>
+          <a:lstStyle/>
+          <a:p>
+            <a:pPr algn="r"/>
+            <a:r>
+              <a:rPr sz="1300" b="1" i="0">
+                <a:solidFill>
+                  <a:srgbClr val="DEE2E6"/>
+                </a:solidFill>
+              </a:rPr>
+              <a:t>5,000</a:t>
+            </a:r>
+          </a:p>
+        </p:txBody>
+      </p:sp>
+      <p:sp>
+        <p:nvSpPr>
+          <p:cNvPr id="302" name="Rectangle 301"/>
+          <p:cNvSpPr/>
+          <p:nvPr/>
+        </p:nvSpPr>
+        <p:spPr>
+          <a:xfrm>
+            <a:off x="2011680" y="2377440"/>
+            <a:ext cx="1452282" cy="329184"/>
+          </a:xfrm>
+          <a:prstGeom prst="rect">
+            <a:avLst/>
+          </a:prstGeom>
+          <a:solidFill>
+            <a:srgbClr val="2E3338"/>
+          </a:solidFill>
+          <a:ln>
+            <a:noFill/>
+          </a:ln>
+          <a:effectLst/>
+        </p:spPr>
+        <p:style>
+          <a:lnRef idx="1">
+            <a:schemeClr val="accent1"/>
+          </a:lnRef>
+          <a:fillRef idx="3">
+            <a:schemeClr val="accent1"/>
+          </a:fillRef>
+          <a:effectRef idx="2">
+            <a:schemeClr val="accent1"/>
+          </a:effectRef>
+          <a:fontRef idx="minor">
+            <a:schemeClr val="lt1"/>
+          </a:fontRef>
+        </p:style>
+        <p:txBody>
+          <a:bodyPr rtlCol="0" anchor="ctr" wrap="square" lIns="73152" rIns="73152"/>
+          <a:lstStyle/>
+          <a:p>
+            <a:pPr algn="ctr"/>
+            <a:r>
+              <a:rPr sz="1400" b="0">
+                <a:solidFill>
+                  <a:srgbClr val="DEE2E6"/>
+                </a:solidFill>
+              </a:rPr>
+              <a:t/>
+            </a:r>
+          </a:p>
+        </p:txBody>
+      </p:sp>
+      <p:sp>
+        <p:nvSpPr>
+          <p:cNvPr id="303" name="TextBox 302"/>
+          <p:cNvSpPr txBox="1"/>
+          <p:nvPr/>
+        </p:nvSpPr>
+        <p:spPr>
+          <a:xfrm>
+            <a:off x="3537114" y="2377440"/>
+            <a:ext cx="1280160" cy="329184"/>
+          </a:xfrm>
+          <a:prstGeom prst="rect">
+            <a:avLst/>
+          </a:prstGeom>
+          <a:noFill/>
+        </p:spPr>
+        <p:txBody>
+          <a:bodyPr wrap="square">
+            <a:spAutoFit/>
+          </a:bodyPr>
+          <a:lstStyle/>
+          <a:p>
+            <a:pPr algn="l"/>
+            <a:r>
+              <a:rPr sz="1300" b="0" i="0">
+                <a:solidFill>
+                  <a:srgbClr val="9AA3AB"/>
+                </a:solidFill>
+              </a:rPr>
+              <a:t>27 ms</a:t>
+            </a:r>
+          </a:p>
+        </p:txBody>
+      </p:sp>
+      <p:sp>
+        <p:nvSpPr>
+          <p:cNvPr id="304" name="TextBox 303"/>
+          <p:cNvSpPr txBox="1"/>
+          <p:nvPr/>
+        </p:nvSpPr>
+        <p:spPr>
+          <a:xfrm>
+            <a:off x="274320" y="2834640"/>
+            <a:ext cx="1645920" cy="329184"/>
+          </a:xfrm>
+          <a:prstGeom prst="rect">
+            <a:avLst/>
+          </a:prstGeom>
+          <a:noFill/>
+        </p:spPr>
+        <p:txBody>
+          <a:bodyPr wrap="square">
+            <a:spAutoFit/>
+          </a:bodyPr>
+          <a:lstStyle/>
+          <a:p>
+            <a:pPr algn="r"/>
+            <a:r>
+              <a:rPr sz="1300" b="1" i="0">
+                <a:solidFill>
+                  <a:srgbClr val="DEE2E6"/>
+                </a:solidFill>
+              </a:rPr>
+              <a:t>10,000</a:t>
+            </a:r>
+          </a:p>
+        </p:txBody>
+      </p:sp>
+      <p:sp>
+        <p:nvSpPr>
+          <p:cNvPr id="305" name="Rectangle 304"/>
+          <p:cNvSpPr/>
+          <p:nvPr/>
+        </p:nvSpPr>
+        <p:spPr>
+          <a:xfrm>
+            <a:off x="2011680" y="2834640"/>
+            <a:ext cx="5755341" cy="329184"/>
+          </a:xfrm>
+          <a:prstGeom prst="rect">
+            <a:avLst/>
+          </a:prstGeom>
+          <a:solidFill>
+            <a:srgbClr val="D45D35"/>
+          </a:solidFill>
+          <a:ln>
+            <a:noFill/>
+          </a:ln>
+          <a:effectLst/>
+        </p:spPr>
+        <p:style>
+          <a:lnRef idx="1">
+            <a:schemeClr val="accent1"/>
+          </a:lnRef>
+          <a:fillRef idx="3">
+            <a:schemeClr val="accent1"/>
+          </a:fillRef>
+          <a:effectRef idx="2">
+            <a:schemeClr val="accent1"/>
+          </a:effectRef>
+          <a:fontRef idx="minor">
+            <a:schemeClr val="lt1"/>
+          </a:fontRef>
+        </p:style>
+        <p:txBody>
+          <a:bodyPr rtlCol="0" anchor="ctr" wrap="square" lIns="73152" rIns="73152"/>
+          <a:lstStyle/>
+          <a:p>
+            <a:pPr algn="ctr"/>
+            <a:r>
+              <a:rPr sz="1400" b="0">
+                <a:solidFill>
+                  <a:srgbClr val="DEE2E6"/>
+                </a:solidFill>
+              </a:rPr>
+              <a:t/>
+            </a:r>
+          </a:p>
+        </p:txBody>
+      </p:sp>
+      <p:sp>
+        <p:nvSpPr>
+          <p:cNvPr id="306" name="TextBox 305"/>
+          <p:cNvSpPr txBox="1"/>
+          <p:nvPr/>
+        </p:nvSpPr>
+        <p:spPr>
+          <a:xfrm>
+            <a:off x="7840173" y="2834640"/>
+            <a:ext cx="1280160" cy="329184"/>
+          </a:xfrm>
+          <a:prstGeom prst="rect">
+            <a:avLst/>
+          </a:prstGeom>
+          <a:noFill/>
+        </p:spPr>
+        <p:txBody>
+          <a:bodyPr wrap="square">
+            <a:spAutoFit/>
+          </a:bodyPr>
+          <a:lstStyle/>
+          <a:p>
+            <a:pPr algn="l"/>
+            <a:r>
+              <a:rPr sz="1300" b="0" i="0">
+                <a:solidFill>
+                  <a:srgbClr val="9AA3AB"/>
+                </a:solidFill>
+              </a:rPr>
+              <a:t>107 ms</a:t>
+            </a:r>
+          </a:p>
+        </p:txBody>
+      </p:sp>
+      <p:cxnSp>
+        <p:nvCxnSpPr>
+          <p:cNvPr id="307" name="Connector 306"/>
+          <p:cNvCxnSpPr/>
+          <p:nvPr/>
+        </p:nvCxnSpPr>
+        <p:spPr>
+          <a:xfrm>
+            <a:off x="2909943" y="1325880"/>
+            <a:ext cx="0" cy="1965960"/>
+          </a:xfrm>
+          <a:prstGeom prst="line">
+            <a:avLst/>
+          </a:prstGeom>
+          <a:ln>
+            <a:solidFill>
+              <a:srgbClr val="9AA3AB"/>
+            </a:solidFill>
+            <a:prstDash val="dash"/>
+          </a:ln>
+        </p:spPr>
+        <p:style>
+          <a:lnRef idx="2">
+            <a:schemeClr val="accent1"/>
+          </a:lnRef>
+          <a:fillRef idx="0">
+            <a:schemeClr val="accent1"/>
+          </a:fillRef>
+          <a:effectRef idx="1">
+            <a:schemeClr val="accent1"/>
+          </a:effectRef>
+          <a:fontRef idx="minor">
+            <a:schemeClr val="tx1"/>
+          </a:fontRef>
+        </p:style>
+      </p:cxnSp>
+      <p:sp>
+        <p:nvSpPr>
+          <p:cNvPr id="308" name="TextBox 307"/>
+          <p:cNvSpPr txBox="1"/>
+          <p:nvPr/>
+        </p:nvSpPr>
+        <p:spPr>
+          <a:xfrm>
+            <a:off x="2178423" y="3291840"/>
+            <a:ext cx="1463040" cy="274320"/>
+          </a:xfrm>
+          <a:prstGeom prst="rect">
+            <a:avLst/>
+          </a:prstGeom>
+          <a:noFill/>
+        </p:spPr>
+        <p:txBody>
+          <a:bodyPr wrap="square">
+            <a:spAutoFit/>
+          </a:bodyPr>
+          <a:lstStyle/>
+          <a:p>
+            <a:pPr algn="ctr"/>
+            <a:r>
+              <a:rPr sz="1100" b="0" i="0">
+                <a:solidFill>
+                  <a:srgbClr val="9AA3AB"/>
+                </a:solidFill>
+              </a:rPr>
+              <a:t>one frame: 16.7 ms</a:t>
+            </a:r>
+          </a:p>
+        </p:txBody>
+      </p:sp>
+      <p:sp>
+        <p:nvSpPr>
+          <p:cNvPr id="309" name="TextBox 308"/>
+          <p:cNvSpPr txBox="1"/>
+          <p:nvPr/>
+        </p:nvSpPr>
+        <p:spPr>
+          <a:xfrm>
+            <a:off x="274320" y="3703320"/>
+            <a:ext cx="8595360" cy="365760"/>
+          </a:xfrm>
+          <a:prstGeom prst="rect">
+            <a:avLst/>
+          </a:prstGeom>
+          <a:noFill/>
+        </p:spPr>
+        <p:txBody>
+          <a:bodyPr wrap="square">
+            <a:spAutoFit/>
+          </a:bodyPr>
+          <a:lstStyle/>
+          <a:p>
+            <a:pPr algn="ctr"/>
+            <a:r>
+              <a:rPr sz="1300" b="0" i="0">
+                <a:solidFill>
+                  <a:srgbClr val="9AA3AB"/>
+                </a:solidFill>
+              </a:rPr>
+              <a:t>Move and separate, per step, on one laptop. That’s O(n²).</a:t>
+            </a:r>
           </a:p>
         </p:txBody>
       </p:sp>
@@ -6536,6 +7336,255 @@
       <p:grpSpPr/>
       <p:sp>
         <p:nvSpPr>
+          <p:cNvPr id="128" name="Google Shape;128;p21"/>
+          <p:cNvSpPr txBox="1"/>
+          <p:nvPr>
+            <p:ph type="title"/>
+          </p:nvPr>
+        </p:nvSpPr>
+        <p:spPr>
+          <a:xfrm>
+            <a:off x="311700" y="195615"/>
+            <a:ext cx="8520600" cy="572700"/>
+          </a:xfrm>
+          <a:prstGeom prst="rect">
+            <a:avLst/>
+          </a:prstGeom>
+        </p:spPr>
+        <p:txBody>
+          <a:bodyPr anchorCtr="0" anchor="t" bIns="91425" lIns="91425" spcFirstLastPara="1" rIns="91425" wrap="square" tIns="91425">
+            <a:normAutofit fontScale="90000"/>
+          </a:bodyPr>
+          <a:lstStyle/>
+          <a:p>
+            <a:pPr indent="0" lvl="0" marL="0" rtl="0" algn="l">
+              <a:spcBef>
+                <a:spcPts val="0"/>
+              </a:spcBef>
+              <a:spcAft>
+                <a:spcPts val="0"/>
+              </a:spcAft>
+              <a:buNone/>
+            </a:pPr>
+            <a:r>
+              <a:rPr lang="en">
+                <a:solidFill>
+                  <a:schemeClr val="accent5"/>
+                </a:solidFill>
+              </a:rPr>
+              <a:t>Profiling Implementation</a:t>
+            </a:r>
+            <a:endParaRPr>
+              <a:solidFill>
+                <a:schemeClr val="accent5"/>
+              </a:solidFill>
+            </a:endParaRPr>
+          </a:p>
+        </p:txBody>
+      </p:sp>
+      <p:sp>
+        <p:nvSpPr>
+          <p:cNvPr id="129" name="Google Shape;129;p21"/>
+          <p:cNvSpPr txBox="1"/>
+          <p:nvPr>
+            <p:ph idx="1" type="body"/>
+          </p:nvPr>
+        </p:nvSpPr>
+        <p:spPr>
+          <a:xfrm>
+            <a:off x="311700" y="885950"/>
+            <a:ext cx="8520600" cy="4023300"/>
+          </a:xfrm>
+          <a:prstGeom prst="rect">
+            <a:avLst/>
+          </a:prstGeom>
+        </p:spPr>
+        <p:txBody>
+          <a:bodyPr anchorCtr="0" anchor="ctr" bIns="91425" lIns="91425" spcFirstLastPara="1" rIns="91425" wrap="square" tIns="91425">
+            <a:normAutofit/>
+          </a:bodyPr>
+          <a:lstStyle/>
+          <a:p>
+            <a:pPr indent="0" lvl="0" marL="0" rtl="0" algn="ctr">
+              <a:spcBef>
+                <a:spcPts val="0"/>
+              </a:spcBef>
+              <a:spcAft>
+                <a:spcPts val="1200"/>
+              </a:spcAft>
+              <a:buNone/>
+            </a:pPr>
+            <a:r>
+              <a:rPr lang="en" sz="2900">
+                <a:latin typeface="VT323"/>
+                <a:ea typeface="VT323"/>
+                <a:cs typeface="VT323"/>
+                <a:sym typeface="VT323"/>
+              </a:rPr>
+              <a:t>DEMO!</a:t>
+            </a:r>
+            <a:endParaRPr/>
+          </a:p>
+          <a:p>
+            <a:pPr indent="0" lvl="0" marL="0" rtl="0" algn="ctr">
+              <a:spcBef>
+                <a:spcPts val="0"/>
+              </a:spcBef>
+              <a:spcAft>
+                <a:spcPts val="0"/>
+              </a:spcAft>
+              <a:buNone/>
+            </a:pPr>
+            <a:r>
+              <a:rPr lang="en" sz="1800"/>
+              <a:t>Survivors1: F3, then Space</a:t>
+            </a:r>
+            <a:endParaRPr sz="1800"/>
+          </a:p>
+        </p:txBody>
+      </p:sp>
+    </p:spTree>
+  </p:cSld>
+  <p:clrMapOvr>
+    <a:masterClrMapping/>
+  </p:clrMapOvr>
+</p:sld>
+</file>
+
+<file path=ppt/slides/slide12.xml><?xml version="1.0" encoding="utf-8"?>
+<p:sld xmlns:a="http://schemas.openxmlformats.org/drawingml/2006/main" xmlns:p="http://schemas.openxmlformats.org/presentationml/2006/main" xmlns:r="http://schemas.openxmlformats.org/officeDocument/2006/relationships">
+  <p:cSld>
+    <p:spTree>
+      <p:nvGrpSpPr>
+        <p:cNvPr id="1" name=""/>
+        <p:cNvGrpSpPr/>
+        <p:nvPr/>
+      </p:nvGrpSpPr>
+      <p:grpSpPr/>
+      <p:sp>
+        <p:nvSpPr>
+          <p:cNvPr id="2" name="Title 1"/>
+          <p:cNvSpPr>
+            <a:spLocks noGrp="1"/>
+          </p:cNvSpPr>
+          <p:nvPr>
+            <p:ph type="title"/>
+          </p:nvPr>
+        </p:nvSpPr>
+        <p:spPr/>
+        <p:txBody>
+          <a:bodyPr/>
+          <a:lstStyle/>
+          <a:p>
+            <a:pPr indent="0" lvl="0" marL="0" rtl="0" algn="l">
+              <a:spcBef>
+                <a:spcPts val="0"/>
+              </a:spcBef>
+              <a:spcAft>
+                <a:spcPts val="0"/>
+              </a:spcAft>
+              <a:buNone/>
+            </a:pPr>
+            <a:r>
+              <a:rPr lang="en"/>
+              <a:t>Try It: Find the Limit</a:t>
+            </a:r>
+            <a:endParaRPr/>
+          </a:p>
+        </p:txBody>
+      </p:sp>
+      <p:sp>
+        <p:nvSpPr>
+          <p:cNvPr id="3" name="Text Placeholder 2"/>
+          <p:cNvSpPr>
+            <a:spLocks noGrp="1"/>
+          </p:cNvSpPr>
+          <p:nvPr>
+            <p:ph type="body" idx="1"/>
+          </p:nvPr>
+        </p:nvSpPr>
+        <p:spPr>
+          <a:xfrm>
+            <a:off x="311700" y="885950"/>
+            <a:ext cx="8520600" cy="1289304"/>
+          </a:xfrm>
+        </p:spPr>
+        <p:txBody>
+          <a:bodyPr/>
+          <a:lstStyle/>
+          <a:p>
+            <a:pPr indent="-330200" lvl="0" marL="457200" rtl="0" algn="l">
+              <a:spcBef>
+                <a:spcPts val="0"/>
+              </a:spcBef>
+              <a:spcAft>
+                <a:spcPts val="0"/>
+              </a:spcAft>
+              <a:buSzPts val="1600"/>
+              <a:buChar char="●"/>
+            </a:pPr>
+            <a:r>
+              <a:rPr lang="en"/>
+              <a:t>Survivors1, in Release: dotnet run -c Release</a:t>
+            </a:r>
+            <a:endParaRPr/>
+          </a:p>
+          <a:p>
+            <a:pPr indent="-330200" lvl="0" marL="457200" rtl="0" algn="l">
+              <a:spcBef>
+                <a:spcPts val="0"/>
+              </a:spcBef>
+              <a:spcAft>
+                <a:spcPts val="0"/>
+              </a:spcAft>
+              <a:buSzPts val="1600"/>
+              <a:buChar char="●"/>
+            </a:pPr>
+            <a:r>
+              <a:rPr lang="en"/>
+              <a:t>F3, then Space until a frame takes over 16.7 ms</a:t>
+            </a:r>
+            <a:endParaRPr/>
+          </a:p>
+          <a:p>
+            <a:pPr indent="-330200" lvl="0" marL="457200" rtl="0" algn="l">
+              <a:spcBef>
+                <a:spcPts val="0"/>
+              </a:spcBef>
+              <a:spcAft>
+                <a:spcPts val="0"/>
+              </a:spcAft>
+              <a:buSzPts val="1600"/>
+              <a:buChar char="●"/>
+            </a:pPr>
+            <a:r>
+              <a:rPr lang="en"/>
+              <a:t>How many enemies? Which section?</a:t>
+            </a:r>
+            <a:endParaRPr/>
+          </a:p>
+        </p:txBody>
+      </p:sp>
+    </p:spTree>
+  </p:cSld>
+  <p:clrMapOvr>
+    <a:masterClrMapping/>
+  </p:clrMapOvr>
+</p:sld>
+</file>
+
+<file path=ppt/slides/slide13.xml><?xml version="1.0" encoding="utf-8"?>
+<p:sld xmlns:a="http://schemas.openxmlformats.org/drawingml/2006/main" xmlns:p="http://schemas.openxmlformats.org/presentationml/2006/main" xmlns:r="http://schemas.openxmlformats.org/officeDocument/2006/relationships">
+  <p:cSld>
+    <p:spTree>
+      <p:nvGrpSpPr>
+        <p:cNvPr id="1" name=""/>
+        <p:cNvGrpSpPr/>
+        <p:nvPr/>
+      </p:nvGrpSpPr>
+      <p:grpSpPr/>
+      <p:sp>
+        <p:nvSpPr>
           <p:cNvPr id="140" name="Google Shape;140;p23"/>
           <p:cNvSpPr txBox="1"/>
           <p:nvPr>
@@ -7206,7 +8255,7 @@
 </p:sld>
 </file>
 
-<file path=ppt/slides/slide12.xml><?xml version="1.0" encoding="utf-8"?>
+<file path=ppt/slides/slide14.xml><?xml version="1.0" encoding="utf-8"?>
 <p:sld xmlns:a="http://schemas.openxmlformats.org/drawingml/2006/main" xmlns:p="http://schemas.openxmlformats.org/presentationml/2006/main" xmlns:r="http://schemas.openxmlformats.org/officeDocument/2006/relationships">
   <p:cSld>
     <p:spTree>
@@ -8078,7 +9127,7 @@
 </p:sld>
 </file>
 
-<file path=ppt/slides/slide13.xml><?xml version="1.0" encoding="utf-8"?>
+<file path=ppt/slides/slide15.xml><?xml version="1.0" encoding="utf-8"?>
 <p:sld xmlns:a="http://schemas.openxmlformats.org/drawingml/2006/main" xmlns:p="http://schemas.openxmlformats.org/presentationml/2006/main" xmlns:r="http://schemas.openxmlformats.org/officeDocument/2006/relationships">
   <p:cSld>
     <p:spTree>
@@ -8798,7 +9847,7 @@
 </p:sld>
 </file>
 
-<file path=ppt/slides/slide14.xml><?xml version="1.0" encoding="utf-8"?>
+<file path=ppt/slides/slide16.xml><?xml version="1.0" encoding="utf-8"?>
 <p:sld xmlns:a="http://schemas.openxmlformats.org/drawingml/2006/main" xmlns:p="http://schemas.openxmlformats.org/presentationml/2006/main" xmlns:r="http://schemas.openxmlformats.org/officeDocument/2006/relationships">
   <p:cSld>
     <p:spTree>
@@ -8925,7 +9974,146 @@
 </p:sld>
 </file>
 
-<file path=ppt/slides/slide15.xml><?xml version="1.0" encoding="utf-8"?>
+<file path=ppt/slides/slide17.xml><?xml version="1.0" encoding="utf-8"?>
+<p:sld xmlns:a="http://schemas.openxmlformats.org/drawingml/2006/main" xmlns:p="http://schemas.openxmlformats.org/presentationml/2006/main" xmlns:r="http://schemas.openxmlformats.org/officeDocument/2006/relationships">
+  <p:cSld>
+    <p:spTree>
+      <p:nvGrpSpPr>
+        <p:cNvPr id="1" name=""/>
+        <p:cNvGrpSpPr/>
+        <p:nvPr/>
+      </p:nvGrpSpPr>
+      <p:grpSpPr/>
+      <p:sp>
+        <p:nvSpPr>
+          <p:cNvPr id="2" name="Title 1"/>
+          <p:cNvSpPr>
+            <a:spLocks noGrp="1"/>
+          </p:cNvSpPr>
+          <p:nvPr>
+            <p:ph type="title"/>
+          </p:nvPr>
+        </p:nvSpPr>
+        <p:spPr/>
+        <p:txBody>
+          <a:bodyPr/>
+          <a:lstStyle/>
+          <a:p>
+            <a:pPr indent="0" lvl="0" marL="0" rtl="0" algn="l">
+              <a:spcBef>
+                <a:spcPts val="0"/>
+              </a:spcBef>
+              <a:spcAft>
+                <a:spcPts val="0"/>
+              </a:spcAft>
+              <a:buNone/>
+            </a:pPr>
+            <a:r>
+              <a:rPr lang="en"/>
+              <a:t>Try It: Measure the Grid</a:t>
+            </a:r>
+            <a:endParaRPr/>
+          </a:p>
+        </p:txBody>
+      </p:sp>
+      <p:sp>
+        <p:nvSpPr>
+          <p:cNvPr id="3" name="Text Placeholder 2"/>
+          <p:cNvSpPr>
+            <a:spLocks noGrp="1"/>
+          </p:cNvSpPr>
+          <p:nvPr>
+            <p:ph type="body" idx="1"/>
+          </p:nvPr>
+        </p:nvSpPr>
+        <p:spPr>
+          <a:xfrm>
+            <a:off x="311700" y="885950"/>
+            <a:ext cx="8520600" cy="1673352"/>
+          </a:xfrm>
+        </p:spPr>
+        <p:txBody>
+          <a:bodyPr/>
+          <a:lstStyle/>
+          <a:p>
+            <a:pPr indent="-330200" lvl="0" marL="457200" rtl="0" algn="l">
+              <a:spcBef>
+                <a:spcPts val="0"/>
+              </a:spcBef>
+              <a:spcAft>
+                <a:spcPts val="0"/>
+              </a:spcAft>
+              <a:buSzPts val="1600"/>
+              <a:buChar char="●"/>
+            </a:pPr>
+            <a:r>
+              <a:rPr lang="en"/>
+              <a:t>Survivors2, in Release:</a:t>
+            </a:r>
+            <a:endParaRPr/>
+          </a:p>
+          <a:p>
+            <a:pPr indent="-330200" lvl="0" marL="457200" rtl="0" algn="l">
+              <a:spcBef>
+                <a:spcPts val="0"/>
+              </a:spcBef>
+              <a:spcAft>
+                <a:spcPts val="0"/>
+              </a:spcAft>
+              <a:buSzPts val="1600"/>
+              <a:buChar char="●"/>
+            </a:pPr>
+            <a:r>
+              <a:rPr lang="en"/>
+              <a:t>Go to 10,000 enemies</a:t>
+            </a:r>
+            <a:endParaRPr/>
+          </a:p>
+          <a:p>
+            <a:pPr indent="-330200" lvl="0" marL="457200" rtl="0" algn="l">
+              <a:spcBef>
+                <a:spcPts val="0"/>
+              </a:spcBef>
+              <a:spcAft>
+                <a:spcPts val="0"/>
+              </a:spcAft>
+              <a:buSzPts val="1600"/>
+              <a:buChar char="●"/>
+            </a:pPr>
+            <a:r>
+              <a:rPr lang="en"/>
+              <a:t>Compare Separate with Survivors1</a:t>
+            </a:r>
+            <a:endParaRPr/>
+          </a:p>
+          <a:p>
+            <a:pPr indent="-330200" lvl="0" marL="457200" rtl="0" algn="l">
+              <a:spcBef>
+                <a:spcPts val="0"/>
+              </a:spcBef>
+              <a:spcAft>
+                <a:spcPts val="0"/>
+              </a:spcAft>
+              <a:buSzPts val="1600"/>
+              <a:buChar char="●"/>
+            </a:pPr>
+            <a:r>
+              <a:rPr lang="en"/>
+              <a:t>Then run dotnet test in the folder</a:t>
+            </a:r>
+            <a:endParaRPr/>
+          </a:p>
+        </p:txBody>
+      </p:sp>
+    </p:spTree>
+  </p:cSld>
+  <p:clrMapOvr>
+    <a:masterClrMapping/>
+  </p:clrMapOvr>
+</p:sld>
+</file>
+
+<file path=ppt/slides/slide18.xml><?xml version="1.0" encoding="utf-8"?>
 <p:sld xmlns:a="http://schemas.openxmlformats.org/drawingml/2006/main" xmlns:p="http://schemas.openxmlformats.org/presentationml/2006/main" xmlns:r="http://schemas.openxmlformats.org/officeDocument/2006/relationships">
   <p:cSld>
     <p:spTree>
@@ -10496,7 +11684,7 @@
 </p:sld>
 </file>
 
-<file path=ppt/slides/slide16.xml><?xml version="1.0" encoding="utf-8"?>
+<file path=ppt/slides/slide19.xml><?xml version="1.0" encoding="utf-8"?>
 <p:sld xmlns:a="http://schemas.openxmlformats.org/drawingml/2006/main" xmlns:p="http://schemas.openxmlformats.org/presentationml/2006/main" xmlns:r="http://schemas.openxmlformats.org/officeDocument/2006/relationships">
   <p:cSld>
     <p:spTree>
@@ -11278,7 +12466,120 @@
 </p:sld>
 </file>
 
-<file path=ppt/slides/slide17.xml><?xml version="1.0" encoding="utf-8"?>
+<file path=ppt/slides/slide2.xml><?xml version="1.0" encoding="utf-8"?>
+<p:sld xmlns:a="http://schemas.openxmlformats.org/drawingml/2006/main" xmlns:p="http://schemas.openxmlformats.org/presentationml/2006/main" xmlns:r="http://schemas.openxmlformats.org/officeDocument/2006/relationships">
+  <p:cSld>
+    <p:spTree>
+      <p:nvGrpSpPr>
+        <p:cNvPr id="1" name=""/>
+        <p:cNvGrpSpPr/>
+        <p:nvPr/>
+      </p:nvGrpSpPr>
+      <p:grpSpPr/>
+      <p:sp>
+        <p:nvSpPr>
+          <p:cNvPr id="2" name="Title 1"/>
+          <p:cNvSpPr>
+            <a:spLocks noGrp="1"/>
+          </p:cNvSpPr>
+          <p:nvPr>
+            <p:ph type="title"/>
+          </p:nvPr>
+        </p:nvSpPr>
+        <p:spPr>
+          <a:xfrm>
+            <a:off x="311700" y="195615"/>
+            <a:ext cx="8520600" cy="572700"/>
+          </a:xfrm>
+        </p:spPr>
+        <p:txBody>
+          <a:bodyPr/>
+          <a:lstStyle/>
+          <a:p>
+            <a:pPr indent="0" lvl="0" marL="0" rtl="0" algn="l">
+              <a:spcBef>
+                <a:spcPts val="0"/>
+              </a:spcBef>
+              <a:spcAft>
+                <a:spcPts val="0"/>
+              </a:spcAft>
+              <a:buNone/>
+            </a:pPr>
+            <a:r>
+              <a:rPr lang="en"/>
+              <a:t>Vampire Survivors</a:t>
+            </a:r>
+            <a:endParaRPr/>
+          </a:p>
+        </p:txBody>
+      </p:sp>
+      <p:pic>
+        <p:nvPicPr>
+          <p:cNvPr id="3" name="Picture 2" descr="vampire-survivors.png"/>
+          <p:cNvPicPr>
+            <a:picLocks noChangeAspect="1"/>
+          </p:cNvPicPr>
+          <p:nvPr/>
+        </p:nvPicPr>
+        <p:blipFill>
+          <a:blip r:embed="rId2"/>
+          <a:stretch>
+            <a:fillRect/>
+          </a:stretch>
+        </p:blipFill>
+        <p:spPr>
+          <a:xfrm>
+            <a:off x="1671700" y="960120"/>
+            <a:ext cx="5800599" cy="3657600"/>
+          </a:xfrm>
+          <a:prstGeom prst="rect">
+            <a:avLst/>
+          </a:prstGeom>
+        </p:spPr>
+      </p:pic>
+      <p:sp>
+        <p:nvSpPr>
+          <p:cNvPr id="4" name="TextBox 3"/>
+          <p:cNvSpPr txBox="1"/>
+          <p:nvPr/>
+        </p:nvSpPr>
+        <p:spPr>
+          <a:xfrm>
+            <a:off x="457200" y="4736592"/>
+            <a:ext cx="8229600" cy="274320"/>
+          </a:xfrm>
+          <a:prstGeom prst="rect">
+            <a:avLst/>
+          </a:prstGeom>
+          <a:noFill/>
+        </p:spPr>
+        <p:txBody>
+          <a:bodyPr wrap="square">
+            <a:spAutoFit/>
+          </a:bodyPr>
+          <a:lstStyle/>
+          <a:p>
+            <a:pPr algn="ctr"/>
+            <a:r>
+              <a:rPr sz="900" b="0" i="0">
+                <a:solidFill>
+                  <a:srgbClr val="9AA3AB"/>
+                </a:solidFill>
+              </a:rPr>
+              <a:t>Vampire Survivors (poncle, 2022). Screenshot © poncle.</a:t>
+            </a:r>
+          </a:p>
+        </p:txBody>
+      </p:sp>
+    </p:spTree>
+  </p:cSld>
+  <p:clrMapOvr>
+    <a:masterClrMapping/>
+  </p:clrMapOvr>
+</p:sld>
+</file>
+
+<file path=ppt/slides/slide20.xml><?xml version="1.0" encoding="utf-8"?>
 <p:sld xmlns:a="http://schemas.openxmlformats.org/drawingml/2006/main" xmlns:p="http://schemas.openxmlformats.org/presentationml/2006/main" xmlns:r="http://schemas.openxmlformats.org/officeDocument/2006/relationships">
   <p:cSld>
     <p:spTree>
@@ -11486,7 +12787,7 @@
 </p:sld>
 </file>
 
-<file path=ppt/slides/slide18.xml><?xml version="1.0" encoding="utf-8"?>
+<file path=ppt/slides/slide21.xml><?xml version="1.0" encoding="utf-8"?>
 <p:sld xmlns:a="http://schemas.openxmlformats.org/drawingml/2006/main" xmlns:p="http://schemas.openxmlformats.org/presentationml/2006/main" xmlns:r="http://schemas.openxmlformats.org/officeDocument/2006/relationships">
   <p:cSld>
     <p:spTree>
@@ -12282,7 +13583,7 @@
 </p:sld>
 </file>
 
-<file path=ppt/slides/slide19.xml><?xml version="1.0" encoding="utf-8"?>
+<file path=ppt/slides/slide22.xml><?xml version="1.0" encoding="utf-8"?>
 <p:sld xmlns:a="http://schemas.openxmlformats.org/drawingml/2006/main" xmlns:p="http://schemas.openxmlformats.org/presentationml/2006/main" xmlns:r="http://schemas.openxmlformats.org/officeDocument/2006/relationships">
   <p:cSld>
     <p:spTree>
@@ -12853,120 +14154,7 @@
 </p:sld>
 </file>
 
-<file path=ppt/slides/slide2.xml><?xml version="1.0" encoding="utf-8"?>
-<p:sld xmlns:a="http://schemas.openxmlformats.org/drawingml/2006/main" xmlns:p="http://schemas.openxmlformats.org/presentationml/2006/main" xmlns:r="http://schemas.openxmlformats.org/officeDocument/2006/relationships">
-  <p:cSld>
-    <p:spTree>
-      <p:nvGrpSpPr>
-        <p:cNvPr id="1" name=""/>
-        <p:cNvGrpSpPr/>
-        <p:nvPr/>
-      </p:nvGrpSpPr>
-      <p:grpSpPr/>
-      <p:sp>
-        <p:nvSpPr>
-          <p:cNvPr id="2" name="Title 1"/>
-          <p:cNvSpPr>
-            <a:spLocks noGrp="1"/>
-          </p:cNvSpPr>
-          <p:nvPr>
-            <p:ph type="title"/>
-          </p:nvPr>
-        </p:nvSpPr>
-        <p:spPr>
-          <a:xfrm>
-            <a:off x="311700" y="195615"/>
-            <a:ext cx="8520600" cy="572700"/>
-          </a:xfrm>
-        </p:spPr>
-        <p:txBody>
-          <a:bodyPr/>
-          <a:lstStyle/>
-          <a:p>
-            <a:pPr indent="0" lvl="0" marL="0" rtl="0" algn="l">
-              <a:spcBef>
-                <a:spcPts val="0"/>
-              </a:spcBef>
-              <a:spcAft>
-                <a:spcPts val="0"/>
-              </a:spcAft>
-              <a:buNone/>
-            </a:pPr>
-            <a:r>
-              <a:rPr lang="en"/>
-              <a:t>Vampire Survivors</a:t>
-            </a:r>
-            <a:endParaRPr/>
-          </a:p>
-        </p:txBody>
-      </p:sp>
-      <p:pic>
-        <p:nvPicPr>
-          <p:cNvPr id="3" name="Picture 2" descr="vampire-survivors.png"/>
-          <p:cNvPicPr>
-            <a:picLocks noChangeAspect="1"/>
-          </p:cNvPicPr>
-          <p:nvPr/>
-        </p:nvPicPr>
-        <p:blipFill>
-          <a:blip r:embed="rId2"/>
-          <a:stretch>
-            <a:fillRect/>
-          </a:stretch>
-        </p:blipFill>
-        <p:spPr>
-          <a:xfrm>
-            <a:off x="1671700" y="960120"/>
-            <a:ext cx="5800599" cy="3657600"/>
-          </a:xfrm>
-          <a:prstGeom prst="rect">
-            <a:avLst/>
-          </a:prstGeom>
-        </p:spPr>
-      </p:pic>
-      <p:sp>
-        <p:nvSpPr>
-          <p:cNvPr id="4" name="TextBox 3"/>
-          <p:cNvSpPr txBox="1"/>
-          <p:nvPr/>
-        </p:nvSpPr>
-        <p:spPr>
-          <a:xfrm>
-            <a:off x="457200" y="4736592"/>
-            <a:ext cx="8229600" cy="274320"/>
-          </a:xfrm>
-          <a:prstGeom prst="rect">
-            <a:avLst/>
-          </a:prstGeom>
-          <a:noFill/>
-        </p:spPr>
-        <p:txBody>
-          <a:bodyPr wrap="square">
-            <a:spAutoFit/>
-          </a:bodyPr>
-          <a:lstStyle/>
-          <a:p>
-            <a:pPr algn="ctr"/>
-            <a:r>
-              <a:rPr sz="900" b="0" i="0">
-                <a:solidFill>
-                  <a:srgbClr val="9AA3AB"/>
-                </a:solidFill>
-              </a:rPr>
-              <a:t>Vampire Survivors (poncle, 2022). Screenshot © poncle.</a:t>
-            </a:r>
-          </a:p>
-        </p:txBody>
-      </p:sp>
-    </p:spTree>
-  </p:cSld>
-  <p:clrMapOvr>
-    <a:masterClrMapping/>
-  </p:clrMapOvr>
-</p:sld>
-</file>
-
-<file path=ppt/slides/slide20.xml><?xml version="1.0" encoding="utf-8"?>
+<file path=ppt/slides/slide23.xml><?xml version="1.0" encoding="utf-8"?>
 <p:sld xmlns:a="http://schemas.openxmlformats.org/drawingml/2006/main" xmlns:p="http://schemas.openxmlformats.org/presentationml/2006/main" xmlns:r="http://schemas.openxmlformats.org/officeDocument/2006/relationships">
   <p:cSld>
     <p:spTree>
@@ -13326,7 +14514,7 @@
 </p:sld>
 </file>
 
-<file path=ppt/slides/slide21.xml><?xml version="1.0" encoding="utf-8"?>
+<file path=ppt/slides/slide24.xml><?xml version="1.0" encoding="utf-8"?>
 <p:sld xmlns:a="http://schemas.openxmlformats.org/drawingml/2006/main" xmlns:p="http://schemas.openxmlformats.org/presentationml/2006/main" xmlns:r="http://schemas.openxmlformats.org/officeDocument/2006/relationships">
   <p:cSld>
     <p:spTree>
@@ -13453,7 +14641,129 @@
 </p:sld>
 </file>
 
-<file path=ppt/slides/slide22.xml><?xml version="1.0" encoding="utf-8"?>
+<file path=ppt/slides/slide25.xml><?xml version="1.0" encoding="utf-8"?>
+<p:sld xmlns:a="http://schemas.openxmlformats.org/drawingml/2006/main" xmlns:p="http://schemas.openxmlformats.org/presentationml/2006/main" xmlns:r="http://schemas.openxmlformats.org/officeDocument/2006/relationships">
+  <p:cSld>
+    <p:spTree>
+      <p:nvGrpSpPr>
+        <p:cNvPr id="1" name=""/>
+        <p:cNvGrpSpPr/>
+        <p:nvPr/>
+      </p:nvGrpSpPr>
+      <p:grpSpPr/>
+      <p:sp>
+        <p:nvSpPr>
+          <p:cNvPr id="2" name="Title 1"/>
+          <p:cNvSpPr>
+            <a:spLocks noGrp="1"/>
+          </p:cNvSpPr>
+          <p:nvPr>
+            <p:ph type="title"/>
+          </p:nvPr>
+        </p:nvSpPr>
+        <p:spPr/>
+        <p:txBody>
+          <a:bodyPr/>
+          <a:lstStyle/>
+          <a:p>
+            <a:pPr indent="0" lvl="0" marL="0" rtl="0" algn="l">
+              <a:spcBef>
+                <a:spcPts val="0"/>
+              </a:spcBef>
+              <a:spcAft>
+                <a:spcPts val="0"/>
+              </a:spcAft>
+              <a:buNone/>
+            </a:pPr>
+            <a:r>
+              <a:rPr lang="en"/>
+              <a:t>Try It: Measure the Arrays</a:t>
+            </a:r>
+            <a:endParaRPr/>
+          </a:p>
+        </p:txBody>
+      </p:sp>
+      <p:sp>
+        <p:nvSpPr>
+          <p:cNvPr id="3" name="Text Placeholder 2"/>
+          <p:cNvSpPr>
+            <a:spLocks noGrp="1"/>
+          </p:cNvSpPr>
+          <p:nvPr>
+            <p:ph type="body" idx="1"/>
+          </p:nvPr>
+        </p:nvSpPr>
+        <p:spPr>
+          <a:xfrm>
+            <a:off x="311700" y="885950"/>
+            <a:ext cx="8520600" cy="1289304"/>
+          </a:xfrm>
+        </p:spPr>
+        <p:txBody>
+          <a:bodyPr/>
+          <a:lstStyle/>
+          <a:p>
+            <a:pPr indent="-330200" lvl="0" marL="457200" rtl="0" algn="l">
+              <a:spcBef>
+                <a:spcPts val="0"/>
+              </a:spcBef>
+              <a:spcAft>
+                <a:spcPts val="0"/>
+              </a:spcAft>
+              <a:buSzPts val="1600"/>
+              <a:buChar char="●"/>
+            </a:pPr>
+            <a:r>
+              <a:rPr lang="en"/>
+              <a:t>Survivors3, in Release:</a:t>
+            </a:r>
+            <a:endParaRPr/>
+          </a:p>
+          <a:p>
+            <a:pPr indent="-330200" lvl="0" marL="457200" rtl="0" algn="l">
+              <a:spcBef>
+                <a:spcPts val="0"/>
+              </a:spcBef>
+              <a:spcAft>
+                <a:spcPts val="0"/>
+              </a:spcAft>
+              <a:buSzPts val="1600"/>
+              <a:buChar char="●"/>
+            </a:pPr>
+            <a:r>
+              <a:rPr lang="en"/>
+              <a:t>At 10,000 and 20,000 enemies, compare with Survivors2</a:t>
+            </a:r>
+            <a:endParaRPr/>
+          </a:p>
+          <a:p>
+            <a:pPr indent="-330200" lvl="0" marL="457200" rtl="0" algn="l">
+              <a:spcBef>
+                <a:spcPts val="0"/>
+              </a:spcBef>
+              <a:spcAft>
+                <a:spcPts val="0"/>
+              </a:spcAft>
+              <a:buSzPts val="1600"/>
+              <a:buChar char="●"/>
+            </a:pPr>
+            <a:r>
+              <a:rPr lang="en"/>
+              <a:t>Which sections changed the most?</a:t>
+            </a:r>
+            <a:endParaRPr/>
+          </a:p>
+        </p:txBody>
+      </p:sp>
+    </p:spTree>
+  </p:cSld>
+  <p:clrMapOvr>
+    <a:masterClrMapping/>
+  </p:clrMapOvr>
+</p:sld>
+</file>
+
+<file path=ppt/slides/slide26.xml><?xml version="1.0" encoding="utf-8"?>
 <p:sld xmlns:a="http://schemas.openxmlformats.org/drawingml/2006/main" xmlns:p="http://schemas.openxmlformats.org/presentationml/2006/main" xmlns:r="http://schemas.openxmlformats.org/officeDocument/2006/relationships">
   <p:cSld>
     <p:spTree>
@@ -13887,7 +15197,7 @@
 </p:sld>
 </file>
 
-<file path=ppt/slides/slide23.xml><?xml version="1.0" encoding="utf-8"?>
+<file path=ppt/slides/slide27.xml><?xml version="1.0" encoding="utf-8"?>
 <p:sld xmlns:a="http://schemas.openxmlformats.org/drawingml/2006/main" xmlns:p="http://schemas.openxmlformats.org/presentationml/2006/main" xmlns:r="http://schemas.openxmlformats.org/officeDocument/2006/relationships">
   <p:cSld>
     <p:spTree>
@@ -14410,7 +15720,7 @@
 </p:sld>
 </file>
 
-<file path=ppt/slides/slide24.xml><?xml version="1.0" encoding="utf-8"?>
+<file path=ppt/slides/slide28.xml><?xml version="1.0" encoding="utf-8"?>
 <p:sld xmlns:a="http://schemas.openxmlformats.org/drawingml/2006/main" xmlns:r="http://schemas.openxmlformats.org/officeDocument/2006/relationships" xmlns:mc="http://schemas.openxmlformats.org/markup-compatibility/2006" xmlns:mv="urn:schemas-microsoft-com:mac:vml" xmlns:p="http://schemas.openxmlformats.org/presentationml/2006/main" xmlns:c="http://schemas.openxmlformats.org/drawingml/2006/chart" xmlns:dgm="http://schemas.openxmlformats.org/drawingml/2006/diagram" xmlns:o="urn:schemas-microsoft-com:office:office" xmlns:v="urn:schemas-microsoft-com:vml" xmlns:pvml="urn:schemas-microsoft-com:office:powerpoint" xmlns:com="http://schemas.openxmlformats.org/drawingml/2006/compatibility" xmlns:p14="http://schemas.microsoft.com/office/powerpoint/2010/main" xmlns:p15="http://schemas.microsoft.com/office/powerpoint/2012/main" xmlns:ahyp="http://schemas.microsoft.com/office/drawing/2018/hyperlinkcolor">
   <p:cSld>
     <p:spTree>
@@ -14544,7 +15854,7 @@
 </p:sld>
 </file>
 
-<file path=ppt/slides/slide25.xml><?xml version="1.0" encoding="utf-8"?>
+<file path=ppt/slides/slide29.xml><?xml version="1.0" encoding="utf-8"?>
 <p:sld xmlns:a="http://schemas.openxmlformats.org/drawingml/2006/main" xmlns:r="http://schemas.openxmlformats.org/officeDocument/2006/relationships" xmlns:mc="http://schemas.openxmlformats.org/markup-compatibility/2006" xmlns:mv="urn:schemas-microsoft-com:mac:vml" xmlns:p="http://schemas.openxmlformats.org/presentationml/2006/main" xmlns:c="http://schemas.openxmlformats.org/drawingml/2006/chart" xmlns:dgm="http://schemas.openxmlformats.org/drawingml/2006/diagram" xmlns:o="urn:schemas-microsoft-com:office:office" xmlns:v="urn:schemas-microsoft-com:vml" xmlns:pvml="urn:schemas-microsoft-com:office:powerpoint" xmlns:com="http://schemas.openxmlformats.org/drawingml/2006/compatibility" xmlns:p14="http://schemas.microsoft.com/office/powerpoint/2010/main" xmlns:p15="http://schemas.microsoft.com/office/powerpoint/2012/main" xmlns:ahyp="http://schemas.microsoft.com/office/drawing/2018/hyperlinkcolor">
   <p:cSld>
     <p:spTree>
@@ -15410,7 +16720,96 @@
 </p:sld>
 </file>
 
-<file path=ppt/slides/slide26.xml><?xml version="1.0" encoding="utf-8"?>
+<file path=ppt/slides/slide3.xml><?xml version="1.0" encoding="utf-8"?>
+<p:sld xmlns:a="http://schemas.openxmlformats.org/drawingml/2006/main" xmlns:r="http://schemas.openxmlformats.org/officeDocument/2006/relationships" xmlns:mc="http://schemas.openxmlformats.org/markup-compatibility/2006" xmlns:mv="urn:schemas-microsoft-com:mac:vml" xmlns:p="http://schemas.openxmlformats.org/presentationml/2006/main" xmlns:c="http://schemas.openxmlformats.org/drawingml/2006/chart" xmlns:dgm="http://schemas.openxmlformats.org/drawingml/2006/diagram" xmlns:o="urn:schemas-microsoft-com:office:office" xmlns:v="urn:schemas-microsoft-com:vml" xmlns:pvml="urn:schemas-microsoft-com:office:powerpoint" xmlns:com="http://schemas.openxmlformats.org/drawingml/2006/compatibility" xmlns:p14="http://schemas.microsoft.com/office/powerpoint/2010/main" xmlns:p15="http://schemas.microsoft.com/office/powerpoint/2012/main" xmlns:ahyp="http://schemas.microsoft.com/office/drawing/2018/hyperlinkcolor">
+  <p:cSld>
+    <p:spTree>
+      <p:nvGrpSpPr>
+        <p:cNvPr id="44" name="Shape 44"/>
+        <p:cNvGrpSpPr/>
+        <p:nvPr/>
+      </p:nvGrpSpPr>
+      <p:grpSpPr>
+        <a:xfrm>
+          <a:off x="0" y="0"/>
+          <a:ext cx="0" cy="0"/>
+          <a:chOff x="0" y="0"/>
+          <a:chExt cx="0" cy="0"/>
+        </a:xfrm>
+      </p:grpSpPr>
+      <p:sp>
+        <p:nvSpPr>
+          <p:cNvPr id="45" name="Google Shape;45;p10"/>
+          <p:cNvSpPr txBox="1"/>
+          <p:nvPr>
+            <p:ph type="title"/>
+          </p:nvPr>
+        </p:nvSpPr>
+        <p:spPr>
+          <a:xfrm>
+            <a:off x="311700" y="195615"/>
+            <a:ext cx="8520600" cy="572700"/>
+          </a:xfrm>
+          <a:prstGeom prst="rect">
+            <a:avLst/>
+          </a:prstGeom>
+        </p:spPr>
+        <p:txBody>
+          <a:bodyPr anchorCtr="0" anchor="t" bIns="91425" lIns="91425" spcFirstLastPara="1" rIns="91425" wrap="square" tIns="91425">
+            <a:normAutofit fontScale="90000"/>
+          </a:bodyPr>
+          <a:lstStyle/>
+          <a:p>
+            <a:pPr indent="0" lvl="0" marL="0" rtl="0" algn="l">
+              <a:spcBef>
+                <a:spcPts val="0"/>
+              </a:spcBef>
+              <a:spcAft>
+                <a:spcPts val="0"/>
+              </a:spcAft>
+              <a:buNone/>
+            </a:pPr>
+            <a:r>
+              <a:rPr lang="en"/>
+              <a:t>Today’s Goal</a:t>
+            </a:r>
+            <a:endParaRPr/>
+          </a:p>
+        </p:txBody>
+      </p:sp>
+      <p:pic>
+        <p:nvPicPr>
+          <p:cNvPr id="46" name="Picture 46" descr="vs-play.png"/>
+          <p:cNvPicPr>
+            <a:picLocks noChangeAspect="1"/>
+          </p:cNvPicPr>
+          <p:nvPr/>
+        </p:nvPicPr>
+        <p:blipFill>
+          <a:blip r:embed="rId4"/>
+          <a:stretch>
+            <a:fillRect/>
+          </a:stretch>
+        </p:blipFill>
+        <p:spPr>
+          <a:xfrm>
+            <a:off x="1677201" y="1531275"/>
+            <a:ext cx="5789598" cy="3256648"/>
+          </a:xfrm>
+          <a:prstGeom prst="rect">
+            <a:avLst/>
+          </a:prstGeom>
+        </p:spPr>
+      </p:pic>
+    </p:spTree>
+  </p:cSld>
+  <p:clrMapOvr>
+    <a:masterClrMapping/>
+  </p:clrMapOvr>
+</p:sld>
+</file>
+
+<file path=ppt/slides/slide30.xml><?xml version="1.0" encoding="utf-8"?>
 <p:sld xmlns:a="http://schemas.openxmlformats.org/drawingml/2006/main" xmlns:r="http://schemas.openxmlformats.org/officeDocument/2006/relationships" xmlns:mc="http://schemas.openxmlformats.org/markup-compatibility/2006" xmlns:mv="urn:schemas-microsoft-com:mac:vml" xmlns:p="http://schemas.openxmlformats.org/presentationml/2006/main" xmlns:c="http://schemas.openxmlformats.org/drawingml/2006/chart" xmlns:dgm="http://schemas.openxmlformats.org/drawingml/2006/diagram" xmlns:o="urn:schemas-microsoft-com:office:office" xmlns:v="urn:schemas-microsoft-com:vml" xmlns:pvml="urn:schemas-microsoft-com:office:powerpoint" xmlns:com="http://schemas.openxmlformats.org/drawingml/2006/compatibility" xmlns:p14="http://schemas.microsoft.com/office/powerpoint/2010/main" xmlns:p15="http://schemas.microsoft.com/office/powerpoint/2012/main" xmlns:ahyp="http://schemas.microsoft.com/office/drawing/2018/hyperlinkcolor">
   <p:cSld>
     <p:spTree>
@@ -16225,7 +17624,7 @@
 </p:sld>
 </file>
 
-<file path=ppt/slides/slide27.xml><?xml version="1.0" encoding="utf-8"?>
+<file path=ppt/slides/slide31.xml><?xml version="1.0" encoding="utf-8"?>
 <p:sld xmlns:a="http://schemas.openxmlformats.org/drawingml/2006/main" xmlns:p="http://schemas.openxmlformats.org/presentationml/2006/main" xmlns:r="http://schemas.openxmlformats.org/officeDocument/2006/relationships">
   <p:cSld>
     <p:spTree>
@@ -16398,7 +17797,7 @@
 </p:sld>
 </file>
 
-<file path=ppt/slides/slide28.xml><?xml version="1.0" encoding="utf-8"?>
+<file path=ppt/slides/slide32.xml><?xml version="1.0" encoding="utf-8"?>
 <p:sld xmlns:a="http://schemas.openxmlformats.org/drawingml/2006/main" xmlns:r="http://schemas.openxmlformats.org/officeDocument/2006/relationships" xmlns:mc="http://schemas.openxmlformats.org/markup-compatibility/2006" xmlns:mv="urn:schemas-microsoft-com:mac:vml" xmlns:p="http://schemas.openxmlformats.org/presentationml/2006/main" xmlns:c="http://schemas.openxmlformats.org/drawingml/2006/chart" xmlns:dgm="http://schemas.openxmlformats.org/drawingml/2006/diagram" xmlns:o="urn:schemas-microsoft-com:office:office" xmlns:v="urn:schemas-microsoft-com:vml" xmlns:pvml="urn:schemas-microsoft-com:office:powerpoint" xmlns:com="http://schemas.openxmlformats.org/drawingml/2006/compatibility" xmlns:p14="http://schemas.microsoft.com/office/powerpoint/2010/main" xmlns:p15="http://schemas.microsoft.com/office/powerpoint/2012/main" xmlns:ahyp="http://schemas.microsoft.com/office/drawing/2018/hyperlinkcolor">
   <p:cSld>
     <p:spTree>
@@ -17230,7 +18629,7 @@
 </p:sld>
 </file>
 
-<file path=ppt/slides/slide29.xml><?xml version="1.0" encoding="utf-8"?>
+<file path=ppt/slides/slide33.xml><?xml version="1.0" encoding="utf-8"?>
 <p:sld xmlns:a="http://schemas.openxmlformats.org/drawingml/2006/main" xmlns:r="http://schemas.openxmlformats.org/officeDocument/2006/relationships" xmlns:mc="http://schemas.openxmlformats.org/markup-compatibility/2006" xmlns:mv="urn:schemas-microsoft-com:mac:vml" xmlns:p="http://schemas.openxmlformats.org/presentationml/2006/main" xmlns:c="http://schemas.openxmlformats.org/drawingml/2006/chart" xmlns:dgm="http://schemas.openxmlformats.org/drawingml/2006/diagram" xmlns:o="urn:schemas-microsoft-com:office:office" xmlns:v="urn:schemas-microsoft-com:vml" xmlns:pvml="urn:schemas-microsoft-com:office:powerpoint" xmlns:com="http://schemas.openxmlformats.org/drawingml/2006/compatibility" xmlns:p14="http://schemas.microsoft.com/office/powerpoint/2010/main" xmlns:p15="http://schemas.microsoft.com/office/powerpoint/2012/main" xmlns:ahyp="http://schemas.microsoft.com/office/drawing/2018/hyperlinkcolor">
   <p:cSld>
     <p:spTree>
@@ -17396,95 +18795,6 @@
           </a:p>
         </p:txBody>
       </p:sp>
-    </p:spTree>
-  </p:cSld>
-  <p:clrMapOvr>
-    <a:masterClrMapping/>
-  </p:clrMapOvr>
-</p:sld>
-</file>
-
-<file path=ppt/slides/slide3.xml><?xml version="1.0" encoding="utf-8"?>
-<p:sld xmlns:a="http://schemas.openxmlformats.org/drawingml/2006/main" xmlns:r="http://schemas.openxmlformats.org/officeDocument/2006/relationships" xmlns:mc="http://schemas.openxmlformats.org/markup-compatibility/2006" xmlns:mv="urn:schemas-microsoft-com:mac:vml" xmlns:p="http://schemas.openxmlformats.org/presentationml/2006/main" xmlns:c="http://schemas.openxmlformats.org/drawingml/2006/chart" xmlns:dgm="http://schemas.openxmlformats.org/drawingml/2006/diagram" xmlns:o="urn:schemas-microsoft-com:office:office" xmlns:v="urn:schemas-microsoft-com:vml" xmlns:pvml="urn:schemas-microsoft-com:office:powerpoint" xmlns:com="http://schemas.openxmlformats.org/drawingml/2006/compatibility" xmlns:p14="http://schemas.microsoft.com/office/powerpoint/2010/main" xmlns:p15="http://schemas.microsoft.com/office/powerpoint/2012/main" xmlns:ahyp="http://schemas.microsoft.com/office/drawing/2018/hyperlinkcolor">
-  <p:cSld>
-    <p:spTree>
-      <p:nvGrpSpPr>
-        <p:cNvPr id="44" name="Shape 44"/>
-        <p:cNvGrpSpPr/>
-        <p:nvPr/>
-      </p:nvGrpSpPr>
-      <p:grpSpPr>
-        <a:xfrm>
-          <a:off x="0" y="0"/>
-          <a:ext cx="0" cy="0"/>
-          <a:chOff x="0" y="0"/>
-          <a:chExt cx="0" cy="0"/>
-        </a:xfrm>
-      </p:grpSpPr>
-      <p:sp>
-        <p:nvSpPr>
-          <p:cNvPr id="45" name="Google Shape;45;p10"/>
-          <p:cNvSpPr txBox="1"/>
-          <p:nvPr>
-            <p:ph type="title"/>
-          </p:nvPr>
-        </p:nvSpPr>
-        <p:spPr>
-          <a:xfrm>
-            <a:off x="311700" y="195615"/>
-            <a:ext cx="8520600" cy="572700"/>
-          </a:xfrm>
-          <a:prstGeom prst="rect">
-            <a:avLst/>
-          </a:prstGeom>
-        </p:spPr>
-        <p:txBody>
-          <a:bodyPr anchorCtr="0" anchor="t" bIns="91425" lIns="91425" spcFirstLastPara="1" rIns="91425" wrap="square" tIns="91425">
-            <a:normAutofit fontScale="90000"/>
-          </a:bodyPr>
-          <a:lstStyle/>
-          <a:p>
-            <a:pPr indent="0" lvl="0" marL="0" rtl="0" algn="l">
-              <a:spcBef>
-                <a:spcPts val="0"/>
-              </a:spcBef>
-              <a:spcAft>
-                <a:spcPts val="0"/>
-              </a:spcAft>
-              <a:buNone/>
-            </a:pPr>
-            <a:r>
-              <a:rPr lang="en"/>
-              <a:t>Today’s Goal</a:t>
-            </a:r>
-            <a:endParaRPr/>
-          </a:p>
-        </p:txBody>
-      </p:sp>
-      <p:pic>
-        <p:nvPicPr>
-          <p:cNvPr id="46" name="Picture 46" descr="vs-play.png"/>
-          <p:cNvPicPr>
-            <a:picLocks noChangeAspect="1"/>
-          </p:cNvPicPr>
-          <p:nvPr/>
-        </p:nvPicPr>
-        <p:blipFill>
-          <a:blip r:embed="rId4"/>
-          <a:stretch>
-            <a:fillRect/>
-          </a:stretch>
-        </p:blipFill>
-        <p:spPr>
-          <a:xfrm>
-            <a:off x="1677201" y="1531275"/>
-            <a:ext cx="5789598" cy="3256648"/>
-          </a:xfrm>
-          <a:prstGeom prst="rect">
-            <a:avLst/>
-          </a:prstGeom>
-        </p:spPr>
-      </p:pic>
     </p:spTree>
   </p:cSld>
   <p:clrMapOvr>
@@ -18830,71 +20140,57 @@
       <p:grpSpPr/>
       <p:sp>
         <p:nvSpPr>
-          <p:cNvPr id="140" name="Google Shape;140;p23"/>
-          <p:cNvSpPr txBox="1"/>
+          <p:cNvPr id="2" name="Title 1"/>
+          <p:cNvSpPr>
+            <a:spLocks noGrp="1"/>
+          </p:cNvSpPr>
           <p:nvPr>
             <p:ph type="title"/>
           </p:nvPr>
         </p:nvSpPr>
+        <p:spPr/>
+        <p:txBody>
+          <a:bodyPr/>
+          <a:lstStyle/>
+          <a:p>
+            <a:pPr indent="0" lvl="0" marL="0" rtl="0" algn="l">
+              <a:spcBef>
+                <a:spcPts val="0"/>
+              </a:spcBef>
+              <a:spcAft>
+                <a:spcPts val="0"/>
+              </a:spcAft>
+              <a:buNone/>
+            </a:pPr>
+            <a:r>
+              <a:rPr lang="en"/>
+              <a:t>Try It: Count the Checks</a:t>
+            </a:r>
+            <a:endParaRPr/>
+          </a:p>
+        </p:txBody>
+      </p:sp>
+      <p:sp>
+        <p:nvSpPr>
+          <p:cNvPr id="3" name="Text Placeholder 2"/>
+          <p:cNvSpPr>
+            <a:spLocks noGrp="1"/>
+          </p:cNvSpPr>
+          <p:nvPr>
+            <p:ph type="body" idx="1"/>
+          </p:nvPr>
+        </p:nvSpPr>
         <p:spPr>
           <a:xfrm>
-            <a:off x="311700" y="195615"/>
-            <a:ext cx="8520600" cy="572700"/>
+            <a:off x="311700" y="885950"/>
+            <a:ext cx="8520600" cy="1289304"/>
           </a:xfrm>
-          <a:prstGeom prst="rect">
-            <a:avLst/>
-          </a:prstGeom>
         </p:spPr>
         <p:txBody>
-          <a:bodyPr anchorCtr="0" anchor="t" bIns="91425" lIns="91425" spcFirstLastPara="1" rIns="91425" wrap="square" tIns="91425">
-            <a:normAutofit fontScale="90000"/>
-          </a:bodyPr>
+          <a:bodyPr/>
           <a:lstStyle/>
           <a:p>
-            <a:pPr indent="0" lvl="0" marL="0" rtl="0" algn="l">
-              <a:spcBef>
-                <a:spcPts val="0"/>
-              </a:spcBef>
-              <a:spcAft>
-                <a:spcPts val="0"/>
-              </a:spcAft>
-              <a:buNone/>
-            </a:pPr>
-            <a:r>
-              <a:rPr lang="en"/>
-              <a:t>Profiling</a:t>
-            </a:r>
-            <a:endParaRPr/>
-          </a:p>
-        </p:txBody>
-      </p:sp>
-      <p:sp>
-        <p:nvSpPr>
-          <p:cNvPr id="293" name="Google Shape;293;p45"/>
-          <p:cNvSpPr txBox="1"/>
-          <p:nvPr>
-            <p:ph type="title"/>
-          </p:nvPr>
-        </p:nvSpPr>
-        <p:spPr>
-          <a:xfrm>
-            <a:off x="311700" y="1152475"/>
-            <a:ext cx="3700000" cy="3500000"/>
-          </a:xfrm>
-          <a:prstGeom prst="rect">
-            <a:avLst/>
-          </a:prstGeom>
-        </p:spPr>
-        <p:txBody>
-          <a:bodyPr anchorCtr="0" anchor="t" bIns="91425" lIns="91425" spcFirstLastPara="1" rIns="91425" wrap="square" tIns="91425">
-            <a:normAutofit fontScale="90000"/>
-          </a:bodyPr>
-          <a:lstStyle/>
-          <a:p>
             <a:pPr indent="-330200" lvl="0" marL="457200" rtl="0" algn="l">
-              <a:buClr>
-                <a:srgbClr val="DEE2E6"/>
-              </a:buClr>
               <a:spcBef>
                 <a:spcPts val="0"/>
               </a:spcBef>
@@ -18905,44 +20201,13 @@
               <a:buChar char="●"/>
             </a:pPr>
             <a:r>
-              <a:rPr lang="en" sz="1600">
-                <a:solidFill>
-                  <a:srgbClr val="DEE2E6"/>
-                </a:solidFill>
-              </a:rPr>
-              <a:t>Measure where the time goes</a:t>
+              <a:rPr lang="en"/>
+              <a:t>On paper:</a:t>
             </a:r>
             <a:endParaRPr/>
           </a:p>
           <a:p>
-            <a:pPr indent="-317500" lvl="1" marL="914400" rtl="0" algn="l">
-              <a:buClr>
-                <a:srgbClr val="6C757D"/>
-              </a:buClr>
-              <a:spcBef>
-                <a:spcPts val="0"/>
-              </a:spcBef>
-              <a:spcAft>
-                <a:spcPts val="0"/>
-              </a:spcAft>
-              <a:buSzPts val="1400"/>
-              <a:buChar char="○"/>
-            </a:pPr>
-            <a:r>
-              <a:rPr lang="en" sz="1400">
-                <a:solidFill>
-                  <a:srgbClr val="6C757D"/>
-                </a:solidFill>
-              </a:rPr>
-              <a:t>Before changing anything</a:t>
-            </a:r>
-            <a:endParaRPr/>
-          </a:p>
-          <a:p>
             <a:pPr indent="-330200" lvl="0" marL="457200" rtl="0" algn="l">
-              <a:buClr>
-                <a:srgbClr val="DEE2E6"/>
-              </a:buClr>
               <a:spcBef>
                 <a:spcPts val="0"/>
               </a:spcBef>
@@ -18953,44 +20218,13 @@
               <a:buChar char="●"/>
             </a:pPr>
             <a:r>
-              <a:rPr lang="en" sz="1600">
-                <a:solidFill>
-                  <a:srgbClr val="DEE2E6"/>
-                </a:solidFill>
-              </a:rPr>
-              <a:t>Time each part of a step</a:t>
+              <a:rPr lang="en"/>
+              <a:t>With 2,000 enemies, how many pairs does Separate check each step?</a:t>
             </a:r>
             <a:endParaRPr/>
           </a:p>
           <a:p>
-            <a:pPr indent="-317500" lvl="1" marL="914400" rtl="0" algn="l">
-              <a:buClr>
-                <a:srgbClr val="6C757D"/>
-              </a:buClr>
-              <a:spcBef>
-                <a:spcPts val="0"/>
-              </a:spcBef>
-              <a:spcAft>
-                <a:spcPts val="0"/>
-              </a:spcAft>
-              <a:buSzPts val="1400"/>
-              <a:buChar char="○"/>
-            </a:pPr>
-            <a:r>
-              <a:rPr lang="en" sz="1400">
-                <a:solidFill>
-                  <a:srgbClr val="6C757D"/>
-                </a:solidFill>
-              </a:rPr>
-              <a:t>A struct scope: measuring allocates nothing</a:t>
-            </a:r>
-            <a:endParaRPr/>
-          </a:p>
-          <a:p>
             <a:pPr indent="-330200" lvl="0" marL="457200" rtl="0" algn="l">
-              <a:buClr>
-                <a:srgbClr val="DEE2E6"/>
-              </a:buClr>
               <a:spcBef>
                 <a:spcPts val="0"/>
               </a:spcBef>
@@ -19001,428 +20235,10 @@
               <a:buChar char="●"/>
             </a:pPr>
             <a:r>
-              <a:rPr lang="en" sz="1600">
-                <a:solidFill>
-                  <a:srgbClr val="DEE2E6"/>
-                </a:solidFill>
-              </a:rPr>
-              <a:t>And count allocations and GCs</a:t>
+              <a:rPr lang="en"/>
+              <a:t>And with 10,000?</a:t>
             </a:r>
             <a:endParaRPr/>
-          </a:p>
-          <a:p>
-            <a:pPr indent="-317500" lvl="1" marL="914400" rtl="0" algn="l">
-              <a:buClr>
-                <a:srgbClr val="6C757D"/>
-              </a:buClr>
-              <a:spcBef>
-                <a:spcPts val="0"/>
-              </a:spcBef>
-              <a:spcAft>
-                <a:spcPts val="0"/>
-              </a:spcAft>
-              <a:buSzPts val="1400"/>
-              <a:buChar char="○"/>
-            </a:pPr>
-            <a:r>
-              <a:rPr lang="en" sz="1400">
-                <a:solidFill>
-                  <a:srgbClr val="6C757D"/>
-                </a:solidFill>
-              </a:rPr>
-              <a:t>LINQ allocates every call</a:t>
-            </a:r>
-            <a:endParaRPr/>
-          </a:p>
-          <a:p>
-            <a:pPr indent="-330200" lvl="0" marL="457200" rtl="0" algn="l">
-              <a:buClr>
-                <a:srgbClr val="DEE2E6"/>
-              </a:buClr>
-              <a:spcBef>
-                <a:spcPts val="0"/>
-              </a:spcBef>
-              <a:spcAft>
-                <a:spcPts val="0"/>
-              </a:spcAft>
-              <a:buSzPts val="1600"/>
-              <a:buChar char="●"/>
-            </a:pPr>
-            <a:r>
-              <a:rPr lang="en" sz="1600">
-                <a:solidFill>
-                  <a:srgbClr val="DEE2E6"/>
-                </a:solidFill>
-              </a:rPr>
-              <a:t>Measure a Release build</a:t>
-            </a:r>
-            <a:endParaRPr/>
-          </a:p>
-        </p:txBody>
-      </p:sp>
-      <p:sp>
-        <p:nvSpPr>
-          <p:cNvPr id="141" name="Google Shape;141;p23"/>
-          <p:cNvSpPr txBox="1"/>
-          <p:nvPr>
-            <p:ph idx="2" type="body"/>
-          </p:nvPr>
-        </p:nvSpPr>
-        <p:spPr>
-          <a:xfrm>
-            <a:off x="4150000" y="1152475"/>
-            <a:ext cx="4750000" cy="3600000"/>
-          </a:xfrm>
-          <a:prstGeom prst="rect">
-            <a:avLst/>
-          </a:prstGeom>
-        </p:spPr>
-        <p:txBody>
-          <a:bodyPr anchorCtr="0" anchor="t" bIns="91425" lIns="91425" spcFirstLastPara="1" rIns="91425" wrap="square" tIns="91425">
-            <a:noAutofit/>
-          </a:bodyPr>
-          <a:lstStyle/>
-          <a:p>
-            <a:pPr indent="0" lvl="0" marL="0" rtl="0" algn="l">
-              <a:lnSpc>
-                <a:spcPct val="115000"/>
-              </a:lnSpc>
-              <a:spcBef>
-                <a:spcPts val="0"/>
-              </a:spcBef>
-              <a:spcAft>
-                <a:spcPts val="0"/>
-              </a:spcAft>
-              <a:buNone/>
-            </a:pPr>
-            <a:r>
-              <a:rPr lang="en" sz="1000">
-                <a:highlight>
-                  <a:schemeClr val="dk2"/>
-                </a:highlight>
-                <a:latin typeface="Consolas"/>
-                <a:ea typeface="Consolas"/>
-                <a:cs typeface="Consolas"/>
-                <a:sym typeface="Consolas"/>
-              </a:rPr>
-              <a:t>using (_profiler.Measure("Move"))</a:t>
-            </a:r>
-            <a:endParaRPr sz="1000">
-              <a:solidFill>
-                <a:srgbClr val="CCCCCC"/>
-              </a:solidFill>
-              <a:highlight>
-                <a:schemeClr val="dk2"/>
-              </a:highlight>
-              <a:latin typeface="Consolas"/>
-              <a:ea typeface="Consolas"/>
-              <a:cs typeface="Consolas"/>
-              <a:sym typeface="Consolas"/>
-            </a:endParaRPr>
-          </a:p>
-          <a:p>
-            <a:pPr indent="0" lvl="0" marL="0" rtl="0" algn="l">
-              <a:lnSpc>
-                <a:spcPct val="115000"/>
-              </a:lnSpc>
-              <a:spcBef>
-                <a:spcPts val="0"/>
-              </a:spcBef>
-              <a:spcAft>
-                <a:spcPts val="0"/>
-              </a:spcAft>
-              <a:buNone/>
-            </a:pPr>
-            <a:r>
-              <a:rPr lang="en" sz="1000">
-                <a:highlight>
-                  <a:schemeClr val="dk2"/>
-                </a:highlight>
-                <a:latin typeface="Consolas"/>
-                <a:ea typeface="Consolas"/>
-                <a:cs typeface="Consolas"/>
-                <a:sym typeface="Consolas"/>
-              </a:rPr>
-              <a:t>    _swarm.Move(dt, _player.Position);</a:t>
-            </a:r>
-            <a:endParaRPr sz="1000">
-              <a:solidFill>
-                <a:srgbClr val="CCCCCC"/>
-              </a:solidFill>
-              <a:highlight>
-                <a:schemeClr val="dk2"/>
-              </a:highlight>
-              <a:latin typeface="Consolas"/>
-              <a:ea typeface="Consolas"/>
-              <a:cs typeface="Consolas"/>
-              <a:sym typeface="Consolas"/>
-            </a:endParaRPr>
-          </a:p>
-          <a:p>
-            <a:pPr indent="0" lvl="0" marL="0" rtl="0" algn="l">
-              <a:lnSpc>
-                <a:spcPct val="115000"/>
-              </a:lnSpc>
-              <a:spcBef>
-                <a:spcPts val="0"/>
-              </a:spcBef>
-              <a:spcAft>
-                <a:spcPts val="0"/>
-              </a:spcAft>
-              <a:buNone/>
-            </a:pPr>
-            <a:r>
-              <a:rPr lang="en" sz="1000">
-                <a:highlight>
-                  <a:schemeClr val="dk2"/>
-                </a:highlight>
-                <a:latin typeface="Consolas"/>
-                <a:ea typeface="Consolas"/>
-                <a:cs typeface="Consolas"/>
-                <a:sym typeface="Consolas"/>
-              </a:rPr>
-              <a:t/>
-            </a:r>
-            <a:endParaRPr sz="1000">
-              <a:solidFill>
-                <a:srgbClr val="CCCCCC"/>
-              </a:solidFill>
-              <a:highlight>
-                <a:schemeClr val="dk2"/>
-              </a:highlight>
-              <a:latin typeface="Consolas"/>
-              <a:ea typeface="Consolas"/>
-              <a:cs typeface="Consolas"/>
-              <a:sym typeface="Consolas"/>
-            </a:endParaRPr>
-          </a:p>
-          <a:p>
-            <a:pPr indent="0" lvl="0" marL="0" rtl="0" algn="l">
-              <a:lnSpc>
-                <a:spcPct val="115000"/>
-              </a:lnSpc>
-              <a:spcBef>
-                <a:spcPts val="0"/>
-              </a:spcBef>
-              <a:spcAft>
-                <a:spcPts val="0"/>
-              </a:spcAft>
-              <a:buNone/>
-            </a:pPr>
-            <a:r>
-              <a:rPr lang="en" sz="1000">
-                <a:highlight>
-                  <a:schemeClr val="dk2"/>
-                </a:highlight>
-                <a:latin typeface="Consolas"/>
-                <a:ea typeface="Consolas"/>
-                <a:cs typeface="Consolas"/>
-                <a:sym typeface="Consolas"/>
-              </a:rPr>
-              <a:t>using (_profiler.Measure("Separate"))</a:t>
-            </a:r>
-            <a:endParaRPr sz="1000">
-              <a:solidFill>
-                <a:srgbClr val="CCCCCC"/>
-              </a:solidFill>
-              <a:highlight>
-                <a:schemeClr val="dk2"/>
-              </a:highlight>
-              <a:latin typeface="Consolas"/>
-              <a:ea typeface="Consolas"/>
-              <a:cs typeface="Consolas"/>
-              <a:sym typeface="Consolas"/>
-            </a:endParaRPr>
-          </a:p>
-          <a:p>
-            <a:pPr indent="0" lvl="0" marL="0" rtl="0" algn="l">
-              <a:lnSpc>
-                <a:spcPct val="115000"/>
-              </a:lnSpc>
-              <a:spcBef>
-                <a:spcPts val="0"/>
-              </a:spcBef>
-              <a:spcAft>
-                <a:spcPts val="0"/>
-              </a:spcAft>
-              <a:buNone/>
-            </a:pPr>
-            <a:r>
-              <a:rPr lang="en" sz="1000">
-                <a:highlight>
-                  <a:schemeClr val="dk2"/>
-                </a:highlight>
-                <a:latin typeface="Consolas"/>
-                <a:ea typeface="Consolas"/>
-                <a:cs typeface="Consolas"/>
-                <a:sym typeface="Consolas"/>
-              </a:rPr>
-              <a:t>    _swarm.Separate();</a:t>
-            </a:r>
-            <a:endParaRPr sz="1000">
-              <a:solidFill>
-                <a:srgbClr val="CCCCCC"/>
-              </a:solidFill>
-              <a:highlight>
-                <a:schemeClr val="dk2"/>
-              </a:highlight>
-              <a:latin typeface="Consolas"/>
-              <a:ea typeface="Consolas"/>
-              <a:cs typeface="Consolas"/>
-              <a:sym typeface="Consolas"/>
-            </a:endParaRPr>
-          </a:p>
-          <a:p>
-            <a:pPr indent="0" lvl="0" marL="0" rtl="0" algn="l">
-              <a:lnSpc>
-                <a:spcPct val="115000"/>
-              </a:lnSpc>
-              <a:spcBef>
-                <a:spcPts val="0"/>
-              </a:spcBef>
-              <a:spcAft>
-                <a:spcPts val="0"/>
-              </a:spcAft>
-              <a:buNone/>
-            </a:pPr>
-            <a:r>
-              <a:rPr lang="en" sz="1000">
-                <a:highlight>
-                  <a:schemeClr val="dk2"/>
-                </a:highlight>
-                <a:latin typeface="Consolas"/>
-                <a:ea typeface="Consolas"/>
-                <a:cs typeface="Consolas"/>
-                <a:sym typeface="Consolas"/>
-              </a:rPr>
-              <a:t/>
-            </a:r>
-            <a:endParaRPr sz="1000">
-              <a:solidFill>
-                <a:srgbClr val="CCCCCC"/>
-              </a:solidFill>
-              <a:highlight>
-                <a:schemeClr val="dk2"/>
-              </a:highlight>
-              <a:latin typeface="Consolas"/>
-              <a:ea typeface="Consolas"/>
-              <a:cs typeface="Consolas"/>
-              <a:sym typeface="Consolas"/>
-            </a:endParaRPr>
-          </a:p>
-          <a:p>
-            <a:pPr indent="0" lvl="0" marL="0" rtl="0" algn="l">
-              <a:lnSpc>
-                <a:spcPct val="115000"/>
-              </a:lnSpc>
-              <a:spcBef>
-                <a:spcPts val="0"/>
-              </a:spcBef>
-              <a:spcAft>
-                <a:spcPts val="0"/>
-              </a:spcAft>
-              <a:buNone/>
-            </a:pPr>
-            <a:r>
-              <a:rPr lang="en" sz="1000">
-                <a:highlight>
-                  <a:schemeClr val="dk2"/>
-                </a:highlight>
-                <a:latin typeface="Consolas"/>
-                <a:ea typeface="Consolas"/>
-                <a:cs typeface="Consolas"/>
-                <a:sym typeface="Consolas"/>
-              </a:rPr>
-              <a:t>// Profiler.cs</a:t>
-            </a:r>
-            <a:endParaRPr sz="1000">
-              <a:solidFill>
-                <a:srgbClr val="CCCCCC"/>
-              </a:solidFill>
-              <a:highlight>
-                <a:schemeClr val="dk2"/>
-              </a:highlight>
-              <a:latin typeface="Consolas"/>
-              <a:ea typeface="Consolas"/>
-              <a:cs typeface="Consolas"/>
-              <a:sym typeface="Consolas"/>
-            </a:endParaRPr>
-          </a:p>
-          <a:p>
-            <a:pPr indent="0" lvl="0" marL="0" rtl="0" algn="l">
-              <a:lnSpc>
-                <a:spcPct val="115000"/>
-              </a:lnSpc>
-              <a:spcBef>
-                <a:spcPts val="0"/>
-              </a:spcBef>
-              <a:spcAft>
-                <a:spcPts val="0"/>
-              </a:spcAft>
-              <a:buNone/>
-            </a:pPr>
-            <a:r>
-              <a:rPr lang="en" sz="1000">
-                <a:highlight>
-                  <a:schemeClr val="dk2"/>
-                </a:highlight>
-                <a:latin typeface="Consolas"/>
-                <a:ea typeface="Consolas"/>
-                <a:cs typeface="Consolas"/>
-                <a:sym typeface="Consolas"/>
-              </a:rPr>
-              <a:t>public Scope Measure(string name) =&gt;</a:t>
-            </a:r>
-            <a:endParaRPr sz="1000">
-              <a:solidFill>
-                <a:srgbClr val="CCCCCC"/>
-              </a:solidFill>
-              <a:highlight>
-                <a:schemeClr val="dk2"/>
-              </a:highlight>
-              <a:latin typeface="Consolas"/>
-              <a:ea typeface="Consolas"/>
-              <a:cs typeface="Consolas"/>
-              <a:sym typeface="Consolas"/>
-            </a:endParaRPr>
-          </a:p>
-          <a:p>
-            <a:pPr indent="0" lvl="0" marL="0" rtl="0" algn="l">
-              <a:lnSpc>
-                <a:spcPct val="115000"/>
-              </a:lnSpc>
-              <a:spcBef>
-                <a:spcPts val="0"/>
-              </a:spcBef>
-              <a:spcAft>
-                <a:spcPts val="0"/>
-              </a:spcAft>
-              <a:buNone/>
-            </a:pPr>
-            <a:r>
-              <a:rPr lang="en" sz="1000">
-                <a:highlight>
-                  <a:schemeClr val="dk2"/>
-                </a:highlight>
-                <a:latin typeface="Consolas"/>
-                <a:ea typeface="Consolas"/>
-                <a:cs typeface="Consolas"/>
-                <a:sym typeface="Consolas"/>
-              </a:rPr>
-              <a:t>    new(this, name, Stopwatch.GetTimestamp());</a:t>
-            </a:r>
-            <a:endParaRPr sz="1000">
-              <a:solidFill>
-                <a:srgbClr val="CCCCCC"/>
-              </a:solidFill>
-              <a:highlight>
-                <a:schemeClr val="dk2"/>
-              </a:highlight>
-              <a:latin typeface="Consolas"/>
-              <a:ea typeface="Consolas"/>
-              <a:cs typeface="Consolas"/>
-              <a:sym typeface="Consolas"/>
-            </a:endParaRPr>
           </a:p>
         </p:txBody>
       </p:sp>
@@ -19446,7 +20262,7 @@
       <p:grpSpPr/>
       <p:sp>
         <p:nvSpPr>
-          <p:cNvPr id="293" name="Google Shape;293;p45"/>
+          <p:cNvPr id="140" name="Google Shape;140;p23"/>
           <p:cNvSpPr txBox="1"/>
           <p:nvPr>
             <p:ph type="title"/>
@@ -19477,33 +20293,25 @@
               <a:buNone/>
             </a:pPr>
             <a:r>
-              <a:rPr lang="en">
-                <a:solidFill>
-                  <a:schemeClr val="accent5"/>
-                </a:solidFill>
-              </a:rPr>
-              <a:t>Where the Time Goes</a:t>
-            </a:r>
-            <a:endParaRPr>
-              <a:solidFill>
-                <a:schemeClr val="accent5"/>
-              </a:solidFill>
-            </a:endParaRPr>
-          </a:p>
-        </p:txBody>
-      </p:sp>
-      <p:sp>
-        <p:nvSpPr>
-          <p:cNvPr id="294" name="Google Shape;294;p45"/>
+              <a:rPr lang="en"/>
+              <a:t>Profiling</a:t>
+            </a:r>
+            <a:endParaRPr/>
+          </a:p>
+        </p:txBody>
+      </p:sp>
+      <p:sp>
+        <p:nvSpPr>
+          <p:cNvPr id="293" name="Google Shape;293;p45"/>
           <p:cNvSpPr txBox="1"/>
           <p:nvPr>
-            <p:ph idx="1" type="body"/>
+            <p:ph type="title"/>
           </p:nvPr>
         </p:nvSpPr>
         <p:spPr>
           <a:xfrm>
-            <a:off x="311700" y="885950"/>
-            <a:ext cx="8520600" cy="521208"/>
+            <a:off x="311700" y="1152475"/>
+            <a:ext cx="3700000" cy="3500000"/>
           </a:xfrm>
           <a:prstGeom prst="rect">
             <a:avLst/>
@@ -19511,11 +20319,14 @@
         </p:spPr>
         <p:txBody>
           <a:bodyPr anchorCtr="0" anchor="t" bIns="91425" lIns="91425" spcFirstLastPara="1" rIns="91425" wrap="square" tIns="91425">
-            <a:normAutofit/>
+            <a:normAutofit fontScale="90000"/>
           </a:bodyPr>
           <a:lstStyle/>
           <a:p>
             <a:pPr indent="-330200" lvl="0" marL="457200" rtl="0" algn="l">
+              <a:buClr>
+                <a:srgbClr val="DEE2E6"/>
+              </a:buClr>
               <a:spcBef>
                 <a:spcPts val="0"/>
               </a:spcBef>
@@ -19526,594 +20337,524 @@
               <a:buChar char="●"/>
             </a:pPr>
             <a:r>
-              <a:rPr lang="en"/>
-              <a:t>Separating the enemies takes almost all of it. Twice the enemies, four times the work.</a:t>
+              <a:rPr lang="en" sz="1600">
+                <a:solidFill>
+                  <a:srgbClr val="DEE2E6"/>
+                </a:solidFill>
+              </a:rPr>
+              <a:t>Measure where the time goes</a:t>
             </a:r>
             <a:endParaRPr/>
           </a:p>
-        </p:txBody>
-      </p:sp>
-      <p:sp>
-        <p:nvSpPr>
-          <p:cNvPr id="295" name="TextBox 294"/>
+          <a:p>
+            <a:pPr indent="-317500" lvl="1" marL="914400" rtl="0" algn="l">
+              <a:buClr>
+                <a:srgbClr val="6C757D"/>
+              </a:buClr>
+              <a:spcBef>
+                <a:spcPts val="0"/>
+              </a:spcBef>
+              <a:spcAft>
+                <a:spcPts val="0"/>
+              </a:spcAft>
+              <a:buSzPts val="1400"/>
+              <a:buChar char="○"/>
+            </a:pPr>
+            <a:r>
+              <a:rPr lang="en" sz="1400">
+                <a:solidFill>
+                  <a:srgbClr val="6C757D"/>
+                </a:solidFill>
+              </a:rPr>
+              <a:t>Before changing anything</a:t>
+            </a:r>
+            <a:endParaRPr/>
+          </a:p>
+          <a:p>
+            <a:pPr indent="-330200" lvl="0" marL="457200" rtl="0" algn="l">
+              <a:buClr>
+                <a:srgbClr val="DEE2E6"/>
+              </a:buClr>
+              <a:spcBef>
+                <a:spcPts val="0"/>
+              </a:spcBef>
+              <a:spcAft>
+                <a:spcPts val="0"/>
+              </a:spcAft>
+              <a:buSzPts val="1600"/>
+              <a:buChar char="●"/>
+            </a:pPr>
+            <a:r>
+              <a:rPr lang="en" sz="1600">
+                <a:solidFill>
+                  <a:srgbClr val="DEE2E6"/>
+                </a:solidFill>
+              </a:rPr>
+              <a:t>Time each part of a step</a:t>
+            </a:r>
+            <a:endParaRPr/>
+          </a:p>
+          <a:p>
+            <a:pPr indent="-317500" lvl="1" marL="914400" rtl="0" algn="l">
+              <a:buClr>
+                <a:srgbClr val="6C757D"/>
+              </a:buClr>
+              <a:spcBef>
+                <a:spcPts val="0"/>
+              </a:spcBef>
+              <a:spcAft>
+                <a:spcPts val="0"/>
+              </a:spcAft>
+              <a:buSzPts val="1400"/>
+              <a:buChar char="○"/>
+            </a:pPr>
+            <a:r>
+              <a:rPr lang="en" sz="1400">
+                <a:solidFill>
+                  <a:srgbClr val="6C757D"/>
+                </a:solidFill>
+              </a:rPr>
+              <a:t>A struct scope: measuring allocates nothing</a:t>
+            </a:r>
+            <a:endParaRPr/>
+          </a:p>
+          <a:p>
+            <a:pPr indent="-330200" lvl="0" marL="457200" rtl="0" algn="l">
+              <a:buClr>
+                <a:srgbClr val="DEE2E6"/>
+              </a:buClr>
+              <a:spcBef>
+                <a:spcPts val="0"/>
+              </a:spcBef>
+              <a:spcAft>
+                <a:spcPts val="0"/>
+              </a:spcAft>
+              <a:buSzPts val="1600"/>
+              <a:buChar char="●"/>
+            </a:pPr>
+            <a:r>
+              <a:rPr lang="en" sz="1600">
+                <a:solidFill>
+                  <a:srgbClr val="DEE2E6"/>
+                </a:solidFill>
+              </a:rPr>
+              <a:t>And count allocations and GCs</a:t>
+            </a:r>
+            <a:endParaRPr/>
+          </a:p>
+          <a:p>
+            <a:pPr indent="-317500" lvl="1" marL="914400" rtl="0" algn="l">
+              <a:buClr>
+                <a:srgbClr val="6C757D"/>
+              </a:buClr>
+              <a:spcBef>
+                <a:spcPts val="0"/>
+              </a:spcBef>
+              <a:spcAft>
+                <a:spcPts val="0"/>
+              </a:spcAft>
+              <a:buSzPts val="1400"/>
+              <a:buChar char="○"/>
+            </a:pPr>
+            <a:r>
+              <a:rPr lang="en" sz="1400">
+                <a:solidFill>
+                  <a:srgbClr val="6C757D"/>
+                </a:solidFill>
+              </a:rPr>
+              <a:t>LINQ allocates every call</a:t>
+            </a:r>
+            <a:endParaRPr/>
+          </a:p>
+          <a:p>
+            <a:pPr indent="-330200" lvl="0" marL="457200" rtl="0" algn="l">
+              <a:buClr>
+                <a:srgbClr val="DEE2E6"/>
+              </a:buClr>
+              <a:spcBef>
+                <a:spcPts val="0"/>
+              </a:spcBef>
+              <a:spcAft>
+                <a:spcPts val="0"/>
+              </a:spcAft>
+              <a:buSzPts val="1600"/>
+              <a:buChar char="●"/>
+            </a:pPr>
+            <a:r>
+              <a:rPr lang="en" sz="1600">
+                <a:solidFill>
+                  <a:srgbClr val="DEE2E6"/>
+                </a:solidFill>
+              </a:rPr>
+              <a:t>Measure a Release build</a:t>
+            </a:r>
+            <a:endParaRPr/>
+          </a:p>
+        </p:txBody>
+      </p:sp>
+      <p:sp>
+        <p:nvSpPr>
+          <p:cNvPr id="141" name="Google Shape;141;p23"/>
           <p:cNvSpPr txBox="1"/>
-          <p:nvPr/>
+          <p:nvPr>
+            <p:ph idx="2" type="body"/>
+          </p:nvPr>
         </p:nvSpPr>
         <p:spPr>
           <a:xfrm>
-            <a:off x="274320" y="1463040"/>
-            <a:ext cx="1645920" cy="329184"/>
+            <a:off x="4150000" y="1152475"/>
+            <a:ext cx="4750000" cy="3600000"/>
           </a:xfrm>
           <a:prstGeom prst="rect">
             <a:avLst/>
           </a:prstGeom>
-          <a:noFill/>
         </p:spPr>
         <p:txBody>
-          <a:bodyPr wrap="square">
-            <a:spAutoFit/>
+          <a:bodyPr anchorCtr="0" anchor="t" bIns="91425" lIns="91425" spcFirstLastPara="1" rIns="91425" wrap="square" tIns="91425">
+            <a:noAutofit/>
           </a:bodyPr>
           <a:lstStyle/>
           <a:p>
-            <a:pPr algn="r"/>
-            <a:r>
-              <a:rPr sz="1300" b="1" i="0">
-                <a:solidFill>
-                  <a:srgbClr val="DEE2E6"/>
-                </a:solidFill>
-              </a:rPr>
-              <a:t>1,000 enemies</a:t>
-            </a:r>
-          </a:p>
-        </p:txBody>
-      </p:sp>
-      <p:sp>
-        <p:nvSpPr>
-          <p:cNvPr id="296" name="Rectangle 295"/>
-          <p:cNvSpPr/>
-          <p:nvPr/>
-        </p:nvSpPr>
-        <p:spPr>
-          <a:xfrm>
-            <a:off x="2011680" y="1463040"/>
-            <a:ext cx="64545" cy="329184"/>
-          </a:xfrm>
-          <a:prstGeom prst="rect">
-            <a:avLst/>
-          </a:prstGeom>
-          <a:solidFill>
-            <a:srgbClr val="2E3338"/>
-          </a:solidFill>
-          <a:ln>
-            <a:noFill/>
-          </a:ln>
-          <a:effectLst/>
-        </p:spPr>
-        <p:style>
-          <a:lnRef idx="1">
-            <a:schemeClr val="accent1"/>
-          </a:lnRef>
-          <a:fillRef idx="3">
-            <a:schemeClr val="accent1"/>
-          </a:fillRef>
-          <a:effectRef idx="2">
-            <a:schemeClr val="accent1"/>
-          </a:effectRef>
-          <a:fontRef idx="minor">
-            <a:schemeClr val="lt1"/>
-          </a:fontRef>
-        </p:style>
-        <p:txBody>
-          <a:bodyPr rtlCol="0" anchor="ctr" wrap="square" lIns="73152" rIns="73152"/>
-          <a:lstStyle/>
-          <a:p>
-            <a:pPr algn="ctr"/>
-            <a:r>
-              <a:rPr sz="1400" b="0">
-                <a:solidFill>
-                  <a:srgbClr val="DEE2E6"/>
-                </a:solidFill>
+            <a:pPr indent="0" lvl="0" marL="0" rtl="0" algn="l">
+              <a:lnSpc>
+                <a:spcPct val="115000"/>
+              </a:lnSpc>
+              <a:spcBef>
+                <a:spcPts val="0"/>
+              </a:spcBef>
+              <a:spcAft>
+                <a:spcPts val="0"/>
+              </a:spcAft>
+              <a:buNone/>
+            </a:pPr>
+            <a:r>
+              <a:rPr lang="en" sz="1000">
+                <a:highlight>
+                  <a:schemeClr val="dk2"/>
+                </a:highlight>
+                <a:latin typeface="Consolas"/>
+                <a:ea typeface="Consolas"/>
+                <a:cs typeface="Consolas"/>
+                <a:sym typeface="Consolas"/>
+              </a:rPr>
+              <a:t>using (_profiler.Measure("Move"))</a:t>
+            </a:r>
+            <a:endParaRPr sz="1000">
+              <a:solidFill>
+                <a:srgbClr val="CCCCCC"/>
+              </a:solidFill>
+              <a:highlight>
+                <a:schemeClr val="dk2"/>
+              </a:highlight>
+              <a:latin typeface="Consolas"/>
+              <a:ea typeface="Consolas"/>
+              <a:cs typeface="Consolas"/>
+              <a:sym typeface="Consolas"/>
+            </a:endParaRPr>
+          </a:p>
+          <a:p>
+            <a:pPr indent="0" lvl="0" marL="0" rtl="0" algn="l">
+              <a:lnSpc>
+                <a:spcPct val="115000"/>
+              </a:lnSpc>
+              <a:spcBef>
+                <a:spcPts val="0"/>
+              </a:spcBef>
+              <a:spcAft>
+                <a:spcPts val="0"/>
+              </a:spcAft>
+              <a:buNone/>
+            </a:pPr>
+            <a:r>
+              <a:rPr lang="en" sz="1000">
+                <a:highlight>
+                  <a:schemeClr val="dk2"/>
+                </a:highlight>
+                <a:latin typeface="Consolas"/>
+                <a:ea typeface="Consolas"/>
+                <a:cs typeface="Consolas"/>
+                <a:sym typeface="Consolas"/>
+              </a:rPr>
+              <a:t>    _swarm.Move(dt, _player.Position);</a:t>
+            </a:r>
+            <a:endParaRPr sz="1000">
+              <a:solidFill>
+                <a:srgbClr val="CCCCCC"/>
+              </a:solidFill>
+              <a:highlight>
+                <a:schemeClr val="dk2"/>
+              </a:highlight>
+              <a:latin typeface="Consolas"/>
+              <a:ea typeface="Consolas"/>
+              <a:cs typeface="Consolas"/>
+              <a:sym typeface="Consolas"/>
+            </a:endParaRPr>
+          </a:p>
+          <a:p>
+            <a:pPr indent="0" lvl="0" marL="0" rtl="0" algn="l">
+              <a:lnSpc>
+                <a:spcPct val="115000"/>
+              </a:lnSpc>
+              <a:spcBef>
+                <a:spcPts val="0"/>
+              </a:spcBef>
+              <a:spcAft>
+                <a:spcPts val="0"/>
+              </a:spcAft>
+              <a:buNone/>
+            </a:pPr>
+            <a:r>
+              <a:rPr lang="en" sz="1000">
+                <a:highlight>
+                  <a:schemeClr val="dk2"/>
+                </a:highlight>
+                <a:latin typeface="Consolas"/>
+                <a:ea typeface="Consolas"/>
+                <a:cs typeface="Consolas"/>
+                <a:sym typeface="Consolas"/>
               </a:rPr>
               <a:t/>
             </a:r>
-          </a:p>
-        </p:txBody>
-      </p:sp>
-      <p:sp>
-        <p:nvSpPr>
-          <p:cNvPr id="297" name="TextBox 296"/>
-          <p:cNvSpPr txBox="1"/>
-          <p:nvPr/>
-        </p:nvSpPr>
-        <p:spPr>
-          <a:xfrm>
-            <a:off x="2149377" y="1463040"/>
-            <a:ext cx="1280160" cy="329184"/>
-          </a:xfrm>
-          <a:prstGeom prst="rect">
-            <a:avLst/>
-          </a:prstGeom>
-          <a:noFill/>
-        </p:spPr>
-        <p:txBody>
-          <a:bodyPr wrap="square">
-            <a:spAutoFit/>
-          </a:bodyPr>
-          <a:lstStyle/>
-          <a:p>
-            <a:pPr algn="l"/>
-            <a:r>
-              <a:rPr sz="1300" b="0" i="0">
-                <a:solidFill>
-                  <a:srgbClr val="9AA3AB"/>
-                </a:solidFill>
-              </a:rPr>
-              <a:t>1.2 ms</a:t>
-            </a:r>
-          </a:p>
-        </p:txBody>
-      </p:sp>
-      <p:sp>
-        <p:nvSpPr>
-          <p:cNvPr id="298" name="TextBox 297"/>
-          <p:cNvSpPr txBox="1"/>
-          <p:nvPr/>
-        </p:nvSpPr>
-        <p:spPr>
-          <a:xfrm>
-            <a:off x="274320" y="1920240"/>
-            <a:ext cx="1645920" cy="329184"/>
-          </a:xfrm>
-          <a:prstGeom prst="rect">
-            <a:avLst/>
-          </a:prstGeom>
-          <a:noFill/>
-        </p:spPr>
-        <p:txBody>
-          <a:bodyPr wrap="square">
-            <a:spAutoFit/>
-          </a:bodyPr>
-          <a:lstStyle/>
-          <a:p>
-            <a:pPr algn="r"/>
-            <a:r>
-              <a:rPr sz="1300" b="1" i="0">
-                <a:solidFill>
-                  <a:srgbClr val="DEE2E6"/>
-                </a:solidFill>
-              </a:rPr>
-              <a:t>2,000</a:t>
-            </a:r>
-          </a:p>
-        </p:txBody>
-      </p:sp>
-      <p:sp>
-        <p:nvSpPr>
-          <p:cNvPr id="299" name="Rectangle 298"/>
-          <p:cNvSpPr/>
-          <p:nvPr/>
-        </p:nvSpPr>
-        <p:spPr>
-          <a:xfrm>
-            <a:off x="2011680" y="1920240"/>
-            <a:ext cx="242047" cy="329184"/>
-          </a:xfrm>
-          <a:prstGeom prst="rect">
-            <a:avLst/>
-          </a:prstGeom>
-          <a:solidFill>
-            <a:srgbClr val="2E3338"/>
-          </a:solidFill>
-          <a:ln>
-            <a:noFill/>
-          </a:ln>
-          <a:effectLst/>
-        </p:spPr>
-        <p:style>
-          <a:lnRef idx="1">
-            <a:schemeClr val="accent1"/>
-          </a:lnRef>
-          <a:fillRef idx="3">
-            <a:schemeClr val="accent1"/>
-          </a:fillRef>
-          <a:effectRef idx="2">
-            <a:schemeClr val="accent1"/>
-          </a:effectRef>
-          <a:fontRef idx="minor">
-            <a:schemeClr val="lt1"/>
-          </a:fontRef>
-        </p:style>
-        <p:txBody>
-          <a:bodyPr rtlCol="0" anchor="ctr" wrap="square" lIns="73152" rIns="73152"/>
-          <a:lstStyle/>
-          <a:p>
-            <a:pPr algn="ctr"/>
-            <a:r>
-              <a:rPr sz="1400" b="0">
-                <a:solidFill>
-                  <a:srgbClr val="DEE2E6"/>
-                </a:solidFill>
+            <a:endParaRPr sz="1000">
+              <a:solidFill>
+                <a:srgbClr val="CCCCCC"/>
+              </a:solidFill>
+              <a:highlight>
+                <a:schemeClr val="dk2"/>
+              </a:highlight>
+              <a:latin typeface="Consolas"/>
+              <a:ea typeface="Consolas"/>
+              <a:cs typeface="Consolas"/>
+              <a:sym typeface="Consolas"/>
+            </a:endParaRPr>
+          </a:p>
+          <a:p>
+            <a:pPr indent="0" lvl="0" marL="0" rtl="0" algn="l">
+              <a:lnSpc>
+                <a:spcPct val="115000"/>
+              </a:lnSpc>
+              <a:spcBef>
+                <a:spcPts val="0"/>
+              </a:spcBef>
+              <a:spcAft>
+                <a:spcPts val="0"/>
+              </a:spcAft>
+              <a:buNone/>
+            </a:pPr>
+            <a:r>
+              <a:rPr lang="en" sz="1000">
+                <a:highlight>
+                  <a:schemeClr val="dk2"/>
+                </a:highlight>
+                <a:latin typeface="Consolas"/>
+                <a:ea typeface="Consolas"/>
+                <a:cs typeface="Consolas"/>
+                <a:sym typeface="Consolas"/>
+              </a:rPr>
+              <a:t>using (_profiler.Measure("Separate"))</a:t>
+            </a:r>
+            <a:endParaRPr sz="1000">
+              <a:solidFill>
+                <a:srgbClr val="CCCCCC"/>
+              </a:solidFill>
+              <a:highlight>
+                <a:schemeClr val="dk2"/>
+              </a:highlight>
+              <a:latin typeface="Consolas"/>
+              <a:ea typeface="Consolas"/>
+              <a:cs typeface="Consolas"/>
+              <a:sym typeface="Consolas"/>
+            </a:endParaRPr>
+          </a:p>
+          <a:p>
+            <a:pPr indent="0" lvl="0" marL="0" rtl="0" algn="l">
+              <a:lnSpc>
+                <a:spcPct val="115000"/>
+              </a:lnSpc>
+              <a:spcBef>
+                <a:spcPts val="0"/>
+              </a:spcBef>
+              <a:spcAft>
+                <a:spcPts val="0"/>
+              </a:spcAft>
+              <a:buNone/>
+            </a:pPr>
+            <a:r>
+              <a:rPr lang="en" sz="1000">
+                <a:highlight>
+                  <a:schemeClr val="dk2"/>
+                </a:highlight>
+                <a:latin typeface="Consolas"/>
+                <a:ea typeface="Consolas"/>
+                <a:cs typeface="Consolas"/>
+                <a:sym typeface="Consolas"/>
+              </a:rPr>
+              <a:t>    _swarm.Separate();</a:t>
+            </a:r>
+            <a:endParaRPr sz="1000">
+              <a:solidFill>
+                <a:srgbClr val="CCCCCC"/>
+              </a:solidFill>
+              <a:highlight>
+                <a:schemeClr val="dk2"/>
+              </a:highlight>
+              <a:latin typeface="Consolas"/>
+              <a:ea typeface="Consolas"/>
+              <a:cs typeface="Consolas"/>
+              <a:sym typeface="Consolas"/>
+            </a:endParaRPr>
+          </a:p>
+          <a:p>
+            <a:pPr indent="0" lvl="0" marL="0" rtl="0" algn="l">
+              <a:lnSpc>
+                <a:spcPct val="115000"/>
+              </a:lnSpc>
+              <a:spcBef>
+                <a:spcPts val="0"/>
+              </a:spcBef>
+              <a:spcAft>
+                <a:spcPts val="0"/>
+              </a:spcAft>
+              <a:buNone/>
+            </a:pPr>
+            <a:r>
+              <a:rPr lang="en" sz="1000">
+                <a:highlight>
+                  <a:schemeClr val="dk2"/>
+                </a:highlight>
+                <a:latin typeface="Consolas"/>
+                <a:ea typeface="Consolas"/>
+                <a:cs typeface="Consolas"/>
+                <a:sym typeface="Consolas"/>
               </a:rPr>
               <a:t/>
             </a:r>
-          </a:p>
-        </p:txBody>
-      </p:sp>
-      <p:sp>
-        <p:nvSpPr>
-          <p:cNvPr id="300" name="TextBox 299"/>
-          <p:cNvSpPr txBox="1"/>
-          <p:nvPr/>
-        </p:nvSpPr>
-        <p:spPr>
-          <a:xfrm>
-            <a:off x="2326879" y="1920240"/>
-            <a:ext cx="1280160" cy="329184"/>
-          </a:xfrm>
-          <a:prstGeom prst="rect">
-            <a:avLst/>
-          </a:prstGeom>
-          <a:noFill/>
-        </p:spPr>
-        <p:txBody>
-          <a:bodyPr wrap="square">
-            <a:spAutoFit/>
-          </a:bodyPr>
-          <a:lstStyle/>
-          <a:p>
-            <a:pPr algn="l"/>
-            <a:r>
-              <a:rPr sz="1300" b="0" i="0">
-                <a:solidFill>
-                  <a:srgbClr val="9AA3AB"/>
-                </a:solidFill>
-              </a:rPr>
-              <a:t>4.5 ms</a:t>
-            </a:r>
-          </a:p>
-        </p:txBody>
-      </p:sp>
-      <p:sp>
-        <p:nvSpPr>
-          <p:cNvPr id="301" name="TextBox 300"/>
-          <p:cNvSpPr txBox="1"/>
-          <p:nvPr/>
-        </p:nvSpPr>
-        <p:spPr>
-          <a:xfrm>
-            <a:off x="274320" y="2377440"/>
-            <a:ext cx="1645920" cy="329184"/>
-          </a:xfrm>
-          <a:prstGeom prst="rect">
-            <a:avLst/>
-          </a:prstGeom>
-          <a:noFill/>
-        </p:spPr>
-        <p:txBody>
-          <a:bodyPr wrap="square">
-            <a:spAutoFit/>
-          </a:bodyPr>
-          <a:lstStyle/>
-          <a:p>
-            <a:pPr algn="r"/>
-            <a:r>
-              <a:rPr sz="1300" b="1" i="0">
-                <a:solidFill>
-                  <a:srgbClr val="DEE2E6"/>
-                </a:solidFill>
-              </a:rPr>
-              <a:t>5,000</a:t>
-            </a:r>
-          </a:p>
-        </p:txBody>
-      </p:sp>
-      <p:sp>
-        <p:nvSpPr>
-          <p:cNvPr id="302" name="Rectangle 301"/>
-          <p:cNvSpPr/>
-          <p:nvPr/>
-        </p:nvSpPr>
-        <p:spPr>
-          <a:xfrm>
-            <a:off x="2011680" y="2377440"/>
-            <a:ext cx="1452282" cy="329184"/>
-          </a:xfrm>
-          <a:prstGeom prst="rect">
-            <a:avLst/>
-          </a:prstGeom>
-          <a:solidFill>
-            <a:srgbClr val="2E3338"/>
-          </a:solidFill>
-          <a:ln>
-            <a:noFill/>
-          </a:ln>
-          <a:effectLst/>
-        </p:spPr>
-        <p:style>
-          <a:lnRef idx="1">
-            <a:schemeClr val="accent1"/>
-          </a:lnRef>
-          <a:fillRef idx="3">
-            <a:schemeClr val="accent1"/>
-          </a:fillRef>
-          <a:effectRef idx="2">
-            <a:schemeClr val="accent1"/>
-          </a:effectRef>
-          <a:fontRef idx="minor">
-            <a:schemeClr val="lt1"/>
-          </a:fontRef>
-        </p:style>
-        <p:txBody>
-          <a:bodyPr rtlCol="0" anchor="ctr" wrap="square" lIns="73152" rIns="73152"/>
-          <a:lstStyle/>
-          <a:p>
-            <a:pPr algn="ctr"/>
-            <a:r>
-              <a:rPr sz="1400" b="0">
-                <a:solidFill>
-                  <a:srgbClr val="DEE2E6"/>
-                </a:solidFill>
-              </a:rPr>
-              <a:t/>
-            </a:r>
-          </a:p>
-        </p:txBody>
-      </p:sp>
-      <p:sp>
-        <p:nvSpPr>
-          <p:cNvPr id="303" name="TextBox 302"/>
-          <p:cNvSpPr txBox="1"/>
-          <p:nvPr/>
-        </p:nvSpPr>
-        <p:spPr>
-          <a:xfrm>
-            <a:off x="3537114" y="2377440"/>
-            <a:ext cx="1280160" cy="329184"/>
-          </a:xfrm>
-          <a:prstGeom prst="rect">
-            <a:avLst/>
-          </a:prstGeom>
-          <a:noFill/>
-        </p:spPr>
-        <p:txBody>
-          <a:bodyPr wrap="square">
-            <a:spAutoFit/>
-          </a:bodyPr>
-          <a:lstStyle/>
-          <a:p>
-            <a:pPr algn="l"/>
-            <a:r>
-              <a:rPr sz="1300" b="0" i="0">
-                <a:solidFill>
-                  <a:srgbClr val="9AA3AB"/>
-                </a:solidFill>
-              </a:rPr>
-              <a:t>27 ms</a:t>
-            </a:r>
-          </a:p>
-        </p:txBody>
-      </p:sp>
-      <p:sp>
-        <p:nvSpPr>
-          <p:cNvPr id="304" name="TextBox 303"/>
-          <p:cNvSpPr txBox="1"/>
-          <p:nvPr/>
-        </p:nvSpPr>
-        <p:spPr>
-          <a:xfrm>
-            <a:off x="274320" y="2834640"/>
-            <a:ext cx="1645920" cy="329184"/>
-          </a:xfrm>
-          <a:prstGeom prst="rect">
-            <a:avLst/>
-          </a:prstGeom>
-          <a:noFill/>
-        </p:spPr>
-        <p:txBody>
-          <a:bodyPr wrap="square">
-            <a:spAutoFit/>
-          </a:bodyPr>
-          <a:lstStyle/>
-          <a:p>
-            <a:pPr algn="r"/>
-            <a:r>
-              <a:rPr sz="1300" b="1" i="0">
-                <a:solidFill>
-                  <a:srgbClr val="DEE2E6"/>
-                </a:solidFill>
-              </a:rPr>
-              <a:t>10,000</a:t>
-            </a:r>
-          </a:p>
-        </p:txBody>
-      </p:sp>
-      <p:sp>
-        <p:nvSpPr>
-          <p:cNvPr id="305" name="Rectangle 304"/>
-          <p:cNvSpPr/>
-          <p:nvPr/>
-        </p:nvSpPr>
-        <p:spPr>
-          <a:xfrm>
-            <a:off x="2011680" y="2834640"/>
-            <a:ext cx="5755341" cy="329184"/>
-          </a:xfrm>
-          <a:prstGeom prst="rect">
-            <a:avLst/>
-          </a:prstGeom>
-          <a:solidFill>
-            <a:srgbClr val="D45D35"/>
-          </a:solidFill>
-          <a:ln>
-            <a:noFill/>
-          </a:ln>
-          <a:effectLst/>
-        </p:spPr>
-        <p:style>
-          <a:lnRef idx="1">
-            <a:schemeClr val="accent1"/>
-          </a:lnRef>
-          <a:fillRef idx="3">
-            <a:schemeClr val="accent1"/>
-          </a:fillRef>
-          <a:effectRef idx="2">
-            <a:schemeClr val="accent1"/>
-          </a:effectRef>
-          <a:fontRef idx="minor">
-            <a:schemeClr val="lt1"/>
-          </a:fontRef>
-        </p:style>
-        <p:txBody>
-          <a:bodyPr rtlCol="0" anchor="ctr" wrap="square" lIns="73152" rIns="73152"/>
-          <a:lstStyle/>
-          <a:p>
-            <a:pPr algn="ctr"/>
-            <a:r>
-              <a:rPr sz="1400" b="0">
-                <a:solidFill>
-                  <a:srgbClr val="DEE2E6"/>
-                </a:solidFill>
-              </a:rPr>
-              <a:t/>
-            </a:r>
-          </a:p>
-        </p:txBody>
-      </p:sp>
-      <p:sp>
-        <p:nvSpPr>
-          <p:cNvPr id="306" name="TextBox 305"/>
-          <p:cNvSpPr txBox="1"/>
-          <p:nvPr/>
-        </p:nvSpPr>
-        <p:spPr>
-          <a:xfrm>
-            <a:off x="7840173" y="2834640"/>
-            <a:ext cx="1280160" cy="329184"/>
-          </a:xfrm>
-          <a:prstGeom prst="rect">
-            <a:avLst/>
-          </a:prstGeom>
-          <a:noFill/>
-        </p:spPr>
-        <p:txBody>
-          <a:bodyPr wrap="square">
-            <a:spAutoFit/>
-          </a:bodyPr>
-          <a:lstStyle/>
-          <a:p>
-            <a:pPr algn="l"/>
-            <a:r>
-              <a:rPr sz="1300" b="0" i="0">
-                <a:solidFill>
-                  <a:srgbClr val="9AA3AB"/>
-                </a:solidFill>
-              </a:rPr>
-              <a:t>107 ms</a:t>
-            </a:r>
-          </a:p>
-        </p:txBody>
-      </p:sp>
-      <p:cxnSp>
-        <p:nvCxnSpPr>
-          <p:cNvPr id="307" name="Connector 306"/>
-          <p:cNvCxnSpPr/>
-          <p:nvPr/>
-        </p:nvCxnSpPr>
-        <p:spPr>
-          <a:xfrm>
-            <a:off x="2909943" y="1325880"/>
-            <a:ext cx="0" cy="1965960"/>
-          </a:xfrm>
-          <a:prstGeom prst="line">
-            <a:avLst/>
-          </a:prstGeom>
-          <a:ln>
-            <a:solidFill>
-              <a:srgbClr val="9AA3AB"/>
-            </a:solidFill>
-            <a:prstDash val="dash"/>
-          </a:ln>
-        </p:spPr>
-        <p:style>
-          <a:lnRef idx="2">
-            <a:schemeClr val="accent1"/>
-          </a:lnRef>
-          <a:fillRef idx="0">
-            <a:schemeClr val="accent1"/>
-          </a:fillRef>
-          <a:effectRef idx="1">
-            <a:schemeClr val="accent1"/>
-          </a:effectRef>
-          <a:fontRef idx="minor">
-            <a:schemeClr val="tx1"/>
-          </a:fontRef>
-        </p:style>
-      </p:cxnSp>
-      <p:sp>
-        <p:nvSpPr>
-          <p:cNvPr id="308" name="TextBox 307"/>
-          <p:cNvSpPr txBox="1"/>
-          <p:nvPr/>
-        </p:nvSpPr>
-        <p:spPr>
-          <a:xfrm>
-            <a:off x="2178423" y="3291840"/>
-            <a:ext cx="1463040" cy="274320"/>
-          </a:xfrm>
-          <a:prstGeom prst="rect">
-            <a:avLst/>
-          </a:prstGeom>
-          <a:noFill/>
-        </p:spPr>
-        <p:txBody>
-          <a:bodyPr wrap="square">
-            <a:spAutoFit/>
-          </a:bodyPr>
-          <a:lstStyle/>
-          <a:p>
-            <a:pPr algn="ctr"/>
-            <a:r>
-              <a:rPr sz="1100" b="0" i="0">
-                <a:solidFill>
-                  <a:srgbClr val="9AA3AB"/>
-                </a:solidFill>
-              </a:rPr>
-              <a:t>one frame: 16.7 ms</a:t>
-            </a:r>
-          </a:p>
-        </p:txBody>
-      </p:sp>
-      <p:sp>
-        <p:nvSpPr>
-          <p:cNvPr id="309" name="TextBox 308"/>
-          <p:cNvSpPr txBox="1"/>
-          <p:nvPr/>
-        </p:nvSpPr>
-        <p:spPr>
-          <a:xfrm>
-            <a:off x="274320" y="3703320"/>
-            <a:ext cx="8595360" cy="365760"/>
-          </a:xfrm>
-          <a:prstGeom prst="rect">
-            <a:avLst/>
-          </a:prstGeom>
-          <a:noFill/>
-        </p:spPr>
-        <p:txBody>
-          <a:bodyPr wrap="square">
-            <a:spAutoFit/>
-          </a:bodyPr>
-          <a:lstStyle/>
-          <a:p>
-            <a:pPr algn="ctr"/>
-            <a:r>
-              <a:rPr sz="1300" b="0" i="0">
-                <a:solidFill>
-                  <a:srgbClr val="9AA3AB"/>
-                </a:solidFill>
-              </a:rPr>
-              <a:t>Move and separate, per step, on one laptop. That’s O(n²).</a:t>
-            </a:r>
+            <a:endParaRPr sz="1000">
+              <a:solidFill>
+                <a:srgbClr val="CCCCCC"/>
+              </a:solidFill>
+              <a:highlight>
+                <a:schemeClr val="dk2"/>
+              </a:highlight>
+              <a:latin typeface="Consolas"/>
+              <a:ea typeface="Consolas"/>
+              <a:cs typeface="Consolas"/>
+              <a:sym typeface="Consolas"/>
+            </a:endParaRPr>
+          </a:p>
+          <a:p>
+            <a:pPr indent="0" lvl="0" marL="0" rtl="0" algn="l">
+              <a:lnSpc>
+                <a:spcPct val="115000"/>
+              </a:lnSpc>
+              <a:spcBef>
+                <a:spcPts val="0"/>
+              </a:spcBef>
+              <a:spcAft>
+                <a:spcPts val="0"/>
+              </a:spcAft>
+              <a:buNone/>
+            </a:pPr>
+            <a:r>
+              <a:rPr lang="en" sz="1000">
+                <a:highlight>
+                  <a:schemeClr val="dk2"/>
+                </a:highlight>
+                <a:latin typeface="Consolas"/>
+                <a:ea typeface="Consolas"/>
+                <a:cs typeface="Consolas"/>
+                <a:sym typeface="Consolas"/>
+              </a:rPr>
+              <a:t>// Profiler.cs</a:t>
+            </a:r>
+            <a:endParaRPr sz="1000">
+              <a:solidFill>
+                <a:srgbClr val="CCCCCC"/>
+              </a:solidFill>
+              <a:highlight>
+                <a:schemeClr val="dk2"/>
+              </a:highlight>
+              <a:latin typeface="Consolas"/>
+              <a:ea typeface="Consolas"/>
+              <a:cs typeface="Consolas"/>
+              <a:sym typeface="Consolas"/>
+            </a:endParaRPr>
+          </a:p>
+          <a:p>
+            <a:pPr indent="0" lvl="0" marL="0" rtl="0" algn="l">
+              <a:lnSpc>
+                <a:spcPct val="115000"/>
+              </a:lnSpc>
+              <a:spcBef>
+                <a:spcPts val="0"/>
+              </a:spcBef>
+              <a:spcAft>
+                <a:spcPts val="0"/>
+              </a:spcAft>
+              <a:buNone/>
+            </a:pPr>
+            <a:r>
+              <a:rPr lang="en" sz="1000">
+                <a:highlight>
+                  <a:schemeClr val="dk2"/>
+                </a:highlight>
+                <a:latin typeface="Consolas"/>
+                <a:ea typeface="Consolas"/>
+                <a:cs typeface="Consolas"/>
+                <a:sym typeface="Consolas"/>
+              </a:rPr>
+              <a:t>public Scope Measure(string name) =&gt;</a:t>
+            </a:r>
+            <a:endParaRPr sz="1000">
+              <a:solidFill>
+                <a:srgbClr val="CCCCCC"/>
+              </a:solidFill>
+              <a:highlight>
+                <a:schemeClr val="dk2"/>
+              </a:highlight>
+              <a:latin typeface="Consolas"/>
+              <a:ea typeface="Consolas"/>
+              <a:cs typeface="Consolas"/>
+              <a:sym typeface="Consolas"/>
+            </a:endParaRPr>
+          </a:p>
+          <a:p>
+            <a:pPr indent="0" lvl="0" marL="0" rtl="0" algn="l">
+              <a:lnSpc>
+                <a:spcPct val="115000"/>
+              </a:lnSpc>
+              <a:spcBef>
+                <a:spcPts val="0"/>
+              </a:spcBef>
+              <a:spcAft>
+                <a:spcPts val="0"/>
+              </a:spcAft>
+              <a:buNone/>
+            </a:pPr>
+            <a:r>
+              <a:rPr lang="en" sz="1000">
+                <a:highlight>
+                  <a:schemeClr val="dk2"/>
+                </a:highlight>
+                <a:latin typeface="Consolas"/>
+                <a:ea typeface="Consolas"/>
+                <a:cs typeface="Consolas"/>
+                <a:sym typeface="Consolas"/>
+              </a:rPr>
+              <a:t>    new(this, name, Stopwatch.GetTimestamp());</a:t>
+            </a:r>
+            <a:endParaRPr sz="1000">
+              <a:solidFill>
+                <a:srgbClr val="CCCCCC"/>
+              </a:solidFill>
+              <a:highlight>
+                <a:schemeClr val="dk2"/>
+              </a:highlight>
+              <a:latin typeface="Consolas"/>
+              <a:ea typeface="Consolas"/>
+              <a:cs typeface="Consolas"/>
+              <a:sym typeface="Consolas"/>
+            </a:endParaRPr>
           </a:p>
         </p:txBody>
       </p:sp>

--- a/slides/12 Vampire Survivors.pptx
+++ b/slides/12 Vampire Survivors.pptx
@@ -16779,22 +16779,22 @@
       </p:sp>
       <p:pic>
         <p:nvPicPr>
-          <p:cNvPr id="46" name="Picture 46" descr="vs-play.png"/>
+          <p:cNvPr id="46" name="Picture 46" descr="gif-vs.gif"/>
           <p:cNvPicPr>
             <a:picLocks noChangeAspect="1"/>
           </p:cNvPicPr>
           <p:nvPr/>
         </p:nvPicPr>
         <p:blipFill>
-          <a:blip r:embed="rId4"/>
+          <a:blip r:embed="rId3"/>
           <a:stretch>
             <a:fillRect/>
           </a:stretch>
         </p:blipFill>
         <p:spPr>
           <a:xfrm>
-            <a:off x="1677201" y="1531275"/>
-            <a:ext cx="5789598" cy="3256648"/>
+            <a:off x="1677202" y="1531275"/>
+            <a:ext cx="5789596" cy="3256648"/>
           </a:xfrm>
           <a:prstGeom prst="rect">
             <a:avLst/>

--- a/slides/12 Vampire Survivors.pptx
+++ b/slides/12 Vampire Survivors.pptx
@@ -40,7 +40,6 @@
     <p:sldId id="293" r:id="rId52"/>
     <p:sldId id="315" r:id="rId41"/>
     <p:sldId id="294" r:id="rId53"/>
-    <p:sldId id="296" r:id="rId55"/>
   </p:sldIdLst>
   <p:sldSz cy="5143500" cx="9144000"/>
   <p:notesSz cx="6858000" cy="9144000"/>
@@ -2025,64 +2024,6 @@
           <a:p>
             <a:r>
               <a:t>Several cores: ask what goes wrong when two threads push the same enemy, before anyone writes code.</a:t>
-            </a:r>
-          </a:p>
-        </p:txBody>
-      </p:sp>
-    </p:spTree>
-  </p:cSld>
-  <p:clrMapOvr>
-    <a:masterClrMapping/>
-  </p:clrMapOvr>
-</p:notes>
-</file>
-
-<file path=ppt/notesSlides/notesSlide27.xml><?xml version="1.0" encoding="utf-8"?>
-<p:notes xmlns:a="http://schemas.openxmlformats.org/drawingml/2006/main" xmlns:p="http://schemas.openxmlformats.org/presentationml/2006/main" xmlns:r="http://schemas.openxmlformats.org/officeDocument/2006/relationships">
-  <p:cSld>
-    <p:spTree>
-      <p:nvGrpSpPr>
-        <p:cNvPr id="1" name=""/>
-        <p:cNvGrpSpPr/>
-        <p:nvPr/>
-      </p:nvGrpSpPr>
-      <p:grpSpPr>
-        <a:xfrm>
-          <a:off x="0" y="0"/>
-          <a:ext cx="0" cy="0"/>
-          <a:chOff x="0" y="0"/>
-          <a:chExt cx="0" cy="0"/>
-        </a:xfrm>
-      </p:grpSpPr>
-      <p:sp>
-        <p:nvSpPr>
-          <p:cNvPr id="2" name="Slide Image Placeholder 1"/>
-          <p:cNvSpPr>
-            <a:spLocks noGrp="1"/>
-          </p:cNvSpPr>
-          <p:nvPr>
-            <p:ph type="sldImg" idx="2"/>
-          </p:nvPr>
-        </p:nvSpPr>
-        <p:spPr/>
-      </p:sp>
-      <p:sp>
-        <p:nvSpPr>
-          <p:cNvPr id="3" name="Notes Placeholder 2"/>
-          <p:cNvSpPr>
-            <a:spLocks noGrp="1"/>
-          </p:cNvSpPr>
-          <p:nvPr>
-            <p:ph type="body" idx="1"/>
-          </p:nvPr>
-        </p:nvSpPr>
-        <p:spPr/>
-        <p:txBody>
-          <a:bodyPr/>
-          <a:lstStyle/>
-          <a:p>
-            <a:r>
-              <a:t>Final milestone today: the README complete, the link on itslearning. Next time: the recap, with your projects.</a:t>
             </a:r>
           </a:p>
         </p:txBody>
@@ -18629,180 +18570,6 @@
 </p:sld>
 </file>
 
-<file path=ppt/slides/slide33.xml><?xml version="1.0" encoding="utf-8"?>
-<p:sld xmlns:a="http://schemas.openxmlformats.org/drawingml/2006/main" xmlns:r="http://schemas.openxmlformats.org/officeDocument/2006/relationships" xmlns:mc="http://schemas.openxmlformats.org/markup-compatibility/2006" xmlns:mv="urn:schemas-microsoft-com:mac:vml" xmlns:p="http://schemas.openxmlformats.org/presentationml/2006/main" xmlns:c="http://schemas.openxmlformats.org/drawingml/2006/chart" xmlns:dgm="http://schemas.openxmlformats.org/drawingml/2006/diagram" xmlns:o="urn:schemas-microsoft-com:office:office" xmlns:v="urn:schemas-microsoft-com:vml" xmlns:pvml="urn:schemas-microsoft-com:office:powerpoint" xmlns:com="http://schemas.openxmlformats.org/drawingml/2006/compatibility" xmlns:p14="http://schemas.microsoft.com/office/powerpoint/2010/main" xmlns:p15="http://schemas.microsoft.com/office/powerpoint/2012/main" xmlns:ahyp="http://schemas.microsoft.com/office/drawing/2018/hyperlinkcolor">
-  <p:cSld>
-    <p:spTree>
-      <p:nvGrpSpPr>
-        <p:cNvPr id="56" name="Shape 56"/>
-        <p:cNvGrpSpPr/>
-        <p:nvPr/>
-      </p:nvGrpSpPr>
-      <p:grpSpPr>
-        <a:xfrm>
-          <a:off x="0" y="0"/>
-          <a:ext cx="0" cy="0"/>
-          <a:chOff x="0" y="0"/>
-          <a:chExt cx="0" cy="0"/>
-        </a:xfrm>
-      </p:grpSpPr>
-      <p:sp>
-        <p:nvSpPr>
-          <p:cNvPr id="57" name="Google Shape;57;p12"/>
-          <p:cNvSpPr txBox="1"/>
-          <p:nvPr>
-            <p:ph type="title"/>
-          </p:nvPr>
-        </p:nvSpPr>
-        <p:spPr>
-          <a:xfrm>
-            <a:off x="311700" y="195615"/>
-            <a:ext cx="8520600" cy="572700"/>
-          </a:xfrm>
-          <a:prstGeom prst="rect">
-            <a:avLst/>
-          </a:prstGeom>
-        </p:spPr>
-        <p:txBody>
-          <a:bodyPr anchorCtr="0" anchor="t" bIns="91425" lIns="91425" spcFirstLastPara="1" rIns="91425" wrap="square" tIns="91425">
-            <a:normAutofit fontScale="90000"/>
-          </a:bodyPr>
-          <a:lstStyle/>
-          <a:p>
-            <a:pPr indent="0" lvl="0" marL="0" rtl="0" algn="l">
-              <a:spcBef>
-                <a:spcPts val="0"/>
-              </a:spcBef>
-              <a:spcAft>
-                <a:spcPts val="0"/>
-              </a:spcAft>
-              <a:buNone/>
-            </a:pPr>
-            <a:r>
-              <a:rPr lang="en"/>
-              <a:t>Your Course Project</a:t>
-            </a:r>
-            <a:endParaRPr/>
-          </a:p>
-        </p:txBody>
-      </p:sp>
-      <p:sp>
-        <p:nvSpPr>
-          <p:cNvPr id="58" name="Google Shape;58;p12"/>
-          <p:cNvSpPr txBox="1"/>
-          <p:nvPr>
-            <p:ph idx="1" type="body"/>
-          </p:nvPr>
-        </p:nvSpPr>
-        <p:spPr>
-          <a:xfrm>
-            <a:off x="311700" y="885950"/>
-            <a:ext cx="8520600" cy="4023300"/>
-          </a:xfrm>
-          <a:prstGeom prst="rect">
-            <a:avLst/>
-          </a:prstGeom>
-        </p:spPr>
-        <p:txBody>
-          <a:bodyPr anchorCtr="0" anchor="t" bIns="91425" lIns="91425" spcFirstLastPara="1" rIns="91425" wrap="square" tIns="91425">
-            <a:normAutofit/>
-          </a:bodyPr>
-          <a:lstStyle/>
-          <a:p>
-            <a:pPr indent="-330200" lvl="0" marL="457200" rtl="0" algn="l">
-              <a:spcBef>
-                <a:spcPts val="0"/>
-              </a:spcBef>
-              <a:spcAft>
-                <a:spcPts val="0"/>
-              </a:spcAft>
-              <a:buSzPts val="1600"/>
-              <a:buChar char="●"/>
-            </a:pPr>
-            <a:r>
-              <a:rPr lang="en"/>
-              <a:t>Final milestone, by today</a:t>
-            </a:r>
-            <a:endParaRPr/>
-          </a:p>
-          <a:p>
-            <a:pPr indent="-317500" lvl="1" marL="914400" rtl="0" algn="l">
-              <a:spcBef>
-                <a:spcPts val="0"/>
-              </a:spcBef>
-              <a:spcAft>
-                <a:spcPts val="0"/>
-              </a:spcAft>
-              <a:buSzPts val="1400"/>
-              <a:buChar char="○"/>
-            </a:pPr>
-            <a:r>
-              <a:rPr lang="en"/>
-              <a:t>README complete, repository link uploaded to itslearning</a:t>
-            </a:r>
-            <a:endParaRPr/>
-          </a:p>
-          <a:p>
-            <a:pPr indent="-330200" lvl="0" marL="457200" rtl="0" algn="l">
-              <a:spcBef>
-                <a:spcPts val="0"/>
-              </a:spcBef>
-              <a:spcAft>
-                <a:spcPts val="0"/>
-              </a:spcAft>
-              <a:buSzPts val="1600"/>
-              <a:buChar char="●"/>
-            </a:pPr>
-            <a:r>
-              <a:rPr lang="en"/>
-              <a:t>The exam: question 0 (your project), and one of 1–10</a:t>
-            </a:r>
-            <a:endParaRPr/>
-          </a:p>
-          <a:p>
-            <a:pPr indent="-330200" lvl="0" marL="457200" rtl="0" algn="l">
-              <a:spcBef>
-                <a:spcPts val="0"/>
-              </a:spcBef>
-              <a:spcAft>
-                <a:spcPts val="0"/>
-              </a:spcAft>
-              <a:buSzPts val="1600"/>
-              <a:buChar char="●"/>
-            </a:pPr>
-            <a:r>
-              <a:rPr lang="en"/>
-              <a:t>Last lesson: the course recap</a:t>
-            </a:r>
-            <a:endParaRPr/>
-          </a:p>
-          <a:p>
-            <a:pPr indent="-317500" lvl="1" marL="914400" rtl="0" algn="l">
-              <a:spcBef>
-                <a:spcPts val="0"/>
-              </a:spcBef>
-              <a:spcAft>
-                <a:spcPts val="0"/>
-              </a:spcAft>
-              <a:buSzPts val="1400"/>
-              <a:buChar char="○"/>
-            </a:pPr>
-            <a:r>
-              <a:rPr lang="en"/>
-              <a:t>Bring your project: find each thread in your own game</a:t>
-            </a:r>
-            <a:endParaRPr/>
-          </a:p>
-        </p:txBody>
-      </p:sp>
-    </p:spTree>
-  </p:cSld>
-  <p:clrMapOvr>
-    <a:masterClrMapping/>
-  </p:clrMapOvr>
-</p:sld>
-</file>
-
 <file path=ppt/slides/slide4.xml><?xml version="1.0" encoding="utf-8"?>
 <p:sld xmlns:a="http://schemas.openxmlformats.org/drawingml/2006/main" xmlns:r="http://schemas.openxmlformats.org/officeDocument/2006/relationships" xmlns:mc="http://schemas.openxmlformats.org/markup-compatibility/2006" xmlns:mv="urn:schemas-microsoft-com:mac:vml" xmlns:p="http://schemas.openxmlformats.org/presentationml/2006/main" xmlns:c="http://schemas.openxmlformats.org/drawingml/2006/chart" xmlns:dgm="http://schemas.openxmlformats.org/drawingml/2006/diagram" xmlns:o="urn:schemas-microsoft-com:office:office" xmlns:v="urn:schemas-microsoft-com:vml" xmlns:pvml="urn:schemas-microsoft-com:office:powerpoint" xmlns:com="http://schemas.openxmlformats.org/drawingml/2006/compatibility" xmlns:p14="http://schemas.microsoft.com/office/powerpoint/2010/main" xmlns:p15="http://schemas.microsoft.com/office/powerpoint/2012/main" xmlns:ahyp="http://schemas.microsoft.com/office/drawing/2018/hyperlinkcolor">
   <p:cSld>

--- a/slides/12 Vampire Survivors.pptx
+++ b/slides/12 Vampire Survivors.pptx
@@ -2412,7 +2412,7 @@
           <a:lstStyle/>
           <a:p>
             <a:r>
-              <a:t>Pairs, about 5 minutes. Around 2,000 enemies on a laptop, and Separate takes almost all of it.</a:t>
+              <a:t>Pairs, about 5 minutes. On the laptop behind the page’s table, around 4,000 enemies (2,000 take 4.5 ms, and doubling quadruples it), and Separate takes almost all of it. Machines differ; compare the shape, not the number.</a:t>
             </a:r>
           </a:p>
         </p:txBody>

--- a/slides/12 Vampire Survivors.pptx
+++ b/slides/12 Vampire Survivors.pptx
@@ -813,7 +813,7 @@
           <a:lstStyle/>
           <a:p>
             <a:r>
-              <a:t>Welcome. Today we build Vampire Survivors. The main topic: performance.</a:t>
+              <a:t>Welcome. Today we build Vampire Survivors. The main topic: performance at scale.</a:t>
             </a:r>
           </a:p>
           <a:p>
@@ -2238,7 +2238,7 @@
           <a:lstStyle/>
           <a:p>
             <a:r>
-              <a:t>The main topic: performance with thousands of enemies. Measure first, then fix the algorithm, then the data. The last lesson is the course recap.</a:t>
+              <a:t>The main topic: performance at scale, with thousands of enemies. Measure first, then fix the algorithm, then the data. The last lesson is the course recap.</a:t>
             </a:r>
           </a:p>
         </p:txBody>
@@ -18638,7 +18638,7 @@
         <p:spPr>
           <a:xfrm>
             <a:off x="311700" y="885950"/>
-            <a:ext cx="8520600" cy="4023300"/>
+            <a:ext cx="8520600" cy="2825496"/>
           </a:xfrm>
           <a:prstGeom prst="rect">
             <a:avLst/>
@@ -18649,6 +18649,23 @@
             <a:normAutofit/>
           </a:bodyPr>
           <a:lstStyle/>
+          <a:p>
+            <a:pPr indent="-330200" lvl="0" marL="457200" rtl="0" algn="l">
+              <a:spcBef>
+                <a:spcPts val="0"/>
+              </a:spcBef>
+              <a:spcAft>
+                <a:spcPts val="0"/>
+              </a:spcAft>
+              <a:buSzPts val="1600"/>
+              <a:buChar char="●"/>
+            </a:pPr>
+            <a:r>
+              <a:rPr lang="en" b="1"/>
+              <a:t>Main topic: Performance at scale</a:t>
+            </a:r>
+            <a:endParaRPr/>
+          </a:p>
           <a:p>
             <a:pPr indent="-330200" lvl="0" marL="457200" rtl="0" algn="l">
               <a:spcBef>

--- a/slides/12 Vampire Survivors.pptx
+++ b/slides/12 Vampire Survivors.pptx
@@ -813,7 +813,7 @@
           <a:lstStyle/>
           <a:p>
             <a:r>
-              <a:t>Welcome. Today we build Vampire Survivors. The main topic: performance at scale.</a:t>
+              <a:t>Welcome. Today we build Vampire Survivors. The main topic: performance.</a:t>
             </a:r>
           </a:p>
           <a:p>
@@ -2238,7 +2238,7 @@
           <a:lstStyle/>
           <a:p>
             <a:r>
-              <a:t>The main topic: performance at scale, with thousands of enemies. Measure first, then fix the algorithm, then the data. The last lesson is the course recap.</a:t>
+              <a:t>Today’s main topic is performance, with thousands of enemies on screen. We measure first, then fix the algorithm, then the data. The last part is the course recap.</a:t>
             </a:r>
           </a:p>
         </p:txBody>
@@ -18662,7 +18662,7 @@
             </a:pPr>
             <a:r>
               <a:rPr lang="en" b="1"/>
-              <a:t>Main topic: Performance at scale</a:t>
+              <a:t>Main topic: Performance</a:t>
             </a:r>
             <a:endParaRPr/>
           </a:p>

--- a/slides/12 Vampire Survivors.pptx
+++ b/slides/12 Vampire Survivors.pptx
@@ -997,7 +997,7 @@
           <a:lstStyle/>
           <a:p>
             <a:r>
-              <a:t>Indexes change, so nobody can hold on to an enemy. Harder to read and change. So only for the thousands: the swarm and the gems, not the player.</a:t>
+              <a:t>Indexes change, so nobody can hold on to an enemy. Harder to read and change. So only for the thousands: the swarm and the gems.</a:t>
             </a:r>
           </a:p>
         </p:txBody>
@@ -1198,7 +1198,7 @@
           </a:p>
           <a:p>
             <a:r>
-              <a:t>A: Each enemy is only compared with the enemies in its own and neighbouring cells, instead of with every other enemy. The work grows with the number of enemies, not with its square.</a:t>
+              <a:t>A: Each enemy is only compared with the enemies in its own and neighbouring cells. The work then grows in step with the number of enemies.</a:t>
             </a:r>
           </a:p>
           <a:p/>
@@ -2149,7 +2149,7 @@
           </a:p>
           <a:p>
             <a:r>
-              <a:t>Today we build the parts that matter for the architecture, not the whole game.</a:t>
+              <a:t>Today we build the parts that matter for the architecture.</a:t>
             </a:r>
           </a:p>
         </p:txBody>
@@ -2412,7 +2412,7 @@
           <a:lstStyle/>
           <a:p>
             <a:r>
-              <a:t>Pairs, about 5 minutes. On the laptop behind the page’s table, around 4,000 enemies (2,000 take 4.5 ms, and doubling quadruples it), and Separate takes almost all of it. Machines differ; compare the shape, not the number.</a:t>
+              <a:t>Pairs, about 5 minutes. On the laptop behind the page’s table, around 4,000 enemies (2,000 take 4.5 ms, and doubling quadruples it), and Separate takes almost all of it. Machines differ; compare the shape of the curve.</a:t>
             </a:r>
           </a:p>
         </p:txBody>
@@ -9044,7 +9044,7 @@
                   <a:srgbClr val="9AA3AB"/>
                 </a:solidFill>
               </a:rPr>
-              <a:t>The work grows with n, not n². Quadtrees, BVHs and sweep-and-prune exist too;</a:t>
+              <a:t>The work grows in step with n. Quadtrees, BVHs and sweep-and-prune exist too;</a:t>
             </a:r>
           </a:p>
           <a:p>

--- a/slides/12 Vampire Survivors.pptx
+++ b/slides/12 Vampire Survivors.pptx
@@ -11612,7 +11612,7 @@
                   <a:srgbClr val="9AA3AB"/>
                 </a:solidFill>
               </a:rPr>
-              <a:t>The CPU reads 64 bytes at a time: one read, several enemies.</a:t>
+              <a:t>The CPU reads 64 bytes at a time, so one read brings several enemies.</a:t>
             </a:r>
           </a:p>
         </p:txBody>

--- a/slides/12 Vampire Survivors.pptx
+++ b/slides/12 Vampire Survivors.pptx
@@ -16720,14 +16720,14 @@
       </p:sp>
       <p:pic>
         <p:nvPicPr>
-          <p:cNvPr id="46" name="Picture 46" descr="gif-vs.gif"/>
+          <p:cNvPr id="46" name="Picture 46" descr="vampire-survivors.gif"/>
           <p:cNvPicPr>
             <a:picLocks noChangeAspect="1"/>
           </p:cNvPicPr>
           <p:nvPr/>
         </p:nvPicPr>
         <p:blipFill>
-          <a:blip r:embed="rId3"/>
+          <a:blip r:embed="rId4"/>
           <a:stretch>
             <a:fillRect/>
           </a:stretch>
@@ -16735,7 +16735,7 @@
         <p:spPr>
           <a:xfrm>
             <a:off x="1677202" y="1531275"/>
-            <a:ext cx="5789596" cy="3256648"/>
+            <a:ext cx="5789596" cy="3256647"/>
           </a:xfrm>
           <a:prstGeom prst="rect">
             <a:avLst/>

--- a/slides/12 Vampire Survivors.pptx
+++ b/slides/12 Vampire Survivors.pptx
@@ -16727,15 +16727,15 @@
           <p:nvPr/>
         </p:nvPicPr>
         <p:blipFill>
-          <a:blip r:embed="rId4"/>
+          <a:blip r:embed="rId3"/>
           <a:stretch>
             <a:fillRect/>
           </a:stretch>
         </p:blipFill>
         <p:spPr>
           <a:xfrm>
-            <a:off x="1677202" y="1531275"/>
-            <a:ext cx="5789596" cy="3256647"/>
+            <a:off x="1677203" y="1531275"/>
+            <a:ext cx="5789594" cy="3256647"/>
           </a:xfrm>
           <a:prstGeom prst="rect">
             <a:avLst/>

--- a/slides/12 Vampire Survivors.pptx
+++ b/slides/12 Vampire Survivors.pptx
@@ -2238,7 +2238,7 @@
           <a:lstStyle/>
           <a:p>
             <a:r>
-              <a:t>Today’s main topic is performance, with thousands of enemies on screen. We measure first, then fix the algorithm, then the data. The last part is the course recap.</a:t>
+              <a:t>Today’s main topic is performance, with thousands of enemies on screen. We measure first, then fix the algorithm, then the data.</a:t>
             </a:r>
           </a:p>
         </p:txBody>
@@ -18751,23 +18751,6 @@
             </a:r>
             <a:endParaRPr/>
           </a:p>
-          <a:p>
-            <a:pPr indent="-330200" lvl="0" marL="457200" rtl="0" algn="l">
-              <a:spcBef>
-                <a:spcPts val="0"/>
-              </a:spcBef>
-              <a:spcAft>
-                <a:spcPts val="0"/>
-              </a:spcAft>
-              <a:buSzPts val="1600"/>
-              <a:buChar char="●"/>
-            </a:pPr>
-            <a:r>
-              <a:rPr lang="en"/>
-              <a:t>Course Recap (last lesson)</a:t>
-            </a:r>
-            <a:endParaRPr/>
-          </a:p>
         </p:txBody>
       </p:sp>
     </p:spTree>

--- a/slides/12 Vampire Survivors.pptx
+++ b/slides/12 Vampire Survivors.pptx
@@ -2842,7 +2842,7 @@
           <a:lstStyle/>
           <a:p>
             <a:r>
-              <a:t>With 1,000 enemies the grid is no faster: it has its own cost. With 10,000 it’s 25 times faster. The work grows with n.</a:t>
+              <a:t>With 1,000 enemies the grid is no faster: it has its own cost. With 10,000 it’s 26 times faster. The work grows with n.</a:t>
             </a:r>
           </a:p>
         </p:txBody>

--- a/slides/12 Vampire Survivors.pptx
+++ b/slides/12 Vampire Survivors.pptx
@@ -14,6 +14,7 @@
     <p:sldId id="258" r:id="rId8"/>
     <p:sldId id="259" r:id="rId9"/>
     <p:sldId id="297" r:id="rId56"/>
+    <p:sldId id="323" r:id="rId33"/>
     <p:sldId id="298" r:id="rId57"/>
     <p:sldId id="320" r:id="rId36"/>
     <p:sldId id="299" r:id="rId58"/>
@@ -21,6 +22,7 @@
     <p:sldId id="301" r:id="rId60"/>
     <p:sldId id="319" r:id="rId37"/>
     <p:sldId id="302" r:id="rId61"/>
+    <p:sldId id="322" r:id="rId34"/>
     <p:sldId id="303" r:id="rId62"/>
     <p:sldId id="304" r:id="rId63"/>
     <p:sldId id="305" r:id="rId64"/>
@@ -29,6 +31,7 @@
     <p:sldId id="307" r:id="rId66"/>
     <p:sldId id="308" r:id="rId67"/>
     <p:sldId id="309" r:id="rId68"/>
+    <p:sldId id="321" r:id="rId35"/>
     <p:sldId id="310" r:id="rId69"/>
     <p:sldId id="311" r:id="rId70"/>
     <p:sldId id="312" r:id="rId71"/>
@@ -2036,6 +2039,64 @@
 </p:notes>
 </file>
 
+<file path=ppt/notesSlides/notesSlide27.xml><?xml version="1.0" encoding="utf-8"?>
+<p:notes xmlns:a="http://schemas.openxmlformats.org/drawingml/2006/main" xmlns:p="http://schemas.openxmlformats.org/presentationml/2006/main" xmlns:r="http://schemas.openxmlformats.org/officeDocument/2006/relationships">
+  <p:cSld>
+    <p:spTree>
+      <p:nvGrpSpPr>
+        <p:cNvPr id="1" name=""/>
+        <p:cNvGrpSpPr/>
+        <p:nvPr/>
+      </p:nvGrpSpPr>
+      <p:grpSpPr>
+        <a:xfrm>
+          <a:off x="0" y="0"/>
+          <a:ext cx="0" cy="0"/>
+          <a:chOff x="0" y="0"/>
+          <a:chExt cx="0" cy="0"/>
+        </a:xfrm>
+      </p:grpSpPr>
+      <p:sp>
+        <p:nvSpPr>
+          <p:cNvPr id="2" name="Slide Image Placeholder 1"/>
+          <p:cNvSpPr>
+            <a:spLocks noGrp="1"/>
+          </p:cNvSpPr>
+          <p:nvPr>
+            <p:ph type="sldImg" idx="2"/>
+          </p:nvPr>
+        </p:nvSpPr>
+        <p:spPr/>
+      </p:sp>
+      <p:sp>
+        <p:nvSpPr>
+          <p:cNvPr id="3" name="Notes Placeholder 2"/>
+          <p:cNvSpPr>
+            <a:spLocks noGrp="1"/>
+          </p:cNvSpPr>
+          <p:nvPr>
+            <p:ph type="body" idx="1"/>
+          </p:nvPr>
+        </p:nvSpPr>
+        <p:spPr/>
+        <p:txBody>
+          <a:bodyPr/>
+          <a:lstStyle/>
+          <a:p>
+            <a:r>
+              <a:t>Count each cell, find where it starts, copy each enemy into its cell's range. Three loops over plain arrays, nothing allocated.</a:t>
+            </a:r>
+          </a:p>
+        </p:txBody>
+      </p:sp>
+    </p:spTree>
+  </p:cSld>
+  <p:clrMapOvr>
+    <a:masterClrMapping/>
+  </p:clrMapOvr>
+</p:notes>
+</file>
+
 <file path=ppt/notesSlides/notesSlide28.xml><?xml version="1.0" encoding="utf-8"?>
 <p:notes xmlns:a="http://schemas.openxmlformats.org/drawingml/2006/main" xmlns:p="http://schemas.openxmlformats.org/presentationml/2006/main" xmlns:r="http://schemas.openxmlformats.org/officeDocument/2006/relationships">
   <p:cSld>
@@ -2483,6 +2544,132 @@
 </p:notes>
 </file>
 
+<file path=ppt/notesSlides/notesSlide34.xml><?xml version="1.0" encoding="utf-8"?>
+<p:notes xmlns:a="http://schemas.openxmlformats.org/drawingml/2006/main" xmlns:p="http://schemas.openxmlformats.org/presentationml/2006/main" xmlns:r="http://schemas.openxmlformats.org/officeDocument/2006/relationships">
+  <p:cSld>
+    <p:spTree>
+      <p:nvGrpSpPr>
+        <p:cNvPr id="1" name=""/>
+        <p:cNvGrpSpPr/>
+        <p:nvPr/>
+      </p:nvGrpSpPr>
+      <p:grpSpPr>
+        <a:xfrm>
+          <a:off x="0" y="0"/>
+          <a:ext cx="0" cy="0"/>
+          <a:chOff x="0" y="0"/>
+          <a:chExt cx="0" cy="0"/>
+        </a:xfrm>
+      </p:grpSpPr>
+      <p:sp>
+        <p:nvSpPr>
+          <p:cNvPr id="2" name="Slide Image Placeholder 1"/>
+          <p:cNvSpPr>
+            <a:spLocks noGrp="1"/>
+          </p:cNvSpPr>
+          <p:nvPr>
+            <p:ph type="sldImg" idx="2"/>
+          </p:nvPr>
+        </p:nvSpPr>
+        <p:spPr/>
+      </p:sp>
+      <p:sp>
+        <p:nvSpPr>
+          <p:cNvPr id="3" name="Notes Placeholder 2"/>
+          <p:cNvSpPr>
+            <a:spLocks noGrp="1"/>
+          </p:cNvSpPr>
+          <p:nvPr>
+            <p:ph type="body" idx="1"/>
+          </p:nvPr>
+        </p:nvSpPr>
+        <p:spPr/>
+        <p:txBody>
+          <a:bodyPr/>
+          <a:lstStyle/>
+          <a:p>
+            <a:r>
+              <a:t>An enemy can only overlap enemies near it. With a grid it only looks at its own cell and the eight around it.</a:t>
+            </a:r>
+          </a:p>
+          <a:p>
+            <a:r>
+              <a:t>Ask: how big must a cell be? Answer: at least the biggest overlap, or neighbours in the next cell but one are missed.</a:t>
+            </a:r>
+          </a:p>
+        </p:txBody>
+      </p:sp>
+    </p:spTree>
+  </p:cSld>
+  <p:clrMapOvr>
+    <a:masterClrMapping/>
+  </p:clrMapOvr>
+</p:notes>
+</file>
+
+<file path=ppt/notesSlides/notesSlide35.xml><?xml version="1.0" encoding="utf-8"?>
+<p:notes xmlns:a="http://schemas.openxmlformats.org/drawingml/2006/main" xmlns:p="http://schemas.openxmlformats.org/presentationml/2006/main" xmlns:r="http://schemas.openxmlformats.org/officeDocument/2006/relationships">
+  <p:cSld>
+    <p:spTree>
+      <p:nvGrpSpPr>
+        <p:cNvPr id="1" name=""/>
+        <p:cNvGrpSpPr/>
+        <p:nvPr/>
+      </p:nvGrpSpPr>
+      <p:grpSpPr>
+        <a:xfrm>
+          <a:off x="0" y="0"/>
+          <a:ext cx="0" cy="0"/>
+          <a:chOff x="0" y="0"/>
+          <a:chExt cx="0" cy="0"/>
+        </a:xfrm>
+      </p:grpSpPr>
+      <p:sp>
+        <p:nvSpPr>
+          <p:cNvPr id="2" name="Slide Image Placeholder 1"/>
+          <p:cNvSpPr>
+            <a:spLocks noGrp="1"/>
+          </p:cNvSpPr>
+          <p:nvPr>
+            <p:ph type="sldImg" idx="2"/>
+          </p:nvPr>
+        </p:nvSpPr>
+        <p:spPr/>
+      </p:sp>
+      <p:sp>
+        <p:nvSpPr>
+          <p:cNvPr id="3" name="Notes Placeholder 2"/>
+          <p:cNvSpPr>
+            <a:spLocks noGrp="1"/>
+          </p:cNvSpPr>
+          <p:nvPr>
+            <p:ph type="body" idx="1"/>
+          </p:nvPr>
+        </p:nvSpPr>
+        <p:spPr/>
+        <p:txBody>
+          <a:bodyPr/>
+          <a:lstStyle/>
+          <a:p>
+            <a:r>
+              <a:t>Twice the enemies, four times the checks. At 10,000 enemies that is 50 million pairs every step.</a:t>
+            </a:r>
+          </a:p>
+          <a:p>
+            <a:r>
+              <a:t>No tuning inside the loop fixes that.</a:t>
+            </a:r>
+          </a:p>
+        </p:txBody>
+      </p:sp>
+    </p:spTree>
+  </p:cSld>
+  <p:clrMapOvr>
+    <a:masterClrMapping/>
+  </p:clrMapOvr>
+</p:notes>
+</file>
+
 <file path=ppt/notesSlides/notesSlide37.xml><?xml version="1.0" encoding="utf-8"?>
 <p:notes xmlns:a="http://schemas.openxmlformats.org/drawingml/2006/main" xmlns:r="http://schemas.openxmlformats.org/officeDocument/2006/relationships" xmlns:mc="http://schemas.openxmlformats.org/markup-compatibility/2006" xmlns:mv="urn:schemas-microsoft-com:mac:vml" xmlns:p="http://schemas.openxmlformats.org/presentationml/2006/main" xmlns:c="http://schemas.openxmlformats.org/drawingml/2006/chart" xmlns:dgm="http://schemas.openxmlformats.org/drawingml/2006/diagram" xmlns:o="urn:schemas-microsoft-com:office:office" xmlns:v="urn:schemas-microsoft-com:vml" xmlns:pvml="urn:schemas-microsoft-com:office:powerpoint" xmlns:com="http://schemas.openxmlformats.org/drawingml/2006/compatibility" xmlns:p14="http://schemas.microsoft.com/office/powerpoint/2010/main" xmlns:p15="http://schemas.microsoft.com/office/powerpoint/2012/main" xmlns:ahyp="http://schemas.microsoft.com/office/drawing/2018/hyperlinkcolor" showMasterPhAnim="0" showMasterSp="0">
   <p:cSld>
@@ -2901,6 +3088,21 @@
           <a:p>
             <a:r>
               <a:t>The CPU reads 64 bytes at a time. A list of objects scatters them over memory; arrays pack each field together, so one read brings several enemies.</a:t>
+            </a:r>
+          </a:p>
+          <a:p>
+            <a:r>
+              <a:t>List&lt;Enemy&gt;: references to objects all over the heap</a:t>
+            </a:r>
+          </a:p>
+          <a:p>
+            <a:r>
+              <a:t>A struct of arrays: each field packed together</a:t>
+            </a:r>
+          </a:p>
+          <a:p>
+            <a:r>
+              <a:t>The CPU reads 64 bytes at a time, so one read brings several enemies.</a:t>
             </a:r>
           </a:p>
         </p:txBody>
@@ -10122,8 +10324,8 @@
         </p:nvSpPr>
         <p:spPr>
           <a:xfrm>
-            <a:off x="311700" y="885950"/>
-            <a:ext cx="8520600" cy="521208"/>
+            <a:off x="311700" y="886968"/>
+            <a:ext cx="8520600" cy="457200"/>
           </a:xfrm>
           <a:prstGeom prst="rect">
             <a:avLst/>
@@ -10153,1470 +10355,30 @@
           </a:p>
         </p:txBody>
       </p:sp>
-      <p:sp>
-        <p:nvSpPr>
-          <p:cNvPr id="295" name="TextBox 294"/>
-          <p:cNvSpPr txBox="1"/>
+      <p:pic>
+        <p:nvPicPr>
+          <p:cNvPr id="295" name="Picture 294" descr="memory-layout.png"/>
+          <p:cNvPicPr>
+            <a:picLocks noChangeAspect="1"/>
+          </p:cNvPicPr>
           <p:nvPr/>
-        </p:nvSpPr>
+        </p:nvPicPr>
+        <p:blipFill>
+          <a:blip r:embed="rId3"/>
+          <a:stretch>
+            <a:fillRect/>
+          </a:stretch>
+        </p:blipFill>
         <p:spPr>
           <a:xfrm>
-            <a:off x="548640" y="1371600"/>
-            <a:ext cx="3657600" cy="274320"/>
+            <a:off x="1106905" y="1371600"/>
+            <a:ext cx="6930189" cy="3657600"/>
           </a:xfrm>
           <a:prstGeom prst="rect">
             <a:avLst/>
           </a:prstGeom>
-          <a:noFill/>
         </p:spPr>
-        <p:txBody>
-          <a:bodyPr wrap="square">
-            <a:spAutoFit/>
-          </a:bodyPr>
-          <a:lstStyle/>
-          <a:p>
-            <a:pPr algn="l"/>
-            <a:r>
-              <a:rPr sz="1300" b="1" i="0">
-                <a:solidFill>
-                  <a:srgbClr val="DEE2E6"/>
-                </a:solidFill>
-              </a:rPr>
-              <a:t>List&lt;Enemy&gt;: references to objects all over the heap</a:t>
-            </a:r>
-          </a:p>
-        </p:txBody>
-      </p:sp>
-      <p:sp>
-        <p:nvSpPr>
-          <p:cNvPr id="296" name="Rounded Rectangle 295"/>
-          <p:cNvSpPr/>
-          <p:nvPr/>
-        </p:nvSpPr>
-        <p:spPr>
-          <a:xfrm>
-            <a:off x="640080" y="1828800"/>
-            <a:ext cx="822960" cy="365760"/>
-          </a:xfrm>
-          <a:prstGeom prst="roundRect">
-            <a:avLst>
-              <a:gd name="adj" fmla="val 12000"/>
-            </a:avLst>
-          </a:prstGeom>
-          <a:solidFill>
-            <a:srgbClr val="2E3338"/>
-          </a:solidFill>
-          <a:ln>
-            <a:noFill/>
-          </a:ln>
-          <a:effectLst/>
-        </p:spPr>
-        <p:style>
-          <a:lnRef idx="1">
-            <a:schemeClr val="accent1"/>
-          </a:lnRef>
-          <a:fillRef idx="3">
-            <a:schemeClr val="accent1"/>
-          </a:fillRef>
-          <a:effectRef idx="2">
-            <a:schemeClr val="accent1"/>
-          </a:effectRef>
-          <a:fontRef idx="minor">
-            <a:schemeClr val="lt1"/>
-          </a:fontRef>
-        </p:style>
-        <p:txBody>
-          <a:bodyPr rtlCol="0" anchor="ctr" wrap="square" lIns="73152" rIns="73152"/>
-          <a:lstStyle/>
-          <a:p>
-            <a:pPr algn="ctr"/>
-            <a:r>
-              <a:rPr sz="1100" b="0">
-                <a:solidFill>
-                  <a:srgbClr val="DEE2E6"/>
-                </a:solidFill>
-              </a:rPr>
-              <a:t>enemy</a:t>
-            </a:r>
-          </a:p>
-        </p:txBody>
-      </p:sp>
-      <p:sp>
-        <p:nvSpPr>
-          <p:cNvPr id="297" name="Rounded Rectangle 296"/>
-          <p:cNvSpPr/>
-          <p:nvPr/>
-        </p:nvSpPr>
-        <p:spPr>
-          <a:xfrm>
-            <a:off x="2377440" y="2377440"/>
-            <a:ext cx="822960" cy="365760"/>
-          </a:xfrm>
-          <a:prstGeom prst="roundRect">
-            <a:avLst>
-              <a:gd name="adj" fmla="val 12000"/>
-            </a:avLst>
-          </a:prstGeom>
-          <a:solidFill>
-            <a:srgbClr val="2E3338"/>
-          </a:solidFill>
-          <a:ln>
-            <a:noFill/>
-          </a:ln>
-          <a:effectLst/>
-        </p:spPr>
-        <p:style>
-          <a:lnRef idx="1">
-            <a:schemeClr val="accent1"/>
-          </a:lnRef>
-          <a:fillRef idx="3">
-            <a:schemeClr val="accent1"/>
-          </a:fillRef>
-          <a:effectRef idx="2">
-            <a:schemeClr val="accent1"/>
-          </a:effectRef>
-          <a:fontRef idx="minor">
-            <a:schemeClr val="lt1"/>
-          </a:fontRef>
-        </p:style>
-        <p:txBody>
-          <a:bodyPr rtlCol="0" anchor="ctr" wrap="square" lIns="73152" rIns="73152"/>
-          <a:lstStyle/>
-          <a:p>
-            <a:pPr algn="ctr"/>
-            <a:r>
-              <a:rPr sz="1100" b="0">
-                <a:solidFill>
-                  <a:srgbClr val="DEE2E6"/>
-                </a:solidFill>
-              </a:rPr>
-              <a:t>enemy</a:t>
-            </a:r>
-          </a:p>
-        </p:txBody>
-      </p:sp>
-      <p:sp>
-        <p:nvSpPr>
-          <p:cNvPr id="298" name="Rounded Rectangle 297"/>
-          <p:cNvSpPr/>
-          <p:nvPr/>
-        </p:nvSpPr>
-        <p:spPr>
-          <a:xfrm>
-            <a:off x="1280160" y="2926080"/>
-            <a:ext cx="822960" cy="365760"/>
-          </a:xfrm>
-          <a:prstGeom prst="roundRect">
-            <a:avLst>
-              <a:gd name="adj" fmla="val 12000"/>
-            </a:avLst>
-          </a:prstGeom>
-          <a:solidFill>
-            <a:srgbClr val="2E3338"/>
-          </a:solidFill>
-          <a:ln>
-            <a:noFill/>
-          </a:ln>
-          <a:effectLst/>
-        </p:spPr>
-        <p:style>
-          <a:lnRef idx="1">
-            <a:schemeClr val="accent1"/>
-          </a:lnRef>
-          <a:fillRef idx="3">
-            <a:schemeClr val="accent1"/>
-          </a:fillRef>
-          <a:effectRef idx="2">
-            <a:schemeClr val="accent1"/>
-          </a:effectRef>
-          <a:fontRef idx="minor">
-            <a:schemeClr val="lt1"/>
-          </a:fontRef>
-        </p:style>
-        <p:txBody>
-          <a:bodyPr rtlCol="0" anchor="ctr" wrap="square" lIns="73152" rIns="73152"/>
-          <a:lstStyle/>
-          <a:p>
-            <a:pPr algn="ctr"/>
-            <a:r>
-              <a:rPr sz="1100" b="0">
-                <a:solidFill>
-                  <a:srgbClr val="DEE2E6"/>
-                </a:solidFill>
-              </a:rPr>
-              <a:t>enemy</a:t>
-            </a:r>
-          </a:p>
-        </p:txBody>
-      </p:sp>
-      <p:sp>
-        <p:nvSpPr>
-          <p:cNvPr id="299" name="Rounded Rectangle 298"/>
-          <p:cNvSpPr/>
-          <p:nvPr/>
-        </p:nvSpPr>
-        <p:spPr>
-          <a:xfrm>
-            <a:off x="3108960" y="1828800"/>
-            <a:ext cx="822960" cy="365760"/>
-          </a:xfrm>
-          <a:prstGeom prst="roundRect">
-            <a:avLst>
-              <a:gd name="adj" fmla="val 12000"/>
-            </a:avLst>
-          </a:prstGeom>
-          <a:solidFill>
-            <a:srgbClr val="2E3338"/>
-          </a:solidFill>
-          <a:ln>
-            <a:noFill/>
-          </a:ln>
-          <a:effectLst/>
-        </p:spPr>
-        <p:style>
-          <a:lnRef idx="1">
-            <a:schemeClr val="accent1"/>
-          </a:lnRef>
-          <a:fillRef idx="3">
-            <a:schemeClr val="accent1"/>
-          </a:fillRef>
-          <a:effectRef idx="2">
-            <a:schemeClr val="accent1"/>
-          </a:effectRef>
-          <a:fontRef idx="minor">
-            <a:schemeClr val="lt1"/>
-          </a:fontRef>
-        </p:style>
-        <p:txBody>
-          <a:bodyPr rtlCol="0" anchor="ctr" wrap="square" lIns="73152" rIns="73152"/>
-          <a:lstStyle/>
-          <a:p>
-            <a:pPr algn="ctr"/>
-            <a:r>
-              <a:rPr sz="1100" b="0">
-                <a:solidFill>
-                  <a:srgbClr val="DEE2E6"/>
-                </a:solidFill>
-              </a:rPr>
-              <a:t>enemy</a:t>
-            </a:r>
-          </a:p>
-        </p:txBody>
-      </p:sp>
-      <p:sp>
-        <p:nvSpPr>
-          <p:cNvPr id="300" name="Rounded Rectangle 299"/>
-          <p:cNvSpPr/>
-          <p:nvPr/>
-        </p:nvSpPr>
-        <p:spPr>
-          <a:xfrm>
-            <a:off x="822960" y="3474720"/>
-            <a:ext cx="822960" cy="365760"/>
-          </a:xfrm>
-          <a:prstGeom prst="roundRect">
-            <a:avLst>
-              <a:gd name="adj" fmla="val 12000"/>
-            </a:avLst>
-          </a:prstGeom>
-          <a:solidFill>
-            <a:srgbClr val="2E3338"/>
-          </a:solidFill>
-          <a:ln>
-            <a:noFill/>
-          </a:ln>
-          <a:effectLst/>
-        </p:spPr>
-        <p:style>
-          <a:lnRef idx="1">
-            <a:schemeClr val="accent1"/>
-          </a:lnRef>
-          <a:fillRef idx="3">
-            <a:schemeClr val="accent1"/>
-          </a:fillRef>
-          <a:effectRef idx="2">
-            <a:schemeClr val="accent1"/>
-          </a:effectRef>
-          <a:fontRef idx="minor">
-            <a:schemeClr val="lt1"/>
-          </a:fontRef>
-        </p:style>
-        <p:txBody>
-          <a:bodyPr rtlCol="0" anchor="ctr" wrap="square" lIns="73152" rIns="73152"/>
-          <a:lstStyle/>
-          <a:p>
-            <a:pPr algn="ctr"/>
-            <a:r>
-              <a:rPr sz="1100" b="0">
-                <a:solidFill>
-                  <a:srgbClr val="DEE2E6"/>
-                </a:solidFill>
-              </a:rPr>
-              <a:t>enemy</a:t>
-            </a:r>
-          </a:p>
-        </p:txBody>
-      </p:sp>
-      <p:sp>
-        <p:nvSpPr>
-          <p:cNvPr id="301" name="Rounded Rectangle 300"/>
-          <p:cNvSpPr/>
-          <p:nvPr/>
-        </p:nvSpPr>
-        <p:spPr>
-          <a:xfrm>
-            <a:off x="2834640" y="3291840"/>
-            <a:ext cx="822960" cy="365760"/>
-          </a:xfrm>
-          <a:prstGeom prst="roundRect">
-            <a:avLst>
-              <a:gd name="adj" fmla="val 12000"/>
-            </a:avLst>
-          </a:prstGeom>
-          <a:solidFill>
-            <a:srgbClr val="2E3338"/>
-          </a:solidFill>
-          <a:ln>
-            <a:noFill/>
-          </a:ln>
-          <a:effectLst/>
-        </p:spPr>
-        <p:style>
-          <a:lnRef idx="1">
-            <a:schemeClr val="accent1"/>
-          </a:lnRef>
-          <a:fillRef idx="3">
-            <a:schemeClr val="accent1"/>
-          </a:fillRef>
-          <a:effectRef idx="2">
-            <a:schemeClr val="accent1"/>
-          </a:effectRef>
-          <a:fontRef idx="minor">
-            <a:schemeClr val="lt1"/>
-          </a:fontRef>
-        </p:style>
-        <p:txBody>
-          <a:bodyPr rtlCol="0" anchor="ctr" wrap="square" lIns="73152" rIns="73152"/>
-          <a:lstStyle/>
-          <a:p>
-            <a:pPr algn="ctr"/>
-            <a:r>
-              <a:rPr sz="1100" b="0">
-                <a:solidFill>
-                  <a:srgbClr val="DEE2E6"/>
-                </a:solidFill>
-              </a:rPr>
-              <a:t>enemy</a:t>
-            </a:r>
-          </a:p>
-        </p:txBody>
-      </p:sp>
-      <p:sp>
-        <p:nvSpPr>
-          <p:cNvPr id="302" name="TextBox 301"/>
-          <p:cNvSpPr txBox="1"/>
-          <p:nvPr/>
-        </p:nvSpPr>
-        <p:spPr>
-          <a:xfrm>
-            <a:off x="4846320" y="1371600"/>
-            <a:ext cx="3840480" cy="274320"/>
-          </a:xfrm>
-          <a:prstGeom prst="rect">
-            <a:avLst/>
-          </a:prstGeom>
-          <a:noFill/>
-        </p:spPr>
-        <p:txBody>
-          <a:bodyPr wrap="square">
-            <a:spAutoFit/>
-          </a:bodyPr>
-          <a:lstStyle/>
-          <a:p>
-            <a:pPr algn="l"/>
-            <a:r>
-              <a:rPr sz="1300" b="1" i="0">
-                <a:solidFill>
-                  <a:srgbClr val="DEE2E6"/>
-                </a:solidFill>
-              </a:rPr>
-              <a:t>A struct of arrays: each field packed together</a:t>
-            </a:r>
-          </a:p>
-        </p:txBody>
-      </p:sp>
-      <p:sp>
-        <p:nvSpPr>
-          <p:cNvPr id="303" name="TextBox 302"/>
-          <p:cNvSpPr txBox="1"/>
-          <p:nvPr/>
-        </p:nvSpPr>
-        <p:spPr>
-          <a:xfrm>
-            <a:off x="4846320" y="1828800"/>
-            <a:ext cx="914400" cy="365760"/>
-          </a:xfrm>
-          <a:prstGeom prst="rect">
-            <a:avLst/>
-          </a:prstGeom>
-          <a:noFill/>
-        </p:spPr>
-        <p:txBody>
-          <a:bodyPr wrap="square">
-            <a:spAutoFit/>
-          </a:bodyPr>
-          <a:lstStyle/>
-          <a:p>
-            <a:pPr algn="l"/>
-            <a:r>
-              <a:rPr sz="1100" b="0" i="0">
-                <a:solidFill>
-                  <a:srgbClr val="9AA3AB"/>
-                </a:solidFill>
-              </a:rPr>
-              <a:t>Position</a:t>
-            </a:r>
-          </a:p>
-        </p:txBody>
-      </p:sp>
-      <p:sp>
-        <p:nvSpPr>
-          <p:cNvPr id="304" name="Rectangle 303"/>
-          <p:cNvSpPr/>
-          <p:nvPr/>
-        </p:nvSpPr>
-        <p:spPr>
-          <a:xfrm>
-            <a:off x="5760720" y="1828800"/>
-            <a:ext cx="438912" cy="365760"/>
-          </a:xfrm>
-          <a:prstGeom prst="rect">
-            <a:avLst/>
-          </a:prstGeom>
-          <a:solidFill>
-            <a:srgbClr val="D45D35"/>
-          </a:solidFill>
-          <a:ln>
-            <a:noFill/>
-          </a:ln>
-          <a:effectLst/>
-        </p:spPr>
-        <p:style>
-          <a:lnRef idx="1">
-            <a:schemeClr val="accent1"/>
-          </a:lnRef>
-          <a:fillRef idx="3">
-            <a:schemeClr val="accent1"/>
-          </a:fillRef>
-          <a:effectRef idx="2">
-            <a:schemeClr val="accent1"/>
-          </a:effectRef>
-          <a:fontRef idx="minor">
-            <a:schemeClr val="lt1"/>
-          </a:fontRef>
-        </p:style>
-        <p:txBody>
-          <a:bodyPr rtlCol="0" anchor="ctr" wrap="square" lIns="73152" rIns="73152"/>
-          <a:lstStyle/>
-          <a:p>
-            <a:pPr algn="ctr"/>
-            <a:r>
-              <a:rPr sz="1400" b="0">
-                <a:solidFill>
-                  <a:srgbClr val="DEE2E6"/>
-                </a:solidFill>
-              </a:rPr>
-              <a:t/>
-            </a:r>
-          </a:p>
-        </p:txBody>
-      </p:sp>
-      <p:sp>
-        <p:nvSpPr>
-          <p:cNvPr id="305" name="Rectangle 304"/>
-          <p:cNvSpPr/>
-          <p:nvPr/>
-        </p:nvSpPr>
-        <p:spPr>
-          <a:xfrm>
-            <a:off x="6236208" y="1828800"/>
-            <a:ext cx="438912" cy="365760"/>
-          </a:xfrm>
-          <a:prstGeom prst="rect">
-            <a:avLst/>
-          </a:prstGeom>
-          <a:solidFill>
-            <a:srgbClr val="D45D35"/>
-          </a:solidFill>
-          <a:ln>
-            <a:noFill/>
-          </a:ln>
-          <a:effectLst/>
-        </p:spPr>
-        <p:style>
-          <a:lnRef idx="1">
-            <a:schemeClr val="accent1"/>
-          </a:lnRef>
-          <a:fillRef idx="3">
-            <a:schemeClr val="accent1"/>
-          </a:fillRef>
-          <a:effectRef idx="2">
-            <a:schemeClr val="accent1"/>
-          </a:effectRef>
-          <a:fontRef idx="minor">
-            <a:schemeClr val="lt1"/>
-          </a:fontRef>
-        </p:style>
-        <p:txBody>
-          <a:bodyPr rtlCol="0" anchor="ctr" wrap="square" lIns="73152" rIns="73152"/>
-          <a:lstStyle/>
-          <a:p>
-            <a:pPr algn="ctr"/>
-            <a:r>
-              <a:rPr sz="1400" b="0">
-                <a:solidFill>
-                  <a:srgbClr val="DEE2E6"/>
-                </a:solidFill>
-              </a:rPr>
-              <a:t/>
-            </a:r>
-          </a:p>
-        </p:txBody>
-      </p:sp>
-      <p:sp>
-        <p:nvSpPr>
-          <p:cNvPr id="306" name="Rectangle 305"/>
-          <p:cNvSpPr/>
-          <p:nvPr/>
-        </p:nvSpPr>
-        <p:spPr>
-          <a:xfrm>
-            <a:off x="6711696" y="1828800"/>
-            <a:ext cx="438912" cy="365760"/>
-          </a:xfrm>
-          <a:prstGeom prst="rect">
-            <a:avLst/>
-          </a:prstGeom>
-          <a:solidFill>
-            <a:srgbClr val="D45D35"/>
-          </a:solidFill>
-          <a:ln>
-            <a:noFill/>
-          </a:ln>
-          <a:effectLst/>
-        </p:spPr>
-        <p:style>
-          <a:lnRef idx="1">
-            <a:schemeClr val="accent1"/>
-          </a:lnRef>
-          <a:fillRef idx="3">
-            <a:schemeClr val="accent1"/>
-          </a:fillRef>
-          <a:effectRef idx="2">
-            <a:schemeClr val="accent1"/>
-          </a:effectRef>
-          <a:fontRef idx="minor">
-            <a:schemeClr val="lt1"/>
-          </a:fontRef>
-        </p:style>
-        <p:txBody>
-          <a:bodyPr rtlCol="0" anchor="ctr" wrap="square" lIns="73152" rIns="73152"/>
-          <a:lstStyle/>
-          <a:p>
-            <a:pPr algn="ctr"/>
-            <a:r>
-              <a:rPr sz="1400" b="0">
-                <a:solidFill>
-                  <a:srgbClr val="DEE2E6"/>
-                </a:solidFill>
-              </a:rPr>
-              <a:t/>
-            </a:r>
-          </a:p>
-        </p:txBody>
-      </p:sp>
-      <p:sp>
-        <p:nvSpPr>
-          <p:cNvPr id="307" name="Rectangle 306"/>
-          <p:cNvSpPr/>
-          <p:nvPr/>
-        </p:nvSpPr>
-        <p:spPr>
-          <a:xfrm>
-            <a:off x="7187183" y="1828800"/>
-            <a:ext cx="438912" cy="365760"/>
-          </a:xfrm>
-          <a:prstGeom prst="rect">
-            <a:avLst/>
-          </a:prstGeom>
-          <a:solidFill>
-            <a:srgbClr val="D45D35"/>
-          </a:solidFill>
-          <a:ln>
-            <a:noFill/>
-          </a:ln>
-          <a:effectLst/>
-        </p:spPr>
-        <p:style>
-          <a:lnRef idx="1">
-            <a:schemeClr val="accent1"/>
-          </a:lnRef>
-          <a:fillRef idx="3">
-            <a:schemeClr val="accent1"/>
-          </a:fillRef>
-          <a:effectRef idx="2">
-            <a:schemeClr val="accent1"/>
-          </a:effectRef>
-          <a:fontRef idx="minor">
-            <a:schemeClr val="lt1"/>
-          </a:fontRef>
-        </p:style>
-        <p:txBody>
-          <a:bodyPr rtlCol="0" anchor="ctr" wrap="square" lIns="73152" rIns="73152"/>
-          <a:lstStyle/>
-          <a:p>
-            <a:pPr algn="ctr"/>
-            <a:r>
-              <a:rPr sz="1400" b="0">
-                <a:solidFill>
-                  <a:srgbClr val="DEE2E6"/>
-                </a:solidFill>
-              </a:rPr>
-              <a:t/>
-            </a:r>
-          </a:p>
-        </p:txBody>
-      </p:sp>
-      <p:sp>
-        <p:nvSpPr>
-          <p:cNvPr id="308" name="Rectangle 307"/>
-          <p:cNvSpPr/>
-          <p:nvPr/>
-        </p:nvSpPr>
-        <p:spPr>
-          <a:xfrm>
-            <a:off x="7662671" y="1828800"/>
-            <a:ext cx="438912" cy="365760"/>
-          </a:xfrm>
-          <a:prstGeom prst="rect">
-            <a:avLst/>
-          </a:prstGeom>
-          <a:solidFill>
-            <a:srgbClr val="D45D35"/>
-          </a:solidFill>
-          <a:ln>
-            <a:noFill/>
-          </a:ln>
-          <a:effectLst/>
-        </p:spPr>
-        <p:style>
-          <a:lnRef idx="1">
-            <a:schemeClr val="accent1"/>
-          </a:lnRef>
-          <a:fillRef idx="3">
-            <a:schemeClr val="accent1"/>
-          </a:fillRef>
-          <a:effectRef idx="2">
-            <a:schemeClr val="accent1"/>
-          </a:effectRef>
-          <a:fontRef idx="minor">
-            <a:schemeClr val="lt1"/>
-          </a:fontRef>
-        </p:style>
-        <p:txBody>
-          <a:bodyPr rtlCol="0" anchor="ctr" wrap="square" lIns="73152" rIns="73152"/>
-          <a:lstStyle/>
-          <a:p>
-            <a:pPr algn="ctr"/>
-            <a:r>
-              <a:rPr sz="1400" b="0">
-                <a:solidFill>
-                  <a:srgbClr val="DEE2E6"/>
-                </a:solidFill>
-              </a:rPr>
-              <a:t/>
-            </a:r>
-          </a:p>
-        </p:txBody>
-      </p:sp>
-      <p:sp>
-        <p:nvSpPr>
-          <p:cNvPr id="309" name="Rectangle 308"/>
-          <p:cNvSpPr/>
-          <p:nvPr/>
-        </p:nvSpPr>
-        <p:spPr>
-          <a:xfrm>
-            <a:off x="8138160" y="1828800"/>
-            <a:ext cx="438912" cy="365760"/>
-          </a:xfrm>
-          <a:prstGeom prst="rect">
-            <a:avLst/>
-          </a:prstGeom>
-          <a:solidFill>
-            <a:srgbClr val="D45D35"/>
-          </a:solidFill>
-          <a:ln>
-            <a:noFill/>
-          </a:ln>
-          <a:effectLst/>
-        </p:spPr>
-        <p:style>
-          <a:lnRef idx="1">
-            <a:schemeClr val="accent1"/>
-          </a:lnRef>
-          <a:fillRef idx="3">
-            <a:schemeClr val="accent1"/>
-          </a:fillRef>
-          <a:effectRef idx="2">
-            <a:schemeClr val="accent1"/>
-          </a:effectRef>
-          <a:fontRef idx="minor">
-            <a:schemeClr val="lt1"/>
-          </a:fontRef>
-        </p:style>
-        <p:txBody>
-          <a:bodyPr rtlCol="0" anchor="ctr" wrap="square" lIns="73152" rIns="73152"/>
-          <a:lstStyle/>
-          <a:p>
-            <a:pPr algn="ctr"/>
-            <a:r>
-              <a:rPr sz="1400" b="0">
-                <a:solidFill>
-                  <a:srgbClr val="DEE2E6"/>
-                </a:solidFill>
-              </a:rPr>
-              <a:t/>
-            </a:r>
-          </a:p>
-        </p:txBody>
-      </p:sp>
-      <p:sp>
-        <p:nvSpPr>
-          <p:cNvPr id="310" name="TextBox 309"/>
-          <p:cNvSpPr txBox="1"/>
-          <p:nvPr/>
-        </p:nvSpPr>
-        <p:spPr>
-          <a:xfrm>
-            <a:off x="4846320" y="2377440"/>
-            <a:ext cx="914400" cy="365760"/>
-          </a:xfrm>
-          <a:prstGeom prst="rect">
-            <a:avLst/>
-          </a:prstGeom>
-          <a:noFill/>
-        </p:spPr>
-        <p:txBody>
-          <a:bodyPr wrap="square">
-            <a:spAutoFit/>
-          </a:bodyPr>
-          <a:lstStyle/>
-          <a:p>
-            <a:pPr algn="l"/>
-            <a:r>
-              <a:rPr sz="1100" b="0" i="0">
-                <a:solidFill>
-                  <a:srgbClr val="9AA3AB"/>
-                </a:solidFill>
-              </a:rPr>
-              <a:t>Health</a:t>
-            </a:r>
-          </a:p>
-        </p:txBody>
-      </p:sp>
-      <p:sp>
-        <p:nvSpPr>
-          <p:cNvPr id="311" name="Rectangle 310"/>
-          <p:cNvSpPr/>
-          <p:nvPr/>
-        </p:nvSpPr>
-        <p:spPr>
-          <a:xfrm>
-            <a:off x="5760720" y="2377440"/>
-            <a:ext cx="438912" cy="365760"/>
-          </a:xfrm>
-          <a:prstGeom prst="rect">
-            <a:avLst/>
-          </a:prstGeom>
-          <a:solidFill>
-            <a:srgbClr val="2E3338"/>
-          </a:solidFill>
-          <a:ln>
-            <a:noFill/>
-          </a:ln>
-          <a:effectLst/>
-        </p:spPr>
-        <p:style>
-          <a:lnRef idx="1">
-            <a:schemeClr val="accent1"/>
-          </a:lnRef>
-          <a:fillRef idx="3">
-            <a:schemeClr val="accent1"/>
-          </a:fillRef>
-          <a:effectRef idx="2">
-            <a:schemeClr val="accent1"/>
-          </a:effectRef>
-          <a:fontRef idx="minor">
-            <a:schemeClr val="lt1"/>
-          </a:fontRef>
-        </p:style>
-        <p:txBody>
-          <a:bodyPr rtlCol="0" anchor="ctr" wrap="square" lIns="73152" rIns="73152"/>
-          <a:lstStyle/>
-          <a:p>
-            <a:pPr algn="ctr"/>
-            <a:r>
-              <a:rPr sz="1400" b="0">
-                <a:solidFill>
-                  <a:srgbClr val="DEE2E6"/>
-                </a:solidFill>
-              </a:rPr>
-              <a:t/>
-            </a:r>
-          </a:p>
-        </p:txBody>
-      </p:sp>
-      <p:sp>
-        <p:nvSpPr>
-          <p:cNvPr id="312" name="Rectangle 311"/>
-          <p:cNvSpPr/>
-          <p:nvPr/>
-        </p:nvSpPr>
-        <p:spPr>
-          <a:xfrm>
-            <a:off x="6236208" y="2377440"/>
-            <a:ext cx="438912" cy="365760"/>
-          </a:xfrm>
-          <a:prstGeom prst="rect">
-            <a:avLst/>
-          </a:prstGeom>
-          <a:solidFill>
-            <a:srgbClr val="2E3338"/>
-          </a:solidFill>
-          <a:ln>
-            <a:noFill/>
-          </a:ln>
-          <a:effectLst/>
-        </p:spPr>
-        <p:style>
-          <a:lnRef idx="1">
-            <a:schemeClr val="accent1"/>
-          </a:lnRef>
-          <a:fillRef idx="3">
-            <a:schemeClr val="accent1"/>
-          </a:fillRef>
-          <a:effectRef idx="2">
-            <a:schemeClr val="accent1"/>
-          </a:effectRef>
-          <a:fontRef idx="minor">
-            <a:schemeClr val="lt1"/>
-          </a:fontRef>
-        </p:style>
-        <p:txBody>
-          <a:bodyPr rtlCol="0" anchor="ctr" wrap="square" lIns="73152" rIns="73152"/>
-          <a:lstStyle/>
-          <a:p>
-            <a:pPr algn="ctr"/>
-            <a:r>
-              <a:rPr sz="1400" b="0">
-                <a:solidFill>
-                  <a:srgbClr val="DEE2E6"/>
-                </a:solidFill>
-              </a:rPr>
-              <a:t/>
-            </a:r>
-          </a:p>
-        </p:txBody>
-      </p:sp>
-      <p:sp>
-        <p:nvSpPr>
-          <p:cNvPr id="313" name="Rectangle 312"/>
-          <p:cNvSpPr/>
-          <p:nvPr/>
-        </p:nvSpPr>
-        <p:spPr>
-          <a:xfrm>
-            <a:off x="6711696" y="2377440"/>
-            <a:ext cx="438912" cy="365760"/>
-          </a:xfrm>
-          <a:prstGeom prst="rect">
-            <a:avLst/>
-          </a:prstGeom>
-          <a:solidFill>
-            <a:srgbClr val="2E3338"/>
-          </a:solidFill>
-          <a:ln>
-            <a:noFill/>
-          </a:ln>
-          <a:effectLst/>
-        </p:spPr>
-        <p:style>
-          <a:lnRef idx="1">
-            <a:schemeClr val="accent1"/>
-          </a:lnRef>
-          <a:fillRef idx="3">
-            <a:schemeClr val="accent1"/>
-          </a:fillRef>
-          <a:effectRef idx="2">
-            <a:schemeClr val="accent1"/>
-          </a:effectRef>
-          <a:fontRef idx="minor">
-            <a:schemeClr val="lt1"/>
-          </a:fontRef>
-        </p:style>
-        <p:txBody>
-          <a:bodyPr rtlCol="0" anchor="ctr" wrap="square" lIns="73152" rIns="73152"/>
-          <a:lstStyle/>
-          <a:p>
-            <a:pPr algn="ctr"/>
-            <a:r>
-              <a:rPr sz="1400" b="0">
-                <a:solidFill>
-                  <a:srgbClr val="DEE2E6"/>
-                </a:solidFill>
-              </a:rPr>
-              <a:t/>
-            </a:r>
-          </a:p>
-        </p:txBody>
-      </p:sp>
-      <p:sp>
-        <p:nvSpPr>
-          <p:cNvPr id="314" name="Rectangle 313"/>
-          <p:cNvSpPr/>
-          <p:nvPr/>
-        </p:nvSpPr>
-        <p:spPr>
-          <a:xfrm>
-            <a:off x="7187183" y="2377440"/>
-            <a:ext cx="438912" cy="365760"/>
-          </a:xfrm>
-          <a:prstGeom prst="rect">
-            <a:avLst/>
-          </a:prstGeom>
-          <a:solidFill>
-            <a:srgbClr val="2E3338"/>
-          </a:solidFill>
-          <a:ln>
-            <a:noFill/>
-          </a:ln>
-          <a:effectLst/>
-        </p:spPr>
-        <p:style>
-          <a:lnRef idx="1">
-            <a:schemeClr val="accent1"/>
-          </a:lnRef>
-          <a:fillRef idx="3">
-            <a:schemeClr val="accent1"/>
-          </a:fillRef>
-          <a:effectRef idx="2">
-            <a:schemeClr val="accent1"/>
-          </a:effectRef>
-          <a:fontRef idx="minor">
-            <a:schemeClr val="lt1"/>
-          </a:fontRef>
-        </p:style>
-        <p:txBody>
-          <a:bodyPr rtlCol="0" anchor="ctr" wrap="square" lIns="73152" rIns="73152"/>
-          <a:lstStyle/>
-          <a:p>
-            <a:pPr algn="ctr"/>
-            <a:r>
-              <a:rPr sz="1400" b="0">
-                <a:solidFill>
-                  <a:srgbClr val="DEE2E6"/>
-                </a:solidFill>
-              </a:rPr>
-              <a:t/>
-            </a:r>
-          </a:p>
-        </p:txBody>
-      </p:sp>
-      <p:sp>
-        <p:nvSpPr>
-          <p:cNvPr id="315" name="Rectangle 314"/>
-          <p:cNvSpPr/>
-          <p:nvPr/>
-        </p:nvSpPr>
-        <p:spPr>
-          <a:xfrm>
-            <a:off x="7662671" y="2377440"/>
-            <a:ext cx="438912" cy="365760"/>
-          </a:xfrm>
-          <a:prstGeom prst="rect">
-            <a:avLst/>
-          </a:prstGeom>
-          <a:solidFill>
-            <a:srgbClr val="2E3338"/>
-          </a:solidFill>
-          <a:ln>
-            <a:noFill/>
-          </a:ln>
-          <a:effectLst/>
-        </p:spPr>
-        <p:style>
-          <a:lnRef idx="1">
-            <a:schemeClr val="accent1"/>
-          </a:lnRef>
-          <a:fillRef idx="3">
-            <a:schemeClr val="accent1"/>
-          </a:fillRef>
-          <a:effectRef idx="2">
-            <a:schemeClr val="accent1"/>
-          </a:effectRef>
-          <a:fontRef idx="minor">
-            <a:schemeClr val="lt1"/>
-          </a:fontRef>
-        </p:style>
-        <p:txBody>
-          <a:bodyPr rtlCol="0" anchor="ctr" wrap="square" lIns="73152" rIns="73152"/>
-          <a:lstStyle/>
-          <a:p>
-            <a:pPr algn="ctr"/>
-            <a:r>
-              <a:rPr sz="1400" b="0">
-                <a:solidFill>
-                  <a:srgbClr val="DEE2E6"/>
-                </a:solidFill>
-              </a:rPr>
-              <a:t/>
-            </a:r>
-          </a:p>
-        </p:txBody>
-      </p:sp>
-      <p:sp>
-        <p:nvSpPr>
-          <p:cNvPr id="316" name="Rectangle 315"/>
-          <p:cNvSpPr/>
-          <p:nvPr/>
-        </p:nvSpPr>
-        <p:spPr>
-          <a:xfrm>
-            <a:off x="8138160" y="2377440"/>
-            <a:ext cx="438912" cy="365760"/>
-          </a:xfrm>
-          <a:prstGeom prst="rect">
-            <a:avLst/>
-          </a:prstGeom>
-          <a:solidFill>
-            <a:srgbClr val="2E3338"/>
-          </a:solidFill>
-          <a:ln>
-            <a:noFill/>
-          </a:ln>
-          <a:effectLst/>
-        </p:spPr>
-        <p:style>
-          <a:lnRef idx="1">
-            <a:schemeClr val="accent1"/>
-          </a:lnRef>
-          <a:fillRef idx="3">
-            <a:schemeClr val="accent1"/>
-          </a:fillRef>
-          <a:effectRef idx="2">
-            <a:schemeClr val="accent1"/>
-          </a:effectRef>
-          <a:fontRef idx="minor">
-            <a:schemeClr val="lt1"/>
-          </a:fontRef>
-        </p:style>
-        <p:txBody>
-          <a:bodyPr rtlCol="0" anchor="ctr" wrap="square" lIns="73152" rIns="73152"/>
-          <a:lstStyle/>
-          <a:p>
-            <a:pPr algn="ctr"/>
-            <a:r>
-              <a:rPr sz="1400" b="0">
-                <a:solidFill>
-                  <a:srgbClr val="DEE2E6"/>
-                </a:solidFill>
-              </a:rPr>
-              <a:t/>
-            </a:r>
-          </a:p>
-        </p:txBody>
-      </p:sp>
-      <p:sp>
-        <p:nvSpPr>
-          <p:cNvPr id="317" name="TextBox 316"/>
-          <p:cNvSpPr txBox="1"/>
-          <p:nvPr/>
-        </p:nvSpPr>
-        <p:spPr>
-          <a:xfrm>
-            <a:off x="4846320" y="2926080"/>
-            <a:ext cx="914400" cy="365760"/>
-          </a:xfrm>
-          <a:prstGeom prst="rect">
-            <a:avLst/>
-          </a:prstGeom>
-          <a:noFill/>
-        </p:spPr>
-        <p:txBody>
-          <a:bodyPr wrap="square">
-            <a:spAutoFit/>
-          </a:bodyPr>
-          <a:lstStyle/>
-          <a:p>
-            <a:pPr algn="l"/>
-            <a:r>
-              <a:rPr sz="1100" b="0" i="0">
-                <a:solidFill>
-                  <a:srgbClr val="9AA3AB"/>
-                </a:solidFill>
-              </a:rPr>
-              <a:t>Speed</a:t>
-            </a:r>
-          </a:p>
-        </p:txBody>
-      </p:sp>
-      <p:sp>
-        <p:nvSpPr>
-          <p:cNvPr id="318" name="Rectangle 317"/>
-          <p:cNvSpPr/>
-          <p:nvPr/>
-        </p:nvSpPr>
-        <p:spPr>
-          <a:xfrm>
-            <a:off x="5760720" y="2926080"/>
-            <a:ext cx="438912" cy="365760"/>
-          </a:xfrm>
-          <a:prstGeom prst="rect">
-            <a:avLst/>
-          </a:prstGeom>
-          <a:solidFill>
-            <a:srgbClr val="2E3338"/>
-          </a:solidFill>
-          <a:ln>
-            <a:noFill/>
-          </a:ln>
-          <a:effectLst/>
-        </p:spPr>
-        <p:style>
-          <a:lnRef idx="1">
-            <a:schemeClr val="accent1"/>
-          </a:lnRef>
-          <a:fillRef idx="3">
-            <a:schemeClr val="accent1"/>
-          </a:fillRef>
-          <a:effectRef idx="2">
-            <a:schemeClr val="accent1"/>
-          </a:effectRef>
-          <a:fontRef idx="minor">
-            <a:schemeClr val="lt1"/>
-          </a:fontRef>
-        </p:style>
-        <p:txBody>
-          <a:bodyPr rtlCol="0" anchor="ctr" wrap="square" lIns="73152" rIns="73152"/>
-          <a:lstStyle/>
-          <a:p>
-            <a:pPr algn="ctr"/>
-            <a:r>
-              <a:rPr sz="1400" b="0">
-                <a:solidFill>
-                  <a:srgbClr val="DEE2E6"/>
-                </a:solidFill>
-              </a:rPr>
-              <a:t/>
-            </a:r>
-          </a:p>
-        </p:txBody>
-      </p:sp>
-      <p:sp>
-        <p:nvSpPr>
-          <p:cNvPr id="319" name="Rectangle 318"/>
-          <p:cNvSpPr/>
-          <p:nvPr/>
-        </p:nvSpPr>
-        <p:spPr>
-          <a:xfrm>
-            <a:off x="6236208" y="2926080"/>
-            <a:ext cx="438912" cy="365760"/>
-          </a:xfrm>
-          <a:prstGeom prst="rect">
-            <a:avLst/>
-          </a:prstGeom>
-          <a:solidFill>
-            <a:srgbClr val="2E3338"/>
-          </a:solidFill>
-          <a:ln>
-            <a:noFill/>
-          </a:ln>
-          <a:effectLst/>
-        </p:spPr>
-        <p:style>
-          <a:lnRef idx="1">
-            <a:schemeClr val="accent1"/>
-          </a:lnRef>
-          <a:fillRef idx="3">
-            <a:schemeClr val="accent1"/>
-          </a:fillRef>
-          <a:effectRef idx="2">
-            <a:schemeClr val="accent1"/>
-          </a:effectRef>
-          <a:fontRef idx="minor">
-            <a:schemeClr val="lt1"/>
-          </a:fontRef>
-        </p:style>
-        <p:txBody>
-          <a:bodyPr rtlCol="0" anchor="ctr" wrap="square" lIns="73152" rIns="73152"/>
-          <a:lstStyle/>
-          <a:p>
-            <a:pPr algn="ctr"/>
-            <a:r>
-              <a:rPr sz="1400" b="0">
-                <a:solidFill>
-                  <a:srgbClr val="DEE2E6"/>
-                </a:solidFill>
-              </a:rPr>
-              <a:t/>
-            </a:r>
-          </a:p>
-        </p:txBody>
-      </p:sp>
-      <p:sp>
-        <p:nvSpPr>
-          <p:cNvPr id="320" name="Rectangle 319"/>
-          <p:cNvSpPr/>
-          <p:nvPr/>
-        </p:nvSpPr>
-        <p:spPr>
-          <a:xfrm>
-            <a:off x="6711696" y="2926080"/>
-            <a:ext cx="438912" cy="365760"/>
-          </a:xfrm>
-          <a:prstGeom prst="rect">
-            <a:avLst/>
-          </a:prstGeom>
-          <a:solidFill>
-            <a:srgbClr val="2E3338"/>
-          </a:solidFill>
-          <a:ln>
-            <a:noFill/>
-          </a:ln>
-          <a:effectLst/>
-        </p:spPr>
-        <p:style>
-          <a:lnRef idx="1">
-            <a:schemeClr val="accent1"/>
-          </a:lnRef>
-          <a:fillRef idx="3">
-            <a:schemeClr val="accent1"/>
-          </a:fillRef>
-          <a:effectRef idx="2">
-            <a:schemeClr val="accent1"/>
-          </a:effectRef>
-          <a:fontRef idx="minor">
-            <a:schemeClr val="lt1"/>
-          </a:fontRef>
-        </p:style>
-        <p:txBody>
-          <a:bodyPr rtlCol="0" anchor="ctr" wrap="square" lIns="73152" rIns="73152"/>
-          <a:lstStyle/>
-          <a:p>
-            <a:pPr algn="ctr"/>
-            <a:r>
-              <a:rPr sz="1400" b="0">
-                <a:solidFill>
-                  <a:srgbClr val="DEE2E6"/>
-                </a:solidFill>
-              </a:rPr>
-              <a:t/>
-            </a:r>
-          </a:p>
-        </p:txBody>
-      </p:sp>
-      <p:sp>
-        <p:nvSpPr>
-          <p:cNvPr id="321" name="Rectangle 320"/>
-          <p:cNvSpPr/>
-          <p:nvPr/>
-        </p:nvSpPr>
-        <p:spPr>
-          <a:xfrm>
-            <a:off x="7187183" y="2926080"/>
-            <a:ext cx="438912" cy="365760"/>
-          </a:xfrm>
-          <a:prstGeom prst="rect">
-            <a:avLst/>
-          </a:prstGeom>
-          <a:solidFill>
-            <a:srgbClr val="2E3338"/>
-          </a:solidFill>
-          <a:ln>
-            <a:noFill/>
-          </a:ln>
-          <a:effectLst/>
-        </p:spPr>
-        <p:style>
-          <a:lnRef idx="1">
-            <a:schemeClr val="accent1"/>
-          </a:lnRef>
-          <a:fillRef idx="3">
-            <a:schemeClr val="accent1"/>
-          </a:fillRef>
-          <a:effectRef idx="2">
-            <a:schemeClr val="accent1"/>
-          </a:effectRef>
-          <a:fontRef idx="minor">
-            <a:schemeClr val="lt1"/>
-          </a:fontRef>
-        </p:style>
-        <p:txBody>
-          <a:bodyPr rtlCol="0" anchor="ctr" wrap="square" lIns="73152" rIns="73152"/>
-          <a:lstStyle/>
-          <a:p>
-            <a:pPr algn="ctr"/>
-            <a:r>
-              <a:rPr sz="1400" b="0">
-                <a:solidFill>
-                  <a:srgbClr val="DEE2E6"/>
-                </a:solidFill>
-              </a:rPr>
-              <a:t/>
-            </a:r>
-          </a:p>
-        </p:txBody>
-      </p:sp>
-      <p:sp>
-        <p:nvSpPr>
-          <p:cNvPr id="322" name="Rectangle 321"/>
-          <p:cNvSpPr/>
-          <p:nvPr/>
-        </p:nvSpPr>
-        <p:spPr>
-          <a:xfrm>
-            <a:off x="7662671" y="2926080"/>
-            <a:ext cx="438912" cy="365760"/>
-          </a:xfrm>
-          <a:prstGeom prst="rect">
-            <a:avLst/>
-          </a:prstGeom>
-          <a:solidFill>
-            <a:srgbClr val="2E3338"/>
-          </a:solidFill>
-          <a:ln>
-            <a:noFill/>
-          </a:ln>
-          <a:effectLst/>
-        </p:spPr>
-        <p:style>
-          <a:lnRef idx="1">
-            <a:schemeClr val="accent1"/>
-          </a:lnRef>
-          <a:fillRef idx="3">
-            <a:schemeClr val="accent1"/>
-          </a:fillRef>
-          <a:effectRef idx="2">
-            <a:schemeClr val="accent1"/>
-          </a:effectRef>
-          <a:fontRef idx="minor">
-            <a:schemeClr val="lt1"/>
-          </a:fontRef>
-        </p:style>
-        <p:txBody>
-          <a:bodyPr rtlCol="0" anchor="ctr" wrap="square" lIns="73152" rIns="73152"/>
-          <a:lstStyle/>
-          <a:p>
-            <a:pPr algn="ctr"/>
-            <a:r>
-              <a:rPr sz="1400" b="0">
-                <a:solidFill>
-                  <a:srgbClr val="DEE2E6"/>
-                </a:solidFill>
-              </a:rPr>
-              <a:t/>
-            </a:r>
-          </a:p>
-        </p:txBody>
-      </p:sp>
-      <p:sp>
-        <p:nvSpPr>
-          <p:cNvPr id="323" name="Rectangle 322"/>
-          <p:cNvSpPr/>
-          <p:nvPr/>
-        </p:nvSpPr>
-        <p:spPr>
-          <a:xfrm>
-            <a:off x="8138160" y="2926080"/>
-            <a:ext cx="438912" cy="365760"/>
-          </a:xfrm>
-          <a:prstGeom prst="rect">
-            <a:avLst/>
-          </a:prstGeom>
-          <a:solidFill>
-            <a:srgbClr val="2E3338"/>
-          </a:solidFill>
-          <a:ln>
-            <a:noFill/>
-          </a:ln>
-          <a:effectLst/>
-        </p:spPr>
-        <p:style>
-          <a:lnRef idx="1">
-            <a:schemeClr val="accent1"/>
-          </a:lnRef>
-          <a:fillRef idx="3">
-            <a:schemeClr val="accent1"/>
-          </a:fillRef>
-          <a:effectRef idx="2">
-            <a:schemeClr val="accent1"/>
-          </a:effectRef>
-          <a:fontRef idx="minor">
-            <a:schemeClr val="lt1"/>
-          </a:fontRef>
-        </p:style>
-        <p:txBody>
-          <a:bodyPr rtlCol="0" anchor="ctr" wrap="square" lIns="73152" rIns="73152"/>
-          <a:lstStyle/>
-          <a:p>
-            <a:pPr algn="ctr"/>
-            <a:r>
-              <a:rPr sz="1400" b="0">
-                <a:solidFill>
-                  <a:srgbClr val="DEE2E6"/>
-                </a:solidFill>
-              </a:rPr>
-              <a:t/>
-            </a:r>
-          </a:p>
-        </p:txBody>
-      </p:sp>
-      <p:sp>
-        <p:nvSpPr>
-          <p:cNvPr id="324" name="TextBox 323"/>
-          <p:cNvSpPr txBox="1"/>
-          <p:nvPr/>
-        </p:nvSpPr>
-        <p:spPr>
-          <a:xfrm>
-            <a:off x="4846320" y="3566160"/>
-            <a:ext cx="3840480" cy="457200"/>
-          </a:xfrm>
-          <a:prstGeom prst="rect">
-            <a:avLst/>
-          </a:prstGeom>
-          <a:noFill/>
-        </p:spPr>
-        <p:txBody>
-          <a:bodyPr wrap="square">
-            <a:spAutoFit/>
-          </a:bodyPr>
-          <a:lstStyle/>
-          <a:p>
-            <a:pPr algn="l"/>
-            <a:r>
-              <a:rPr sz="1200" b="0" i="0">
-                <a:solidFill>
-                  <a:srgbClr val="9AA3AB"/>
-                </a:solidFill>
-              </a:rPr>
-              <a:t>The CPU reads 64 bytes at a time, so one read brings several enemies.</a:t>
-            </a:r>
-          </a:p>
-        </p:txBody>
-      </p:sp>
+      </p:pic>
     </p:spTree>
   </p:cSld>
   <p:clrMapOvr>
@@ -18570,6 +17332,228 @@
 </p:sld>
 </file>
 
+<file path=ppt/slides/slide33.xml><?xml version="1.0" encoding="utf-8"?>
+<p:sld xmlns:a="http://schemas.openxmlformats.org/drawingml/2006/main" xmlns:p="http://schemas.openxmlformats.org/presentationml/2006/main" xmlns:r="http://schemas.openxmlformats.org/officeDocument/2006/relationships">
+  <p:cSld>
+    <p:spTree>
+      <p:nvGrpSpPr>
+        <p:cNvPr id="1" name=""/>
+        <p:cNvGrpSpPr/>
+        <p:nvPr/>
+      </p:nvGrpSpPr>
+      <p:grpSpPr/>
+      <p:sp>
+        <p:nvSpPr>
+          <p:cNvPr id="2" name="Title 1"/>
+          <p:cNvSpPr>
+            <a:spLocks noGrp="1"/>
+          </p:cNvSpPr>
+          <p:nvPr>
+            <p:ph type="title"/>
+          </p:nvPr>
+        </p:nvSpPr>
+        <p:spPr/>
+        <p:txBody>
+          <a:bodyPr/>
+          <a:lstStyle/>
+          <a:p>
+            <a:pPr indent="0" lvl="0" marL="0" rtl="0" algn="l">
+              <a:spcBef>
+                <a:spcPts val="0"/>
+              </a:spcBef>
+              <a:spcAft>
+                <a:spcPts val="0"/>
+              </a:spcAft>
+              <a:buNone/>
+            </a:pPr>
+            <a:r>
+              <a:rPr lang="en"/>
+              <a:t>A Counting Sort</a:t>
+            </a:r>
+            <a:endParaRPr/>
+          </a:p>
+        </p:txBody>
+      </p:sp>
+      <p:pic>
+        <p:nvPicPr>
+          <p:cNvPr id="3" name="Picture 2" descr="counting-sort.png"/>
+          <p:cNvPicPr>
+            <a:picLocks noChangeAspect="1"/>
+          </p:cNvPicPr>
+          <p:nvPr/>
+        </p:nvPicPr>
+        <p:blipFill>
+          <a:blip r:embed="rId2"/>
+          <a:stretch>
+            <a:fillRect/>
+          </a:stretch>
+        </p:blipFill>
+        <p:spPr>
+          <a:xfrm>
+            <a:off x="320039" y="1051560"/>
+            <a:ext cx="8503920" cy="3779520"/>
+          </a:xfrm>
+          <a:prstGeom prst="rect">
+            <a:avLst/>
+          </a:prstGeom>
+        </p:spPr>
+      </p:pic>
+    </p:spTree>
+  </p:cSld>
+  <p:clrMapOvr>
+    <a:masterClrMapping/>
+  </p:clrMapOvr>
+</p:sld>
+</file>
+
+<file path=ppt/slides/slide34.xml><?xml version="1.0" encoding="utf-8"?>
+<p:sld xmlns:a="http://schemas.openxmlformats.org/drawingml/2006/main" xmlns:p="http://schemas.openxmlformats.org/presentationml/2006/main" xmlns:r="http://schemas.openxmlformats.org/officeDocument/2006/relationships">
+  <p:cSld>
+    <p:spTree>
+      <p:nvGrpSpPr>
+        <p:cNvPr id="1" name=""/>
+        <p:cNvGrpSpPr/>
+        <p:nvPr/>
+      </p:nvGrpSpPr>
+      <p:grpSpPr/>
+      <p:sp>
+        <p:nvSpPr>
+          <p:cNvPr id="2" name="Title 1"/>
+          <p:cNvSpPr>
+            <a:spLocks noGrp="1"/>
+          </p:cNvSpPr>
+          <p:nvPr>
+            <p:ph type="title"/>
+          </p:nvPr>
+        </p:nvSpPr>
+        <p:spPr/>
+        <p:txBody>
+          <a:bodyPr/>
+          <a:lstStyle/>
+          <a:p>
+            <a:pPr indent="0" lvl="0" marL="0" rtl="0" algn="l">
+              <a:spcBef>
+                <a:spcPts val="0"/>
+              </a:spcBef>
+              <a:spcAft>
+                <a:spcPts val="0"/>
+              </a:spcAft>
+              <a:buNone/>
+            </a:pPr>
+            <a:r>
+              <a:rPr lang="en"/>
+              <a:t>A Uniform Grid</a:t>
+            </a:r>
+            <a:endParaRPr/>
+          </a:p>
+        </p:txBody>
+      </p:sp>
+      <p:pic>
+        <p:nvPicPr>
+          <p:cNvPr id="3" name="Picture 2" descr="grid.png"/>
+          <p:cNvPicPr>
+            <a:picLocks noChangeAspect="1"/>
+          </p:cNvPicPr>
+          <p:nvPr/>
+        </p:nvPicPr>
+        <p:blipFill>
+          <a:blip r:embed="rId2"/>
+          <a:stretch>
+            <a:fillRect/>
+          </a:stretch>
+        </p:blipFill>
+        <p:spPr>
+          <a:xfrm>
+            <a:off x="480713" y="1051560"/>
+            <a:ext cx="8182573" cy="3977640"/>
+          </a:xfrm>
+          <a:prstGeom prst="rect">
+            <a:avLst/>
+          </a:prstGeom>
+        </p:spPr>
+      </p:pic>
+    </p:spTree>
+  </p:cSld>
+  <p:clrMapOvr>
+    <a:masterClrMapping/>
+  </p:clrMapOvr>
+</p:sld>
+</file>
+
+<file path=ppt/slides/slide35.xml><?xml version="1.0" encoding="utf-8"?>
+<p:sld xmlns:a="http://schemas.openxmlformats.org/drawingml/2006/main" xmlns:p="http://schemas.openxmlformats.org/presentationml/2006/main" xmlns:r="http://schemas.openxmlformats.org/officeDocument/2006/relationships">
+  <p:cSld>
+    <p:spTree>
+      <p:nvGrpSpPr>
+        <p:cNvPr id="1" name=""/>
+        <p:cNvGrpSpPr/>
+        <p:nvPr/>
+      </p:nvGrpSpPr>
+      <p:grpSpPr/>
+      <p:sp>
+        <p:nvSpPr>
+          <p:cNvPr id="2" name="Title 1"/>
+          <p:cNvSpPr>
+            <a:spLocks noGrp="1"/>
+          </p:cNvSpPr>
+          <p:nvPr>
+            <p:ph type="title"/>
+          </p:nvPr>
+        </p:nvSpPr>
+        <p:spPr/>
+        <p:txBody>
+          <a:bodyPr/>
+          <a:lstStyle/>
+          <a:p>
+            <a:pPr indent="0" lvl="0" marL="0" rtl="0" algn="l">
+              <a:spcBef>
+                <a:spcPts val="0"/>
+              </a:spcBef>
+              <a:spcAft>
+                <a:spcPts val="0"/>
+              </a:spcAft>
+              <a:buNone/>
+            </a:pPr>
+            <a:r>
+              <a:rPr lang="en"/>
+              <a:t>Every Pair</a:t>
+            </a:r>
+            <a:endParaRPr/>
+          </a:p>
+        </p:txBody>
+      </p:sp>
+      <p:pic>
+        <p:nvPicPr>
+          <p:cNvPr id="3" name="Picture 2" descr="pairs.png"/>
+          <p:cNvPicPr>
+            <a:picLocks noChangeAspect="1"/>
+          </p:cNvPicPr>
+          <p:nvPr/>
+        </p:nvPicPr>
+        <p:blipFill>
+          <a:blip r:embed="rId2"/>
+          <a:stretch>
+            <a:fillRect/>
+          </a:stretch>
+        </p:blipFill>
+        <p:spPr>
+          <a:xfrm>
+            <a:off x="320039" y="1051560"/>
+            <a:ext cx="8503920" cy="3779520"/>
+          </a:xfrm>
+          <a:prstGeom prst="rect">
+            <a:avLst/>
+          </a:prstGeom>
+        </p:spPr>
+      </p:pic>
+    </p:spTree>
+  </p:cSld>
+  <p:clrMapOvr>
+    <a:masterClrMapping/>
+  </p:clrMapOvr>
+</p:sld>
+</file>
+
 <file path=ppt/slides/slide4.xml><?xml version="1.0" encoding="utf-8"?>
 <p:sld xmlns:a="http://schemas.openxmlformats.org/drawingml/2006/main" xmlns:r="http://schemas.openxmlformats.org/officeDocument/2006/relationships" xmlns:mc="http://schemas.openxmlformats.org/markup-compatibility/2006" xmlns:mv="urn:schemas-microsoft-com:mac:vml" xmlns:p="http://schemas.openxmlformats.org/presentationml/2006/main" xmlns:c="http://schemas.openxmlformats.org/drawingml/2006/chart" xmlns:dgm="http://schemas.openxmlformats.org/drawingml/2006/diagram" xmlns:o="urn:schemas-microsoft-com:office:office" xmlns:v="urn:schemas-microsoft-com:vml" xmlns:pvml="urn:schemas-microsoft-com:office:powerpoint" xmlns:com="http://schemas.openxmlformats.org/drawingml/2006/compatibility" xmlns:p14="http://schemas.microsoft.com/office/powerpoint/2010/main" xmlns:p15="http://schemas.microsoft.com/office/powerpoint/2012/main" xmlns:ahyp="http://schemas.microsoft.com/office/drawing/2018/hyperlinkcolor">
   <p:cSld>

--- a/slides/12 Vampire Survivors.pptx
+++ b/slides/12 Vampire Survivors.pptx
@@ -6788,6 +6788,622 @@
       <p:grpSpPr/>
       <p:sp>
         <p:nvSpPr>
+          <p:cNvPr id="140" name="Google Shape;140;p23"/>
+          <p:cNvSpPr txBox="1"/>
+          <p:nvPr>
+            <p:ph type="title"/>
+          </p:nvPr>
+        </p:nvSpPr>
+        <p:spPr>
+          <a:xfrm>
+            <a:off x="311700" y="195615"/>
+            <a:ext cx="8520600" cy="572700"/>
+          </a:xfrm>
+          <a:prstGeom prst="rect">
+            <a:avLst/>
+          </a:prstGeom>
+        </p:spPr>
+        <p:txBody>
+          <a:bodyPr anchorCtr="0" anchor="t" bIns="91425" lIns="91425" spcFirstLastPara="1" rIns="91425" wrap="square" tIns="91425">
+            <a:normAutofit fontScale="90000"/>
+          </a:bodyPr>
+          <a:lstStyle/>
+          <a:p>
+            <a:pPr indent="0" lvl="0" marL="0" rtl="0" algn="l">
+              <a:spcBef>
+                <a:spcPts val="0"/>
+              </a:spcBef>
+              <a:spcAft>
+                <a:spcPts val="0"/>
+              </a:spcAft>
+              <a:buNone/>
+            </a:pPr>
+            <a:r>
+              <a:rPr lang="en"/>
+              <a:t>Profiling</a:t>
+            </a:r>
+            <a:endParaRPr/>
+          </a:p>
+        </p:txBody>
+      </p:sp>
+      <p:sp>
+        <p:nvSpPr>
+          <p:cNvPr id="293" name="Google Shape;293;p45"/>
+          <p:cNvSpPr txBox="1"/>
+          <p:nvPr>
+            <p:ph type="title"/>
+          </p:nvPr>
+        </p:nvSpPr>
+        <p:spPr>
+          <a:xfrm>
+            <a:off x="311700" y="1152475"/>
+            <a:ext cx="3700000" cy="3500000"/>
+          </a:xfrm>
+          <a:prstGeom prst="rect">
+            <a:avLst/>
+          </a:prstGeom>
+        </p:spPr>
+        <p:txBody>
+          <a:bodyPr anchorCtr="0" anchor="t" bIns="91425" lIns="91425" spcFirstLastPara="1" rIns="91425" wrap="square" tIns="91425">
+            <a:normAutofit fontScale="90000"/>
+          </a:bodyPr>
+          <a:lstStyle/>
+          <a:p>
+            <a:pPr indent="-330200" lvl="0" marL="457200" rtl="0" algn="l">
+              <a:buClr>
+                <a:srgbClr val="DEE2E6"/>
+              </a:buClr>
+              <a:spcBef>
+                <a:spcPts val="0"/>
+              </a:spcBef>
+              <a:spcAft>
+                <a:spcPts val="0"/>
+              </a:spcAft>
+              <a:buSzPts val="1600"/>
+              <a:buChar char="●"/>
+            </a:pPr>
+            <a:r>
+              <a:rPr lang="en" sz="1600">
+                <a:solidFill>
+                  <a:srgbClr val="DEE2E6"/>
+                </a:solidFill>
+              </a:rPr>
+              <a:t>Measure where the time goes</a:t>
+            </a:r>
+            <a:endParaRPr/>
+          </a:p>
+          <a:p>
+            <a:pPr indent="-317500" lvl="1" marL="914400" rtl="0" algn="l">
+              <a:buClr>
+                <a:srgbClr val="6C757D"/>
+              </a:buClr>
+              <a:spcBef>
+                <a:spcPts val="0"/>
+              </a:spcBef>
+              <a:spcAft>
+                <a:spcPts val="0"/>
+              </a:spcAft>
+              <a:buSzPts val="1400"/>
+              <a:buChar char="○"/>
+            </a:pPr>
+            <a:r>
+              <a:rPr lang="en" sz="1400">
+                <a:solidFill>
+                  <a:srgbClr val="6C757D"/>
+                </a:solidFill>
+              </a:rPr>
+              <a:t>Before changing anything</a:t>
+            </a:r>
+            <a:endParaRPr/>
+          </a:p>
+          <a:p>
+            <a:pPr indent="-330200" lvl="0" marL="457200" rtl="0" algn="l">
+              <a:buClr>
+                <a:srgbClr val="DEE2E6"/>
+              </a:buClr>
+              <a:spcBef>
+                <a:spcPts val="0"/>
+              </a:spcBef>
+              <a:spcAft>
+                <a:spcPts val="0"/>
+              </a:spcAft>
+              <a:buSzPts val="1600"/>
+              <a:buChar char="●"/>
+            </a:pPr>
+            <a:r>
+              <a:rPr lang="en" sz="1600">
+                <a:solidFill>
+                  <a:srgbClr val="DEE2E6"/>
+                </a:solidFill>
+              </a:rPr>
+              <a:t>Time each part of a step</a:t>
+            </a:r>
+            <a:endParaRPr/>
+          </a:p>
+          <a:p>
+            <a:pPr indent="-317500" lvl="1" marL="914400" rtl="0" algn="l">
+              <a:buClr>
+                <a:srgbClr val="6C757D"/>
+              </a:buClr>
+              <a:spcBef>
+                <a:spcPts val="0"/>
+              </a:spcBef>
+              <a:spcAft>
+                <a:spcPts val="0"/>
+              </a:spcAft>
+              <a:buSzPts val="1400"/>
+              <a:buChar char="○"/>
+            </a:pPr>
+            <a:r>
+              <a:rPr lang="en" sz="1400">
+                <a:solidFill>
+                  <a:srgbClr val="6C757D"/>
+                </a:solidFill>
+              </a:rPr>
+              <a:t>A struct scope: measuring allocates nothing</a:t>
+            </a:r>
+            <a:endParaRPr/>
+          </a:p>
+          <a:p>
+            <a:pPr indent="-330200" lvl="0" marL="457200" rtl="0" algn="l">
+              <a:buClr>
+                <a:srgbClr val="DEE2E6"/>
+              </a:buClr>
+              <a:spcBef>
+                <a:spcPts val="0"/>
+              </a:spcBef>
+              <a:spcAft>
+                <a:spcPts val="0"/>
+              </a:spcAft>
+              <a:buSzPts val="1600"/>
+              <a:buChar char="●"/>
+            </a:pPr>
+            <a:r>
+              <a:rPr lang="en" sz="1600">
+                <a:solidFill>
+                  <a:srgbClr val="DEE2E6"/>
+                </a:solidFill>
+              </a:rPr>
+              <a:t>And count allocations and GCs</a:t>
+            </a:r>
+            <a:endParaRPr/>
+          </a:p>
+          <a:p>
+            <a:pPr indent="-317500" lvl="1" marL="914400" rtl="0" algn="l">
+              <a:buClr>
+                <a:srgbClr val="6C757D"/>
+              </a:buClr>
+              <a:spcBef>
+                <a:spcPts val="0"/>
+              </a:spcBef>
+              <a:spcAft>
+                <a:spcPts val="0"/>
+              </a:spcAft>
+              <a:buSzPts val="1400"/>
+              <a:buChar char="○"/>
+            </a:pPr>
+            <a:r>
+              <a:rPr lang="en" sz="1400">
+                <a:solidFill>
+                  <a:srgbClr val="6C757D"/>
+                </a:solidFill>
+              </a:rPr>
+              <a:t>LINQ allocates every call</a:t>
+            </a:r>
+            <a:endParaRPr/>
+          </a:p>
+          <a:p>
+            <a:pPr indent="-330200" lvl="0" marL="457200" rtl="0" algn="l">
+              <a:buClr>
+                <a:srgbClr val="DEE2E6"/>
+              </a:buClr>
+              <a:spcBef>
+                <a:spcPts val="0"/>
+              </a:spcBef>
+              <a:spcAft>
+                <a:spcPts val="0"/>
+              </a:spcAft>
+              <a:buSzPts val="1600"/>
+              <a:buChar char="●"/>
+            </a:pPr>
+            <a:r>
+              <a:rPr lang="en" sz="1600">
+                <a:solidFill>
+                  <a:srgbClr val="DEE2E6"/>
+                </a:solidFill>
+              </a:rPr>
+              <a:t>Measure a Release build</a:t>
+            </a:r>
+            <a:endParaRPr/>
+          </a:p>
+        </p:txBody>
+      </p:sp>
+      <p:sp>
+        <p:nvSpPr>
+          <p:cNvPr id="141" name="Google Shape;141;p23"/>
+          <p:cNvSpPr txBox="1"/>
+          <p:nvPr>
+            <p:ph idx="2" type="body"/>
+          </p:nvPr>
+        </p:nvSpPr>
+        <p:spPr>
+          <a:xfrm>
+            <a:off x="4150000" y="1152475"/>
+            <a:ext cx="4750000" cy="3600000"/>
+          </a:xfrm>
+          <a:prstGeom prst="rect">
+            <a:avLst/>
+          </a:prstGeom>
+        </p:spPr>
+        <p:txBody>
+          <a:bodyPr anchorCtr="0" anchor="t" bIns="91425" lIns="91425" spcFirstLastPara="1" rIns="91425" wrap="square" tIns="91425">
+            <a:noAutofit/>
+          </a:bodyPr>
+          <a:lstStyle/>
+          <a:p>
+            <a:pPr indent="0" lvl="0" marL="0" rtl="0" algn="l">
+              <a:lnSpc>
+                <a:spcPct val="115000"/>
+              </a:lnSpc>
+              <a:spcBef>
+                <a:spcPts val="0"/>
+              </a:spcBef>
+              <a:spcAft>
+                <a:spcPts val="0"/>
+              </a:spcAft>
+              <a:buNone/>
+            </a:pPr>
+            <a:r>
+              <a:rPr lang="en" sz="1000">
+                <a:highlight>
+                  <a:schemeClr val="dk2"/>
+                </a:highlight>
+                <a:latin typeface="Consolas"/>
+                <a:ea typeface="Consolas"/>
+                <a:cs typeface="Consolas"/>
+                <a:sym typeface="Consolas"/>
+              </a:rPr>
+              <a:t>using (_profiler.Measure("Move"))</a:t>
+            </a:r>
+            <a:endParaRPr sz="1000">
+              <a:solidFill>
+                <a:srgbClr val="CCCCCC"/>
+              </a:solidFill>
+              <a:highlight>
+                <a:schemeClr val="dk2"/>
+              </a:highlight>
+              <a:latin typeface="Consolas"/>
+              <a:ea typeface="Consolas"/>
+              <a:cs typeface="Consolas"/>
+              <a:sym typeface="Consolas"/>
+            </a:endParaRPr>
+          </a:p>
+          <a:p>
+            <a:pPr indent="0" lvl="0" marL="0" rtl="0" algn="l">
+              <a:lnSpc>
+                <a:spcPct val="115000"/>
+              </a:lnSpc>
+              <a:spcBef>
+                <a:spcPts val="0"/>
+              </a:spcBef>
+              <a:spcAft>
+                <a:spcPts val="0"/>
+              </a:spcAft>
+              <a:buNone/>
+            </a:pPr>
+            <a:r>
+              <a:rPr lang="en" sz="1000">
+                <a:highlight>
+                  <a:schemeClr val="dk2"/>
+                </a:highlight>
+                <a:latin typeface="Consolas"/>
+                <a:ea typeface="Consolas"/>
+                <a:cs typeface="Consolas"/>
+                <a:sym typeface="Consolas"/>
+              </a:rPr>
+              <a:t>    _swarm.Move(dt, _player.Position);</a:t>
+            </a:r>
+            <a:endParaRPr sz="1000">
+              <a:solidFill>
+                <a:srgbClr val="CCCCCC"/>
+              </a:solidFill>
+              <a:highlight>
+                <a:schemeClr val="dk2"/>
+              </a:highlight>
+              <a:latin typeface="Consolas"/>
+              <a:ea typeface="Consolas"/>
+              <a:cs typeface="Consolas"/>
+              <a:sym typeface="Consolas"/>
+            </a:endParaRPr>
+          </a:p>
+          <a:p>
+            <a:pPr indent="0" lvl="0" marL="0" rtl="0" algn="l">
+              <a:lnSpc>
+                <a:spcPct val="115000"/>
+              </a:lnSpc>
+              <a:spcBef>
+                <a:spcPts val="0"/>
+              </a:spcBef>
+              <a:spcAft>
+                <a:spcPts val="0"/>
+              </a:spcAft>
+              <a:buNone/>
+            </a:pPr>
+            <a:r>
+              <a:rPr lang="en" sz="1000">
+                <a:highlight>
+                  <a:schemeClr val="dk2"/>
+                </a:highlight>
+                <a:latin typeface="Consolas"/>
+                <a:ea typeface="Consolas"/>
+                <a:cs typeface="Consolas"/>
+                <a:sym typeface="Consolas"/>
+              </a:rPr>
+              <a:t/>
+            </a:r>
+            <a:endParaRPr sz="1000">
+              <a:solidFill>
+                <a:srgbClr val="CCCCCC"/>
+              </a:solidFill>
+              <a:highlight>
+                <a:schemeClr val="dk2"/>
+              </a:highlight>
+              <a:latin typeface="Consolas"/>
+              <a:ea typeface="Consolas"/>
+              <a:cs typeface="Consolas"/>
+              <a:sym typeface="Consolas"/>
+            </a:endParaRPr>
+          </a:p>
+          <a:p>
+            <a:pPr indent="0" lvl="0" marL="0" rtl="0" algn="l">
+              <a:lnSpc>
+                <a:spcPct val="115000"/>
+              </a:lnSpc>
+              <a:spcBef>
+                <a:spcPts val="0"/>
+              </a:spcBef>
+              <a:spcAft>
+                <a:spcPts val="0"/>
+              </a:spcAft>
+              <a:buNone/>
+            </a:pPr>
+            <a:r>
+              <a:rPr lang="en" sz="1000">
+                <a:highlight>
+                  <a:schemeClr val="dk2"/>
+                </a:highlight>
+                <a:latin typeface="Consolas"/>
+                <a:ea typeface="Consolas"/>
+                <a:cs typeface="Consolas"/>
+                <a:sym typeface="Consolas"/>
+              </a:rPr>
+              <a:t>using (_profiler.Measure("Separate"))</a:t>
+            </a:r>
+            <a:endParaRPr sz="1000">
+              <a:solidFill>
+                <a:srgbClr val="CCCCCC"/>
+              </a:solidFill>
+              <a:highlight>
+                <a:schemeClr val="dk2"/>
+              </a:highlight>
+              <a:latin typeface="Consolas"/>
+              <a:ea typeface="Consolas"/>
+              <a:cs typeface="Consolas"/>
+              <a:sym typeface="Consolas"/>
+            </a:endParaRPr>
+          </a:p>
+          <a:p>
+            <a:pPr indent="0" lvl="0" marL="0" rtl="0" algn="l">
+              <a:lnSpc>
+                <a:spcPct val="115000"/>
+              </a:lnSpc>
+              <a:spcBef>
+                <a:spcPts val="0"/>
+              </a:spcBef>
+              <a:spcAft>
+                <a:spcPts val="0"/>
+              </a:spcAft>
+              <a:buNone/>
+            </a:pPr>
+            <a:r>
+              <a:rPr lang="en" sz="1000">
+                <a:highlight>
+                  <a:schemeClr val="dk2"/>
+                </a:highlight>
+                <a:latin typeface="Consolas"/>
+                <a:ea typeface="Consolas"/>
+                <a:cs typeface="Consolas"/>
+                <a:sym typeface="Consolas"/>
+              </a:rPr>
+              <a:t>    _swarm.Separate();</a:t>
+            </a:r>
+            <a:endParaRPr sz="1000">
+              <a:solidFill>
+                <a:srgbClr val="CCCCCC"/>
+              </a:solidFill>
+              <a:highlight>
+                <a:schemeClr val="dk2"/>
+              </a:highlight>
+              <a:latin typeface="Consolas"/>
+              <a:ea typeface="Consolas"/>
+              <a:cs typeface="Consolas"/>
+              <a:sym typeface="Consolas"/>
+            </a:endParaRPr>
+          </a:p>
+          <a:p>
+            <a:pPr indent="0" lvl="0" marL="0" rtl="0" algn="l">
+              <a:lnSpc>
+                <a:spcPct val="115000"/>
+              </a:lnSpc>
+              <a:spcBef>
+                <a:spcPts val="0"/>
+              </a:spcBef>
+              <a:spcAft>
+                <a:spcPts val="0"/>
+              </a:spcAft>
+              <a:buNone/>
+            </a:pPr>
+            <a:r>
+              <a:rPr lang="en" sz="1000">
+                <a:highlight>
+                  <a:schemeClr val="dk2"/>
+                </a:highlight>
+                <a:latin typeface="Consolas"/>
+                <a:ea typeface="Consolas"/>
+                <a:cs typeface="Consolas"/>
+                <a:sym typeface="Consolas"/>
+              </a:rPr>
+              <a:t/>
+            </a:r>
+            <a:endParaRPr sz="1000">
+              <a:solidFill>
+                <a:srgbClr val="CCCCCC"/>
+              </a:solidFill>
+              <a:highlight>
+                <a:schemeClr val="dk2"/>
+              </a:highlight>
+              <a:latin typeface="Consolas"/>
+              <a:ea typeface="Consolas"/>
+              <a:cs typeface="Consolas"/>
+              <a:sym typeface="Consolas"/>
+            </a:endParaRPr>
+          </a:p>
+          <a:p>
+            <a:pPr indent="0" lvl="0" marL="0" rtl="0" algn="l">
+              <a:lnSpc>
+                <a:spcPct val="115000"/>
+              </a:lnSpc>
+              <a:spcBef>
+                <a:spcPts val="0"/>
+              </a:spcBef>
+              <a:spcAft>
+                <a:spcPts val="0"/>
+              </a:spcAft>
+              <a:buNone/>
+            </a:pPr>
+            <a:r>
+              <a:rPr lang="en" sz="1000">
+                <a:highlight>
+                  <a:schemeClr val="dk2"/>
+                </a:highlight>
+                <a:latin typeface="Consolas"/>
+                <a:ea typeface="Consolas"/>
+                <a:cs typeface="Consolas"/>
+                <a:sym typeface="Consolas"/>
+              </a:rPr>
+              <a:t>// Profiler.cs</a:t>
+            </a:r>
+            <a:endParaRPr sz="1000">
+              <a:solidFill>
+                <a:srgbClr val="CCCCCC"/>
+              </a:solidFill>
+              <a:highlight>
+                <a:schemeClr val="dk2"/>
+              </a:highlight>
+              <a:latin typeface="Consolas"/>
+              <a:ea typeface="Consolas"/>
+              <a:cs typeface="Consolas"/>
+              <a:sym typeface="Consolas"/>
+            </a:endParaRPr>
+          </a:p>
+          <a:p>
+            <a:pPr indent="0" lvl="0" marL="0" rtl="0" algn="l">
+              <a:lnSpc>
+                <a:spcPct val="115000"/>
+              </a:lnSpc>
+              <a:spcBef>
+                <a:spcPts val="0"/>
+              </a:spcBef>
+              <a:spcAft>
+                <a:spcPts val="0"/>
+              </a:spcAft>
+              <a:buNone/>
+            </a:pPr>
+            <a:r>
+              <a:rPr lang="en" sz="1000">
+                <a:highlight>
+                  <a:schemeClr val="dk2"/>
+                </a:highlight>
+                <a:latin typeface="Consolas"/>
+                <a:ea typeface="Consolas"/>
+                <a:cs typeface="Consolas"/>
+                <a:sym typeface="Consolas"/>
+              </a:rPr>
+              <a:t>public Scope Measure(string name) =&gt;</a:t>
+            </a:r>
+            <a:endParaRPr sz="1000">
+              <a:solidFill>
+                <a:srgbClr val="CCCCCC"/>
+              </a:solidFill>
+              <a:highlight>
+                <a:schemeClr val="dk2"/>
+              </a:highlight>
+              <a:latin typeface="Consolas"/>
+              <a:ea typeface="Consolas"/>
+              <a:cs typeface="Consolas"/>
+              <a:sym typeface="Consolas"/>
+            </a:endParaRPr>
+          </a:p>
+          <a:p>
+            <a:pPr indent="0" lvl="0" marL="0" rtl="0" algn="l">
+              <a:lnSpc>
+                <a:spcPct val="115000"/>
+              </a:lnSpc>
+              <a:spcBef>
+                <a:spcPts val="0"/>
+              </a:spcBef>
+              <a:spcAft>
+                <a:spcPts val="0"/>
+              </a:spcAft>
+              <a:buNone/>
+            </a:pPr>
+            <a:r>
+              <a:rPr lang="en" sz="1000">
+                <a:highlight>
+                  <a:schemeClr val="dk2"/>
+                </a:highlight>
+                <a:latin typeface="Consolas"/>
+                <a:ea typeface="Consolas"/>
+                <a:cs typeface="Consolas"/>
+                <a:sym typeface="Consolas"/>
+              </a:rPr>
+              <a:t>    new(this, name, Stopwatch.GetTimestamp());</a:t>
+            </a:r>
+            <a:endParaRPr sz="1000">
+              <a:solidFill>
+                <a:srgbClr val="CCCCCC"/>
+              </a:solidFill>
+              <a:highlight>
+                <a:schemeClr val="dk2"/>
+              </a:highlight>
+              <a:latin typeface="Consolas"/>
+              <a:ea typeface="Consolas"/>
+              <a:cs typeface="Consolas"/>
+              <a:sym typeface="Consolas"/>
+            </a:endParaRPr>
+          </a:p>
+        </p:txBody>
+      </p:sp>
+    </p:spTree>
+  </p:cSld>
+  <p:clrMapOvr>
+    <a:masterClrMapping/>
+  </p:clrMapOvr>
+</p:sld>
+</file>
+
+<file path=ppt/slides/slide11.xml><?xml version="1.0" encoding="utf-8"?>
+<p:sld xmlns:a="http://schemas.openxmlformats.org/drawingml/2006/main" xmlns:p="http://schemas.openxmlformats.org/presentationml/2006/main" xmlns:r="http://schemas.openxmlformats.org/officeDocument/2006/relationships">
+  <p:cSld>
+    <p:spTree>
+      <p:nvGrpSpPr>
+        <p:cNvPr id="1" name=""/>
+        <p:cNvGrpSpPr/>
+        <p:nvPr/>
+      </p:nvGrpSpPr>
+      <p:grpSpPr/>
+      <p:sp>
+        <p:nvSpPr>
           <p:cNvPr id="293" name="Google Shape;293;p45"/>
           <p:cNvSpPr txBox="1"/>
           <p:nvPr>
@@ -7467,7 +8083,7 @@
 </p:sld>
 </file>
 
-<file path=ppt/slides/slide11.xml><?xml version="1.0" encoding="utf-8"?>
+<file path=ppt/slides/slide12.xml><?xml version="1.0" encoding="utf-8"?>
 <p:sld xmlns:a="http://schemas.openxmlformats.org/drawingml/2006/main" xmlns:p="http://schemas.openxmlformats.org/presentationml/2006/main" xmlns:r="http://schemas.openxmlformats.org/officeDocument/2006/relationships">
   <p:cSld>
     <p:spTree>
@@ -7583,128 +8199,6 @@
               <a:t>Survivors1: F3, then Space</a:t>
             </a:r>
             <a:endParaRPr sz="1800"/>
-          </a:p>
-        </p:txBody>
-      </p:sp>
-    </p:spTree>
-  </p:cSld>
-  <p:clrMapOvr>
-    <a:masterClrMapping/>
-  </p:clrMapOvr>
-</p:sld>
-</file>
-
-<file path=ppt/slides/slide12.xml><?xml version="1.0" encoding="utf-8"?>
-<p:sld xmlns:a="http://schemas.openxmlformats.org/drawingml/2006/main" xmlns:p="http://schemas.openxmlformats.org/presentationml/2006/main" xmlns:r="http://schemas.openxmlformats.org/officeDocument/2006/relationships">
-  <p:cSld>
-    <p:spTree>
-      <p:nvGrpSpPr>
-        <p:cNvPr id="1" name=""/>
-        <p:cNvGrpSpPr/>
-        <p:nvPr/>
-      </p:nvGrpSpPr>
-      <p:grpSpPr/>
-      <p:sp>
-        <p:nvSpPr>
-          <p:cNvPr id="2" name="Title 1"/>
-          <p:cNvSpPr>
-            <a:spLocks noGrp="1"/>
-          </p:cNvSpPr>
-          <p:nvPr>
-            <p:ph type="title"/>
-          </p:nvPr>
-        </p:nvSpPr>
-        <p:spPr/>
-        <p:txBody>
-          <a:bodyPr/>
-          <a:lstStyle/>
-          <a:p>
-            <a:pPr indent="0" lvl="0" marL="0" rtl="0" algn="l">
-              <a:spcBef>
-                <a:spcPts val="0"/>
-              </a:spcBef>
-              <a:spcAft>
-                <a:spcPts val="0"/>
-              </a:spcAft>
-              <a:buNone/>
-            </a:pPr>
-            <a:r>
-              <a:rPr lang="en"/>
-              <a:t>Try It: Find the Limit</a:t>
-            </a:r>
-            <a:endParaRPr/>
-          </a:p>
-        </p:txBody>
-      </p:sp>
-      <p:sp>
-        <p:nvSpPr>
-          <p:cNvPr id="3" name="Text Placeholder 2"/>
-          <p:cNvSpPr>
-            <a:spLocks noGrp="1"/>
-          </p:cNvSpPr>
-          <p:nvPr>
-            <p:ph type="body" idx="1"/>
-          </p:nvPr>
-        </p:nvSpPr>
-        <p:spPr>
-          <a:xfrm>
-            <a:off x="311700" y="885950"/>
-            <a:ext cx="8520600" cy="1289304"/>
-          </a:xfrm>
-        </p:spPr>
-        <p:txBody>
-          <a:bodyPr/>
-          <a:lstStyle/>
-          <a:p>
-            <a:pPr indent="-330200" lvl="0" marL="457200" rtl="0" algn="l">
-              <a:spcBef>
-                <a:spcPts val="0"/>
-              </a:spcBef>
-              <a:spcAft>
-                <a:spcPts val="0"/>
-              </a:spcAft>
-              <a:buSzPts val="1600"/>
-              <a:buChar char="●"/>
-            </a:pPr>
-            <a:r>
-              <a:rPr lang="en"/>
-              <a:t>Survivors1, in Release: dotnet run -c Release</a:t>
-            </a:r>
-            <a:endParaRPr/>
-          </a:p>
-          <a:p>
-            <a:pPr indent="-330200" lvl="0" marL="457200" rtl="0" algn="l">
-              <a:spcBef>
-                <a:spcPts val="0"/>
-              </a:spcBef>
-              <a:spcAft>
-                <a:spcPts val="0"/>
-              </a:spcAft>
-              <a:buSzPts val="1600"/>
-              <a:buChar char="●"/>
-            </a:pPr>
-            <a:r>
-              <a:rPr lang="en"/>
-              <a:t>F3, then Space until a frame takes over 16.7 ms</a:t>
-            </a:r>
-            <a:endParaRPr/>
-          </a:p>
-          <a:p>
-            <a:pPr indent="-330200" lvl="0" marL="457200" rtl="0" algn="l">
-              <a:spcBef>
-                <a:spcPts val="0"/>
-              </a:spcBef>
-              <a:spcAft>
-                <a:spcPts val="0"/>
-              </a:spcAft>
-              <a:buSzPts val="1600"/>
-              <a:buChar char="●"/>
-            </a:pPr>
-            <a:r>
-              <a:rPr lang="en"/>
-              <a:t>How many enemies? Which section?</a:t>
-            </a:r>
-            <a:endParaRPr/>
           </a:p>
         </p:txBody>
       </p:sp>
@@ -7728,6 +8222,128 @@
       <p:grpSpPr/>
       <p:sp>
         <p:nvSpPr>
+          <p:cNvPr id="2" name="Title 1"/>
+          <p:cNvSpPr>
+            <a:spLocks noGrp="1"/>
+          </p:cNvSpPr>
+          <p:nvPr>
+            <p:ph type="title"/>
+          </p:nvPr>
+        </p:nvSpPr>
+        <p:spPr/>
+        <p:txBody>
+          <a:bodyPr/>
+          <a:lstStyle/>
+          <a:p>
+            <a:pPr indent="0" lvl="0" marL="0" rtl="0" algn="l">
+              <a:spcBef>
+                <a:spcPts val="0"/>
+              </a:spcBef>
+              <a:spcAft>
+                <a:spcPts val="0"/>
+              </a:spcAft>
+              <a:buNone/>
+            </a:pPr>
+            <a:r>
+              <a:rPr lang="en"/>
+              <a:t>Try It: Find the Limit</a:t>
+            </a:r>
+            <a:endParaRPr/>
+          </a:p>
+        </p:txBody>
+      </p:sp>
+      <p:sp>
+        <p:nvSpPr>
+          <p:cNvPr id="3" name="Text Placeholder 2"/>
+          <p:cNvSpPr>
+            <a:spLocks noGrp="1"/>
+          </p:cNvSpPr>
+          <p:nvPr>
+            <p:ph type="body" idx="1"/>
+          </p:nvPr>
+        </p:nvSpPr>
+        <p:spPr>
+          <a:xfrm>
+            <a:off x="311700" y="885950"/>
+            <a:ext cx="8520600" cy="1289304"/>
+          </a:xfrm>
+        </p:spPr>
+        <p:txBody>
+          <a:bodyPr/>
+          <a:lstStyle/>
+          <a:p>
+            <a:pPr indent="-330200" lvl="0" marL="457200" rtl="0" algn="l">
+              <a:spcBef>
+                <a:spcPts val="0"/>
+              </a:spcBef>
+              <a:spcAft>
+                <a:spcPts val="0"/>
+              </a:spcAft>
+              <a:buSzPts val="1600"/>
+              <a:buChar char="●"/>
+            </a:pPr>
+            <a:r>
+              <a:rPr lang="en"/>
+              <a:t>Survivors1, in Release: dotnet run -c Release</a:t>
+            </a:r>
+            <a:endParaRPr/>
+          </a:p>
+          <a:p>
+            <a:pPr indent="-330200" lvl="0" marL="457200" rtl="0" algn="l">
+              <a:spcBef>
+                <a:spcPts val="0"/>
+              </a:spcBef>
+              <a:spcAft>
+                <a:spcPts val="0"/>
+              </a:spcAft>
+              <a:buSzPts val="1600"/>
+              <a:buChar char="●"/>
+            </a:pPr>
+            <a:r>
+              <a:rPr lang="en"/>
+              <a:t>F3, then Space until a frame takes over 16.7 ms</a:t>
+            </a:r>
+            <a:endParaRPr/>
+          </a:p>
+          <a:p>
+            <a:pPr indent="-330200" lvl="0" marL="457200" rtl="0" algn="l">
+              <a:spcBef>
+                <a:spcPts val="0"/>
+              </a:spcBef>
+              <a:spcAft>
+                <a:spcPts val="0"/>
+              </a:spcAft>
+              <a:buSzPts val="1600"/>
+              <a:buChar char="●"/>
+            </a:pPr>
+            <a:r>
+              <a:rPr lang="en"/>
+              <a:t>How many enemies? Which section?</a:t>
+            </a:r>
+            <a:endParaRPr/>
+          </a:p>
+        </p:txBody>
+      </p:sp>
+    </p:spTree>
+  </p:cSld>
+  <p:clrMapOvr>
+    <a:masterClrMapping/>
+  </p:clrMapOvr>
+</p:sld>
+</file>
+
+<file path=ppt/slides/slide14.xml><?xml version="1.0" encoding="utf-8"?>
+<p:sld xmlns:a="http://schemas.openxmlformats.org/drawingml/2006/main" xmlns:p="http://schemas.openxmlformats.org/presentationml/2006/main" xmlns:r="http://schemas.openxmlformats.org/officeDocument/2006/relationships">
+  <p:cSld>
+    <p:spTree>
+      <p:nvGrpSpPr>
+        <p:cNvPr id="1" name=""/>
+        <p:cNvGrpSpPr/>
+        <p:nvPr/>
+      </p:nvGrpSpPr>
+      <p:grpSpPr/>
+      <p:sp>
+        <p:nvSpPr>
           <p:cNvPr id="140" name="Google Shape;140;p23"/>
           <p:cNvSpPr txBox="1"/>
           <p:nvPr>
@@ -8398,7 +9014,81 @@
 </p:sld>
 </file>
 
-<file path=ppt/slides/slide14.xml><?xml version="1.0" encoding="utf-8"?>
+<file path=ppt/slides/slide15.xml><?xml version="1.0" encoding="utf-8"?>
+<p:sld xmlns:a="http://schemas.openxmlformats.org/drawingml/2006/main" xmlns:p="http://schemas.openxmlformats.org/presentationml/2006/main" xmlns:r="http://schemas.openxmlformats.org/officeDocument/2006/relationships">
+  <p:cSld>
+    <p:spTree>
+      <p:nvGrpSpPr>
+        <p:cNvPr id="1" name=""/>
+        <p:cNvGrpSpPr/>
+        <p:nvPr/>
+      </p:nvGrpSpPr>
+      <p:grpSpPr/>
+      <p:sp>
+        <p:nvSpPr>
+          <p:cNvPr id="2" name="Title 1"/>
+          <p:cNvSpPr>
+            <a:spLocks noGrp="1"/>
+          </p:cNvSpPr>
+          <p:nvPr>
+            <p:ph type="title"/>
+          </p:nvPr>
+        </p:nvSpPr>
+        <p:spPr/>
+        <p:txBody>
+          <a:bodyPr/>
+          <a:lstStyle/>
+          <a:p>
+            <a:pPr indent="0" lvl="0" marL="0" rtl="0" algn="l">
+              <a:spcBef>
+                <a:spcPts val="0"/>
+              </a:spcBef>
+              <a:spcAft>
+                <a:spcPts val="0"/>
+              </a:spcAft>
+              <a:buNone/>
+            </a:pPr>
+            <a:r>
+              <a:rPr lang="en"/>
+              <a:t>A Uniform Grid</a:t>
+            </a:r>
+            <a:endParaRPr/>
+          </a:p>
+        </p:txBody>
+      </p:sp>
+      <p:pic>
+        <p:nvPicPr>
+          <p:cNvPr id="3" name="Picture 2" descr="grid.png"/>
+          <p:cNvPicPr>
+            <a:picLocks noChangeAspect="1"/>
+          </p:cNvPicPr>
+          <p:nvPr/>
+        </p:nvPicPr>
+        <p:blipFill>
+          <a:blip r:embed="rId2"/>
+          <a:stretch>
+            <a:fillRect/>
+          </a:stretch>
+        </p:blipFill>
+        <p:spPr>
+          <a:xfrm>
+            <a:off x="480713" y="1051560"/>
+            <a:ext cx="8182573" cy="3977640"/>
+          </a:xfrm>
+          <a:prstGeom prst="rect">
+            <a:avLst/>
+          </a:prstGeom>
+        </p:spPr>
+      </p:pic>
+    </p:spTree>
+  </p:cSld>
+  <p:clrMapOvr>
+    <a:masterClrMapping/>
+  </p:clrMapOvr>
+</p:sld>
+</file>
+
+<file path=ppt/slides/slide16.xml><?xml version="1.0" encoding="utf-8"?>
 <p:sld xmlns:a="http://schemas.openxmlformats.org/drawingml/2006/main" xmlns:p="http://schemas.openxmlformats.org/presentationml/2006/main" xmlns:r="http://schemas.openxmlformats.org/officeDocument/2006/relationships">
   <p:cSld>
     <p:spTree>
@@ -9270,7 +9960,7 @@
 </p:sld>
 </file>
 
-<file path=ppt/slides/slide15.xml><?xml version="1.0" encoding="utf-8"?>
+<file path=ppt/slides/slide17.xml><?xml version="1.0" encoding="utf-8"?>
 <p:sld xmlns:a="http://schemas.openxmlformats.org/drawingml/2006/main" xmlns:p="http://schemas.openxmlformats.org/presentationml/2006/main" xmlns:r="http://schemas.openxmlformats.org/officeDocument/2006/relationships">
   <p:cSld>
     <p:spTree>
@@ -9979,272 +10669,6 @@
               <a:cs typeface="Consolas"/>
               <a:sym typeface="Consolas"/>
             </a:endParaRPr>
-          </a:p>
-        </p:txBody>
-      </p:sp>
-    </p:spTree>
-  </p:cSld>
-  <p:clrMapOvr>
-    <a:masterClrMapping/>
-  </p:clrMapOvr>
-</p:sld>
-</file>
-
-<file path=ppt/slides/slide16.xml><?xml version="1.0" encoding="utf-8"?>
-<p:sld xmlns:a="http://schemas.openxmlformats.org/drawingml/2006/main" xmlns:p="http://schemas.openxmlformats.org/presentationml/2006/main" xmlns:r="http://schemas.openxmlformats.org/officeDocument/2006/relationships">
-  <p:cSld>
-    <p:spTree>
-      <p:nvGrpSpPr>
-        <p:cNvPr id="1" name=""/>
-        <p:cNvGrpSpPr/>
-        <p:nvPr/>
-      </p:nvGrpSpPr>
-      <p:grpSpPr/>
-      <p:sp>
-        <p:nvSpPr>
-          <p:cNvPr id="128" name="Google Shape;128;p21"/>
-          <p:cNvSpPr txBox="1"/>
-          <p:nvPr>
-            <p:ph type="title"/>
-          </p:nvPr>
-        </p:nvSpPr>
-        <p:spPr>
-          <a:xfrm>
-            <a:off x="311700" y="195615"/>
-            <a:ext cx="8520600" cy="572700"/>
-          </a:xfrm>
-          <a:prstGeom prst="rect">
-            <a:avLst/>
-          </a:prstGeom>
-        </p:spPr>
-        <p:txBody>
-          <a:bodyPr anchorCtr="0" anchor="t" bIns="91425" lIns="91425" spcFirstLastPara="1" rIns="91425" wrap="square" tIns="91425">
-            <a:normAutofit fontScale="90000"/>
-          </a:bodyPr>
-          <a:lstStyle/>
-          <a:p>
-            <a:pPr indent="0" lvl="0" marL="0" rtl="0" algn="l">
-              <a:spcBef>
-                <a:spcPts val="0"/>
-              </a:spcBef>
-              <a:spcAft>
-                <a:spcPts val="0"/>
-              </a:spcAft>
-              <a:buNone/>
-            </a:pPr>
-            <a:r>
-              <a:rPr lang="en">
-                <a:solidFill>
-                  <a:schemeClr val="accent5"/>
-                </a:solidFill>
-              </a:rPr>
-              <a:t>Spatial Partitioning Implementation</a:t>
-            </a:r>
-            <a:endParaRPr>
-              <a:solidFill>
-                <a:schemeClr val="accent5"/>
-              </a:solidFill>
-            </a:endParaRPr>
-          </a:p>
-        </p:txBody>
-      </p:sp>
-      <p:sp>
-        <p:nvSpPr>
-          <p:cNvPr id="129" name="Google Shape;129;p21"/>
-          <p:cNvSpPr txBox="1"/>
-          <p:nvPr>
-            <p:ph idx="1" type="body"/>
-          </p:nvPr>
-        </p:nvSpPr>
-        <p:spPr>
-          <a:xfrm>
-            <a:off x="311700" y="885950"/>
-            <a:ext cx="8520600" cy="4023300"/>
-          </a:xfrm>
-          <a:prstGeom prst="rect">
-            <a:avLst/>
-          </a:prstGeom>
-        </p:spPr>
-        <p:txBody>
-          <a:bodyPr anchorCtr="0" anchor="ctr" bIns="91425" lIns="91425" spcFirstLastPara="1" rIns="91425" wrap="square" tIns="91425">
-            <a:normAutofit/>
-          </a:bodyPr>
-          <a:lstStyle/>
-          <a:p>
-            <a:pPr indent="0" lvl="0" marL="0" rtl="0" algn="ctr">
-              <a:spcBef>
-                <a:spcPts val="0"/>
-              </a:spcBef>
-              <a:spcAft>
-                <a:spcPts val="1200"/>
-              </a:spcAft>
-              <a:buNone/>
-            </a:pPr>
-            <a:r>
-              <a:rPr lang="en" sz="2900">
-                <a:latin typeface="VT323"/>
-                <a:ea typeface="VT323"/>
-                <a:cs typeface="VT323"/>
-                <a:sym typeface="VT323"/>
-              </a:rPr>
-              <a:t>DEMO!</a:t>
-            </a:r>
-            <a:endParaRPr/>
-          </a:p>
-          <a:p>
-            <a:pPr indent="0" lvl="0" marL="0" rtl="0" algn="ctr">
-              <a:spcBef>
-                <a:spcPts val="0"/>
-              </a:spcBef>
-              <a:spcAft>
-                <a:spcPts val="0"/>
-              </a:spcAft>
-              <a:buNone/>
-            </a:pPr>
-            <a:r>
-              <a:rPr lang="en" sz="1800"/>
-              <a:t>Survivors2 and Survivors.Tests</a:t>
-            </a:r>
-            <a:endParaRPr sz="1800"/>
-          </a:p>
-        </p:txBody>
-      </p:sp>
-    </p:spTree>
-  </p:cSld>
-  <p:clrMapOvr>
-    <a:masterClrMapping/>
-  </p:clrMapOvr>
-</p:sld>
-</file>
-
-<file path=ppt/slides/slide17.xml><?xml version="1.0" encoding="utf-8"?>
-<p:sld xmlns:a="http://schemas.openxmlformats.org/drawingml/2006/main" xmlns:p="http://schemas.openxmlformats.org/presentationml/2006/main" xmlns:r="http://schemas.openxmlformats.org/officeDocument/2006/relationships">
-  <p:cSld>
-    <p:spTree>
-      <p:nvGrpSpPr>
-        <p:cNvPr id="1" name=""/>
-        <p:cNvGrpSpPr/>
-        <p:nvPr/>
-      </p:nvGrpSpPr>
-      <p:grpSpPr/>
-      <p:sp>
-        <p:nvSpPr>
-          <p:cNvPr id="2" name="Title 1"/>
-          <p:cNvSpPr>
-            <a:spLocks noGrp="1"/>
-          </p:cNvSpPr>
-          <p:nvPr>
-            <p:ph type="title"/>
-          </p:nvPr>
-        </p:nvSpPr>
-        <p:spPr/>
-        <p:txBody>
-          <a:bodyPr/>
-          <a:lstStyle/>
-          <a:p>
-            <a:pPr indent="0" lvl="0" marL="0" rtl="0" algn="l">
-              <a:spcBef>
-                <a:spcPts val="0"/>
-              </a:spcBef>
-              <a:spcAft>
-                <a:spcPts val="0"/>
-              </a:spcAft>
-              <a:buNone/>
-            </a:pPr>
-            <a:r>
-              <a:rPr lang="en"/>
-              <a:t>Try It: Measure the Grid</a:t>
-            </a:r>
-            <a:endParaRPr/>
-          </a:p>
-        </p:txBody>
-      </p:sp>
-      <p:sp>
-        <p:nvSpPr>
-          <p:cNvPr id="3" name="Text Placeholder 2"/>
-          <p:cNvSpPr>
-            <a:spLocks noGrp="1"/>
-          </p:cNvSpPr>
-          <p:nvPr>
-            <p:ph type="body" idx="1"/>
-          </p:nvPr>
-        </p:nvSpPr>
-        <p:spPr>
-          <a:xfrm>
-            <a:off x="311700" y="885950"/>
-            <a:ext cx="8520600" cy="1673352"/>
-          </a:xfrm>
-        </p:spPr>
-        <p:txBody>
-          <a:bodyPr/>
-          <a:lstStyle/>
-          <a:p>
-            <a:pPr indent="-330200" lvl="0" marL="457200" rtl="0" algn="l">
-              <a:spcBef>
-                <a:spcPts val="0"/>
-              </a:spcBef>
-              <a:spcAft>
-                <a:spcPts val="0"/>
-              </a:spcAft>
-              <a:buSzPts val="1600"/>
-              <a:buChar char="●"/>
-            </a:pPr>
-            <a:r>
-              <a:rPr lang="en"/>
-              <a:t>Survivors2, in Release:</a:t>
-            </a:r>
-            <a:endParaRPr/>
-          </a:p>
-          <a:p>
-            <a:pPr indent="-330200" lvl="0" marL="457200" rtl="0" algn="l">
-              <a:spcBef>
-                <a:spcPts val="0"/>
-              </a:spcBef>
-              <a:spcAft>
-                <a:spcPts val="0"/>
-              </a:spcAft>
-              <a:buSzPts val="1600"/>
-              <a:buChar char="●"/>
-            </a:pPr>
-            <a:r>
-              <a:rPr lang="en"/>
-              <a:t>Go to 10,000 enemies</a:t>
-            </a:r>
-            <a:endParaRPr/>
-          </a:p>
-          <a:p>
-            <a:pPr indent="-330200" lvl="0" marL="457200" rtl="0" algn="l">
-              <a:spcBef>
-                <a:spcPts val="0"/>
-              </a:spcBef>
-              <a:spcAft>
-                <a:spcPts val="0"/>
-              </a:spcAft>
-              <a:buSzPts val="1600"/>
-              <a:buChar char="●"/>
-            </a:pPr>
-            <a:r>
-              <a:rPr lang="en"/>
-              <a:t>Compare Separate with Survivors1</a:t>
-            </a:r>
-            <a:endParaRPr/>
-          </a:p>
-          <a:p>
-            <a:pPr indent="-330200" lvl="0" marL="457200" rtl="0" algn="l">
-              <a:spcBef>
-                <a:spcPts val="0"/>
-              </a:spcBef>
-              <a:spcAft>
-                <a:spcPts val="0"/>
-              </a:spcAft>
-              <a:buSzPts val="1600"/>
-              <a:buChar char="●"/>
-            </a:pPr>
-            <a:r>
-              <a:rPr lang="en"/>
-              <a:t>Then run dotnet test in the folder</a:t>
-            </a:r>
-            <a:endParaRPr/>
           </a:p>
         </p:txBody>
       </p:sp>
@@ -10268,7 +10692,7 @@
       <p:grpSpPr/>
       <p:sp>
         <p:nvSpPr>
-          <p:cNvPr id="293" name="Google Shape;293;p45"/>
+          <p:cNvPr id="128" name="Google Shape;128;p21"/>
           <p:cNvSpPr txBox="1"/>
           <p:nvPr>
             <p:ph type="title"/>
@@ -10304,7 +10728,7 @@
                   <a:schemeClr val="accent5"/>
                 </a:solidFill>
               </a:rPr>
-              <a:t>Why Memory Layout Matters</a:t>
+              <a:t>Spatial Partitioning Implementation</a:t>
             </a:r>
             <a:endParaRPr>
               <a:solidFill>
@@ -10316,7 +10740,7 @@
       </p:sp>
       <p:sp>
         <p:nvSpPr>
-          <p:cNvPr id="294" name="Google Shape;294;p45"/>
+          <p:cNvPr id="129" name="Google Shape;129;p21"/>
           <p:cNvSpPr txBox="1"/>
           <p:nvPr>
             <p:ph idx="1" type="body"/>
@@ -10324,61 +10748,57 @@
         </p:nvSpPr>
         <p:spPr>
           <a:xfrm>
-            <a:off x="311700" y="886968"/>
-            <a:ext cx="8520600" cy="457200"/>
+            <a:off x="311700" y="885950"/>
+            <a:ext cx="8520600" cy="4023300"/>
           </a:xfrm>
           <a:prstGeom prst="rect">
             <a:avLst/>
           </a:prstGeom>
         </p:spPr>
         <p:txBody>
-          <a:bodyPr anchorCtr="0" anchor="t" bIns="91425" lIns="91425" spcFirstLastPara="1" rIns="91425" wrap="square" tIns="91425">
+          <a:bodyPr anchorCtr="0" anchor="ctr" bIns="91425" lIns="91425" spcFirstLastPara="1" rIns="91425" wrap="square" tIns="91425">
             <a:normAutofit/>
           </a:bodyPr>
           <a:lstStyle/>
           <a:p>
-            <a:pPr indent="-330200" lvl="0" marL="457200" rtl="0" algn="l">
-              <a:spcBef>
-                <a:spcPts val="0"/>
-              </a:spcBef>
-              <a:spcAft>
-                <a:spcPts val="0"/>
-              </a:spcAft>
-              <a:buSzPts val="1600"/>
-              <a:buChar char="●"/>
-            </a:pPr>
-            <a:r>
-              <a:rPr lang="en"/>
-              <a:t>The CPU is much faster than memory. What’s next to what you just read is almost free.</a:t>
+            <a:pPr indent="0" lvl="0" marL="0" rtl="0" algn="ctr">
+              <a:spcBef>
+                <a:spcPts val="0"/>
+              </a:spcBef>
+              <a:spcAft>
+                <a:spcPts val="1200"/>
+              </a:spcAft>
+              <a:buNone/>
+            </a:pPr>
+            <a:r>
+              <a:rPr lang="en" sz="2900">
+                <a:latin typeface="VT323"/>
+                <a:ea typeface="VT323"/>
+                <a:cs typeface="VT323"/>
+                <a:sym typeface="VT323"/>
+              </a:rPr>
+              <a:t>DEMO!</a:t>
             </a:r>
             <a:endParaRPr/>
           </a:p>
+          <a:p>
+            <a:pPr indent="0" lvl="0" marL="0" rtl="0" algn="ctr">
+              <a:spcBef>
+                <a:spcPts val="0"/>
+              </a:spcBef>
+              <a:spcAft>
+                <a:spcPts val="0"/>
+              </a:spcAft>
+              <a:buNone/>
+            </a:pPr>
+            <a:r>
+              <a:rPr lang="en" sz="1800"/>
+              <a:t>Survivors2 and Survivors.Tests</a:t>
+            </a:r>
+            <a:endParaRPr sz="1800"/>
+          </a:p>
         </p:txBody>
       </p:sp>
-      <p:pic>
-        <p:nvPicPr>
-          <p:cNvPr id="295" name="Picture 294" descr="memory-layout.png"/>
-          <p:cNvPicPr>
-            <a:picLocks noChangeAspect="1"/>
-          </p:cNvPicPr>
-          <p:nvPr/>
-        </p:nvPicPr>
-        <p:blipFill>
-          <a:blip r:embed="rId3"/>
-          <a:stretch>
-            <a:fillRect/>
-          </a:stretch>
-        </p:blipFill>
-        <p:spPr>
-          <a:xfrm>
-            <a:off x="1106905" y="1371600"/>
-            <a:ext cx="6930189" cy="3657600"/>
-          </a:xfrm>
-          <a:prstGeom prst="rect">
-            <a:avLst/>
-          </a:prstGeom>
-        </p:spPr>
-      </p:pic>
     </p:spTree>
   </p:cSld>
   <p:clrMapOvr>
@@ -10399,71 +10819,57 @@
       <p:grpSpPr/>
       <p:sp>
         <p:nvSpPr>
-          <p:cNvPr id="140" name="Google Shape;140;p23"/>
-          <p:cNvSpPr txBox="1"/>
+          <p:cNvPr id="2" name="Title 1"/>
+          <p:cNvSpPr>
+            <a:spLocks noGrp="1"/>
+          </p:cNvSpPr>
           <p:nvPr>
             <p:ph type="title"/>
           </p:nvPr>
         </p:nvSpPr>
+        <p:spPr/>
+        <p:txBody>
+          <a:bodyPr/>
+          <a:lstStyle/>
+          <a:p>
+            <a:pPr indent="0" lvl="0" marL="0" rtl="0" algn="l">
+              <a:spcBef>
+                <a:spcPts val="0"/>
+              </a:spcBef>
+              <a:spcAft>
+                <a:spcPts val="0"/>
+              </a:spcAft>
+              <a:buNone/>
+            </a:pPr>
+            <a:r>
+              <a:rPr lang="en"/>
+              <a:t>Try It: Measure the Grid</a:t>
+            </a:r>
+            <a:endParaRPr/>
+          </a:p>
+        </p:txBody>
+      </p:sp>
+      <p:sp>
+        <p:nvSpPr>
+          <p:cNvPr id="3" name="Text Placeholder 2"/>
+          <p:cNvSpPr>
+            <a:spLocks noGrp="1"/>
+          </p:cNvSpPr>
+          <p:nvPr>
+            <p:ph type="body" idx="1"/>
+          </p:nvPr>
+        </p:nvSpPr>
         <p:spPr>
           <a:xfrm>
-            <a:off x="311700" y="195615"/>
-            <a:ext cx="8520600" cy="572700"/>
+            <a:off x="311700" y="885950"/>
+            <a:ext cx="8520600" cy="1673352"/>
           </a:xfrm>
-          <a:prstGeom prst="rect">
-            <a:avLst/>
-          </a:prstGeom>
         </p:spPr>
         <p:txBody>
-          <a:bodyPr anchorCtr="0" anchor="t" bIns="91425" lIns="91425" spcFirstLastPara="1" rIns="91425" wrap="square" tIns="91425">
-            <a:normAutofit fontScale="90000"/>
-          </a:bodyPr>
+          <a:bodyPr/>
           <a:lstStyle/>
           <a:p>
-            <a:pPr indent="0" lvl="0" marL="0" rtl="0" algn="l">
-              <a:spcBef>
-                <a:spcPts val="0"/>
-              </a:spcBef>
-              <a:spcAft>
-                <a:spcPts val="0"/>
-              </a:spcAft>
-              <a:buNone/>
-            </a:pPr>
-            <a:r>
-              <a:rPr lang="en"/>
-              <a:t>A Struct of Arrays</a:t>
-            </a:r>
-            <a:endParaRPr/>
-          </a:p>
-        </p:txBody>
-      </p:sp>
-      <p:sp>
-        <p:nvSpPr>
-          <p:cNvPr id="293" name="Google Shape;293;p45"/>
-          <p:cNvSpPr txBox="1"/>
-          <p:nvPr>
-            <p:ph type="title"/>
-          </p:nvPr>
-        </p:nvSpPr>
-        <p:spPr>
-          <a:xfrm>
-            <a:off x="311700" y="1152475"/>
-            <a:ext cx="3700000" cy="3500000"/>
-          </a:xfrm>
-          <a:prstGeom prst="rect">
-            <a:avLst/>
-          </a:prstGeom>
-        </p:spPr>
-        <p:txBody>
-          <a:bodyPr anchorCtr="0" anchor="t" bIns="91425" lIns="91425" spcFirstLastPara="1" rIns="91425" wrap="square" tIns="91425">
-            <a:normAutofit fontScale="90000"/>
-          </a:bodyPr>
-          <a:lstStyle/>
-          <a:p>
             <a:pPr indent="-330200" lvl="0" marL="457200" rtl="0" algn="l">
-              <a:buClr>
-                <a:srgbClr val="DEE2E6"/>
-              </a:buClr>
               <a:spcBef>
                 <a:spcPts val="0"/>
               </a:spcBef>
@@ -10474,20 +10880,13 @@
               <a:buChar char="●"/>
             </a:pPr>
             <a:r>
-              <a:rPr lang="en" sz="1600">
-                <a:solidFill>
-                  <a:srgbClr val="DEE2E6"/>
-                </a:solidFill>
-              </a:rPr>
-              <a:t>No Enemy object: an enemy is an index</a:t>
+              <a:rPr lang="en"/>
+              <a:t>Survivors2, in Release:</a:t>
             </a:r>
             <a:endParaRPr/>
           </a:p>
           <a:p>
             <a:pPr indent="-330200" lvl="0" marL="457200" rtl="0" algn="l">
-              <a:buClr>
-                <a:srgbClr val="DEE2E6"/>
-              </a:buClr>
               <a:spcBef>
                 <a:spcPts val="0"/>
               </a:spcBef>
@@ -10498,44 +10897,13 @@
               <a:buChar char="●"/>
             </a:pPr>
             <a:r>
-              <a:rPr lang="en" sz="1600">
-                <a:solidFill>
-                  <a:srgbClr val="DEE2E6"/>
-                </a:solidFill>
-              </a:rPr>
-              <a:t>Each field in its own array</a:t>
+              <a:rPr lang="en"/>
+              <a:t>Go to 10,000 enemies</a:t>
             </a:r>
             <a:endParaRPr/>
           </a:p>
           <a:p>
-            <a:pPr indent="-317500" lvl="1" marL="914400" rtl="0" algn="l">
-              <a:buClr>
-                <a:srgbClr val="6C757D"/>
-              </a:buClr>
-              <a:spcBef>
-                <a:spcPts val="0"/>
-              </a:spcBef>
-              <a:spcAft>
-                <a:spcPts val="0"/>
-              </a:spcAft>
-              <a:buSzPts val="1400"/>
-              <a:buChar char="○"/>
-            </a:pPr>
-            <a:r>
-              <a:rPr lang="en" sz="1400">
-                <a:solidFill>
-                  <a:srgbClr val="6C757D"/>
-                </a:solidFill>
-              </a:rPr>
-              <a:t>Packed from 0 to Count - 1</a:t>
-            </a:r>
-            <a:endParaRPr/>
-          </a:p>
-          <a:p>
             <a:pPr indent="-330200" lvl="0" marL="457200" rtl="0" algn="l">
-              <a:buClr>
-                <a:srgbClr val="DEE2E6"/>
-              </a:buClr>
               <a:spcBef>
                 <a:spcPts val="0"/>
               </a:spcBef>
@@ -10546,20 +10914,13 @@
               <a:buChar char="●"/>
             </a:pPr>
             <a:r>
-              <a:rPr lang="en" sz="1600">
-                <a:solidFill>
-                  <a:srgbClr val="DEE2E6"/>
-                </a:solidFill>
-              </a:rPr>
-              <a:t>Remove: the last one moves into the hole</a:t>
+              <a:rPr lang="en"/>
+              <a:t>Compare Separate with Survivors1</a:t>
             </a:r>
             <a:endParaRPr/>
           </a:p>
           <a:p>
             <a:pPr indent="-330200" lvl="0" marL="457200" rtl="0" algn="l">
-              <a:buClr>
-                <a:srgbClr val="DEE2E6"/>
-              </a:buClr>
               <a:spcBef>
                 <a:spcPts val="0"/>
               </a:spcBef>
@@ -10570,594 +10931,10 @@
               <a:buChar char="●"/>
             </a:pPr>
             <a:r>
-              <a:rPr lang="en" sz="1600">
-                <a:solidFill>
-                  <a:srgbClr val="DEE2E6"/>
-                </a:solidFill>
-              </a:rPr>
-              <a:t>Speed and radius copied from the kind</a:t>
+              <a:rPr lang="en"/>
+              <a:t>Then run dotnet test in the folder</a:t>
             </a:r>
             <a:endParaRPr/>
-          </a:p>
-          <a:p>
-            <a:pPr indent="-317500" lvl="1" marL="914400" rtl="0" algn="l">
-              <a:buClr>
-                <a:srgbClr val="6C757D"/>
-              </a:buClr>
-              <a:spcBef>
-                <a:spcPts val="0"/>
-              </a:spcBef>
-              <a:spcAft>
-                <a:spcPts val="0"/>
-              </a:spcAft>
-              <a:buSzPts val="1400"/>
-              <a:buChar char="○"/>
-            </a:pPr>
-            <a:r>
-              <a:rPr lang="en" sz="1400">
-                <a:solidFill>
-                  <a:srgbClr val="6C757D"/>
-                </a:solidFill>
-              </a:rPr>
-              <a:t>The hot loops read them every step</a:t>
-            </a:r>
-            <a:endParaRPr/>
-          </a:p>
-        </p:txBody>
-      </p:sp>
-      <p:sp>
-        <p:nvSpPr>
-          <p:cNvPr id="141" name="Google Shape;141;p23"/>
-          <p:cNvSpPr txBox="1"/>
-          <p:nvPr>
-            <p:ph idx="2" type="body"/>
-          </p:nvPr>
-        </p:nvSpPr>
-        <p:spPr>
-          <a:xfrm>
-            <a:off x="4150000" y="1152475"/>
-            <a:ext cx="4750000" cy="3600000"/>
-          </a:xfrm>
-          <a:prstGeom prst="rect">
-            <a:avLst/>
-          </a:prstGeom>
-        </p:spPr>
-        <p:txBody>
-          <a:bodyPr anchorCtr="0" anchor="t" bIns="91425" lIns="91425" spcFirstLastPara="1" rIns="91425" wrap="square" tIns="91425">
-            <a:noAutofit/>
-          </a:bodyPr>
-          <a:lstStyle/>
-          <a:p>
-            <a:pPr indent="0" lvl="0" marL="0" rtl="0" algn="l">
-              <a:lnSpc>
-                <a:spcPct val="115000"/>
-              </a:lnSpc>
-              <a:spcBef>
-                <a:spcPts val="0"/>
-              </a:spcBef>
-              <a:spcAft>
-                <a:spcPts val="0"/>
-              </a:spcAft>
-              <a:buNone/>
-            </a:pPr>
-            <a:r>
-              <a:rPr lang="en" sz="1000">
-                <a:highlight>
-                  <a:schemeClr val="dk2"/>
-                </a:highlight>
-                <a:latin typeface="Consolas"/>
-                <a:ea typeface="Consolas"/>
-                <a:cs typeface="Consolas"/>
-                <a:sym typeface="Consolas"/>
-              </a:rPr>
-              <a:t>public sealed class Enemies(int capacity)</a:t>
-            </a:r>
-            <a:endParaRPr sz="1000">
-              <a:solidFill>
-                <a:srgbClr val="CCCCCC"/>
-              </a:solidFill>
-              <a:highlight>
-                <a:schemeClr val="dk2"/>
-              </a:highlight>
-              <a:latin typeface="Consolas"/>
-              <a:ea typeface="Consolas"/>
-              <a:cs typeface="Consolas"/>
-              <a:sym typeface="Consolas"/>
-            </a:endParaRPr>
-          </a:p>
-          <a:p>
-            <a:pPr indent="0" lvl="0" marL="0" rtl="0" algn="l">
-              <a:lnSpc>
-                <a:spcPct val="115000"/>
-              </a:lnSpc>
-              <a:spcBef>
-                <a:spcPts val="0"/>
-              </a:spcBef>
-              <a:spcAft>
-                <a:spcPts val="0"/>
-              </a:spcAft>
-              <a:buNone/>
-            </a:pPr>
-            <a:r>
-              <a:rPr lang="en" sz="1000">
-                <a:highlight>
-                  <a:schemeClr val="dk2"/>
-                </a:highlight>
-                <a:latin typeface="Consolas"/>
-                <a:ea typeface="Consolas"/>
-                <a:cs typeface="Consolas"/>
-                <a:sym typeface="Consolas"/>
-              </a:rPr>
-              <a:t>{</a:t>
-            </a:r>
-            <a:endParaRPr sz="1000">
-              <a:solidFill>
-                <a:srgbClr val="CCCCCC"/>
-              </a:solidFill>
-              <a:highlight>
-                <a:schemeClr val="dk2"/>
-              </a:highlight>
-              <a:latin typeface="Consolas"/>
-              <a:ea typeface="Consolas"/>
-              <a:cs typeface="Consolas"/>
-              <a:sym typeface="Consolas"/>
-            </a:endParaRPr>
-          </a:p>
-          <a:p>
-            <a:pPr indent="0" lvl="0" marL="0" rtl="0" algn="l">
-              <a:lnSpc>
-                <a:spcPct val="115000"/>
-              </a:lnSpc>
-              <a:spcBef>
-                <a:spcPts val="0"/>
-              </a:spcBef>
-              <a:spcAft>
-                <a:spcPts val="0"/>
-              </a:spcAft>
-              <a:buNone/>
-            </a:pPr>
-            <a:r>
-              <a:rPr lang="en" sz="1000">
-                <a:highlight>
-                  <a:schemeClr val="dk2"/>
-                </a:highlight>
-                <a:latin typeface="Consolas"/>
-                <a:ea typeface="Consolas"/>
-                <a:cs typeface="Consolas"/>
-                <a:sym typeface="Consolas"/>
-              </a:rPr>
-              <a:t>    public readonly Vector2[] Position =</a:t>
-            </a:r>
-            <a:endParaRPr sz="1000">
-              <a:solidFill>
-                <a:srgbClr val="CCCCCC"/>
-              </a:solidFill>
-              <a:highlight>
-                <a:schemeClr val="dk2"/>
-              </a:highlight>
-              <a:latin typeface="Consolas"/>
-              <a:ea typeface="Consolas"/>
-              <a:cs typeface="Consolas"/>
-              <a:sym typeface="Consolas"/>
-            </a:endParaRPr>
-          </a:p>
-          <a:p>
-            <a:pPr indent="0" lvl="0" marL="0" rtl="0" algn="l">
-              <a:lnSpc>
-                <a:spcPct val="115000"/>
-              </a:lnSpc>
-              <a:spcBef>
-                <a:spcPts val="0"/>
-              </a:spcBef>
-              <a:spcAft>
-                <a:spcPts val="0"/>
-              </a:spcAft>
-              <a:buNone/>
-            </a:pPr>
-            <a:r>
-              <a:rPr lang="en" sz="1000">
-                <a:highlight>
-                  <a:schemeClr val="dk2"/>
-                </a:highlight>
-                <a:latin typeface="Consolas"/>
-                <a:ea typeface="Consolas"/>
-                <a:cs typeface="Consolas"/>
-                <a:sym typeface="Consolas"/>
-              </a:rPr>
-              <a:t>        new Vector2[capacity];</a:t>
-            </a:r>
-            <a:endParaRPr sz="1000">
-              <a:solidFill>
-                <a:srgbClr val="CCCCCC"/>
-              </a:solidFill>
-              <a:highlight>
-                <a:schemeClr val="dk2"/>
-              </a:highlight>
-              <a:latin typeface="Consolas"/>
-              <a:ea typeface="Consolas"/>
-              <a:cs typeface="Consolas"/>
-              <a:sym typeface="Consolas"/>
-            </a:endParaRPr>
-          </a:p>
-          <a:p>
-            <a:pPr indent="0" lvl="0" marL="0" rtl="0" algn="l">
-              <a:lnSpc>
-                <a:spcPct val="115000"/>
-              </a:lnSpc>
-              <a:spcBef>
-                <a:spcPts val="0"/>
-              </a:spcBef>
-              <a:spcAft>
-                <a:spcPts val="0"/>
-              </a:spcAft>
-              <a:buNone/>
-            </a:pPr>
-            <a:r>
-              <a:rPr lang="en" sz="1000">
-                <a:highlight>
-                  <a:schemeClr val="dk2"/>
-                </a:highlight>
-                <a:latin typeface="Consolas"/>
-                <a:ea typeface="Consolas"/>
-                <a:cs typeface="Consolas"/>
-                <a:sym typeface="Consolas"/>
-              </a:rPr>
-              <a:t>    public readonly float[] Health = ...;</a:t>
-            </a:r>
-            <a:endParaRPr sz="1000">
-              <a:solidFill>
-                <a:srgbClr val="CCCCCC"/>
-              </a:solidFill>
-              <a:highlight>
-                <a:schemeClr val="dk2"/>
-              </a:highlight>
-              <a:latin typeface="Consolas"/>
-              <a:ea typeface="Consolas"/>
-              <a:cs typeface="Consolas"/>
-              <a:sym typeface="Consolas"/>
-            </a:endParaRPr>
-          </a:p>
-          <a:p>
-            <a:pPr indent="0" lvl="0" marL="0" rtl="0" algn="l">
-              <a:lnSpc>
-                <a:spcPct val="115000"/>
-              </a:lnSpc>
-              <a:spcBef>
-                <a:spcPts val="0"/>
-              </a:spcBef>
-              <a:spcAft>
-                <a:spcPts val="0"/>
-              </a:spcAft>
-              <a:buNone/>
-            </a:pPr>
-            <a:r>
-              <a:rPr lang="en" sz="1000">
-                <a:highlight>
-                  <a:schemeClr val="dk2"/>
-                </a:highlight>
-                <a:latin typeface="Consolas"/>
-                <a:ea typeface="Consolas"/>
-                <a:cs typeface="Consolas"/>
-                <a:sym typeface="Consolas"/>
-              </a:rPr>
-              <a:t>    public readonly float[] Speed = ...;</a:t>
-            </a:r>
-            <a:endParaRPr sz="1000">
-              <a:solidFill>
-                <a:srgbClr val="CCCCCC"/>
-              </a:solidFill>
-              <a:highlight>
-                <a:schemeClr val="dk2"/>
-              </a:highlight>
-              <a:latin typeface="Consolas"/>
-              <a:ea typeface="Consolas"/>
-              <a:cs typeface="Consolas"/>
-              <a:sym typeface="Consolas"/>
-            </a:endParaRPr>
-          </a:p>
-          <a:p>
-            <a:pPr indent="0" lvl="0" marL="0" rtl="0" algn="l">
-              <a:lnSpc>
-                <a:spcPct val="115000"/>
-              </a:lnSpc>
-              <a:spcBef>
-                <a:spcPts val="0"/>
-              </a:spcBef>
-              <a:spcAft>
-                <a:spcPts val="0"/>
-              </a:spcAft>
-              <a:buNone/>
-            </a:pPr>
-            <a:r>
-              <a:rPr lang="en" sz="1000">
-                <a:highlight>
-                  <a:schemeClr val="dk2"/>
-                </a:highlight>
-                <a:latin typeface="Consolas"/>
-                <a:ea typeface="Consolas"/>
-                <a:cs typeface="Consolas"/>
-                <a:sym typeface="Consolas"/>
-              </a:rPr>
-              <a:t>    public readonly float[] Radius = ...;</a:t>
-            </a:r>
-            <a:endParaRPr sz="1000">
-              <a:solidFill>
-                <a:srgbClr val="CCCCCC"/>
-              </a:solidFill>
-              <a:highlight>
-                <a:schemeClr val="dk2"/>
-              </a:highlight>
-              <a:latin typeface="Consolas"/>
-              <a:ea typeface="Consolas"/>
-              <a:cs typeface="Consolas"/>
-              <a:sym typeface="Consolas"/>
-            </a:endParaRPr>
-          </a:p>
-          <a:p>
-            <a:pPr indent="0" lvl="0" marL="0" rtl="0" algn="l">
-              <a:lnSpc>
-                <a:spcPct val="115000"/>
-              </a:lnSpc>
-              <a:spcBef>
-                <a:spcPts val="0"/>
-              </a:spcBef>
-              <a:spcAft>
-                <a:spcPts val="0"/>
-              </a:spcAft>
-              <a:buNone/>
-            </a:pPr>
-            <a:r>
-              <a:rPr lang="en" sz="1000">
-                <a:highlight>
-                  <a:schemeClr val="dk2"/>
-                </a:highlight>
-                <a:latin typeface="Consolas"/>
-                <a:ea typeface="Consolas"/>
-                <a:cs typeface="Consolas"/>
-                <a:sym typeface="Consolas"/>
-              </a:rPr>
-              <a:t>    public readonly byte[] Kind = ...;</a:t>
-            </a:r>
-            <a:endParaRPr sz="1000">
-              <a:solidFill>
-                <a:srgbClr val="CCCCCC"/>
-              </a:solidFill>
-              <a:highlight>
-                <a:schemeClr val="dk2"/>
-              </a:highlight>
-              <a:latin typeface="Consolas"/>
-              <a:ea typeface="Consolas"/>
-              <a:cs typeface="Consolas"/>
-              <a:sym typeface="Consolas"/>
-            </a:endParaRPr>
-          </a:p>
-          <a:p>
-            <a:pPr indent="0" lvl="0" marL="0" rtl="0" algn="l">
-              <a:lnSpc>
-                <a:spcPct val="115000"/>
-              </a:lnSpc>
-              <a:spcBef>
-                <a:spcPts val="0"/>
-              </a:spcBef>
-              <a:spcAft>
-                <a:spcPts val="0"/>
-              </a:spcAft>
-              <a:buNone/>
-            </a:pPr>
-            <a:r>
-              <a:rPr lang="en" sz="1000">
-                <a:highlight>
-                  <a:schemeClr val="dk2"/>
-                </a:highlight>
-                <a:latin typeface="Consolas"/>
-                <a:ea typeface="Consolas"/>
-                <a:cs typeface="Consolas"/>
-                <a:sym typeface="Consolas"/>
-              </a:rPr>
-              <a:t>    public int Count { get; private set; }</a:t>
-            </a:r>
-            <a:endParaRPr sz="1000">
-              <a:solidFill>
-                <a:srgbClr val="CCCCCC"/>
-              </a:solidFill>
-              <a:highlight>
-                <a:schemeClr val="dk2"/>
-              </a:highlight>
-              <a:latin typeface="Consolas"/>
-              <a:ea typeface="Consolas"/>
-              <a:cs typeface="Consolas"/>
-              <a:sym typeface="Consolas"/>
-            </a:endParaRPr>
-          </a:p>
-          <a:p>
-            <a:pPr indent="0" lvl="0" marL="0" rtl="0" algn="l">
-              <a:lnSpc>
-                <a:spcPct val="115000"/>
-              </a:lnSpc>
-              <a:spcBef>
-                <a:spcPts val="0"/>
-              </a:spcBef>
-              <a:spcAft>
-                <a:spcPts val="0"/>
-              </a:spcAft>
-              <a:buNone/>
-            </a:pPr>
-            <a:r>
-              <a:rPr lang="en" sz="1000">
-                <a:highlight>
-                  <a:schemeClr val="dk2"/>
-                </a:highlight>
-                <a:latin typeface="Consolas"/>
-                <a:ea typeface="Consolas"/>
-                <a:cs typeface="Consolas"/>
-                <a:sym typeface="Consolas"/>
-              </a:rPr>
-              <a:t>}</a:t>
-            </a:r>
-            <a:endParaRPr sz="1000">
-              <a:solidFill>
-                <a:srgbClr val="CCCCCC"/>
-              </a:solidFill>
-              <a:highlight>
-                <a:schemeClr val="dk2"/>
-              </a:highlight>
-              <a:latin typeface="Consolas"/>
-              <a:ea typeface="Consolas"/>
-              <a:cs typeface="Consolas"/>
-              <a:sym typeface="Consolas"/>
-            </a:endParaRPr>
-          </a:p>
-          <a:p>
-            <a:pPr indent="0" lvl="0" marL="0" rtl="0" algn="l">
-              <a:lnSpc>
-                <a:spcPct val="115000"/>
-              </a:lnSpc>
-              <a:spcBef>
-                <a:spcPts val="0"/>
-              </a:spcBef>
-              <a:spcAft>
-                <a:spcPts val="0"/>
-              </a:spcAft>
-              <a:buNone/>
-            </a:pPr>
-            <a:r>
-              <a:rPr lang="en" sz="1000">
-                <a:highlight>
-                  <a:schemeClr val="dk2"/>
-                </a:highlight>
-                <a:latin typeface="Consolas"/>
-                <a:ea typeface="Consolas"/>
-                <a:cs typeface="Consolas"/>
-                <a:sym typeface="Consolas"/>
-              </a:rPr>
-              <a:t/>
-            </a:r>
-            <a:endParaRPr sz="1000">
-              <a:solidFill>
-                <a:srgbClr val="CCCCCC"/>
-              </a:solidFill>
-              <a:highlight>
-                <a:schemeClr val="dk2"/>
-              </a:highlight>
-              <a:latin typeface="Consolas"/>
-              <a:ea typeface="Consolas"/>
-              <a:cs typeface="Consolas"/>
-              <a:sym typeface="Consolas"/>
-            </a:endParaRPr>
-          </a:p>
-          <a:p>
-            <a:pPr indent="0" lvl="0" marL="0" rtl="0" algn="l">
-              <a:lnSpc>
-                <a:spcPct val="115000"/>
-              </a:lnSpc>
-              <a:spcBef>
-                <a:spcPts val="0"/>
-              </a:spcBef>
-              <a:spcAft>
-                <a:spcPts val="0"/>
-              </a:spcAft>
-              <a:buNone/>
-            </a:pPr>
-            <a:r>
-              <a:rPr lang="en" sz="1000">
-                <a:highlight>
-                  <a:schemeClr val="dk2"/>
-                </a:highlight>
-                <a:latin typeface="Consolas"/>
-                <a:ea typeface="Consolas"/>
-                <a:cs typeface="Consolas"/>
-                <a:sym typeface="Consolas"/>
-              </a:rPr>
-              <a:t>// Move</a:t>
-            </a:r>
-            <a:endParaRPr sz="1000">
-              <a:solidFill>
-                <a:srgbClr val="CCCCCC"/>
-              </a:solidFill>
-              <a:highlight>
-                <a:schemeClr val="dk2"/>
-              </a:highlight>
-              <a:latin typeface="Consolas"/>
-              <a:ea typeface="Consolas"/>
-              <a:cs typeface="Consolas"/>
-              <a:sym typeface="Consolas"/>
-            </a:endParaRPr>
-          </a:p>
-          <a:p>
-            <a:pPr indent="0" lvl="0" marL="0" rtl="0" algn="l">
-              <a:lnSpc>
-                <a:spcPct val="115000"/>
-              </a:lnSpc>
-              <a:spcBef>
-                <a:spcPts val="0"/>
-              </a:spcBef>
-              <a:spcAft>
-                <a:spcPts val="0"/>
-              </a:spcAft>
-              <a:buNone/>
-            </a:pPr>
-            <a:r>
-              <a:rPr lang="en" sz="1000">
-                <a:highlight>
-                  <a:schemeClr val="dk2"/>
-                </a:highlight>
-                <a:latin typeface="Consolas"/>
-                <a:ea typeface="Consolas"/>
-                <a:cs typeface="Consolas"/>
-                <a:sym typeface="Consolas"/>
-              </a:rPr>
-              <a:t>positions[i] += toTarget / distance</a:t>
-            </a:r>
-            <a:endParaRPr sz="1000">
-              <a:solidFill>
-                <a:srgbClr val="CCCCCC"/>
-              </a:solidFill>
-              <a:highlight>
-                <a:schemeClr val="dk2"/>
-              </a:highlight>
-              <a:latin typeface="Consolas"/>
-              <a:ea typeface="Consolas"/>
-              <a:cs typeface="Consolas"/>
-              <a:sym typeface="Consolas"/>
-            </a:endParaRPr>
-          </a:p>
-          <a:p>
-            <a:pPr indent="0" lvl="0" marL="0" rtl="0" algn="l">
-              <a:lnSpc>
-                <a:spcPct val="115000"/>
-              </a:lnSpc>
-              <a:spcBef>
-                <a:spcPts val="0"/>
-              </a:spcBef>
-              <a:spcAft>
-                <a:spcPts val="0"/>
-              </a:spcAft>
-              <a:buNone/>
-            </a:pPr>
-            <a:r>
-              <a:rPr lang="en" sz="1000">
-                <a:highlight>
-                  <a:schemeClr val="dk2"/>
-                </a:highlight>
-                <a:latin typeface="Consolas"/>
-                <a:ea typeface="Consolas"/>
-                <a:cs typeface="Consolas"/>
-                <a:sym typeface="Consolas"/>
-              </a:rPr>
-              <a:t>    * speeds[i] * deltaSeconds;</a:t>
-            </a:r>
-            <a:endParaRPr sz="1000">
-              <a:solidFill>
-                <a:srgbClr val="CCCCCC"/>
-              </a:solidFill>
-              <a:highlight>
-                <a:schemeClr val="dk2"/>
-              </a:highlight>
-              <a:latin typeface="Consolas"/>
-              <a:ea typeface="Consolas"/>
-              <a:cs typeface="Consolas"/>
-              <a:sym typeface="Consolas"/>
-            </a:endParaRPr>
           </a:p>
         </p:txBody>
       </p:sp>
@@ -11283,6 +11060,919 @@
 </file>
 
 <file path=ppt/slides/slide20.xml><?xml version="1.0" encoding="utf-8"?>
+<p:sld xmlns:a="http://schemas.openxmlformats.org/drawingml/2006/main" xmlns:p="http://schemas.openxmlformats.org/presentationml/2006/main" xmlns:r="http://schemas.openxmlformats.org/officeDocument/2006/relationships">
+  <p:cSld>
+    <p:spTree>
+      <p:nvGrpSpPr>
+        <p:cNvPr id="1" name=""/>
+        <p:cNvGrpSpPr/>
+        <p:nvPr/>
+      </p:nvGrpSpPr>
+      <p:grpSpPr/>
+      <p:sp>
+        <p:nvSpPr>
+          <p:cNvPr id="293" name="Google Shape;293;p45"/>
+          <p:cNvSpPr txBox="1"/>
+          <p:nvPr>
+            <p:ph type="title"/>
+          </p:nvPr>
+        </p:nvSpPr>
+        <p:spPr>
+          <a:xfrm>
+            <a:off x="311700" y="195615"/>
+            <a:ext cx="8520600" cy="572700"/>
+          </a:xfrm>
+          <a:prstGeom prst="rect">
+            <a:avLst/>
+          </a:prstGeom>
+        </p:spPr>
+        <p:txBody>
+          <a:bodyPr anchorCtr="0" anchor="t" bIns="91425" lIns="91425" spcFirstLastPara="1" rIns="91425" wrap="square" tIns="91425">
+            <a:normAutofit fontScale="90000"/>
+          </a:bodyPr>
+          <a:lstStyle/>
+          <a:p>
+            <a:pPr indent="0" lvl="0" marL="0" rtl="0" algn="l">
+              <a:spcBef>
+                <a:spcPts val="0"/>
+              </a:spcBef>
+              <a:spcAft>
+                <a:spcPts val="0"/>
+              </a:spcAft>
+              <a:buNone/>
+            </a:pPr>
+            <a:r>
+              <a:rPr lang="en">
+                <a:solidFill>
+                  <a:schemeClr val="accent5"/>
+                </a:solidFill>
+              </a:rPr>
+              <a:t>Why Memory Layout Matters</a:t>
+            </a:r>
+            <a:endParaRPr>
+              <a:solidFill>
+                <a:schemeClr val="accent5"/>
+              </a:solidFill>
+            </a:endParaRPr>
+          </a:p>
+        </p:txBody>
+      </p:sp>
+      <p:sp>
+        <p:nvSpPr>
+          <p:cNvPr id="294" name="Google Shape;294;p45"/>
+          <p:cNvSpPr txBox="1"/>
+          <p:nvPr>
+            <p:ph idx="1" type="body"/>
+          </p:nvPr>
+        </p:nvSpPr>
+        <p:spPr>
+          <a:xfrm>
+            <a:off x="311700" y="886968"/>
+            <a:ext cx="8520600" cy="457200"/>
+          </a:xfrm>
+          <a:prstGeom prst="rect">
+            <a:avLst/>
+          </a:prstGeom>
+        </p:spPr>
+        <p:txBody>
+          <a:bodyPr anchorCtr="0" anchor="t" bIns="91425" lIns="91425" spcFirstLastPara="1" rIns="91425" wrap="square" tIns="91425">
+            <a:normAutofit/>
+          </a:bodyPr>
+          <a:lstStyle/>
+          <a:p>
+            <a:pPr indent="-330200" lvl="0" marL="457200" rtl="0" algn="l">
+              <a:spcBef>
+                <a:spcPts val="0"/>
+              </a:spcBef>
+              <a:spcAft>
+                <a:spcPts val="0"/>
+              </a:spcAft>
+              <a:buSzPts val="1600"/>
+              <a:buChar char="●"/>
+            </a:pPr>
+            <a:r>
+              <a:rPr lang="en"/>
+              <a:t>The CPU is much faster than memory. What’s next to what you just read is almost free.</a:t>
+            </a:r>
+            <a:endParaRPr/>
+          </a:p>
+        </p:txBody>
+      </p:sp>
+      <p:pic>
+        <p:nvPicPr>
+          <p:cNvPr id="295" name="Picture 294" descr="memory-layout.png"/>
+          <p:cNvPicPr>
+            <a:picLocks noChangeAspect="1"/>
+          </p:cNvPicPr>
+          <p:nvPr/>
+        </p:nvPicPr>
+        <p:blipFill>
+          <a:blip r:embed="rId4"/>
+          <a:stretch>
+            <a:fillRect/>
+          </a:stretch>
+        </p:blipFill>
+        <p:spPr>
+          <a:xfrm>
+            <a:off x="1106905" y="1371600"/>
+            <a:ext cx="6930189" cy="3657600"/>
+          </a:xfrm>
+          <a:prstGeom prst="rect">
+            <a:avLst/>
+          </a:prstGeom>
+        </p:spPr>
+      </p:pic>
+    </p:spTree>
+  </p:cSld>
+  <p:clrMapOvr>
+    <a:masterClrMapping/>
+  </p:clrMapOvr>
+</p:sld>
+</file>
+
+<file path=ppt/slides/slide21.xml><?xml version="1.0" encoding="utf-8"?>
+<p:sld xmlns:a="http://schemas.openxmlformats.org/drawingml/2006/main" xmlns:p="http://schemas.openxmlformats.org/presentationml/2006/main" xmlns:r="http://schemas.openxmlformats.org/officeDocument/2006/relationships">
+  <p:cSld>
+    <p:spTree>
+      <p:nvGrpSpPr>
+        <p:cNvPr id="1" name=""/>
+        <p:cNvGrpSpPr/>
+        <p:nvPr/>
+      </p:nvGrpSpPr>
+      <p:grpSpPr/>
+      <p:sp>
+        <p:nvSpPr>
+          <p:cNvPr id="140" name="Google Shape;140;p23"/>
+          <p:cNvSpPr txBox="1"/>
+          <p:nvPr>
+            <p:ph type="title"/>
+          </p:nvPr>
+        </p:nvSpPr>
+        <p:spPr>
+          <a:xfrm>
+            <a:off x="311700" y="195615"/>
+            <a:ext cx="8520600" cy="572700"/>
+          </a:xfrm>
+          <a:prstGeom prst="rect">
+            <a:avLst/>
+          </a:prstGeom>
+        </p:spPr>
+        <p:txBody>
+          <a:bodyPr anchorCtr="0" anchor="t" bIns="91425" lIns="91425" spcFirstLastPara="1" rIns="91425" wrap="square" tIns="91425">
+            <a:normAutofit fontScale="90000"/>
+          </a:bodyPr>
+          <a:lstStyle/>
+          <a:p>
+            <a:pPr indent="0" lvl="0" marL="0" rtl="0" algn="l">
+              <a:spcBef>
+                <a:spcPts val="0"/>
+              </a:spcBef>
+              <a:spcAft>
+                <a:spcPts val="0"/>
+              </a:spcAft>
+              <a:buNone/>
+            </a:pPr>
+            <a:r>
+              <a:rPr lang="en"/>
+              <a:t>A Struct of Arrays</a:t>
+            </a:r>
+            <a:endParaRPr/>
+          </a:p>
+        </p:txBody>
+      </p:sp>
+      <p:sp>
+        <p:nvSpPr>
+          <p:cNvPr id="293" name="Google Shape;293;p45"/>
+          <p:cNvSpPr txBox="1"/>
+          <p:nvPr>
+            <p:ph type="title"/>
+          </p:nvPr>
+        </p:nvSpPr>
+        <p:spPr>
+          <a:xfrm>
+            <a:off x="311700" y="1152475"/>
+            <a:ext cx="3700000" cy="3500000"/>
+          </a:xfrm>
+          <a:prstGeom prst="rect">
+            <a:avLst/>
+          </a:prstGeom>
+        </p:spPr>
+        <p:txBody>
+          <a:bodyPr anchorCtr="0" anchor="t" bIns="91425" lIns="91425" spcFirstLastPara="1" rIns="91425" wrap="square" tIns="91425">
+            <a:normAutofit fontScale="90000"/>
+          </a:bodyPr>
+          <a:lstStyle/>
+          <a:p>
+            <a:pPr indent="-330200" lvl="0" marL="457200" rtl="0" algn="l">
+              <a:buClr>
+                <a:srgbClr val="DEE2E6"/>
+              </a:buClr>
+              <a:spcBef>
+                <a:spcPts val="0"/>
+              </a:spcBef>
+              <a:spcAft>
+                <a:spcPts val="0"/>
+              </a:spcAft>
+              <a:buSzPts val="1600"/>
+              <a:buChar char="●"/>
+            </a:pPr>
+            <a:r>
+              <a:rPr lang="en" sz="1600">
+                <a:solidFill>
+                  <a:srgbClr val="DEE2E6"/>
+                </a:solidFill>
+              </a:rPr>
+              <a:t>No Enemy object: an enemy is an index</a:t>
+            </a:r>
+            <a:endParaRPr/>
+          </a:p>
+          <a:p>
+            <a:pPr indent="-330200" lvl="0" marL="457200" rtl="0" algn="l">
+              <a:buClr>
+                <a:srgbClr val="DEE2E6"/>
+              </a:buClr>
+              <a:spcBef>
+                <a:spcPts val="0"/>
+              </a:spcBef>
+              <a:spcAft>
+                <a:spcPts val="0"/>
+              </a:spcAft>
+              <a:buSzPts val="1600"/>
+              <a:buChar char="●"/>
+            </a:pPr>
+            <a:r>
+              <a:rPr lang="en" sz="1600">
+                <a:solidFill>
+                  <a:srgbClr val="DEE2E6"/>
+                </a:solidFill>
+              </a:rPr>
+              <a:t>Each field in its own array</a:t>
+            </a:r>
+            <a:endParaRPr/>
+          </a:p>
+          <a:p>
+            <a:pPr indent="-317500" lvl="1" marL="914400" rtl="0" algn="l">
+              <a:buClr>
+                <a:srgbClr val="6C757D"/>
+              </a:buClr>
+              <a:spcBef>
+                <a:spcPts val="0"/>
+              </a:spcBef>
+              <a:spcAft>
+                <a:spcPts val="0"/>
+              </a:spcAft>
+              <a:buSzPts val="1400"/>
+              <a:buChar char="○"/>
+            </a:pPr>
+            <a:r>
+              <a:rPr lang="en" sz="1400">
+                <a:solidFill>
+                  <a:srgbClr val="6C757D"/>
+                </a:solidFill>
+              </a:rPr>
+              <a:t>Packed from 0 to Count - 1</a:t>
+            </a:r>
+            <a:endParaRPr/>
+          </a:p>
+          <a:p>
+            <a:pPr indent="-330200" lvl="0" marL="457200" rtl="0" algn="l">
+              <a:buClr>
+                <a:srgbClr val="DEE2E6"/>
+              </a:buClr>
+              <a:spcBef>
+                <a:spcPts val="0"/>
+              </a:spcBef>
+              <a:spcAft>
+                <a:spcPts val="0"/>
+              </a:spcAft>
+              <a:buSzPts val="1600"/>
+              <a:buChar char="●"/>
+            </a:pPr>
+            <a:r>
+              <a:rPr lang="en" sz="1600">
+                <a:solidFill>
+                  <a:srgbClr val="DEE2E6"/>
+                </a:solidFill>
+              </a:rPr>
+              <a:t>Remove: the last one moves into the hole</a:t>
+            </a:r>
+            <a:endParaRPr/>
+          </a:p>
+          <a:p>
+            <a:pPr indent="-330200" lvl="0" marL="457200" rtl="0" algn="l">
+              <a:buClr>
+                <a:srgbClr val="DEE2E6"/>
+              </a:buClr>
+              <a:spcBef>
+                <a:spcPts val="0"/>
+              </a:spcBef>
+              <a:spcAft>
+                <a:spcPts val="0"/>
+              </a:spcAft>
+              <a:buSzPts val="1600"/>
+              <a:buChar char="●"/>
+            </a:pPr>
+            <a:r>
+              <a:rPr lang="en" sz="1600">
+                <a:solidFill>
+                  <a:srgbClr val="DEE2E6"/>
+                </a:solidFill>
+              </a:rPr>
+              <a:t>Speed and radius copied from the kind</a:t>
+            </a:r>
+            <a:endParaRPr/>
+          </a:p>
+          <a:p>
+            <a:pPr indent="-317500" lvl="1" marL="914400" rtl="0" algn="l">
+              <a:buClr>
+                <a:srgbClr val="6C757D"/>
+              </a:buClr>
+              <a:spcBef>
+                <a:spcPts val="0"/>
+              </a:spcBef>
+              <a:spcAft>
+                <a:spcPts val="0"/>
+              </a:spcAft>
+              <a:buSzPts val="1400"/>
+              <a:buChar char="○"/>
+            </a:pPr>
+            <a:r>
+              <a:rPr lang="en" sz="1400">
+                <a:solidFill>
+                  <a:srgbClr val="6C757D"/>
+                </a:solidFill>
+              </a:rPr>
+              <a:t>The hot loops read them every step</a:t>
+            </a:r>
+            <a:endParaRPr/>
+          </a:p>
+        </p:txBody>
+      </p:sp>
+      <p:sp>
+        <p:nvSpPr>
+          <p:cNvPr id="141" name="Google Shape;141;p23"/>
+          <p:cNvSpPr txBox="1"/>
+          <p:nvPr>
+            <p:ph idx="2" type="body"/>
+          </p:nvPr>
+        </p:nvSpPr>
+        <p:spPr>
+          <a:xfrm>
+            <a:off x="4150000" y="1152475"/>
+            <a:ext cx="4750000" cy="3600000"/>
+          </a:xfrm>
+          <a:prstGeom prst="rect">
+            <a:avLst/>
+          </a:prstGeom>
+        </p:spPr>
+        <p:txBody>
+          <a:bodyPr anchorCtr="0" anchor="t" bIns="91425" lIns="91425" spcFirstLastPara="1" rIns="91425" wrap="square" tIns="91425">
+            <a:noAutofit/>
+          </a:bodyPr>
+          <a:lstStyle/>
+          <a:p>
+            <a:pPr indent="0" lvl="0" marL="0" rtl="0" algn="l">
+              <a:lnSpc>
+                <a:spcPct val="115000"/>
+              </a:lnSpc>
+              <a:spcBef>
+                <a:spcPts val="0"/>
+              </a:spcBef>
+              <a:spcAft>
+                <a:spcPts val="0"/>
+              </a:spcAft>
+              <a:buNone/>
+            </a:pPr>
+            <a:r>
+              <a:rPr lang="en" sz="1000">
+                <a:highlight>
+                  <a:schemeClr val="dk2"/>
+                </a:highlight>
+                <a:latin typeface="Consolas"/>
+                <a:ea typeface="Consolas"/>
+                <a:cs typeface="Consolas"/>
+                <a:sym typeface="Consolas"/>
+              </a:rPr>
+              <a:t>public sealed class Enemies(int capacity)</a:t>
+            </a:r>
+            <a:endParaRPr sz="1000">
+              <a:solidFill>
+                <a:srgbClr val="CCCCCC"/>
+              </a:solidFill>
+              <a:highlight>
+                <a:schemeClr val="dk2"/>
+              </a:highlight>
+              <a:latin typeface="Consolas"/>
+              <a:ea typeface="Consolas"/>
+              <a:cs typeface="Consolas"/>
+              <a:sym typeface="Consolas"/>
+            </a:endParaRPr>
+          </a:p>
+          <a:p>
+            <a:pPr indent="0" lvl="0" marL="0" rtl="0" algn="l">
+              <a:lnSpc>
+                <a:spcPct val="115000"/>
+              </a:lnSpc>
+              <a:spcBef>
+                <a:spcPts val="0"/>
+              </a:spcBef>
+              <a:spcAft>
+                <a:spcPts val="0"/>
+              </a:spcAft>
+              <a:buNone/>
+            </a:pPr>
+            <a:r>
+              <a:rPr lang="en" sz="1000">
+                <a:highlight>
+                  <a:schemeClr val="dk2"/>
+                </a:highlight>
+                <a:latin typeface="Consolas"/>
+                <a:ea typeface="Consolas"/>
+                <a:cs typeface="Consolas"/>
+                <a:sym typeface="Consolas"/>
+              </a:rPr>
+              <a:t>{</a:t>
+            </a:r>
+            <a:endParaRPr sz="1000">
+              <a:solidFill>
+                <a:srgbClr val="CCCCCC"/>
+              </a:solidFill>
+              <a:highlight>
+                <a:schemeClr val="dk2"/>
+              </a:highlight>
+              <a:latin typeface="Consolas"/>
+              <a:ea typeface="Consolas"/>
+              <a:cs typeface="Consolas"/>
+              <a:sym typeface="Consolas"/>
+            </a:endParaRPr>
+          </a:p>
+          <a:p>
+            <a:pPr indent="0" lvl="0" marL="0" rtl="0" algn="l">
+              <a:lnSpc>
+                <a:spcPct val="115000"/>
+              </a:lnSpc>
+              <a:spcBef>
+                <a:spcPts val="0"/>
+              </a:spcBef>
+              <a:spcAft>
+                <a:spcPts val="0"/>
+              </a:spcAft>
+              <a:buNone/>
+            </a:pPr>
+            <a:r>
+              <a:rPr lang="en" sz="1000">
+                <a:highlight>
+                  <a:schemeClr val="dk2"/>
+                </a:highlight>
+                <a:latin typeface="Consolas"/>
+                <a:ea typeface="Consolas"/>
+                <a:cs typeface="Consolas"/>
+                <a:sym typeface="Consolas"/>
+              </a:rPr>
+              <a:t>    public readonly Vector2[] Position =</a:t>
+            </a:r>
+            <a:endParaRPr sz="1000">
+              <a:solidFill>
+                <a:srgbClr val="CCCCCC"/>
+              </a:solidFill>
+              <a:highlight>
+                <a:schemeClr val="dk2"/>
+              </a:highlight>
+              <a:latin typeface="Consolas"/>
+              <a:ea typeface="Consolas"/>
+              <a:cs typeface="Consolas"/>
+              <a:sym typeface="Consolas"/>
+            </a:endParaRPr>
+          </a:p>
+          <a:p>
+            <a:pPr indent="0" lvl="0" marL="0" rtl="0" algn="l">
+              <a:lnSpc>
+                <a:spcPct val="115000"/>
+              </a:lnSpc>
+              <a:spcBef>
+                <a:spcPts val="0"/>
+              </a:spcBef>
+              <a:spcAft>
+                <a:spcPts val="0"/>
+              </a:spcAft>
+              <a:buNone/>
+            </a:pPr>
+            <a:r>
+              <a:rPr lang="en" sz="1000">
+                <a:highlight>
+                  <a:schemeClr val="dk2"/>
+                </a:highlight>
+                <a:latin typeface="Consolas"/>
+                <a:ea typeface="Consolas"/>
+                <a:cs typeface="Consolas"/>
+                <a:sym typeface="Consolas"/>
+              </a:rPr>
+              <a:t>        new Vector2[capacity];</a:t>
+            </a:r>
+            <a:endParaRPr sz="1000">
+              <a:solidFill>
+                <a:srgbClr val="CCCCCC"/>
+              </a:solidFill>
+              <a:highlight>
+                <a:schemeClr val="dk2"/>
+              </a:highlight>
+              <a:latin typeface="Consolas"/>
+              <a:ea typeface="Consolas"/>
+              <a:cs typeface="Consolas"/>
+              <a:sym typeface="Consolas"/>
+            </a:endParaRPr>
+          </a:p>
+          <a:p>
+            <a:pPr indent="0" lvl="0" marL="0" rtl="0" algn="l">
+              <a:lnSpc>
+                <a:spcPct val="115000"/>
+              </a:lnSpc>
+              <a:spcBef>
+                <a:spcPts val="0"/>
+              </a:spcBef>
+              <a:spcAft>
+                <a:spcPts val="0"/>
+              </a:spcAft>
+              <a:buNone/>
+            </a:pPr>
+            <a:r>
+              <a:rPr lang="en" sz="1000">
+                <a:highlight>
+                  <a:schemeClr val="dk2"/>
+                </a:highlight>
+                <a:latin typeface="Consolas"/>
+                <a:ea typeface="Consolas"/>
+                <a:cs typeface="Consolas"/>
+                <a:sym typeface="Consolas"/>
+              </a:rPr>
+              <a:t>    public readonly float[] Health = ...;</a:t>
+            </a:r>
+            <a:endParaRPr sz="1000">
+              <a:solidFill>
+                <a:srgbClr val="CCCCCC"/>
+              </a:solidFill>
+              <a:highlight>
+                <a:schemeClr val="dk2"/>
+              </a:highlight>
+              <a:latin typeface="Consolas"/>
+              <a:ea typeface="Consolas"/>
+              <a:cs typeface="Consolas"/>
+              <a:sym typeface="Consolas"/>
+            </a:endParaRPr>
+          </a:p>
+          <a:p>
+            <a:pPr indent="0" lvl="0" marL="0" rtl="0" algn="l">
+              <a:lnSpc>
+                <a:spcPct val="115000"/>
+              </a:lnSpc>
+              <a:spcBef>
+                <a:spcPts val="0"/>
+              </a:spcBef>
+              <a:spcAft>
+                <a:spcPts val="0"/>
+              </a:spcAft>
+              <a:buNone/>
+            </a:pPr>
+            <a:r>
+              <a:rPr lang="en" sz="1000">
+                <a:highlight>
+                  <a:schemeClr val="dk2"/>
+                </a:highlight>
+                <a:latin typeface="Consolas"/>
+                <a:ea typeface="Consolas"/>
+                <a:cs typeface="Consolas"/>
+                <a:sym typeface="Consolas"/>
+              </a:rPr>
+              <a:t>    public readonly float[] Speed = ...;</a:t>
+            </a:r>
+            <a:endParaRPr sz="1000">
+              <a:solidFill>
+                <a:srgbClr val="CCCCCC"/>
+              </a:solidFill>
+              <a:highlight>
+                <a:schemeClr val="dk2"/>
+              </a:highlight>
+              <a:latin typeface="Consolas"/>
+              <a:ea typeface="Consolas"/>
+              <a:cs typeface="Consolas"/>
+              <a:sym typeface="Consolas"/>
+            </a:endParaRPr>
+          </a:p>
+          <a:p>
+            <a:pPr indent="0" lvl="0" marL="0" rtl="0" algn="l">
+              <a:lnSpc>
+                <a:spcPct val="115000"/>
+              </a:lnSpc>
+              <a:spcBef>
+                <a:spcPts val="0"/>
+              </a:spcBef>
+              <a:spcAft>
+                <a:spcPts val="0"/>
+              </a:spcAft>
+              <a:buNone/>
+            </a:pPr>
+            <a:r>
+              <a:rPr lang="en" sz="1000">
+                <a:highlight>
+                  <a:schemeClr val="dk2"/>
+                </a:highlight>
+                <a:latin typeface="Consolas"/>
+                <a:ea typeface="Consolas"/>
+                <a:cs typeface="Consolas"/>
+                <a:sym typeface="Consolas"/>
+              </a:rPr>
+              <a:t>    public readonly float[] Radius = ...;</a:t>
+            </a:r>
+            <a:endParaRPr sz="1000">
+              <a:solidFill>
+                <a:srgbClr val="CCCCCC"/>
+              </a:solidFill>
+              <a:highlight>
+                <a:schemeClr val="dk2"/>
+              </a:highlight>
+              <a:latin typeface="Consolas"/>
+              <a:ea typeface="Consolas"/>
+              <a:cs typeface="Consolas"/>
+              <a:sym typeface="Consolas"/>
+            </a:endParaRPr>
+          </a:p>
+          <a:p>
+            <a:pPr indent="0" lvl="0" marL="0" rtl="0" algn="l">
+              <a:lnSpc>
+                <a:spcPct val="115000"/>
+              </a:lnSpc>
+              <a:spcBef>
+                <a:spcPts val="0"/>
+              </a:spcBef>
+              <a:spcAft>
+                <a:spcPts val="0"/>
+              </a:spcAft>
+              <a:buNone/>
+            </a:pPr>
+            <a:r>
+              <a:rPr lang="en" sz="1000">
+                <a:highlight>
+                  <a:schemeClr val="dk2"/>
+                </a:highlight>
+                <a:latin typeface="Consolas"/>
+                <a:ea typeface="Consolas"/>
+                <a:cs typeface="Consolas"/>
+                <a:sym typeface="Consolas"/>
+              </a:rPr>
+              <a:t>    public readonly byte[] Kind = ...;</a:t>
+            </a:r>
+            <a:endParaRPr sz="1000">
+              <a:solidFill>
+                <a:srgbClr val="CCCCCC"/>
+              </a:solidFill>
+              <a:highlight>
+                <a:schemeClr val="dk2"/>
+              </a:highlight>
+              <a:latin typeface="Consolas"/>
+              <a:ea typeface="Consolas"/>
+              <a:cs typeface="Consolas"/>
+              <a:sym typeface="Consolas"/>
+            </a:endParaRPr>
+          </a:p>
+          <a:p>
+            <a:pPr indent="0" lvl="0" marL="0" rtl="0" algn="l">
+              <a:lnSpc>
+                <a:spcPct val="115000"/>
+              </a:lnSpc>
+              <a:spcBef>
+                <a:spcPts val="0"/>
+              </a:spcBef>
+              <a:spcAft>
+                <a:spcPts val="0"/>
+              </a:spcAft>
+              <a:buNone/>
+            </a:pPr>
+            <a:r>
+              <a:rPr lang="en" sz="1000">
+                <a:highlight>
+                  <a:schemeClr val="dk2"/>
+                </a:highlight>
+                <a:latin typeface="Consolas"/>
+                <a:ea typeface="Consolas"/>
+                <a:cs typeface="Consolas"/>
+                <a:sym typeface="Consolas"/>
+              </a:rPr>
+              <a:t>    public int Count { get; private set; }</a:t>
+            </a:r>
+            <a:endParaRPr sz="1000">
+              <a:solidFill>
+                <a:srgbClr val="CCCCCC"/>
+              </a:solidFill>
+              <a:highlight>
+                <a:schemeClr val="dk2"/>
+              </a:highlight>
+              <a:latin typeface="Consolas"/>
+              <a:ea typeface="Consolas"/>
+              <a:cs typeface="Consolas"/>
+              <a:sym typeface="Consolas"/>
+            </a:endParaRPr>
+          </a:p>
+          <a:p>
+            <a:pPr indent="0" lvl="0" marL="0" rtl="0" algn="l">
+              <a:lnSpc>
+                <a:spcPct val="115000"/>
+              </a:lnSpc>
+              <a:spcBef>
+                <a:spcPts val="0"/>
+              </a:spcBef>
+              <a:spcAft>
+                <a:spcPts val="0"/>
+              </a:spcAft>
+              <a:buNone/>
+            </a:pPr>
+            <a:r>
+              <a:rPr lang="en" sz="1000">
+                <a:highlight>
+                  <a:schemeClr val="dk2"/>
+                </a:highlight>
+                <a:latin typeface="Consolas"/>
+                <a:ea typeface="Consolas"/>
+                <a:cs typeface="Consolas"/>
+                <a:sym typeface="Consolas"/>
+              </a:rPr>
+              <a:t>}</a:t>
+            </a:r>
+            <a:endParaRPr sz="1000">
+              <a:solidFill>
+                <a:srgbClr val="CCCCCC"/>
+              </a:solidFill>
+              <a:highlight>
+                <a:schemeClr val="dk2"/>
+              </a:highlight>
+              <a:latin typeface="Consolas"/>
+              <a:ea typeface="Consolas"/>
+              <a:cs typeface="Consolas"/>
+              <a:sym typeface="Consolas"/>
+            </a:endParaRPr>
+          </a:p>
+          <a:p>
+            <a:pPr indent="0" lvl="0" marL="0" rtl="0" algn="l">
+              <a:lnSpc>
+                <a:spcPct val="115000"/>
+              </a:lnSpc>
+              <a:spcBef>
+                <a:spcPts val="0"/>
+              </a:spcBef>
+              <a:spcAft>
+                <a:spcPts val="0"/>
+              </a:spcAft>
+              <a:buNone/>
+            </a:pPr>
+            <a:r>
+              <a:rPr lang="en" sz="1000">
+                <a:highlight>
+                  <a:schemeClr val="dk2"/>
+                </a:highlight>
+                <a:latin typeface="Consolas"/>
+                <a:ea typeface="Consolas"/>
+                <a:cs typeface="Consolas"/>
+                <a:sym typeface="Consolas"/>
+              </a:rPr>
+              <a:t/>
+            </a:r>
+            <a:endParaRPr sz="1000">
+              <a:solidFill>
+                <a:srgbClr val="CCCCCC"/>
+              </a:solidFill>
+              <a:highlight>
+                <a:schemeClr val="dk2"/>
+              </a:highlight>
+              <a:latin typeface="Consolas"/>
+              <a:ea typeface="Consolas"/>
+              <a:cs typeface="Consolas"/>
+              <a:sym typeface="Consolas"/>
+            </a:endParaRPr>
+          </a:p>
+          <a:p>
+            <a:pPr indent="0" lvl="0" marL="0" rtl="0" algn="l">
+              <a:lnSpc>
+                <a:spcPct val="115000"/>
+              </a:lnSpc>
+              <a:spcBef>
+                <a:spcPts val="0"/>
+              </a:spcBef>
+              <a:spcAft>
+                <a:spcPts val="0"/>
+              </a:spcAft>
+              <a:buNone/>
+            </a:pPr>
+            <a:r>
+              <a:rPr lang="en" sz="1000">
+                <a:highlight>
+                  <a:schemeClr val="dk2"/>
+                </a:highlight>
+                <a:latin typeface="Consolas"/>
+                <a:ea typeface="Consolas"/>
+                <a:cs typeface="Consolas"/>
+                <a:sym typeface="Consolas"/>
+              </a:rPr>
+              <a:t>// Move</a:t>
+            </a:r>
+            <a:endParaRPr sz="1000">
+              <a:solidFill>
+                <a:srgbClr val="CCCCCC"/>
+              </a:solidFill>
+              <a:highlight>
+                <a:schemeClr val="dk2"/>
+              </a:highlight>
+              <a:latin typeface="Consolas"/>
+              <a:ea typeface="Consolas"/>
+              <a:cs typeface="Consolas"/>
+              <a:sym typeface="Consolas"/>
+            </a:endParaRPr>
+          </a:p>
+          <a:p>
+            <a:pPr indent="0" lvl="0" marL="0" rtl="0" algn="l">
+              <a:lnSpc>
+                <a:spcPct val="115000"/>
+              </a:lnSpc>
+              <a:spcBef>
+                <a:spcPts val="0"/>
+              </a:spcBef>
+              <a:spcAft>
+                <a:spcPts val="0"/>
+              </a:spcAft>
+              <a:buNone/>
+            </a:pPr>
+            <a:r>
+              <a:rPr lang="en" sz="1000">
+                <a:highlight>
+                  <a:schemeClr val="dk2"/>
+                </a:highlight>
+                <a:latin typeface="Consolas"/>
+                <a:ea typeface="Consolas"/>
+                <a:cs typeface="Consolas"/>
+                <a:sym typeface="Consolas"/>
+              </a:rPr>
+              <a:t>positions[i] += toTarget / distance</a:t>
+            </a:r>
+            <a:endParaRPr sz="1000">
+              <a:solidFill>
+                <a:srgbClr val="CCCCCC"/>
+              </a:solidFill>
+              <a:highlight>
+                <a:schemeClr val="dk2"/>
+              </a:highlight>
+              <a:latin typeface="Consolas"/>
+              <a:ea typeface="Consolas"/>
+              <a:cs typeface="Consolas"/>
+              <a:sym typeface="Consolas"/>
+            </a:endParaRPr>
+          </a:p>
+          <a:p>
+            <a:pPr indent="0" lvl="0" marL="0" rtl="0" algn="l">
+              <a:lnSpc>
+                <a:spcPct val="115000"/>
+              </a:lnSpc>
+              <a:spcBef>
+                <a:spcPts val="0"/>
+              </a:spcBef>
+              <a:spcAft>
+                <a:spcPts val="0"/>
+              </a:spcAft>
+              <a:buNone/>
+            </a:pPr>
+            <a:r>
+              <a:rPr lang="en" sz="1000">
+                <a:highlight>
+                  <a:schemeClr val="dk2"/>
+                </a:highlight>
+                <a:latin typeface="Consolas"/>
+                <a:ea typeface="Consolas"/>
+                <a:cs typeface="Consolas"/>
+                <a:sym typeface="Consolas"/>
+              </a:rPr>
+              <a:t>    * speeds[i] * deltaSeconds;</a:t>
+            </a:r>
+            <a:endParaRPr sz="1000">
+              <a:solidFill>
+                <a:srgbClr val="CCCCCC"/>
+              </a:solidFill>
+              <a:highlight>
+                <a:schemeClr val="dk2"/>
+              </a:highlight>
+              <a:latin typeface="Consolas"/>
+              <a:ea typeface="Consolas"/>
+              <a:cs typeface="Consolas"/>
+              <a:sym typeface="Consolas"/>
+            </a:endParaRPr>
+          </a:p>
+        </p:txBody>
+      </p:sp>
+    </p:spTree>
+  </p:cSld>
+  <p:clrMapOvr>
+    <a:masterClrMapping/>
+  </p:clrMapOvr>
+</p:sld>
+</file>
+
+<file path=ppt/slides/slide22.xml><?xml version="1.0" encoding="utf-8"?>
 <p:sld xmlns:a="http://schemas.openxmlformats.org/drawingml/2006/main" xmlns:p="http://schemas.openxmlformats.org/presentationml/2006/main" xmlns:r="http://schemas.openxmlformats.org/officeDocument/2006/relationships">
   <p:cSld>
     <p:spTree>
@@ -11490,7 +12180,7 @@
 </p:sld>
 </file>
 
-<file path=ppt/slides/slide21.xml><?xml version="1.0" encoding="utf-8"?>
+<file path=ppt/slides/slide23.xml><?xml version="1.0" encoding="utf-8"?>
 <p:sld xmlns:a="http://schemas.openxmlformats.org/drawingml/2006/main" xmlns:p="http://schemas.openxmlformats.org/presentationml/2006/main" xmlns:r="http://schemas.openxmlformats.org/officeDocument/2006/relationships">
   <p:cSld>
     <p:spTree>
@@ -12286,7 +12976,81 @@
 </p:sld>
 </file>
 
-<file path=ppt/slides/slide22.xml><?xml version="1.0" encoding="utf-8"?>
+<file path=ppt/slides/slide24.xml><?xml version="1.0" encoding="utf-8"?>
+<p:sld xmlns:a="http://schemas.openxmlformats.org/drawingml/2006/main" xmlns:p="http://schemas.openxmlformats.org/presentationml/2006/main" xmlns:r="http://schemas.openxmlformats.org/officeDocument/2006/relationships">
+  <p:cSld>
+    <p:spTree>
+      <p:nvGrpSpPr>
+        <p:cNvPr id="1" name=""/>
+        <p:cNvGrpSpPr/>
+        <p:nvPr/>
+      </p:nvGrpSpPr>
+      <p:grpSpPr/>
+      <p:sp>
+        <p:nvSpPr>
+          <p:cNvPr id="2" name="Title 1"/>
+          <p:cNvSpPr>
+            <a:spLocks noGrp="1"/>
+          </p:cNvSpPr>
+          <p:nvPr>
+            <p:ph type="title"/>
+          </p:nvPr>
+        </p:nvSpPr>
+        <p:spPr/>
+        <p:txBody>
+          <a:bodyPr/>
+          <a:lstStyle/>
+          <a:p>
+            <a:pPr indent="0" lvl="0" marL="0" rtl="0" algn="l">
+              <a:spcBef>
+                <a:spcPts val="0"/>
+              </a:spcBef>
+              <a:spcAft>
+                <a:spcPts val="0"/>
+              </a:spcAft>
+              <a:buNone/>
+            </a:pPr>
+            <a:r>
+              <a:rPr lang="en"/>
+              <a:t>A Counting Sort</a:t>
+            </a:r>
+            <a:endParaRPr/>
+          </a:p>
+        </p:txBody>
+      </p:sp>
+      <p:pic>
+        <p:nvPicPr>
+          <p:cNvPr id="3" name="Picture 2" descr="counting-sort.png"/>
+          <p:cNvPicPr>
+            <a:picLocks noChangeAspect="1"/>
+          </p:cNvPicPr>
+          <p:nvPr/>
+        </p:nvPicPr>
+        <p:blipFill>
+          <a:blip r:embed="rId2"/>
+          <a:stretch>
+            <a:fillRect/>
+          </a:stretch>
+        </p:blipFill>
+        <p:spPr>
+          <a:xfrm>
+            <a:off x="320039" y="1051560"/>
+            <a:ext cx="8503920" cy="3779520"/>
+          </a:xfrm>
+          <a:prstGeom prst="rect">
+            <a:avLst/>
+          </a:prstGeom>
+        </p:spPr>
+      </p:pic>
+    </p:spTree>
+  </p:cSld>
+  <p:clrMapOvr>
+    <a:masterClrMapping/>
+  </p:clrMapOvr>
+</p:sld>
+</file>
+
+<file path=ppt/slides/slide25.xml><?xml version="1.0" encoding="utf-8"?>
 <p:sld xmlns:a="http://schemas.openxmlformats.org/drawingml/2006/main" xmlns:p="http://schemas.openxmlformats.org/presentationml/2006/main" xmlns:r="http://schemas.openxmlformats.org/officeDocument/2006/relationships">
   <p:cSld>
     <p:spTree>
@@ -12857,7 +13621,7 @@
 </p:sld>
 </file>
 
-<file path=ppt/slides/slide23.xml><?xml version="1.0" encoding="utf-8"?>
+<file path=ppt/slides/slide26.xml><?xml version="1.0" encoding="utf-8"?>
 <p:sld xmlns:a="http://schemas.openxmlformats.org/drawingml/2006/main" xmlns:p="http://schemas.openxmlformats.org/presentationml/2006/main" xmlns:r="http://schemas.openxmlformats.org/officeDocument/2006/relationships">
   <p:cSld>
     <p:spTree>
@@ -13217,7 +13981,7 @@
 </p:sld>
 </file>
 
-<file path=ppt/slides/slide24.xml><?xml version="1.0" encoding="utf-8"?>
+<file path=ppt/slides/slide27.xml><?xml version="1.0" encoding="utf-8"?>
 <p:sld xmlns:a="http://schemas.openxmlformats.org/drawingml/2006/main" xmlns:p="http://schemas.openxmlformats.org/presentationml/2006/main" xmlns:r="http://schemas.openxmlformats.org/officeDocument/2006/relationships">
   <p:cSld>
     <p:spTree>
@@ -13344,7 +14108,7 @@
 </p:sld>
 </file>
 
-<file path=ppt/slides/slide25.xml><?xml version="1.0" encoding="utf-8"?>
+<file path=ppt/slides/slide28.xml><?xml version="1.0" encoding="utf-8"?>
 <p:sld xmlns:a="http://schemas.openxmlformats.org/drawingml/2006/main" xmlns:p="http://schemas.openxmlformats.org/presentationml/2006/main" xmlns:r="http://schemas.openxmlformats.org/officeDocument/2006/relationships">
   <p:cSld>
     <p:spTree>
@@ -13466,7 +14230,7 @@
 </p:sld>
 </file>
 
-<file path=ppt/slides/slide26.xml><?xml version="1.0" encoding="utf-8"?>
+<file path=ppt/slides/slide29.xml><?xml version="1.0" encoding="utf-8"?>
 <p:sld xmlns:a="http://schemas.openxmlformats.org/drawingml/2006/main" xmlns:p="http://schemas.openxmlformats.org/presentationml/2006/main" xmlns:r="http://schemas.openxmlformats.org/officeDocument/2006/relationships">
   <p:cSld>
     <p:spTree>
@@ -13900,7 +14664,96 @@
 </p:sld>
 </file>
 
-<file path=ppt/slides/slide27.xml><?xml version="1.0" encoding="utf-8"?>
+<file path=ppt/slides/slide3.xml><?xml version="1.0" encoding="utf-8"?>
+<p:sld xmlns:a="http://schemas.openxmlformats.org/drawingml/2006/main" xmlns:r="http://schemas.openxmlformats.org/officeDocument/2006/relationships" xmlns:mc="http://schemas.openxmlformats.org/markup-compatibility/2006" xmlns:mv="urn:schemas-microsoft-com:mac:vml" xmlns:p="http://schemas.openxmlformats.org/presentationml/2006/main" xmlns:c="http://schemas.openxmlformats.org/drawingml/2006/chart" xmlns:dgm="http://schemas.openxmlformats.org/drawingml/2006/diagram" xmlns:o="urn:schemas-microsoft-com:office:office" xmlns:v="urn:schemas-microsoft-com:vml" xmlns:pvml="urn:schemas-microsoft-com:office:powerpoint" xmlns:com="http://schemas.openxmlformats.org/drawingml/2006/compatibility" xmlns:p14="http://schemas.microsoft.com/office/powerpoint/2010/main" xmlns:p15="http://schemas.microsoft.com/office/powerpoint/2012/main" xmlns:ahyp="http://schemas.microsoft.com/office/drawing/2018/hyperlinkcolor">
+  <p:cSld>
+    <p:spTree>
+      <p:nvGrpSpPr>
+        <p:cNvPr id="44" name="Shape 44"/>
+        <p:cNvGrpSpPr/>
+        <p:nvPr/>
+      </p:nvGrpSpPr>
+      <p:grpSpPr>
+        <a:xfrm>
+          <a:off x="0" y="0"/>
+          <a:ext cx="0" cy="0"/>
+          <a:chOff x="0" y="0"/>
+          <a:chExt cx="0" cy="0"/>
+        </a:xfrm>
+      </p:grpSpPr>
+      <p:sp>
+        <p:nvSpPr>
+          <p:cNvPr id="45" name="Google Shape;45;p10"/>
+          <p:cNvSpPr txBox="1"/>
+          <p:nvPr>
+            <p:ph type="title"/>
+          </p:nvPr>
+        </p:nvSpPr>
+        <p:spPr>
+          <a:xfrm>
+            <a:off x="311700" y="195615"/>
+            <a:ext cx="8520600" cy="572700"/>
+          </a:xfrm>
+          <a:prstGeom prst="rect">
+            <a:avLst/>
+          </a:prstGeom>
+        </p:spPr>
+        <p:txBody>
+          <a:bodyPr anchorCtr="0" anchor="t" bIns="91425" lIns="91425" spcFirstLastPara="1" rIns="91425" wrap="square" tIns="91425">
+            <a:normAutofit fontScale="90000"/>
+          </a:bodyPr>
+          <a:lstStyle/>
+          <a:p>
+            <a:pPr indent="0" lvl="0" marL="0" rtl="0" algn="l">
+              <a:spcBef>
+                <a:spcPts val="0"/>
+              </a:spcBef>
+              <a:spcAft>
+                <a:spcPts val="0"/>
+              </a:spcAft>
+              <a:buNone/>
+            </a:pPr>
+            <a:r>
+              <a:rPr lang="en"/>
+              <a:t>Today’s Goal</a:t>
+            </a:r>
+            <a:endParaRPr/>
+          </a:p>
+        </p:txBody>
+      </p:sp>
+      <p:pic>
+        <p:nvPicPr>
+          <p:cNvPr id="46" name="Picture 46" descr="vampire-survivors.gif"/>
+          <p:cNvPicPr>
+            <a:picLocks noChangeAspect="1"/>
+          </p:cNvPicPr>
+          <p:nvPr/>
+        </p:nvPicPr>
+        <p:blipFill>
+          <a:blip r:embed="rId3"/>
+          <a:stretch>
+            <a:fillRect/>
+          </a:stretch>
+        </p:blipFill>
+        <p:spPr>
+          <a:xfrm>
+            <a:off x="1677203" y="1531275"/>
+            <a:ext cx="5789594" cy="3256647"/>
+          </a:xfrm>
+          <a:prstGeom prst="rect">
+            <a:avLst/>
+          </a:prstGeom>
+        </p:spPr>
+      </p:pic>
+    </p:spTree>
+  </p:cSld>
+  <p:clrMapOvr>
+    <a:masterClrMapping/>
+  </p:clrMapOvr>
+</p:sld>
+</file>
+
+<file path=ppt/slides/slide30.xml><?xml version="1.0" encoding="utf-8"?>
 <p:sld xmlns:a="http://schemas.openxmlformats.org/drawingml/2006/main" xmlns:p="http://schemas.openxmlformats.org/presentationml/2006/main" xmlns:r="http://schemas.openxmlformats.org/officeDocument/2006/relationships">
   <p:cSld>
     <p:spTree>
@@ -14423,7 +15276,7 @@
 </p:sld>
 </file>
 
-<file path=ppt/slides/slide28.xml><?xml version="1.0" encoding="utf-8"?>
+<file path=ppt/slides/slide31.xml><?xml version="1.0" encoding="utf-8"?>
 <p:sld xmlns:a="http://schemas.openxmlformats.org/drawingml/2006/main" xmlns:r="http://schemas.openxmlformats.org/officeDocument/2006/relationships" xmlns:mc="http://schemas.openxmlformats.org/markup-compatibility/2006" xmlns:mv="urn:schemas-microsoft-com:mac:vml" xmlns:p="http://schemas.openxmlformats.org/presentationml/2006/main" xmlns:c="http://schemas.openxmlformats.org/drawingml/2006/chart" xmlns:dgm="http://schemas.openxmlformats.org/drawingml/2006/diagram" xmlns:o="urn:schemas-microsoft-com:office:office" xmlns:v="urn:schemas-microsoft-com:vml" xmlns:pvml="urn:schemas-microsoft-com:office:powerpoint" xmlns:com="http://schemas.openxmlformats.org/drawingml/2006/compatibility" xmlns:p14="http://schemas.microsoft.com/office/powerpoint/2010/main" xmlns:p15="http://schemas.microsoft.com/office/powerpoint/2012/main" xmlns:ahyp="http://schemas.microsoft.com/office/drawing/2018/hyperlinkcolor">
   <p:cSld>
     <p:spTree>
@@ -14546,1949 +15399,6 @@
               <a:t>Survivors4: the whole game</a:t>
             </a:r>
             <a:endParaRPr sz="1800"/>
-          </a:p>
-        </p:txBody>
-      </p:sp>
-    </p:spTree>
-  </p:cSld>
-  <p:clrMapOvr>
-    <a:masterClrMapping/>
-  </p:clrMapOvr>
-</p:sld>
-</file>
-
-<file path=ppt/slides/slide29.xml><?xml version="1.0" encoding="utf-8"?>
-<p:sld xmlns:a="http://schemas.openxmlformats.org/drawingml/2006/main" xmlns:r="http://schemas.openxmlformats.org/officeDocument/2006/relationships" xmlns:mc="http://schemas.openxmlformats.org/markup-compatibility/2006" xmlns:mv="urn:schemas-microsoft-com:mac:vml" xmlns:p="http://schemas.openxmlformats.org/presentationml/2006/main" xmlns:c="http://schemas.openxmlformats.org/drawingml/2006/chart" xmlns:dgm="http://schemas.openxmlformats.org/drawingml/2006/diagram" xmlns:o="urn:schemas-microsoft-com:office:office" xmlns:v="urn:schemas-microsoft-com:vml" xmlns:pvml="urn:schemas-microsoft-com:office:powerpoint" xmlns:com="http://schemas.openxmlformats.org/drawingml/2006/compatibility" xmlns:p14="http://schemas.microsoft.com/office/powerpoint/2010/main" xmlns:p15="http://schemas.microsoft.com/office/powerpoint/2012/main" xmlns:ahyp="http://schemas.microsoft.com/office/drawing/2018/hyperlinkcolor">
-  <p:cSld>
-    <p:spTree>
-      <p:nvGrpSpPr>
-        <p:cNvPr id="292" name="Shape 292"/>
-        <p:cNvGrpSpPr/>
-        <p:nvPr/>
-      </p:nvGrpSpPr>
-      <p:grpSpPr>
-        <a:xfrm>
-          <a:off x="0" y="0"/>
-          <a:ext cx="0" cy="0"/>
-          <a:chOff x="0" y="0"/>
-          <a:chExt cx="0" cy="0"/>
-        </a:xfrm>
-      </p:grpSpPr>
-      <p:sp>
-        <p:nvSpPr>
-          <p:cNvPr id="293" name="Google Shape;293;p45"/>
-          <p:cNvSpPr txBox="1"/>
-          <p:nvPr>
-            <p:ph type="title"/>
-          </p:nvPr>
-        </p:nvSpPr>
-        <p:spPr>
-          <a:xfrm>
-            <a:off x="311700" y="195615"/>
-            <a:ext cx="8520600" cy="572700"/>
-          </a:xfrm>
-          <a:prstGeom prst="rect">
-            <a:avLst/>
-          </a:prstGeom>
-        </p:spPr>
-        <p:txBody>
-          <a:bodyPr anchorCtr="0" anchor="t" bIns="91425" lIns="91425" spcFirstLastPara="1" rIns="91425" wrap="square" tIns="91425">
-            <a:normAutofit fontScale="90000"/>
-          </a:bodyPr>
-          <a:lstStyle/>
-          <a:p>
-            <a:pPr indent="0" lvl="0" marL="0" rtl="0" algn="l">
-              <a:spcBef>
-                <a:spcPts val="0"/>
-              </a:spcBef>
-              <a:spcAft>
-                <a:spcPts val="0"/>
-              </a:spcAft>
-              <a:buNone/>
-            </a:pPr>
-            <a:r>
-              <a:rPr lang="en">
-                <a:solidFill>
-                  <a:schemeClr val="accent5"/>
-                </a:solidFill>
-              </a:rPr>
-              <a:t>Exercises</a:t>
-            </a:r>
-            <a:endParaRPr>
-              <a:solidFill>
-                <a:schemeClr val="accent5"/>
-              </a:solidFill>
-            </a:endParaRPr>
-          </a:p>
-        </p:txBody>
-      </p:sp>
-      <p:sp>
-        <p:nvSpPr>
-          <p:cNvPr id="294" name="Google Shape;294;p45"/>
-          <p:cNvSpPr txBox="1"/>
-          <p:nvPr>
-            <p:ph idx="1" type="body"/>
-          </p:nvPr>
-        </p:nvSpPr>
-        <p:spPr>
-          <a:xfrm>
-            <a:off x="311700" y="885950"/>
-            <a:ext cx="8520600" cy="4023300"/>
-          </a:xfrm>
-          <a:prstGeom prst="rect">
-            <a:avLst/>
-          </a:prstGeom>
-        </p:spPr>
-        <p:txBody>
-          <a:bodyPr anchorCtr="0" anchor="t" bIns="91425" lIns="91425" spcFirstLastPara="1" rIns="91425" wrap="square" tIns="91425">
-            <a:normAutofit/>
-          </a:bodyPr>
-          <a:lstStyle/>
-          <a:p>
-            <a:pPr indent="-330200" lvl="0" marL="457200" rtl="0" algn="l">
-              <a:spcBef>
-                <a:spcPts val="0"/>
-              </a:spcBef>
-              <a:spcAft>
-                <a:spcPts val="0"/>
-              </a:spcAft>
-              <a:buSzPts val="1600"/>
-              <a:buChar char="●"/>
-            </a:pPr>
-            <a:r>
-              <a:rPr lang="en"/>
-              <a:t>Start from Survivors3 or Survivors4, in Release</a:t>
-            </a:r>
-            <a:endParaRPr/>
-          </a:p>
-          <a:p>
-            <a:pPr indent="-330200" lvl="0" marL="457200" rtl="0" algn="l">
-              <a:spcBef>
-                <a:spcPts val="0"/>
-              </a:spcBef>
-              <a:spcAft>
-                <a:spcPts val="0"/>
-              </a:spcAft>
-              <a:buSzPts val="1600"/>
-              <a:buChar char="●"/>
-            </a:pPr>
-            <a:r>
-              <a:rPr lang="en"/>
-              <a:t>Tune the grid: cells half and twice as big. Measure</a:t>
-            </a:r>
-            <a:endParaRPr/>
-          </a:p>
-          <a:p>
-            <a:pPr indent="-317500" lvl="1" marL="914400" rtl="0" algn="l">
-              <a:spcBef>
-                <a:spcPts val="0"/>
-              </a:spcBef>
-              <a:spcAft>
-                <a:spcPts val="0"/>
-              </a:spcAft>
-              <a:buSzPts val="1400"/>
-              <a:buChar char="○"/>
-            </a:pPr>
-            <a:r>
-              <a:rPr lang="en"/>
-              <a:t>Why can’t cells be smaller than the biggest overlap?</a:t>
-            </a:r>
-            <a:endParaRPr/>
-          </a:p>
-          <a:p>
-            <a:pPr indent="-330200" lvl="0" marL="457200" rtl="0" algn="l">
-              <a:spcBef>
-                <a:spcPts val="0"/>
-              </a:spcBef>
-              <a:spcAft>
-                <a:spcPts val="0"/>
-              </a:spcAft>
-              <a:buSzPts val="1600"/>
-              <a:buChar char="●"/>
-            </a:pPr>
-            <a:r>
-              <a:rPr lang="en"/>
-              <a:t>Bolts as arrays: was it worth it?</a:t>
-            </a:r>
-            <a:endParaRPr/>
-          </a:p>
-          <a:p>
-            <a:pPr indent="-330200" lvl="0" marL="457200" rtl="0" algn="l">
-              <a:spcBef>
-                <a:spcPts val="0"/>
-              </a:spcBef>
-              <a:spcAft>
-                <a:spcPts val="0"/>
-              </a:spcAft>
-              <a:buSzPts val="1600"/>
-              <a:buChar char="●"/>
-            </a:pPr>
-            <a:r>
-              <a:rPr lang="en"/>
-              <a:t>With 20,000 enemies: what’s the next bottleneck?</a:t>
-            </a:r>
-            <a:endParaRPr/>
-          </a:p>
-          <a:p>
-            <a:pPr indent="-330200" lvl="0" marL="457200" rtl="0" algn="l">
-              <a:spcBef>
-                <a:spcPts val="0"/>
-              </a:spcBef>
-              <a:spcAft>
-                <a:spcPts val="0"/>
-              </a:spcAft>
-              <a:buSzPts val="1600"/>
-              <a:buChar char="●"/>
-            </a:pPr>
-            <a:r>
-              <a:rPr lang="en"/>
-              <a:t>A new enemy kind: what changes?</a:t>
-            </a:r>
-            <a:endParaRPr/>
-          </a:p>
-        </p:txBody>
-      </p:sp>
-    </p:spTree>
-  </p:cSld>
-  <p:clrMapOvr>
-    <a:masterClrMapping/>
-  </p:clrMapOvr>
-  <p:timing>
-    <p:tnLst>
-      <p:par>
-        <p:cTn dur="indefinite" nodeType="tmRoot" restart="never">
-          <p:childTnLst>
-            <p:seq concurrent="1" nextAc="seek">
-              <p:cTn dur="indefinite" id="2" nodeType="mainSeq">
-                <p:childTnLst>
-                  <p:par>
-                    <p:cTn fill="hold">
-                      <p:stCondLst>
-                        <p:cond delay="indefinite"/>
-                      </p:stCondLst>
-                      <p:childTnLst>
-                        <p:par>
-                          <p:cTn fill="hold">
-                            <p:stCondLst>
-                              <p:cond delay="0"/>
-                            </p:stCondLst>
-                            <p:childTnLst>
-                              <p:par>
-                                <p:cTn fill="hold" nodeType="clickEffect" presetClass="entr" presetID="1" presetSubtype="0">
-                                  <p:stCondLst>
-                                    <p:cond delay="0"/>
-                                  </p:stCondLst>
-                                  <p:childTnLst>
-                                    <p:set>
-                                      <p:cBhvr>
-                                        <p:cTn dur="1" fill="hold">
-                                          <p:stCondLst>
-                                            <p:cond delay="0"/>
-                                          </p:stCondLst>
-                                        </p:cTn>
-                                        <p:tgtEl>
-                                          <p:spTgt spid="294">
-                                            <p:txEl>
-                                              <p:pRg end="0" st="0"/>
-                                            </p:txEl>
-                                          </p:spTgt>
-                                        </p:tgtEl>
-                                        <p:attrNameLst>
-                                          <p:attrName>style.visibility</p:attrName>
-                                        </p:attrNameLst>
-                                      </p:cBhvr>
-                                      <p:to>
-                                        <p:strVal val="visible"/>
-                                      </p:to>
-                                    </p:set>
-                                  </p:childTnLst>
-                                </p:cTn>
-                              </p:par>
-                            </p:childTnLst>
-                          </p:cTn>
-                        </p:par>
-                      </p:childTnLst>
-                    </p:cTn>
-                  </p:par>
-                  <p:par>
-                    <p:cTn fill="hold">
-                      <p:stCondLst>
-                        <p:cond delay="indefinite"/>
-                      </p:stCondLst>
-                      <p:childTnLst>
-                        <p:par>
-                          <p:cTn fill="hold">
-                            <p:stCondLst>
-                              <p:cond delay="0"/>
-                            </p:stCondLst>
-                            <p:childTnLst>
-                              <p:par>
-                                <p:cTn fill="hold" nodeType="clickEffect" presetClass="entr" presetID="1" presetSubtype="0">
-                                  <p:stCondLst>
-                                    <p:cond delay="0"/>
-                                  </p:stCondLst>
-                                  <p:childTnLst>
-                                    <p:set>
-                                      <p:cBhvr>
-                                        <p:cTn dur="1" fill="hold">
-                                          <p:stCondLst>
-                                            <p:cond delay="0"/>
-                                          </p:stCondLst>
-                                        </p:cTn>
-                                        <p:tgtEl>
-                                          <p:spTgt spid="294">
-                                            <p:txEl>
-                                              <p:pRg end="1" st="1"/>
-                                            </p:txEl>
-                                          </p:spTgt>
-                                        </p:tgtEl>
-                                        <p:attrNameLst>
-                                          <p:attrName>style.visibility</p:attrName>
-                                        </p:attrNameLst>
-                                      </p:cBhvr>
-                                      <p:to>
-                                        <p:strVal val="visible"/>
-                                      </p:to>
-                                    </p:set>
-                                  </p:childTnLst>
-                                </p:cTn>
-                              </p:par>
-                            </p:childTnLst>
-                          </p:cTn>
-                        </p:par>
-                      </p:childTnLst>
-                    </p:cTn>
-                  </p:par>
-                  <p:par>
-                    <p:cTn fill="hold">
-                      <p:stCondLst>
-                        <p:cond delay="indefinite"/>
-                      </p:stCondLst>
-                      <p:childTnLst>
-                        <p:par>
-                          <p:cTn fill="hold">
-                            <p:stCondLst>
-                              <p:cond delay="0"/>
-                            </p:stCondLst>
-                            <p:childTnLst>
-                              <p:par>
-                                <p:cTn fill="hold" nodeType="clickEffect" presetClass="entr" presetID="1" presetSubtype="0">
-                                  <p:stCondLst>
-                                    <p:cond delay="0"/>
-                                  </p:stCondLst>
-                                  <p:childTnLst>
-                                    <p:set>
-                                      <p:cBhvr>
-                                        <p:cTn dur="1" fill="hold">
-                                          <p:stCondLst>
-                                            <p:cond delay="0"/>
-                                          </p:stCondLst>
-                                        </p:cTn>
-                                        <p:tgtEl>
-                                          <p:spTgt spid="294">
-                                            <p:txEl>
-                                              <p:pRg end="2" st="2"/>
-                                            </p:txEl>
-                                          </p:spTgt>
-                                        </p:tgtEl>
-                                        <p:attrNameLst>
-                                          <p:attrName>style.visibility</p:attrName>
-                                        </p:attrNameLst>
-                                      </p:cBhvr>
-                                      <p:to>
-                                        <p:strVal val="visible"/>
-                                      </p:to>
-                                    </p:set>
-                                  </p:childTnLst>
-                                </p:cTn>
-                              </p:par>
-                            </p:childTnLst>
-                          </p:cTn>
-                        </p:par>
-                      </p:childTnLst>
-                    </p:cTn>
-                  </p:par>
-                  <p:par>
-                    <p:cTn fill="hold">
-                      <p:stCondLst>
-                        <p:cond delay="indefinite"/>
-                      </p:stCondLst>
-                      <p:childTnLst>
-                        <p:par>
-                          <p:cTn fill="hold">
-                            <p:stCondLst>
-                              <p:cond delay="0"/>
-                            </p:stCondLst>
-                            <p:childTnLst>
-                              <p:par>
-                                <p:cTn fill="hold" nodeType="clickEffect" presetClass="entr" presetID="1" presetSubtype="0">
-                                  <p:stCondLst>
-                                    <p:cond delay="0"/>
-                                  </p:stCondLst>
-                                  <p:childTnLst>
-                                    <p:set>
-                                      <p:cBhvr>
-                                        <p:cTn dur="1" fill="hold">
-                                          <p:stCondLst>
-                                            <p:cond delay="0"/>
-                                          </p:stCondLst>
-                                        </p:cTn>
-                                        <p:tgtEl>
-                                          <p:spTgt spid="294">
-                                            <p:txEl>
-                                              <p:pRg end="3" st="3"/>
-                                            </p:txEl>
-                                          </p:spTgt>
-                                        </p:tgtEl>
-                                        <p:attrNameLst>
-                                          <p:attrName>style.visibility</p:attrName>
-                                        </p:attrNameLst>
-                                      </p:cBhvr>
-                                      <p:to>
-                                        <p:strVal val="visible"/>
-                                      </p:to>
-                                    </p:set>
-                                  </p:childTnLst>
-                                </p:cTn>
-                              </p:par>
-                            </p:childTnLst>
-                          </p:cTn>
-                        </p:par>
-                      </p:childTnLst>
-                    </p:cTn>
-                  </p:par>
-                  <p:par>
-                    <p:cTn fill="hold">
-                      <p:stCondLst>
-                        <p:cond delay="indefinite"/>
-                      </p:stCondLst>
-                      <p:childTnLst>
-                        <p:par>
-                          <p:cTn fill="hold">
-                            <p:stCondLst>
-                              <p:cond delay="0"/>
-                            </p:stCondLst>
-                            <p:childTnLst>
-                              <p:par>
-                                <p:cTn fill="hold" nodeType="clickEffect" presetClass="entr" presetID="1" presetSubtype="0">
-                                  <p:stCondLst>
-                                    <p:cond delay="0"/>
-                                  </p:stCondLst>
-                                  <p:childTnLst>
-                                    <p:set>
-                                      <p:cBhvr>
-                                        <p:cTn dur="1" fill="hold">
-                                          <p:stCondLst>
-                                            <p:cond delay="0"/>
-                                          </p:stCondLst>
-                                        </p:cTn>
-                                        <p:tgtEl>
-                                          <p:spTgt spid="294">
-                                            <p:txEl>
-                                              <p:pRg end="4" st="4"/>
-                                            </p:txEl>
-                                          </p:spTgt>
-                                        </p:tgtEl>
-                                        <p:attrNameLst>
-                                          <p:attrName>style.visibility</p:attrName>
-                                        </p:attrNameLst>
-                                      </p:cBhvr>
-                                      <p:to>
-                                        <p:strVal val="visible"/>
-                                      </p:to>
-                                    </p:set>
-                                  </p:childTnLst>
-                                </p:cTn>
-                              </p:par>
-                            </p:childTnLst>
-                          </p:cTn>
-                        </p:par>
-                      </p:childTnLst>
-                    </p:cTn>
-                  </p:par>
-                  <p:par>
-                    <p:cTn fill="hold">
-                      <p:stCondLst>
-                        <p:cond delay="indefinite"/>
-                      </p:stCondLst>
-                      <p:childTnLst>
-                        <p:par>
-                          <p:cTn fill="hold">
-                            <p:stCondLst>
-                              <p:cond delay="0"/>
-                            </p:stCondLst>
-                            <p:childTnLst>
-                              <p:par>
-                                <p:cTn fill="hold" nodeType="clickEffect" presetClass="entr" presetID="1" presetSubtype="0">
-                                  <p:stCondLst>
-                                    <p:cond delay="0"/>
-                                  </p:stCondLst>
-                                  <p:childTnLst>
-                                    <p:set>
-                                      <p:cBhvr>
-                                        <p:cTn dur="1" fill="hold">
-                                          <p:stCondLst>
-                                            <p:cond delay="0"/>
-                                          </p:stCondLst>
-                                        </p:cTn>
-                                        <p:tgtEl>
-                                          <p:spTgt spid="294">
-                                            <p:txEl>
-                                              <p:pRg end="5" st="5"/>
-                                            </p:txEl>
-                                          </p:spTgt>
-                                        </p:tgtEl>
-                                        <p:attrNameLst>
-                                          <p:attrName>style.visibility</p:attrName>
-                                        </p:attrNameLst>
-                                      </p:cBhvr>
-                                      <p:to>
-                                        <p:strVal val="visible"/>
-                                      </p:to>
-                                    </p:set>
-                                  </p:childTnLst>
-                                </p:cTn>
-                              </p:par>
-                            </p:childTnLst>
-                          </p:cTn>
-                        </p:par>
-                      </p:childTnLst>
-                    </p:cTn>
-                  </p:par>
-                  <p:par>
-                    <p:cTn fill="hold">
-                      <p:stCondLst>
-                        <p:cond delay="indefinite"/>
-                      </p:stCondLst>
-                      <p:childTnLst>
-                        <p:par>
-                          <p:cTn fill="hold">
-                            <p:stCondLst>
-                              <p:cond delay="0"/>
-                            </p:stCondLst>
-                            <p:childTnLst>
-                              <p:par>
-                                <p:cTn fill="hold" nodeType="clickEffect" presetClass="entr" presetID="1" presetSubtype="0">
-                                  <p:stCondLst>
-                                    <p:cond delay="0"/>
-                                  </p:stCondLst>
-                                  <p:childTnLst>
-                                    <p:set>
-                                      <p:cBhvr>
-                                        <p:cTn dur="1" fill="hold">
-                                          <p:stCondLst>
-                                            <p:cond delay="0"/>
-                                          </p:stCondLst>
-                                        </p:cTn>
-                                        <p:tgtEl>
-                                          <p:spTgt spid="294">
-                                            <p:txEl>
-                                              <p:pRg end="6" st="6"/>
-                                            </p:txEl>
-                                          </p:spTgt>
-                                        </p:tgtEl>
-                                        <p:attrNameLst>
-                                          <p:attrName>style.visibility</p:attrName>
-                                        </p:attrNameLst>
-                                      </p:cBhvr>
-                                      <p:to>
-                                        <p:strVal val="visible"/>
-                                      </p:to>
-                                    </p:set>
-                                  </p:childTnLst>
-                                </p:cTn>
-                              </p:par>
-                            </p:childTnLst>
-                          </p:cTn>
-                        </p:par>
-                      </p:childTnLst>
-                    </p:cTn>
-                  </p:par>
-                  <p:par>
-                    <p:cTn fill="hold">
-                      <p:stCondLst>
-                        <p:cond delay="indefinite"/>
-                      </p:stCondLst>
-                      <p:childTnLst>
-                        <p:par>
-                          <p:cTn fill="hold">
-                            <p:stCondLst>
-                              <p:cond delay="0"/>
-                            </p:stCondLst>
-                            <p:childTnLst>
-                              <p:par>
-                                <p:cTn fill="hold" nodeType="clickEffect" presetClass="entr" presetID="1" presetSubtype="0">
-                                  <p:stCondLst>
-                                    <p:cond delay="0"/>
-                                  </p:stCondLst>
-                                  <p:childTnLst>
-                                    <p:set>
-                                      <p:cBhvr>
-                                        <p:cTn dur="1" fill="hold">
-                                          <p:stCondLst>
-                                            <p:cond delay="0"/>
-                                          </p:stCondLst>
-                                        </p:cTn>
-                                        <p:tgtEl>
-                                          <p:spTgt spid="294">
-                                            <p:txEl>
-                                              <p:pRg end="7" st="7"/>
-                                            </p:txEl>
-                                          </p:spTgt>
-                                        </p:tgtEl>
-                                        <p:attrNameLst>
-                                          <p:attrName>style.visibility</p:attrName>
-                                        </p:attrNameLst>
-                                      </p:cBhvr>
-                                      <p:to>
-                                        <p:strVal val="visible"/>
-                                      </p:to>
-                                    </p:set>
-                                  </p:childTnLst>
-                                </p:cTn>
-                              </p:par>
-                            </p:childTnLst>
-                          </p:cTn>
-                        </p:par>
-                      </p:childTnLst>
-                    </p:cTn>
-                  </p:par>
-                  <p:par>
-                    <p:cTn fill="hold">
-                      <p:stCondLst>
-                        <p:cond delay="indefinite"/>
-                      </p:stCondLst>
-                      <p:childTnLst>
-                        <p:par>
-                          <p:cTn fill="hold">
-                            <p:stCondLst>
-                              <p:cond delay="0"/>
-                            </p:stCondLst>
-                            <p:childTnLst>
-                              <p:par>
-                                <p:cTn fill="hold" nodeType="clickEffect" presetClass="entr" presetID="1" presetSubtype="0">
-                                  <p:stCondLst>
-                                    <p:cond delay="0"/>
-                                  </p:stCondLst>
-                                  <p:childTnLst>
-                                    <p:set>
-                                      <p:cBhvr>
-                                        <p:cTn dur="1" fill="hold">
-                                          <p:stCondLst>
-                                            <p:cond delay="0"/>
-                                          </p:stCondLst>
-                                        </p:cTn>
-                                        <p:tgtEl>
-                                          <p:spTgt spid="294">
-                                            <p:txEl>
-                                              <p:pRg end="8" st="8"/>
-                                            </p:txEl>
-                                          </p:spTgt>
-                                        </p:tgtEl>
-                                        <p:attrNameLst>
-                                          <p:attrName>style.visibility</p:attrName>
-                                        </p:attrNameLst>
-                                      </p:cBhvr>
-                                      <p:to>
-                                        <p:strVal val="visible"/>
-                                      </p:to>
-                                    </p:set>
-                                  </p:childTnLst>
-                                </p:cTn>
-                              </p:par>
-                            </p:childTnLst>
-                          </p:cTn>
-                        </p:par>
-                      </p:childTnLst>
-                    </p:cTn>
-                  </p:par>
-                  <p:par>
-                    <p:cTn fill="hold">
-                      <p:stCondLst>
-                        <p:cond delay="indefinite"/>
-                      </p:stCondLst>
-                      <p:childTnLst>
-                        <p:par>
-                          <p:cTn fill="hold">
-                            <p:stCondLst>
-                              <p:cond delay="0"/>
-                            </p:stCondLst>
-                            <p:childTnLst>
-                              <p:par>
-                                <p:cTn fill="hold" nodeType="clickEffect" presetClass="entr" presetID="1" presetSubtype="0">
-                                  <p:stCondLst>
-                                    <p:cond delay="0"/>
-                                  </p:stCondLst>
-                                  <p:childTnLst>
-                                    <p:set>
-                                      <p:cBhvr>
-                                        <p:cTn dur="1" fill="hold">
-                                          <p:stCondLst>
-                                            <p:cond delay="0"/>
-                                          </p:stCondLst>
-                                        </p:cTn>
-                                        <p:tgtEl>
-                                          <p:spTgt spid="294">
-                                            <p:txEl>
-                                              <p:pRg end="9" st="9"/>
-                                            </p:txEl>
-                                          </p:spTgt>
-                                        </p:tgtEl>
-                                        <p:attrNameLst>
-                                          <p:attrName>style.visibility</p:attrName>
-                                        </p:attrNameLst>
-                                      </p:cBhvr>
-                                      <p:to>
-                                        <p:strVal val="visible"/>
-                                      </p:to>
-                                    </p:set>
-                                  </p:childTnLst>
-                                </p:cTn>
-                              </p:par>
-                            </p:childTnLst>
-                          </p:cTn>
-                        </p:par>
-                      </p:childTnLst>
-                    </p:cTn>
-                  </p:par>
-                  <p:par>
-                    <p:cTn fill="hold">
-                      <p:stCondLst>
-                        <p:cond delay="indefinite"/>
-                      </p:stCondLst>
-                      <p:childTnLst>
-                        <p:par>
-                          <p:cTn fill="hold">
-                            <p:stCondLst>
-                              <p:cond delay="0"/>
-                            </p:stCondLst>
-                            <p:childTnLst>
-                              <p:par>
-                                <p:cTn fill="hold" nodeType="clickEffect" presetClass="entr" presetID="1" presetSubtype="0">
-                                  <p:stCondLst>
-                                    <p:cond delay="0"/>
-                                  </p:stCondLst>
-                                  <p:childTnLst>
-                                    <p:set>
-                                      <p:cBhvr>
-                                        <p:cTn dur="1" fill="hold">
-                                          <p:stCondLst>
-                                            <p:cond delay="0"/>
-                                          </p:stCondLst>
-                                        </p:cTn>
-                                        <p:tgtEl>
-                                          <p:spTgt spid="294">
-                                            <p:txEl>
-                                              <p:pRg end="10" st="10"/>
-                                            </p:txEl>
-                                          </p:spTgt>
-                                        </p:tgtEl>
-                                        <p:attrNameLst>
-                                          <p:attrName>style.visibility</p:attrName>
-                                        </p:attrNameLst>
-                                      </p:cBhvr>
-                                      <p:to>
-                                        <p:strVal val="visible"/>
-                                      </p:to>
-                                    </p:set>
-                                  </p:childTnLst>
-                                </p:cTn>
-                              </p:par>
-                            </p:childTnLst>
-                          </p:cTn>
-                        </p:par>
-                      </p:childTnLst>
-                    </p:cTn>
-                  </p:par>
-                  <p:par>
-                    <p:cTn fill="hold">
-                      <p:stCondLst>
-                        <p:cond delay="indefinite"/>
-                      </p:stCondLst>
-                      <p:childTnLst>
-                        <p:par>
-                          <p:cTn fill="hold">
-                            <p:stCondLst>
-                              <p:cond delay="0"/>
-                            </p:stCondLst>
-                            <p:childTnLst>
-                              <p:par>
-                                <p:cTn fill="hold" nodeType="clickEffect" presetClass="entr" presetID="1" presetSubtype="0">
-                                  <p:stCondLst>
-                                    <p:cond delay="0"/>
-                                  </p:stCondLst>
-                                  <p:childTnLst>
-                                    <p:set>
-                                      <p:cBhvr>
-                                        <p:cTn dur="1" fill="hold">
-                                          <p:stCondLst>
-                                            <p:cond delay="0"/>
-                                          </p:stCondLst>
-                                        </p:cTn>
-                                        <p:tgtEl>
-                                          <p:spTgt spid="294">
-                                            <p:txEl>
-                                              <p:pRg end="11" st="11"/>
-                                            </p:txEl>
-                                          </p:spTgt>
-                                        </p:tgtEl>
-                                        <p:attrNameLst>
-                                          <p:attrName>style.visibility</p:attrName>
-                                        </p:attrNameLst>
-                                      </p:cBhvr>
-                                      <p:to>
-                                        <p:strVal val="visible"/>
-                                      </p:to>
-                                    </p:set>
-                                  </p:childTnLst>
-                                </p:cTn>
-                              </p:par>
-                            </p:childTnLst>
-                          </p:cTn>
-                        </p:par>
-                      </p:childTnLst>
-                    </p:cTn>
-                  </p:par>
-                  <p:par>
-                    <p:cTn fill="hold">
-                      <p:stCondLst>
-                        <p:cond delay="indefinite"/>
-                      </p:stCondLst>
-                      <p:childTnLst>
-                        <p:par>
-                          <p:cTn fill="hold">
-                            <p:stCondLst>
-                              <p:cond delay="0"/>
-                            </p:stCondLst>
-                            <p:childTnLst>
-                              <p:par>
-                                <p:cTn fill="hold" nodeType="clickEffect" presetClass="entr" presetID="1" presetSubtype="0">
-                                  <p:stCondLst>
-                                    <p:cond delay="0"/>
-                                  </p:stCondLst>
-                                  <p:childTnLst>
-                                    <p:set>
-                                      <p:cBhvr>
-                                        <p:cTn dur="1" fill="hold">
-                                          <p:stCondLst>
-                                            <p:cond delay="0"/>
-                                          </p:stCondLst>
-                                        </p:cTn>
-                                        <p:tgtEl>
-                                          <p:spTgt spid="294">
-                                            <p:txEl>
-                                              <p:pRg end="12" st="12"/>
-                                            </p:txEl>
-                                          </p:spTgt>
-                                        </p:tgtEl>
-                                        <p:attrNameLst>
-                                          <p:attrName>style.visibility</p:attrName>
-                                        </p:attrNameLst>
-                                      </p:cBhvr>
-                                      <p:to>
-                                        <p:strVal val="visible"/>
-                                      </p:to>
-                                    </p:set>
-                                  </p:childTnLst>
-                                </p:cTn>
-                              </p:par>
-                            </p:childTnLst>
-                          </p:cTn>
-                        </p:par>
-                      </p:childTnLst>
-                    </p:cTn>
-                  </p:par>
-                </p:childTnLst>
-              </p:cTn>
-              <p:prevCondLst>
-                <p:cond evt="onPrev">
-                  <p:tgtEl>
-                    <p:sldTgt/>
-                  </p:tgtEl>
-                </p:cond>
-              </p:prevCondLst>
-              <p:nextCondLst>
-                <p:cond evt="onNext">
-                  <p:tgtEl>
-                    <p:sldTgt/>
-                  </p:tgtEl>
-                </p:cond>
-              </p:nextCondLst>
-            </p:seq>
-          </p:childTnLst>
-        </p:cTn>
-      </p:par>
-    </p:tnLst>
-  </p:timing>
-</p:sld>
-</file>
-
-<file path=ppt/slides/slide3.xml><?xml version="1.0" encoding="utf-8"?>
-<p:sld xmlns:a="http://schemas.openxmlformats.org/drawingml/2006/main" xmlns:r="http://schemas.openxmlformats.org/officeDocument/2006/relationships" xmlns:mc="http://schemas.openxmlformats.org/markup-compatibility/2006" xmlns:mv="urn:schemas-microsoft-com:mac:vml" xmlns:p="http://schemas.openxmlformats.org/presentationml/2006/main" xmlns:c="http://schemas.openxmlformats.org/drawingml/2006/chart" xmlns:dgm="http://schemas.openxmlformats.org/drawingml/2006/diagram" xmlns:o="urn:schemas-microsoft-com:office:office" xmlns:v="urn:schemas-microsoft-com:vml" xmlns:pvml="urn:schemas-microsoft-com:office:powerpoint" xmlns:com="http://schemas.openxmlformats.org/drawingml/2006/compatibility" xmlns:p14="http://schemas.microsoft.com/office/powerpoint/2010/main" xmlns:p15="http://schemas.microsoft.com/office/powerpoint/2012/main" xmlns:ahyp="http://schemas.microsoft.com/office/drawing/2018/hyperlinkcolor">
-  <p:cSld>
-    <p:spTree>
-      <p:nvGrpSpPr>
-        <p:cNvPr id="44" name="Shape 44"/>
-        <p:cNvGrpSpPr/>
-        <p:nvPr/>
-      </p:nvGrpSpPr>
-      <p:grpSpPr>
-        <a:xfrm>
-          <a:off x="0" y="0"/>
-          <a:ext cx="0" cy="0"/>
-          <a:chOff x="0" y="0"/>
-          <a:chExt cx="0" cy="0"/>
-        </a:xfrm>
-      </p:grpSpPr>
-      <p:sp>
-        <p:nvSpPr>
-          <p:cNvPr id="45" name="Google Shape;45;p10"/>
-          <p:cNvSpPr txBox="1"/>
-          <p:nvPr>
-            <p:ph type="title"/>
-          </p:nvPr>
-        </p:nvSpPr>
-        <p:spPr>
-          <a:xfrm>
-            <a:off x="311700" y="195615"/>
-            <a:ext cx="8520600" cy="572700"/>
-          </a:xfrm>
-          <a:prstGeom prst="rect">
-            <a:avLst/>
-          </a:prstGeom>
-        </p:spPr>
-        <p:txBody>
-          <a:bodyPr anchorCtr="0" anchor="t" bIns="91425" lIns="91425" spcFirstLastPara="1" rIns="91425" wrap="square" tIns="91425">
-            <a:normAutofit fontScale="90000"/>
-          </a:bodyPr>
-          <a:lstStyle/>
-          <a:p>
-            <a:pPr indent="0" lvl="0" marL="0" rtl="0" algn="l">
-              <a:spcBef>
-                <a:spcPts val="0"/>
-              </a:spcBef>
-              <a:spcAft>
-                <a:spcPts val="0"/>
-              </a:spcAft>
-              <a:buNone/>
-            </a:pPr>
-            <a:r>
-              <a:rPr lang="en"/>
-              <a:t>Today’s Goal</a:t>
-            </a:r>
-            <a:endParaRPr/>
-          </a:p>
-        </p:txBody>
-      </p:sp>
-      <p:pic>
-        <p:nvPicPr>
-          <p:cNvPr id="46" name="Picture 46" descr="vampire-survivors.gif"/>
-          <p:cNvPicPr>
-            <a:picLocks noChangeAspect="1"/>
-          </p:cNvPicPr>
-          <p:nvPr/>
-        </p:nvPicPr>
-        <p:blipFill>
-          <a:blip r:embed="rId3"/>
-          <a:stretch>
-            <a:fillRect/>
-          </a:stretch>
-        </p:blipFill>
-        <p:spPr>
-          <a:xfrm>
-            <a:off x="1677203" y="1531275"/>
-            <a:ext cx="5789594" cy="3256647"/>
-          </a:xfrm>
-          <a:prstGeom prst="rect">
-            <a:avLst/>
-          </a:prstGeom>
-        </p:spPr>
-      </p:pic>
-    </p:spTree>
-  </p:cSld>
-  <p:clrMapOvr>
-    <a:masterClrMapping/>
-  </p:clrMapOvr>
-</p:sld>
-</file>
-
-<file path=ppt/slides/slide30.xml><?xml version="1.0" encoding="utf-8"?>
-<p:sld xmlns:a="http://schemas.openxmlformats.org/drawingml/2006/main" xmlns:r="http://schemas.openxmlformats.org/officeDocument/2006/relationships" xmlns:mc="http://schemas.openxmlformats.org/markup-compatibility/2006" xmlns:mv="urn:schemas-microsoft-com:mac:vml" xmlns:p="http://schemas.openxmlformats.org/presentationml/2006/main" xmlns:c="http://schemas.openxmlformats.org/drawingml/2006/chart" xmlns:dgm="http://schemas.openxmlformats.org/drawingml/2006/diagram" xmlns:o="urn:schemas-microsoft-com:office:office" xmlns:v="urn:schemas-microsoft-com:vml" xmlns:pvml="urn:schemas-microsoft-com:office:powerpoint" xmlns:com="http://schemas.openxmlformats.org/drawingml/2006/compatibility" xmlns:p14="http://schemas.microsoft.com/office/powerpoint/2010/main" xmlns:p15="http://schemas.microsoft.com/office/powerpoint/2012/main" xmlns:ahyp="http://schemas.microsoft.com/office/drawing/2018/hyperlinkcolor">
-  <p:cSld>
-    <p:spTree>
-      <p:nvGrpSpPr>
-        <p:cNvPr id="292" name="Shape 292"/>
-        <p:cNvGrpSpPr/>
-        <p:nvPr/>
-      </p:nvGrpSpPr>
-      <p:grpSpPr>
-        <a:xfrm>
-          <a:off x="0" y="0"/>
-          <a:ext cx="0" cy="0"/>
-          <a:chOff x="0" y="0"/>
-          <a:chExt cx="0" cy="0"/>
-        </a:xfrm>
-      </p:grpSpPr>
-      <p:sp>
-        <p:nvSpPr>
-          <p:cNvPr id="293" name="Google Shape;293;p45"/>
-          <p:cNvSpPr txBox="1"/>
-          <p:nvPr>
-            <p:ph type="title"/>
-          </p:nvPr>
-        </p:nvSpPr>
-        <p:spPr>
-          <a:xfrm>
-            <a:off x="311700" y="195615"/>
-            <a:ext cx="8520600" cy="572700"/>
-          </a:xfrm>
-          <a:prstGeom prst="rect">
-            <a:avLst/>
-          </a:prstGeom>
-        </p:spPr>
-        <p:txBody>
-          <a:bodyPr anchorCtr="0" anchor="t" bIns="91425" lIns="91425" spcFirstLastPara="1" rIns="91425" wrap="square" tIns="91425">
-            <a:normAutofit fontScale="90000"/>
-          </a:bodyPr>
-          <a:lstStyle/>
-          <a:p>
-            <a:pPr indent="0" lvl="0" marL="0" rtl="0" algn="l">
-              <a:spcBef>
-                <a:spcPts val="0"/>
-              </a:spcBef>
-              <a:spcAft>
-                <a:spcPts val="0"/>
-              </a:spcAft>
-              <a:buNone/>
-            </a:pPr>
-            <a:r>
-              <a:rPr lang="en">
-                <a:solidFill>
-                  <a:schemeClr val="accent5"/>
-                </a:solidFill>
-              </a:rPr>
-              <a:t>Exercise: Stretch</a:t>
-            </a:r>
-            <a:endParaRPr>
-              <a:solidFill>
-                <a:schemeClr val="accent5"/>
-              </a:solidFill>
-            </a:endParaRPr>
-          </a:p>
-        </p:txBody>
-      </p:sp>
-      <p:sp>
-        <p:nvSpPr>
-          <p:cNvPr id="294" name="Google Shape;294;p45"/>
-          <p:cNvSpPr txBox="1"/>
-          <p:nvPr>
-            <p:ph idx="1" type="body"/>
-          </p:nvPr>
-        </p:nvSpPr>
-        <p:spPr>
-          <a:xfrm>
-            <a:off x="311700" y="885950"/>
-            <a:ext cx="8520600" cy="4023300"/>
-          </a:xfrm>
-          <a:prstGeom prst="rect">
-            <a:avLst/>
-          </a:prstGeom>
-        </p:spPr>
-        <p:txBody>
-          <a:bodyPr anchorCtr="0" anchor="t" bIns="91425" lIns="91425" spcFirstLastPara="1" rIns="91425" wrap="square" tIns="91425">
-            <a:normAutofit/>
-          </a:bodyPr>
-          <a:lstStyle/>
-          <a:p>
-            <a:pPr indent="-330200" lvl="0" marL="457200" rtl="0" algn="l">
-              <a:spcBef>
-                <a:spcPts val="0"/>
-              </a:spcBef>
-              <a:spcAft>
-                <a:spcPts val="0"/>
-              </a:spcAft>
-              <a:buSzPts val="1600"/>
-              <a:buChar char="●"/>
-            </a:pPr>
-            <a:r>
-              <a:rPr lang="en"/>
-              <a:t>Separate on several cores: Parallel.For over rows of cells</a:t>
-            </a:r>
-            <a:endParaRPr/>
-          </a:p>
-          <a:p>
-            <a:pPr indent="-330200" lvl="0" marL="457200" rtl="0" algn="l">
-              <a:spcBef>
-                <a:spcPts val="0"/>
-              </a:spcBef>
-              <a:spcAft>
-                <a:spcPts val="0"/>
-              </a:spcAft>
-              <a:buSzPts val="1600"/>
-              <a:buChar char="●"/>
-            </a:pPr>
-            <a:r>
-              <a:rPr lang="en"/>
-              <a:t>What goes wrong when two threads push the same enemy?</a:t>
-            </a:r>
-            <a:endParaRPr/>
-          </a:p>
-          <a:p>
-            <a:pPr indent="-330200" lvl="0" marL="457200" rtl="0" algn="l">
-              <a:spcBef>
-                <a:spcPts val="0"/>
-              </a:spcBef>
-              <a:spcAft>
-                <a:spcPts val="0"/>
-              </a:spcAft>
-              <a:buSzPts val="1600"/>
-              <a:buChar char="●"/>
-            </a:pPr>
-            <a:r>
-              <a:rPr lang="en"/>
-              <a:t>How could you avoid it?</a:t>
-            </a:r>
-            <a:endParaRPr/>
-          </a:p>
-        </p:txBody>
-      </p:sp>
-    </p:spTree>
-  </p:cSld>
-  <p:clrMapOvr>
-    <a:masterClrMapping/>
-  </p:clrMapOvr>
-  <p:timing>
-    <p:tnLst>
-      <p:par>
-        <p:cTn dur="indefinite" nodeType="tmRoot" restart="never">
-          <p:childTnLst>
-            <p:seq concurrent="1" nextAc="seek">
-              <p:cTn dur="indefinite" id="2" nodeType="mainSeq">
-                <p:childTnLst>
-                  <p:par>
-                    <p:cTn fill="hold">
-                      <p:stCondLst>
-                        <p:cond delay="indefinite"/>
-                      </p:stCondLst>
-                      <p:childTnLst>
-                        <p:par>
-                          <p:cTn fill="hold">
-                            <p:stCondLst>
-                              <p:cond delay="0"/>
-                            </p:stCondLst>
-                            <p:childTnLst>
-                              <p:par>
-                                <p:cTn fill="hold" nodeType="clickEffect" presetClass="entr" presetID="1" presetSubtype="0">
-                                  <p:stCondLst>
-                                    <p:cond delay="0"/>
-                                  </p:stCondLst>
-                                  <p:childTnLst>
-                                    <p:set>
-                                      <p:cBhvr>
-                                        <p:cTn dur="1" fill="hold">
-                                          <p:stCondLst>
-                                            <p:cond delay="0"/>
-                                          </p:stCondLst>
-                                        </p:cTn>
-                                        <p:tgtEl>
-                                          <p:spTgt spid="294">
-                                            <p:txEl>
-                                              <p:pRg end="0" st="0"/>
-                                            </p:txEl>
-                                          </p:spTgt>
-                                        </p:tgtEl>
-                                        <p:attrNameLst>
-                                          <p:attrName>style.visibility</p:attrName>
-                                        </p:attrNameLst>
-                                      </p:cBhvr>
-                                      <p:to>
-                                        <p:strVal val="visible"/>
-                                      </p:to>
-                                    </p:set>
-                                  </p:childTnLst>
-                                </p:cTn>
-                              </p:par>
-                            </p:childTnLst>
-                          </p:cTn>
-                        </p:par>
-                      </p:childTnLst>
-                    </p:cTn>
-                  </p:par>
-                  <p:par>
-                    <p:cTn fill="hold">
-                      <p:stCondLst>
-                        <p:cond delay="indefinite"/>
-                      </p:stCondLst>
-                      <p:childTnLst>
-                        <p:par>
-                          <p:cTn fill="hold">
-                            <p:stCondLst>
-                              <p:cond delay="0"/>
-                            </p:stCondLst>
-                            <p:childTnLst>
-                              <p:par>
-                                <p:cTn fill="hold" nodeType="clickEffect" presetClass="entr" presetID="1" presetSubtype="0">
-                                  <p:stCondLst>
-                                    <p:cond delay="0"/>
-                                  </p:stCondLst>
-                                  <p:childTnLst>
-                                    <p:set>
-                                      <p:cBhvr>
-                                        <p:cTn dur="1" fill="hold">
-                                          <p:stCondLst>
-                                            <p:cond delay="0"/>
-                                          </p:stCondLst>
-                                        </p:cTn>
-                                        <p:tgtEl>
-                                          <p:spTgt spid="294">
-                                            <p:txEl>
-                                              <p:pRg end="1" st="1"/>
-                                            </p:txEl>
-                                          </p:spTgt>
-                                        </p:tgtEl>
-                                        <p:attrNameLst>
-                                          <p:attrName>style.visibility</p:attrName>
-                                        </p:attrNameLst>
-                                      </p:cBhvr>
-                                      <p:to>
-                                        <p:strVal val="visible"/>
-                                      </p:to>
-                                    </p:set>
-                                  </p:childTnLst>
-                                </p:cTn>
-                              </p:par>
-                            </p:childTnLst>
-                          </p:cTn>
-                        </p:par>
-                      </p:childTnLst>
-                    </p:cTn>
-                  </p:par>
-                  <p:par>
-                    <p:cTn fill="hold">
-                      <p:stCondLst>
-                        <p:cond delay="indefinite"/>
-                      </p:stCondLst>
-                      <p:childTnLst>
-                        <p:par>
-                          <p:cTn fill="hold">
-                            <p:stCondLst>
-                              <p:cond delay="0"/>
-                            </p:stCondLst>
-                            <p:childTnLst>
-                              <p:par>
-                                <p:cTn fill="hold" nodeType="clickEffect" presetClass="entr" presetID="1" presetSubtype="0">
-                                  <p:stCondLst>
-                                    <p:cond delay="0"/>
-                                  </p:stCondLst>
-                                  <p:childTnLst>
-                                    <p:set>
-                                      <p:cBhvr>
-                                        <p:cTn dur="1" fill="hold">
-                                          <p:stCondLst>
-                                            <p:cond delay="0"/>
-                                          </p:stCondLst>
-                                        </p:cTn>
-                                        <p:tgtEl>
-                                          <p:spTgt spid="294">
-                                            <p:txEl>
-                                              <p:pRg end="2" st="2"/>
-                                            </p:txEl>
-                                          </p:spTgt>
-                                        </p:tgtEl>
-                                        <p:attrNameLst>
-                                          <p:attrName>style.visibility</p:attrName>
-                                        </p:attrNameLst>
-                                      </p:cBhvr>
-                                      <p:to>
-                                        <p:strVal val="visible"/>
-                                      </p:to>
-                                    </p:set>
-                                  </p:childTnLst>
-                                </p:cTn>
-                              </p:par>
-                            </p:childTnLst>
-                          </p:cTn>
-                        </p:par>
-                      </p:childTnLst>
-                    </p:cTn>
-                  </p:par>
-                  <p:par>
-                    <p:cTn fill="hold">
-                      <p:stCondLst>
-                        <p:cond delay="indefinite"/>
-                      </p:stCondLst>
-                      <p:childTnLst>
-                        <p:par>
-                          <p:cTn fill="hold">
-                            <p:stCondLst>
-                              <p:cond delay="0"/>
-                            </p:stCondLst>
-                            <p:childTnLst>
-                              <p:par>
-                                <p:cTn fill="hold" nodeType="clickEffect" presetClass="entr" presetID="1" presetSubtype="0">
-                                  <p:stCondLst>
-                                    <p:cond delay="0"/>
-                                  </p:stCondLst>
-                                  <p:childTnLst>
-                                    <p:set>
-                                      <p:cBhvr>
-                                        <p:cTn dur="1" fill="hold">
-                                          <p:stCondLst>
-                                            <p:cond delay="0"/>
-                                          </p:stCondLst>
-                                        </p:cTn>
-                                        <p:tgtEl>
-                                          <p:spTgt spid="294">
-                                            <p:txEl>
-                                              <p:pRg end="3" st="3"/>
-                                            </p:txEl>
-                                          </p:spTgt>
-                                        </p:tgtEl>
-                                        <p:attrNameLst>
-                                          <p:attrName>style.visibility</p:attrName>
-                                        </p:attrNameLst>
-                                      </p:cBhvr>
-                                      <p:to>
-                                        <p:strVal val="visible"/>
-                                      </p:to>
-                                    </p:set>
-                                  </p:childTnLst>
-                                </p:cTn>
-                              </p:par>
-                            </p:childTnLst>
-                          </p:cTn>
-                        </p:par>
-                      </p:childTnLst>
-                    </p:cTn>
-                  </p:par>
-                  <p:par>
-                    <p:cTn fill="hold">
-                      <p:stCondLst>
-                        <p:cond delay="indefinite"/>
-                      </p:stCondLst>
-                      <p:childTnLst>
-                        <p:par>
-                          <p:cTn fill="hold">
-                            <p:stCondLst>
-                              <p:cond delay="0"/>
-                            </p:stCondLst>
-                            <p:childTnLst>
-                              <p:par>
-                                <p:cTn fill="hold" nodeType="clickEffect" presetClass="entr" presetID="1" presetSubtype="0">
-                                  <p:stCondLst>
-                                    <p:cond delay="0"/>
-                                  </p:stCondLst>
-                                  <p:childTnLst>
-                                    <p:set>
-                                      <p:cBhvr>
-                                        <p:cTn dur="1" fill="hold">
-                                          <p:stCondLst>
-                                            <p:cond delay="0"/>
-                                          </p:stCondLst>
-                                        </p:cTn>
-                                        <p:tgtEl>
-                                          <p:spTgt spid="294">
-                                            <p:txEl>
-                                              <p:pRg end="4" st="4"/>
-                                            </p:txEl>
-                                          </p:spTgt>
-                                        </p:tgtEl>
-                                        <p:attrNameLst>
-                                          <p:attrName>style.visibility</p:attrName>
-                                        </p:attrNameLst>
-                                      </p:cBhvr>
-                                      <p:to>
-                                        <p:strVal val="visible"/>
-                                      </p:to>
-                                    </p:set>
-                                  </p:childTnLst>
-                                </p:cTn>
-                              </p:par>
-                            </p:childTnLst>
-                          </p:cTn>
-                        </p:par>
-                      </p:childTnLst>
-                    </p:cTn>
-                  </p:par>
-                  <p:par>
-                    <p:cTn fill="hold">
-                      <p:stCondLst>
-                        <p:cond delay="indefinite"/>
-                      </p:stCondLst>
-                      <p:childTnLst>
-                        <p:par>
-                          <p:cTn fill="hold">
-                            <p:stCondLst>
-                              <p:cond delay="0"/>
-                            </p:stCondLst>
-                            <p:childTnLst>
-                              <p:par>
-                                <p:cTn fill="hold" nodeType="clickEffect" presetClass="entr" presetID="1" presetSubtype="0">
-                                  <p:stCondLst>
-                                    <p:cond delay="0"/>
-                                  </p:stCondLst>
-                                  <p:childTnLst>
-                                    <p:set>
-                                      <p:cBhvr>
-                                        <p:cTn dur="1" fill="hold">
-                                          <p:stCondLst>
-                                            <p:cond delay="0"/>
-                                          </p:stCondLst>
-                                        </p:cTn>
-                                        <p:tgtEl>
-                                          <p:spTgt spid="294">
-                                            <p:txEl>
-                                              <p:pRg end="5" st="5"/>
-                                            </p:txEl>
-                                          </p:spTgt>
-                                        </p:tgtEl>
-                                        <p:attrNameLst>
-                                          <p:attrName>style.visibility</p:attrName>
-                                        </p:attrNameLst>
-                                      </p:cBhvr>
-                                      <p:to>
-                                        <p:strVal val="visible"/>
-                                      </p:to>
-                                    </p:set>
-                                  </p:childTnLst>
-                                </p:cTn>
-                              </p:par>
-                            </p:childTnLst>
-                          </p:cTn>
-                        </p:par>
-                      </p:childTnLst>
-                    </p:cTn>
-                  </p:par>
-                  <p:par>
-                    <p:cTn fill="hold">
-                      <p:stCondLst>
-                        <p:cond delay="indefinite"/>
-                      </p:stCondLst>
-                      <p:childTnLst>
-                        <p:par>
-                          <p:cTn fill="hold">
-                            <p:stCondLst>
-                              <p:cond delay="0"/>
-                            </p:stCondLst>
-                            <p:childTnLst>
-                              <p:par>
-                                <p:cTn fill="hold" nodeType="clickEffect" presetClass="entr" presetID="1" presetSubtype="0">
-                                  <p:stCondLst>
-                                    <p:cond delay="0"/>
-                                  </p:stCondLst>
-                                  <p:childTnLst>
-                                    <p:set>
-                                      <p:cBhvr>
-                                        <p:cTn dur="1" fill="hold">
-                                          <p:stCondLst>
-                                            <p:cond delay="0"/>
-                                          </p:stCondLst>
-                                        </p:cTn>
-                                        <p:tgtEl>
-                                          <p:spTgt spid="294">
-                                            <p:txEl>
-                                              <p:pRg end="6" st="6"/>
-                                            </p:txEl>
-                                          </p:spTgt>
-                                        </p:tgtEl>
-                                        <p:attrNameLst>
-                                          <p:attrName>style.visibility</p:attrName>
-                                        </p:attrNameLst>
-                                      </p:cBhvr>
-                                      <p:to>
-                                        <p:strVal val="visible"/>
-                                      </p:to>
-                                    </p:set>
-                                  </p:childTnLst>
-                                </p:cTn>
-                              </p:par>
-                            </p:childTnLst>
-                          </p:cTn>
-                        </p:par>
-                      </p:childTnLst>
-                    </p:cTn>
-                  </p:par>
-                  <p:par>
-                    <p:cTn fill="hold">
-                      <p:stCondLst>
-                        <p:cond delay="indefinite"/>
-                      </p:stCondLst>
-                      <p:childTnLst>
-                        <p:par>
-                          <p:cTn fill="hold">
-                            <p:stCondLst>
-                              <p:cond delay="0"/>
-                            </p:stCondLst>
-                            <p:childTnLst>
-                              <p:par>
-                                <p:cTn fill="hold" nodeType="clickEffect" presetClass="entr" presetID="1" presetSubtype="0">
-                                  <p:stCondLst>
-                                    <p:cond delay="0"/>
-                                  </p:stCondLst>
-                                  <p:childTnLst>
-                                    <p:set>
-                                      <p:cBhvr>
-                                        <p:cTn dur="1" fill="hold">
-                                          <p:stCondLst>
-                                            <p:cond delay="0"/>
-                                          </p:stCondLst>
-                                        </p:cTn>
-                                        <p:tgtEl>
-                                          <p:spTgt spid="294">
-                                            <p:txEl>
-                                              <p:pRg end="7" st="7"/>
-                                            </p:txEl>
-                                          </p:spTgt>
-                                        </p:tgtEl>
-                                        <p:attrNameLst>
-                                          <p:attrName>style.visibility</p:attrName>
-                                        </p:attrNameLst>
-                                      </p:cBhvr>
-                                      <p:to>
-                                        <p:strVal val="visible"/>
-                                      </p:to>
-                                    </p:set>
-                                  </p:childTnLst>
-                                </p:cTn>
-                              </p:par>
-                            </p:childTnLst>
-                          </p:cTn>
-                        </p:par>
-                      </p:childTnLst>
-                    </p:cTn>
-                  </p:par>
-                  <p:par>
-                    <p:cTn fill="hold">
-                      <p:stCondLst>
-                        <p:cond delay="indefinite"/>
-                      </p:stCondLst>
-                      <p:childTnLst>
-                        <p:par>
-                          <p:cTn fill="hold">
-                            <p:stCondLst>
-                              <p:cond delay="0"/>
-                            </p:stCondLst>
-                            <p:childTnLst>
-                              <p:par>
-                                <p:cTn fill="hold" nodeType="clickEffect" presetClass="entr" presetID="1" presetSubtype="0">
-                                  <p:stCondLst>
-                                    <p:cond delay="0"/>
-                                  </p:stCondLst>
-                                  <p:childTnLst>
-                                    <p:set>
-                                      <p:cBhvr>
-                                        <p:cTn dur="1" fill="hold">
-                                          <p:stCondLst>
-                                            <p:cond delay="0"/>
-                                          </p:stCondLst>
-                                        </p:cTn>
-                                        <p:tgtEl>
-                                          <p:spTgt spid="294">
-                                            <p:txEl>
-                                              <p:pRg end="8" st="8"/>
-                                            </p:txEl>
-                                          </p:spTgt>
-                                        </p:tgtEl>
-                                        <p:attrNameLst>
-                                          <p:attrName>style.visibility</p:attrName>
-                                        </p:attrNameLst>
-                                      </p:cBhvr>
-                                      <p:to>
-                                        <p:strVal val="visible"/>
-                                      </p:to>
-                                    </p:set>
-                                  </p:childTnLst>
-                                </p:cTn>
-                              </p:par>
-                            </p:childTnLst>
-                          </p:cTn>
-                        </p:par>
-                      </p:childTnLst>
-                    </p:cTn>
-                  </p:par>
-                  <p:par>
-                    <p:cTn fill="hold">
-                      <p:stCondLst>
-                        <p:cond delay="indefinite"/>
-                      </p:stCondLst>
-                      <p:childTnLst>
-                        <p:par>
-                          <p:cTn fill="hold">
-                            <p:stCondLst>
-                              <p:cond delay="0"/>
-                            </p:stCondLst>
-                            <p:childTnLst>
-                              <p:par>
-                                <p:cTn fill="hold" nodeType="clickEffect" presetClass="entr" presetID="1" presetSubtype="0">
-                                  <p:stCondLst>
-                                    <p:cond delay="0"/>
-                                  </p:stCondLst>
-                                  <p:childTnLst>
-                                    <p:set>
-                                      <p:cBhvr>
-                                        <p:cTn dur="1" fill="hold">
-                                          <p:stCondLst>
-                                            <p:cond delay="0"/>
-                                          </p:stCondLst>
-                                        </p:cTn>
-                                        <p:tgtEl>
-                                          <p:spTgt spid="294">
-                                            <p:txEl>
-                                              <p:pRg end="9" st="9"/>
-                                            </p:txEl>
-                                          </p:spTgt>
-                                        </p:tgtEl>
-                                        <p:attrNameLst>
-                                          <p:attrName>style.visibility</p:attrName>
-                                        </p:attrNameLst>
-                                      </p:cBhvr>
-                                      <p:to>
-                                        <p:strVal val="visible"/>
-                                      </p:to>
-                                    </p:set>
-                                  </p:childTnLst>
-                                </p:cTn>
-                              </p:par>
-                            </p:childTnLst>
-                          </p:cTn>
-                        </p:par>
-                      </p:childTnLst>
-                    </p:cTn>
-                  </p:par>
-                  <p:par>
-                    <p:cTn fill="hold">
-                      <p:stCondLst>
-                        <p:cond delay="indefinite"/>
-                      </p:stCondLst>
-                      <p:childTnLst>
-                        <p:par>
-                          <p:cTn fill="hold">
-                            <p:stCondLst>
-                              <p:cond delay="0"/>
-                            </p:stCondLst>
-                            <p:childTnLst>
-                              <p:par>
-                                <p:cTn fill="hold" nodeType="clickEffect" presetClass="entr" presetID="1" presetSubtype="0">
-                                  <p:stCondLst>
-                                    <p:cond delay="0"/>
-                                  </p:stCondLst>
-                                  <p:childTnLst>
-                                    <p:set>
-                                      <p:cBhvr>
-                                        <p:cTn dur="1" fill="hold">
-                                          <p:stCondLst>
-                                            <p:cond delay="0"/>
-                                          </p:stCondLst>
-                                        </p:cTn>
-                                        <p:tgtEl>
-                                          <p:spTgt spid="294">
-                                            <p:txEl>
-                                              <p:pRg end="10" st="10"/>
-                                            </p:txEl>
-                                          </p:spTgt>
-                                        </p:tgtEl>
-                                        <p:attrNameLst>
-                                          <p:attrName>style.visibility</p:attrName>
-                                        </p:attrNameLst>
-                                      </p:cBhvr>
-                                      <p:to>
-                                        <p:strVal val="visible"/>
-                                      </p:to>
-                                    </p:set>
-                                  </p:childTnLst>
-                                </p:cTn>
-                              </p:par>
-                            </p:childTnLst>
-                          </p:cTn>
-                        </p:par>
-                      </p:childTnLst>
-                    </p:cTn>
-                  </p:par>
-                  <p:par>
-                    <p:cTn fill="hold">
-                      <p:stCondLst>
-                        <p:cond delay="indefinite"/>
-                      </p:stCondLst>
-                      <p:childTnLst>
-                        <p:par>
-                          <p:cTn fill="hold">
-                            <p:stCondLst>
-                              <p:cond delay="0"/>
-                            </p:stCondLst>
-                            <p:childTnLst>
-                              <p:par>
-                                <p:cTn fill="hold" nodeType="clickEffect" presetClass="entr" presetID="1" presetSubtype="0">
-                                  <p:stCondLst>
-                                    <p:cond delay="0"/>
-                                  </p:stCondLst>
-                                  <p:childTnLst>
-                                    <p:set>
-                                      <p:cBhvr>
-                                        <p:cTn dur="1" fill="hold">
-                                          <p:stCondLst>
-                                            <p:cond delay="0"/>
-                                          </p:stCondLst>
-                                        </p:cTn>
-                                        <p:tgtEl>
-                                          <p:spTgt spid="294">
-                                            <p:txEl>
-                                              <p:pRg end="11" st="11"/>
-                                            </p:txEl>
-                                          </p:spTgt>
-                                        </p:tgtEl>
-                                        <p:attrNameLst>
-                                          <p:attrName>style.visibility</p:attrName>
-                                        </p:attrNameLst>
-                                      </p:cBhvr>
-                                      <p:to>
-                                        <p:strVal val="visible"/>
-                                      </p:to>
-                                    </p:set>
-                                  </p:childTnLst>
-                                </p:cTn>
-                              </p:par>
-                            </p:childTnLst>
-                          </p:cTn>
-                        </p:par>
-                      </p:childTnLst>
-                    </p:cTn>
-                  </p:par>
-                  <p:par>
-                    <p:cTn fill="hold">
-                      <p:stCondLst>
-                        <p:cond delay="indefinite"/>
-                      </p:stCondLst>
-                      <p:childTnLst>
-                        <p:par>
-                          <p:cTn fill="hold">
-                            <p:stCondLst>
-                              <p:cond delay="0"/>
-                            </p:stCondLst>
-                            <p:childTnLst>
-                              <p:par>
-                                <p:cTn fill="hold" nodeType="clickEffect" presetClass="entr" presetID="1" presetSubtype="0">
-                                  <p:stCondLst>
-                                    <p:cond delay="0"/>
-                                  </p:stCondLst>
-                                  <p:childTnLst>
-                                    <p:set>
-                                      <p:cBhvr>
-                                        <p:cTn dur="1" fill="hold">
-                                          <p:stCondLst>
-                                            <p:cond delay="0"/>
-                                          </p:stCondLst>
-                                        </p:cTn>
-                                        <p:tgtEl>
-                                          <p:spTgt spid="294">
-                                            <p:txEl>
-                                              <p:pRg end="12" st="12"/>
-                                            </p:txEl>
-                                          </p:spTgt>
-                                        </p:tgtEl>
-                                        <p:attrNameLst>
-                                          <p:attrName>style.visibility</p:attrName>
-                                        </p:attrNameLst>
-                                      </p:cBhvr>
-                                      <p:to>
-                                        <p:strVal val="visible"/>
-                                      </p:to>
-                                    </p:set>
-                                  </p:childTnLst>
-                                </p:cTn>
-                              </p:par>
-                            </p:childTnLst>
-                          </p:cTn>
-                        </p:par>
-                      </p:childTnLst>
-                    </p:cTn>
-                  </p:par>
-                </p:childTnLst>
-              </p:cTn>
-              <p:prevCondLst>
-                <p:cond evt="onPrev">
-                  <p:tgtEl>
-                    <p:sldTgt/>
-                  </p:tgtEl>
-                </p:cond>
-              </p:prevCondLst>
-              <p:nextCondLst>
-                <p:cond evt="onNext">
-                  <p:tgtEl>
-                    <p:sldTgt/>
-                  </p:tgtEl>
-                </p:cond>
-              </p:nextCondLst>
-            </p:seq>
-          </p:childTnLst>
-        </p:cTn>
-      </p:par>
-    </p:tnLst>
-  </p:timing>
-</p:sld>
-</file>
-
-<file path=ppt/slides/slide31.xml><?xml version="1.0" encoding="utf-8"?>
-<p:sld xmlns:a="http://schemas.openxmlformats.org/drawingml/2006/main" xmlns:p="http://schemas.openxmlformats.org/presentationml/2006/main" xmlns:r="http://schemas.openxmlformats.org/officeDocument/2006/relationships">
-  <p:cSld>
-    <p:spTree>
-      <p:nvGrpSpPr>
-        <p:cNvPr id="1" name=""/>
-        <p:cNvGrpSpPr/>
-        <p:nvPr/>
-      </p:nvGrpSpPr>
-      <p:grpSpPr/>
-      <p:sp>
-        <p:nvSpPr>
-          <p:cNvPr id="2" name="Title 1"/>
-          <p:cNvSpPr>
-            <a:spLocks noGrp="1"/>
-          </p:cNvSpPr>
-          <p:nvPr>
-            <p:ph type="title"/>
-          </p:nvPr>
-        </p:nvSpPr>
-        <p:spPr/>
-        <p:txBody>
-          <a:bodyPr/>
-          <a:lstStyle/>
-          <a:p>
-            <a:pPr indent="0" lvl="0" marL="0" rtl="0" algn="l">
-              <a:spcBef>
-                <a:spcPts val="0"/>
-              </a:spcBef>
-              <a:spcAft>
-                <a:spcPts val="0"/>
-              </a:spcAft>
-              <a:buNone/>
-            </a:pPr>
-            <a:r>
-              <a:rPr lang="en"/>
-              <a:t>Check Yourself</a:t>
-            </a:r>
-            <a:endParaRPr/>
-          </a:p>
-        </p:txBody>
-      </p:sp>
-      <p:sp>
-        <p:nvSpPr>
-          <p:cNvPr id="3" name="Text Placeholder 2"/>
-          <p:cNvSpPr>
-            <a:spLocks noGrp="1"/>
-          </p:cNvSpPr>
-          <p:nvPr>
-            <p:ph type="body" idx="1"/>
-          </p:nvPr>
-        </p:nvSpPr>
-        <p:spPr>
-          <a:xfrm>
-            <a:off x="311700" y="885950"/>
-            <a:ext cx="8520600" cy="1719072"/>
-          </a:xfrm>
-        </p:spPr>
-        <p:txBody>
-          <a:bodyPr/>
-          <a:lstStyle/>
-          <a:p>
-            <a:pPr indent="-330200" lvl="0" marL="457200" rtl="0" algn="l">
-              <a:spcBef>
-                <a:spcPts val="0"/>
-              </a:spcBef>
-              <a:spcAft>
-                <a:spcPts val="0"/>
-              </a:spcAft>
-              <a:buSzPts val="1600"/>
-              <a:buChar char="●"/>
-            </a:pPr>
-            <a:r>
-              <a:rPr lang="en"/>
-              <a:t>Why profile before optimizing?</a:t>
-            </a:r>
-            <a:endParaRPr/>
-          </a:p>
-          <a:p>
-            <a:pPr indent="-330200" lvl="0" marL="457200" rtl="0" algn="l">
-              <a:spcBef>
-                <a:spcPts val="0"/>
-              </a:spcBef>
-              <a:spcAft>
-                <a:spcPts val="0"/>
-              </a:spcAft>
-              <a:buSzPts val="1600"/>
-              <a:buChar char="●"/>
-            </a:pPr>
-            <a:r>
-              <a:rPr lang="en"/>
-              <a:t>How does a uniform grid make separation cheaper?</a:t>
-            </a:r>
-            <a:endParaRPr/>
-          </a:p>
-          <a:p>
-            <a:pPr indent="-330200" lvl="0" marL="457200" rtl="0" algn="l">
-              <a:spcBef>
-                <a:spcPts val="0"/>
-              </a:spcBef>
-              <a:spcAft>
-                <a:spcPts val="0"/>
-              </a:spcAft>
-              <a:buSzPts val="1600"/>
-              <a:buChar char="●"/>
-            </a:pPr>
-            <a:r>
-              <a:rPr lang="en"/>
-              <a:t>What is the difference between an array of objects and a struct of arrays?</a:t>
-            </a:r>
-            <a:endParaRPr/>
-          </a:p>
-          <a:p>
-            <a:pPr indent="-330200" lvl="0" marL="457200" rtl="0" algn="l">
-              <a:spcBef>
-                <a:spcPts val="0"/>
-              </a:spcBef>
-              <a:spcAft>
-                <a:spcPts val="0"/>
-              </a:spcAft>
-              <a:buSzPts val="1600"/>
-              <a:buChar char="●"/>
-            </a:pPr>
-            <a:r>
-              <a:rPr lang="en"/>
-              <a:t>What do you give up with data-oriented design?</a:t>
-            </a:r>
-            <a:endParaRPr/>
-          </a:p>
-        </p:txBody>
-      </p:sp>
-      <p:sp>
-        <p:nvSpPr>
-          <p:cNvPr id="4" name="TextBox 3"/>
-          <p:cNvSpPr txBox="1"/>
-          <p:nvPr/>
-        </p:nvSpPr>
-        <p:spPr>
-          <a:xfrm>
-            <a:off x="457200" y="3182112"/>
-            <a:ext cx="8229600" cy="457200"/>
-          </a:xfrm>
-          <a:prstGeom prst="rect">
-            <a:avLst/>
-          </a:prstGeom>
-          <a:noFill/>
-        </p:spPr>
-        <p:txBody>
-          <a:bodyPr wrap="square">
-            <a:spAutoFit/>
-          </a:bodyPr>
-          <a:lstStyle/>
-          <a:p>
-            <a:pPr algn="ctr"/>
-            <a:r>
-              <a:rPr sz="1400" b="0" i="0">
-                <a:solidFill>
-                  <a:srgbClr val="9AA3AB"/>
-                </a:solidFill>
-              </a:rPr>
-              <a:t>The answers, and more questions, are on the course site.</a:t>
-            </a:r>
           </a:p>
         </p:txBody>
       </p:sp>
@@ -16555,7 +15465,7 @@
                   <a:schemeClr val="accent5"/>
                 </a:solidFill>
               </a:rPr>
-              <a:t>Apply It to Your Project</a:t>
+              <a:t>Exercises</a:t>
             </a:r>
             <a:endParaRPr>
               <a:solidFill>
@@ -16600,7 +15510,7 @@
             </a:pPr>
             <a:r>
               <a:rPr lang="en"/>
-              <a:t>Profile your game with many more entities. Where does the time go?</a:t>
+              <a:t>Start from Survivors3 or Survivors4, in Release</a:t>
             </a:r>
             <a:endParaRPr/>
           </a:p>
@@ -16617,7 +15527,24 @@
             </a:pPr>
             <a:r>
               <a:rPr lang="en"/>
-              <a:t>Does anything check every pair, or search every entity?</a:t>
+              <a:t>Tune the grid: cells half and twice as big. Measure</a:t>
+            </a:r>
+            <a:endParaRPr/>
+          </a:p>
+          <a:p>
+            <a:pPr indent="-317500" lvl="1" marL="914400" rtl="0" algn="l">
+              <a:spcBef>
+                <a:spcPts val="0"/>
+              </a:spcBef>
+              <a:spcAft>
+                <a:spcPts val="0"/>
+              </a:spcAft>
+              <a:buSzPts val="1400"/>
+              <a:buChar char="○"/>
+            </a:pPr>
+            <a:r>
+              <a:rPr lang="en"/>
+              <a:t>Why can’t cells be smaller than the biggest overlap?</a:t>
             </a:r>
             <a:endParaRPr/>
           </a:p>
@@ -16634,7 +15561,7 @@
             </a:pPr>
             <a:r>
               <a:rPr lang="en"/>
-              <a:t>Does your game allocate every frame? Where?</a:t>
+              <a:t>Bolts as arrays: was it worth it?</a:t>
             </a:r>
             <a:endParaRPr/>
           </a:p>
@@ -16651,7 +15578,24 @@
             </a:pPr>
             <a:r>
               <a:rPr lang="en"/>
-              <a:t>Is there anything there are thousands of?</a:t>
+              <a:t>With 20,000 enemies: what’s the next bottleneck?</a:t>
+            </a:r>
+            <a:endParaRPr/>
+          </a:p>
+          <a:p>
+            <a:pPr indent="-330200" lvl="0" marL="457200" rtl="0" algn="l">
+              <a:spcBef>
+                <a:spcPts val="0"/>
+              </a:spcBef>
+              <a:spcAft>
+                <a:spcPts val="0"/>
+              </a:spcAft>
+              <a:buSzPts val="1600"/>
+              <a:buChar char="●"/>
+            </a:pPr>
+            <a:r>
+              <a:rPr lang="en"/>
+              <a:t>A new enemy kind: what changes?</a:t>
             </a:r>
             <a:endParaRPr/>
           </a:p>
@@ -17333,76 +16277,817 @@
 </file>
 
 <file path=ppt/slides/slide33.xml><?xml version="1.0" encoding="utf-8"?>
-<p:sld xmlns:a="http://schemas.openxmlformats.org/drawingml/2006/main" xmlns:p="http://schemas.openxmlformats.org/presentationml/2006/main" xmlns:r="http://schemas.openxmlformats.org/officeDocument/2006/relationships">
+<p:sld xmlns:a="http://schemas.openxmlformats.org/drawingml/2006/main" xmlns:r="http://schemas.openxmlformats.org/officeDocument/2006/relationships" xmlns:mc="http://schemas.openxmlformats.org/markup-compatibility/2006" xmlns:mv="urn:schemas-microsoft-com:mac:vml" xmlns:p="http://schemas.openxmlformats.org/presentationml/2006/main" xmlns:c="http://schemas.openxmlformats.org/drawingml/2006/chart" xmlns:dgm="http://schemas.openxmlformats.org/drawingml/2006/diagram" xmlns:o="urn:schemas-microsoft-com:office:office" xmlns:v="urn:schemas-microsoft-com:vml" xmlns:pvml="urn:schemas-microsoft-com:office:powerpoint" xmlns:com="http://schemas.openxmlformats.org/drawingml/2006/compatibility" xmlns:p14="http://schemas.microsoft.com/office/powerpoint/2010/main" xmlns:p15="http://schemas.microsoft.com/office/powerpoint/2012/main" xmlns:ahyp="http://schemas.microsoft.com/office/drawing/2018/hyperlinkcolor">
   <p:cSld>
     <p:spTree>
       <p:nvGrpSpPr>
-        <p:cNvPr id="1" name=""/>
+        <p:cNvPr id="292" name="Shape 292"/>
         <p:cNvGrpSpPr/>
         <p:nvPr/>
       </p:nvGrpSpPr>
-      <p:grpSpPr/>
-      <p:sp>
-        <p:nvSpPr>
-          <p:cNvPr id="2" name="Title 1"/>
-          <p:cNvSpPr>
-            <a:spLocks noGrp="1"/>
-          </p:cNvSpPr>
+      <p:grpSpPr>
+        <a:xfrm>
+          <a:off x="0" y="0"/>
+          <a:ext cx="0" cy="0"/>
+          <a:chOff x="0" y="0"/>
+          <a:chExt cx="0" cy="0"/>
+        </a:xfrm>
+      </p:grpSpPr>
+      <p:sp>
+        <p:nvSpPr>
+          <p:cNvPr id="293" name="Google Shape;293;p45"/>
+          <p:cNvSpPr txBox="1"/>
           <p:nvPr>
             <p:ph type="title"/>
           </p:nvPr>
         </p:nvSpPr>
-        <p:spPr/>
-        <p:txBody>
-          <a:bodyPr/>
-          <a:lstStyle/>
-          <a:p>
-            <a:pPr indent="0" lvl="0" marL="0" rtl="0" algn="l">
-              <a:spcBef>
-                <a:spcPts val="0"/>
-              </a:spcBef>
-              <a:spcAft>
-                <a:spcPts val="0"/>
-              </a:spcAft>
-              <a:buNone/>
-            </a:pPr>
-            <a:r>
-              <a:rPr lang="en"/>
-              <a:t>A Counting Sort</a:t>
-            </a:r>
-            <a:endParaRPr/>
-          </a:p>
-        </p:txBody>
-      </p:sp>
-      <p:pic>
-        <p:nvPicPr>
-          <p:cNvPr id="3" name="Picture 2" descr="counting-sort.png"/>
-          <p:cNvPicPr>
-            <a:picLocks noChangeAspect="1"/>
-          </p:cNvPicPr>
-          <p:nvPr/>
-        </p:nvPicPr>
-        <p:blipFill>
-          <a:blip r:embed="rId2"/>
-          <a:stretch>
-            <a:fillRect/>
-          </a:stretch>
-        </p:blipFill>
         <p:spPr>
           <a:xfrm>
-            <a:off x="320039" y="1051560"/>
-            <a:ext cx="8503920" cy="3779520"/>
+            <a:off x="311700" y="195615"/>
+            <a:ext cx="8520600" cy="572700"/>
           </a:xfrm>
           <a:prstGeom prst="rect">
             <a:avLst/>
           </a:prstGeom>
         </p:spPr>
-      </p:pic>
+        <p:txBody>
+          <a:bodyPr anchorCtr="0" anchor="t" bIns="91425" lIns="91425" spcFirstLastPara="1" rIns="91425" wrap="square" tIns="91425">
+            <a:normAutofit fontScale="90000"/>
+          </a:bodyPr>
+          <a:lstStyle/>
+          <a:p>
+            <a:pPr indent="0" lvl="0" marL="0" rtl="0" algn="l">
+              <a:spcBef>
+                <a:spcPts val="0"/>
+              </a:spcBef>
+              <a:spcAft>
+                <a:spcPts val="0"/>
+              </a:spcAft>
+              <a:buNone/>
+            </a:pPr>
+            <a:r>
+              <a:rPr lang="en">
+                <a:solidFill>
+                  <a:schemeClr val="accent5"/>
+                </a:solidFill>
+              </a:rPr>
+              <a:t>Exercise: Stretch</a:t>
+            </a:r>
+            <a:endParaRPr>
+              <a:solidFill>
+                <a:schemeClr val="accent5"/>
+              </a:solidFill>
+            </a:endParaRPr>
+          </a:p>
+        </p:txBody>
+      </p:sp>
+      <p:sp>
+        <p:nvSpPr>
+          <p:cNvPr id="294" name="Google Shape;294;p45"/>
+          <p:cNvSpPr txBox="1"/>
+          <p:nvPr>
+            <p:ph idx="1" type="body"/>
+          </p:nvPr>
+        </p:nvSpPr>
+        <p:spPr>
+          <a:xfrm>
+            <a:off x="311700" y="885950"/>
+            <a:ext cx="8520600" cy="4023300"/>
+          </a:xfrm>
+          <a:prstGeom prst="rect">
+            <a:avLst/>
+          </a:prstGeom>
+        </p:spPr>
+        <p:txBody>
+          <a:bodyPr anchorCtr="0" anchor="t" bIns="91425" lIns="91425" spcFirstLastPara="1" rIns="91425" wrap="square" tIns="91425">
+            <a:normAutofit/>
+          </a:bodyPr>
+          <a:lstStyle/>
+          <a:p>
+            <a:pPr indent="-330200" lvl="0" marL="457200" rtl="0" algn="l">
+              <a:spcBef>
+                <a:spcPts val="0"/>
+              </a:spcBef>
+              <a:spcAft>
+                <a:spcPts val="0"/>
+              </a:spcAft>
+              <a:buSzPts val="1600"/>
+              <a:buChar char="●"/>
+            </a:pPr>
+            <a:r>
+              <a:rPr lang="en"/>
+              <a:t>Separate on several cores: Parallel.For over rows of cells</a:t>
+            </a:r>
+            <a:endParaRPr/>
+          </a:p>
+          <a:p>
+            <a:pPr indent="-330200" lvl="0" marL="457200" rtl="0" algn="l">
+              <a:spcBef>
+                <a:spcPts val="0"/>
+              </a:spcBef>
+              <a:spcAft>
+                <a:spcPts val="0"/>
+              </a:spcAft>
+              <a:buSzPts val="1600"/>
+              <a:buChar char="●"/>
+            </a:pPr>
+            <a:r>
+              <a:rPr lang="en"/>
+              <a:t>What goes wrong when two threads push the same enemy?</a:t>
+            </a:r>
+            <a:endParaRPr/>
+          </a:p>
+          <a:p>
+            <a:pPr indent="-330200" lvl="0" marL="457200" rtl="0" algn="l">
+              <a:spcBef>
+                <a:spcPts val="0"/>
+              </a:spcBef>
+              <a:spcAft>
+                <a:spcPts val="0"/>
+              </a:spcAft>
+              <a:buSzPts val="1600"/>
+              <a:buChar char="●"/>
+            </a:pPr>
+            <a:r>
+              <a:rPr lang="en"/>
+              <a:t>How could you avoid it?</a:t>
+            </a:r>
+            <a:endParaRPr/>
+          </a:p>
+        </p:txBody>
+      </p:sp>
     </p:spTree>
   </p:cSld>
   <p:clrMapOvr>
     <a:masterClrMapping/>
   </p:clrMapOvr>
+  <p:timing>
+    <p:tnLst>
+      <p:par>
+        <p:cTn dur="indefinite" nodeType="tmRoot" restart="never">
+          <p:childTnLst>
+            <p:seq concurrent="1" nextAc="seek">
+              <p:cTn dur="indefinite" id="2" nodeType="mainSeq">
+                <p:childTnLst>
+                  <p:par>
+                    <p:cTn fill="hold">
+                      <p:stCondLst>
+                        <p:cond delay="indefinite"/>
+                      </p:stCondLst>
+                      <p:childTnLst>
+                        <p:par>
+                          <p:cTn fill="hold">
+                            <p:stCondLst>
+                              <p:cond delay="0"/>
+                            </p:stCondLst>
+                            <p:childTnLst>
+                              <p:par>
+                                <p:cTn fill="hold" nodeType="clickEffect" presetClass="entr" presetID="1" presetSubtype="0">
+                                  <p:stCondLst>
+                                    <p:cond delay="0"/>
+                                  </p:stCondLst>
+                                  <p:childTnLst>
+                                    <p:set>
+                                      <p:cBhvr>
+                                        <p:cTn dur="1" fill="hold">
+                                          <p:stCondLst>
+                                            <p:cond delay="0"/>
+                                          </p:stCondLst>
+                                        </p:cTn>
+                                        <p:tgtEl>
+                                          <p:spTgt spid="294">
+                                            <p:txEl>
+                                              <p:pRg end="0" st="0"/>
+                                            </p:txEl>
+                                          </p:spTgt>
+                                        </p:tgtEl>
+                                        <p:attrNameLst>
+                                          <p:attrName>style.visibility</p:attrName>
+                                        </p:attrNameLst>
+                                      </p:cBhvr>
+                                      <p:to>
+                                        <p:strVal val="visible"/>
+                                      </p:to>
+                                    </p:set>
+                                  </p:childTnLst>
+                                </p:cTn>
+                              </p:par>
+                            </p:childTnLst>
+                          </p:cTn>
+                        </p:par>
+                      </p:childTnLst>
+                    </p:cTn>
+                  </p:par>
+                  <p:par>
+                    <p:cTn fill="hold">
+                      <p:stCondLst>
+                        <p:cond delay="indefinite"/>
+                      </p:stCondLst>
+                      <p:childTnLst>
+                        <p:par>
+                          <p:cTn fill="hold">
+                            <p:stCondLst>
+                              <p:cond delay="0"/>
+                            </p:stCondLst>
+                            <p:childTnLst>
+                              <p:par>
+                                <p:cTn fill="hold" nodeType="clickEffect" presetClass="entr" presetID="1" presetSubtype="0">
+                                  <p:stCondLst>
+                                    <p:cond delay="0"/>
+                                  </p:stCondLst>
+                                  <p:childTnLst>
+                                    <p:set>
+                                      <p:cBhvr>
+                                        <p:cTn dur="1" fill="hold">
+                                          <p:stCondLst>
+                                            <p:cond delay="0"/>
+                                          </p:stCondLst>
+                                        </p:cTn>
+                                        <p:tgtEl>
+                                          <p:spTgt spid="294">
+                                            <p:txEl>
+                                              <p:pRg end="1" st="1"/>
+                                            </p:txEl>
+                                          </p:spTgt>
+                                        </p:tgtEl>
+                                        <p:attrNameLst>
+                                          <p:attrName>style.visibility</p:attrName>
+                                        </p:attrNameLst>
+                                      </p:cBhvr>
+                                      <p:to>
+                                        <p:strVal val="visible"/>
+                                      </p:to>
+                                    </p:set>
+                                  </p:childTnLst>
+                                </p:cTn>
+                              </p:par>
+                            </p:childTnLst>
+                          </p:cTn>
+                        </p:par>
+                      </p:childTnLst>
+                    </p:cTn>
+                  </p:par>
+                  <p:par>
+                    <p:cTn fill="hold">
+                      <p:stCondLst>
+                        <p:cond delay="indefinite"/>
+                      </p:stCondLst>
+                      <p:childTnLst>
+                        <p:par>
+                          <p:cTn fill="hold">
+                            <p:stCondLst>
+                              <p:cond delay="0"/>
+                            </p:stCondLst>
+                            <p:childTnLst>
+                              <p:par>
+                                <p:cTn fill="hold" nodeType="clickEffect" presetClass="entr" presetID="1" presetSubtype="0">
+                                  <p:stCondLst>
+                                    <p:cond delay="0"/>
+                                  </p:stCondLst>
+                                  <p:childTnLst>
+                                    <p:set>
+                                      <p:cBhvr>
+                                        <p:cTn dur="1" fill="hold">
+                                          <p:stCondLst>
+                                            <p:cond delay="0"/>
+                                          </p:stCondLst>
+                                        </p:cTn>
+                                        <p:tgtEl>
+                                          <p:spTgt spid="294">
+                                            <p:txEl>
+                                              <p:pRg end="2" st="2"/>
+                                            </p:txEl>
+                                          </p:spTgt>
+                                        </p:tgtEl>
+                                        <p:attrNameLst>
+                                          <p:attrName>style.visibility</p:attrName>
+                                        </p:attrNameLst>
+                                      </p:cBhvr>
+                                      <p:to>
+                                        <p:strVal val="visible"/>
+                                      </p:to>
+                                    </p:set>
+                                  </p:childTnLst>
+                                </p:cTn>
+                              </p:par>
+                            </p:childTnLst>
+                          </p:cTn>
+                        </p:par>
+                      </p:childTnLst>
+                    </p:cTn>
+                  </p:par>
+                  <p:par>
+                    <p:cTn fill="hold">
+                      <p:stCondLst>
+                        <p:cond delay="indefinite"/>
+                      </p:stCondLst>
+                      <p:childTnLst>
+                        <p:par>
+                          <p:cTn fill="hold">
+                            <p:stCondLst>
+                              <p:cond delay="0"/>
+                            </p:stCondLst>
+                            <p:childTnLst>
+                              <p:par>
+                                <p:cTn fill="hold" nodeType="clickEffect" presetClass="entr" presetID="1" presetSubtype="0">
+                                  <p:stCondLst>
+                                    <p:cond delay="0"/>
+                                  </p:stCondLst>
+                                  <p:childTnLst>
+                                    <p:set>
+                                      <p:cBhvr>
+                                        <p:cTn dur="1" fill="hold">
+                                          <p:stCondLst>
+                                            <p:cond delay="0"/>
+                                          </p:stCondLst>
+                                        </p:cTn>
+                                        <p:tgtEl>
+                                          <p:spTgt spid="294">
+                                            <p:txEl>
+                                              <p:pRg end="3" st="3"/>
+                                            </p:txEl>
+                                          </p:spTgt>
+                                        </p:tgtEl>
+                                        <p:attrNameLst>
+                                          <p:attrName>style.visibility</p:attrName>
+                                        </p:attrNameLst>
+                                      </p:cBhvr>
+                                      <p:to>
+                                        <p:strVal val="visible"/>
+                                      </p:to>
+                                    </p:set>
+                                  </p:childTnLst>
+                                </p:cTn>
+                              </p:par>
+                            </p:childTnLst>
+                          </p:cTn>
+                        </p:par>
+                      </p:childTnLst>
+                    </p:cTn>
+                  </p:par>
+                  <p:par>
+                    <p:cTn fill="hold">
+                      <p:stCondLst>
+                        <p:cond delay="indefinite"/>
+                      </p:stCondLst>
+                      <p:childTnLst>
+                        <p:par>
+                          <p:cTn fill="hold">
+                            <p:stCondLst>
+                              <p:cond delay="0"/>
+                            </p:stCondLst>
+                            <p:childTnLst>
+                              <p:par>
+                                <p:cTn fill="hold" nodeType="clickEffect" presetClass="entr" presetID="1" presetSubtype="0">
+                                  <p:stCondLst>
+                                    <p:cond delay="0"/>
+                                  </p:stCondLst>
+                                  <p:childTnLst>
+                                    <p:set>
+                                      <p:cBhvr>
+                                        <p:cTn dur="1" fill="hold">
+                                          <p:stCondLst>
+                                            <p:cond delay="0"/>
+                                          </p:stCondLst>
+                                        </p:cTn>
+                                        <p:tgtEl>
+                                          <p:spTgt spid="294">
+                                            <p:txEl>
+                                              <p:pRg end="4" st="4"/>
+                                            </p:txEl>
+                                          </p:spTgt>
+                                        </p:tgtEl>
+                                        <p:attrNameLst>
+                                          <p:attrName>style.visibility</p:attrName>
+                                        </p:attrNameLst>
+                                      </p:cBhvr>
+                                      <p:to>
+                                        <p:strVal val="visible"/>
+                                      </p:to>
+                                    </p:set>
+                                  </p:childTnLst>
+                                </p:cTn>
+                              </p:par>
+                            </p:childTnLst>
+                          </p:cTn>
+                        </p:par>
+                      </p:childTnLst>
+                    </p:cTn>
+                  </p:par>
+                  <p:par>
+                    <p:cTn fill="hold">
+                      <p:stCondLst>
+                        <p:cond delay="indefinite"/>
+                      </p:stCondLst>
+                      <p:childTnLst>
+                        <p:par>
+                          <p:cTn fill="hold">
+                            <p:stCondLst>
+                              <p:cond delay="0"/>
+                            </p:stCondLst>
+                            <p:childTnLst>
+                              <p:par>
+                                <p:cTn fill="hold" nodeType="clickEffect" presetClass="entr" presetID="1" presetSubtype="0">
+                                  <p:stCondLst>
+                                    <p:cond delay="0"/>
+                                  </p:stCondLst>
+                                  <p:childTnLst>
+                                    <p:set>
+                                      <p:cBhvr>
+                                        <p:cTn dur="1" fill="hold">
+                                          <p:stCondLst>
+                                            <p:cond delay="0"/>
+                                          </p:stCondLst>
+                                        </p:cTn>
+                                        <p:tgtEl>
+                                          <p:spTgt spid="294">
+                                            <p:txEl>
+                                              <p:pRg end="5" st="5"/>
+                                            </p:txEl>
+                                          </p:spTgt>
+                                        </p:tgtEl>
+                                        <p:attrNameLst>
+                                          <p:attrName>style.visibility</p:attrName>
+                                        </p:attrNameLst>
+                                      </p:cBhvr>
+                                      <p:to>
+                                        <p:strVal val="visible"/>
+                                      </p:to>
+                                    </p:set>
+                                  </p:childTnLst>
+                                </p:cTn>
+                              </p:par>
+                            </p:childTnLst>
+                          </p:cTn>
+                        </p:par>
+                      </p:childTnLst>
+                    </p:cTn>
+                  </p:par>
+                  <p:par>
+                    <p:cTn fill="hold">
+                      <p:stCondLst>
+                        <p:cond delay="indefinite"/>
+                      </p:stCondLst>
+                      <p:childTnLst>
+                        <p:par>
+                          <p:cTn fill="hold">
+                            <p:stCondLst>
+                              <p:cond delay="0"/>
+                            </p:stCondLst>
+                            <p:childTnLst>
+                              <p:par>
+                                <p:cTn fill="hold" nodeType="clickEffect" presetClass="entr" presetID="1" presetSubtype="0">
+                                  <p:stCondLst>
+                                    <p:cond delay="0"/>
+                                  </p:stCondLst>
+                                  <p:childTnLst>
+                                    <p:set>
+                                      <p:cBhvr>
+                                        <p:cTn dur="1" fill="hold">
+                                          <p:stCondLst>
+                                            <p:cond delay="0"/>
+                                          </p:stCondLst>
+                                        </p:cTn>
+                                        <p:tgtEl>
+                                          <p:spTgt spid="294">
+                                            <p:txEl>
+                                              <p:pRg end="6" st="6"/>
+                                            </p:txEl>
+                                          </p:spTgt>
+                                        </p:tgtEl>
+                                        <p:attrNameLst>
+                                          <p:attrName>style.visibility</p:attrName>
+                                        </p:attrNameLst>
+                                      </p:cBhvr>
+                                      <p:to>
+                                        <p:strVal val="visible"/>
+                                      </p:to>
+                                    </p:set>
+                                  </p:childTnLst>
+                                </p:cTn>
+                              </p:par>
+                            </p:childTnLst>
+                          </p:cTn>
+                        </p:par>
+                      </p:childTnLst>
+                    </p:cTn>
+                  </p:par>
+                  <p:par>
+                    <p:cTn fill="hold">
+                      <p:stCondLst>
+                        <p:cond delay="indefinite"/>
+                      </p:stCondLst>
+                      <p:childTnLst>
+                        <p:par>
+                          <p:cTn fill="hold">
+                            <p:stCondLst>
+                              <p:cond delay="0"/>
+                            </p:stCondLst>
+                            <p:childTnLst>
+                              <p:par>
+                                <p:cTn fill="hold" nodeType="clickEffect" presetClass="entr" presetID="1" presetSubtype="0">
+                                  <p:stCondLst>
+                                    <p:cond delay="0"/>
+                                  </p:stCondLst>
+                                  <p:childTnLst>
+                                    <p:set>
+                                      <p:cBhvr>
+                                        <p:cTn dur="1" fill="hold">
+                                          <p:stCondLst>
+                                            <p:cond delay="0"/>
+                                          </p:stCondLst>
+                                        </p:cTn>
+                                        <p:tgtEl>
+                                          <p:spTgt spid="294">
+                                            <p:txEl>
+                                              <p:pRg end="7" st="7"/>
+                                            </p:txEl>
+                                          </p:spTgt>
+                                        </p:tgtEl>
+                                        <p:attrNameLst>
+                                          <p:attrName>style.visibility</p:attrName>
+                                        </p:attrNameLst>
+                                      </p:cBhvr>
+                                      <p:to>
+                                        <p:strVal val="visible"/>
+                                      </p:to>
+                                    </p:set>
+                                  </p:childTnLst>
+                                </p:cTn>
+                              </p:par>
+                            </p:childTnLst>
+                          </p:cTn>
+                        </p:par>
+                      </p:childTnLst>
+                    </p:cTn>
+                  </p:par>
+                  <p:par>
+                    <p:cTn fill="hold">
+                      <p:stCondLst>
+                        <p:cond delay="indefinite"/>
+                      </p:stCondLst>
+                      <p:childTnLst>
+                        <p:par>
+                          <p:cTn fill="hold">
+                            <p:stCondLst>
+                              <p:cond delay="0"/>
+                            </p:stCondLst>
+                            <p:childTnLst>
+                              <p:par>
+                                <p:cTn fill="hold" nodeType="clickEffect" presetClass="entr" presetID="1" presetSubtype="0">
+                                  <p:stCondLst>
+                                    <p:cond delay="0"/>
+                                  </p:stCondLst>
+                                  <p:childTnLst>
+                                    <p:set>
+                                      <p:cBhvr>
+                                        <p:cTn dur="1" fill="hold">
+                                          <p:stCondLst>
+                                            <p:cond delay="0"/>
+                                          </p:stCondLst>
+                                        </p:cTn>
+                                        <p:tgtEl>
+                                          <p:spTgt spid="294">
+                                            <p:txEl>
+                                              <p:pRg end="8" st="8"/>
+                                            </p:txEl>
+                                          </p:spTgt>
+                                        </p:tgtEl>
+                                        <p:attrNameLst>
+                                          <p:attrName>style.visibility</p:attrName>
+                                        </p:attrNameLst>
+                                      </p:cBhvr>
+                                      <p:to>
+                                        <p:strVal val="visible"/>
+                                      </p:to>
+                                    </p:set>
+                                  </p:childTnLst>
+                                </p:cTn>
+                              </p:par>
+                            </p:childTnLst>
+                          </p:cTn>
+                        </p:par>
+                      </p:childTnLst>
+                    </p:cTn>
+                  </p:par>
+                  <p:par>
+                    <p:cTn fill="hold">
+                      <p:stCondLst>
+                        <p:cond delay="indefinite"/>
+                      </p:stCondLst>
+                      <p:childTnLst>
+                        <p:par>
+                          <p:cTn fill="hold">
+                            <p:stCondLst>
+                              <p:cond delay="0"/>
+                            </p:stCondLst>
+                            <p:childTnLst>
+                              <p:par>
+                                <p:cTn fill="hold" nodeType="clickEffect" presetClass="entr" presetID="1" presetSubtype="0">
+                                  <p:stCondLst>
+                                    <p:cond delay="0"/>
+                                  </p:stCondLst>
+                                  <p:childTnLst>
+                                    <p:set>
+                                      <p:cBhvr>
+                                        <p:cTn dur="1" fill="hold">
+                                          <p:stCondLst>
+                                            <p:cond delay="0"/>
+                                          </p:stCondLst>
+                                        </p:cTn>
+                                        <p:tgtEl>
+                                          <p:spTgt spid="294">
+                                            <p:txEl>
+                                              <p:pRg end="9" st="9"/>
+                                            </p:txEl>
+                                          </p:spTgt>
+                                        </p:tgtEl>
+                                        <p:attrNameLst>
+                                          <p:attrName>style.visibility</p:attrName>
+                                        </p:attrNameLst>
+                                      </p:cBhvr>
+                                      <p:to>
+                                        <p:strVal val="visible"/>
+                                      </p:to>
+                                    </p:set>
+                                  </p:childTnLst>
+                                </p:cTn>
+                              </p:par>
+                            </p:childTnLst>
+                          </p:cTn>
+                        </p:par>
+                      </p:childTnLst>
+                    </p:cTn>
+                  </p:par>
+                  <p:par>
+                    <p:cTn fill="hold">
+                      <p:stCondLst>
+                        <p:cond delay="indefinite"/>
+                      </p:stCondLst>
+                      <p:childTnLst>
+                        <p:par>
+                          <p:cTn fill="hold">
+                            <p:stCondLst>
+                              <p:cond delay="0"/>
+                            </p:stCondLst>
+                            <p:childTnLst>
+                              <p:par>
+                                <p:cTn fill="hold" nodeType="clickEffect" presetClass="entr" presetID="1" presetSubtype="0">
+                                  <p:stCondLst>
+                                    <p:cond delay="0"/>
+                                  </p:stCondLst>
+                                  <p:childTnLst>
+                                    <p:set>
+                                      <p:cBhvr>
+                                        <p:cTn dur="1" fill="hold">
+                                          <p:stCondLst>
+                                            <p:cond delay="0"/>
+                                          </p:stCondLst>
+                                        </p:cTn>
+                                        <p:tgtEl>
+                                          <p:spTgt spid="294">
+                                            <p:txEl>
+                                              <p:pRg end="10" st="10"/>
+                                            </p:txEl>
+                                          </p:spTgt>
+                                        </p:tgtEl>
+                                        <p:attrNameLst>
+                                          <p:attrName>style.visibility</p:attrName>
+                                        </p:attrNameLst>
+                                      </p:cBhvr>
+                                      <p:to>
+                                        <p:strVal val="visible"/>
+                                      </p:to>
+                                    </p:set>
+                                  </p:childTnLst>
+                                </p:cTn>
+                              </p:par>
+                            </p:childTnLst>
+                          </p:cTn>
+                        </p:par>
+                      </p:childTnLst>
+                    </p:cTn>
+                  </p:par>
+                  <p:par>
+                    <p:cTn fill="hold">
+                      <p:stCondLst>
+                        <p:cond delay="indefinite"/>
+                      </p:stCondLst>
+                      <p:childTnLst>
+                        <p:par>
+                          <p:cTn fill="hold">
+                            <p:stCondLst>
+                              <p:cond delay="0"/>
+                            </p:stCondLst>
+                            <p:childTnLst>
+                              <p:par>
+                                <p:cTn fill="hold" nodeType="clickEffect" presetClass="entr" presetID="1" presetSubtype="0">
+                                  <p:stCondLst>
+                                    <p:cond delay="0"/>
+                                  </p:stCondLst>
+                                  <p:childTnLst>
+                                    <p:set>
+                                      <p:cBhvr>
+                                        <p:cTn dur="1" fill="hold">
+                                          <p:stCondLst>
+                                            <p:cond delay="0"/>
+                                          </p:stCondLst>
+                                        </p:cTn>
+                                        <p:tgtEl>
+                                          <p:spTgt spid="294">
+                                            <p:txEl>
+                                              <p:pRg end="11" st="11"/>
+                                            </p:txEl>
+                                          </p:spTgt>
+                                        </p:tgtEl>
+                                        <p:attrNameLst>
+                                          <p:attrName>style.visibility</p:attrName>
+                                        </p:attrNameLst>
+                                      </p:cBhvr>
+                                      <p:to>
+                                        <p:strVal val="visible"/>
+                                      </p:to>
+                                    </p:set>
+                                  </p:childTnLst>
+                                </p:cTn>
+                              </p:par>
+                            </p:childTnLst>
+                          </p:cTn>
+                        </p:par>
+                      </p:childTnLst>
+                    </p:cTn>
+                  </p:par>
+                  <p:par>
+                    <p:cTn fill="hold">
+                      <p:stCondLst>
+                        <p:cond delay="indefinite"/>
+                      </p:stCondLst>
+                      <p:childTnLst>
+                        <p:par>
+                          <p:cTn fill="hold">
+                            <p:stCondLst>
+                              <p:cond delay="0"/>
+                            </p:stCondLst>
+                            <p:childTnLst>
+                              <p:par>
+                                <p:cTn fill="hold" nodeType="clickEffect" presetClass="entr" presetID="1" presetSubtype="0">
+                                  <p:stCondLst>
+                                    <p:cond delay="0"/>
+                                  </p:stCondLst>
+                                  <p:childTnLst>
+                                    <p:set>
+                                      <p:cBhvr>
+                                        <p:cTn dur="1" fill="hold">
+                                          <p:stCondLst>
+                                            <p:cond delay="0"/>
+                                          </p:stCondLst>
+                                        </p:cTn>
+                                        <p:tgtEl>
+                                          <p:spTgt spid="294">
+                                            <p:txEl>
+                                              <p:pRg end="12" st="12"/>
+                                            </p:txEl>
+                                          </p:spTgt>
+                                        </p:tgtEl>
+                                        <p:attrNameLst>
+                                          <p:attrName>style.visibility</p:attrName>
+                                        </p:attrNameLst>
+                                      </p:cBhvr>
+                                      <p:to>
+                                        <p:strVal val="visible"/>
+                                      </p:to>
+                                    </p:set>
+                                  </p:childTnLst>
+                                </p:cTn>
+                              </p:par>
+                            </p:childTnLst>
+                          </p:cTn>
+                        </p:par>
+                      </p:childTnLst>
+                    </p:cTn>
+                  </p:par>
+                </p:childTnLst>
+              </p:cTn>
+              <p:prevCondLst>
+                <p:cond evt="onPrev">
+                  <p:tgtEl>
+                    <p:sldTgt/>
+                  </p:tgtEl>
+                </p:cond>
+              </p:prevCondLst>
+              <p:nextCondLst>
+                <p:cond evt="onNext">
+                  <p:tgtEl>
+                    <p:sldTgt/>
+                  </p:tgtEl>
+                </p:cond>
+              </p:nextCondLst>
+            </p:seq>
+          </p:childTnLst>
+        </p:cTn>
+      </p:par>
+    </p:tnLst>
+  </p:timing>
 </p:sld>
 </file>
 
@@ -17442,36 +17127,135 @@
             </a:pPr>
             <a:r>
               <a:rPr lang="en"/>
-              <a:t>A Uniform Grid</a:t>
+              <a:t>Check Yourself</a:t>
             </a:r>
             <a:endParaRPr/>
           </a:p>
         </p:txBody>
       </p:sp>
-      <p:pic>
-        <p:nvPicPr>
-          <p:cNvPr id="3" name="Picture 2" descr="grid.png"/>
-          <p:cNvPicPr>
-            <a:picLocks noChangeAspect="1"/>
-          </p:cNvPicPr>
-          <p:nvPr/>
-        </p:nvPicPr>
-        <p:blipFill>
-          <a:blip r:embed="rId2"/>
-          <a:stretch>
-            <a:fillRect/>
-          </a:stretch>
-        </p:blipFill>
+      <p:sp>
+        <p:nvSpPr>
+          <p:cNvPr id="3" name="Text Placeholder 2"/>
+          <p:cNvSpPr>
+            <a:spLocks noGrp="1"/>
+          </p:cNvSpPr>
+          <p:nvPr>
+            <p:ph type="body" idx="1"/>
+          </p:nvPr>
+        </p:nvSpPr>
         <p:spPr>
           <a:xfrm>
-            <a:off x="480713" y="1051560"/>
-            <a:ext cx="8182573" cy="3977640"/>
+            <a:off x="311700" y="885950"/>
+            <a:ext cx="8520600" cy="1719072"/>
+          </a:xfrm>
+        </p:spPr>
+        <p:txBody>
+          <a:bodyPr/>
+          <a:lstStyle/>
+          <a:p>
+            <a:pPr indent="-330200" lvl="0" marL="457200" rtl="0" algn="l">
+              <a:spcBef>
+                <a:spcPts val="0"/>
+              </a:spcBef>
+              <a:spcAft>
+                <a:spcPts val="0"/>
+              </a:spcAft>
+              <a:buSzPts val="1600"/>
+              <a:buChar char="●"/>
+            </a:pPr>
+            <a:r>
+              <a:rPr lang="en"/>
+              <a:t>Why profile before optimizing?</a:t>
+            </a:r>
+            <a:endParaRPr/>
+          </a:p>
+          <a:p>
+            <a:pPr indent="-330200" lvl="0" marL="457200" rtl="0" algn="l">
+              <a:spcBef>
+                <a:spcPts val="0"/>
+              </a:spcBef>
+              <a:spcAft>
+                <a:spcPts val="0"/>
+              </a:spcAft>
+              <a:buSzPts val="1600"/>
+              <a:buChar char="●"/>
+            </a:pPr>
+            <a:r>
+              <a:rPr lang="en"/>
+              <a:t>How does a uniform grid make separation cheaper?</a:t>
+            </a:r>
+            <a:endParaRPr/>
+          </a:p>
+          <a:p>
+            <a:pPr indent="-330200" lvl="0" marL="457200" rtl="0" algn="l">
+              <a:spcBef>
+                <a:spcPts val="0"/>
+              </a:spcBef>
+              <a:spcAft>
+                <a:spcPts val="0"/>
+              </a:spcAft>
+              <a:buSzPts val="1600"/>
+              <a:buChar char="●"/>
+            </a:pPr>
+            <a:r>
+              <a:rPr lang="en"/>
+              <a:t>What is the difference between an array of objects and a struct of arrays?</a:t>
+            </a:r>
+            <a:endParaRPr/>
+          </a:p>
+          <a:p>
+            <a:pPr indent="-330200" lvl="0" marL="457200" rtl="0" algn="l">
+              <a:spcBef>
+                <a:spcPts val="0"/>
+              </a:spcBef>
+              <a:spcAft>
+                <a:spcPts val="0"/>
+              </a:spcAft>
+              <a:buSzPts val="1600"/>
+              <a:buChar char="●"/>
+            </a:pPr>
+            <a:r>
+              <a:rPr lang="en"/>
+              <a:t>What do you give up with data-oriented design?</a:t>
+            </a:r>
+            <a:endParaRPr/>
+          </a:p>
+        </p:txBody>
+      </p:sp>
+      <p:sp>
+        <p:nvSpPr>
+          <p:cNvPr id="4" name="TextBox 3"/>
+          <p:cNvSpPr txBox="1"/>
+          <p:nvPr/>
+        </p:nvSpPr>
+        <p:spPr>
+          <a:xfrm>
+            <a:off x="457200" y="3182112"/>
+            <a:ext cx="8229600" cy="457200"/>
           </a:xfrm>
           <a:prstGeom prst="rect">
             <a:avLst/>
           </a:prstGeom>
+          <a:noFill/>
         </p:spPr>
-      </p:pic>
+        <p:txBody>
+          <a:bodyPr wrap="square">
+            <a:spAutoFit/>
+          </a:bodyPr>
+          <a:lstStyle/>
+          <a:p>
+            <a:pPr algn="ctr"/>
+            <a:r>
+              <a:rPr sz="1400" b="0" i="0">
+                <a:solidFill>
+                  <a:srgbClr val="9AA3AB"/>
+                </a:solidFill>
+              </a:rPr>
+              <a:t>The answers, and more questions, are on the course site.</a:t>
+            </a:r>
+          </a:p>
+        </p:txBody>
+      </p:sp>
     </p:spTree>
   </p:cSld>
   <p:clrMapOvr>
@@ -17481,76 +17265,834 @@
 </file>
 
 <file path=ppt/slides/slide35.xml><?xml version="1.0" encoding="utf-8"?>
-<p:sld xmlns:a="http://schemas.openxmlformats.org/drawingml/2006/main" xmlns:p="http://schemas.openxmlformats.org/presentationml/2006/main" xmlns:r="http://schemas.openxmlformats.org/officeDocument/2006/relationships">
+<p:sld xmlns:a="http://schemas.openxmlformats.org/drawingml/2006/main" xmlns:r="http://schemas.openxmlformats.org/officeDocument/2006/relationships" xmlns:mc="http://schemas.openxmlformats.org/markup-compatibility/2006" xmlns:mv="urn:schemas-microsoft-com:mac:vml" xmlns:p="http://schemas.openxmlformats.org/presentationml/2006/main" xmlns:c="http://schemas.openxmlformats.org/drawingml/2006/chart" xmlns:dgm="http://schemas.openxmlformats.org/drawingml/2006/diagram" xmlns:o="urn:schemas-microsoft-com:office:office" xmlns:v="urn:schemas-microsoft-com:vml" xmlns:pvml="urn:schemas-microsoft-com:office:powerpoint" xmlns:com="http://schemas.openxmlformats.org/drawingml/2006/compatibility" xmlns:p14="http://schemas.microsoft.com/office/powerpoint/2010/main" xmlns:p15="http://schemas.microsoft.com/office/powerpoint/2012/main" xmlns:ahyp="http://schemas.microsoft.com/office/drawing/2018/hyperlinkcolor">
   <p:cSld>
     <p:spTree>
       <p:nvGrpSpPr>
-        <p:cNvPr id="1" name=""/>
+        <p:cNvPr id="292" name="Shape 292"/>
         <p:cNvGrpSpPr/>
         <p:nvPr/>
       </p:nvGrpSpPr>
-      <p:grpSpPr/>
-      <p:sp>
-        <p:nvSpPr>
-          <p:cNvPr id="2" name="Title 1"/>
-          <p:cNvSpPr>
-            <a:spLocks noGrp="1"/>
-          </p:cNvSpPr>
+      <p:grpSpPr>
+        <a:xfrm>
+          <a:off x="0" y="0"/>
+          <a:ext cx="0" cy="0"/>
+          <a:chOff x="0" y="0"/>
+          <a:chExt cx="0" cy="0"/>
+        </a:xfrm>
+      </p:grpSpPr>
+      <p:sp>
+        <p:nvSpPr>
+          <p:cNvPr id="293" name="Google Shape;293;p45"/>
+          <p:cNvSpPr txBox="1"/>
           <p:nvPr>
             <p:ph type="title"/>
           </p:nvPr>
         </p:nvSpPr>
-        <p:spPr/>
-        <p:txBody>
-          <a:bodyPr/>
-          <a:lstStyle/>
-          <a:p>
-            <a:pPr indent="0" lvl="0" marL="0" rtl="0" algn="l">
-              <a:spcBef>
-                <a:spcPts val="0"/>
-              </a:spcBef>
-              <a:spcAft>
-                <a:spcPts val="0"/>
-              </a:spcAft>
-              <a:buNone/>
-            </a:pPr>
-            <a:r>
-              <a:rPr lang="en"/>
-              <a:t>Every Pair</a:t>
-            </a:r>
-            <a:endParaRPr/>
-          </a:p>
-        </p:txBody>
-      </p:sp>
-      <p:pic>
-        <p:nvPicPr>
-          <p:cNvPr id="3" name="Picture 2" descr="pairs.png"/>
-          <p:cNvPicPr>
-            <a:picLocks noChangeAspect="1"/>
-          </p:cNvPicPr>
-          <p:nvPr/>
-        </p:nvPicPr>
-        <p:blipFill>
-          <a:blip r:embed="rId2"/>
-          <a:stretch>
-            <a:fillRect/>
-          </a:stretch>
-        </p:blipFill>
         <p:spPr>
           <a:xfrm>
-            <a:off x="320039" y="1051560"/>
-            <a:ext cx="8503920" cy="3779520"/>
+            <a:off x="311700" y="195615"/>
+            <a:ext cx="8520600" cy="572700"/>
           </a:xfrm>
           <a:prstGeom prst="rect">
             <a:avLst/>
           </a:prstGeom>
         </p:spPr>
-      </p:pic>
+        <p:txBody>
+          <a:bodyPr anchorCtr="0" anchor="t" bIns="91425" lIns="91425" spcFirstLastPara="1" rIns="91425" wrap="square" tIns="91425">
+            <a:normAutofit fontScale="90000"/>
+          </a:bodyPr>
+          <a:lstStyle/>
+          <a:p>
+            <a:pPr indent="0" lvl="0" marL="0" rtl="0" algn="l">
+              <a:spcBef>
+                <a:spcPts val="0"/>
+              </a:spcBef>
+              <a:spcAft>
+                <a:spcPts val="0"/>
+              </a:spcAft>
+              <a:buNone/>
+            </a:pPr>
+            <a:r>
+              <a:rPr lang="en">
+                <a:solidFill>
+                  <a:schemeClr val="accent5"/>
+                </a:solidFill>
+              </a:rPr>
+              <a:t>Apply It to Your Project</a:t>
+            </a:r>
+            <a:endParaRPr>
+              <a:solidFill>
+                <a:schemeClr val="accent5"/>
+              </a:solidFill>
+            </a:endParaRPr>
+          </a:p>
+        </p:txBody>
+      </p:sp>
+      <p:sp>
+        <p:nvSpPr>
+          <p:cNvPr id="294" name="Google Shape;294;p45"/>
+          <p:cNvSpPr txBox="1"/>
+          <p:nvPr>
+            <p:ph idx="1" type="body"/>
+          </p:nvPr>
+        </p:nvSpPr>
+        <p:spPr>
+          <a:xfrm>
+            <a:off x="311700" y="885950"/>
+            <a:ext cx="8520600" cy="4023300"/>
+          </a:xfrm>
+          <a:prstGeom prst="rect">
+            <a:avLst/>
+          </a:prstGeom>
+        </p:spPr>
+        <p:txBody>
+          <a:bodyPr anchorCtr="0" anchor="t" bIns="91425" lIns="91425" spcFirstLastPara="1" rIns="91425" wrap="square" tIns="91425">
+            <a:normAutofit/>
+          </a:bodyPr>
+          <a:lstStyle/>
+          <a:p>
+            <a:pPr indent="-330200" lvl="0" marL="457200" rtl="0" algn="l">
+              <a:spcBef>
+                <a:spcPts val="0"/>
+              </a:spcBef>
+              <a:spcAft>
+                <a:spcPts val="0"/>
+              </a:spcAft>
+              <a:buSzPts val="1600"/>
+              <a:buChar char="●"/>
+            </a:pPr>
+            <a:r>
+              <a:rPr lang="en"/>
+              <a:t>Profile your game with many more entities. Where does the time go?</a:t>
+            </a:r>
+            <a:endParaRPr/>
+          </a:p>
+          <a:p>
+            <a:pPr indent="-330200" lvl="0" marL="457200" rtl="0" algn="l">
+              <a:spcBef>
+                <a:spcPts val="0"/>
+              </a:spcBef>
+              <a:spcAft>
+                <a:spcPts val="0"/>
+              </a:spcAft>
+              <a:buSzPts val="1600"/>
+              <a:buChar char="●"/>
+            </a:pPr>
+            <a:r>
+              <a:rPr lang="en"/>
+              <a:t>Does anything check every pair, or search every entity?</a:t>
+            </a:r>
+            <a:endParaRPr/>
+          </a:p>
+          <a:p>
+            <a:pPr indent="-330200" lvl="0" marL="457200" rtl="0" algn="l">
+              <a:spcBef>
+                <a:spcPts val="0"/>
+              </a:spcBef>
+              <a:spcAft>
+                <a:spcPts val="0"/>
+              </a:spcAft>
+              <a:buSzPts val="1600"/>
+              <a:buChar char="●"/>
+            </a:pPr>
+            <a:r>
+              <a:rPr lang="en"/>
+              <a:t>Does your game allocate every frame? Where?</a:t>
+            </a:r>
+            <a:endParaRPr/>
+          </a:p>
+          <a:p>
+            <a:pPr indent="-330200" lvl="0" marL="457200" rtl="0" algn="l">
+              <a:spcBef>
+                <a:spcPts val="0"/>
+              </a:spcBef>
+              <a:spcAft>
+                <a:spcPts val="0"/>
+              </a:spcAft>
+              <a:buSzPts val="1600"/>
+              <a:buChar char="●"/>
+            </a:pPr>
+            <a:r>
+              <a:rPr lang="en"/>
+              <a:t>Is there anything there are thousands of?</a:t>
+            </a:r>
+            <a:endParaRPr/>
+          </a:p>
+        </p:txBody>
+      </p:sp>
     </p:spTree>
   </p:cSld>
   <p:clrMapOvr>
     <a:masterClrMapping/>
   </p:clrMapOvr>
+  <p:timing>
+    <p:tnLst>
+      <p:par>
+        <p:cTn dur="indefinite" nodeType="tmRoot" restart="never">
+          <p:childTnLst>
+            <p:seq concurrent="1" nextAc="seek">
+              <p:cTn dur="indefinite" id="2" nodeType="mainSeq">
+                <p:childTnLst>
+                  <p:par>
+                    <p:cTn fill="hold">
+                      <p:stCondLst>
+                        <p:cond delay="indefinite"/>
+                      </p:stCondLst>
+                      <p:childTnLst>
+                        <p:par>
+                          <p:cTn fill="hold">
+                            <p:stCondLst>
+                              <p:cond delay="0"/>
+                            </p:stCondLst>
+                            <p:childTnLst>
+                              <p:par>
+                                <p:cTn fill="hold" nodeType="clickEffect" presetClass="entr" presetID="1" presetSubtype="0">
+                                  <p:stCondLst>
+                                    <p:cond delay="0"/>
+                                  </p:stCondLst>
+                                  <p:childTnLst>
+                                    <p:set>
+                                      <p:cBhvr>
+                                        <p:cTn dur="1" fill="hold">
+                                          <p:stCondLst>
+                                            <p:cond delay="0"/>
+                                          </p:stCondLst>
+                                        </p:cTn>
+                                        <p:tgtEl>
+                                          <p:spTgt spid="294">
+                                            <p:txEl>
+                                              <p:pRg end="0" st="0"/>
+                                            </p:txEl>
+                                          </p:spTgt>
+                                        </p:tgtEl>
+                                        <p:attrNameLst>
+                                          <p:attrName>style.visibility</p:attrName>
+                                        </p:attrNameLst>
+                                      </p:cBhvr>
+                                      <p:to>
+                                        <p:strVal val="visible"/>
+                                      </p:to>
+                                    </p:set>
+                                  </p:childTnLst>
+                                </p:cTn>
+                              </p:par>
+                            </p:childTnLst>
+                          </p:cTn>
+                        </p:par>
+                      </p:childTnLst>
+                    </p:cTn>
+                  </p:par>
+                  <p:par>
+                    <p:cTn fill="hold">
+                      <p:stCondLst>
+                        <p:cond delay="indefinite"/>
+                      </p:stCondLst>
+                      <p:childTnLst>
+                        <p:par>
+                          <p:cTn fill="hold">
+                            <p:stCondLst>
+                              <p:cond delay="0"/>
+                            </p:stCondLst>
+                            <p:childTnLst>
+                              <p:par>
+                                <p:cTn fill="hold" nodeType="clickEffect" presetClass="entr" presetID="1" presetSubtype="0">
+                                  <p:stCondLst>
+                                    <p:cond delay="0"/>
+                                  </p:stCondLst>
+                                  <p:childTnLst>
+                                    <p:set>
+                                      <p:cBhvr>
+                                        <p:cTn dur="1" fill="hold">
+                                          <p:stCondLst>
+                                            <p:cond delay="0"/>
+                                          </p:stCondLst>
+                                        </p:cTn>
+                                        <p:tgtEl>
+                                          <p:spTgt spid="294">
+                                            <p:txEl>
+                                              <p:pRg end="1" st="1"/>
+                                            </p:txEl>
+                                          </p:spTgt>
+                                        </p:tgtEl>
+                                        <p:attrNameLst>
+                                          <p:attrName>style.visibility</p:attrName>
+                                        </p:attrNameLst>
+                                      </p:cBhvr>
+                                      <p:to>
+                                        <p:strVal val="visible"/>
+                                      </p:to>
+                                    </p:set>
+                                  </p:childTnLst>
+                                </p:cTn>
+                              </p:par>
+                            </p:childTnLst>
+                          </p:cTn>
+                        </p:par>
+                      </p:childTnLst>
+                    </p:cTn>
+                  </p:par>
+                  <p:par>
+                    <p:cTn fill="hold">
+                      <p:stCondLst>
+                        <p:cond delay="indefinite"/>
+                      </p:stCondLst>
+                      <p:childTnLst>
+                        <p:par>
+                          <p:cTn fill="hold">
+                            <p:stCondLst>
+                              <p:cond delay="0"/>
+                            </p:stCondLst>
+                            <p:childTnLst>
+                              <p:par>
+                                <p:cTn fill="hold" nodeType="clickEffect" presetClass="entr" presetID="1" presetSubtype="0">
+                                  <p:stCondLst>
+                                    <p:cond delay="0"/>
+                                  </p:stCondLst>
+                                  <p:childTnLst>
+                                    <p:set>
+                                      <p:cBhvr>
+                                        <p:cTn dur="1" fill="hold">
+                                          <p:stCondLst>
+                                            <p:cond delay="0"/>
+                                          </p:stCondLst>
+                                        </p:cTn>
+                                        <p:tgtEl>
+                                          <p:spTgt spid="294">
+                                            <p:txEl>
+                                              <p:pRg end="2" st="2"/>
+                                            </p:txEl>
+                                          </p:spTgt>
+                                        </p:tgtEl>
+                                        <p:attrNameLst>
+                                          <p:attrName>style.visibility</p:attrName>
+                                        </p:attrNameLst>
+                                      </p:cBhvr>
+                                      <p:to>
+                                        <p:strVal val="visible"/>
+                                      </p:to>
+                                    </p:set>
+                                  </p:childTnLst>
+                                </p:cTn>
+                              </p:par>
+                            </p:childTnLst>
+                          </p:cTn>
+                        </p:par>
+                      </p:childTnLst>
+                    </p:cTn>
+                  </p:par>
+                  <p:par>
+                    <p:cTn fill="hold">
+                      <p:stCondLst>
+                        <p:cond delay="indefinite"/>
+                      </p:stCondLst>
+                      <p:childTnLst>
+                        <p:par>
+                          <p:cTn fill="hold">
+                            <p:stCondLst>
+                              <p:cond delay="0"/>
+                            </p:stCondLst>
+                            <p:childTnLst>
+                              <p:par>
+                                <p:cTn fill="hold" nodeType="clickEffect" presetClass="entr" presetID="1" presetSubtype="0">
+                                  <p:stCondLst>
+                                    <p:cond delay="0"/>
+                                  </p:stCondLst>
+                                  <p:childTnLst>
+                                    <p:set>
+                                      <p:cBhvr>
+                                        <p:cTn dur="1" fill="hold">
+                                          <p:stCondLst>
+                                            <p:cond delay="0"/>
+                                          </p:stCondLst>
+                                        </p:cTn>
+                                        <p:tgtEl>
+                                          <p:spTgt spid="294">
+                                            <p:txEl>
+                                              <p:pRg end="3" st="3"/>
+                                            </p:txEl>
+                                          </p:spTgt>
+                                        </p:tgtEl>
+                                        <p:attrNameLst>
+                                          <p:attrName>style.visibility</p:attrName>
+                                        </p:attrNameLst>
+                                      </p:cBhvr>
+                                      <p:to>
+                                        <p:strVal val="visible"/>
+                                      </p:to>
+                                    </p:set>
+                                  </p:childTnLst>
+                                </p:cTn>
+                              </p:par>
+                            </p:childTnLst>
+                          </p:cTn>
+                        </p:par>
+                      </p:childTnLst>
+                    </p:cTn>
+                  </p:par>
+                  <p:par>
+                    <p:cTn fill="hold">
+                      <p:stCondLst>
+                        <p:cond delay="indefinite"/>
+                      </p:stCondLst>
+                      <p:childTnLst>
+                        <p:par>
+                          <p:cTn fill="hold">
+                            <p:stCondLst>
+                              <p:cond delay="0"/>
+                            </p:stCondLst>
+                            <p:childTnLst>
+                              <p:par>
+                                <p:cTn fill="hold" nodeType="clickEffect" presetClass="entr" presetID="1" presetSubtype="0">
+                                  <p:stCondLst>
+                                    <p:cond delay="0"/>
+                                  </p:stCondLst>
+                                  <p:childTnLst>
+                                    <p:set>
+                                      <p:cBhvr>
+                                        <p:cTn dur="1" fill="hold">
+                                          <p:stCondLst>
+                                            <p:cond delay="0"/>
+                                          </p:stCondLst>
+                                        </p:cTn>
+                                        <p:tgtEl>
+                                          <p:spTgt spid="294">
+                                            <p:txEl>
+                                              <p:pRg end="4" st="4"/>
+                                            </p:txEl>
+                                          </p:spTgt>
+                                        </p:tgtEl>
+                                        <p:attrNameLst>
+                                          <p:attrName>style.visibility</p:attrName>
+                                        </p:attrNameLst>
+                                      </p:cBhvr>
+                                      <p:to>
+                                        <p:strVal val="visible"/>
+                                      </p:to>
+                                    </p:set>
+                                  </p:childTnLst>
+                                </p:cTn>
+                              </p:par>
+                            </p:childTnLst>
+                          </p:cTn>
+                        </p:par>
+                      </p:childTnLst>
+                    </p:cTn>
+                  </p:par>
+                  <p:par>
+                    <p:cTn fill="hold">
+                      <p:stCondLst>
+                        <p:cond delay="indefinite"/>
+                      </p:stCondLst>
+                      <p:childTnLst>
+                        <p:par>
+                          <p:cTn fill="hold">
+                            <p:stCondLst>
+                              <p:cond delay="0"/>
+                            </p:stCondLst>
+                            <p:childTnLst>
+                              <p:par>
+                                <p:cTn fill="hold" nodeType="clickEffect" presetClass="entr" presetID="1" presetSubtype="0">
+                                  <p:stCondLst>
+                                    <p:cond delay="0"/>
+                                  </p:stCondLst>
+                                  <p:childTnLst>
+                                    <p:set>
+                                      <p:cBhvr>
+                                        <p:cTn dur="1" fill="hold">
+                                          <p:stCondLst>
+                                            <p:cond delay="0"/>
+                                          </p:stCondLst>
+                                        </p:cTn>
+                                        <p:tgtEl>
+                                          <p:spTgt spid="294">
+                                            <p:txEl>
+                                              <p:pRg end="5" st="5"/>
+                                            </p:txEl>
+                                          </p:spTgt>
+                                        </p:tgtEl>
+                                        <p:attrNameLst>
+                                          <p:attrName>style.visibility</p:attrName>
+                                        </p:attrNameLst>
+                                      </p:cBhvr>
+                                      <p:to>
+                                        <p:strVal val="visible"/>
+                                      </p:to>
+                                    </p:set>
+                                  </p:childTnLst>
+                                </p:cTn>
+                              </p:par>
+                            </p:childTnLst>
+                          </p:cTn>
+                        </p:par>
+                      </p:childTnLst>
+                    </p:cTn>
+                  </p:par>
+                  <p:par>
+                    <p:cTn fill="hold">
+                      <p:stCondLst>
+                        <p:cond delay="indefinite"/>
+                      </p:stCondLst>
+                      <p:childTnLst>
+                        <p:par>
+                          <p:cTn fill="hold">
+                            <p:stCondLst>
+                              <p:cond delay="0"/>
+                            </p:stCondLst>
+                            <p:childTnLst>
+                              <p:par>
+                                <p:cTn fill="hold" nodeType="clickEffect" presetClass="entr" presetID="1" presetSubtype="0">
+                                  <p:stCondLst>
+                                    <p:cond delay="0"/>
+                                  </p:stCondLst>
+                                  <p:childTnLst>
+                                    <p:set>
+                                      <p:cBhvr>
+                                        <p:cTn dur="1" fill="hold">
+                                          <p:stCondLst>
+                                            <p:cond delay="0"/>
+                                          </p:stCondLst>
+                                        </p:cTn>
+                                        <p:tgtEl>
+                                          <p:spTgt spid="294">
+                                            <p:txEl>
+                                              <p:pRg end="6" st="6"/>
+                                            </p:txEl>
+                                          </p:spTgt>
+                                        </p:tgtEl>
+                                        <p:attrNameLst>
+                                          <p:attrName>style.visibility</p:attrName>
+                                        </p:attrNameLst>
+                                      </p:cBhvr>
+                                      <p:to>
+                                        <p:strVal val="visible"/>
+                                      </p:to>
+                                    </p:set>
+                                  </p:childTnLst>
+                                </p:cTn>
+                              </p:par>
+                            </p:childTnLst>
+                          </p:cTn>
+                        </p:par>
+                      </p:childTnLst>
+                    </p:cTn>
+                  </p:par>
+                  <p:par>
+                    <p:cTn fill="hold">
+                      <p:stCondLst>
+                        <p:cond delay="indefinite"/>
+                      </p:stCondLst>
+                      <p:childTnLst>
+                        <p:par>
+                          <p:cTn fill="hold">
+                            <p:stCondLst>
+                              <p:cond delay="0"/>
+                            </p:stCondLst>
+                            <p:childTnLst>
+                              <p:par>
+                                <p:cTn fill="hold" nodeType="clickEffect" presetClass="entr" presetID="1" presetSubtype="0">
+                                  <p:stCondLst>
+                                    <p:cond delay="0"/>
+                                  </p:stCondLst>
+                                  <p:childTnLst>
+                                    <p:set>
+                                      <p:cBhvr>
+                                        <p:cTn dur="1" fill="hold">
+                                          <p:stCondLst>
+                                            <p:cond delay="0"/>
+                                          </p:stCondLst>
+                                        </p:cTn>
+                                        <p:tgtEl>
+                                          <p:spTgt spid="294">
+                                            <p:txEl>
+                                              <p:pRg end="7" st="7"/>
+                                            </p:txEl>
+                                          </p:spTgt>
+                                        </p:tgtEl>
+                                        <p:attrNameLst>
+                                          <p:attrName>style.visibility</p:attrName>
+                                        </p:attrNameLst>
+                                      </p:cBhvr>
+                                      <p:to>
+                                        <p:strVal val="visible"/>
+                                      </p:to>
+                                    </p:set>
+                                  </p:childTnLst>
+                                </p:cTn>
+                              </p:par>
+                            </p:childTnLst>
+                          </p:cTn>
+                        </p:par>
+                      </p:childTnLst>
+                    </p:cTn>
+                  </p:par>
+                  <p:par>
+                    <p:cTn fill="hold">
+                      <p:stCondLst>
+                        <p:cond delay="indefinite"/>
+                      </p:stCondLst>
+                      <p:childTnLst>
+                        <p:par>
+                          <p:cTn fill="hold">
+                            <p:stCondLst>
+                              <p:cond delay="0"/>
+                            </p:stCondLst>
+                            <p:childTnLst>
+                              <p:par>
+                                <p:cTn fill="hold" nodeType="clickEffect" presetClass="entr" presetID="1" presetSubtype="0">
+                                  <p:stCondLst>
+                                    <p:cond delay="0"/>
+                                  </p:stCondLst>
+                                  <p:childTnLst>
+                                    <p:set>
+                                      <p:cBhvr>
+                                        <p:cTn dur="1" fill="hold">
+                                          <p:stCondLst>
+                                            <p:cond delay="0"/>
+                                          </p:stCondLst>
+                                        </p:cTn>
+                                        <p:tgtEl>
+                                          <p:spTgt spid="294">
+                                            <p:txEl>
+                                              <p:pRg end="8" st="8"/>
+                                            </p:txEl>
+                                          </p:spTgt>
+                                        </p:tgtEl>
+                                        <p:attrNameLst>
+                                          <p:attrName>style.visibility</p:attrName>
+                                        </p:attrNameLst>
+                                      </p:cBhvr>
+                                      <p:to>
+                                        <p:strVal val="visible"/>
+                                      </p:to>
+                                    </p:set>
+                                  </p:childTnLst>
+                                </p:cTn>
+                              </p:par>
+                            </p:childTnLst>
+                          </p:cTn>
+                        </p:par>
+                      </p:childTnLst>
+                    </p:cTn>
+                  </p:par>
+                  <p:par>
+                    <p:cTn fill="hold">
+                      <p:stCondLst>
+                        <p:cond delay="indefinite"/>
+                      </p:stCondLst>
+                      <p:childTnLst>
+                        <p:par>
+                          <p:cTn fill="hold">
+                            <p:stCondLst>
+                              <p:cond delay="0"/>
+                            </p:stCondLst>
+                            <p:childTnLst>
+                              <p:par>
+                                <p:cTn fill="hold" nodeType="clickEffect" presetClass="entr" presetID="1" presetSubtype="0">
+                                  <p:stCondLst>
+                                    <p:cond delay="0"/>
+                                  </p:stCondLst>
+                                  <p:childTnLst>
+                                    <p:set>
+                                      <p:cBhvr>
+                                        <p:cTn dur="1" fill="hold">
+                                          <p:stCondLst>
+                                            <p:cond delay="0"/>
+                                          </p:stCondLst>
+                                        </p:cTn>
+                                        <p:tgtEl>
+                                          <p:spTgt spid="294">
+                                            <p:txEl>
+                                              <p:pRg end="9" st="9"/>
+                                            </p:txEl>
+                                          </p:spTgt>
+                                        </p:tgtEl>
+                                        <p:attrNameLst>
+                                          <p:attrName>style.visibility</p:attrName>
+                                        </p:attrNameLst>
+                                      </p:cBhvr>
+                                      <p:to>
+                                        <p:strVal val="visible"/>
+                                      </p:to>
+                                    </p:set>
+                                  </p:childTnLst>
+                                </p:cTn>
+                              </p:par>
+                            </p:childTnLst>
+                          </p:cTn>
+                        </p:par>
+                      </p:childTnLst>
+                    </p:cTn>
+                  </p:par>
+                  <p:par>
+                    <p:cTn fill="hold">
+                      <p:stCondLst>
+                        <p:cond delay="indefinite"/>
+                      </p:stCondLst>
+                      <p:childTnLst>
+                        <p:par>
+                          <p:cTn fill="hold">
+                            <p:stCondLst>
+                              <p:cond delay="0"/>
+                            </p:stCondLst>
+                            <p:childTnLst>
+                              <p:par>
+                                <p:cTn fill="hold" nodeType="clickEffect" presetClass="entr" presetID="1" presetSubtype="0">
+                                  <p:stCondLst>
+                                    <p:cond delay="0"/>
+                                  </p:stCondLst>
+                                  <p:childTnLst>
+                                    <p:set>
+                                      <p:cBhvr>
+                                        <p:cTn dur="1" fill="hold">
+                                          <p:stCondLst>
+                                            <p:cond delay="0"/>
+                                          </p:stCondLst>
+                                        </p:cTn>
+                                        <p:tgtEl>
+                                          <p:spTgt spid="294">
+                                            <p:txEl>
+                                              <p:pRg end="10" st="10"/>
+                                            </p:txEl>
+                                          </p:spTgt>
+                                        </p:tgtEl>
+                                        <p:attrNameLst>
+                                          <p:attrName>style.visibility</p:attrName>
+                                        </p:attrNameLst>
+                                      </p:cBhvr>
+                                      <p:to>
+                                        <p:strVal val="visible"/>
+                                      </p:to>
+                                    </p:set>
+                                  </p:childTnLst>
+                                </p:cTn>
+                              </p:par>
+                            </p:childTnLst>
+                          </p:cTn>
+                        </p:par>
+                      </p:childTnLst>
+                    </p:cTn>
+                  </p:par>
+                  <p:par>
+                    <p:cTn fill="hold">
+                      <p:stCondLst>
+                        <p:cond delay="indefinite"/>
+                      </p:stCondLst>
+                      <p:childTnLst>
+                        <p:par>
+                          <p:cTn fill="hold">
+                            <p:stCondLst>
+                              <p:cond delay="0"/>
+                            </p:stCondLst>
+                            <p:childTnLst>
+                              <p:par>
+                                <p:cTn fill="hold" nodeType="clickEffect" presetClass="entr" presetID="1" presetSubtype="0">
+                                  <p:stCondLst>
+                                    <p:cond delay="0"/>
+                                  </p:stCondLst>
+                                  <p:childTnLst>
+                                    <p:set>
+                                      <p:cBhvr>
+                                        <p:cTn dur="1" fill="hold">
+                                          <p:stCondLst>
+                                            <p:cond delay="0"/>
+                                          </p:stCondLst>
+                                        </p:cTn>
+                                        <p:tgtEl>
+                                          <p:spTgt spid="294">
+                                            <p:txEl>
+                                              <p:pRg end="11" st="11"/>
+                                            </p:txEl>
+                                          </p:spTgt>
+                                        </p:tgtEl>
+                                        <p:attrNameLst>
+                                          <p:attrName>style.visibility</p:attrName>
+                                        </p:attrNameLst>
+                                      </p:cBhvr>
+                                      <p:to>
+                                        <p:strVal val="visible"/>
+                                      </p:to>
+                                    </p:set>
+                                  </p:childTnLst>
+                                </p:cTn>
+                              </p:par>
+                            </p:childTnLst>
+                          </p:cTn>
+                        </p:par>
+                      </p:childTnLst>
+                    </p:cTn>
+                  </p:par>
+                  <p:par>
+                    <p:cTn fill="hold">
+                      <p:stCondLst>
+                        <p:cond delay="indefinite"/>
+                      </p:stCondLst>
+                      <p:childTnLst>
+                        <p:par>
+                          <p:cTn fill="hold">
+                            <p:stCondLst>
+                              <p:cond delay="0"/>
+                            </p:stCondLst>
+                            <p:childTnLst>
+                              <p:par>
+                                <p:cTn fill="hold" nodeType="clickEffect" presetClass="entr" presetID="1" presetSubtype="0">
+                                  <p:stCondLst>
+                                    <p:cond delay="0"/>
+                                  </p:stCondLst>
+                                  <p:childTnLst>
+                                    <p:set>
+                                      <p:cBhvr>
+                                        <p:cTn dur="1" fill="hold">
+                                          <p:stCondLst>
+                                            <p:cond delay="0"/>
+                                          </p:stCondLst>
+                                        </p:cTn>
+                                        <p:tgtEl>
+                                          <p:spTgt spid="294">
+                                            <p:txEl>
+                                              <p:pRg end="12" st="12"/>
+                                            </p:txEl>
+                                          </p:spTgt>
+                                        </p:tgtEl>
+                                        <p:attrNameLst>
+                                          <p:attrName>style.visibility</p:attrName>
+                                        </p:attrNameLst>
+                                      </p:cBhvr>
+                                      <p:to>
+                                        <p:strVal val="visible"/>
+                                      </p:to>
+                                    </p:set>
+                                  </p:childTnLst>
+                                </p:cTn>
+                              </p:par>
+                            </p:childTnLst>
+                          </p:cTn>
+                        </p:par>
+                      </p:childTnLst>
+                    </p:cTn>
+                  </p:par>
+                </p:childTnLst>
+              </p:cTn>
+              <p:prevCondLst>
+                <p:cond evt="onPrev">
+                  <p:tgtEl>
+                    <p:sldTgt/>
+                  </p:tgtEl>
+                </p:cond>
+              </p:prevCondLst>
+              <p:nextCondLst>
+                <p:cond evt="onNext">
+                  <p:tgtEl>
+                    <p:sldTgt/>
+                  </p:tgtEl>
+                </p:cond>
+              </p:nextCondLst>
+            </p:seq>
+          </p:childTnLst>
+        </p:cTn>
+      </p:par>
+    </p:tnLst>
+  </p:timing>
 </p:sld>
 </file>
 
@@ -18764,113 +19306,60 @@
       <p:grpSpPr/>
       <p:sp>
         <p:nvSpPr>
-          <p:cNvPr id="128" name="Google Shape;128;p21"/>
-          <p:cNvSpPr txBox="1"/>
+          <p:cNvPr id="2" name="Title 1"/>
+          <p:cNvSpPr>
+            <a:spLocks noGrp="1"/>
+          </p:cNvSpPr>
           <p:nvPr>
             <p:ph type="title"/>
           </p:nvPr>
         </p:nvSpPr>
+        <p:spPr/>
+        <p:txBody>
+          <a:bodyPr/>
+          <a:lstStyle/>
+          <a:p>
+            <a:pPr indent="0" lvl="0" marL="0" rtl="0" algn="l">
+              <a:spcBef>
+                <a:spcPts val="0"/>
+              </a:spcBef>
+              <a:spcAft>
+                <a:spcPts val="0"/>
+              </a:spcAft>
+              <a:buNone/>
+            </a:pPr>
+            <a:r>
+              <a:rPr lang="en"/>
+              <a:t>Every Pair</a:t>
+            </a:r>
+            <a:endParaRPr/>
+          </a:p>
+        </p:txBody>
+      </p:sp>
+      <p:pic>
+        <p:nvPicPr>
+          <p:cNvPr id="3" name="Picture 2" descr="pairs.png"/>
+          <p:cNvPicPr>
+            <a:picLocks noChangeAspect="1"/>
+          </p:cNvPicPr>
+          <p:nvPr/>
+        </p:nvPicPr>
+        <p:blipFill>
+          <a:blip r:embed="rId2"/>
+          <a:stretch>
+            <a:fillRect/>
+          </a:stretch>
+        </p:blipFill>
         <p:spPr>
           <a:xfrm>
-            <a:off x="311700" y="195615"/>
-            <a:ext cx="8520600" cy="572700"/>
+            <a:off x="320039" y="1051560"/>
+            <a:ext cx="8503920" cy="3779520"/>
           </a:xfrm>
           <a:prstGeom prst="rect">
             <a:avLst/>
           </a:prstGeom>
         </p:spPr>
-        <p:txBody>
-          <a:bodyPr anchorCtr="0" anchor="t" bIns="91425" lIns="91425" spcFirstLastPara="1" rIns="91425" wrap="square" tIns="91425">
-            <a:normAutofit fontScale="90000"/>
-          </a:bodyPr>
-          <a:lstStyle/>
-          <a:p>
-            <a:pPr indent="0" lvl="0" marL="0" rtl="0" algn="l">
-              <a:spcBef>
-                <a:spcPts val="0"/>
-              </a:spcBef>
-              <a:spcAft>
-                <a:spcPts val="0"/>
-              </a:spcAft>
-              <a:buNone/>
-            </a:pPr>
-            <a:r>
-              <a:rPr lang="en">
-                <a:solidFill>
-                  <a:schemeClr val="accent5"/>
-                </a:solidFill>
-              </a:rPr>
-              <a:t>Objects Implementation</a:t>
-            </a:r>
-            <a:endParaRPr>
-              <a:solidFill>
-                <a:schemeClr val="accent5"/>
-              </a:solidFill>
-            </a:endParaRPr>
-          </a:p>
-        </p:txBody>
-      </p:sp>
-      <p:sp>
-        <p:nvSpPr>
-          <p:cNvPr id="129" name="Google Shape;129;p21"/>
-          <p:cNvSpPr txBox="1"/>
-          <p:nvPr>
-            <p:ph idx="1" type="body"/>
-          </p:nvPr>
-        </p:nvSpPr>
-        <p:spPr>
-          <a:xfrm>
-            <a:off x="311700" y="885950"/>
-            <a:ext cx="8520600" cy="4023300"/>
-          </a:xfrm>
-          <a:prstGeom prst="rect">
-            <a:avLst/>
-          </a:prstGeom>
-        </p:spPr>
-        <p:txBody>
-          <a:bodyPr anchorCtr="0" anchor="ctr" bIns="91425" lIns="91425" spcFirstLastPara="1" rIns="91425" wrap="square" tIns="91425">
-            <a:normAutofit/>
-          </a:bodyPr>
-          <a:lstStyle/>
-          <a:p>
-            <a:pPr indent="0" lvl="0" marL="0" rtl="0" algn="ctr">
-              <a:spcBef>
-                <a:spcPts val="0"/>
-              </a:spcBef>
-              <a:spcAft>
-                <a:spcPts val="1200"/>
-              </a:spcAft>
-              <a:buNone/>
-            </a:pPr>
-            <a:r>
-              <a:rPr lang="en" sz="2900">
-                <a:latin typeface="VT323"/>
-                <a:ea typeface="VT323"/>
-                <a:cs typeface="VT323"/>
-                <a:sym typeface="VT323"/>
-              </a:rPr>
-              <a:t>DEMO!</a:t>
-            </a:r>
-            <a:endParaRPr/>
-          </a:p>
-          <a:p>
-            <a:pPr indent="0" lvl="0" marL="0" rtl="0" algn="ctr">
-              <a:spcBef>
-                <a:spcPts val="0"/>
-              </a:spcBef>
-              <a:spcAft>
-                <a:spcPts val="0"/>
-              </a:spcAft>
-              <a:buNone/>
-            </a:pPr>
-            <a:r>
-              <a:rPr lang="en" sz="1800"/>
-              <a:t>Survivors0: press Space until it slows down</a:t>
-            </a:r>
-            <a:endParaRPr sz="1800"/>
-          </a:p>
-        </p:txBody>
-      </p:sp>
+      </p:pic>
     </p:spTree>
   </p:cSld>
   <p:clrMapOvr>
@@ -18891,17 +19380,25 @@
       <p:grpSpPr/>
       <p:sp>
         <p:nvSpPr>
-          <p:cNvPr id="2" name="Title 1"/>
-          <p:cNvSpPr>
-            <a:spLocks noGrp="1"/>
-          </p:cNvSpPr>
+          <p:cNvPr id="128" name="Google Shape;128;p21"/>
+          <p:cNvSpPr txBox="1"/>
           <p:nvPr>
             <p:ph type="title"/>
           </p:nvPr>
         </p:nvSpPr>
-        <p:spPr/>
+        <p:spPr>
+          <a:xfrm>
+            <a:off x="311700" y="195615"/>
+            <a:ext cx="8520600" cy="572700"/>
+          </a:xfrm>
+          <a:prstGeom prst="rect">
+            <a:avLst/>
+          </a:prstGeom>
+        </p:spPr>
         <p:txBody>
-          <a:bodyPr/>
+          <a:bodyPr anchorCtr="0" anchor="t" bIns="91425" lIns="91425" spcFirstLastPara="1" rIns="91425" wrap="square" tIns="91425">
+            <a:normAutofit fontScale="90000"/>
+          </a:bodyPr>
           <a:lstStyle/>
           <a:p>
             <a:pPr indent="0" lvl="0" marL="0" rtl="0" algn="l">
@@ -18914,82 +19411,79 @@
               <a:buNone/>
             </a:pPr>
             <a:r>
-              <a:rPr lang="en"/>
-              <a:t>Try It: Count the Checks</a:t>
-            </a:r>
-            <a:endParaRPr/>
+              <a:rPr lang="en">
+                <a:solidFill>
+                  <a:schemeClr val="accent5"/>
+                </a:solidFill>
+              </a:rPr>
+              <a:t>Objects Implementation</a:t>
+            </a:r>
+            <a:endParaRPr>
+              <a:solidFill>
+                <a:schemeClr val="accent5"/>
+              </a:solidFill>
+            </a:endParaRPr>
           </a:p>
         </p:txBody>
       </p:sp>
       <p:sp>
         <p:nvSpPr>
-          <p:cNvPr id="3" name="Text Placeholder 2"/>
-          <p:cNvSpPr>
-            <a:spLocks noGrp="1"/>
-          </p:cNvSpPr>
+          <p:cNvPr id="129" name="Google Shape;129;p21"/>
+          <p:cNvSpPr txBox="1"/>
           <p:nvPr>
-            <p:ph type="body" idx="1"/>
+            <p:ph idx="1" type="body"/>
           </p:nvPr>
         </p:nvSpPr>
         <p:spPr>
           <a:xfrm>
             <a:off x="311700" y="885950"/>
-            <a:ext cx="8520600" cy="1289304"/>
+            <a:ext cx="8520600" cy="4023300"/>
           </a:xfrm>
+          <a:prstGeom prst="rect">
+            <a:avLst/>
+          </a:prstGeom>
         </p:spPr>
         <p:txBody>
-          <a:bodyPr/>
+          <a:bodyPr anchorCtr="0" anchor="ctr" bIns="91425" lIns="91425" spcFirstLastPara="1" rIns="91425" wrap="square" tIns="91425">
+            <a:normAutofit/>
+          </a:bodyPr>
           <a:lstStyle/>
           <a:p>
-            <a:pPr indent="-330200" lvl="0" marL="457200" rtl="0" algn="l">
-              <a:spcBef>
-                <a:spcPts val="0"/>
-              </a:spcBef>
-              <a:spcAft>
-                <a:spcPts val="0"/>
-              </a:spcAft>
-              <a:buSzPts val="1600"/>
-              <a:buChar char="●"/>
-            </a:pPr>
-            <a:r>
-              <a:rPr lang="en"/>
-              <a:t>On paper:</a:t>
+            <a:pPr indent="0" lvl="0" marL="0" rtl="0" algn="ctr">
+              <a:spcBef>
+                <a:spcPts val="0"/>
+              </a:spcBef>
+              <a:spcAft>
+                <a:spcPts val="1200"/>
+              </a:spcAft>
+              <a:buNone/>
+            </a:pPr>
+            <a:r>
+              <a:rPr lang="en" sz="2900">
+                <a:latin typeface="VT323"/>
+                <a:ea typeface="VT323"/>
+                <a:cs typeface="VT323"/>
+                <a:sym typeface="VT323"/>
+              </a:rPr>
+              <a:t>DEMO!</a:t>
             </a:r>
             <a:endParaRPr/>
           </a:p>
           <a:p>
-            <a:pPr indent="-330200" lvl="0" marL="457200" rtl="0" algn="l">
-              <a:spcBef>
-                <a:spcPts val="0"/>
-              </a:spcBef>
-              <a:spcAft>
-                <a:spcPts val="0"/>
-              </a:spcAft>
-              <a:buSzPts val="1600"/>
-              <a:buChar char="●"/>
-            </a:pPr>
-            <a:r>
-              <a:rPr lang="en"/>
-              <a:t>With 2,000 enemies, how many pairs does Separate check each step?</a:t>
-            </a:r>
-            <a:endParaRPr/>
-          </a:p>
-          <a:p>
-            <a:pPr indent="-330200" lvl="0" marL="457200" rtl="0" algn="l">
-              <a:spcBef>
-                <a:spcPts val="0"/>
-              </a:spcBef>
-              <a:spcAft>
-                <a:spcPts val="0"/>
-              </a:spcAft>
-              <a:buSzPts val="1600"/>
-              <a:buChar char="●"/>
-            </a:pPr>
-            <a:r>
-              <a:rPr lang="en"/>
-              <a:t>And with 10,000?</a:t>
-            </a:r>
-            <a:endParaRPr/>
+            <a:pPr indent="0" lvl="0" marL="0" rtl="0" algn="ctr">
+              <a:spcBef>
+                <a:spcPts val="0"/>
+              </a:spcBef>
+              <a:spcAft>
+                <a:spcPts val="0"/>
+              </a:spcAft>
+              <a:buNone/>
+            </a:pPr>
+            <a:r>
+              <a:rPr lang="en" sz="1800"/>
+              <a:t>Survivors0: press Space until it slows down</a:t>
+            </a:r>
+            <a:endParaRPr sz="1800"/>
           </a:p>
         </p:txBody>
       </p:sp>
@@ -19013,71 +19507,57 @@
       <p:grpSpPr/>
       <p:sp>
         <p:nvSpPr>
-          <p:cNvPr id="140" name="Google Shape;140;p23"/>
-          <p:cNvSpPr txBox="1"/>
+          <p:cNvPr id="2" name="Title 1"/>
+          <p:cNvSpPr>
+            <a:spLocks noGrp="1"/>
+          </p:cNvSpPr>
           <p:nvPr>
             <p:ph type="title"/>
           </p:nvPr>
         </p:nvSpPr>
+        <p:spPr/>
+        <p:txBody>
+          <a:bodyPr/>
+          <a:lstStyle/>
+          <a:p>
+            <a:pPr indent="0" lvl="0" marL="0" rtl="0" algn="l">
+              <a:spcBef>
+                <a:spcPts val="0"/>
+              </a:spcBef>
+              <a:spcAft>
+                <a:spcPts val="0"/>
+              </a:spcAft>
+              <a:buNone/>
+            </a:pPr>
+            <a:r>
+              <a:rPr lang="en"/>
+              <a:t>Try It: Count the Checks</a:t>
+            </a:r>
+            <a:endParaRPr/>
+          </a:p>
+        </p:txBody>
+      </p:sp>
+      <p:sp>
+        <p:nvSpPr>
+          <p:cNvPr id="3" name="Text Placeholder 2"/>
+          <p:cNvSpPr>
+            <a:spLocks noGrp="1"/>
+          </p:cNvSpPr>
+          <p:nvPr>
+            <p:ph type="body" idx="1"/>
+          </p:nvPr>
+        </p:nvSpPr>
         <p:spPr>
           <a:xfrm>
-            <a:off x="311700" y="195615"/>
-            <a:ext cx="8520600" cy="572700"/>
+            <a:off x="311700" y="885950"/>
+            <a:ext cx="8520600" cy="1289304"/>
           </a:xfrm>
-          <a:prstGeom prst="rect">
-            <a:avLst/>
-          </a:prstGeom>
         </p:spPr>
         <p:txBody>
-          <a:bodyPr anchorCtr="0" anchor="t" bIns="91425" lIns="91425" spcFirstLastPara="1" rIns="91425" wrap="square" tIns="91425">
-            <a:normAutofit fontScale="90000"/>
-          </a:bodyPr>
+          <a:bodyPr/>
           <a:lstStyle/>
           <a:p>
-            <a:pPr indent="0" lvl="0" marL="0" rtl="0" algn="l">
-              <a:spcBef>
-                <a:spcPts val="0"/>
-              </a:spcBef>
-              <a:spcAft>
-                <a:spcPts val="0"/>
-              </a:spcAft>
-              <a:buNone/>
-            </a:pPr>
-            <a:r>
-              <a:rPr lang="en"/>
-              <a:t>Profiling</a:t>
-            </a:r>
-            <a:endParaRPr/>
-          </a:p>
-        </p:txBody>
-      </p:sp>
-      <p:sp>
-        <p:nvSpPr>
-          <p:cNvPr id="293" name="Google Shape;293;p45"/>
-          <p:cNvSpPr txBox="1"/>
-          <p:nvPr>
-            <p:ph type="title"/>
-          </p:nvPr>
-        </p:nvSpPr>
-        <p:spPr>
-          <a:xfrm>
-            <a:off x="311700" y="1152475"/>
-            <a:ext cx="3700000" cy="3500000"/>
-          </a:xfrm>
-          <a:prstGeom prst="rect">
-            <a:avLst/>
-          </a:prstGeom>
-        </p:spPr>
-        <p:txBody>
-          <a:bodyPr anchorCtr="0" anchor="t" bIns="91425" lIns="91425" spcFirstLastPara="1" rIns="91425" wrap="square" tIns="91425">
-            <a:normAutofit fontScale="90000"/>
-          </a:bodyPr>
-          <a:lstStyle/>
-          <a:p>
             <a:pPr indent="-330200" lvl="0" marL="457200" rtl="0" algn="l">
-              <a:buClr>
-                <a:srgbClr val="DEE2E6"/>
-              </a:buClr>
               <a:spcBef>
                 <a:spcPts val="0"/>
               </a:spcBef>
@@ -19088,44 +19568,13 @@
               <a:buChar char="●"/>
             </a:pPr>
             <a:r>
-              <a:rPr lang="en" sz="1600">
-                <a:solidFill>
-                  <a:srgbClr val="DEE2E6"/>
-                </a:solidFill>
-              </a:rPr>
-              <a:t>Measure where the time goes</a:t>
+              <a:rPr lang="en"/>
+              <a:t>On paper:</a:t>
             </a:r>
             <a:endParaRPr/>
           </a:p>
           <a:p>
-            <a:pPr indent="-317500" lvl="1" marL="914400" rtl="0" algn="l">
-              <a:buClr>
-                <a:srgbClr val="6C757D"/>
-              </a:buClr>
-              <a:spcBef>
-                <a:spcPts val="0"/>
-              </a:spcBef>
-              <a:spcAft>
-                <a:spcPts val="0"/>
-              </a:spcAft>
-              <a:buSzPts val="1400"/>
-              <a:buChar char="○"/>
-            </a:pPr>
-            <a:r>
-              <a:rPr lang="en" sz="1400">
-                <a:solidFill>
-                  <a:srgbClr val="6C757D"/>
-                </a:solidFill>
-              </a:rPr>
-              <a:t>Before changing anything</a:t>
-            </a:r>
-            <a:endParaRPr/>
-          </a:p>
-          <a:p>
             <a:pPr indent="-330200" lvl="0" marL="457200" rtl="0" algn="l">
-              <a:buClr>
-                <a:srgbClr val="DEE2E6"/>
-              </a:buClr>
               <a:spcBef>
                 <a:spcPts val="0"/>
               </a:spcBef>
@@ -19136,44 +19585,13 @@
               <a:buChar char="●"/>
             </a:pPr>
             <a:r>
-              <a:rPr lang="en" sz="1600">
-                <a:solidFill>
-                  <a:srgbClr val="DEE2E6"/>
-                </a:solidFill>
-              </a:rPr>
-              <a:t>Time each part of a step</a:t>
+              <a:rPr lang="en"/>
+              <a:t>With 2,000 enemies, how many pairs does Separate check each step?</a:t>
             </a:r>
             <a:endParaRPr/>
           </a:p>
           <a:p>
-            <a:pPr indent="-317500" lvl="1" marL="914400" rtl="0" algn="l">
-              <a:buClr>
-                <a:srgbClr val="6C757D"/>
-              </a:buClr>
-              <a:spcBef>
-                <a:spcPts val="0"/>
-              </a:spcBef>
-              <a:spcAft>
-                <a:spcPts val="0"/>
-              </a:spcAft>
-              <a:buSzPts val="1400"/>
-              <a:buChar char="○"/>
-            </a:pPr>
-            <a:r>
-              <a:rPr lang="en" sz="1400">
-                <a:solidFill>
-                  <a:srgbClr val="6C757D"/>
-                </a:solidFill>
-              </a:rPr>
-              <a:t>A struct scope: measuring allocates nothing</a:t>
-            </a:r>
-            <a:endParaRPr/>
-          </a:p>
-          <a:p>
             <a:pPr indent="-330200" lvl="0" marL="457200" rtl="0" algn="l">
-              <a:buClr>
-                <a:srgbClr val="DEE2E6"/>
-              </a:buClr>
               <a:spcBef>
                 <a:spcPts val="0"/>
               </a:spcBef>
@@ -19184,428 +19602,10 @@
               <a:buChar char="●"/>
             </a:pPr>
             <a:r>
-              <a:rPr lang="en" sz="1600">
-                <a:solidFill>
-                  <a:srgbClr val="DEE2E6"/>
-                </a:solidFill>
-              </a:rPr>
-              <a:t>And count allocations and GCs</a:t>
+              <a:rPr lang="en"/>
+              <a:t>And with 10,000?</a:t>
             </a:r>
             <a:endParaRPr/>
-          </a:p>
-          <a:p>
-            <a:pPr indent="-317500" lvl="1" marL="914400" rtl="0" algn="l">
-              <a:buClr>
-                <a:srgbClr val="6C757D"/>
-              </a:buClr>
-              <a:spcBef>
-                <a:spcPts val="0"/>
-              </a:spcBef>
-              <a:spcAft>
-                <a:spcPts val="0"/>
-              </a:spcAft>
-              <a:buSzPts val="1400"/>
-              <a:buChar char="○"/>
-            </a:pPr>
-            <a:r>
-              <a:rPr lang="en" sz="1400">
-                <a:solidFill>
-                  <a:srgbClr val="6C757D"/>
-                </a:solidFill>
-              </a:rPr>
-              <a:t>LINQ allocates every call</a:t>
-            </a:r>
-            <a:endParaRPr/>
-          </a:p>
-          <a:p>
-            <a:pPr indent="-330200" lvl="0" marL="457200" rtl="0" algn="l">
-              <a:buClr>
-                <a:srgbClr val="DEE2E6"/>
-              </a:buClr>
-              <a:spcBef>
-                <a:spcPts val="0"/>
-              </a:spcBef>
-              <a:spcAft>
-                <a:spcPts val="0"/>
-              </a:spcAft>
-              <a:buSzPts val="1600"/>
-              <a:buChar char="●"/>
-            </a:pPr>
-            <a:r>
-              <a:rPr lang="en" sz="1600">
-                <a:solidFill>
-                  <a:srgbClr val="DEE2E6"/>
-                </a:solidFill>
-              </a:rPr>
-              <a:t>Measure a Release build</a:t>
-            </a:r>
-            <a:endParaRPr/>
-          </a:p>
-        </p:txBody>
-      </p:sp>
-      <p:sp>
-        <p:nvSpPr>
-          <p:cNvPr id="141" name="Google Shape;141;p23"/>
-          <p:cNvSpPr txBox="1"/>
-          <p:nvPr>
-            <p:ph idx="2" type="body"/>
-          </p:nvPr>
-        </p:nvSpPr>
-        <p:spPr>
-          <a:xfrm>
-            <a:off x="4150000" y="1152475"/>
-            <a:ext cx="4750000" cy="3600000"/>
-          </a:xfrm>
-          <a:prstGeom prst="rect">
-            <a:avLst/>
-          </a:prstGeom>
-        </p:spPr>
-        <p:txBody>
-          <a:bodyPr anchorCtr="0" anchor="t" bIns="91425" lIns="91425" spcFirstLastPara="1" rIns="91425" wrap="square" tIns="91425">
-            <a:noAutofit/>
-          </a:bodyPr>
-          <a:lstStyle/>
-          <a:p>
-            <a:pPr indent="0" lvl="0" marL="0" rtl="0" algn="l">
-              <a:lnSpc>
-                <a:spcPct val="115000"/>
-              </a:lnSpc>
-              <a:spcBef>
-                <a:spcPts val="0"/>
-              </a:spcBef>
-              <a:spcAft>
-                <a:spcPts val="0"/>
-              </a:spcAft>
-              <a:buNone/>
-            </a:pPr>
-            <a:r>
-              <a:rPr lang="en" sz="1000">
-                <a:highlight>
-                  <a:schemeClr val="dk2"/>
-                </a:highlight>
-                <a:latin typeface="Consolas"/>
-                <a:ea typeface="Consolas"/>
-                <a:cs typeface="Consolas"/>
-                <a:sym typeface="Consolas"/>
-              </a:rPr>
-              <a:t>using (_profiler.Measure("Move"))</a:t>
-            </a:r>
-            <a:endParaRPr sz="1000">
-              <a:solidFill>
-                <a:srgbClr val="CCCCCC"/>
-              </a:solidFill>
-              <a:highlight>
-                <a:schemeClr val="dk2"/>
-              </a:highlight>
-              <a:latin typeface="Consolas"/>
-              <a:ea typeface="Consolas"/>
-              <a:cs typeface="Consolas"/>
-              <a:sym typeface="Consolas"/>
-            </a:endParaRPr>
-          </a:p>
-          <a:p>
-            <a:pPr indent="0" lvl="0" marL="0" rtl="0" algn="l">
-              <a:lnSpc>
-                <a:spcPct val="115000"/>
-              </a:lnSpc>
-              <a:spcBef>
-                <a:spcPts val="0"/>
-              </a:spcBef>
-              <a:spcAft>
-                <a:spcPts val="0"/>
-              </a:spcAft>
-              <a:buNone/>
-            </a:pPr>
-            <a:r>
-              <a:rPr lang="en" sz="1000">
-                <a:highlight>
-                  <a:schemeClr val="dk2"/>
-                </a:highlight>
-                <a:latin typeface="Consolas"/>
-                <a:ea typeface="Consolas"/>
-                <a:cs typeface="Consolas"/>
-                <a:sym typeface="Consolas"/>
-              </a:rPr>
-              <a:t>    _swarm.Move(dt, _player.Position);</a:t>
-            </a:r>
-            <a:endParaRPr sz="1000">
-              <a:solidFill>
-                <a:srgbClr val="CCCCCC"/>
-              </a:solidFill>
-              <a:highlight>
-                <a:schemeClr val="dk2"/>
-              </a:highlight>
-              <a:latin typeface="Consolas"/>
-              <a:ea typeface="Consolas"/>
-              <a:cs typeface="Consolas"/>
-              <a:sym typeface="Consolas"/>
-            </a:endParaRPr>
-          </a:p>
-          <a:p>
-            <a:pPr indent="0" lvl="0" marL="0" rtl="0" algn="l">
-              <a:lnSpc>
-                <a:spcPct val="115000"/>
-              </a:lnSpc>
-              <a:spcBef>
-                <a:spcPts val="0"/>
-              </a:spcBef>
-              <a:spcAft>
-                <a:spcPts val="0"/>
-              </a:spcAft>
-              <a:buNone/>
-            </a:pPr>
-            <a:r>
-              <a:rPr lang="en" sz="1000">
-                <a:highlight>
-                  <a:schemeClr val="dk2"/>
-                </a:highlight>
-                <a:latin typeface="Consolas"/>
-                <a:ea typeface="Consolas"/>
-                <a:cs typeface="Consolas"/>
-                <a:sym typeface="Consolas"/>
-              </a:rPr>
-              <a:t/>
-            </a:r>
-            <a:endParaRPr sz="1000">
-              <a:solidFill>
-                <a:srgbClr val="CCCCCC"/>
-              </a:solidFill>
-              <a:highlight>
-                <a:schemeClr val="dk2"/>
-              </a:highlight>
-              <a:latin typeface="Consolas"/>
-              <a:ea typeface="Consolas"/>
-              <a:cs typeface="Consolas"/>
-              <a:sym typeface="Consolas"/>
-            </a:endParaRPr>
-          </a:p>
-          <a:p>
-            <a:pPr indent="0" lvl="0" marL="0" rtl="0" algn="l">
-              <a:lnSpc>
-                <a:spcPct val="115000"/>
-              </a:lnSpc>
-              <a:spcBef>
-                <a:spcPts val="0"/>
-              </a:spcBef>
-              <a:spcAft>
-                <a:spcPts val="0"/>
-              </a:spcAft>
-              <a:buNone/>
-            </a:pPr>
-            <a:r>
-              <a:rPr lang="en" sz="1000">
-                <a:highlight>
-                  <a:schemeClr val="dk2"/>
-                </a:highlight>
-                <a:latin typeface="Consolas"/>
-                <a:ea typeface="Consolas"/>
-                <a:cs typeface="Consolas"/>
-                <a:sym typeface="Consolas"/>
-              </a:rPr>
-              <a:t>using (_profiler.Measure("Separate"))</a:t>
-            </a:r>
-            <a:endParaRPr sz="1000">
-              <a:solidFill>
-                <a:srgbClr val="CCCCCC"/>
-              </a:solidFill>
-              <a:highlight>
-                <a:schemeClr val="dk2"/>
-              </a:highlight>
-              <a:latin typeface="Consolas"/>
-              <a:ea typeface="Consolas"/>
-              <a:cs typeface="Consolas"/>
-              <a:sym typeface="Consolas"/>
-            </a:endParaRPr>
-          </a:p>
-          <a:p>
-            <a:pPr indent="0" lvl="0" marL="0" rtl="0" algn="l">
-              <a:lnSpc>
-                <a:spcPct val="115000"/>
-              </a:lnSpc>
-              <a:spcBef>
-                <a:spcPts val="0"/>
-              </a:spcBef>
-              <a:spcAft>
-                <a:spcPts val="0"/>
-              </a:spcAft>
-              <a:buNone/>
-            </a:pPr>
-            <a:r>
-              <a:rPr lang="en" sz="1000">
-                <a:highlight>
-                  <a:schemeClr val="dk2"/>
-                </a:highlight>
-                <a:latin typeface="Consolas"/>
-                <a:ea typeface="Consolas"/>
-                <a:cs typeface="Consolas"/>
-                <a:sym typeface="Consolas"/>
-              </a:rPr>
-              <a:t>    _swarm.Separate();</a:t>
-            </a:r>
-            <a:endParaRPr sz="1000">
-              <a:solidFill>
-                <a:srgbClr val="CCCCCC"/>
-              </a:solidFill>
-              <a:highlight>
-                <a:schemeClr val="dk2"/>
-              </a:highlight>
-              <a:latin typeface="Consolas"/>
-              <a:ea typeface="Consolas"/>
-              <a:cs typeface="Consolas"/>
-              <a:sym typeface="Consolas"/>
-            </a:endParaRPr>
-          </a:p>
-          <a:p>
-            <a:pPr indent="0" lvl="0" marL="0" rtl="0" algn="l">
-              <a:lnSpc>
-                <a:spcPct val="115000"/>
-              </a:lnSpc>
-              <a:spcBef>
-                <a:spcPts val="0"/>
-              </a:spcBef>
-              <a:spcAft>
-                <a:spcPts val="0"/>
-              </a:spcAft>
-              <a:buNone/>
-            </a:pPr>
-            <a:r>
-              <a:rPr lang="en" sz="1000">
-                <a:highlight>
-                  <a:schemeClr val="dk2"/>
-                </a:highlight>
-                <a:latin typeface="Consolas"/>
-                <a:ea typeface="Consolas"/>
-                <a:cs typeface="Consolas"/>
-                <a:sym typeface="Consolas"/>
-              </a:rPr>
-              <a:t/>
-            </a:r>
-            <a:endParaRPr sz="1000">
-              <a:solidFill>
-                <a:srgbClr val="CCCCCC"/>
-              </a:solidFill>
-              <a:highlight>
-                <a:schemeClr val="dk2"/>
-              </a:highlight>
-              <a:latin typeface="Consolas"/>
-              <a:ea typeface="Consolas"/>
-              <a:cs typeface="Consolas"/>
-              <a:sym typeface="Consolas"/>
-            </a:endParaRPr>
-          </a:p>
-          <a:p>
-            <a:pPr indent="0" lvl="0" marL="0" rtl="0" algn="l">
-              <a:lnSpc>
-                <a:spcPct val="115000"/>
-              </a:lnSpc>
-              <a:spcBef>
-                <a:spcPts val="0"/>
-              </a:spcBef>
-              <a:spcAft>
-                <a:spcPts val="0"/>
-              </a:spcAft>
-              <a:buNone/>
-            </a:pPr>
-            <a:r>
-              <a:rPr lang="en" sz="1000">
-                <a:highlight>
-                  <a:schemeClr val="dk2"/>
-                </a:highlight>
-                <a:latin typeface="Consolas"/>
-                <a:ea typeface="Consolas"/>
-                <a:cs typeface="Consolas"/>
-                <a:sym typeface="Consolas"/>
-              </a:rPr>
-              <a:t>// Profiler.cs</a:t>
-            </a:r>
-            <a:endParaRPr sz="1000">
-              <a:solidFill>
-                <a:srgbClr val="CCCCCC"/>
-              </a:solidFill>
-              <a:highlight>
-                <a:schemeClr val="dk2"/>
-              </a:highlight>
-              <a:latin typeface="Consolas"/>
-              <a:ea typeface="Consolas"/>
-              <a:cs typeface="Consolas"/>
-              <a:sym typeface="Consolas"/>
-            </a:endParaRPr>
-          </a:p>
-          <a:p>
-            <a:pPr indent="0" lvl="0" marL="0" rtl="0" algn="l">
-              <a:lnSpc>
-                <a:spcPct val="115000"/>
-              </a:lnSpc>
-              <a:spcBef>
-                <a:spcPts val="0"/>
-              </a:spcBef>
-              <a:spcAft>
-                <a:spcPts val="0"/>
-              </a:spcAft>
-              <a:buNone/>
-            </a:pPr>
-            <a:r>
-              <a:rPr lang="en" sz="1000">
-                <a:highlight>
-                  <a:schemeClr val="dk2"/>
-                </a:highlight>
-                <a:latin typeface="Consolas"/>
-                <a:ea typeface="Consolas"/>
-                <a:cs typeface="Consolas"/>
-                <a:sym typeface="Consolas"/>
-              </a:rPr>
-              <a:t>public Scope Measure(string name) =&gt;</a:t>
-            </a:r>
-            <a:endParaRPr sz="1000">
-              <a:solidFill>
-                <a:srgbClr val="CCCCCC"/>
-              </a:solidFill>
-              <a:highlight>
-                <a:schemeClr val="dk2"/>
-              </a:highlight>
-              <a:latin typeface="Consolas"/>
-              <a:ea typeface="Consolas"/>
-              <a:cs typeface="Consolas"/>
-              <a:sym typeface="Consolas"/>
-            </a:endParaRPr>
-          </a:p>
-          <a:p>
-            <a:pPr indent="0" lvl="0" marL="0" rtl="0" algn="l">
-              <a:lnSpc>
-                <a:spcPct val="115000"/>
-              </a:lnSpc>
-              <a:spcBef>
-                <a:spcPts val="0"/>
-              </a:spcBef>
-              <a:spcAft>
-                <a:spcPts val="0"/>
-              </a:spcAft>
-              <a:buNone/>
-            </a:pPr>
-            <a:r>
-              <a:rPr lang="en" sz="1000">
-                <a:highlight>
-                  <a:schemeClr val="dk2"/>
-                </a:highlight>
-                <a:latin typeface="Consolas"/>
-                <a:ea typeface="Consolas"/>
-                <a:cs typeface="Consolas"/>
-                <a:sym typeface="Consolas"/>
-              </a:rPr>
-              <a:t>    new(this, name, Stopwatch.GetTimestamp());</a:t>
-            </a:r>
-            <a:endParaRPr sz="1000">
-              <a:solidFill>
-                <a:srgbClr val="CCCCCC"/>
-              </a:solidFill>
-              <a:highlight>
-                <a:schemeClr val="dk2"/>
-              </a:highlight>
-              <a:latin typeface="Consolas"/>
-              <a:ea typeface="Consolas"/>
-              <a:cs typeface="Consolas"/>
-              <a:sym typeface="Consolas"/>
-            </a:endParaRPr>
           </a:p>
         </p:txBody>
       </p:sp>

--- a/slides/12 Vampire Survivors.pptx
+++ b/slides/12 Vampire Survivors.pptx
@@ -37,8 +37,10 @@
     <p:sldId id="312" r:id="rId71"/>
     <p:sldId id="317" r:id="rId39"/>
     <p:sldId id="313" r:id="rId72"/>
+    <p:sldId id="324" r:id="rId32"/>
     <p:sldId id="314" r:id="rId73"/>
     <p:sldId id="280" r:id="rId30"/>
+    <p:sldId id="325" r:id="rId31"/>
     <p:sldId id="292" r:id="rId42"/>
     <p:sldId id="293" r:id="rId52"/>
     <p:sldId id="315" r:id="rId41"/>
@@ -2670,6 +2672,69 @@
 </p:notes>
 </file>
 
+<file path=ppt/notesSlides/notesSlide36.xml><?xml version="1.0" encoding="utf-8"?>
+<p:notes xmlns:a="http://schemas.openxmlformats.org/drawingml/2006/main" xmlns:p="http://schemas.openxmlformats.org/presentationml/2006/main" xmlns:r="http://schemas.openxmlformats.org/officeDocument/2006/relationships">
+  <p:cSld>
+    <p:spTree>
+      <p:nvGrpSpPr>
+        <p:cNvPr id="1" name=""/>
+        <p:cNvGrpSpPr/>
+        <p:nvPr/>
+      </p:nvGrpSpPr>
+      <p:grpSpPr>
+        <a:xfrm>
+          <a:off x="0" y="0"/>
+          <a:ext cx="0" cy="0"/>
+          <a:chOff x="0" y="0"/>
+          <a:chExt cx="0" cy="0"/>
+        </a:xfrm>
+      </p:grpSpPr>
+      <p:sp>
+        <p:nvSpPr>
+          <p:cNvPr id="2" name="Slide Image Placeholder 1"/>
+          <p:cNvSpPr>
+            <a:spLocks noGrp="1"/>
+          </p:cNvSpPr>
+          <p:nvPr>
+            <p:ph type="sldImg" idx="2"/>
+          </p:nvPr>
+        </p:nvSpPr>
+        <p:spPr/>
+      </p:sp>
+      <p:sp>
+        <p:nvSpPr>
+          <p:cNvPr id="3" name="Notes Placeholder 2"/>
+          <p:cNvSpPr>
+            <a:spLocks noGrp="1"/>
+          </p:cNvSpPr>
+          <p:nvPr>
+            <p:ph type="body" idx="1"/>
+          </p:nvPr>
+        </p:nvSpPr>
+        <p:spPr/>
+        <p:txBody>
+          <a:bodyPr/>
+          <a:lstStyle/>
+          <a:p>
+            <a:r>
+              <a:t>Who holds what in the finished game. The run is separate from the states, so a level-up can pause it by sitting on top.</a:t>
+            </a:r>
+          </a:p>
+          <a:p>
+            <a:r>
+              <a:t>Point at the three boxes marked arrays: those are the only data-oriented parts, because those are the only hot ones.</a:t>
+            </a:r>
+          </a:p>
+        </p:txBody>
+      </p:sp>
+    </p:spTree>
+  </p:cSld>
+  <p:clrMapOvr>
+    <a:masterClrMapping/>
+  </p:clrMapOvr>
+</p:notes>
+</file>
+
 <file path=ppt/notesSlides/notesSlide37.xml><?xml version="1.0" encoding="utf-8"?>
 <p:notes xmlns:a="http://schemas.openxmlformats.org/drawingml/2006/main" xmlns:r="http://schemas.openxmlformats.org/officeDocument/2006/relationships" xmlns:mc="http://schemas.openxmlformats.org/markup-compatibility/2006" xmlns:mv="urn:schemas-microsoft-com:mac:vml" xmlns:p="http://schemas.openxmlformats.org/presentationml/2006/main" xmlns:c="http://schemas.openxmlformats.org/drawingml/2006/chart" xmlns:dgm="http://schemas.openxmlformats.org/drawingml/2006/diagram" xmlns:o="urn:schemas-microsoft-com:office:office" xmlns:v="urn:schemas-microsoft-com:vml" xmlns:pvml="urn:schemas-microsoft-com:office:powerpoint" xmlns:com="http://schemas.openxmlformats.org/drawingml/2006/compatibility" xmlns:p14="http://schemas.microsoft.com/office/powerpoint/2010/main" xmlns:p15="http://schemas.microsoft.com/office/powerpoint/2012/main" xmlns:ahyp="http://schemas.microsoft.com/office/drawing/2018/hyperlinkcolor" showMasterPhAnim="0" showMasterSp="0">
   <p:cSld>
@@ -2846,6 +2911,64 @@
           <a:p>
             <a:r>
               <a:t>Say: the site explains the ideas, the README helps you find them in the code, the slides are for today.</a:t>
+            </a:r>
+          </a:p>
+        </p:txBody>
+      </p:sp>
+    </p:spTree>
+  </p:cSld>
+  <p:clrMapOvr>
+    <a:masterClrMapping/>
+  </p:clrMapOvr>
+</p:notes>
+</file>
+
+<file path=ppt/notesSlides/notesSlide5.xml><?xml version="1.0" encoding="utf-8"?>
+<p:notes xmlns:a="http://schemas.openxmlformats.org/drawingml/2006/main" xmlns:p="http://schemas.openxmlformats.org/presentationml/2006/main" xmlns:r="http://schemas.openxmlformats.org/officeDocument/2006/relationships">
+  <p:cSld>
+    <p:spTree>
+      <p:nvGrpSpPr>
+        <p:cNvPr id="1" name=""/>
+        <p:cNvGrpSpPr/>
+        <p:nvPr/>
+      </p:nvGrpSpPr>
+      <p:grpSpPr>
+        <a:xfrm>
+          <a:off x="0" y="0"/>
+          <a:ext cx="0" cy="0"/>
+          <a:chOff x="0" y="0"/>
+          <a:chExt cx="0" cy="0"/>
+        </a:xfrm>
+      </p:grpSpPr>
+      <p:sp>
+        <p:nvSpPr>
+          <p:cNvPr id="2" name="Slide Image Placeholder 1"/>
+          <p:cNvSpPr>
+            <a:spLocks noGrp="1"/>
+          </p:cNvSpPr>
+          <p:nvPr>
+            <p:ph type="sldImg" idx="2"/>
+          </p:nvPr>
+        </p:nvSpPr>
+        <p:spPr/>
+      </p:sp>
+      <p:sp>
+        <p:nvSpPr>
+          <p:cNvPr id="3" name="Notes Placeholder 2"/>
+          <p:cNvSpPr>
+            <a:spLocks noGrp="1"/>
+          </p:cNvSpPr>
+          <p:nvPr>
+            <p:ph type="body" idx="1"/>
+          </p:nvPr>
+        </p:nvSpPr>
+        <p:spPr/>
+        <p:txBody>
+          <a:bodyPr/>
+          <a:lstStyle/>
+          <a:p>
+            <a:r>
+              <a:t>The session in one slide. Read each concern aloud and let the class give the answer before pointing at it.</a:t>
             </a:r>
           </a:p>
         </p:txBody>
@@ -18096,6 +18219,1484 @@
 </p:sld>
 </file>
 
+<file path=ppt/slides/slide36.xml><?xml version="1.0" encoding="utf-8"?>
+<p:sld xmlns:a="http://schemas.openxmlformats.org/drawingml/2006/main" xmlns:p="http://schemas.openxmlformats.org/presentationml/2006/main" xmlns:r="http://schemas.openxmlformats.org/officeDocument/2006/relationships">
+  <p:cSld>
+    <p:spTree>
+      <p:nvGrpSpPr>
+        <p:cNvPr id="1" name=""/>
+        <p:cNvGrpSpPr/>
+        <p:nvPr/>
+      </p:nvGrpSpPr>
+      <p:grpSpPr/>
+      <p:sp>
+        <p:nvSpPr>
+          <p:cNvPr id="2" name="Title 1"/>
+          <p:cNvSpPr>
+            <a:spLocks noGrp="1"/>
+          </p:cNvSpPr>
+          <p:nvPr>
+            <p:ph type="title"/>
+          </p:nvPr>
+        </p:nvSpPr>
+        <p:spPr/>
+        <p:txBody>
+          <a:bodyPr/>
+          <a:lstStyle/>
+          <a:p>
+            <a:pPr indent="0" lvl="0" marL="0" rtl="0" algn="l">
+              <a:spcBef>
+                <a:spcPts val="0"/>
+              </a:spcBef>
+              <a:spcAft>
+                <a:spcPts val="0"/>
+              </a:spcAft>
+              <a:buNone/>
+            </a:pPr>
+            <a:r>
+              <a:rPr lang="en"/>
+              <a:t>The Whole Game: Who Holds What</a:t>
+            </a:r>
+            <a:endParaRPr/>
+          </a:p>
+        </p:txBody>
+      </p:sp>
+      <p:sp>
+        <p:nvSpPr>
+          <p:cNvPr id="3" name="Text Placeholder 2"/>
+          <p:cNvSpPr>
+            <a:spLocks noGrp="1"/>
+          </p:cNvSpPr>
+          <p:nvPr>
+            <p:ph type="body" idx="1"/>
+          </p:nvPr>
+        </p:nvSpPr>
+        <p:spPr>
+          <a:xfrm>
+            <a:off x="311700" y="885950"/>
+            <a:ext cx="8520600" cy="521208"/>
+          </a:xfrm>
+        </p:spPr>
+        <p:txBody>
+          <a:bodyPr/>
+          <a:lstStyle/>
+          <a:p>
+            <a:pPr indent="-330200" lvl="0" marL="457200" rtl="0" algn="l">
+              <a:spcBef>
+                <a:spcPts val="0"/>
+              </a:spcBef>
+              <a:spcAft>
+                <a:spcPts val="0"/>
+              </a:spcAft>
+              <a:buSzPts val="1600"/>
+              <a:buChar char="●"/>
+            </a:pPr>
+            <a:r>
+              <a:rPr lang="en" b="1"/>
+              <a:t>A Run holds one game, and the states decide when it runs.</a:t>
+            </a:r>
+            <a:endParaRPr/>
+          </a:p>
+        </p:txBody>
+      </p:sp>
+      <p:sp>
+        <p:nvSpPr>
+          <p:cNvPr id="4" name="Rounded Rectangle 3"/>
+          <p:cNvSpPr/>
+          <p:nvPr/>
+        </p:nvSpPr>
+        <p:spPr>
+          <a:xfrm>
+            <a:off x="3429000" y="1481328"/>
+            <a:ext cx="2286000" cy="566928"/>
+          </a:xfrm>
+          <a:prstGeom prst="roundRect">
+            <a:avLst>
+              <a:gd name="adj" fmla="val 12000"/>
+            </a:avLst>
+          </a:prstGeom>
+          <a:solidFill>
+            <a:srgbClr val="2E3338"/>
+          </a:solidFill>
+          <a:ln w="25400">
+            <a:solidFill>
+              <a:srgbClr val="D45D35"/>
+            </a:solidFill>
+          </a:ln>
+          <a:effectLst/>
+        </p:spPr>
+        <p:style>
+          <a:lnRef idx="1">
+            <a:schemeClr val="accent1"/>
+          </a:lnRef>
+          <a:fillRef idx="3">
+            <a:schemeClr val="accent1"/>
+          </a:fillRef>
+          <a:effectRef idx="2">
+            <a:schemeClr val="accent1"/>
+          </a:effectRef>
+          <a:fontRef idx="minor">
+            <a:schemeClr val="lt1"/>
+          </a:fontRef>
+        </p:style>
+        <p:txBody>
+          <a:bodyPr rtlCol="0" anchor="ctr" wrap="square" lIns="73152" rIns="73152"/>
+          <a:lstStyle/>
+          <a:p>
+            <a:pPr algn="ctr"/>
+            <a:r>
+              <a:rPr sz="1300" b="1">
+                <a:solidFill>
+                  <a:srgbClr val="DEE2E6"/>
+                </a:solidFill>
+              </a:rPr>
+              <a:t>Game1 : Core</a:t>
+            </a:r>
+          </a:p>
+        </p:txBody>
+      </p:sp>
+      <p:sp>
+        <p:nvSpPr>
+          <p:cNvPr id="5" name="Rounded Rectangle 4"/>
+          <p:cNvSpPr/>
+          <p:nvPr/>
+        </p:nvSpPr>
+        <p:spPr>
+          <a:xfrm>
+            <a:off x="594359" y="2246376"/>
+            <a:ext cx="2286000" cy="566928"/>
+          </a:xfrm>
+          <a:prstGeom prst="roundRect">
+            <a:avLst>
+              <a:gd name="adj" fmla="val 12000"/>
+            </a:avLst>
+          </a:prstGeom>
+          <a:solidFill>
+            <a:srgbClr val="2E3338"/>
+          </a:solidFill>
+          <a:ln>
+            <a:noFill/>
+          </a:ln>
+          <a:effectLst/>
+        </p:spPr>
+        <p:style>
+          <a:lnRef idx="1">
+            <a:schemeClr val="accent1"/>
+          </a:lnRef>
+          <a:fillRef idx="3">
+            <a:schemeClr val="accent1"/>
+          </a:fillRef>
+          <a:effectRef idx="2">
+            <a:schemeClr val="accent1"/>
+          </a:effectRef>
+          <a:fontRef idx="minor">
+            <a:schemeClr val="lt1"/>
+          </a:fontRef>
+        </p:style>
+        <p:txBody>
+          <a:bodyPr rtlCol="0" anchor="ctr" wrap="square" lIns="73152" rIns="73152"/>
+          <a:lstStyle/>
+          <a:p>
+            <a:pPr algn="ctr"/>
+            <a:r>
+              <a:rPr sz="1300" b="1">
+                <a:solidFill>
+                  <a:srgbClr val="DEE2E6"/>
+                </a:solidFill>
+              </a:rPr>
+              <a:t>StateStack</a:t>
+            </a:r>
+          </a:p>
+        </p:txBody>
+      </p:sp>
+      <p:sp>
+        <p:nvSpPr>
+          <p:cNvPr id="6" name="Rounded Rectangle 5"/>
+          <p:cNvSpPr/>
+          <p:nvPr/>
+        </p:nvSpPr>
+        <p:spPr>
+          <a:xfrm>
+            <a:off x="374903" y="3011424"/>
+            <a:ext cx="1307592" cy="566928"/>
+          </a:xfrm>
+          <a:prstGeom prst="roundRect">
+            <a:avLst>
+              <a:gd name="adj" fmla="val 12000"/>
+            </a:avLst>
+          </a:prstGeom>
+          <a:solidFill>
+            <a:srgbClr val="2E3338"/>
+          </a:solidFill>
+          <a:ln>
+            <a:noFill/>
+          </a:ln>
+          <a:effectLst/>
+        </p:spPr>
+        <p:style>
+          <a:lnRef idx="1">
+            <a:schemeClr val="accent1"/>
+          </a:lnRef>
+          <a:fillRef idx="3">
+            <a:schemeClr val="accent1"/>
+          </a:fillRef>
+          <a:effectRef idx="2">
+            <a:schemeClr val="accent1"/>
+          </a:effectRef>
+          <a:fontRef idx="minor">
+            <a:schemeClr val="lt1"/>
+          </a:fontRef>
+        </p:style>
+        <p:txBody>
+          <a:bodyPr rtlCol="0" anchor="ctr" wrap="square" lIns="73152" rIns="73152"/>
+          <a:lstStyle/>
+          <a:p>
+            <a:pPr algn="ctr"/>
+            <a:r>
+              <a:rPr sz="1200" b="1">
+                <a:solidFill>
+                  <a:srgbClr val="DEE2E6"/>
+                </a:solidFill>
+              </a:rPr>
+              <a:t>PlayState</a:t>
+            </a:r>
+          </a:p>
+          <a:p>
+            <a:pPr algn="ctr"/>
+            <a:r>
+              <a:rPr sz="1000" b="0">
+                <a:solidFill>
+                  <a:srgbClr val="9AA3AB"/>
+                </a:solidFill>
+              </a:rPr>
+              <a:t>updates the run</a:t>
+            </a:r>
+          </a:p>
+        </p:txBody>
+      </p:sp>
+      <p:cxnSp>
+        <p:nvCxnSpPr>
+          <p:cNvPr id="7" name="Connector 6"/>
+          <p:cNvCxnSpPr/>
+          <p:nvPr/>
+        </p:nvCxnSpPr>
+        <p:spPr>
+          <a:xfrm flipH="1">
+            <a:off x="1028700" y="2831592"/>
+            <a:ext cx="708660" cy="161544"/>
+          </a:xfrm>
+          <a:prstGeom prst="line">
+            <a:avLst/>
+          </a:prstGeom>
+          <a:ln w="25400">
+            <a:solidFill>
+              <a:srgbClr val="9AA3AB"/>
+            </a:solidFill>
+            <a:tailEnd type="triangle"/>
+          </a:ln>
+        </p:spPr>
+        <p:style>
+          <a:lnRef idx="2">
+            <a:schemeClr val="accent1"/>
+          </a:lnRef>
+          <a:fillRef idx="0">
+            <a:schemeClr val="accent1"/>
+          </a:fillRef>
+          <a:effectRef idx="1">
+            <a:schemeClr val="accent1"/>
+          </a:effectRef>
+          <a:fontRef idx="minor">
+            <a:schemeClr val="tx1"/>
+          </a:fontRef>
+        </p:style>
+      </p:cxnSp>
+      <p:sp>
+        <p:nvSpPr>
+          <p:cNvPr id="8" name="Rounded Rectangle 7"/>
+          <p:cNvSpPr/>
+          <p:nvPr/>
+        </p:nvSpPr>
+        <p:spPr>
+          <a:xfrm>
+            <a:off x="1792223" y="3011424"/>
+            <a:ext cx="1307592" cy="566928"/>
+          </a:xfrm>
+          <a:prstGeom prst="roundRect">
+            <a:avLst>
+              <a:gd name="adj" fmla="val 12000"/>
+            </a:avLst>
+          </a:prstGeom>
+          <a:solidFill>
+            <a:srgbClr val="2E3338"/>
+          </a:solidFill>
+          <a:ln>
+            <a:noFill/>
+          </a:ln>
+          <a:effectLst/>
+        </p:spPr>
+        <p:style>
+          <a:lnRef idx="1">
+            <a:schemeClr val="accent1"/>
+          </a:lnRef>
+          <a:fillRef idx="3">
+            <a:schemeClr val="accent1"/>
+          </a:fillRef>
+          <a:effectRef idx="2">
+            <a:schemeClr val="accent1"/>
+          </a:effectRef>
+          <a:fontRef idx="minor">
+            <a:schemeClr val="lt1"/>
+          </a:fontRef>
+        </p:style>
+        <p:txBody>
+          <a:bodyPr rtlCol="0" anchor="ctr" wrap="square" lIns="73152" rIns="73152"/>
+          <a:lstStyle/>
+          <a:p>
+            <a:pPr algn="ctr"/>
+            <a:r>
+              <a:rPr sz="1200" b="1">
+                <a:solidFill>
+                  <a:srgbClr val="DEE2E6"/>
+                </a:solidFill>
+              </a:rPr>
+              <a:t>LevelUpState</a:t>
+            </a:r>
+          </a:p>
+          <a:p>
+            <a:pPr algn="ctr"/>
+            <a:r>
+              <a:rPr sz="1000" b="0">
+                <a:solidFill>
+                  <a:srgbClr val="9AA3AB"/>
+                </a:solidFill>
+              </a:rPr>
+              <a:t>pushed on top</a:t>
+            </a:r>
+          </a:p>
+        </p:txBody>
+      </p:sp>
+      <p:cxnSp>
+        <p:nvCxnSpPr>
+          <p:cNvPr id="9" name="Connector 8"/>
+          <p:cNvCxnSpPr/>
+          <p:nvPr/>
+        </p:nvCxnSpPr>
+        <p:spPr>
+          <a:xfrm>
+            <a:off x="1737360" y="2831592"/>
+            <a:ext cx="708660" cy="161544"/>
+          </a:xfrm>
+          <a:prstGeom prst="line">
+            <a:avLst/>
+          </a:prstGeom>
+          <a:ln w="25400">
+            <a:solidFill>
+              <a:srgbClr val="9AA3AB"/>
+            </a:solidFill>
+            <a:tailEnd type="triangle"/>
+          </a:ln>
+        </p:spPr>
+        <p:style>
+          <a:lnRef idx="2">
+            <a:schemeClr val="accent1"/>
+          </a:lnRef>
+          <a:fillRef idx="0">
+            <a:schemeClr val="accent1"/>
+          </a:fillRef>
+          <a:effectRef idx="1">
+            <a:schemeClr val="accent1"/>
+          </a:effectRef>
+          <a:fontRef idx="minor">
+            <a:schemeClr val="tx1"/>
+          </a:fontRef>
+        </p:style>
+      </p:cxnSp>
+      <p:cxnSp>
+        <p:nvCxnSpPr>
+          <p:cNvPr id="10" name="Connector 9"/>
+          <p:cNvCxnSpPr/>
+          <p:nvPr/>
+        </p:nvCxnSpPr>
+        <p:spPr>
+          <a:xfrm flipH="1">
+            <a:off x="1737360" y="2066544"/>
+            <a:ext cx="2834640" cy="161544"/>
+          </a:xfrm>
+          <a:prstGeom prst="line">
+            <a:avLst/>
+          </a:prstGeom>
+          <a:ln w="25400">
+            <a:solidFill>
+              <a:srgbClr val="9AA3AB"/>
+            </a:solidFill>
+            <a:tailEnd type="triangle"/>
+          </a:ln>
+        </p:spPr>
+        <p:style>
+          <a:lnRef idx="2">
+            <a:schemeClr val="accent1"/>
+          </a:lnRef>
+          <a:fillRef idx="0">
+            <a:schemeClr val="accent1"/>
+          </a:fillRef>
+          <a:effectRef idx="1">
+            <a:schemeClr val="accent1"/>
+          </a:effectRef>
+          <a:fontRef idx="minor">
+            <a:schemeClr val="tx1"/>
+          </a:fontRef>
+        </p:style>
+      </p:cxnSp>
+      <p:sp>
+        <p:nvSpPr>
+          <p:cNvPr id="11" name="Rounded Rectangle 10"/>
+          <p:cNvSpPr/>
+          <p:nvPr/>
+        </p:nvSpPr>
+        <p:spPr>
+          <a:xfrm>
+            <a:off x="4846320" y="2246376"/>
+            <a:ext cx="2286000" cy="566928"/>
+          </a:xfrm>
+          <a:prstGeom prst="roundRect">
+            <a:avLst>
+              <a:gd name="adj" fmla="val 12000"/>
+            </a:avLst>
+          </a:prstGeom>
+          <a:solidFill>
+            <a:srgbClr val="2E3338"/>
+          </a:solidFill>
+          <a:ln>
+            <a:noFill/>
+          </a:ln>
+          <a:effectLst/>
+        </p:spPr>
+        <p:style>
+          <a:lnRef idx="1">
+            <a:schemeClr val="accent1"/>
+          </a:lnRef>
+          <a:fillRef idx="3">
+            <a:schemeClr val="accent1"/>
+          </a:fillRef>
+          <a:effectRef idx="2">
+            <a:schemeClr val="accent1"/>
+          </a:effectRef>
+          <a:fontRef idx="minor">
+            <a:schemeClr val="lt1"/>
+          </a:fontRef>
+        </p:style>
+        <p:txBody>
+          <a:bodyPr rtlCol="0" anchor="ctr" wrap="square" lIns="73152" rIns="73152"/>
+          <a:lstStyle/>
+          <a:p>
+            <a:pPr algn="ctr"/>
+            <a:r>
+              <a:rPr sz="1300" b="1">
+                <a:solidFill>
+                  <a:srgbClr val="DEE2E6"/>
+                </a:solidFill>
+              </a:rPr>
+              <a:t>Run</a:t>
+            </a:r>
+          </a:p>
+          <a:p>
+            <a:pPr algn="ctr"/>
+            <a:r>
+              <a:rPr sz="1100" b="0">
+                <a:solidFill>
+                  <a:srgbClr val="9AA3AB"/>
+                </a:solidFill>
+              </a:rPr>
+              <a:t>one game</a:t>
+            </a:r>
+          </a:p>
+        </p:txBody>
+      </p:sp>
+      <p:sp>
+        <p:nvSpPr>
+          <p:cNvPr id="12" name="Rounded Rectangle 11"/>
+          <p:cNvSpPr/>
+          <p:nvPr/>
+        </p:nvSpPr>
+        <p:spPr>
+          <a:xfrm>
+            <a:off x="3429000" y="3011424"/>
+            <a:ext cx="2286000" cy="566928"/>
+          </a:xfrm>
+          <a:prstGeom prst="roundRect">
+            <a:avLst>
+              <a:gd name="adj" fmla="val 12000"/>
+            </a:avLst>
+          </a:prstGeom>
+          <a:solidFill>
+            <a:srgbClr val="2E3338"/>
+          </a:solidFill>
+          <a:ln>
+            <a:noFill/>
+          </a:ln>
+          <a:effectLst/>
+        </p:spPr>
+        <p:style>
+          <a:lnRef idx="1">
+            <a:schemeClr val="accent1"/>
+          </a:lnRef>
+          <a:fillRef idx="3">
+            <a:schemeClr val="accent1"/>
+          </a:fillRef>
+          <a:effectRef idx="2">
+            <a:schemeClr val="accent1"/>
+          </a:effectRef>
+          <a:fontRef idx="minor">
+            <a:schemeClr val="lt1"/>
+          </a:fontRef>
+        </p:style>
+        <p:txBody>
+          <a:bodyPr rtlCol="0" anchor="ctr" wrap="square" lIns="73152" rIns="73152"/>
+          <a:lstStyle/>
+          <a:p>
+            <a:pPr algn="ctr"/>
+            <a:r>
+              <a:rPr sz="1300" b="1">
+                <a:solidFill>
+                  <a:srgbClr val="DEE2E6"/>
+                </a:solidFill>
+              </a:rPr>
+              <a:t>Swarm</a:t>
+            </a:r>
+          </a:p>
+        </p:txBody>
+      </p:sp>
+      <p:sp>
+        <p:nvSpPr>
+          <p:cNvPr id="13" name="Rounded Rectangle 12"/>
+          <p:cNvSpPr/>
+          <p:nvPr/>
+        </p:nvSpPr>
+        <p:spPr>
+          <a:xfrm>
+            <a:off x="3209544" y="3776472"/>
+            <a:ext cx="1307592" cy="566928"/>
+          </a:xfrm>
+          <a:prstGeom prst="roundRect">
+            <a:avLst>
+              <a:gd name="adj" fmla="val 12000"/>
+            </a:avLst>
+          </a:prstGeom>
+          <a:solidFill>
+            <a:srgbClr val="2E3338"/>
+          </a:solidFill>
+          <a:ln>
+            <a:noFill/>
+          </a:ln>
+          <a:effectLst/>
+        </p:spPr>
+        <p:style>
+          <a:lnRef idx="1">
+            <a:schemeClr val="accent1"/>
+          </a:lnRef>
+          <a:fillRef idx="3">
+            <a:schemeClr val="accent1"/>
+          </a:fillRef>
+          <a:effectRef idx="2">
+            <a:schemeClr val="accent1"/>
+          </a:effectRef>
+          <a:fontRef idx="minor">
+            <a:schemeClr val="lt1"/>
+          </a:fontRef>
+        </p:style>
+        <p:txBody>
+          <a:bodyPr rtlCol="0" anchor="ctr" wrap="square" lIns="73152" rIns="73152"/>
+          <a:lstStyle/>
+          <a:p>
+            <a:pPr algn="ctr"/>
+            <a:r>
+              <a:rPr sz="1200" b="1">
+                <a:solidFill>
+                  <a:srgbClr val="DEE2E6"/>
+                </a:solidFill>
+              </a:rPr>
+              <a:t>Enemies</a:t>
+            </a:r>
+          </a:p>
+          <a:p>
+            <a:pPr algn="ctr"/>
+            <a:r>
+              <a:rPr sz="1000" b="0">
+                <a:solidFill>
+                  <a:srgbClr val="9AA3AB"/>
+                </a:solidFill>
+              </a:rPr>
+              <a:t>arrays</a:t>
+            </a:r>
+          </a:p>
+        </p:txBody>
+      </p:sp>
+      <p:cxnSp>
+        <p:nvCxnSpPr>
+          <p:cNvPr id="14" name="Connector 13"/>
+          <p:cNvCxnSpPr/>
+          <p:nvPr/>
+        </p:nvCxnSpPr>
+        <p:spPr>
+          <a:xfrm flipH="1">
+            <a:off x="3863340" y="3596640"/>
+            <a:ext cx="708660" cy="161544"/>
+          </a:xfrm>
+          <a:prstGeom prst="line">
+            <a:avLst/>
+          </a:prstGeom>
+          <a:ln w="25400">
+            <a:solidFill>
+              <a:srgbClr val="9AA3AB"/>
+            </a:solidFill>
+            <a:tailEnd type="triangle"/>
+          </a:ln>
+        </p:spPr>
+        <p:style>
+          <a:lnRef idx="2">
+            <a:schemeClr val="accent1"/>
+          </a:lnRef>
+          <a:fillRef idx="0">
+            <a:schemeClr val="accent1"/>
+          </a:fillRef>
+          <a:effectRef idx="1">
+            <a:schemeClr val="accent1"/>
+          </a:effectRef>
+          <a:fontRef idx="minor">
+            <a:schemeClr val="tx1"/>
+          </a:fontRef>
+        </p:style>
+      </p:cxnSp>
+      <p:sp>
+        <p:nvSpPr>
+          <p:cNvPr id="15" name="Rounded Rectangle 14"/>
+          <p:cNvSpPr/>
+          <p:nvPr/>
+        </p:nvSpPr>
+        <p:spPr>
+          <a:xfrm>
+            <a:off x="4626864" y="3776472"/>
+            <a:ext cx="1307592" cy="566928"/>
+          </a:xfrm>
+          <a:prstGeom prst="roundRect">
+            <a:avLst>
+              <a:gd name="adj" fmla="val 12000"/>
+            </a:avLst>
+          </a:prstGeom>
+          <a:solidFill>
+            <a:srgbClr val="2E3338"/>
+          </a:solidFill>
+          <a:ln>
+            <a:noFill/>
+          </a:ln>
+          <a:effectLst/>
+        </p:spPr>
+        <p:style>
+          <a:lnRef idx="1">
+            <a:schemeClr val="accent1"/>
+          </a:lnRef>
+          <a:fillRef idx="3">
+            <a:schemeClr val="accent1"/>
+          </a:fillRef>
+          <a:effectRef idx="2">
+            <a:schemeClr val="accent1"/>
+          </a:effectRef>
+          <a:fontRef idx="minor">
+            <a:schemeClr val="lt1"/>
+          </a:fontRef>
+        </p:style>
+        <p:txBody>
+          <a:bodyPr rtlCol="0" anchor="ctr" wrap="square" lIns="73152" rIns="73152"/>
+          <a:lstStyle/>
+          <a:p>
+            <a:pPr algn="ctr"/>
+            <a:r>
+              <a:rPr sz="1200" b="1">
+                <a:solidFill>
+                  <a:srgbClr val="DEE2E6"/>
+                </a:solidFill>
+              </a:rPr>
+              <a:t>FlatGrid</a:t>
+            </a:r>
+          </a:p>
+          <a:p>
+            <a:pPr algn="ctr"/>
+            <a:r>
+              <a:rPr sz="1000" b="0">
+                <a:solidFill>
+                  <a:srgbClr val="9AA3AB"/>
+                </a:solidFill>
+              </a:rPr>
+              <a:t>arrays</a:t>
+            </a:r>
+          </a:p>
+        </p:txBody>
+      </p:sp>
+      <p:cxnSp>
+        <p:nvCxnSpPr>
+          <p:cNvPr id="16" name="Connector 15"/>
+          <p:cNvCxnSpPr/>
+          <p:nvPr/>
+        </p:nvCxnSpPr>
+        <p:spPr>
+          <a:xfrm>
+            <a:off x="4572000" y="3596640"/>
+            <a:ext cx="708660" cy="161544"/>
+          </a:xfrm>
+          <a:prstGeom prst="line">
+            <a:avLst/>
+          </a:prstGeom>
+          <a:ln w="25400">
+            <a:solidFill>
+              <a:srgbClr val="9AA3AB"/>
+            </a:solidFill>
+            <a:tailEnd type="triangle"/>
+          </a:ln>
+        </p:spPr>
+        <p:style>
+          <a:lnRef idx="2">
+            <a:schemeClr val="accent1"/>
+          </a:lnRef>
+          <a:fillRef idx="0">
+            <a:schemeClr val="accent1"/>
+          </a:fillRef>
+          <a:effectRef idx="1">
+            <a:schemeClr val="accent1"/>
+          </a:effectRef>
+          <a:fontRef idx="minor">
+            <a:schemeClr val="tx1"/>
+          </a:fontRef>
+        </p:style>
+      </p:cxnSp>
+      <p:cxnSp>
+        <p:nvCxnSpPr>
+          <p:cNvPr id="17" name="Connector 16"/>
+          <p:cNvCxnSpPr/>
+          <p:nvPr/>
+        </p:nvCxnSpPr>
+        <p:spPr>
+          <a:xfrm flipH="1">
+            <a:off x="4572000" y="2831592"/>
+            <a:ext cx="1417320" cy="161544"/>
+          </a:xfrm>
+          <a:prstGeom prst="line">
+            <a:avLst/>
+          </a:prstGeom>
+          <a:ln w="25400">
+            <a:solidFill>
+              <a:srgbClr val="9AA3AB"/>
+            </a:solidFill>
+            <a:tailEnd type="triangle"/>
+          </a:ln>
+        </p:spPr>
+        <p:style>
+          <a:lnRef idx="2">
+            <a:schemeClr val="accent1"/>
+          </a:lnRef>
+          <a:fillRef idx="0">
+            <a:schemeClr val="accent1"/>
+          </a:fillRef>
+          <a:effectRef idx="1">
+            <a:schemeClr val="accent1"/>
+          </a:effectRef>
+          <a:fontRef idx="minor">
+            <a:schemeClr val="tx1"/>
+          </a:fontRef>
+        </p:style>
+      </p:cxnSp>
+      <p:sp>
+        <p:nvSpPr>
+          <p:cNvPr id="18" name="Rounded Rectangle 17"/>
+          <p:cNvSpPr/>
+          <p:nvPr/>
+        </p:nvSpPr>
+        <p:spPr>
+          <a:xfrm>
+            <a:off x="6044184" y="3011424"/>
+            <a:ext cx="1307592" cy="566928"/>
+          </a:xfrm>
+          <a:prstGeom prst="roundRect">
+            <a:avLst>
+              <a:gd name="adj" fmla="val 12000"/>
+            </a:avLst>
+          </a:prstGeom>
+          <a:solidFill>
+            <a:srgbClr val="2E3338"/>
+          </a:solidFill>
+          <a:ln>
+            <a:noFill/>
+          </a:ln>
+          <a:effectLst/>
+        </p:spPr>
+        <p:style>
+          <a:lnRef idx="1">
+            <a:schemeClr val="accent1"/>
+          </a:lnRef>
+          <a:fillRef idx="3">
+            <a:schemeClr val="accent1"/>
+          </a:fillRef>
+          <a:effectRef idx="2">
+            <a:schemeClr val="accent1"/>
+          </a:effectRef>
+          <a:fontRef idx="minor">
+            <a:schemeClr val="lt1"/>
+          </a:fontRef>
+        </p:style>
+        <p:txBody>
+          <a:bodyPr rtlCol="0" anchor="ctr" wrap="square" lIns="73152" rIns="73152"/>
+          <a:lstStyle/>
+          <a:p>
+            <a:pPr algn="ctr"/>
+            <a:r>
+              <a:rPr sz="1200" b="1">
+                <a:solidFill>
+                  <a:srgbClr val="DEE2E6"/>
+                </a:solidFill>
+              </a:rPr>
+              <a:t>Gems</a:t>
+            </a:r>
+          </a:p>
+          <a:p>
+            <a:pPr algn="ctr"/>
+            <a:r>
+              <a:rPr sz="1000" b="0">
+                <a:solidFill>
+                  <a:srgbClr val="9AA3AB"/>
+                </a:solidFill>
+              </a:rPr>
+              <a:t>arrays</a:t>
+            </a:r>
+          </a:p>
+        </p:txBody>
+      </p:sp>
+      <p:cxnSp>
+        <p:nvCxnSpPr>
+          <p:cNvPr id="19" name="Connector 18"/>
+          <p:cNvCxnSpPr/>
+          <p:nvPr/>
+        </p:nvCxnSpPr>
+        <p:spPr>
+          <a:xfrm>
+            <a:off x="5989320" y="2831592"/>
+            <a:ext cx="708660" cy="161544"/>
+          </a:xfrm>
+          <a:prstGeom prst="line">
+            <a:avLst/>
+          </a:prstGeom>
+          <a:ln w="25400">
+            <a:solidFill>
+              <a:srgbClr val="9AA3AB"/>
+            </a:solidFill>
+            <a:tailEnd type="triangle"/>
+          </a:ln>
+        </p:spPr>
+        <p:style>
+          <a:lnRef idx="2">
+            <a:schemeClr val="accent1"/>
+          </a:lnRef>
+          <a:fillRef idx="0">
+            <a:schemeClr val="accent1"/>
+          </a:fillRef>
+          <a:effectRef idx="1">
+            <a:schemeClr val="accent1"/>
+          </a:effectRef>
+          <a:fontRef idx="minor">
+            <a:schemeClr val="tx1"/>
+          </a:fontRef>
+        </p:style>
+      </p:cxnSp>
+      <p:sp>
+        <p:nvSpPr>
+          <p:cNvPr id="20" name="Rounded Rectangle 19"/>
+          <p:cNvSpPr/>
+          <p:nvPr/>
+        </p:nvSpPr>
+        <p:spPr>
+          <a:xfrm>
+            <a:off x="7461504" y="3011424"/>
+            <a:ext cx="1307592" cy="566928"/>
+          </a:xfrm>
+          <a:prstGeom prst="roundRect">
+            <a:avLst>
+              <a:gd name="adj" fmla="val 12000"/>
+            </a:avLst>
+          </a:prstGeom>
+          <a:solidFill>
+            <a:srgbClr val="2E3338"/>
+          </a:solidFill>
+          <a:ln>
+            <a:noFill/>
+          </a:ln>
+          <a:effectLst/>
+        </p:spPr>
+        <p:style>
+          <a:lnRef idx="1">
+            <a:schemeClr val="accent1"/>
+          </a:lnRef>
+          <a:fillRef idx="3">
+            <a:schemeClr val="accent1"/>
+          </a:fillRef>
+          <a:effectRef idx="2">
+            <a:schemeClr val="accent1"/>
+          </a:effectRef>
+          <a:fontRef idx="minor">
+            <a:schemeClr val="lt1"/>
+          </a:fontRef>
+        </p:style>
+        <p:txBody>
+          <a:bodyPr rtlCol="0" anchor="ctr" wrap="square" lIns="73152" rIns="73152"/>
+          <a:lstStyle/>
+          <a:p>
+            <a:pPr algn="ctr"/>
+            <a:r>
+              <a:rPr sz="1200" b="1">
+                <a:solidFill>
+                  <a:srgbClr val="DEE2E6"/>
+                </a:solidFill>
+              </a:rPr>
+              <a:t>Player, weapons</a:t>
+            </a:r>
+          </a:p>
+          <a:p>
+            <a:pPr algn="ctr"/>
+            <a:r>
+              <a:rPr sz="1000" b="0">
+                <a:solidFill>
+                  <a:srgbClr val="9AA3AB"/>
+                </a:solidFill>
+              </a:rPr>
+              <a:t>ordinary objects</a:t>
+            </a:r>
+          </a:p>
+        </p:txBody>
+      </p:sp>
+      <p:cxnSp>
+        <p:nvCxnSpPr>
+          <p:cNvPr id="21" name="Connector 20"/>
+          <p:cNvCxnSpPr/>
+          <p:nvPr/>
+        </p:nvCxnSpPr>
+        <p:spPr>
+          <a:xfrm>
+            <a:off x="5989320" y="2831592"/>
+            <a:ext cx="2125980" cy="161544"/>
+          </a:xfrm>
+          <a:prstGeom prst="line">
+            <a:avLst/>
+          </a:prstGeom>
+          <a:ln w="25400">
+            <a:solidFill>
+              <a:srgbClr val="9AA3AB"/>
+            </a:solidFill>
+            <a:tailEnd type="triangle"/>
+          </a:ln>
+        </p:spPr>
+        <p:style>
+          <a:lnRef idx="2">
+            <a:schemeClr val="accent1"/>
+          </a:lnRef>
+          <a:fillRef idx="0">
+            <a:schemeClr val="accent1"/>
+          </a:fillRef>
+          <a:effectRef idx="1">
+            <a:schemeClr val="accent1"/>
+          </a:effectRef>
+          <a:fontRef idx="minor">
+            <a:schemeClr val="tx1"/>
+          </a:fontRef>
+        </p:style>
+      </p:cxnSp>
+      <p:cxnSp>
+        <p:nvCxnSpPr>
+          <p:cNvPr id="22" name="Connector 21"/>
+          <p:cNvCxnSpPr/>
+          <p:nvPr/>
+        </p:nvCxnSpPr>
+        <p:spPr>
+          <a:xfrm>
+            <a:off x="4572000" y="2066544"/>
+            <a:ext cx="1417320" cy="161544"/>
+          </a:xfrm>
+          <a:prstGeom prst="line">
+            <a:avLst/>
+          </a:prstGeom>
+          <a:ln w="25400">
+            <a:solidFill>
+              <a:srgbClr val="9AA3AB"/>
+            </a:solidFill>
+            <a:tailEnd type="triangle"/>
+          </a:ln>
+        </p:spPr>
+        <p:style>
+          <a:lnRef idx="2">
+            <a:schemeClr val="accent1"/>
+          </a:lnRef>
+          <a:fillRef idx="0">
+            <a:schemeClr val="accent1"/>
+          </a:fillRef>
+          <a:effectRef idx="1">
+            <a:schemeClr val="accent1"/>
+          </a:effectRef>
+          <a:fontRef idx="minor">
+            <a:schemeClr val="tx1"/>
+          </a:fontRef>
+        </p:style>
+      </p:cxnSp>
+      <p:sp>
+        <p:nvSpPr>
+          <p:cNvPr id="23" name="TextBox 22"/>
+          <p:cNvSpPr txBox="1"/>
+          <p:nvPr/>
+        </p:nvSpPr>
+        <p:spPr>
+          <a:xfrm>
+            <a:off x="457200" y="4462272"/>
+            <a:ext cx="8229600" cy="365760"/>
+          </a:xfrm>
+          <a:prstGeom prst="rect">
+            <a:avLst/>
+          </a:prstGeom>
+          <a:noFill/>
+        </p:spPr>
+        <p:txBody>
+          <a:bodyPr wrap="square">
+            <a:spAutoFit/>
+          </a:bodyPr>
+          <a:lstStyle/>
+          <a:p>
+            <a:pPr algn="ctr"/>
+            <a:r>
+              <a:rPr sz="1300" b="0" i="0">
+                <a:solidFill>
+                  <a:srgbClr val="9AA3AB"/>
+                </a:solidFill>
+              </a:rPr>
+              <a:t>Only the swarm and the gems are arrays. The rest are ordinary objects.</a:t>
+            </a:r>
+          </a:p>
+        </p:txBody>
+      </p:sp>
+    </p:spTree>
+  </p:cSld>
+  <p:clrMapOvr>
+    <a:masterClrMapping/>
+  </p:clrMapOvr>
+</p:sld>
+</file>
+
+<file path=ppt/slides/slide37.xml><?xml version="1.0" encoding="utf-8"?>
+<p:sld xmlns:a="http://schemas.openxmlformats.org/drawingml/2006/main" xmlns:p="http://schemas.openxmlformats.org/presentationml/2006/main" xmlns:r="http://schemas.openxmlformats.org/officeDocument/2006/relationships">
+  <p:cSld>
+    <p:spTree>
+      <p:nvGrpSpPr>
+        <p:cNvPr id="1" name=""/>
+        <p:cNvGrpSpPr/>
+        <p:nvPr/>
+      </p:nvGrpSpPr>
+      <p:grpSpPr/>
+      <p:sp>
+        <p:nvSpPr>
+          <p:cNvPr id="2" name="Title 1"/>
+          <p:cNvSpPr>
+            <a:spLocks noGrp="1"/>
+          </p:cNvSpPr>
+          <p:nvPr>
+            <p:ph type="title"/>
+          </p:nvPr>
+        </p:nvSpPr>
+        <p:spPr/>
+        <p:txBody>
+          <a:bodyPr/>
+          <a:lstStyle/>
+          <a:p>
+            <a:pPr indent="0" lvl="0" marL="0" rtl="0" algn="l">
+              <a:spcBef>
+                <a:spcPts val="0"/>
+              </a:spcBef>
+              <a:spcAft>
+                <a:spcPts val="0"/>
+              </a:spcAft>
+              <a:buNone/>
+            </a:pPr>
+            <a:r>
+              <a:rPr lang="en"/>
+              <a:t>Summary</a:t>
+            </a:r>
+            <a:endParaRPr/>
+          </a:p>
+        </p:txBody>
+      </p:sp>
+      <p:sp>
+        <p:nvSpPr>
+          <p:cNvPr id="3" name="Text Placeholder 2"/>
+          <p:cNvSpPr>
+            <a:spLocks noGrp="1"/>
+          </p:cNvSpPr>
+          <p:nvPr>
+            <p:ph type="body" idx="1"/>
+          </p:nvPr>
+        </p:nvSpPr>
+        <p:spPr>
+          <a:xfrm>
+            <a:off x="311700" y="885950"/>
+            <a:ext cx="8520600" cy="521208"/>
+          </a:xfrm>
+        </p:spPr>
+        <p:txBody>
+          <a:bodyPr/>
+          <a:lstStyle/>
+          <a:p>
+            <a:pPr indent="-330200" lvl="0" marL="457200" rtl="0" algn="l">
+              <a:spcBef>
+                <a:spcPts val="0"/>
+              </a:spcBef>
+              <a:spcAft>
+                <a:spcPts val="0"/>
+              </a:spcAft>
+              <a:buSzPts val="1600"/>
+              <a:buChar char="●"/>
+            </a:pPr>
+            <a:r>
+              <a:rPr lang="en" b="1"/>
+              <a:t>Five concerns, and this session’s answer to each.</a:t>
+            </a:r>
+            <a:endParaRPr/>
+          </a:p>
+        </p:txBody>
+      </p:sp>
+      <p:sp>
+        <p:nvSpPr>
+          <p:cNvPr id="4" name="Rounded Rectangle 3"/>
+          <p:cNvSpPr/>
+          <p:nvPr/>
+        </p:nvSpPr>
+        <p:spPr>
+          <a:xfrm>
+            <a:off x="548640" y="1417320"/>
+            <a:ext cx="2560320" cy="914400"/>
+          </a:xfrm>
+          <a:prstGeom prst="roundRect">
+            <a:avLst>
+              <a:gd name="adj" fmla="val 12000"/>
+            </a:avLst>
+          </a:prstGeom>
+          <a:solidFill>
+            <a:srgbClr val="2E3338"/>
+          </a:solidFill>
+          <a:ln>
+            <a:noFill/>
+          </a:ln>
+          <a:effectLst/>
+        </p:spPr>
+        <p:style>
+          <a:lnRef idx="1">
+            <a:schemeClr val="accent1"/>
+          </a:lnRef>
+          <a:fillRef idx="3">
+            <a:schemeClr val="accent1"/>
+          </a:fillRef>
+          <a:effectRef idx="2">
+            <a:schemeClr val="accent1"/>
+          </a:effectRef>
+          <a:fontRef idx="minor">
+            <a:schemeClr val="lt1"/>
+          </a:fontRef>
+        </p:style>
+        <p:txBody>
+          <a:bodyPr rtlCol="0" anchor="ctr" wrap="square" lIns="73152" rIns="73152"/>
+          <a:lstStyle/>
+          <a:p>
+            <a:pPr algn="ctr"/>
+            <a:r>
+              <a:rPr sz="1500" b="1">
+                <a:solidFill>
+                  <a:srgbClr val="DEE2E6"/>
+                </a:solidFill>
+              </a:rPr>
+              <a:t>Where the time goes</a:t>
+            </a:r>
+          </a:p>
+          <a:p>
+            <a:pPr algn="ctr"/>
+            <a:r>
+              <a:rPr sz="1300" b="0">
+                <a:solidFill>
+                  <a:srgbClr val="9AA3AB"/>
+                </a:solidFill>
+              </a:rPr>
+              <a:t>Profiling</a:t>
+            </a:r>
+          </a:p>
+        </p:txBody>
+      </p:sp>
+      <p:sp>
+        <p:nvSpPr>
+          <p:cNvPr id="5" name="Rounded Rectangle 4"/>
+          <p:cNvSpPr/>
+          <p:nvPr/>
+        </p:nvSpPr>
+        <p:spPr>
+          <a:xfrm>
+            <a:off x="3291840" y="1417320"/>
+            <a:ext cx="2560320" cy="914400"/>
+          </a:xfrm>
+          <a:prstGeom prst="roundRect">
+            <a:avLst>
+              <a:gd name="adj" fmla="val 12000"/>
+            </a:avLst>
+          </a:prstGeom>
+          <a:solidFill>
+            <a:srgbClr val="2E3338"/>
+          </a:solidFill>
+          <a:ln>
+            <a:noFill/>
+          </a:ln>
+          <a:effectLst/>
+        </p:spPr>
+        <p:style>
+          <a:lnRef idx="1">
+            <a:schemeClr val="accent1"/>
+          </a:lnRef>
+          <a:fillRef idx="3">
+            <a:schemeClr val="accent1"/>
+          </a:fillRef>
+          <a:effectRef idx="2">
+            <a:schemeClr val="accent1"/>
+          </a:effectRef>
+          <a:fontRef idx="minor">
+            <a:schemeClr val="lt1"/>
+          </a:fontRef>
+        </p:style>
+        <p:txBody>
+          <a:bodyPr rtlCol="0" anchor="ctr" wrap="square" lIns="73152" rIns="73152"/>
+          <a:lstStyle/>
+          <a:p>
+            <a:pPr algn="ctr"/>
+            <a:r>
+              <a:rPr sz="1500" b="1">
+                <a:solidFill>
+                  <a:srgbClr val="DEE2E6"/>
+                </a:solidFill>
+              </a:rPr>
+              <a:t>Finding what is near</a:t>
+            </a:r>
+          </a:p>
+          <a:p>
+            <a:pPr algn="ctr"/>
+            <a:r>
+              <a:rPr sz="1300" b="0">
+                <a:solidFill>
+                  <a:srgbClr val="9AA3AB"/>
+                </a:solidFill>
+              </a:rPr>
+              <a:t>Spatial partitioning: a grid</a:t>
+            </a:r>
+          </a:p>
+        </p:txBody>
+      </p:sp>
+      <p:sp>
+        <p:nvSpPr>
+          <p:cNvPr id="6" name="Rounded Rectangle 5"/>
+          <p:cNvSpPr/>
+          <p:nvPr/>
+        </p:nvSpPr>
+        <p:spPr>
+          <a:xfrm>
+            <a:off x="6035040" y="1417320"/>
+            <a:ext cx="2560320" cy="914400"/>
+          </a:xfrm>
+          <a:prstGeom prst="roundRect">
+            <a:avLst>
+              <a:gd name="adj" fmla="val 12000"/>
+            </a:avLst>
+          </a:prstGeom>
+          <a:solidFill>
+            <a:srgbClr val="2E3338"/>
+          </a:solidFill>
+          <a:ln>
+            <a:noFill/>
+          </a:ln>
+          <a:effectLst/>
+        </p:spPr>
+        <p:style>
+          <a:lnRef idx="1">
+            <a:schemeClr val="accent1"/>
+          </a:lnRef>
+          <a:fillRef idx="3">
+            <a:schemeClr val="accent1"/>
+          </a:fillRef>
+          <a:effectRef idx="2">
+            <a:schemeClr val="accent1"/>
+          </a:effectRef>
+          <a:fontRef idx="minor">
+            <a:schemeClr val="lt1"/>
+          </a:fontRef>
+        </p:style>
+        <p:txBody>
+          <a:bodyPr rtlCol="0" anchor="ctr" wrap="square" lIns="73152" rIns="73152"/>
+          <a:lstStyle/>
+          <a:p>
+            <a:pPr algn="ctr"/>
+            <a:r>
+              <a:rPr sz="1500" b="1">
+                <a:solidFill>
+                  <a:srgbClr val="DEE2E6"/>
+                </a:solidFill>
+              </a:rPr>
+              <a:t>Fast loops over thousands</a:t>
+            </a:r>
+          </a:p>
+          <a:p>
+            <a:pPr algn="ctr"/>
+            <a:r>
+              <a:rPr sz="1300" b="0">
+                <a:solidFill>
+                  <a:srgbClr val="9AA3AB"/>
+                </a:solidFill>
+              </a:rPr>
+              <a:t>A struct of arrays</a:t>
+            </a:r>
+          </a:p>
+        </p:txBody>
+      </p:sp>
+      <p:sp>
+        <p:nvSpPr>
+          <p:cNvPr id="7" name="Rounded Rectangle 6"/>
+          <p:cNvSpPr/>
+          <p:nvPr/>
+        </p:nvSpPr>
+        <p:spPr>
+          <a:xfrm>
+            <a:off x="1920240" y="2468880"/>
+            <a:ext cx="2560320" cy="914400"/>
+          </a:xfrm>
+          <a:prstGeom prst="roundRect">
+            <a:avLst>
+              <a:gd name="adj" fmla="val 12000"/>
+            </a:avLst>
+          </a:prstGeom>
+          <a:solidFill>
+            <a:srgbClr val="2E3338"/>
+          </a:solidFill>
+          <a:ln>
+            <a:noFill/>
+          </a:ln>
+          <a:effectLst/>
+        </p:spPr>
+        <p:style>
+          <a:lnRef idx="1">
+            <a:schemeClr val="accent1"/>
+          </a:lnRef>
+          <a:fillRef idx="3">
+            <a:schemeClr val="accent1"/>
+          </a:fillRef>
+          <a:effectRef idx="2">
+            <a:schemeClr val="accent1"/>
+          </a:effectRef>
+          <a:fontRef idx="minor">
+            <a:schemeClr val="lt1"/>
+          </a:fontRef>
+        </p:style>
+        <p:txBody>
+          <a:bodyPr rtlCol="0" anchor="ctr" wrap="square" lIns="73152" rIns="73152"/>
+          <a:lstStyle/>
+          <a:p>
+            <a:pPr algn="ctr"/>
+            <a:r>
+              <a:rPr sz="1500" b="1">
+                <a:solidFill>
+                  <a:srgbClr val="DEE2E6"/>
+                </a:solidFill>
+              </a:rPr>
+              <a:t>Is the fast code still right</a:t>
+            </a:r>
+          </a:p>
+          <a:p>
+            <a:pPr algn="ctr"/>
+            <a:r>
+              <a:rPr sz="1300" b="0">
+                <a:solidFill>
+                  <a:srgbClr val="9AA3AB"/>
+                </a:solidFill>
+              </a:rPr>
+              <a:t>A test against the slow code</a:t>
+            </a:r>
+          </a:p>
+        </p:txBody>
+      </p:sp>
+      <p:sp>
+        <p:nvSpPr>
+          <p:cNvPr id="8" name="Rounded Rectangle 7"/>
+          <p:cNvSpPr/>
+          <p:nvPr/>
+        </p:nvSpPr>
+        <p:spPr>
+          <a:xfrm>
+            <a:off x="4663440" y="2468880"/>
+            <a:ext cx="2560320" cy="914400"/>
+          </a:xfrm>
+          <a:prstGeom prst="roundRect">
+            <a:avLst>
+              <a:gd name="adj" fmla="val 12000"/>
+            </a:avLst>
+          </a:prstGeom>
+          <a:solidFill>
+            <a:srgbClr val="2E3338"/>
+          </a:solidFill>
+          <a:ln>
+            <a:noFill/>
+          </a:ln>
+          <a:effectLst/>
+        </p:spPr>
+        <p:style>
+          <a:lnRef idx="1">
+            <a:schemeClr val="accent1"/>
+          </a:lnRef>
+          <a:fillRef idx="3">
+            <a:schemeClr val="accent1"/>
+          </a:fillRef>
+          <a:effectRef idx="2">
+            <a:schemeClr val="accent1"/>
+          </a:effectRef>
+          <a:fontRef idx="minor">
+            <a:schemeClr val="lt1"/>
+          </a:fontRef>
+        </p:style>
+        <p:txBody>
+          <a:bodyPr rtlCol="0" anchor="ctr" wrap="square" lIns="73152" rIns="73152"/>
+          <a:lstStyle/>
+          <a:p>
+            <a:pPr algn="ctr"/>
+            <a:r>
+              <a:rPr sz="1500" b="1">
+                <a:solidFill>
+                  <a:srgbClr val="DEE2E6"/>
+                </a:solidFill>
+              </a:rPr>
+              <a:t>When to optimize</a:t>
+            </a:r>
+          </a:p>
+          <a:p>
+            <a:pPr algn="ctr"/>
+            <a:r>
+              <a:rPr sz="1300" b="0">
+                <a:solidFill>
+                  <a:srgbClr val="9AA3AB"/>
+                </a:solidFill>
+              </a:rPr>
+              <a:t>Measure, then algorithm, then data</a:t>
+            </a:r>
+          </a:p>
+        </p:txBody>
+      </p:sp>
+    </p:spTree>
+  </p:cSld>
+  <p:clrMapOvr>
+    <a:masterClrMapping/>
+  </p:clrMapOvr>
+</p:sld>
+</file>
+
 <file path=ppt/slides/slide4.xml><?xml version="1.0" encoding="utf-8"?>
 <p:sld xmlns:a="http://schemas.openxmlformats.org/drawingml/2006/main" xmlns:r="http://schemas.openxmlformats.org/officeDocument/2006/relationships" xmlns:mc="http://schemas.openxmlformats.org/markup-compatibility/2006" xmlns:mv="urn:schemas-microsoft-com:mac:vml" xmlns:p="http://schemas.openxmlformats.org/presentationml/2006/main" xmlns:c="http://schemas.openxmlformats.org/drawingml/2006/chart" xmlns:dgm="http://schemas.openxmlformats.org/drawingml/2006/diagram" xmlns:o="urn:schemas-microsoft-com:office:office" xmlns:v="urn:schemas-microsoft-com:vml" xmlns:pvml="urn:schemas-microsoft-com:office:powerpoint" xmlns:com="http://schemas.openxmlformats.org/drawingml/2006/compatibility" xmlns:p14="http://schemas.microsoft.com/office/powerpoint/2010/main" xmlns:p15="http://schemas.microsoft.com/office/powerpoint/2012/main" xmlns:ahyp="http://schemas.microsoft.com/office/drawing/2018/hyperlinkcolor">
   <p:cSld>

--- a/slides/12 Vampire Survivors.pptx
+++ b/slides/12 Vampire Survivors.pptx
@@ -1002,7 +1002,7 @@
           <a:lstStyle/>
           <a:p>
             <a:r>
-              <a:t>Indexes change, so nobody can hold on to an enemy. Harder to read and change. So only for the thousands: the swarm and the gems.</a:t>
+              <a:t>Indexes change, so nobody can hold on to an enemy. Harder to read and change. It is used only for the thousands: the swarm and the gems.</a:t>
             </a:r>
           </a:p>
         </p:txBody>
@@ -14888,6 +14888,1071 @@
       <p:grpSpPr/>
       <p:sp>
         <p:nvSpPr>
+          <p:cNvPr id="2" name="Title 1"/>
+          <p:cNvSpPr>
+            <a:spLocks noGrp="1"/>
+          </p:cNvSpPr>
+          <p:nvPr>
+            <p:ph type="title"/>
+          </p:nvPr>
+        </p:nvSpPr>
+        <p:spPr/>
+        <p:txBody>
+          <a:bodyPr/>
+          <a:lstStyle/>
+          <a:p>
+            <a:pPr indent="0" lvl="0" marL="0" rtl="0" algn="l">
+              <a:spcBef>
+                <a:spcPts val="0"/>
+              </a:spcBef>
+              <a:spcAft>
+                <a:spcPts val="0"/>
+              </a:spcAft>
+              <a:buNone/>
+            </a:pPr>
+            <a:r>
+              <a:rPr lang="en"/>
+              <a:t>The Whole Game: Who Holds What</a:t>
+            </a:r>
+            <a:endParaRPr/>
+          </a:p>
+        </p:txBody>
+      </p:sp>
+      <p:sp>
+        <p:nvSpPr>
+          <p:cNvPr id="3" name="Text Placeholder 2"/>
+          <p:cNvSpPr>
+            <a:spLocks noGrp="1"/>
+          </p:cNvSpPr>
+          <p:nvPr>
+            <p:ph type="body" idx="1"/>
+          </p:nvPr>
+        </p:nvSpPr>
+        <p:spPr>
+          <a:xfrm>
+            <a:off x="311700" y="885950"/>
+            <a:ext cx="8520600" cy="521208"/>
+          </a:xfrm>
+        </p:spPr>
+        <p:txBody>
+          <a:bodyPr/>
+          <a:lstStyle/>
+          <a:p>
+            <a:pPr indent="-330200" lvl="0" marL="457200" rtl="0" algn="l">
+              <a:spcBef>
+                <a:spcPts val="0"/>
+              </a:spcBef>
+              <a:spcAft>
+                <a:spcPts val="0"/>
+              </a:spcAft>
+              <a:buSzPts val="1600"/>
+              <a:buChar char="●"/>
+            </a:pPr>
+            <a:r>
+              <a:rPr lang="en" b="1"/>
+              <a:t>A Run holds one game, and the states decide when it runs.</a:t>
+            </a:r>
+            <a:endParaRPr/>
+          </a:p>
+        </p:txBody>
+      </p:sp>
+      <p:sp>
+        <p:nvSpPr>
+          <p:cNvPr id="4" name="Rounded Rectangle 3"/>
+          <p:cNvSpPr/>
+          <p:nvPr/>
+        </p:nvSpPr>
+        <p:spPr>
+          <a:xfrm>
+            <a:off x="3429000" y="1481328"/>
+            <a:ext cx="2286000" cy="566928"/>
+          </a:xfrm>
+          <a:prstGeom prst="roundRect">
+            <a:avLst>
+              <a:gd name="adj" fmla="val 12000"/>
+            </a:avLst>
+          </a:prstGeom>
+          <a:solidFill>
+            <a:srgbClr val="2E3338"/>
+          </a:solidFill>
+          <a:ln w="25400">
+            <a:solidFill>
+              <a:srgbClr val="D45D35"/>
+            </a:solidFill>
+          </a:ln>
+          <a:effectLst/>
+        </p:spPr>
+        <p:style>
+          <a:lnRef idx="1">
+            <a:schemeClr val="accent1"/>
+          </a:lnRef>
+          <a:fillRef idx="3">
+            <a:schemeClr val="accent1"/>
+          </a:fillRef>
+          <a:effectRef idx="2">
+            <a:schemeClr val="accent1"/>
+          </a:effectRef>
+          <a:fontRef idx="minor">
+            <a:schemeClr val="lt1"/>
+          </a:fontRef>
+        </p:style>
+        <p:txBody>
+          <a:bodyPr rtlCol="0" anchor="ctr" wrap="square" lIns="73152" rIns="73152"/>
+          <a:lstStyle/>
+          <a:p>
+            <a:pPr algn="ctr"/>
+            <a:r>
+              <a:rPr sz="1300" b="1">
+                <a:solidFill>
+                  <a:srgbClr val="DEE2E6"/>
+                </a:solidFill>
+              </a:rPr>
+              <a:t>Game1 : Core</a:t>
+            </a:r>
+          </a:p>
+        </p:txBody>
+      </p:sp>
+      <p:sp>
+        <p:nvSpPr>
+          <p:cNvPr id="5" name="Rounded Rectangle 4"/>
+          <p:cNvSpPr/>
+          <p:nvPr/>
+        </p:nvSpPr>
+        <p:spPr>
+          <a:xfrm>
+            <a:off x="594359" y="2246376"/>
+            <a:ext cx="2286000" cy="566928"/>
+          </a:xfrm>
+          <a:prstGeom prst="roundRect">
+            <a:avLst>
+              <a:gd name="adj" fmla="val 12000"/>
+            </a:avLst>
+          </a:prstGeom>
+          <a:solidFill>
+            <a:srgbClr val="2E3338"/>
+          </a:solidFill>
+          <a:ln>
+            <a:noFill/>
+          </a:ln>
+          <a:effectLst/>
+        </p:spPr>
+        <p:style>
+          <a:lnRef idx="1">
+            <a:schemeClr val="accent1"/>
+          </a:lnRef>
+          <a:fillRef idx="3">
+            <a:schemeClr val="accent1"/>
+          </a:fillRef>
+          <a:effectRef idx="2">
+            <a:schemeClr val="accent1"/>
+          </a:effectRef>
+          <a:fontRef idx="minor">
+            <a:schemeClr val="lt1"/>
+          </a:fontRef>
+        </p:style>
+        <p:txBody>
+          <a:bodyPr rtlCol="0" anchor="ctr" wrap="square" lIns="73152" rIns="73152"/>
+          <a:lstStyle/>
+          <a:p>
+            <a:pPr algn="ctr"/>
+            <a:r>
+              <a:rPr sz="1300" b="1">
+                <a:solidFill>
+                  <a:srgbClr val="DEE2E6"/>
+                </a:solidFill>
+              </a:rPr>
+              <a:t>StateStack</a:t>
+            </a:r>
+          </a:p>
+        </p:txBody>
+      </p:sp>
+      <p:sp>
+        <p:nvSpPr>
+          <p:cNvPr id="6" name="Rounded Rectangle 5"/>
+          <p:cNvSpPr/>
+          <p:nvPr/>
+        </p:nvSpPr>
+        <p:spPr>
+          <a:xfrm>
+            <a:off x="374903" y="3011424"/>
+            <a:ext cx="1307592" cy="566928"/>
+          </a:xfrm>
+          <a:prstGeom prst="roundRect">
+            <a:avLst>
+              <a:gd name="adj" fmla="val 12000"/>
+            </a:avLst>
+          </a:prstGeom>
+          <a:solidFill>
+            <a:srgbClr val="2E3338"/>
+          </a:solidFill>
+          <a:ln>
+            <a:noFill/>
+          </a:ln>
+          <a:effectLst/>
+        </p:spPr>
+        <p:style>
+          <a:lnRef idx="1">
+            <a:schemeClr val="accent1"/>
+          </a:lnRef>
+          <a:fillRef idx="3">
+            <a:schemeClr val="accent1"/>
+          </a:fillRef>
+          <a:effectRef idx="2">
+            <a:schemeClr val="accent1"/>
+          </a:effectRef>
+          <a:fontRef idx="minor">
+            <a:schemeClr val="lt1"/>
+          </a:fontRef>
+        </p:style>
+        <p:txBody>
+          <a:bodyPr rtlCol="0" anchor="ctr" wrap="square" lIns="73152" rIns="73152"/>
+          <a:lstStyle/>
+          <a:p>
+            <a:pPr algn="ctr"/>
+            <a:r>
+              <a:rPr sz="1200" b="1">
+                <a:solidFill>
+                  <a:srgbClr val="DEE2E6"/>
+                </a:solidFill>
+              </a:rPr>
+              <a:t>PlayState</a:t>
+            </a:r>
+          </a:p>
+          <a:p>
+            <a:pPr algn="ctr"/>
+            <a:r>
+              <a:rPr sz="1000" b="0">
+                <a:solidFill>
+                  <a:srgbClr val="9AA3AB"/>
+                </a:solidFill>
+              </a:rPr>
+              <a:t>updates the run</a:t>
+            </a:r>
+          </a:p>
+        </p:txBody>
+      </p:sp>
+      <p:cxnSp>
+        <p:nvCxnSpPr>
+          <p:cNvPr id="7" name="Connector 6"/>
+          <p:cNvCxnSpPr/>
+          <p:nvPr/>
+        </p:nvCxnSpPr>
+        <p:spPr>
+          <a:xfrm flipH="1">
+            <a:off x="1028700" y="2831592"/>
+            <a:ext cx="708660" cy="161544"/>
+          </a:xfrm>
+          <a:prstGeom prst="line">
+            <a:avLst/>
+          </a:prstGeom>
+          <a:ln w="25400">
+            <a:solidFill>
+              <a:srgbClr val="9AA3AB"/>
+            </a:solidFill>
+            <a:tailEnd type="triangle"/>
+          </a:ln>
+        </p:spPr>
+        <p:style>
+          <a:lnRef idx="2">
+            <a:schemeClr val="accent1"/>
+          </a:lnRef>
+          <a:fillRef idx="0">
+            <a:schemeClr val="accent1"/>
+          </a:fillRef>
+          <a:effectRef idx="1">
+            <a:schemeClr val="accent1"/>
+          </a:effectRef>
+          <a:fontRef idx="minor">
+            <a:schemeClr val="tx1"/>
+          </a:fontRef>
+        </p:style>
+      </p:cxnSp>
+      <p:sp>
+        <p:nvSpPr>
+          <p:cNvPr id="8" name="Rounded Rectangle 7"/>
+          <p:cNvSpPr/>
+          <p:nvPr/>
+        </p:nvSpPr>
+        <p:spPr>
+          <a:xfrm>
+            <a:off x="1792223" y="3011424"/>
+            <a:ext cx="1307592" cy="566928"/>
+          </a:xfrm>
+          <a:prstGeom prst="roundRect">
+            <a:avLst>
+              <a:gd name="adj" fmla="val 12000"/>
+            </a:avLst>
+          </a:prstGeom>
+          <a:solidFill>
+            <a:srgbClr val="2E3338"/>
+          </a:solidFill>
+          <a:ln>
+            <a:noFill/>
+          </a:ln>
+          <a:effectLst/>
+        </p:spPr>
+        <p:style>
+          <a:lnRef idx="1">
+            <a:schemeClr val="accent1"/>
+          </a:lnRef>
+          <a:fillRef idx="3">
+            <a:schemeClr val="accent1"/>
+          </a:fillRef>
+          <a:effectRef idx="2">
+            <a:schemeClr val="accent1"/>
+          </a:effectRef>
+          <a:fontRef idx="minor">
+            <a:schemeClr val="lt1"/>
+          </a:fontRef>
+        </p:style>
+        <p:txBody>
+          <a:bodyPr rtlCol="0" anchor="ctr" wrap="square" lIns="73152" rIns="73152"/>
+          <a:lstStyle/>
+          <a:p>
+            <a:pPr algn="ctr"/>
+            <a:r>
+              <a:rPr sz="1200" b="1">
+                <a:solidFill>
+                  <a:srgbClr val="DEE2E6"/>
+                </a:solidFill>
+              </a:rPr>
+              <a:t>LevelUpState</a:t>
+            </a:r>
+          </a:p>
+          <a:p>
+            <a:pPr algn="ctr"/>
+            <a:r>
+              <a:rPr sz="1000" b="0">
+                <a:solidFill>
+                  <a:srgbClr val="9AA3AB"/>
+                </a:solidFill>
+              </a:rPr>
+              <a:t>pushed on top</a:t>
+            </a:r>
+          </a:p>
+        </p:txBody>
+      </p:sp>
+      <p:cxnSp>
+        <p:nvCxnSpPr>
+          <p:cNvPr id="9" name="Connector 8"/>
+          <p:cNvCxnSpPr/>
+          <p:nvPr/>
+        </p:nvCxnSpPr>
+        <p:spPr>
+          <a:xfrm>
+            <a:off x="1737360" y="2831592"/>
+            <a:ext cx="708660" cy="161544"/>
+          </a:xfrm>
+          <a:prstGeom prst="line">
+            <a:avLst/>
+          </a:prstGeom>
+          <a:ln w="25400">
+            <a:solidFill>
+              <a:srgbClr val="9AA3AB"/>
+            </a:solidFill>
+            <a:tailEnd type="triangle"/>
+          </a:ln>
+        </p:spPr>
+        <p:style>
+          <a:lnRef idx="2">
+            <a:schemeClr val="accent1"/>
+          </a:lnRef>
+          <a:fillRef idx="0">
+            <a:schemeClr val="accent1"/>
+          </a:fillRef>
+          <a:effectRef idx="1">
+            <a:schemeClr val="accent1"/>
+          </a:effectRef>
+          <a:fontRef idx="minor">
+            <a:schemeClr val="tx1"/>
+          </a:fontRef>
+        </p:style>
+      </p:cxnSp>
+      <p:cxnSp>
+        <p:nvCxnSpPr>
+          <p:cNvPr id="10" name="Connector 9"/>
+          <p:cNvCxnSpPr/>
+          <p:nvPr/>
+        </p:nvCxnSpPr>
+        <p:spPr>
+          <a:xfrm flipH="1">
+            <a:off x="1737360" y="2066544"/>
+            <a:ext cx="2834640" cy="161544"/>
+          </a:xfrm>
+          <a:prstGeom prst="line">
+            <a:avLst/>
+          </a:prstGeom>
+          <a:ln w="25400">
+            <a:solidFill>
+              <a:srgbClr val="9AA3AB"/>
+            </a:solidFill>
+            <a:tailEnd type="triangle"/>
+          </a:ln>
+        </p:spPr>
+        <p:style>
+          <a:lnRef idx="2">
+            <a:schemeClr val="accent1"/>
+          </a:lnRef>
+          <a:fillRef idx="0">
+            <a:schemeClr val="accent1"/>
+          </a:fillRef>
+          <a:effectRef idx="1">
+            <a:schemeClr val="accent1"/>
+          </a:effectRef>
+          <a:fontRef idx="minor">
+            <a:schemeClr val="tx1"/>
+          </a:fontRef>
+        </p:style>
+      </p:cxnSp>
+      <p:sp>
+        <p:nvSpPr>
+          <p:cNvPr id="11" name="Rounded Rectangle 10"/>
+          <p:cNvSpPr/>
+          <p:nvPr/>
+        </p:nvSpPr>
+        <p:spPr>
+          <a:xfrm>
+            <a:off x="4846320" y="2246376"/>
+            <a:ext cx="2286000" cy="566928"/>
+          </a:xfrm>
+          <a:prstGeom prst="roundRect">
+            <a:avLst>
+              <a:gd name="adj" fmla="val 12000"/>
+            </a:avLst>
+          </a:prstGeom>
+          <a:solidFill>
+            <a:srgbClr val="2E3338"/>
+          </a:solidFill>
+          <a:ln>
+            <a:noFill/>
+          </a:ln>
+          <a:effectLst/>
+        </p:spPr>
+        <p:style>
+          <a:lnRef idx="1">
+            <a:schemeClr val="accent1"/>
+          </a:lnRef>
+          <a:fillRef idx="3">
+            <a:schemeClr val="accent1"/>
+          </a:fillRef>
+          <a:effectRef idx="2">
+            <a:schemeClr val="accent1"/>
+          </a:effectRef>
+          <a:fontRef idx="minor">
+            <a:schemeClr val="lt1"/>
+          </a:fontRef>
+        </p:style>
+        <p:txBody>
+          <a:bodyPr rtlCol="0" anchor="ctr" wrap="square" lIns="73152" rIns="73152"/>
+          <a:lstStyle/>
+          <a:p>
+            <a:pPr algn="ctr"/>
+            <a:r>
+              <a:rPr sz="1300" b="1">
+                <a:solidFill>
+                  <a:srgbClr val="DEE2E6"/>
+                </a:solidFill>
+              </a:rPr>
+              <a:t>Run</a:t>
+            </a:r>
+          </a:p>
+          <a:p>
+            <a:pPr algn="ctr"/>
+            <a:r>
+              <a:rPr sz="1100" b="0">
+                <a:solidFill>
+                  <a:srgbClr val="9AA3AB"/>
+                </a:solidFill>
+              </a:rPr>
+              <a:t>one game</a:t>
+            </a:r>
+          </a:p>
+        </p:txBody>
+      </p:sp>
+      <p:sp>
+        <p:nvSpPr>
+          <p:cNvPr id="12" name="Rounded Rectangle 11"/>
+          <p:cNvSpPr/>
+          <p:nvPr/>
+        </p:nvSpPr>
+        <p:spPr>
+          <a:xfrm>
+            <a:off x="3429000" y="3011424"/>
+            <a:ext cx="2286000" cy="566928"/>
+          </a:xfrm>
+          <a:prstGeom prst="roundRect">
+            <a:avLst>
+              <a:gd name="adj" fmla="val 12000"/>
+            </a:avLst>
+          </a:prstGeom>
+          <a:solidFill>
+            <a:srgbClr val="2E3338"/>
+          </a:solidFill>
+          <a:ln>
+            <a:noFill/>
+          </a:ln>
+          <a:effectLst/>
+        </p:spPr>
+        <p:style>
+          <a:lnRef idx="1">
+            <a:schemeClr val="accent1"/>
+          </a:lnRef>
+          <a:fillRef idx="3">
+            <a:schemeClr val="accent1"/>
+          </a:fillRef>
+          <a:effectRef idx="2">
+            <a:schemeClr val="accent1"/>
+          </a:effectRef>
+          <a:fontRef idx="minor">
+            <a:schemeClr val="lt1"/>
+          </a:fontRef>
+        </p:style>
+        <p:txBody>
+          <a:bodyPr rtlCol="0" anchor="ctr" wrap="square" lIns="73152" rIns="73152"/>
+          <a:lstStyle/>
+          <a:p>
+            <a:pPr algn="ctr"/>
+            <a:r>
+              <a:rPr sz="1300" b="1">
+                <a:solidFill>
+                  <a:srgbClr val="DEE2E6"/>
+                </a:solidFill>
+              </a:rPr>
+              <a:t>Swarm</a:t>
+            </a:r>
+          </a:p>
+        </p:txBody>
+      </p:sp>
+      <p:sp>
+        <p:nvSpPr>
+          <p:cNvPr id="13" name="Rounded Rectangle 12"/>
+          <p:cNvSpPr/>
+          <p:nvPr/>
+        </p:nvSpPr>
+        <p:spPr>
+          <a:xfrm>
+            <a:off x="3209544" y="3776472"/>
+            <a:ext cx="1307592" cy="566928"/>
+          </a:xfrm>
+          <a:prstGeom prst="roundRect">
+            <a:avLst>
+              <a:gd name="adj" fmla="val 12000"/>
+            </a:avLst>
+          </a:prstGeom>
+          <a:solidFill>
+            <a:srgbClr val="2E3338"/>
+          </a:solidFill>
+          <a:ln>
+            <a:noFill/>
+          </a:ln>
+          <a:effectLst/>
+        </p:spPr>
+        <p:style>
+          <a:lnRef idx="1">
+            <a:schemeClr val="accent1"/>
+          </a:lnRef>
+          <a:fillRef idx="3">
+            <a:schemeClr val="accent1"/>
+          </a:fillRef>
+          <a:effectRef idx="2">
+            <a:schemeClr val="accent1"/>
+          </a:effectRef>
+          <a:fontRef idx="minor">
+            <a:schemeClr val="lt1"/>
+          </a:fontRef>
+        </p:style>
+        <p:txBody>
+          <a:bodyPr rtlCol="0" anchor="ctr" wrap="square" lIns="73152" rIns="73152"/>
+          <a:lstStyle/>
+          <a:p>
+            <a:pPr algn="ctr"/>
+            <a:r>
+              <a:rPr sz="1200" b="1">
+                <a:solidFill>
+                  <a:srgbClr val="DEE2E6"/>
+                </a:solidFill>
+              </a:rPr>
+              <a:t>Enemies</a:t>
+            </a:r>
+          </a:p>
+          <a:p>
+            <a:pPr algn="ctr"/>
+            <a:r>
+              <a:rPr sz="1000" b="0">
+                <a:solidFill>
+                  <a:srgbClr val="9AA3AB"/>
+                </a:solidFill>
+              </a:rPr>
+              <a:t>arrays</a:t>
+            </a:r>
+          </a:p>
+        </p:txBody>
+      </p:sp>
+      <p:cxnSp>
+        <p:nvCxnSpPr>
+          <p:cNvPr id="14" name="Connector 13"/>
+          <p:cNvCxnSpPr/>
+          <p:nvPr/>
+        </p:nvCxnSpPr>
+        <p:spPr>
+          <a:xfrm flipH="1">
+            <a:off x="3863340" y="3596640"/>
+            <a:ext cx="708660" cy="161544"/>
+          </a:xfrm>
+          <a:prstGeom prst="line">
+            <a:avLst/>
+          </a:prstGeom>
+          <a:ln w="25400">
+            <a:solidFill>
+              <a:srgbClr val="9AA3AB"/>
+            </a:solidFill>
+            <a:tailEnd type="triangle"/>
+          </a:ln>
+        </p:spPr>
+        <p:style>
+          <a:lnRef idx="2">
+            <a:schemeClr val="accent1"/>
+          </a:lnRef>
+          <a:fillRef idx="0">
+            <a:schemeClr val="accent1"/>
+          </a:fillRef>
+          <a:effectRef idx="1">
+            <a:schemeClr val="accent1"/>
+          </a:effectRef>
+          <a:fontRef idx="minor">
+            <a:schemeClr val="tx1"/>
+          </a:fontRef>
+        </p:style>
+      </p:cxnSp>
+      <p:sp>
+        <p:nvSpPr>
+          <p:cNvPr id="15" name="Rounded Rectangle 14"/>
+          <p:cNvSpPr/>
+          <p:nvPr/>
+        </p:nvSpPr>
+        <p:spPr>
+          <a:xfrm>
+            <a:off x="4626864" y="3776472"/>
+            <a:ext cx="1307592" cy="566928"/>
+          </a:xfrm>
+          <a:prstGeom prst="roundRect">
+            <a:avLst>
+              <a:gd name="adj" fmla="val 12000"/>
+            </a:avLst>
+          </a:prstGeom>
+          <a:solidFill>
+            <a:srgbClr val="2E3338"/>
+          </a:solidFill>
+          <a:ln>
+            <a:noFill/>
+          </a:ln>
+          <a:effectLst/>
+        </p:spPr>
+        <p:style>
+          <a:lnRef idx="1">
+            <a:schemeClr val="accent1"/>
+          </a:lnRef>
+          <a:fillRef idx="3">
+            <a:schemeClr val="accent1"/>
+          </a:fillRef>
+          <a:effectRef idx="2">
+            <a:schemeClr val="accent1"/>
+          </a:effectRef>
+          <a:fontRef idx="minor">
+            <a:schemeClr val="lt1"/>
+          </a:fontRef>
+        </p:style>
+        <p:txBody>
+          <a:bodyPr rtlCol="0" anchor="ctr" wrap="square" lIns="73152" rIns="73152"/>
+          <a:lstStyle/>
+          <a:p>
+            <a:pPr algn="ctr"/>
+            <a:r>
+              <a:rPr sz="1200" b="1">
+                <a:solidFill>
+                  <a:srgbClr val="DEE2E6"/>
+                </a:solidFill>
+              </a:rPr>
+              <a:t>FlatGrid</a:t>
+            </a:r>
+          </a:p>
+          <a:p>
+            <a:pPr algn="ctr"/>
+            <a:r>
+              <a:rPr sz="1000" b="0">
+                <a:solidFill>
+                  <a:srgbClr val="9AA3AB"/>
+                </a:solidFill>
+              </a:rPr>
+              <a:t>arrays</a:t>
+            </a:r>
+          </a:p>
+        </p:txBody>
+      </p:sp>
+      <p:cxnSp>
+        <p:nvCxnSpPr>
+          <p:cNvPr id="16" name="Connector 15"/>
+          <p:cNvCxnSpPr/>
+          <p:nvPr/>
+        </p:nvCxnSpPr>
+        <p:spPr>
+          <a:xfrm>
+            <a:off x="4572000" y="3596640"/>
+            <a:ext cx="708660" cy="161544"/>
+          </a:xfrm>
+          <a:prstGeom prst="line">
+            <a:avLst/>
+          </a:prstGeom>
+          <a:ln w="25400">
+            <a:solidFill>
+              <a:srgbClr val="9AA3AB"/>
+            </a:solidFill>
+            <a:tailEnd type="triangle"/>
+          </a:ln>
+        </p:spPr>
+        <p:style>
+          <a:lnRef idx="2">
+            <a:schemeClr val="accent1"/>
+          </a:lnRef>
+          <a:fillRef idx="0">
+            <a:schemeClr val="accent1"/>
+          </a:fillRef>
+          <a:effectRef idx="1">
+            <a:schemeClr val="accent1"/>
+          </a:effectRef>
+          <a:fontRef idx="minor">
+            <a:schemeClr val="tx1"/>
+          </a:fontRef>
+        </p:style>
+      </p:cxnSp>
+      <p:cxnSp>
+        <p:nvCxnSpPr>
+          <p:cNvPr id="17" name="Connector 16"/>
+          <p:cNvCxnSpPr/>
+          <p:nvPr/>
+        </p:nvCxnSpPr>
+        <p:spPr>
+          <a:xfrm flipH="1">
+            <a:off x="4572000" y="2831592"/>
+            <a:ext cx="1417320" cy="161544"/>
+          </a:xfrm>
+          <a:prstGeom prst="line">
+            <a:avLst/>
+          </a:prstGeom>
+          <a:ln w="25400">
+            <a:solidFill>
+              <a:srgbClr val="9AA3AB"/>
+            </a:solidFill>
+            <a:tailEnd type="triangle"/>
+          </a:ln>
+        </p:spPr>
+        <p:style>
+          <a:lnRef idx="2">
+            <a:schemeClr val="accent1"/>
+          </a:lnRef>
+          <a:fillRef idx="0">
+            <a:schemeClr val="accent1"/>
+          </a:fillRef>
+          <a:effectRef idx="1">
+            <a:schemeClr val="accent1"/>
+          </a:effectRef>
+          <a:fontRef idx="minor">
+            <a:schemeClr val="tx1"/>
+          </a:fontRef>
+        </p:style>
+      </p:cxnSp>
+      <p:sp>
+        <p:nvSpPr>
+          <p:cNvPr id="18" name="Rounded Rectangle 17"/>
+          <p:cNvSpPr/>
+          <p:nvPr/>
+        </p:nvSpPr>
+        <p:spPr>
+          <a:xfrm>
+            <a:off x="6044184" y="3011424"/>
+            <a:ext cx="1307592" cy="566928"/>
+          </a:xfrm>
+          <a:prstGeom prst="roundRect">
+            <a:avLst>
+              <a:gd name="adj" fmla="val 12000"/>
+            </a:avLst>
+          </a:prstGeom>
+          <a:solidFill>
+            <a:srgbClr val="2E3338"/>
+          </a:solidFill>
+          <a:ln>
+            <a:noFill/>
+          </a:ln>
+          <a:effectLst/>
+        </p:spPr>
+        <p:style>
+          <a:lnRef idx="1">
+            <a:schemeClr val="accent1"/>
+          </a:lnRef>
+          <a:fillRef idx="3">
+            <a:schemeClr val="accent1"/>
+          </a:fillRef>
+          <a:effectRef idx="2">
+            <a:schemeClr val="accent1"/>
+          </a:effectRef>
+          <a:fontRef idx="minor">
+            <a:schemeClr val="lt1"/>
+          </a:fontRef>
+        </p:style>
+        <p:txBody>
+          <a:bodyPr rtlCol="0" anchor="ctr" wrap="square" lIns="73152" rIns="73152"/>
+          <a:lstStyle/>
+          <a:p>
+            <a:pPr algn="ctr"/>
+            <a:r>
+              <a:rPr sz="1200" b="1">
+                <a:solidFill>
+                  <a:srgbClr val="DEE2E6"/>
+                </a:solidFill>
+              </a:rPr>
+              <a:t>Gems</a:t>
+            </a:r>
+          </a:p>
+          <a:p>
+            <a:pPr algn="ctr"/>
+            <a:r>
+              <a:rPr sz="1000" b="0">
+                <a:solidFill>
+                  <a:srgbClr val="9AA3AB"/>
+                </a:solidFill>
+              </a:rPr>
+              <a:t>arrays</a:t>
+            </a:r>
+          </a:p>
+        </p:txBody>
+      </p:sp>
+      <p:cxnSp>
+        <p:nvCxnSpPr>
+          <p:cNvPr id="19" name="Connector 18"/>
+          <p:cNvCxnSpPr/>
+          <p:nvPr/>
+        </p:nvCxnSpPr>
+        <p:spPr>
+          <a:xfrm>
+            <a:off x="5989320" y="2831592"/>
+            <a:ext cx="708660" cy="161544"/>
+          </a:xfrm>
+          <a:prstGeom prst="line">
+            <a:avLst/>
+          </a:prstGeom>
+          <a:ln w="25400">
+            <a:solidFill>
+              <a:srgbClr val="9AA3AB"/>
+            </a:solidFill>
+            <a:tailEnd type="triangle"/>
+          </a:ln>
+        </p:spPr>
+        <p:style>
+          <a:lnRef idx="2">
+            <a:schemeClr val="accent1"/>
+          </a:lnRef>
+          <a:fillRef idx="0">
+            <a:schemeClr val="accent1"/>
+          </a:fillRef>
+          <a:effectRef idx="1">
+            <a:schemeClr val="accent1"/>
+          </a:effectRef>
+          <a:fontRef idx="minor">
+            <a:schemeClr val="tx1"/>
+          </a:fontRef>
+        </p:style>
+      </p:cxnSp>
+      <p:sp>
+        <p:nvSpPr>
+          <p:cNvPr id="20" name="Rounded Rectangle 19"/>
+          <p:cNvSpPr/>
+          <p:nvPr/>
+        </p:nvSpPr>
+        <p:spPr>
+          <a:xfrm>
+            <a:off x="7461504" y="3011424"/>
+            <a:ext cx="1307592" cy="566928"/>
+          </a:xfrm>
+          <a:prstGeom prst="roundRect">
+            <a:avLst>
+              <a:gd name="adj" fmla="val 12000"/>
+            </a:avLst>
+          </a:prstGeom>
+          <a:solidFill>
+            <a:srgbClr val="2E3338"/>
+          </a:solidFill>
+          <a:ln>
+            <a:noFill/>
+          </a:ln>
+          <a:effectLst/>
+        </p:spPr>
+        <p:style>
+          <a:lnRef idx="1">
+            <a:schemeClr val="accent1"/>
+          </a:lnRef>
+          <a:fillRef idx="3">
+            <a:schemeClr val="accent1"/>
+          </a:fillRef>
+          <a:effectRef idx="2">
+            <a:schemeClr val="accent1"/>
+          </a:effectRef>
+          <a:fontRef idx="minor">
+            <a:schemeClr val="lt1"/>
+          </a:fontRef>
+        </p:style>
+        <p:txBody>
+          <a:bodyPr rtlCol="0" anchor="ctr" wrap="square" lIns="73152" rIns="73152"/>
+          <a:lstStyle/>
+          <a:p>
+            <a:pPr algn="ctr"/>
+            <a:r>
+              <a:rPr sz="1200" b="1">
+                <a:solidFill>
+                  <a:srgbClr val="DEE2E6"/>
+                </a:solidFill>
+              </a:rPr>
+              <a:t>Player, weapons</a:t>
+            </a:r>
+          </a:p>
+          <a:p>
+            <a:pPr algn="ctr"/>
+            <a:r>
+              <a:rPr sz="1000" b="0">
+                <a:solidFill>
+                  <a:srgbClr val="9AA3AB"/>
+                </a:solidFill>
+              </a:rPr>
+              <a:t>ordinary objects</a:t>
+            </a:r>
+          </a:p>
+        </p:txBody>
+      </p:sp>
+      <p:cxnSp>
+        <p:nvCxnSpPr>
+          <p:cNvPr id="21" name="Connector 20"/>
+          <p:cNvCxnSpPr/>
+          <p:nvPr/>
+        </p:nvCxnSpPr>
+        <p:spPr>
+          <a:xfrm>
+            <a:off x="5989320" y="2831592"/>
+            <a:ext cx="2125980" cy="161544"/>
+          </a:xfrm>
+          <a:prstGeom prst="line">
+            <a:avLst/>
+          </a:prstGeom>
+          <a:ln w="25400">
+            <a:solidFill>
+              <a:srgbClr val="9AA3AB"/>
+            </a:solidFill>
+            <a:tailEnd type="triangle"/>
+          </a:ln>
+        </p:spPr>
+        <p:style>
+          <a:lnRef idx="2">
+            <a:schemeClr val="accent1"/>
+          </a:lnRef>
+          <a:fillRef idx="0">
+            <a:schemeClr val="accent1"/>
+          </a:fillRef>
+          <a:effectRef idx="1">
+            <a:schemeClr val="accent1"/>
+          </a:effectRef>
+          <a:fontRef idx="minor">
+            <a:schemeClr val="tx1"/>
+          </a:fontRef>
+        </p:style>
+      </p:cxnSp>
+      <p:cxnSp>
+        <p:nvCxnSpPr>
+          <p:cNvPr id="22" name="Connector 21"/>
+          <p:cNvCxnSpPr/>
+          <p:nvPr/>
+        </p:nvCxnSpPr>
+        <p:spPr>
+          <a:xfrm>
+            <a:off x="4572000" y="2066544"/>
+            <a:ext cx="1417320" cy="161544"/>
+          </a:xfrm>
+          <a:prstGeom prst="line">
+            <a:avLst/>
+          </a:prstGeom>
+          <a:ln w="25400">
+            <a:solidFill>
+              <a:srgbClr val="9AA3AB"/>
+            </a:solidFill>
+            <a:tailEnd type="triangle"/>
+          </a:ln>
+        </p:spPr>
+        <p:style>
+          <a:lnRef idx="2">
+            <a:schemeClr val="accent1"/>
+          </a:lnRef>
+          <a:fillRef idx="0">
+            <a:schemeClr val="accent1"/>
+          </a:fillRef>
+          <a:effectRef idx="1">
+            <a:schemeClr val="accent1"/>
+          </a:effectRef>
+          <a:fontRef idx="minor">
+            <a:schemeClr val="tx1"/>
+          </a:fontRef>
+        </p:style>
+      </p:cxnSp>
+      <p:sp>
+        <p:nvSpPr>
+          <p:cNvPr id="23" name="TextBox 22"/>
+          <p:cNvSpPr txBox="1"/>
+          <p:nvPr/>
+        </p:nvSpPr>
+        <p:spPr>
+          <a:xfrm>
+            <a:off x="457200" y="4462272"/>
+            <a:ext cx="8229600" cy="365760"/>
+          </a:xfrm>
+          <a:prstGeom prst="rect">
+            <a:avLst/>
+          </a:prstGeom>
+          <a:noFill/>
+        </p:spPr>
+        <p:txBody>
+          <a:bodyPr wrap="square">
+            <a:spAutoFit/>
+          </a:bodyPr>
+          <a:lstStyle/>
+          <a:p>
+            <a:pPr algn="ctr"/>
+            <a:r>
+              <a:rPr sz="1300" b="0" i="0">
+                <a:solidFill>
+                  <a:srgbClr val="9AA3AB"/>
+                </a:solidFill>
+              </a:rPr>
+              <a:t>Only the swarm and the gems are arrays. The rest are ordinary objects.</a:t>
+            </a:r>
+          </a:p>
+        </p:txBody>
+      </p:sp>
+    </p:spTree>
+  </p:cSld>
+  <p:clrMapOvr>
+    <a:masterClrMapping/>
+  </p:clrMapOvr>
+</p:sld>
+</file>
+
+<file path=ppt/slides/slide31.xml><?xml version="1.0" encoding="utf-8"?>
+<p:sld xmlns:a="http://schemas.openxmlformats.org/drawingml/2006/main" xmlns:p="http://schemas.openxmlformats.org/presentationml/2006/main" xmlns:r="http://schemas.openxmlformats.org/officeDocument/2006/relationships">
+  <p:cSld>
+    <p:spTree>
+      <p:nvGrpSpPr>
+        <p:cNvPr id="1" name=""/>
+        <p:cNvGrpSpPr/>
+        <p:nvPr/>
+      </p:nvGrpSpPr>
+      <p:grpSpPr/>
+      <p:sp>
+        <p:nvSpPr>
           <p:cNvPr id="293" name="Google Shape;293;p45"/>
           <p:cNvSpPr txBox="1"/>
           <p:nvPr>
@@ -15399,7 +16464,7 @@
 </p:sld>
 </file>
 
-<file path=ppt/slides/slide31.xml><?xml version="1.0" encoding="utf-8"?>
+<file path=ppt/slides/slide32.xml><?xml version="1.0" encoding="utf-8"?>
 <p:sld xmlns:a="http://schemas.openxmlformats.org/drawingml/2006/main" xmlns:r="http://schemas.openxmlformats.org/officeDocument/2006/relationships" xmlns:mc="http://schemas.openxmlformats.org/markup-compatibility/2006" xmlns:mv="urn:schemas-microsoft-com:mac:vml" xmlns:p="http://schemas.openxmlformats.org/presentationml/2006/main" xmlns:c="http://schemas.openxmlformats.org/drawingml/2006/chart" xmlns:dgm="http://schemas.openxmlformats.org/drawingml/2006/diagram" xmlns:o="urn:schemas-microsoft-com:office:office" xmlns:v="urn:schemas-microsoft-com:vml" xmlns:pvml="urn:schemas-microsoft-com:office:powerpoint" xmlns:com="http://schemas.openxmlformats.org/drawingml/2006/compatibility" xmlns:p14="http://schemas.microsoft.com/office/powerpoint/2010/main" xmlns:p15="http://schemas.microsoft.com/office/powerpoint/2012/main" xmlns:ahyp="http://schemas.microsoft.com/office/drawing/2018/hyperlinkcolor">
   <p:cSld>
     <p:spTree>
@@ -15533,7 +16598,420 @@
 </p:sld>
 </file>
 
-<file path=ppt/slides/slide32.xml><?xml version="1.0" encoding="utf-8"?>
+<file path=ppt/slides/slide33.xml><?xml version="1.0" encoding="utf-8"?>
+<p:sld xmlns:a="http://schemas.openxmlformats.org/drawingml/2006/main" xmlns:p="http://schemas.openxmlformats.org/presentationml/2006/main" xmlns:r="http://schemas.openxmlformats.org/officeDocument/2006/relationships">
+  <p:cSld>
+    <p:spTree>
+      <p:nvGrpSpPr>
+        <p:cNvPr id="1" name=""/>
+        <p:cNvGrpSpPr/>
+        <p:nvPr/>
+      </p:nvGrpSpPr>
+      <p:grpSpPr/>
+      <p:sp>
+        <p:nvSpPr>
+          <p:cNvPr id="2" name="Title 1"/>
+          <p:cNvSpPr>
+            <a:spLocks noGrp="1"/>
+          </p:cNvSpPr>
+          <p:nvPr>
+            <p:ph type="title"/>
+          </p:nvPr>
+        </p:nvSpPr>
+        <p:spPr/>
+        <p:txBody>
+          <a:bodyPr/>
+          <a:lstStyle/>
+          <a:p>
+            <a:pPr indent="0" lvl="0" marL="0" rtl="0" algn="l">
+              <a:spcBef>
+                <a:spcPts val="0"/>
+              </a:spcBef>
+              <a:spcAft>
+                <a:spcPts val="0"/>
+              </a:spcAft>
+              <a:buNone/>
+            </a:pPr>
+            <a:r>
+              <a:rPr lang="en"/>
+              <a:t>Summary</a:t>
+            </a:r>
+            <a:endParaRPr/>
+          </a:p>
+        </p:txBody>
+      </p:sp>
+      <p:sp>
+        <p:nvSpPr>
+          <p:cNvPr id="3" name="Text Placeholder 2"/>
+          <p:cNvSpPr>
+            <a:spLocks noGrp="1"/>
+          </p:cNvSpPr>
+          <p:nvPr>
+            <p:ph type="body" idx="1"/>
+          </p:nvPr>
+        </p:nvSpPr>
+        <p:spPr>
+          <a:xfrm>
+            <a:off x="311700" y="885950"/>
+            <a:ext cx="8520600" cy="521208"/>
+          </a:xfrm>
+        </p:spPr>
+        <p:txBody>
+          <a:bodyPr/>
+          <a:lstStyle/>
+          <a:p>
+            <a:pPr indent="-330200" lvl="0" marL="457200" rtl="0" algn="l">
+              <a:spcBef>
+                <a:spcPts val="0"/>
+              </a:spcBef>
+              <a:spcAft>
+                <a:spcPts val="0"/>
+              </a:spcAft>
+              <a:buSzPts val="1600"/>
+              <a:buChar char="●"/>
+            </a:pPr>
+            <a:r>
+              <a:rPr lang="en" b="1"/>
+              <a:t>Five concerns, and this session’s answer to each.</a:t>
+            </a:r>
+            <a:endParaRPr/>
+          </a:p>
+        </p:txBody>
+      </p:sp>
+      <p:sp>
+        <p:nvSpPr>
+          <p:cNvPr id="4" name="Rounded Rectangle 3"/>
+          <p:cNvSpPr/>
+          <p:nvPr/>
+        </p:nvSpPr>
+        <p:spPr>
+          <a:xfrm>
+            <a:off x="548640" y="1417320"/>
+            <a:ext cx="2560320" cy="914400"/>
+          </a:xfrm>
+          <a:prstGeom prst="roundRect">
+            <a:avLst>
+              <a:gd name="adj" fmla="val 12000"/>
+            </a:avLst>
+          </a:prstGeom>
+          <a:solidFill>
+            <a:srgbClr val="2E3338"/>
+          </a:solidFill>
+          <a:ln>
+            <a:noFill/>
+          </a:ln>
+          <a:effectLst/>
+        </p:spPr>
+        <p:style>
+          <a:lnRef idx="1">
+            <a:schemeClr val="accent1"/>
+          </a:lnRef>
+          <a:fillRef idx="3">
+            <a:schemeClr val="accent1"/>
+          </a:fillRef>
+          <a:effectRef idx="2">
+            <a:schemeClr val="accent1"/>
+          </a:effectRef>
+          <a:fontRef idx="minor">
+            <a:schemeClr val="lt1"/>
+          </a:fontRef>
+        </p:style>
+        <p:txBody>
+          <a:bodyPr rtlCol="0" anchor="ctr" wrap="square" lIns="73152" rIns="73152"/>
+          <a:lstStyle/>
+          <a:p>
+            <a:pPr algn="ctr"/>
+            <a:r>
+              <a:rPr sz="1500" b="1">
+                <a:solidFill>
+                  <a:srgbClr val="DEE2E6"/>
+                </a:solidFill>
+              </a:rPr>
+              <a:t>Where the time goes</a:t>
+            </a:r>
+          </a:p>
+          <a:p>
+            <a:pPr algn="ctr"/>
+            <a:r>
+              <a:rPr sz="1300" b="0">
+                <a:solidFill>
+                  <a:srgbClr val="9AA3AB"/>
+                </a:solidFill>
+              </a:rPr>
+              <a:t>Profiling</a:t>
+            </a:r>
+          </a:p>
+        </p:txBody>
+      </p:sp>
+      <p:sp>
+        <p:nvSpPr>
+          <p:cNvPr id="5" name="Rounded Rectangle 4"/>
+          <p:cNvSpPr/>
+          <p:nvPr/>
+        </p:nvSpPr>
+        <p:spPr>
+          <a:xfrm>
+            <a:off x="3291840" y="1417320"/>
+            <a:ext cx="2560320" cy="914400"/>
+          </a:xfrm>
+          <a:prstGeom prst="roundRect">
+            <a:avLst>
+              <a:gd name="adj" fmla="val 12000"/>
+            </a:avLst>
+          </a:prstGeom>
+          <a:solidFill>
+            <a:srgbClr val="2E3338"/>
+          </a:solidFill>
+          <a:ln>
+            <a:noFill/>
+          </a:ln>
+          <a:effectLst/>
+        </p:spPr>
+        <p:style>
+          <a:lnRef idx="1">
+            <a:schemeClr val="accent1"/>
+          </a:lnRef>
+          <a:fillRef idx="3">
+            <a:schemeClr val="accent1"/>
+          </a:fillRef>
+          <a:effectRef idx="2">
+            <a:schemeClr val="accent1"/>
+          </a:effectRef>
+          <a:fontRef idx="minor">
+            <a:schemeClr val="lt1"/>
+          </a:fontRef>
+        </p:style>
+        <p:txBody>
+          <a:bodyPr rtlCol="0" anchor="ctr" wrap="square" lIns="73152" rIns="73152"/>
+          <a:lstStyle/>
+          <a:p>
+            <a:pPr algn="ctr"/>
+            <a:r>
+              <a:rPr sz="1500" b="1">
+                <a:solidFill>
+                  <a:srgbClr val="DEE2E6"/>
+                </a:solidFill>
+              </a:rPr>
+              <a:t>Finding what is near</a:t>
+            </a:r>
+          </a:p>
+          <a:p>
+            <a:pPr algn="ctr"/>
+            <a:r>
+              <a:rPr sz="1300" b="0">
+                <a:solidFill>
+                  <a:srgbClr val="9AA3AB"/>
+                </a:solidFill>
+              </a:rPr>
+              <a:t>Spatial partitioning: a grid</a:t>
+            </a:r>
+          </a:p>
+        </p:txBody>
+      </p:sp>
+      <p:sp>
+        <p:nvSpPr>
+          <p:cNvPr id="6" name="Rounded Rectangle 5"/>
+          <p:cNvSpPr/>
+          <p:nvPr/>
+        </p:nvSpPr>
+        <p:spPr>
+          <a:xfrm>
+            <a:off x="6035040" y="1417320"/>
+            <a:ext cx="2560320" cy="914400"/>
+          </a:xfrm>
+          <a:prstGeom prst="roundRect">
+            <a:avLst>
+              <a:gd name="adj" fmla="val 12000"/>
+            </a:avLst>
+          </a:prstGeom>
+          <a:solidFill>
+            <a:srgbClr val="2E3338"/>
+          </a:solidFill>
+          <a:ln>
+            <a:noFill/>
+          </a:ln>
+          <a:effectLst/>
+        </p:spPr>
+        <p:style>
+          <a:lnRef idx="1">
+            <a:schemeClr val="accent1"/>
+          </a:lnRef>
+          <a:fillRef idx="3">
+            <a:schemeClr val="accent1"/>
+          </a:fillRef>
+          <a:effectRef idx="2">
+            <a:schemeClr val="accent1"/>
+          </a:effectRef>
+          <a:fontRef idx="minor">
+            <a:schemeClr val="lt1"/>
+          </a:fontRef>
+        </p:style>
+        <p:txBody>
+          <a:bodyPr rtlCol="0" anchor="ctr" wrap="square" lIns="73152" rIns="73152"/>
+          <a:lstStyle/>
+          <a:p>
+            <a:pPr algn="ctr"/>
+            <a:r>
+              <a:rPr sz="1500" b="1">
+                <a:solidFill>
+                  <a:srgbClr val="DEE2E6"/>
+                </a:solidFill>
+              </a:rPr>
+              <a:t>Fast loops over thousands</a:t>
+            </a:r>
+          </a:p>
+          <a:p>
+            <a:pPr algn="ctr"/>
+            <a:r>
+              <a:rPr sz="1300" b="0">
+                <a:solidFill>
+                  <a:srgbClr val="9AA3AB"/>
+                </a:solidFill>
+              </a:rPr>
+              <a:t>A struct of arrays</a:t>
+            </a:r>
+          </a:p>
+        </p:txBody>
+      </p:sp>
+      <p:sp>
+        <p:nvSpPr>
+          <p:cNvPr id="7" name="Rounded Rectangle 6"/>
+          <p:cNvSpPr/>
+          <p:nvPr/>
+        </p:nvSpPr>
+        <p:spPr>
+          <a:xfrm>
+            <a:off x="1920240" y="2468880"/>
+            <a:ext cx="2560320" cy="914400"/>
+          </a:xfrm>
+          <a:prstGeom prst="roundRect">
+            <a:avLst>
+              <a:gd name="adj" fmla="val 12000"/>
+            </a:avLst>
+          </a:prstGeom>
+          <a:solidFill>
+            <a:srgbClr val="2E3338"/>
+          </a:solidFill>
+          <a:ln>
+            <a:noFill/>
+          </a:ln>
+          <a:effectLst/>
+        </p:spPr>
+        <p:style>
+          <a:lnRef idx="1">
+            <a:schemeClr val="accent1"/>
+          </a:lnRef>
+          <a:fillRef idx="3">
+            <a:schemeClr val="accent1"/>
+          </a:fillRef>
+          <a:effectRef idx="2">
+            <a:schemeClr val="accent1"/>
+          </a:effectRef>
+          <a:fontRef idx="minor">
+            <a:schemeClr val="lt1"/>
+          </a:fontRef>
+        </p:style>
+        <p:txBody>
+          <a:bodyPr rtlCol="0" anchor="ctr" wrap="square" lIns="73152" rIns="73152"/>
+          <a:lstStyle/>
+          <a:p>
+            <a:pPr algn="ctr"/>
+            <a:r>
+              <a:rPr sz="1500" b="1">
+                <a:solidFill>
+                  <a:srgbClr val="DEE2E6"/>
+                </a:solidFill>
+              </a:rPr>
+              <a:t>Is the fast code still right</a:t>
+            </a:r>
+          </a:p>
+          <a:p>
+            <a:pPr algn="ctr"/>
+            <a:r>
+              <a:rPr sz="1300" b="0">
+                <a:solidFill>
+                  <a:srgbClr val="9AA3AB"/>
+                </a:solidFill>
+              </a:rPr>
+              <a:t>A test against the slow code</a:t>
+            </a:r>
+          </a:p>
+        </p:txBody>
+      </p:sp>
+      <p:sp>
+        <p:nvSpPr>
+          <p:cNvPr id="8" name="Rounded Rectangle 7"/>
+          <p:cNvSpPr/>
+          <p:nvPr/>
+        </p:nvSpPr>
+        <p:spPr>
+          <a:xfrm>
+            <a:off x="4663440" y="2468880"/>
+            <a:ext cx="2560320" cy="914400"/>
+          </a:xfrm>
+          <a:prstGeom prst="roundRect">
+            <a:avLst>
+              <a:gd name="adj" fmla="val 12000"/>
+            </a:avLst>
+          </a:prstGeom>
+          <a:solidFill>
+            <a:srgbClr val="2E3338"/>
+          </a:solidFill>
+          <a:ln>
+            <a:noFill/>
+          </a:ln>
+          <a:effectLst/>
+        </p:spPr>
+        <p:style>
+          <a:lnRef idx="1">
+            <a:schemeClr val="accent1"/>
+          </a:lnRef>
+          <a:fillRef idx="3">
+            <a:schemeClr val="accent1"/>
+          </a:fillRef>
+          <a:effectRef idx="2">
+            <a:schemeClr val="accent1"/>
+          </a:effectRef>
+          <a:fontRef idx="minor">
+            <a:schemeClr val="lt1"/>
+          </a:fontRef>
+        </p:style>
+        <p:txBody>
+          <a:bodyPr rtlCol="0" anchor="ctr" wrap="square" lIns="73152" rIns="73152"/>
+          <a:lstStyle/>
+          <a:p>
+            <a:pPr algn="ctr"/>
+            <a:r>
+              <a:rPr sz="1500" b="1">
+                <a:solidFill>
+                  <a:srgbClr val="DEE2E6"/>
+                </a:solidFill>
+              </a:rPr>
+              <a:t>When to optimize</a:t>
+            </a:r>
+          </a:p>
+          <a:p>
+            <a:pPr algn="ctr"/>
+            <a:r>
+              <a:rPr sz="1300" b="0">
+                <a:solidFill>
+                  <a:srgbClr val="9AA3AB"/>
+                </a:solidFill>
+              </a:rPr>
+              <a:t>Measure, then algorithm, then data</a:t>
+            </a:r>
+          </a:p>
+        </p:txBody>
+      </p:sp>
+    </p:spTree>
+  </p:cSld>
+  <p:clrMapOvr>
+    <a:masterClrMapping/>
+  </p:clrMapOvr>
+</p:sld>
+</file>
+
+<file path=ppt/slides/slide34.xml><?xml version="1.0" encoding="utf-8"?>
 <p:sld xmlns:a="http://schemas.openxmlformats.org/drawingml/2006/main" xmlns:r="http://schemas.openxmlformats.org/officeDocument/2006/relationships" xmlns:mc="http://schemas.openxmlformats.org/markup-compatibility/2006" xmlns:mv="urn:schemas-microsoft-com:mac:vml" xmlns:p="http://schemas.openxmlformats.org/presentationml/2006/main" xmlns:c="http://schemas.openxmlformats.org/drawingml/2006/chart" xmlns:dgm="http://schemas.openxmlformats.org/drawingml/2006/diagram" xmlns:o="urn:schemas-microsoft-com:office:office" xmlns:v="urn:schemas-microsoft-com:vml" xmlns:pvml="urn:schemas-microsoft-com:office:powerpoint" xmlns:com="http://schemas.openxmlformats.org/drawingml/2006/compatibility" xmlns:p14="http://schemas.microsoft.com/office/powerpoint/2010/main" xmlns:p15="http://schemas.microsoft.com/office/powerpoint/2012/main" xmlns:ahyp="http://schemas.microsoft.com/office/drawing/2018/hyperlinkcolor">
   <p:cSld>
     <p:spTree>
@@ -16399,994 +17877,6 @@
 </p:sld>
 </file>
 
-<file path=ppt/slides/slide33.xml><?xml version="1.0" encoding="utf-8"?>
-<p:sld xmlns:a="http://schemas.openxmlformats.org/drawingml/2006/main" xmlns:r="http://schemas.openxmlformats.org/officeDocument/2006/relationships" xmlns:mc="http://schemas.openxmlformats.org/markup-compatibility/2006" xmlns:mv="urn:schemas-microsoft-com:mac:vml" xmlns:p="http://schemas.openxmlformats.org/presentationml/2006/main" xmlns:c="http://schemas.openxmlformats.org/drawingml/2006/chart" xmlns:dgm="http://schemas.openxmlformats.org/drawingml/2006/diagram" xmlns:o="urn:schemas-microsoft-com:office:office" xmlns:v="urn:schemas-microsoft-com:vml" xmlns:pvml="urn:schemas-microsoft-com:office:powerpoint" xmlns:com="http://schemas.openxmlformats.org/drawingml/2006/compatibility" xmlns:p14="http://schemas.microsoft.com/office/powerpoint/2010/main" xmlns:p15="http://schemas.microsoft.com/office/powerpoint/2012/main" xmlns:ahyp="http://schemas.microsoft.com/office/drawing/2018/hyperlinkcolor">
-  <p:cSld>
-    <p:spTree>
-      <p:nvGrpSpPr>
-        <p:cNvPr id="292" name="Shape 292"/>
-        <p:cNvGrpSpPr/>
-        <p:nvPr/>
-      </p:nvGrpSpPr>
-      <p:grpSpPr>
-        <a:xfrm>
-          <a:off x="0" y="0"/>
-          <a:ext cx="0" cy="0"/>
-          <a:chOff x="0" y="0"/>
-          <a:chExt cx="0" cy="0"/>
-        </a:xfrm>
-      </p:grpSpPr>
-      <p:sp>
-        <p:nvSpPr>
-          <p:cNvPr id="293" name="Google Shape;293;p45"/>
-          <p:cNvSpPr txBox="1"/>
-          <p:nvPr>
-            <p:ph type="title"/>
-          </p:nvPr>
-        </p:nvSpPr>
-        <p:spPr>
-          <a:xfrm>
-            <a:off x="311700" y="195615"/>
-            <a:ext cx="8520600" cy="572700"/>
-          </a:xfrm>
-          <a:prstGeom prst="rect">
-            <a:avLst/>
-          </a:prstGeom>
-        </p:spPr>
-        <p:txBody>
-          <a:bodyPr anchorCtr="0" anchor="t" bIns="91425" lIns="91425" spcFirstLastPara="1" rIns="91425" wrap="square" tIns="91425">
-            <a:normAutofit fontScale="90000"/>
-          </a:bodyPr>
-          <a:lstStyle/>
-          <a:p>
-            <a:pPr indent="0" lvl="0" marL="0" rtl="0" algn="l">
-              <a:spcBef>
-                <a:spcPts val="0"/>
-              </a:spcBef>
-              <a:spcAft>
-                <a:spcPts val="0"/>
-              </a:spcAft>
-              <a:buNone/>
-            </a:pPr>
-            <a:r>
-              <a:rPr lang="en">
-                <a:solidFill>
-                  <a:schemeClr val="accent5"/>
-                </a:solidFill>
-              </a:rPr>
-              <a:t>Exercise: Stretch</a:t>
-            </a:r>
-            <a:endParaRPr>
-              <a:solidFill>
-                <a:schemeClr val="accent5"/>
-              </a:solidFill>
-            </a:endParaRPr>
-          </a:p>
-        </p:txBody>
-      </p:sp>
-      <p:sp>
-        <p:nvSpPr>
-          <p:cNvPr id="294" name="Google Shape;294;p45"/>
-          <p:cNvSpPr txBox="1"/>
-          <p:nvPr>
-            <p:ph idx="1" type="body"/>
-          </p:nvPr>
-        </p:nvSpPr>
-        <p:spPr>
-          <a:xfrm>
-            <a:off x="311700" y="885950"/>
-            <a:ext cx="8520600" cy="4023300"/>
-          </a:xfrm>
-          <a:prstGeom prst="rect">
-            <a:avLst/>
-          </a:prstGeom>
-        </p:spPr>
-        <p:txBody>
-          <a:bodyPr anchorCtr="0" anchor="t" bIns="91425" lIns="91425" spcFirstLastPara="1" rIns="91425" wrap="square" tIns="91425">
-            <a:normAutofit/>
-          </a:bodyPr>
-          <a:lstStyle/>
-          <a:p>
-            <a:pPr indent="-330200" lvl="0" marL="457200" rtl="0" algn="l">
-              <a:spcBef>
-                <a:spcPts val="0"/>
-              </a:spcBef>
-              <a:spcAft>
-                <a:spcPts val="0"/>
-              </a:spcAft>
-              <a:buSzPts val="1600"/>
-              <a:buChar char="●"/>
-            </a:pPr>
-            <a:r>
-              <a:rPr lang="en"/>
-              <a:t>Separate on several cores: Parallel.For over rows of cells</a:t>
-            </a:r>
-            <a:endParaRPr/>
-          </a:p>
-          <a:p>
-            <a:pPr indent="-330200" lvl="0" marL="457200" rtl="0" algn="l">
-              <a:spcBef>
-                <a:spcPts val="0"/>
-              </a:spcBef>
-              <a:spcAft>
-                <a:spcPts val="0"/>
-              </a:spcAft>
-              <a:buSzPts val="1600"/>
-              <a:buChar char="●"/>
-            </a:pPr>
-            <a:r>
-              <a:rPr lang="en"/>
-              <a:t>What goes wrong when two threads push the same enemy?</a:t>
-            </a:r>
-            <a:endParaRPr/>
-          </a:p>
-          <a:p>
-            <a:pPr indent="-330200" lvl="0" marL="457200" rtl="0" algn="l">
-              <a:spcBef>
-                <a:spcPts val="0"/>
-              </a:spcBef>
-              <a:spcAft>
-                <a:spcPts val="0"/>
-              </a:spcAft>
-              <a:buSzPts val="1600"/>
-              <a:buChar char="●"/>
-            </a:pPr>
-            <a:r>
-              <a:rPr lang="en"/>
-              <a:t>How could you avoid it?</a:t>
-            </a:r>
-            <a:endParaRPr/>
-          </a:p>
-        </p:txBody>
-      </p:sp>
-    </p:spTree>
-  </p:cSld>
-  <p:clrMapOvr>
-    <a:masterClrMapping/>
-  </p:clrMapOvr>
-  <p:timing>
-    <p:tnLst>
-      <p:par>
-        <p:cTn dur="indefinite" nodeType="tmRoot" restart="never">
-          <p:childTnLst>
-            <p:seq concurrent="1" nextAc="seek">
-              <p:cTn dur="indefinite" id="2" nodeType="mainSeq">
-                <p:childTnLst>
-                  <p:par>
-                    <p:cTn fill="hold">
-                      <p:stCondLst>
-                        <p:cond delay="indefinite"/>
-                      </p:stCondLst>
-                      <p:childTnLst>
-                        <p:par>
-                          <p:cTn fill="hold">
-                            <p:stCondLst>
-                              <p:cond delay="0"/>
-                            </p:stCondLst>
-                            <p:childTnLst>
-                              <p:par>
-                                <p:cTn fill="hold" nodeType="clickEffect" presetClass="entr" presetID="1" presetSubtype="0">
-                                  <p:stCondLst>
-                                    <p:cond delay="0"/>
-                                  </p:stCondLst>
-                                  <p:childTnLst>
-                                    <p:set>
-                                      <p:cBhvr>
-                                        <p:cTn dur="1" fill="hold">
-                                          <p:stCondLst>
-                                            <p:cond delay="0"/>
-                                          </p:stCondLst>
-                                        </p:cTn>
-                                        <p:tgtEl>
-                                          <p:spTgt spid="294">
-                                            <p:txEl>
-                                              <p:pRg end="0" st="0"/>
-                                            </p:txEl>
-                                          </p:spTgt>
-                                        </p:tgtEl>
-                                        <p:attrNameLst>
-                                          <p:attrName>style.visibility</p:attrName>
-                                        </p:attrNameLst>
-                                      </p:cBhvr>
-                                      <p:to>
-                                        <p:strVal val="visible"/>
-                                      </p:to>
-                                    </p:set>
-                                  </p:childTnLst>
-                                </p:cTn>
-                              </p:par>
-                            </p:childTnLst>
-                          </p:cTn>
-                        </p:par>
-                      </p:childTnLst>
-                    </p:cTn>
-                  </p:par>
-                  <p:par>
-                    <p:cTn fill="hold">
-                      <p:stCondLst>
-                        <p:cond delay="indefinite"/>
-                      </p:stCondLst>
-                      <p:childTnLst>
-                        <p:par>
-                          <p:cTn fill="hold">
-                            <p:stCondLst>
-                              <p:cond delay="0"/>
-                            </p:stCondLst>
-                            <p:childTnLst>
-                              <p:par>
-                                <p:cTn fill="hold" nodeType="clickEffect" presetClass="entr" presetID="1" presetSubtype="0">
-                                  <p:stCondLst>
-                                    <p:cond delay="0"/>
-                                  </p:stCondLst>
-                                  <p:childTnLst>
-                                    <p:set>
-                                      <p:cBhvr>
-                                        <p:cTn dur="1" fill="hold">
-                                          <p:stCondLst>
-                                            <p:cond delay="0"/>
-                                          </p:stCondLst>
-                                        </p:cTn>
-                                        <p:tgtEl>
-                                          <p:spTgt spid="294">
-                                            <p:txEl>
-                                              <p:pRg end="1" st="1"/>
-                                            </p:txEl>
-                                          </p:spTgt>
-                                        </p:tgtEl>
-                                        <p:attrNameLst>
-                                          <p:attrName>style.visibility</p:attrName>
-                                        </p:attrNameLst>
-                                      </p:cBhvr>
-                                      <p:to>
-                                        <p:strVal val="visible"/>
-                                      </p:to>
-                                    </p:set>
-                                  </p:childTnLst>
-                                </p:cTn>
-                              </p:par>
-                            </p:childTnLst>
-                          </p:cTn>
-                        </p:par>
-                      </p:childTnLst>
-                    </p:cTn>
-                  </p:par>
-                  <p:par>
-                    <p:cTn fill="hold">
-                      <p:stCondLst>
-                        <p:cond delay="indefinite"/>
-                      </p:stCondLst>
-                      <p:childTnLst>
-                        <p:par>
-                          <p:cTn fill="hold">
-                            <p:stCondLst>
-                              <p:cond delay="0"/>
-                            </p:stCondLst>
-                            <p:childTnLst>
-                              <p:par>
-                                <p:cTn fill="hold" nodeType="clickEffect" presetClass="entr" presetID="1" presetSubtype="0">
-                                  <p:stCondLst>
-                                    <p:cond delay="0"/>
-                                  </p:stCondLst>
-                                  <p:childTnLst>
-                                    <p:set>
-                                      <p:cBhvr>
-                                        <p:cTn dur="1" fill="hold">
-                                          <p:stCondLst>
-                                            <p:cond delay="0"/>
-                                          </p:stCondLst>
-                                        </p:cTn>
-                                        <p:tgtEl>
-                                          <p:spTgt spid="294">
-                                            <p:txEl>
-                                              <p:pRg end="2" st="2"/>
-                                            </p:txEl>
-                                          </p:spTgt>
-                                        </p:tgtEl>
-                                        <p:attrNameLst>
-                                          <p:attrName>style.visibility</p:attrName>
-                                        </p:attrNameLst>
-                                      </p:cBhvr>
-                                      <p:to>
-                                        <p:strVal val="visible"/>
-                                      </p:to>
-                                    </p:set>
-                                  </p:childTnLst>
-                                </p:cTn>
-                              </p:par>
-                            </p:childTnLst>
-                          </p:cTn>
-                        </p:par>
-                      </p:childTnLst>
-                    </p:cTn>
-                  </p:par>
-                  <p:par>
-                    <p:cTn fill="hold">
-                      <p:stCondLst>
-                        <p:cond delay="indefinite"/>
-                      </p:stCondLst>
-                      <p:childTnLst>
-                        <p:par>
-                          <p:cTn fill="hold">
-                            <p:stCondLst>
-                              <p:cond delay="0"/>
-                            </p:stCondLst>
-                            <p:childTnLst>
-                              <p:par>
-                                <p:cTn fill="hold" nodeType="clickEffect" presetClass="entr" presetID="1" presetSubtype="0">
-                                  <p:stCondLst>
-                                    <p:cond delay="0"/>
-                                  </p:stCondLst>
-                                  <p:childTnLst>
-                                    <p:set>
-                                      <p:cBhvr>
-                                        <p:cTn dur="1" fill="hold">
-                                          <p:stCondLst>
-                                            <p:cond delay="0"/>
-                                          </p:stCondLst>
-                                        </p:cTn>
-                                        <p:tgtEl>
-                                          <p:spTgt spid="294">
-                                            <p:txEl>
-                                              <p:pRg end="3" st="3"/>
-                                            </p:txEl>
-                                          </p:spTgt>
-                                        </p:tgtEl>
-                                        <p:attrNameLst>
-                                          <p:attrName>style.visibility</p:attrName>
-                                        </p:attrNameLst>
-                                      </p:cBhvr>
-                                      <p:to>
-                                        <p:strVal val="visible"/>
-                                      </p:to>
-                                    </p:set>
-                                  </p:childTnLst>
-                                </p:cTn>
-                              </p:par>
-                            </p:childTnLst>
-                          </p:cTn>
-                        </p:par>
-                      </p:childTnLst>
-                    </p:cTn>
-                  </p:par>
-                  <p:par>
-                    <p:cTn fill="hold">
-                      <p:stCondLst>
-                        <p:cond delay="indefinite"/>
-                      </p:stCondLst>
-                      <p:childTnLst>
-                        <p:par>
-                          <p:cTn fill="hold">
-                            <p:stCondLst>
-                              <p:cond delay="0"/>
-                            </p:stCondLst>
-                            <p:childTnLst>
-                              <p:par>
-                                <p:cTn fill="hold" nodeType="clickEffect" presetClass="entr" presetID="1" presetSubtype="0">
-                                  <p:stCondLst>
-                                    <p:cond delay="0"/>
-                                  </p:stCondLst>
-                                  <p:childTnLst>
-                                    <p:set>
-                                      <p:cBhvr>
-                                        <p:cTn dur="1" fill="hold">
-                                          <p:stCondLst>
-                                            <p:cond delay="0"/>
-                                          </p:stCondLst>
-                                        </p:cTn>
-                                        <p:tgtEl>
-                                          <p:spTgt spid="294">
-                                            <p:txEl>
-                                              <p:pRg end="4" st="4"/>
-                                            </p:txEl>
-                                          </p:spTgt>
-                                        </p:tgtEl>
-                                        <p:attrNameLst>
-                                          <p:attrName>style.visibility</p:attrName>
-                                        </p:attrNameLst>
-                                      </p:cBhvr>
-                                      <p:to>
-                                        <p:strVal val="visible"/>
-                                      </p:to>
-                                    </p:set>
-                                  </p:childTnLst>
-                                </p:cTn>
-                              </p:par>
-                            </p:childTnLst>
-                          </p:cTn>
-                        </p:par>
-                      </p:childTnLst>
-                    </p:cTn>
-                  </p:par>
-                  <p:par>
-                    <p:cTn fill="hold">
-                      <p:stCondLst>
-                        <p:cond delay="indefinite"/>
-                      </p:stCondLst>
-                      <p:childTnLst>
-                        <p:par>
-                          <p:cTn fill="hold">
-                            <p:stCondLst>
-                              <p:cond delay="0"/>
-                            </p:stCondLst>
-                            <p:childTnLst>
-                              <p:par>
-                                <p:cTn fill="hold" nodeType="clickEffect" presetClass="entr" presetID="1" presetSubtype="0">
-                                  <p:stCondLst>
-                                    <p:cond delay="0"/>
-                                  </p:stCondLst>
-                                  <p:childTnLst>
-                                    <p:set>
-                                      <p:cBhvr>
-                                        <p:cTn dur="1" fill="hold">
-                                          <p:stCondLst>
-                                            <p:cond delay="0"/>
-                                          </p:stCondLst>
-                                        </p:cTn>
-                                        <p:tgtEl>
-                                          <p:spTgt spid="294">
-                                            <p:txEl>
-                                              <p:pRg end="5" st="5"/>
-                                            </p:txEl>
-                                          </p:spTgt>
-                                        </p:tgtEl>
-                                        <p:attrNameLst>
-                                          <p:attrName>style.visibility</p:attrName>
-                                        </p:attrNameLst>
-                                      </p:cBhvr>
-                                      <p:to>
-                                        <p:strVal val="visible"/>
-                                      </p:to>
-                                    </p:set>
-                                  </p:childTnLst>
-                                </p:cTn>
-                              </p:par>
-                            </p:childTnLst>
-                          </p:cTn>
-                        </p:par>
-                      </p:childTnLst>
-                    </p:cTn>
-                  </p:par>
-                  <p:par>
-                    <p:cTn fill="hold">
-                      <p:stCondLst>
-                        <p:cond delay="indefinite"/>
-                      </p:stCondLst>
-                      <p:childTnLst>
-                        <p:par>
-                          <p:cTn fill="hold">
-                            <p:stCondLst>
-                              <p:cond delay="0"/>
-                            </p:stCondLst>
-                            <p:childTnLst>
-                              <p:par>
-                                <p:cTn fill="hold" nodeType="clickEffect" presetClass="entr" presetID="1" presetSubtype="0">
-                                  <p:stCondLst>
-                                    <p:cond delay="0"/>
-                                  </p:stCondLst>
-                                  <p:childTnLst>
-                                    <p:set>
-                                      <p:cBhvr>
-                                        <p:cTn dur="1" fill="hold">
-                                          <p:stCondLst>
-                                            <p:cond delay="0"/>
-                                          </p:stCondLst>
-                                        </p:cTn>
-                                        <p:tgtEl>
-                                          <p:spTgt spid="294">
-                                            <p:txEl>
-                                              <p:pRg end="6" st="6"/>
-                                            </p:txEl>
-                                          </p:spTgt>
-                                        </p:tgtEl>
-                                        <p:attrNameLst>
-                                          <p:attrName>style.visibility</p:attrName>
-                                        </p:attrNameLst>
-                                      </p:cBhvr>
-                                      <p:to>
-                                        <p:strVal val="visible"/>
-                                      </p:to>
-                                    </p:set>
-                                  </p:childTnLst>
-                                </p:cTn>
-                              </p:par>
-                            </p:childTnLst>
-                          </p:cTn>
-                        </p:par>
-                      </p:childTnLst>
-                    </p:cTn>
-                  </p:par>
-                  <p:par>
-                    <p:cTn fill="hold">
-                      <p:stCondLst>
-                        <p:cond delay="indefinite"/>
-                      </p:stCondLst>
-                      <p:childTnLst>
-                        <p:par>
-                          <p:cTn fill="hold">
-                            <p:stCondLst>
-                              <p:cond delay="0"/>
-                            </p:stCondLst>
-                            <p:childTnLst>
-                              <p:par>
-                                <p:cTn fill="hold" nodeType="clickEffect" presetClass="entr" presetID="1" presetSubtype="0">
-                                  <p:stCondLst>
-                                    <p:cond delay="0"/>
-                                  </p:stCondLst>
-                                  <p:childTnLst>
-                                    <p:set>
-                                      <p:cBhvr>
-                                        <p:cTn dur="1" fill="hold">
-                                          <p:stCondLst>
-                                            <p:cond delay="0"/>
-                                          </p:stCondLst>
-                                        </p:cTn>
-                                        <p:tgtEl>
-                                          <p:spTgt spid="294">
-                                            <p:txEl>
-                                              <p:pRg end="7" st="7"/>
-                                            </p:txEl>
-                                          </p:spTgt>
-                                        </p:tgtEl>
-                                        <p:attrNameLst>
-                                          <p:attrName>style.visibility</p:attrName>
-                                        </p:attrNameLst>
-                                      </p:cBhvr>
-                                      <p:to>
-                                        <p:strVal val="visible"/>
-                                      </p:to>
-                                    </p:set>
-                                  </p:childTnLst>
-                                </p:cTn>
-                              </p:par>
-                            </p:childTnLst>
-                          </p:cTn>
-                        </p:par>
-                      </p:childTnLst>
-                    </p:cTn>
-                  </p:par>
-                  <p:par>
-                    <p:cTn fill="hold">
-                      <p:stCondLst>
-                        <p:cond delay="indefinite"/>
-                      </p:stCondLst>
-                      <p:childTnLst>
-                        <p:par>
-                          <p:cTn fill="hold">
-                            <p:stCondLst>
-                              <p:cond delay="0"/>
-                            </p:stCondLst>
-                            <p:childTnLst>
-                              <p:par>
-                                <p:cTn fill="hold" nodeType="clickEffect" presetClass="entr" presetID="1" presetSubtype="0">
-                                  <p:stCondLst>
-                                    <p:cond delay="0"/>
-                                  </p:stCondLst>
-                                  <p:childTnLst>
-                                    <p:set>
-                                      <p:cBhvr>
-                                        <p:cTn dur="1" fill="hold">
-                                          <p:stCondLst>
-                                            <p:cond delay="0"/>
-                                          </p:stCondLst>
-                                        </p:cTn>
-                                        <p:tgtEl>
-                                          <p:spTgt spid="294">
-                                            <p:txEl>
-                                              <p:pRg end="8" st="8"/>
-                                            </p:txEl>
-                                          </p:spTgt>
-                                        </p:tgtEl>
-                                        <p:attrNameLst>
-                                          <p:attrName>style.visibility</p:attrName>
-                                        </p:attrNameLst>
-                                      </p:cBhvr>
-                                      <p:to>
-                                        <p:strVal val="visible"/>
-                                      </p:to>
-                                    </p:set>
-                                  </p:childTnLst>
-                                </p:cTn>
-                              </p:par>
-                            </p:childTnLst>
-                          </p:cTn>
-                        </p:par>
-                      </p:childTnLst>
-                    </p:cTn>
-                  </p:par>
-                  <p:par>
-                    <p:cTn fill="hold">
-                      <p:stCondLst>
-                        <p:cond delay="indefinite"/>
-                      </p:stCondLst>
-                      <p:childTnLst>
-                        <p:par>
-                          <p:cTn fill="hold">
-                            <p:stCondLst>
-                              <p:cond delay="0"/>
-                            </p:stCondLst>
-                            <p:childTnLst>
-                              <p:par>
-                                <p:cTn fill="hold" nodeType="clickEffect" presetClass="entr" presetID="1" presetSubtype="0">
-                                  <p:stCondLst>
-                                    <p:cond delay="0"/>
-                                  </p:stCondLst>
-                                  <p:childTnLst>
-                                    <p:set>
-                                      <p:cBhvr>
-                                        <p:cTn dur="1" fill="hold">
-                                          <p:stCondLst>
-                                            <p:cond delay="0"/>
-                                          </p:stCondLst>
-                                        </p:cTn>
-                                        <p:tgtEl>
-                                          <p:spTgt spid="294">
-                                            <p:txEl>
-                                              <p:pRg end="9" st="9"/>
-                                            </p:txEl>
-                                          </p:spTgt>
-                                        </p:tgtEl>
-                                        <p:attrNameLst>
-                                          <p:attrName>style.visibility</p:attrName>
-                                        </p:attrNameLst>
-                                      </p:cBhvr>
-                                      <p:to>
-                                        <p:strVal val="visible"/>
-                                      </p:to>
-                                    </p:set>
-                                  </p:childTnLst>
-                                </p:cTn>
-                              </p:par>
-                            </p:childTnLst>
-                          </p:cTn>
-                        </p:par>
-                      </p:childTnLst>
-                    </p:cTn>
-                  </p:par>
-                  <p:par>
-                    <p:cTn fill="hold">
-                      <p:stCondLst>
-                        <p:cond delay="indefinite"/>
-                      </p:stCondLst>
-                      <p:childTnLst>
-                        <p:par>
-                          <p:cTn fill="hold">
-                            <p:stCondLst>
-                              <p:cond delay="0"/>
-                            </p:stCondLst>
-                            <p:childTnLst>
-                              <p:par>
-                                <p:cTn fill="hold" nodeType="clickEffect" presetClass="entr" presetID="1" presetSubtype="0">
-                                  <p:stCondLst>
-                                    <p:cond delay="0"/>
-                                  </p:stCondLst>
-                                  <p:childTnLst>
-                                    <p:set>
-                                      <p:cBhvr>
-                                        <p:cTn dur="1" fill="hold">
-                                          <p:stCondLst>
-                                            <p:cond delay="0"/>
-                                          </p:stCondLst>
-                                        </p:cTn>
-                                        <p:tgtEl>
-                                          <p:spTgt spid="294">
-                                            <p:txEl>
-                                              <p:pRg end="10" st="10"/>
-                                            </p:txEl>
-                                          </p:spTgt>
-                                        </p:tgtEl>
-                                        <p:attrNameLst>
-                                          <p:attrName>style.visibility</p:attrName>
-                                        </p:attrNameLst>
-                                      </p:cBhvr>
-                                      <p:to>
-                                        <p:strVal val="visible"/>
-                                      </p:to>
-                                    </p:set>
-                                  </p:childTnLst>
-                                </p:cTn>
-                              </p:par>
-                            </p:childTnLst>
-                          </p:cTn>
-                        </p:par>
-                      </p:childTnLst>
-                    </p:cTn>
-                  </p:par>
-                  <p:par>
-                    <p:cTn fill="hold">
-                      <p:stCondLst>
-                        <p:cond delay="indefinite"/>
-                      </p:stCondLst>
-                      <p:childTnLst>
-                        <p:par>
-                          <p:cTn fill="hold">
-                            <p:stCondLst>
-                              <p:cond delay="0"/>
-                            </p:stCondLst>
-                            <p:childTnLst>
-                              <p:par>
-                                <p:cTn fill="hold" nodeType="clickEffect" presetClass="entr" presetID="1" presetSubtype="0">
-                                  <p:stCondLst>
-                                    <p:cond delay="0"/>
-                                  </p:stCondLst>
-                                  <p:childTnLst>
-                                    <p:set>
-                                      <p:cBhvr>
-                                        <p:cTn dur="1" fill="hold">
-                                          <p:stCondLst>
-                                            <p:cond delay="0"/>
-                                          </p:stCondLst>
-                                        </p:cTn>
-                                        <p:tgtEl>
-                                          <p:spTgt spid="294">
-                                            <p:txEl>
-                                              <p:pRg end="11" st="11"/>
-                                            </p:txEl>
-                                          </p:spTgt>
-                                        </p:tgtEl>
-                                        <p:attrNameLst>
-                                          <p:attrName>style.visibility</p:attrName>
-                                        </p:attrNameLst>
-                                      </p:cBhvr>
-                                      <p:to>
-                                        <p:strVal val="visible"/>
-                                      </p:to>
-                                    </p:set>
-                                  </p:childTnLst>
-                                </p:cTn>
-                              </p:par>
-                            </p:childTnLst>
-                          </p:cTn>
-                        </p:par>
-                      </p:childTnLst>
-                    </p:cTn>
-                  </p:par>
-                  <p:par>
-                    <p:cTn fill="hold">
-                      <p:stCondLst>
-                        <p:cond delay="indefinite"/>
-                      </p:stCondLst>
-                      <p:childTnLst>
-                        <p:par>
-                          <p:cTn fill="hold">
-                            <p:stCondLst>
-                              <p:cond delay="0"/>
-                            </p:stCondLst>
-                            <p:childTnLst>
-                              <p:par>
-                                <p:cTn fill="hold" nodeType="clickEffect" presetClass="entr" presetID="1" presetSubtype="0">
-                                  <p:stCondLst>
-                                    <p:cond delay="0"/>
-                                  </p:stCondLst>
-                                  <p:childTnLst>
-                                    <p:set>
-                                      <p:cBhvr>
-                                        <p:cTn dur="1" fill="hold">
-                                          <p:stCondLst>
-                                            <p:cond delay="0"/>
-                                          </p:stCondLst>
-                                        </p:cTn>
-                                        <p:tgtEl>
-                                          <p:spTgt spid="294">
-                                            <p:txEl>
-                                              <p:pRg end="12" st="12"/>
-                                            </p:txEl>
-                                          </p:spTgt>
-                                        </p:tgtEl>
-                                        <p:attrNameLst>
-                                          <p:attrName>style.visibility</p:attrName>
-                                        </p:attrNameLst>
-                                      </p:cBhvr>
-                                      <p:to>
-                                        <p:strVal val="visible"/>
-                                      </p:to>
-                                    </p:set>
-                                  </p:childTnLst>
-                                </p:cTn>
-                              </p:par>
-                            </p:childTnLst>
-                          </p:cTn>
-                        </p:par>
-                      </p:childTnLst>
-                    </p:cTn>
-                  </p:par>
-                </p:childTnLst>
-              </p:cTn>
-              <p:prevCondLst>
-                <p:cond evt="onPrev">
-                  <p:tgtEl>
-                    <p:sldTgt/>
-                  </p:tgtEl>
-                </p:cond>
-              </p:prevCondLst>
-              <p:nextCondLst>
-                <p:cond evt="onNext">
-                  <p:tgtEl>
-                    <p:sldTgt/>
-                  </p:tgtEl>
-                </p:cond>
-              </p:nextCondLst>
-            </p:seq>
-          </p:childTnLst>
-        </p:cTn>
-      </p:par>
-    </p:tnLst>
-  </p:timing>
-</p:sld>
-</file>
-
-<file path=ppt/slides/slide34.xml><?xml version="1.0" encoding="utf-8"?>
-<p:sld xmlns:a="http://schemas.openxmlformats.org/drawingml/2006/main" xmlns:p="http://schemas.openxmlformats.org/presentationml/2006/main" xmlns:r="http://schemas.openxmlformats.org/officeDocument/2006/relationships">
-  <p:cSld>
-    <p:spTree>
-      <p:nvGrpSpPr>
-        <p:cNvPr id="1" name=""/>
-        <p:cNvGrpSpPr/>
-        <p:nvPr/>
-      </p:nvGrpSpPr>
-      <p:grpSpPr/>
-      <p:sp>
-        <p:nvSpPr>
-          <p:cNvPr id="2" name="Title 1"/>
-          <p:cNvSpPr>
-            <a:spLocks noGrp="1"/>
-          </p:cNvSpPr>
-          <p:nvPr>
-            <p:ph type="title"/>
-          </p:nvPr>
-        </p:nvSpPr>
-        <p:spPr/>
-        <p:txBody>
-          <a:bodyPr/>
-          <a:lstStyle/>
-          <a:p>
-            <a:pPr indent="0" lvl="0" marL="0" rtl="0" algn="l">
-              <a:spcBef>
-                <a:spcPts val="0"/>
-              </a:spcBef>
-              <a:spcAft>
-                <a:spcPts val="0"/>
-              </a:spcAft>
-              <a:buNone/>
-            </a:pPr>
-            <a:r>
-              <a:rPr lang="en"/>
-              <a:t>Check Yourself</a:t>
-            </a:r>
-            <a:endParaRPr/>
-          </a:p>
-        </p:txBody>
-      </p:sp>
-      <p:sp>
-        <p:nvSpPr>
-          <p:cNvPr id="3" name="Text Placeholder 2"/>
-          <p:cNvSpPr>
-            <a:spLocks noGrp="1"/>
-          </p:cNvSpPr>
-          <p:nvPr>
-            <p:ph type="body" idx="1"/>
-          </p:nvPr>
-        </p:nvSpPr>
-        <p:spPr>
-          <a:xfrm>
-            <a:off x="311700" y="885950"/>
-            <a:ext cx="8520600" cy="1719072"/>
-          </a:xfrm>
-        </p:spPr>
-        <p:txBody>
-          <a:bodyPr/>
-          <a:lstStyle/>
-          <a:p>
-            <a:pPr indent="-330200" lvl="0" marL="457200" rtl="0" algn="l">
-              <a:spcBef>
-                <a:spcPts val="0"/>
-              </a:spcBef>
-              <a:spcAft>
-                <a:spcPts val="0"/>
-              </a:spcAft>
-              <a:buSzPts val="1600"/>
-              <a:buChar char="●"/>
-            </a:pPr>
-            <a:r>
-              <a:rPr lang="en"/>
-              <a:t>Why profile before optimizing?</a:t>
-            </a:r>
-            <a:endParaRPr/>
-          </a:p>
-          <a:p>
-            <a:pPr indent="-330200" lvl="0" marL="457200" rtl="0" algn="l">
-              <a:spcBef>
-                <a:spcPts val="0"/>
-              </a:spcBef>
-              <a:spcAft>
-                <a:spcPts val="0"/>
-              </a:spcAft>
-              <a:buSzPts val="1600"/>
-              <a:buChar char="●"/>
-            </a:pPr>
-            <a:r>
-              <a:rPr lang="en"/>
-              <a:t>How does a uniform grid make separation cheaper?</a:t>
-            </a:r>
-            <a:endParaRPr/>
-          </a:p>
-          <a:p>
-            <a:pPr indent="-330200" lvl="0" marL="457200" rtl="0" algn="l">
-              <a:spcBef>
-                <a:spcPts val="0"/>
-              </a:spcBef>
-              <a:spcAft>
-                <a:spcPts val="0"/>
-              </a:spcAft>
-              <a:buSzPts val="1600"/>
-              <a:buChar char="●"/>
-            </a:pPr>
-            <a:r>
-              <a:rPr lang="en"/>
-              <a:t>What is the difference between an array of objects and a struct of arrays?</a:t>
-            </a:r>
-            <a:endParaRPr/>
-          </a:p>
-          <a:p>
-            <a:pPr indent="-330200" lvl="0" marL="457200" rtl="0" algn="l">
-              <a:spcBef>
-                <a:spcPts val="0"/>
-              </a:spcBef>
-              <a:spcAft>
-                <a:spcPts val="0"/>
-              </a:spcAft>
-              <a:buSzPts val="1600"/>
-              <a:buChar char="●"/>
-            </a:pPr>
-            <a:r>
-              <a:rPr lang="en"/>
-              <a:t>What do you give up with data-oriented design?</a:t>
-            </a:r>
-            <a:endParaRPr/>
-          </a:p>
-        </p:txBody>
-      </p:sp>
-      <p:sp>
-        <p:nvSpPr>
-          <p:cNvPr id="4" name="TextBox 3"/>
-          <p:cNvSpPr txBox="1"/>
-          <p:nvPr/>
-        </p:nvSpPr>
-        <p:spPr>
-          <a:xfrm>
-            <a:off x="457200" y="3182112"/>
-            <a:ext cx="8229600" cy="457200"/>
-          </a:xfrm>
-          <a:prstGeom prst="rect">
-            <a:avLst/>
-          </a:prstGeom>
-          <a:noFill/>
-        </p:spPr>
-        <p:txBody>
-          <a:bodyPr wrap="square">
-            <a:spAutoFit/>
-          </a:bodyPr>
-          <a:lstStyle/>
-          <a:p>
-            <a:pPr algn="ctr"/>
-            <a:r>
-              <a:rPr sz="1400" b="0" i="0">
-                <a:solidFill>
-                  <a:srgbClr val="9AA3AB"/>
-                </a:solidFill>
-              </a:rPr>
-              <a:t>The answers, and more questions, are on the course site.</a:t>
-            </a:r>
-          </a:p>
-        </p:txBody>
-      </p:sp>
-    </p:spTree>
-  </p:cSld>
-  <p:clrMapOvr>
-    <a:masterClrMapping/>
-  </p:clrMapOvr>
-</p:sld>
-</file>
-
 <file path=ppt/slides/slide35.xml><?xml version="1.0" encoding="utf-8"?>
 <p:sld xmlns:a="http://schemas.openxmlformats.org/drawingml/2006/main" xmlns:r="http://schemas.openxmlformats.org/officeDocument/2006/relationships" xmlns:mc="http://schemas.openxmlformats.org/markup-compatibility/2006" xmlns:mv="urn:schemas-microsoft-com:mac:vml" xmlns:p="http://schemas.openxmlformats.org/presentationml/2006/main" xmlns:c="http://schemas.openxmlformats.org/drawingml/2006/chart" xmlns:dgm="http://schemas.openxmlformats.org/drawingml/2006/diagram" xmlns:o="urn:schemas-microsoft-com:office:office" xmlns:v="urn:schemas-microsoft-com:vml" xmlns:pvml="urn:schemas-microsoft-com:office:powerpoint" xmlns:com="http://schemas.openxmlformats.org/drawingml/2006/compatibility" xmlns:p14="http://schemas.microsoft.com/office/powerpoint/2010/main" xmlns:p15="http://schemas.microsoft.com/office/powerpoint/2012/main" xmlns:ahyp="http://schemas.microsoft.com/office/drawing/2018/hyperlinkcolor">
   <p:cSld>
@@ -17442,7 +17932,7 @@
                   <a:schemeClr val="accent5"/>
                 </a:solidFill>
               </a:rPr>
-              <a:t>Apply It to Your Project</a:t>
+              <a:t>Exercise: Stretch</a:t>
             </a:r>
             <a:endParaRPr>
               <a:solidFill>
@@ -17487,7 +17977,7 @@
             </a:pPr>
             <a:r>
               <a:rPr lang="en"/>
-              <a:t>Profile your game with many more entities. Where does the time go?</a:t>
+              <a:t>Separate on several cores: Parallel.For over rows of cells</a:t>
             </a:r>
             <a:endParaRPr/>
           </a:p>
@@ -17504,7 +17994,7 @@
             </a:pPr>
             <a:r>
               <a:rPr lang="en"/>
-              <a:t>Does anything check every pair, or search every entity?</a:t>
+              <a:t>What goes wrong when two threads push the same enemy?</a:t>
             </a:r>
             <a:endParaRPr/>
           </a:p>
@@ -17521,24 +18011,7 @@
             </a:pPr>
             <a:r>
               <a:rPr lang="en"/>
-              <a:t>Does your game allocate every frame? Where?</a:t>
-            </a:r>
-            <a:endParaRPr/>
-          </a:p>
-          <a:p>
-            <a:pPr indent="-330200" lvl="0" marL="457200" rtl="0" algn="l">
-              <a:spcBef>
-                <a:spcPts val="0"/>
-              </a:spcBef>
-              <a:spcAft>
-                <a:spcPts val="0"/>
-              </a:spcAft>
-              <a:buSzPts val="1600"/>
-              <a:buChar char="●"/>
-            </a:pPr>
-            <a:r>
-              <a:rPr lang="en"/>
-              <a:t>Is there anything there are thousands of?</a:t>
+              <a:t>How could you avoid it?</a:t>
             </a:r>
             <a:endParaRPr/>
           </a:p>
@@ -18255,7 +18728,7 @@
             </a:pPr>
             <a:r>
               <a:rPr lang="en"/>
-              <a:t>The Whole Game: Who Holds What</a:t>
+              <a:t>Check Yourself</a:t>
             </a:r>
             <a:endParaRPr/>
           </a:p>
@@ -18274,7 +18747,7 @@
         <p:spPr>
           <a:xfrm>
             <a:off x="311700" y="885950"/>
-            <a:ext cx="8520600" cy="521208"/>
+            <a:ext cx="8520600" cy="1719072"/>
           </a:xfrm>
         </p:spPr>
         <p:txBody>
@@ -18292,966 +18765,74 @@
               <a:buChar char="●"/>
             </a:pPr>
             <a:r>
-              <a:rPr lang="en" b="1"/>
-              <a:t>A Run holds one game, and the states decide when it runs.</a:t>
+              <a:rPr lang="en"/>
+              <a:t>Why profile before optimizing?</a:t>
             </a:r>
             <a:endParaRPr/>
           </a:p>
+          <a:p>
+            <a:pPr indent="-330200" lvl="0" marL="457200" rtl="0" algn="l">
+              <a:spcBef>
+                <a:spcPts val="0"/>
+              </a:spcBef>
+              <a:spcAft>
+                <a:spcPts val="0"/>
+              </a:spcAft>
+              <a:buSzPts val="1600"/>
+              <a:buChar char="●"/>
+            </a:pPr>
+            <a:r>
+              <a:rPr lang="en"/>
+              <a:t>How does a uniform grid make separation cheaper?</a:t>
+            </a:r>
+            <a:endParaRPr/>
+          </a:p>
+          <a:p>
+            <a:pPr indent="-330200" lvl="0" marL="457200" rtl="0" algn="l">
+              <a:spcBef>
+                <a:spcPts val="0"/>
+              </a:spcBef>
+              <a:spcAft>
+                <a:spcPts val="0"/>
+              </a:spcAft>
+              <a:buSzPts val="1600"/>
+              <a:buChar char="●"/>
+            </a:pPr>
+            <a:r>
+              <a:rPr lang="en"/>
+              <a:t>What is the difference between an array of objects and a struct of arrays?</a:t>
+            </a:r>
+            <a:endParaRPr/>
+          </a:p>
+          <a:p>
+            <a:pPr indent="-330200" lvl="0" marL="457200" rtl="0" algn="l">
+              <a:spcBef>
+                <a:spcPts val="0"/>
+              </a:spcBef>
+              <a:spcAft>
+                <a:spcPts val="0"/>
+              </a:spcAft>
+              <a:buSzPts val="1600"/>
+              <a:buChar char="●"/>
+            </a:pPr>
+            <a:r>
+              <a:rPr lang="en"/>
+              <a:t>What do you give up with data-oriented design?</a:t>
+            </a:r>
+            <a:endParaRPr/>
+          </a:p>
         </p:txBody>
       </p:sp>
       <p:sp>
         <p:nvSpPr>
-          <p:cNvPr id="4" name="Rounded Rectangle 3"/>
-          <p:cNvSpPr/>
+          <p:cNvPr id="4" name="TextBox 3"/>
+          <p:cNvSpPr txBox="1"/>
           <p:nvPr/>
         </p:nvSpPr>
         <p:spPr>
           <a:xfrm>
-            <a:off x="3429000" y="1481328"/>
-            <a:ext cx="2286000" cy="566928"/>
-          </a:xfrm>
-          <a:prstGeom prst="roundRect">
-            <a:avLst>
-              <a:gd name="adj" fmla="val 12000"/>
-            </a:avLst>
-          </a:prstGeom>
-          <a:solidFill>
-            <a:srgbClr val="2E3338"/>
-          </a:solidFill>
-          <a:ln w="25400">
-            <a:solidFill>
-              <a:srgbClr val="D45D35"/>
-            </a:solidFill>
-          </a:ln>
-          <a:effectLst/>
-        </p:spPr>
-        <p:style>
-          <a:lnRef idx="1">
-            <a:schemeClr val="accent1"/>
-          </a:lnRef>
-          <a:fillRef idx="3">
-            <a:schemeClr val="accent1"/>
-          </a:fillRef>
-          <a:effectRef idx="2">
-            <a:schemeClr val="accent1"/>
-          </a:effectRef>
-          <a:fontRef idx="minor">
-            <a:schemeClr val="lt1"/>
-          </a:fontRef>
-        </p:style>
-        <p:txBody>
-          <a:bodyPr rtlCol="0" anchor="ctr" wrap="square" lIns="73152" rIns="73152"/>
-          <a:lstStyle/>
-          <a:p>
-            <a:pPr algn="ctr"/>
-            <a:r>
-              <a:rPr sz="1300" b="1">
-                <a:solidFill>
-                  <a:srgbClr val="DEE2E6"/>
-                </a:solidFill>
-              </a:rPr>
-              <a:t>Game1 : Core</a:t>
-            </a:r>
-          </a:p>
-        </p:txBody>
-      </p:sp>
-      <p:sp>
-        <p:nvSpPr>
-          <p:cNvPr id="5" name="Rounded Rectangle 4"/>
-          <p:cNvSpPr/>
-          <p:nvPr/>
-        </p:nvSpPr>
-        <p:spPr>
-          <a:xfrm>
-            <a:off x="594359" y="2246376"/>
-            <a:ext cx="2286000" cy="566928"/>
-          </a:xfrm>
-          <a:prstGeom prst="roundRect">
-            <a:avLst>
-              <a:gd name="adj" fmla="val 12000"/>
-            </a:avLst>
-          </a:prstGeom>
-          <a:solidFill>
-            <a:srgbClr val="2E3338"/>
-          </a:solidFill>
-          <a:ln>
-            <a:noFill/>
-          </a:ln>
-          <a:effectLst/>
-        </p:spPr>
-        <p:style>
-          <a:lnRef idx="1">
-            <a:schemeClr val="accent1"/>
-          </a:lnRef>
-          <a:fillRef idx="3">
-            <a:schemeClr val="accent1"/>
-          </a:fillRef>
-          <a:effectRef idx="2">
-            <a:schemeClr val="accent1"/>
-          </a:effectRef>
-          <a:fontRef idx="minor">
-            <a:schemeClr val="lt1"/>
-          </a:fontRef>
-        </p:style>
-        <p:txBody>
-          <a:bodyPr rtlCol="0" anchor="ctr" wrap="square" lIns="73152" rIns="73152"/>
-          <a:lstStyle/>
-          <a:p>
-            <a:pPr algn="ctr"/>
-            <a:r>
-              <a:rPr sz="1300" b="1">
-                <a:solidFill>
-                  <a:srgbClr val="DEE2E6"/>
-                </a:solidFill>
-              </a:rPr>
-              <a:t>StateStack</a:t>
-            </a:r>
-          </a:p>
-        </p:txBody>
-      </p:sp>
-      <p:sp>
-        <p:nvSpPr>
-          <p:cNvPr id="6" name="Rounded Rectangle 5"/>
-          <p:cNvSpPr/>
-          <p:nvPr/>
-        </p:nvSpPr>
-        <p:spPr>
-          <a:xfrm>
-            <a:off x="374903" y="3011424"/>
-            <a:ext cx="1307592" cy="566928"/>
-          </a:xfrm>
-          <a:prstGeom prst="roundRect">
-            <a:avLst>
-              <a:gd name="adj" fmla="val 12000"/>
-            </a:avLst>
-          </a:prstGeom>
-          <a:solidFill>
-            <a:srgbClr val="2E3338"/>
-          </a:solidFill>
-          <a:ln>
-            <a:noFill/>
-          </a:ln>
-          <a:effectLst/>
-        </p:spPr>
-        <p:style>
-          <a:lnRef idx="1">
-            <a:schemeClr val="accent1"/>
-          </a:lnRef>
-          <a:fillRef idx="3">
-            <a:schemeClr val="accent1"/>
-          </a:fillRef>
-          <a:effectRef idx="2">
-            <a:schemeClr val="accent1"/>
-          </a:effectRef>
-          <a:fontRef idx="minor">
-            <a:schemeClr val="lt1"/>
-          </a:fontRef>
-        </p:style>
-        <p:txBody>
-          <a:bodyPr rtlCol="0" anchor="ctr" wrap="square" lIns="73152" rIns="73152"/>
-          <a:lstStyle/>
-          <a:p>
-            <a:pPr algn="ctr"/>
-            <a:r>
-              <a:rPr sz="1200" b="1">
-                <a:solidFill>
-                  <a:srgbClr val="DEE2E6"/>
-                </a:solidFill>
-              </a:rPr>
-              <a:t>PlayState</a:t>
-            </a:r>
-          </a:p>
-          <a:p>
-            <a:pPr algn="ctr"/>
-            <a:r>
-              <a:rPr sz="1000" b="0">
-                <a:solidFill>
-                  <a:srgbClr val="9AA3AB"/>
-                </a:solidFill>
-              </a:rPr>
-              <a:t>updates the run</a:t>
-            </a:r>
-          </a:p>
-        </p:txBody>
-      </p:sp>
-      <p:cxnSp>
-        <p:nvCxnSpPr>
-          <p:cNvPr id="7" name="Connector 6"/>
-          <p:cNvCxnSpPr/>
-          <p:nvPr/>
-        </p:nvCxnSpPr>
-        <p:spPr>
-          <a:xfrm flipH="1">
-            <a:off x="1028700" y="2831592"/>
-            <a:ext cx="708660" cy="161544"/>
-          </a:xfrm>
-          <a:prstGeom prst="line">
-            <a:avLst/>
-          </a:prstGeom>
-          <a:ln w="25400">
-            <a:solidFill>
-              <a:srgbClr val="9AA3AB"/>
-            </a:solidFill>
-            <a:tailEnd type="triangle"/>
-          </a:ln>
-        </p:spPr>
-        <p:style>
-          <a:lnRef idx="2">
-            <a:schemeClr val="accent1"/>
-          </a:lnRef>
-          <a:fillRef idx="0">
-            <a:schemeClr val="accent1"/>
-          </a:fillRef>
-          <a:effectRef idx="1">
-            <a:schemeClr val="accent1"/>
-          </a:effectRef>
-          <a:fontRef idx="minor">
-            <a:schemeClr val="tx1"/>
-          </a:fontRef>
-        </p:style>
-      </p:cxnSp>
-      <p:sp>
-        <p:nvSpPr>
-          <p:cNvPr id="8" name="Rounded Rectangle 7"/>
-          <p:cNvSpPr/>
-          <p:nvPr/>
-        </p:nvSpPr>
-        <p:spPr>
-          <a:xfrm>
-            <a:off x="1792223" y="3011424"/>
-            <a:ext cx="1307592" cy="566928"/>
-          </a:xfrm>
-          <a:prstGeom prst="roundRect">
-            <a:avLst>
-              <a:gd name="adj" fmla="val 12000"/>
-            </a:avLst>
-          </a:prstGeom>
-          <a:solidFill>
-            <a:srgbClr val="2E3338"/>
-          </a:solidFill>
-          <a:ln>
-            <a:noFill/>
-          </a:ln>
-          <a:effectLst/>
-        </p:spPr>
-        <p:style>
-          <a:lnRef idx="1">
-            <a:schemeClr val="accent1"/>
-          </a:lnRef>
-          <a:fillRef idx="3">
-            <a:schemeClr val="accent1"/>
-          </a:fillRef>
-          <a:effectRef idx="2">
-            <a:schemeClr val="accent1"/>
-          </a:effectRef>
-          <a:fontRef idx="minor">
-            <a:schemeClr val="lt1"/>
-          </a:fontRef>
-        </p:style>
-        <p:txBody>
-          <a:bodyPr rtlCol="0" anchor="ctr" wrap="square" lIns="73152" rIns="73152"/>
-          <a:lstStyle/>
-          <a:p>
-            <a:pPr algn="ctr"/>
-            <a:r>
-              <a:rPr sz="1200" b="1">
-                <a:solidFill>
-                  <a:srgbClr val="DEE2E6"/>
-                </a:solidFill>
-              </a:rPr>
-              <a:t>LevelUpState</a:t>
-            </a:r>
-          </a:p>
-          <a:p>
-            <a:pPr algn="ctr"/>
-            <a:r>
-              <a:rPr sz="1000" b="0">
-                <a:solidFill>
-                  <a:srgbClr val="9AA3AB"/>
-                </a:solidFill>
-              </a:rPr>
-              <a:t>pushed on top</a:t>
-            </a:r>
-          </a:p>
-        </p:txBody>
-      </p:sp>
-      <p:cxnSp>
-        <p:nvCxnSpPr>
-          <p:cNvPr id="9" name="Connector 8"/>
-          <p:cNvCxnSpPr/>
-          <p:nvPr/>
-        </p:nvCxnSpPr>
-        <p:spPr>
-          <a:xfrm>
-            <a:off x="1737360" y="2831592"/>
-            <a:ext cx="708660" cy="161544"/>
-          </a:xfrm>
-          <a:prstGeom prst="line">
-            <a:avLst/>
-          </a:prstGeom>
-          <a:ln w="25400">
-            <a:solidFill>
-              <a:srgbClr val="9AA3AB"/>
-            </a:solidFill>
-            <a:tailEnd type="triangle"/>
-          </a:ln>
-        </p:spPr>
-        <p:style>
-          <a:lnRef idx="2">
-            <a:schemeClr val="accent1"/>
-          </a:lnRef>
-          <a:fillRef idx="0">
-            <a:schemeClr val="accent1"/>
-          </a:fillRef>
-          <a:effectRef idx="1">
-            <a:schemeClr val="accent1"/>
-          </a:effectRef>
-          <a:fontRef idx="minor">
-            <a:schemeClr val="tx1"/>
-          </a:fontRef>
-        </p:style>
-      </p:cxnSp>
-      <p:cxnSp>
-        <p:nvCxnSpPr>
-          <p:cNvPr id="10" name="Connector 9"/>
-          <p:cNvCxnSpPr/>
-          <p:nvPr/>
-        </p:nvCxnSpPr>
-        <p:spPr>
-          <a:xfrm flipH="1">
-            <a:off x="1737360" y="2066544"/>
-            <a:ext cx="2834640" cy="161544"/>
-          </a:xfrm>
-          <a:prstGeom prst="line">
-            <a:avLst/>
-          </a:prstGeom>
-          <a:ln w="25400">
-            <a:solidFill>
-              <a:srgbClr val="9AA3AB"/>
-            </a:solidFill>
-            <a:tailEnd type="triangle"/>
-          </a:ln>
-        </p:spPr>
-        <p:style>
-          <a:lnRef idx="2">
-            <a:schemeClr val="accent1"/>
-          </a:lnRef>
-          <a:fillRef idx="0">
-            <a:schemeClr val="accent1"/>
-          </a:fillRef>
-          <a:effectRef idx="1">
-            <a:schemeClr val="accent1"/>
-          </a:effectRef>
-          <a:fontRef idx="minor">
-            <a:schemeClr val="tx1"/>
-          </a:fontRef>
-        </p:style>
-      </p:cxnSp>
-      <p:sp>
-        <p:nvSpPr>
-          <p:cNvPr id="11" name="Rounded Rectangle 10"/>
-          <p:cNvSpPr/>
-          <p:nvPr/>
-        </p:nvSpPr>
-        <p:spPr>
-          <a:xfrm>
-            <a:off x="4846320" y="2246376"/>
-            <a:ext cx="2286000" cy="566928"/>
-          </a:xfrm>
-          <a:prstGeom prst="roundRect">
-            <a:avLst>
-              <a:gd name="adj" fmla="val 12000"/>
-            </a:avLst>
-          </a:prstGeom>
-          <a:solidFill>
-            <a:srgbClr val="2E3338"/>
-          </a:solidFill>
-          <a:ln>
-            <a:noFill/>
-          </a:ln>
-          <a:effectLst/>
-        </p:spPr>
-        <p:style>
-          <a:lnRef idx="1">
-            <a:schemeClr val="accent1"/>
-          </a:lnRef>
-          <a:fillRef idx="3">
-            <a:schemeClr val="accent1"/>
-          </a:fillRef>
-          <a:effectRef idx="2">
-            <a:schemeClr val="accent1"/>
-          </a:effectRef>
-          <a:fontRef idx="minor">
-            <a:schemeClr val="lt1"/>
-          </a:fontRef>
-        </p:style>
-        <p:txBody>
-          <a:bodyPr rtlCol="0" anchor="ctr" wrap="square" lIns="73152" rIns="73152"/>
-          <a:lstStyle/>
-          <a:p>
-            <a:pPr algn="ctr"/>
-            <a:r>
-              <a:rPr sz="1300" b="1">
-                <a:solidFill>
-                  <a:srgbClr val="DEE2E6"/>
-                </a:solidFill>
-              </a:rPr>
-              <a:t>Run</a:t>
-            </a:r>
-          </a:p>
-          <a:p>
-            <a:pPr algn="ctr"/>
-            <a:r>
-              <a:rPr sz="1100" b="0">
-                <a:solidFill>
-                  <a:srgbClr val="9AA3AB"/>
-                </a:solidFill>
-              </a:rPr>
-              <a:t>one game</a:t>
-            </a:r>
-          </a:p>
-        </p:txBody>
-      </p:sp>
-      <p:sp>
-        <p:nvSpPr>
-          <p:cNvPr id="12" name="Rounded Rectangle 11"/>
-          <p:cNvSpPr/>
-          <p:nvPr/>
-        </p:nvSpPr>
-        <p:spPr>
-          <a:xfrm>
-            <a:off x="3429000" y="3011424"/>
-            <a:ext cx="2286000" cy="566928"/>
-          </a:xfrm>
-          <a:prstGeom prst="roundRect">
-            <a:avLst>
-              <a:gd name="adj" fmla="val 12000"/>
-            </a:avLst>
-          </a:prstGeom>
-          <a:solidFill>
-            <a:srgbClr val="2E3338"/>
-          </a:solidFill>
-          <a:ln>
-            <a:noFill/>
-          </a:ln>
-          <a:effectLst/>
-        </p:spPr>
-        <p:style>
-          <a:lnRef idx="1">
-            <a:schemeClr val="accent1"/>
-          </a:lnRef>
-          <a:fillRef idx="3">
-            <a:schemeClr val="accent1"/>
-          </a:fillRef>
-          <a:effectRef idx="2">
-            <a:schemeClr val="accent1"/>
-          </a:effectRef>
-          <a:fontRef idx="minor">
-            <a:schemeClr val="lt1"/>
-          </a:fontRef>
-        </p:style>
-        <p:txBody>
-          <a:bodyPr rtlCol="0" anchor="ctr" wrap="square" lIns="73152" rIns="73152"/>
-          <a:lstStyle/>
-          <a:p>
-            <a:pPr algn="ctr"/>
-            <a:r>
-              <a:rPr sz="1300" b="1">
-                <a:solidFill>
-                  <a:srgbClr val="DEE2E6"/>
-                </a:solidFill>
-              </a:rPr>
-              <a:t>Swarm</a:t>
-            </a:r>
-          </a:p>
-        </p:txBody>
-      </p:sp>
-      <p:sp>
-        <p:nvSpPr>
-          <p:cNvPr id="13" name="Rounded Rectangle 12"/>
-          <p:cNvSpPr/>
-          <p:nvPr/>
-        </p:nvSpPr>
-        <p:spPr>
-          <a:xfrm>
-            <a:off x="3209544" y="3776472"/>
-            <a:ext cx="1307592" cy="566928"/>
-          </a:xfrm>
-          <a:prstGeom prst="roundRect">
-            <a:avLst>
-              <a:gd name="adj" fmla="val 12000"/>
-            </a:avLst>
-          </a:prstGeom>
-          <a:solidFill>
-            <a:srgbClr val="2E3338"/>
-          </a:solidFill>
-          <a:ln>
-            <a:noFill/>
-          </a:ln>
-          <a:effectLst/>
-        </p:spPr>
-        <p:style>
-          <a:lnRef idx="1">
-            <a:schemeClr val="accent1"/>
-          </a:lnRef>
-          <a:fillRef idx="3">
-            <a:schemeClr val="accent1"/>
-          </a:fillRef>
-          <a:effectRef idx="2">
-            <a:schemeClr val="accent1"/>
-          </a:effectRef>
-          <a:fontRef idx="minor">
-            <a:schemeClr val="lt1"/>
-          </a:fontRef>
-        </p:style>
-        <p:txBody>
-          <a:bodyPr rtlCol="0" anchor="ctr" wrap="square" lIns="73152" rIns="73152"/>
-          <a:lstStyle/>
-          <a:p>
-            <a:pPr algn="ctr"/>
-            <a:r>
-              <a:rPr sz="1200" b="1">
-                <a:solidFill>
-                  <a:srgbClr val="DEE2E6"/>
-                </a:solidFill>
-              </a:rPr>
-              <a:t>Enemies</a:t>
-            </a:r>
-          </a:p>
-          <a:p>
-            <a:pPr algn="ctr"/>
-            <a:r>
-              <a:rPr sz="1000" b="0">
-                <a:solidFill>
-                  <a:srgbClr val="9AA3AB"/>
-                </a:solidFill>
-              </a:rPr>
-              <a:t>arrays</a:t>
-            </a:r>
-          </a:p>
-        </p:txBody>
-      </p:sp>
-      <p:cxnSp>
-        <p:nvCxnSpPr>
-          <p:cNvPr id="14" name="Connector 13"/>
-          <p:cNvCxnSpPr/>
-          <p:nvPr/>
-        </p:nvCxnSpPr>
-        <p:spPr>
-          <a:xfrm flipH="1">
-            <a:off x="3863340" y="3596640"/>
-            <a:ext cx="708660" cy="161544"/>
-          </a:xfrm>
-          <a:prstGeom prst="line">
-            <a:avLst/>
-          </a:prstGeom>
-          <a:ln w="25400">
-            <a:solidFill>
-              <a:srgbClr val="9AA3AB"/>
-            </a:solidFill>
-            <a:tailEnd type="triangle"/>
-          </a:ln>
-        </p:spPr>
-        <p:style>
-          <a:lnRef idx="2">
-            <a:schemeClr val="accent1"/>
-          </a:lnRef>
-          <a:fillRef idx="0">
-            <a:schemeClr val="accent1"/>
-          </a:fillRef>
-          <a:effectRef idx="1">
-            <a:schemeClr val="accent1"/>
-          </a:effectRef>
-          <a:fontRef idx="minor">
-            <a:schemeClr val="tx1"/>
-          </a:fontRef>
-        </p:style>
-      </p:cxnSp>
-      <p:sp>
-        <p:nvSpPr>
-          <p:cNvPr id="15" name="Rounded Rectangle 14"/>
-          <p:cNvSpPr/>
-          <p:nvPr/>
-        </p:nvSpPr>
-        <p:spPr>
-          <a:xfrm>
-            <a:off x="4626864" y="3776472"/>
-            <a:ext cx="1307592" cy="566928"/>
-          </a:xfrm>
-          <a:prstGeom prst="roundRect">
-            <a:avLst>
-              <a:gd name="adj" fmla="val 12000"/>
-            </a:avLst>
-          </a:prstGeom>
-          <a:solidFill>
-            <a:srgbClr val="2E3338"/>
-          </a:solidFill>
-          <a:ln>
-            <a:noFill/>
-          </a:ln>
-          <a:effectLst/>
-        </p:spPr>
-        <p:style>
-          <a:lnRef idx="1">
-            <a:schemeClr val="accent1"/>
-          </a:lnRef>
-          <a:fillRef idx="3">
-            <a:schemeClr val="accent1"/>
-          </a:fillRef>
-          <a:effectRef idx="2">
-            <a:schemeClr val="accent1"/>
-          </a:effectRef>
-          <a:fontRef idx="minor">
-            <a:schemeClr val="lt1"/>
-          </a:fontRef>
-        </p:style>
-        <p:txBody>
-          <a:bodyPr rtlCol="0" anchor="ctr" wrap="square" lIns="73152" rIns="73152"/>
-          <a:lstStyle/>
-          <a:p>
-            <a:pPr algn="ctr"/>
-            <a:r>
-              <a:rPr sz="1200" b="1">
-                <a:solidFill>
-                  <a:srgbClr val="DEE2E6"/>
-                </a:solidFill>
-              </a:rPr>
-              <a:t>FlatGrid</a:t>
-            </a:r>
-          </a:p>
-          <a:p>
-            <a:pPr algn="ctr"/>
-            <a:r>
-              <a:rPr sz="1000" b="0">
-                <a:solidFill>
-                  <a:srgbClr val="9AA3AB"/>
-                </a:solidFill>
-              </a:rPr>
-              <a:t>arrays</a:t>
-            </a:r>
-          </a:p>
-        </p:txBody>
-      </p:sp>
-      <p:cxnSp>
-        <p:nvCxnSpPr>
-          <p:cNvPr id="16" name="Connector 15"/>
-          <p:cNvCxnSpPr/>
-          <p:nvPr/>
-        </p:nvCxnSpPr>
-        <p:spPr>
-          <a:xfrm>
-            <a:off x="4572000" y="3596640"/>
-            <a:ext cx="708660" cy="161544"/>
-          </a:xfrm>
-          <a:prstGeom prst="line">
-            <a:avLst/>
-          </a:prstGeom>
-          <a:ln w="25400">
-            <a:solidFill>
-              <a:srgbClr val="9AA3AB"/>
-            </a:solidFill>
-            <a:tailEnd type="triangle"/>
-          </a:ln>
-        </p:spPr>
-        <p:style>
-          <a:lnRef idx="2">
-            <a:schemeClr val="accent1"/>
-          </a:lnRef>
-          <a:fillRef idx="0">
-            <a:schemeClr val="accent1"/>
-          </a:fillRef>
-          <a:effectRef idx="1">
-            <a:schemeClr val="accent1"/>
-          </a:effectRef>
-          <a:fontRef idx="minor">
-            <a:schemeClr val="tx1"/>
-          </a:fontRef>
-        </p:style>
-      </p:cxnSp>
-      <p:cxnSp>
-        <p:nvCxnSpPr>
-          <p:cNvPr id="17" name="Connector 16"/>
-          <p:cNvCxnSpPr/>
-          <p:nvPr/>
-        </p:nvCxnSpPr>
-        <p:spPr>
-          <a:xfrm flipH="1">
-            <a:off x="4572000" y="2831592"/>
-            <a:ext cx="1417320" cy="161544"/>
-          </a:xfrm>
-          <a:prstGeom prst="line">
-            <a:avLst/>
-          </a:prstGeom>
-          <a:ln w="25400">
-            <a:solidFill>
-              <a:srgbClr val="9AA3AB"/>
-            </a:solidFill>
-            <a:tailEnd type="triangle"/>
-          </a:ln>
-        </p:spPr>
-        <p:style>
-          <a:lnRef idx="2">
-            <a:schemeClr val="accent1"/>
-          </a:lnRef>
-          <a:fillRef idx="0">
-            <a:schemeClr val="accent1"/>
-          </a:fillRef>
-          <a:effectRef idx="1">
-            <a:schemeClr val="accent1"/>
-          </a:effectRef>
-          <a:fontRef idx="minor">
-            <a:schemeClr val="tx1"/>
-          </a:fontRef>
-        </p:style>
-      </p:cxnSp>
-      <p:sp>
-        <p:nvSpPr>
-          <p:cNvPr id="18" name="Rounded Rectangle 17"/>
-          <p:cNvSpPr/>
-          <p:nvPr/>
-        </p:nvSpPr>
-        <p:spPr>
-          <a:xfrm>
-            <a:off x="6044184" y="3011424"/>
-            <a:ext cx="1307592" cy="566928"/>
-          </a:xfrm>
-          <a:prstGeom prst="roundRect">
-            <a:avLst>
-              <a:gd name="adj" fmla="val 12000"/>
-            </a:avLst>
-          </a:prstGeom>
-          <a:solidFill>
-            <a:srgbClr val="2E3338"/>
-          </a:solidFill>
-          <a:ln>
-            <a:noFill/>
-          </a:ln>
-          <a:effectLst/>
-        </p:spPr>
-        <p:style>
-          <a:lnRef idx="1">
-            <a:schemeClr val="accent1"/>
-          </a:lnRef>
-          <a:fillRef idx="3">
-            <a:schemeClr val="accent1"/>
-          </a:fillRef>
-          <a:effectRef idx="2">
-            <a:schemeClr val="accent1"/>
-          </a:effectRef>
-          <a:fontRef idx="minor">
-            <a:schemeClr val="lt1"/>
-          </a:fontRef>
-        </p:style>
-        <p:txBody>
-          <a:bodyPr rtlCol="0" anchor="ctr" wrap="square" lIns="73152" rIns="73152"/>
-          <a:lstStyle/>
-          <a:p>
-            <a:pPr algn="ctr"/>
-            <a:r>
-              <a:rPr sz="1200" b="1">
-                <a:solidFill>
-                  <a:srgbClr val="DEE2E6"/>
-                </a:solidFill>
-              </a:rPr>
-              <a:t>Gems</a:t>
-            </a:r>
-          </a:p>
-          <a:p>
-            <a:pPr algn="ctr"/>
-            <a:r>
-              <a:rPr sz="1000" b="0">
-                <a:solidFill>
-                  <a:srgbClr val="9AA3AB"/>
-                </a:solidFill>
-              </a:rPr>
-              <a:t>arrays</a:t>
-            </a:r>
-          </a:p>
-        </p:txBody>
-      </p:sp>
-      <p:cxnSp>
-        <p:nvCxnSpPr>
-          <p:cNvPr id="19" name="Connector 18"/>
-          <p:cNvCxnSpPr/>
-          <p:nvPr/>
-        </p:nvCxnSpPr>
-        <p:spPr>
-          <a:xfrm>
-            <a:off x="5989320" y="2831592"/>
-            <a:ext cx="708660" cy="161544"/>
-          </a:xfrm>
-          <a:prstGeom prst="line">
-            <a:avLst/>
-          </a:prstGeom>
-          <a:ln w="25400">
-            <a:solidFill>
-              <a:srgbClr val="9AA3AB"/>
-            </a:solidFill>
-            <a:tailEnd type="triangle"/>
-          </a:ln>
-        </p:spPr>
-        <p:style>
-          <a:lnRef idx="2">
-            <a:schemeClr val="accent1"/>
-          </a:lnRef>
-          <a:fillRef idx="0">
-            <a:schemeClr val="accent1"/>
-          </a:fillRef>
-          <a:effectRef idx="1">
-            <a:schemeClr val="accent1"/>
-          </a:effectRef>
-          <a:fontRef idx="minor">
-            <a:schemeClr val="tx1"/>
-          </a:fontRef>
-        </p:style>
-      </p:cxnSp>
-      <p:sp>
-        <p:nvSpPr>
-          <p:cNvPr id="20" name="Rounded Rectangle 19"/>
-          <p:cNvSpPr/>
-          <p:nvPr/>
-        </p:nvSpPr>
-        <p:spPr>
-          <a:xfrm>
-            <a:off x="7461504" y="3011424"/>
-            <a:ext cx="1307592" cy="566928"/>
-          </a:xfrm>
-          <a:prstGeom prst="roundRect">
-            <a:avLst>
-              <a:gd name="adj" fmla="val 12000"/>
-            </a:avLst>
-          </a:prstGeom>
-          <a:solidFill>
-            <a:srgbClr val="2E3338"/>
-          </a:solidFill>
-          <a:ln>
-            <a:noFill/>
-          </a:ln>
-          <a:effectLst/>
-        </p:spPr>
-        <p:style>
-          <a:lnRef idx="1">
-            <a:schemeClr val="accent1"/>
-          </a:lnRef>
-          <a:fillRef idx="3">
-            <a:schemeClr val="accent1"/>
-          </a:fillRef>
-          <a:effectRef idx="2">
-            <a:schemeClr val="accent1"/>
-          </a:effectRef>
-          <a:fontRef idx="minor">
-            <a:schemeClr val="lt1"/>
-          </a:fontRef>
-        </p:style>
-        <p:txBody>
-          <a:bodyPr rtlCol="0" anchor="ctr" wrap="square" lIns="73152" rIns="73152"/>
-          <a:lstStyle/>
-          <a:p>
-            <a:pPr algn="ctr"/>
-            <a:r>
-              <a:rPr sz="1200" b="1">
-                <a:solidFill>
-                  <a:srgbClr val="DEE2E6"/>
-                </a:solidFill>
-              </a:rPr>
-              <a:t>Player, weapons</a:t>
-            </a:r>
-          </a:p>
-          <a:p>
-            <a:pPr algn="ctr"/>
-            <a:r>
-              <a:rPr sz="1000" b="0">
-                <a:solidFill>
-                  <a:srgbClr val="9AA3AB"/>
-                </a:solidFill>
-              </a:rPr>
-              <a:t>ordinary objects</a:t>
-            </a:r>
-          </a:p>
-        </p:txBody>
-      </p:sp>
-      <p:cxnSp>
-        <p:nvCxnSpPr>
-          <p:cNvPr id="21" name="Connector 20"/>
-          <p:cNvCxnSpPr/>
-          <p:nvPr/>
-        </p:nvCxnSpPr>
-        <p:spPr>
-          <a:xfrm>
-            <a:off x="5989320" y="2831592"/>
-            <a:ext cx="2125980" cy="161544"/>
-          </a:xfrm>
-          <a:prstGeom prst="line">
-            <a:avLst/>
-          </a:prstGeom>
-          <a:ln w="25400">
-            <a:solidFill>
-              <a:srgbClr val="9AA3AB"/>
-            </a:solidFill>
-            <a:tailEnd type="triangle"/>
-          </a:ln>
-        </p:spPr>
-        <p:style>
-          <a:lnRef idx="2">
-            <a:schemeClr val="accent1"/>
-          </a:lnRef>
-          <a:fillRef idx="0">
-            <a:schemeClr val="accent1"/>
-          </a:fillRef>
-          <a:effectRef idx="1">
-            <a:schemeClr val="accent1"/>
-          </a:effectRef>
-          <a:fontRef idx="minor">
-            <a:schemeClr val="tx1"/>
-          </a:fontRef>
-        </p:style>
-      </p:cxnSp>
-      <p:cxnSp>
-        <p:nvCxnSpPr>
-          <p:cNvPr id="22" name="Connector 21"/>
-          <p:cNvCxnSpPr/>
-          <p:nvPr/>
-        </p:nvCxnSpPr>
-        <p:spPr>
-          <a:xfrm>
-            <a:off x="4572000" y="2066544"/>
-            <a:ext cx="1417320" cy="161544"/>
-          </a:xfrm>
-          <a:prstGeom prst="line">
-            <a:avLst/>
-          </a:prstGeom>
-          <a:ln w="25400">
-            <a:solidFill>
-              <a:srgbClr val="9AA3AB"/>
-            </a:solidFill>
-            <a:tailEnd type="triangle"/>
-          </a:ln>
-        </p:spPr>
-        <p:style>
-          <a:lnRef idx="2">
-            <a:schemeClr val="accent1"/>
-          </a:lnRef>
-          <a:fillRef idx="0">
-            <a:schemeClr val="accent1"/>
-          </a:fillRef>
-          <a:effectRef idx="1">
-            <a:schemeClr val="accent1"/>
-          </a:effectRef>
-          <a:fontRef idx="minor">
-            <a:schemeClr val="tx1"/>
-          </a:fontRef>
-        </p:style>
-      </p:cxnSp>
-      <p:sp>
-        <p:nvSpPr>
-          <p:cNvPr id="23" name="TextBox 22"/>
-          <p:cNvSpPr txBox="1"/>
-          <p:nvPr/>
-        </p:nvSpPr>
-        <p:spPr>
-          <a:xfrm>
-            <a:off x="457200" y="4462272"/>
-            <a:ext cx="8229600" cy="365760"/>
+            <a:off x="457200" y="3182112"/>
+            <a:ext cx="8229600" cy="457200"/>
           </a:xfrm>
           <a:prstGeom prst="rect">
             <a:avLst/>
@@ -19266,12 +18847,12 @@
           <a:p>
             <a:pPr algn="ctr"/>
             <a:r>
-              <a:rPr sz="1300" b="0" i="0">
+              <a:rPr sz="1400" b="0" i="0">
                 <a:solidFill>
                   <a:srgbClr val="9AA3AB"/>
                 </a:solidFill>
               </a:rPr>
-              <a:t>Only the swarm and the gems are arrays. The rest are ordinary objects.</a:t>
+              <a:t>The answers, and more questions, are on the course site.</a:t>
             </a:r>
           </a:p>
         </p:txBody>
@@ -19285,28 +18866,43 @@
 </file>
 
 <file path=ppt/slides/slide37.xml><?xml version="1.0" encoding="utf-8"?>
-<p:sld xmlns:a="http://schemas.openxmlformats.org/drawingml/2006/main" xmlns:p="http://schemas.openxmlformats.org/presentationml/2006/main" xmlns:r="http://schemas.openxmlformats.org/officeDocument/2006/relationships">
+<p:sld xmlns:a="http://schemas.openxmlformats.org/drawingml/2006/main" xmlns:r="http://schemas.openxmlformats.org/officeDocument/2006/relationships" xmlns:mc="http://schemas.openxmlformats.org/markup-compatibility/2006" xmlns:mv="urn:schemas-microsoft-com:mac:vml" xmlns:p="http://schemas.openxmlformats.org/presentationml/2006/main" xmlns:c="http://schemas.openxmlformats.org/drawingml/2006/chart" xmlns:dgm="http://schemas.openxmlformats.org/drawingml/2006/diagram" xmlns:o="urn:schemas-microsoft-com:office:office" xmlns:v="urn:schemas-microsoft-com:vml" xmlns:pvml="urn:schemas-microsoft-com:office:powerpoint" xmlns:com="http://schemas.openxmlformats.org/drawingml/2006/compatibility" xmlns:p14="http://schemas.microsoft.com/office/powerpoint/2010/main" xmlns:p15="http://schemas.microsoft.com/office/powerpoint/2012/main" xmlns:ahyp="http://schemas.microsoft.com/office/drawing/2018/hyperlinkcolor">
   <p:cSld>
     <p:spTree>
       <p:nvGrpSpPr>
-        <p:cNvPr id="1" name=""/>
+        <p:cNvPr id="292" name="Shape 292"/>
         <p:cNvGrpSpPr/>
         <p:nvPr/>
       </p:nvGrpSpPr>
-      <p:grpSpPr/>
-      <p:sp>
-        <p:nvSpPr>
-          <p:cNvPr id="2" name="Title 1"/>
-          <p:cNvSpPr>
-            <a:spLocks noGrp="1"/>
-          </p:cNvSpPr>
+      <p:grpSpPr>
+        <a:xfrm>
+          <a:off x="0" y="0"/>
+          <a:ext cx="0" cy="0"/>
+          <a:chOff x="0" y="0"/>
+          <a:chExt cx="0" cy="0"/>
+        </a:xfrm>
+      </p:grpSpPr>
+      <p:sp>
+        <p:nvSpPr>
+          <p:cNvPr id="293" name="Google Shape;293;p45"/>
+          <p:cNvSpPr txBox="1"/>
           <p:nvPr>
             <p:ph type="title"/>
           </p:nvPr>
         </p:nvSpPr>
-        <p:spPr/>
+        <p:spPr>
+          <a:xfrm>
+            <a:off x="311700" y="195615"/>
+            <a:ext cx="8520600" cy="572700"/>
+          </a:xfrm>
+          <a:prstGeom prst="rect">
+            <a:avLst/>
+          </a:prstGeom>
+        </p:spPr>
         <p:txBody>
-          <a:bodyPr/>
+          <a:bodyPr anchorCtr="0" anchor="t" bIns="91425" lIns="91425" spcFirstLastPara="1" rIns="91425" wrap="square" tIns="91425">
+            <a:normAutofit fontScale="90000"/>
+          </a:bodyPr>
           <a:lstStyle/>
           <a:p>
             <a:pPr indent="0" lvl="0" marL="0" rtl="0" algn="l">
@@ -19319,31 +18915,42 @@
               <a:buNone/>
             </a:pPr>
             <a:r>
-              <a:rPr lang="en"/>
-              <a:t>Summary</a:t>
-            </a:r>
-            <a:endParaRPr/>
+              <a:rPr lang="en">
+                <a:solidFill>
+                  <a:schemeClr val="accent5"/>
+                </a:solidFill>
+              </a:rPr>
+              <a:t>Apply It to Your Project</a:t>
+            </a:r>
+            <a:endParaRPr>
+              <a:solidFill>
+                <a:schemeClr val="accent5"/>
+              </a:solidFill>
+            </a:endParaRPr>
           </a:p>
         </p:txBody>
       </p:sp>
       <p:sp>
         <p:nvSpPr>
-          <p:cNvPr id="3" name="Text Placeholder 2"/>
-          <p:cNvSpPr>
-            <a:spLocks noGrp="1"/>
-          </p:cNvSpPr>
+          <p:cNvPr id="294" name="Google Shape;294;p45"/>
+          <p:cNvSpPr txBox="1"/>
           <p:nvPr>
-            <p:ph type="body" idx="1"/>
+            <p:ph idx="1" type="body"/>
           </p:nvPr>
         </p:nvSpPr>
         <p:spPr>
           <a:xfrm>
             <a:off x="311700" y="885950"/>
-            <a:ext cx="8520600" cy="521208"/>
+            <a:ext cx="8520600" cy="4023300"/>
           </a:xfrm>
+          <a:prstGeom prst="rect">
+            <a:avLst/>
+          </a:prstGeom>
         </p:spPr>
         <p:txBody>
-          <a:bodyPr/>
+          <a:bodyPr anchorCtr="0" anchor="t" bIns="91425" lIns="91425" spcFirstLastPara="1" rIns="91425" wrap="square" tIns="91425">
+            <a:normAutofit/>
+          </a:bodyPr>
           <a:lstStyle/>
           <a:p>
             <a:pPr indent="-330200" lvl="0" marL="457200" rtl="0" algn="l">
@@ -19357,335 +18964,61 @@
               <a:buChar char="●"/>
             </a:pPr>
             <a:r>
-              <a:rPr lang="en" b="1"/>
-              <a:t>Five concerns, and this session’s answer to each.</a:t>
+              <a:rPr lang="en"/>
+              <a:t>Profile your game with many more entities. Where does the time go?</a:t>
             </a:r>
             <a:endParaRPr/>
           </a:p>
-        </p:txBody>
-      </p:sp>
-      <p:sp>
-        <p:nvSpPr>
-          <p:cNvPr id="4" name="Rounded Rectangle 3"/>
-          <p:cNvSpPr/>
-          <p:nvPr/>
-        </p:nvSpPr>
-        <p:spPr>
-          <a:xfrm>
-            <a:off x="548640" y="1417320"/>
-            <a:ext cx="2560320" cy="914400"/>
-          </a:xfrm>
-          <a:prstGeom prst="roundRect">
-            <a:avLst>
-              <a:gd name="adj" fmla="val 12000"/>
-            </a:avLst>
-          </a:prstGeom>
-          <a:solidFill>
-            <a:srgbClr val="2E3338"/>
-          </a:solidFill>
-          <a:ln>
-            <a:noFill/>
-          </a:ln>
-          <a:effectLst/>
-        </p:spPr>
-        <p:style>
-          <a:lnRef idx="1">
-            <a:schemeClr val="accent1"/>
-          </a:lnRef>
-          <a:fillRef idx="3">
-            <a:schemeClr val="accent1"/>
-          </a:fillRef>
-          <a:effectRef idx="2">
-            <a:schemeClr val="accent1"/>
-          </a:effectRef>
-          <a:fontRef idx="minor">
-            <a:schemeClr val="lt1"/>
-          </a:fontRef>
-        </p:style>
-        <p:txBody>
-          <a:bodyPr rtlCol="0" anchor="ctr" wrap="square" lIns="73152" rIns="73152"/>
-          <a:lstStyle/>
-          <a:p>
-            <a:pPr algn="ctr"/>
-            <a:r>
-              <a:rPr sz="1500" b="1">
-                <a:solidFill>
-                  <a:srgbClr val="DEE2E6"/>
-                </a:solidFill>
-              </a:rPr>
-              <a:t>Where the time goes</a:t>
-            </a:r>
-          </a:p>
-          <a:p>
-            <a:pPr algn="ctr"/>
-            <a:r>
-              <a:rPr sz="1300" b="0">
-                <a:solidFill>
-                  <a:srgbClr val="9AA3AB"/>
-                </a:solidFill>
-              </a:rPr>
-              <a:t>Profiling</a:t>
-            </a:r>
-          </a:p>
-        </p:txBody>
-      </p:sp>
-      <p:sp>
-        <p:nvSpPr>
-          <p:cNvPr id="5" name="Rounded Rectangle 4"/>
-          <p:cNvSpPr/>
-          <p:nvPr/>
-        </p:nvSpPr>
-        <p:spPr>
-          <a:xfrm>
-            <a:off x="3291840" y="1417320"/>
-            <a:ext cx="2560320" cy="914400"/>
-          </a:xfrm>
-          <a:prstGeom prst="roundRect">
-            <a:avLst>
-              <a:gd name="adj" fmla="val 12000"/>
-            </a:avLst>
-          </a:prstGeom>
-          <a:solidFill>
-            <a:srgbClr val="2E3338"/>
-          </a:solidFill>
-          <a:ln>
-            <a:noFill/>
-          </a:ln>
-          <a:effectLst/>
-        </p:spPr>
-        <p:style>
-          <a:lnRef idx="1">
-            <a:schemeClr val="accent1"/>
-          </a:lnRef>
-          <a:fillRef idx="3">
-            <a:schemeClr val="accent1"/>
-          </a:fillRef>
-          <a:effectRef idx="2">
-            <a:schemeClr val="accent1"/>
-          </a:effectRef>
-          <a:fontRef idx="minor">
-            <a:schemeClr val="lt1"/>
-          </a:fontRef>
-        </p:style>
-        <p:txBody>
-          <a:bodyPr rtlCol="0" anchor="ctr" wrap="square" lIns="73152" rIns="73152"/>
-          <a:lstStyle/>
-          <a:p>
-            <a:pPr algn="ctr"/>
-            <a:r>
-              <a:rPr sz="1500" b="1">
-                <a:solidFill>
-                  <a:srgbClr val="DEE2E6"/>
-                </a:solidFill>
-              </a:rPr>
-              <a:t>Finding what is near</a:t>
-            </a:r>
-          </a:p>
-          <a:p>
-            <a:pPr algn="ctr"/>
-            <a:r>
-              <a:rPr sz="1300" b="0">
-                <a:solidFill>
-                  <a:srgbClr val="9AA3AB"/>
-                </a:solidFill>
-              </a:rPr>
-              <a:t>Spatial partitioning: a grid</a:t>
-            </a:r>
-          </a:p>
-        </p:txBody>
-      </p:sp>
-      <p:sp>
-        <p:nvSpPr>
-          <p:cNvPr id="6" name="Rounded Rectangle 5"/>
-          <p:cNvSpPr/>
-          <p:nvPr/>
-        </p:nvSpPr>
-        <p:spPr>
-          <a:xfrm>
-            <a:off x="6035040" y="1417320"/>
-            <a:ext cx="2560320" cy="914400"/>
-          </a:xfrm>
-          <a:prstGeom prst="roundRect">
-            <a:avLst>
-              <a:gd name="adj" fmla="val 12000"/>
-            </a:avLst>
-          </a:prstGeom>
-          <a:solidFill>
-            <a:srgbClr val="2E3338"/>
-          </a:solidFill>
-          <a:ln>
-            <a:noFill/>
-          </a:ln>
-          <a:effectLst/>
-        </p:spPr>
-        <p:style>
-          <a:lnRef idx="1">
-            <a:schemeClr val="accent1"/>
-          </a:lnRef>
-          <a:fillRef idx="3">
-            <a:schemeClr val="accent1"/>
-          </a:fillRef>
-          <a:effectRef idx="2">
-            <a:schemeClr val="accent1"/>
-          </a:effectRef>
-          <a:fontRef idx="minor">
-            <a:schemeClr val="lt1"/>
-          </a:fontRef>
-        </p:style>
-        <p:txBody>
-          <a:bodyPr rtlCol="0" anchor="ctr" wrap="square" lIns="73152" rIns="73152"/>
-          <a:lstStyle/>
-          <a:p>
-            <a:pPr algn="ctr"/>
-            <a:r>
-              <a:rPr sz="1500" b="1">
-                <a:solidFill>
-                  <a:srgbClr val="DEE2E6"/>
-                </a:solidFill>
-              </a:rPr>
-              <a:t>Fast loops over thousands</a:t>
-            </a:r>
-          </a:p>
-          <a:p>
-            <a:pPr algn="ctr"/>
-            <a:r>
-              <a:rPr sz="1300" b="0">
-                <a:solidFill>
-                  <a:srgbClr val="9AA3AB"/>
-                </a:solidFill>
-              </a:rPr>
-              <a:t>A struct of arrays</a:t>
-            </a:r>
-          </a:p>
-        </p:txBody>
-      </p:sp>
-      <p:sp>
-        <p:nvSpPr>
-          <p:cNvPr id="7" name="Rounded Rectangle 6"/>
-          <p:cNvSpPr/>
-          <p:nvPr/>
-        </p:nvSpPr>
-        <p:spPr>
-          <a:xfrm>
-            <a:off x="1920240" y="2468880"/>
-            <a:ext cx="2560320" cy="914400"/>
-          </a:xfrm>
-          <a:prstGeom prst="roundRect">
-            <a:avLst>
-              <a:gd name="adj" fmla="val 12000"/>
-            </a:avLst>
-          </a:prstGeom>
-          <a:solidFill>
-            <a:srgbClr val="2E3338"/>
-          </a:solidFill>
-          <a:ln>
-            <a:noFill/>
-          </a:ln>
-          <a:effectLst/>
-        </p:spPr>
-        <p:style>
-          <a:lnRef idx="1">
-            <a:schemeClr val="accent1"/>
-          </a:lnRef>
-          <a:fillRef idx="3">
-            <a:schemeClr val="accent1"/>
-          </a:fillRef>
-          <a:effectRef idx="2">
-            <a:schemeClr val="accent1"/>
-          </a:effectRef>
-          <a:fontRef idx="minor">
-            <a:schemeClr val="lt1"/>
-          </a:fontRef>
-        </p:style>
-        <p:txBody>
-          <a:bodyPr rtlCol="0" anchor="ctr" wrap="square" lIns="73152" rIns="73152"/>
-          <a:lstStyle/>
-          <a:p>
-            <a:pPr algn="ctr"/>
-            <a:r>
-              <a:rPr sz="1500" b="1">
-                <a:solidFill>
-                  <a:srgbClr val="DEE2E6"/>
-                </a:solidFill>
-              </a:rPr>
-              <a:t>Is the fast code still right</a:t>
-            </a:r>
-          </a:p>
-          <a:p>
-            <a:pPr algn="ctr"/>
-            <a:r>
-              <a:rPr sz="1300" b="0">
-                <a:solidFill>
-                  <a:srgbClr val="9AA3AB"/>
-                </a:solidFill>
-              </a:rPr>
-              <a:t>A test against the slow code</a:t>
-            </a:r>
-          </a:p>
-        </p:txBody>
-      </p:sp>
-      <p:sp>
-        <p:nvSpPr>
-          <p:cNvPr id="8" name="Rounded Rectangle 7"/>
-          <p:cNvSpPr/>
-          <p:nvPr/>
-        </p:nvSpPr>
-        <p:spPr>
-          <a:xfrm>
-            <a:off x="4663440" y="2468880"/>
-            <a:ext cx="2560320" cy="914400"/>
-          </a:xfrm>
-          <a:prstGeom prst="roundRect">
-            <a:avLst>
-              <a:gd name="adj" fmla="val 12000"/>
-            </a:avLst>
-          </a:prstGeom>
-          <a:solidFill>
-            <a:srgbClr val="2E3338"/>
-          </a:solidFill>
-          <a:ln>
-            <a:noFill/>
-          </a:ln>
-          <a:effectLst/>
-        </p:spPr>
-        <p:style>
-          <a:lnRef idx="1">
-            <a:schemeClr val="accent1"/>
-          </a:lnRef>
-          <a:fillRef idx="3">
-            <a:schemeClr val="accent1"/>
-          </a:fillRef>
-          <a:effectRef idx="2">
-            <a:schemeClr val="accent1"/>
-          </a:effectRef>
-          <a:fontRef idx="minor">
-            <a:schemeClr val="lt1"/>
-          </a:fontRef>
-        </p:style>
-        <p:txBody>
-          <a:bodyPr rtlCol="0" anchor="ctr" wrap="square" lIns="73152" rIns="73152"/>
-          <a:lstStyle/>
-          <a:p>
-            <a:pPr algn="ctr"/>
-            <a:r>
-              <a:rPr sz="1500" b="1">
-                <a:solidFill>
-                  <a:srgbClr val="DEE2E6"/>
-                </a:solidFill>
-              </a:rPr>
-              <a:t>When to optimize</a:t>
-            </a:r>
-          </a:p>
-          <a:p>
-            <a:pPr algn="ctr"/>
-            <a:r>
-              <a:rPr sz="1300" b="0">
-                <a:solidFill>
-                  <a:srgbClr val="9AA3AB"/>
-                </a:solidFill>
-              </a:rPr>
-              <a:t>Measure, then algorithm, then data</a:t>
-            </a:r>
+          <a:p>
+            <a:pPr indent="-330200" lvl="0" marL="457200" rtl="0" algn="l">
+              <a:spcBef>
+                <a:spcPts val="0"/>
+              </a:spcBef>
+              <a:spcAft>
+                <a:spcPts val="0"/>
+              </a:spcAft>
+              <a:buSzPts val="1600"/>
+              <a:buChar char="●"/>
+            </a:pPr>
+            <a:r>
+              <a:rPr lang="en"/>
+              <a:t>Does anything check every pair, or search every entity?</a:t>
+            </a:r>
+            <a:endParaRPr/>
+          </a:p>
+          <a:p>
+            <a:pPr indent="-330200" lvl="0" marL="457200" rtl="0" algn="l">
+              <a:spcBef>
+                <a:spcPts val="0"/>
+              </a:spcBef>
+              <a:spcAft>
+                <a:spcPts val="0"/>
+              </a:spcAft>
+              <a:buSzPts val="1600"/>
+              <a:buChar char="●"/>
+            </a:pPr>
+            <a:r>
+              <a:rPr lang="en"/>
+              <a:t>Does your game allocate every frame? Where?</a:t>
+            </a:r>
+            <a:endParaRPr/>
+          </a:p>
+          <a:p>
+            <a:pPr indent="-330200" lvl="0" marL="457200" rtl="0" algn="l">
+              <a:spcBef>
+                <a:spcPts val="0"/>
+              </a:spcBef>
+              <a:spcAft>
+                <a:spcPts val="0"/>
+              </a:spcAft>
+              <a:buSzPts val="1600"/>
+              <a:buChar char="●"/>
+            </a:pPr>
+            <a:r>
+              <a:rPr lang="en"/>
+              <a:t>Is there anything there are thousands of?</a:t>
+            </a:r>
+            <a:endParaRPr/>
           </a:p>
         </p:txBody>
       </p:sp>
@@ -19694,6 +19027,673 @@
   <p:clrMapOvr>
     <a:masterClrMapping/>
   </p:clrMapOvr>
+  <p:timing>
+    <p:tnLst>
+      <p:par>
+        <p:cTn dur="indefinite" nodeType="tmRoot" restart="never">
+          <p:childTnLst>
+            <p:seq concurrent="1" nextAc="seek">
+              <p:cTn dur="indefinite" id="2" nodeType="mainSeq">
+                <p:childTnLst>
+                  <p:par>
+                    <p:cTn fill="hold">
+                      <p:stCondLst>
+                        <p:cond delay="indefinite"/>
+                      </p:stCondLst>
+                      <p:childTnLst>
+                        <p:par>
+                          <p:cTn fill="hold">
+                            <p:stCondLst>
+                              <p:cond delay="0"/>
+                            </p:stCondLst>
+                            <p:childTnLst>
+                              <p:par>
+                                <p:cTn fill="hold" nodeType="clickEffect" presetClass="entr" presetID="1" presetSubtype="0">
+                                  <p:stCondLst>
+                                    <p:cond delay="0"/>
+                                  </p:stCondLst>
+                                  <p:childTnLst>
+                                    <p:set>
+                                      <p:cBhvr>
+                                        <p:cTn dur="1" fill="hold">
+                                          <p:stCondLst>
+                                            <p:cond delay="0"/>
+                                          </p:stCondLst>
+                                        </p:cTn>
+                                        <p:tgtEl>
+                                          <p:spTgt spid="294">
+                                            <p:txEl>
+                                              <p:pRg end="0" st="0"/>
+                                            </p:txEl>
+                                          </p:spTgt>
+                                        </p:tgtEl>
+                                        <p:attrNameLst>
+                                          <p:attrName>style.visibility</p:attrName>
+                                        </p:attrNameLst>
+                                      </p:cBhvr>
+                                      <p:to>
+                                        <p:strVal val="visible"/>
+                                      </p:to>
+                                    </p:set>
+                                  </p:childTnLst>
+                                </p:cTn>
+                              </p:par>
+                            </p:childTnLst>
+                          </p:cTn>
+                        </p:par>
+                      </p:childTnLst>
+                    </p:cTn>
+                  </p:par>
+                  <p:par>
+                    <p:cTn fill="hold">
+                      <p:stCondLst>
+                        <p:cond delay="indefinite"/>
+                      </p:stCondLst>
+                      <p:childTnLst>
+                        <p:par>
+                          <p:cTn fill="hold">
+                            <p:stCondLst>
+                              <p:cond delay="0"/>
+                            </p:stCondLst>
+                            <p:childTnLst>
+                              <p:par>
+                                <p:cTn fill="hold" nodeType="clickEffect" presetClass="entr" presetID="1" presetSubtype="0">
+                                  <p:stCondLst>
+                                    <p:cond delay="0"/>
+                                  </p:stCondLst>
+                                  <p:childTnLst>
+                                    <p:set>
+                                      <p:cBhvr>
+                                        <p:cTn dur="1" fill="hold">
+                                          <p:stCondLst>
+                                            <p:cond delay="0"/>
+                                          </p:stCondLst>
+                                        </p:cTn>
+                                        <p:tgtEl>
+                                          <p:spTgt spid="294">
+                                            <p:txEl>
+                                              <p:pRg end="1" st="1"/>
+                                            </p:txEl>
+                                          </p:spTgt>
+                                        </p:tgtEl>
+                                        <p:attrNameLst>
+                                          <p:attrName>style.visibility</p:attrName>
+                                        </p:attrNameLst>
+                                      </p:cBhvr>
+                                      <p:to>
+                                        <p:strVal val="visible"/>
+                                      </p:to>
+                                    </p:set>
+                                  </p:childTnLst>
+                                </p:cTn>
+                              </p:par>
+                            </p:childTnLst>
+                          </p:cTn>
+                        </p:par>
+                      </p:childTnLst>
+                    </p:cTn>
+                  </p:par>
+                  <p:par>
+                    <p:cTn fill="hold">
+                      <p:stCondLst>
+                        <p:cond delay="indefinite"/>
+                      </p:stCondLst>
+                      <p:childTnLst>
+                        <p:par>
+                          <p:cTn fill="hold">
+                            <p:stCondLst>
+                              <p:cond delay="0"/>
+                            </p:stCondLst>
+                            <p:childTnLst>
+                              <p:par>
+                                <p:cTn fill="hold" nodeType="clickEffect" presetClass="entr" presetID="1" presetSubtype="0">
+                                  <p:stCondLst>
+                                    <p:cond delay="0"/>
+                                  </p:stCondLst>
+                                  <p:childTnLst>
+                                    <p:set>
+                                      <p:cBhvr>
+                                        <p:cTn dur="1" fill="hold">
+                                          <p:stCondLst>
+                                            <p:cond delay="0"/>
+                                          </p:stCondLst>
+                                        </p:cTn>
+                                        <p:tgtEl>
+                                          <p:spTgt spid="294">
+                                            <p:txEl>
+                                              <p:pRg end="2" st="2"/>
+                                            </p:txEl>
+                                          </p:spTgt>
+                                        </p:tgtEl>
+                                        <p:attrNameLst>
+                                          <p:attrName>style.visibility</p:attrName>
+                                        </p:attrNameLst>
+                                      </p:cBhvr>
+                                      <p:to>
+                                        <p:strVal val="visible"/>
+                                      </p:to>
+                                    </p:set>
+                                  </p:childTnLst>
+                                </p:cTn>
+                              </p:par>
+                            </p:childTnLst>
+                          </p:cTn>
+                        </p:par>
+                      </p:childTnLst>
+                    </p:cTn>
+                  </p:par>
+                  <p:par>
+                    <p:cTn fill="hold">
+                      <p:stCondLst>
+                        <p:cond delay="indefinite"/>
+                      </p:stCondLst>
+                      <p:childTnLst>
+                        <p:par>
+                          <p:cTn fill="hold">
+                            <p:stCondLst>
+                              <p:cond delay="0"/>
+                            </p:stCondLst>
+                            <p:childTnLst>
+                              <p:par>
+                                <p:cTn fill="hold" nodeType="clickEffect" presetClass="entr" presetID="1" presetSubtype="0">
+                                  <p:stCondLst>
+                                    <p:cond delay="0"/>
+                                  </p:stCondLst>
+                                  <p:childTnLst>
+                                    <p:set>
+                                      <p:cBhvr>
+                                        <p:cTn dur="1" fill="hold">
+                                          <p:stCondLst>
+                                            <p:cond delay="0"/>
+                                          </p:stCondLst>
+                                        </p:cTn>
+                                        <p:tgtEl>
+                                          <p:spTgt spid="294">
+                                            <p:txEl>
+                                              <p:pRg end="3" st="3"/>
+                                            </p:txEl>
+                                          </p:spTgt>
+                                        </p:tgtEl>
+                                        <p:attrNameLst>
+                                          <p:attrName>style.visibility</p:attrName>
+                                        </p:attrNameLst>
+                                      </p:cBhvr>
+                                      <p:to>
+                                        <p:strVal val="visible"/>
+                                      </p:to>
+                                    </p:set>
+                                  </p:childTnLst>
+                                </p:cTn>
+                              </p:par>
+                            </p:childTnLst>
+                          </p:cTn>
+                        </p:par>
+                      </p:childTnLst>
+                    </p:cTn>
+                  </p:par>
+                  <p:par>
+                    <p:cTn fill="hold">
+                      <p:stCondLst>
+                        <p:cond delay="indefinite"/>
+                      </p:stCondLst>
+                      <p:childTnLst>
+                        <p:par>
+                          <p:cTn fill="hold">
+                            <p:stCondLst>
+                              <p:cond delay="0"/>
+                            </p:stCondLst>
+                            <p:childTnLst>
+                              <p:par>
+                                <p:cTn fill="hold" nodeType="clickEffect" presetClass="entr" presetID="1" presetSubtype="0">
+                                  <p:stCondLst>
+                                    <p:cond delay="0"/>
+                                  </p:stCondLst>
+                                  <p:childTnLst>
+                                    <p:set>
+                                      <p:cBhvr>
+                                        <p:cTn dur="1" fill="hold">
+                                          <p:stCondLst>
+                                            <p:cond delay="0"/>
+                                          </p:stCondLst>
+                                        </p:cTn>
+                                        <p:tgtEl>
+                                          <p:spTgt spid="294">
+                                            <p:txEl>
+                                              <p:pRg end="4" st="4"/>
+                                            </p:txEl>
+                                          </p:spTgt>
+                                        </p:tgtEl>
+                                        <p:attrNameLst>
+                                          <p:attrName>style.visibility</p:attrName>
+                                        </p:attrNameLst>
+                                      </p:cBhvr>
+                                      <p:to>
+                                        <p:strVal val="visible"/>
+                                      </p:to>
+                                    </p:set>
+                                  </p:childTnLst>
+                                </p:cTn>
+                              </p:par>
+                            </p:childTnLst>
+                          </p:cTn>
+                        </p:par>
+                      </p:childTnLst>
+                    </p:cTn>
+                  </p:par>
+                  <p:par>
+                    <p:cTn fill="hold">
+                      <p:stCondLst>
+                        <p:cond delay="indefinite"/>
+                      </p:stCondLst>
+                      <p:childTnLst>
+                        <p:par>
+                          <p:cTn fill="hold">
+                            <p:stCondLst>
+                              <p:cond delay="0"/>
+                            </p:stCondLst>
+                            <p:childTnLst>
+                              <p:par>
+                                <p:cTn fill="hold" nodeType="clickEffect" presetClass="entr" presetID="1" presetSubtype="0">
+                                  <p:stCondLst>
+                                    <p:cond delay="0"/>
+                                  </p:stCondLst>
+                                  <p:childTnLst>
+                                    <p:set>
+                                      <p:cBhvr>
+                                        <p:cTn dur="1" fill="hold">
+                                          <p:stCondLst>
+                                            <p:cond delay="0"/>
+                                          </p:stCondLst>
+                                        </p:cTn>
+                                        <p:tgtEl>
+                                          <p:spTgt spid="294">
+                                            <p:txEl>
+                                              <p:pRg end="5" st="5"/>
+                                            </p:txEl>
+                                          </p:spTgt>
+                                        </p:tgtEl>
+                                        <p:attrNameLst>
+                                          <p:attrName>style.visibility</p:attrName>
+                                        </p:attrNameLst>
+                                      </p:cBhvr>
+                                      <p:to>
+                                        <p:strVal val="visible"/>
+                                      </p:to>
+                                    </p:set>
+                                  </p:childTnLst>
+                                </p:cTn>
+                              </p:par>
+                            </p:childTnLst>
+                          </p:cTn>
+                        </p:par>
+                      </p:childTnLst>
+                    </p:cTn>
+                  </p:par>
+                  <p:par>
+                    <p:cTn fill="hold">
+                      <p:stCondLst>
+                        <p:cond delay="indefinite"/>
+                      </p:stCondLst>
+                      <p:childTnLst>
+                        <p:par>
+                          <p:cTn fill="hold">
+                            <p:stCondLst>
+                              <p:cond delay="0"/>
+                            </p:stCondLst>
+                            <p:childTnLst>
+                              <p:par>
+                                <p:cTn fill="hold" nodeType="clickEffect" presetClass="entr" presetID="1" presetSubtype="0">
+                                  <p:stCondLst>
+                                    <p:cond delay="0"/>
+                                  </p:stCondLst>
+                                  <p:childTnLst>
+                                    <p:set>
+                                      <p:cBhvr>
+                                        <p:cTn dur="1" fill="hold">
+                                          <p:stCondLst>
+                                            <p:cond delay="0"/>
+                                          </p:stCondLst>
+                                        </p:cTn>
+                                        <p:tgtEl>
+                                          <p:spTgt spid="294">
+                                            <p:txEl>
+                                              <p:pRg end="6" st="6"/>
+                                            </p:txEl>
+                                          </p:spTgt>
+                                        </p:tgtEl>
+                                        <p:attrNameLst>
+                                          <p:attrName>style.visibility</p:attrName>
+                                        </p:attrNameLst>
+                                      </p:cBhvr>
+                                      <p:to>
+                                        <p:strVal val="visible"/>
+                                      </p:to>
+                                    </p:set>
+                                  </p:childTnLst>
+                                </p:cTn>
+                              </p:par>
+                            </p:childTnLst>
+                          </p:cTn>
+                        </p:par>
+                      </p:childTnLst>
+                    </p:cTn>
+                  </p:par>
+                  <p:par>
+                    <p:cTn fill="hold">
+                      <p:stCondLst>
+                        <p:cond delay="indefinite"/>
+                      </p:stCondLst>
+                      <p:childTnLst>
+                        <p:par>
+                          <p:cTn fill="hold">
+                            <p:stCondLst>
+                              <p:cond delay="0"/>
+                            </p:stCondLst>
+                            <p:childTnLst>
+                              <p:par>
+                                <p:cTn fill="hold" nodeType="clickEffect" presetClass="entr" presetID="1" presetSubtype="0">
+                                  <p:stCondLst>
+                                    <p:cond delay="0"/>
+                                  </p:stCondLst>
+                                  <p:childTnLst>
+                                    <p:set>
+                                      <p:cBhvr>
+                                        <p:cTn dur="1" fill="hold">
+                                          <p:stCondLst>
+                                            <p:cond delay="0"/>
+                                          </p:stCondLst>
+                                        </p:cTn>
+                                        <p:tgtEl>
+                                          <p:spTgt spid="294">
+                                            <p:txEl>
+                                              <p:pRg end="7" st="7"/>
+                                            </p:txEl>
+                                          </p:spTgt>
+                                        </p:tgtEl>
+                                        <p:attrNameLst>
+                                          <p:attrName>style.visibility</p:attrName>
+                                        </p:attrNameLst>
+                                      </p:cBhvr>
+                                      <p:to>
+                                        <p:strVal val="visible"/>
+                                      </p:to>
+                                    </p:set>
+                                  </p:childTnLst>
+                                </p:cTn>
+                              </p:par>
+                            </p:childTnLst>
+                          </p:cTn>
+                        </p:par>
+                      </p:childTnLst>
+                    </p:cTn>
+                  </p:par>
+                  <p:par>
+                    <p:cTn fill="hold">
+                      <p:stCondLst>
+                        <p:cond delay="indefinite"/>
+                      </p:stCondLst>
+                      <p:childTnLst>
+                        <p:par>
+                          <p:cTn fill="hold">
+                            <p:stCondLst>
+                              <p:cond delay="0"/>
+                            </p:stCondLst>
+                            <p:childTnLst>
+                              <p:par>
+                                <p:cTn fill="hold" nodeType="clickEffect" presetClass="entr" presetID="1" presetSubtype="0">
+                                  <p:stCondLst>
+                                    <p:cond delay="0"/>
+                                  </p:stCondLst>
+                                  <p:childTnLst>
+                                    <p:set>
+                                      <p:cBhvr>
+                                        <p:cTn dur="1" fill="hold">
+                                          <p:stCondLst>
+                                            <p:cond delay="0"/>
+                                          </p:stCondLst>
+                                        </p:cTn>
+                                        <p:tgtEl>
+                                          <p:spTgt spid="294">
+                                            <p:txEl>
+                                              <p:pRg end="8" st="8"/>
+                                            </p:txEl>
+                                          </p:spTgt>
+                                        </p:tgtEl>
+                                        <p:attrNameLst>
+                                          <p:attrName>style.visibility</p:attrName>
+                                        </p:attrNameLst>
+                                      </p:cBhvr>
+                                      <p:to>
+                                        <p:strVal val="visible"/>
+                                      </p:to>
+                                    </p:set>
+                                  </p:childTnLst>
+                                </p:cTn>
+                              </p:par>
+                            </p:childTnLst>
+                          </p:cTn>
+                        </p:par>
+                      </p:childTnLst>
+                    </p:cTn>
+                  </p:par>
+                  <p:par>
+                    <p:cTn fill="hold">
+                      <p:stCondLst>
+                        <p:cond delay="indefinite"/>
+                      </p:stCondLst>
+                      <p:childTnLst>
+                        <p:par>
+                          <p:cTn fill="hold">
+                            <p:stCondLst>
+                              <p:cond delay="0"/>
+                            </p:stCondLst>
+                            <p:childTnLst>
+                              <p:par>
+                                <p:cTn fill="hold" nodeType="clickEffect" presetClass="entr" presetID="1" presetSubtype="0">
+                                  <p:stCondLst>
+                                    <p:cond delay="0"/>
+                                  </p:stCondLst>
+                                  <p:childTnLst>
+                                    <p:set>
+                                      <p:cBhvr>
+                                        <p:cTn dur="1" fill="hold">
+                                          <p:stCondLst>
+                                            <p:cond delay="0"/>
+                                          </p:stCondLst>
+                                        </p:cTn>
+                                        <p:tgtEl>
+                                          <p:spTgt spid="294">
+                                            <p:txEl>
+                                              <p:pRg end="9" st="9"/>
+                                            </p:txEl>
+                                          </p:spTgt>
+                                        </p:tgtEl>
+                                        <p:attrNameLst>
+                                          <p:attrName>style.visibility</p:attrName>
+                                        </p:attrNameLst>
+                                      </p:cBhvr>
+                                      <p:to>
+                                        <p:strVal val="visible"/>
+                                      </p:to>
+                                    </p:set>
+                                  </p:childTnLst>
+                                </p:cTn>
+                              </p:par>
+                            </p:childTnLst>
+                          </p:cTn>
+                        </p:par>
+                      </p:childTnLst>
+                    </p:cTn>
+                  </p:par>
+                  <p:par>
+                    <p:cTn fill="hold">
+                      <p:stCondLst>
+                        <p:cond delay="indefinite"/>
+                      </p:stCondLst>
+                      <p:childTnLst>
+                        <p:par>
+                          <p:cTn fill="hold">
+                            <p:stCondLst>
+                              <p:cond delay="0"/>
+                            </p:stCondLst>
+                            <p:childTnLst>
+                              <p:par>
+                                <p:cTn fill="hold" nodeType="clickEffect" presetClass="entr" presetID="1" presetSubtype="0">
+                                  <p:stCondLst>
+                                    <p:cond delay="0"/>
+                                  </p:stCondLst>
+                                  <p:childTnLst>
+                                    <p:set>
+                                      <p:cBhvr>
+                                        <p:cTn dur="1" fill="hold">
+                                          <p:stCondLst>
+                                            <p:cond delay="0"/>
+                                          </p:stCondLst>
+                                        </p:cTn>
+                                        <p:tgtEl>
+                                          <p:spTgt spid="294">
+                                            <p:txEl>
+                                              <p:pRg end="10" st="10"/>
+                                            </p:txEl>
+                                          </p:spTgt>
+                                        </p:tgtEl>
+                                        <p:attrNameLst>
+                                          <p:attrName>style.visibility</p:attrName>
+                                        </p:attrNameLst>
+                                      </p:cBhvr>
+                                      <p:to>
+                                        <p:strVal val="visible"/>
+                                      </p:to>
+                                    </p:set>
+                                  </p:childTnLst>
+                                </p:cTn>
+                              </p:par>
+                            </p:childTnLst>
+                          </p:cTn>
+                        </p:par>
+                      </p:childTnLst>
+                    </p:cTn>
+                  </p:par>
+                  <p:par>
+                    <p:cTn fill="hold">
+                      <p:stCondLst>
+                        <p:cond delay="indefinite"/>
+                      </p:stCondLst>
+                      <p:childTnLst>
+                        <p:par>
+                          <p:cTn fill="hold">
+                            <p:stCondLst>
+                              <p:cond delay="0"/>
+                            </p:stCondLst>
+                            <p:childTnLst>
+                              <p:par>
+                                <p:cTn fill="hold" nodeType="clickEffect" presetClass="entr" presetID="1" presetSubtype="0">
+                                  <p:stCondLst>
+                                    <p:cond delay="0"/>
+                                  </p:stCondLst>
+                                  <p:childTnLst>
+                                    <p:set>
+                                      <p:cBhvr>
+                                        <p:cTn dur="1" fill="hold">
+                                          <p:stCondLst>
+                                            <p:cond delay="0"/>
+                                          </p:stCondLst>
+                                        </p:cTn>
+                                        <p:tgtEl>
+                                          <p:spTgt spid="294">
+                                            <p:txEl>
+                                              <p:pRg end="11" st="11"/>
+                                            </p:txEl>
+                                          </p:spTgt>
+                                        </p:tgtEl>
+                                        <p:attrNameLst>
+                                          <p:attrName>style.visibility</p:attrName>
+                                        </p:attrNameLst>
+                                      </p:cBhvr>
+                                      <p:to>
+                                        <p:strVal val="visible"/>
+                                      </p:to>
+                                    </p:set>
+                                  </p:childTnLst>
+                                </p:cTn>
+                              </p:par>
+                            </p:childTnLst>
+                          </p:cTn>
+                        </p:par>
+                      </p:childTnLst>
+                    </p:cTn>
+                  </p:par>
+                  <p:par>
+                    <p:cTn fill="hold">
+                      <p:stCondLst>
+                        <p:cond delay="indefinite"/>
+                      </p:stCondLst>
+                      <p:childTnLst>
+                        <p:par>
+                          <p:cTn fill="hold">
+                            <p:stCondLst>
+                              <p:cond delay="0"/>
+                            </p:stCondLst>
+                            <p:childTnLst>
+                              <p:par>
+                                <p:cTn fill="hold" nodeType="clickEffect" presetClass="entr" presetID="1" presetSubtype="0">
+                                  <p:stCondLst>
+                                    <p:cond delay="0"/>
+                                  </p:stCondLst>
+                                  <p:childTnLst>
+                                    <p:set>
+                                      <p:cBhvr>
+                                        <p:cTn dur="1" fill="hold">
+                                          <p:stCondLst>
+                                            <p:cond delay="0"/>
+                                          </p:stCondLst>
+                                        </p:cTn>
+                                        <p:tgtEl>
+                                          <p:spTgt spid="294">
+                                            <p:txEl>
+                                              <p:pRg end="12" st="12"/>
+                                            </p:txEl>
+                                          </p:spTgt>
+                                        </p:tgtEl>
+                                        <p:attrNameLst>
+                                          <p:attrName>style.visibility</p:attrName>
+                                        </p:attrNameLst>
+                                      </p:cBhvr>
+                                      <p:to>
+                                        <p:strVal val="visible"/>
+                                      </p:to>
+                                    </p:set>
+                                  </p:childTnLst>
+                                </p:cTn>
+                              </p:par>
+                            </p:childTnLst>
+                          </p:cTn>
+                        </p:par>
+                      </p:childTnLst>
+                    </p:cTn>
+                  </p:par>
+                </p:childTnLst>
+              </p:cTn>
+              <p:prevCondLst>
+                <p:cond evt="onPrev">
+                  <p:tgtEl>
+                    <p:sldTgt/>
+                  </p:tgtEl>
+                </p:cond>
+              </p:prevCondLst>
+              <p:nextCondLst>
+                <p:cond evt="onNext">
+                  <p:tgtEl>
+                    <p:sldTgt/>
+                  </p:tgtEl>
+                </p:cond>
+              </p:nextCondLst>
+            </p:seq>
+          </p:childTnLst>
+        </p:cTn>
+      </p:par>
+    </p:tnLst>
+  </p:timing>
 </p:sld>
 </file>
 
